--- a/downloads/highst-perioperative-webinar.pptx
+++ b/downloads/highst-perioperative-webinar.pptx
@@ -2,19 +2,25 @@
 <file path=ppt/presentation.xml><?xml version="1.0" encoding="utf-8"?>
 <p:presentation xmlns:p="http://schemas.openxmlformats.org/presentationml/2006/main">
   <p:sldMasterIdLst>
-    <p:sldMasterId xmlns:r="http://schemas.openxmlformats.org/officeDocument/2006/relationships" id="2147483648" r:id="Ra1b77b4276d649d8"/>
+    <p:sldMasterId xmlns:r="http://schemas.openxmlformats.org/officeDocument/2006/relationships" id="2147483648" r:id="Rcdac964020c64f02"/>
   </p:sldMasterIdLst>
   <p:notesMasterIdLst>
-    <p:notesMasterId xmlns:r="http://schemas.openxmlformats.org/officeDocument/2006/relationships" r:id="Rf6bfd9b97a6f4c62"/>
+    <p:notesMasterId xmlns:r="http://schemas.openxmlformats.org/officeDocument/2006/relationships" r:id="Rd381d0ac93c64cdf"/>
   </p:notesMasterIdLst>
   <p:sldIdLst>
-    <p:sldId xmlns:r="http://schemas.openxmlformats.org/officeDocument/2006/relationships" id="256" r:id="R743a381c300746d9"/>
-    <p:sldId xmlns:r="http://schemas.openxmlformats.org/officeDocument/2006/relationships" id="257" r:id="Refe8d1ffef4e445a"/>
-    <p:sldId xmlns:r="http://schemas.openxmlformats.org/officeDocument/2006/relationships" id="258" r:id="R2e4ae374c1b8496e"/>
-    <p:sldId xmlns:r="http://schemas.openxmlformats.org/officeDocument/2006/relationships" id="259" r:id="Rcdf10e33385e404f"/>
-    <p:sldId xmlns:r="http://schemas.openxmlformats.org/officeDocument/2006/relationships" id="260" r:id="R08a2a253b6ed4c93"/>
-    <p:sldId xmlns:r="http://schemas.openxmlformats.org/officeDocument/2006/relationships" id="261" r:id="R71b9ab3565944f8c"/>
-    <p:sldId xmlns:r="http://schemas.openxmlformats.org/officeDocument/2006/relationships" id="262" r:id="Ra19ba32868e540d5"/>
+    <p:sldId xmlns:r="http://schemas.openxmlformats.org/officeDocument/2006/relationships" id="256" r:id="R883df41215e9476a"/>
+    <p:sldId xmlns:r="http://schemas.openxmlformats.org/officeDocument/2006/relationships" id="257" r:id="R361fe6cafc884a2f"/>
+    <p:sldId xmlns:r="http://schemas.openxmlformats.org/officeDocument/2006/relationships" id="258" r:id="Rd6d9022cc57f4138"/>
+    <p:sldId xmlns:r="http://schemas.openxmlformats.org/officeDocument/2006/relationships" id="259" r:id="R4ebbeac608954932"/>
+    <p:sldId xmlns:r="http://schemas.openxmlformats.org/officeDocument/2006/relationships" id="260" r:id="Ra87306a1b98a4b66"/>
+    <p:sldId xmlns:r="http://schemas.openxmlformats.org/officeDocument/2006/relationships" id="261" r:id="Rc69b21ed0c334032"/>
+    <p:sldId xmlns:r="http://schemas.openxmlformats.org/officeDocument/2006/relationships" id="262" r:id="Rea80cfc2dfc84b1b"/>
+    <p:sldId xmlns:r="http://schemas.openxmlformats.org/officeDocument/2006/relationships" id="263" r:id="R51c65b9b8f614ac9"/>
+    <p:sldId xmlns:r="http://schemas.openxmlformats.org/officeDocument/2006/relationships" id="264" r:id="R241d719947c64e27"/>
+    <p:sldId xmlns:r="http://schemas.openxmlformats.org/officeDocument/2006/relationships" id="265" r:id="R1b1ccb8d61c44eec"/>
+    <p:sldId xmlns:r="http://schemas.openxmlformats.org/officeDocument/2006/relationships" id="266" r:id="R5f5c0bde7cbf42f9"/>
+    <p:sldId xmlns:r="http://schemas.openxmlformats.org/officeDocument/2006/relationships" id="267" r:id="R45e9c3bf6e5c4148"/>
+    <p:sldId xmlns:r="http://schemas.openxmlformats.org/officeDocument/2006/relationships" id="268" r:id="Ra68bfba97e004b4d"/>
   </p:sldIdLst>
   <p:sldSz cx="12192000" cy="6858000"/>
   <p:notesSz cx="6858000" cy="9144000"/>
@@ -204,16 +210,16 @@
         <a:srgbClr val="96607D"/>
       </a:folHlink>
     </a:clrScheme>
-    <a:fontScheme name="Office">
+    <a:fontScheme name="">
       <a:majorFont>
-        <a:latin typeface="Calibri Light"/>
-        <a:ea typeface="Calibri Light"/>
-        <a:cs typeface="Calibri Light"/>
+        <a:latin typeface="Aptos"/>
+        <a:ea typeface=""/>
+        <a:cs typeface=""/>
       </a:majorFont>
       <a:minorFont>
-        <a:latin typeface="Calibri"/>
-        <a:ea typeface="Calibri"/>
-        <a:cs typeface="Calibri"/>
+        <a:latin typeface="Aptos"/>
+        <a:ea typeface=""/>
+        <a:cs typeface=""/>
       </a:minorFont>
     </a:fontScheme>
     <a:fmtScheme name="ChatGPT">
@@ -448,7 +454,302 @@
           <a:lstStyle xmlns:a="http://schemas.openxmlformats.org/drawingml/2006/main"/>
           <a:p xmlns:a="http://schemas.openxmlformats.org/drawingml/2006/main">
             <a:r>
-              <a:t>구진모 원장님 발표. 베트남 MegaDerm 웨비나, 2026년 10월 21일.</a:t>
+              <a:t>Jinmo Koo, HIGHST Urology. Vietnam MegaDerm Webinar, 21 October 2026.</a:t>
+            </a:r>
+          </a:p>
+        </p:txBody>
+      </p:sp>
+      <p:sp>
+        <p:nvSpPr>
+          <p:cNvPr id="4" name="Slide Number Placeholder 3"/>
+          <p:cNvSpPr>
+            <a:spLocks xmlns:a="http://schemas.openxmlformats.org/drawingml/2006/main" noGrp="1"/>
+          </p:cNvSpPr>
+          <p:nvPr>
+            <p:ph type="sldNum" idx="5"/>
+          </p:nvPr>
+        </p:nvSpPr>
+        <p:spPr/>
+        <p:txBody>
+          <a:bodyPr xmlns:a="http://schemas.openxmlformats.org/drawingml/2006/main"/>
+          <a:lstStyle xmlns:a="http://schemas.openxmlformats.org/drawingml/2006/main"/>
+          <a:p xmlns:a="http://schemas.openxmlformats.org/drawingml/2006/main"/>
+        </p:txBody>
+      </p:sp>
+    </p:spTree>
+  </p:cSld>
+  <p:clrMapOvr>
+    <a:masterClrMapping xmlns:a="http://schemas.openxmlformats.org/drawingml/2006/main"/>
+  </p:clrMapOvr>
+</p:notes>
+</file>
+
+<file path=ppt/notesSlides/notesSlide10.xml><?xml version="1.0" encoding="utf-8"?>
+<p:notes xmlns:p="http://schemas.openxmlformats.org/presentationml/2006/main">
+  <p:cSld>
+    <p:spTree>
+      <p:nvGrpSpPr>
+        <p:cNvPr id="1" name=""/>
+        <p:cNvGrpSpPr/>
+        <p:nvPr/>
+      </p:nvGrpSpPr>
+      <p:grpSpPr>
+        <a:xfrm xmlns:a="http://schemas.openxmlformats.org/drawingml/2006/main"/>
+      </p:grpSpPr>
+      <p:sp>
+        <p:nvSpPr>
+          <p:cNvPr id="2" name="Slide Image Placeholder 1"/>
+          <p:cNvSpPr>
+            <a:spLocks xmlns:a="http://schemas.openxmlformats.org/drawingml/2006/main" noGrp="1"/>
+          </p:cNvSpPr>
+          <p:nvPr>
+            <p:ph type="sldImg" idx="0"/>
+          </p:nvPr>
+        </p:nvSpPr>
+        <p:spPr/>
+      </p:sp>
+      <p:sp>
+        <p:nvSpPr>
+          <p:cNvPr id="3" name="Notes Placeholder 2"/>
+          <p:cNvSpPr>
+            <a:spLocks xmlns:a="http://schemas.openxmlformats.org/drawingml/2006/main" noGrp="1"/>
+          </p:cNvSpPr>
+          <p:nvPr>
+            <p:ph type="body" idx="1"/>
+          </p:nvPr>
+        </p:nvSpPr>
+        <p:spPr/>
+        <p:txBody>
+          <a:bodyPr xmlns:a="http://schemas.openxmlformats.org/drawingml/2006/main"/>
+          <a:lstStyle xmlns:a="http://schemas.openxmlformats.org/drawingml/2006/main"/>
+          <a:p xmlns:a="http://schemas.openxmlformats.org/drawingml/2006/main">
+            <a:r>
+              <a:t>Case 5: Contour Step-off Correction.</a:t>
+            </a:r>
+          </a:p>
+        </p:txBody>
+      </p:sp>
+      <p:sp>
+        <p:nvSpPr>
+          <p:cNvPr id="4" name="Slide Number Placeholder 3"/>
+          <p:cNvSpPr>
+            <a:spLocks xmlns:a="http://schemas.openxmlformats.org/drawingml/2006/main" noGrp="1"/>
+          </p:cNvSpPr>
+          <p:nvPr>
+            <p:ph type="sldNum" idx="5"/>
+          </p:nvPr>
+        </p:nvSpPr>
+        <p:spPr/>
+        <p:txBody>
+          <a:bodyPr xmlns:a="http://schemas.openxmlformats.org/drawingml/2006/main"/>
+          <a:lstStyle xmlns:a="http://schemas.openxmlformats.org/drawingml/2006/main"/>
+          <a:p xmlns:a="http://schemas.openxmlformats.org/drawingml/2006/main"/>
+        </p:txBody>
+      </p:sp>
+    </p:spTree>
+  </p:cSld>
+  <p:clrMapOvr>
+    <a:masterClrMapping xmlns:a="http://schemas.openxmlformats.org/drawingml/2006/main"/>
+  </p:clrMapOvr>
+</p:notes>
+</file>
+
+<file path=ppt/notesSlides/notesSlide11.xml><?xml version="1.0" encoding="utf-8"?>
+<p:notes xmlns:p="http://schemas.openxmlformats.org/presentationml/2006/main">
+  <p:cSld>
+    <p:spTree>
+      <p:nvGrpSpPr>
+        <p:cNvPr id="1" name=""/>
+        <p:cNvGrpSpPr/>
+        <p:nvPr/>
+      </p:nvGrpSpPr>
+      <p:grpSpPr>
+        <a:xfrm xmlns:a="http://schemas.openxmlformats.org/drawingml/2006/main"/>
+      </p:grpSpPr>
+      <p:sp>
+        <p:nvSpPr>
+          <p:cNvPr id="2" name="Slide Image Placeholder 1"/>
+          <p:cNvSpPr>
+            <a:spLocks xmlns:a="http://schemas.openxmlformats.org/drawingml/2006/main" noGrp="1"/>
+          </p:cNvSpPr>
+          <p:nvPr>
+            <p:ph type="sldImg" idx="0"/>
+          </p:nvPr>
+        </p:nvSpPr>
+        <p:spPr/>
+      </p:sp>
+      <p:sp>
+        <p:nvSpPr>
+          <p:cNvPr id="3" name="Notes Placeholder 2"/>
+          <p:cNvSpPr>
+            <a:spLocks xmlns:a="http://schemas.openxmlformats.org/drawingml/2006/main" noGrp="1"/>
+          </p:cNvSpPr>
+          <p:nvPr>
+            <p:ph type="body" idx="1"/>
+          </p:nvPr>
+        </p:nvSpPr>
+        <p:spPr/>
+        <p:txBody>
+          <a:bodyPr xmlns:a="http://schemas.openxmlformats.org/drawingml/2006/main"/>
+          <a:lstStyle xmlns:a="http://schemas.openxmlformats.org/drawingml/2006/main"/>
+          <a:p xmlns:a="http://schemas.openxmlformats.org/drawingml/2006/main">
+            <a:r>
+              <a:t>These categories are reported in published ADM augmentation literature. They do not represent HIGHST or MegaDerm-specific outcome data. No incidence rates are extrapolated to HIGHST.</a:t>
+            </a:r>
+          </a:p>
+          <a:p xmlns:a="http://schemas.openxmlformats.org/drawingml/2006/main">
+            <a:r>
+              <a:t/>
+            </a:r>
+          </a:p>
+          <a:p xmlns:a="http://schemas.openxmlformats.org/drawingml/2006/main">
+            <a:r>
+              <a:t>Sources</a:t>
+            </a:r>
+          </a:p>
+          <a:p xmlns:a="http://schemas.openxmlformats.org/drawingml/2006/main">
+            <a:r>
+              <a:t>https://pubmed.ncbi.nlm.nih.gov/31420614/</a:t>
+            </a:r>
+          </a:p>
+        </p:txBody>
+      </p:sp>
+      <p:sp>
+        <p:nvSpPr>
+          <p:cNvPr id="4" name="Slide Number Placeholder 3"/>
+          <p:cNvSpPr>
+            <a:spLocks xmlns:a="http://schemas.openxmlformats.org/drawingml/2006/main" noGrp="1"/>
+          </p:cNvSpPr>
+          <p:nvPr>
+            <p:ph type="sldNum" idx="5"/>
+          </p:nvPr>
+        </p:nvSpPr>
+        <p:spPr/>
+        <p:txBody>
+          <a:bodyPr xmlns:a="http://schemas.openxmlformats.org/drawingml/2006/main"/>
+          <a:lstStyle xmlns:a="http://schemas.openxmlformats.org/drawingml/2006/main"/>
+          <a:p xmlns:a="http://schemas.openxmlformats.org/drawingml/2006/main"/>
+        </p:txBody>
+      </p:sp>
+    </p:spTree>
+  </p:cSld>
+  <p:clrMapOvr>
+    <a:masterClrMapping xmlns:a="http://schemas.openxmlformats.org/drawingml/2006/main"/>
+  </p:clrMapOvr>
+</p:notes>
+</file>
+
+<file path=ppt/notesSlides/notesSlide12.xml><?xml version="1.0" encoding="utf-8"?>
+<p:notes xmlns:p="http://schemas.openxmlformats.org/presentationml/2006/main">
+  <p:cSld>
+    <p:spTree>
+      <p:nvGrpSpPr>
+        <p:cNvPr id="1" name=""/>
+        <p:cNvGrpSpPr/>
+        <p:nvPr/>
+      </p:nvGrpSpPr>
+      <p:grpSpPr>
+        <a:xfrm xmlns:a="http://schemas.openxmlformats.org/drawingml/2006/main"/>
+      </p:grpSpPr>
+      <p:sp>
+        <p:nvSpPr>
+          <p:cNvPr id="2" name="Slide Image Placeholder 1"/>
+          <p:cNvSpPr>
+            <a:spLocks xmlns:a="http://schemas.openxmlformats.org/drawingml/2006/main" noGrp="1"/>
+          </p:cNvSpPr>
+          <p:nvPr>
+            <p:ph type="sldImg" idx="0"/>
+          </p:nvPr>
+        </p:nvSpPr>
+        <p:spPr/>
+      </p:sp>
+      <p:sp>
+        <p:nvSpPr>
+          <p:cNvPr id="3" name="Notes Placeholder 2"/>
+          <p:cNvSpPr>
+            <a:spLocks xmlns:a="http://schemas.openxmlformats.org/drawingml/2006/main" noGrp="1"/>
+          </p:cNvSpPr>
+          <p:nvPr>
+            <p:ph type="body" idx="1"/>
+          </p:nvPr>
+        </p:nvSpPr>
+        <p:spPr/>
+        <p:txBody>
+          <a:bodyPr xmlns:a="http://schemas.openxmlformats.org/drawingml/2006/main"/>
+          <a:lstStyle xmlns:a="http://schemas.openxmlformats.org/drawingml/2006/main"/>
+          <a:p xmlns:a="http://schemas.openxmlformats.org/drawingml/2006/main">
+            <a:r>
+              <a:t>Postoperative care and dressing technique.</a:t>
+            </a:r>
+          </a:p>
+        </p:txBody>
+      </p:sp>
+      <p:sp>
+        <p:nvSpPr>
+          <p:cNvPr id="4" name="Slide Number Placeholder 3"/>
+          <p:cNvSpPr>
+            <a:spLocks xmlns:a="http://schemas.openxmlformats.org/drawingml/2006/main" noGrp="1"/>
+          </p:cNvSpPr>
+          <p:nvPr>
+            <p:ph type="sldNum" idx="5"/>
+          </p:nvPr>
+        </p:nvSpPr>
+        <p:spPr/>
+        <p:txBody>
+          <a:bodyPr xmlns:a="http://schemas.openxmlformats.org/drawingml/2006/main"/>
+          <a:lstStyle xmlns:a="http://schemas.openxmlformats.org/drawingml/2006/main"/>
+          <a:p xmlns:a="http://schemas.openxmlformats.org/drawingml/2006/main"/>
+        </p:txBody>
+      </p:sp>
+    </p:spTree>
+  </p:cSld>
+  <p:clrMapOvr>
+    <a:masterClrMapping xmlns:a="http://schemas.openxmlformats.org/drawingml/2006/main"/>
+  </p:clrMapOvr>
+</p:notes>
+</file>
+
+<file path=ppt/notesSlides/notesSlide13.xml><?xml version="1.0" encoding="utf-8"?>
+<p:notes xmlns:p="http://schemas.openxmlformats.org/presentationml/2006/main">
+  <p:cSld>
+    <p:spTree>
+      <p:nvGrpSpPr>
+        <p:cNvPr id="1" name=""/>
+        <p:cNvGrpSpPr/>
+        <p:nvPr/>
+      </p:nvGrpSpPr>
+      <p:grpSpPr>
+        <a:xfrm xmlns:a="http://schemas.openxmlformats.org/drawingml/2006/main"/>
+      </p:grpSpPr>
+      <p:sp>
+        <p:nvSpPr>
+          <p:cNvPr id="2" name="Slide Image Placeholder 1"/>
+          <p:cNvSpPr>
+            <a:spLocks xmlns:a="http://schemas.openxmlformats.org/drawingml/2006/main" noGrp="1"/>
+          </p:cNvSpPr>
+          <p:nvPr>
+            <p:ph type="sldImg" idx="0"/>
+          </p:nvPr>
+        </p:nvSpPr>
+        <p:spPr/>
+      </p:sp>
+      <p:sp>
+        <p:nvSpPr>
+          <p:cNvPr id="3" name="Notes Placeholder 2"/>
+          <p:cNvSpPr>
+            <a:spLocks xmlns:a="http://schemas.openxmlformats.org/drawingml/2006/main" noGrp="1"/>
+          </p:cNvSpPr>
+          <p:nvPr>
+            <p:ph type="body" idx="1"/>
+          </p:nvPr>
+        </p:nvSpPr>
+        <p:spPr/>
+        <p:txBody>
+          <a:bodyPr xmlns:a="http://schemas.openxmlformats.org/drawingml/2006/main"/>
+          <a:lstStyle xmlns:a="http://schemas.openxmlformats.org/drawingml/2006/main"/>
+          <a:p xmlns:a="http://schemas.openxmlformats.org/drawingml/2006/main">
+            <a:r>
+              <a:t>Thank you.</a:t>
             </a:r>
           </a:p>
         </p:txBody>
@@ -518,7 +819,7 @@
           <a:lstStyle xmlns:a="http://schemas.openxmlformats.org/drawingml/2006/main"/>
           <a:p xmlns:a="http://schemas.openxmlformats.org/drawingml/2006/main">
             <a:r>
-              <a:t>기존에 전달받은 검사 범주: 간수치, 당수치, 염증수치, 성병 검사. 혈액검사·소변검사의 정확한 검사명 목록을 받으면 원문대로 정리합니다. 개별 항목을 혈액/소변 검사로 임의 배정하지 않습니다.</a:t>
+              <a:t>Jinmo Koo, HIGHST Urology.</a:t>
             </a:r>
           </a:p>
         </p:txBody>
@@ -588,7 +889,22 @@
           <a:lstStyle xmlns:a="http://schemas.openxmlformats.org/drawingml/2006/main"/>
           <a:p xmlns:a="http://schemas.openxmlformats.org/drawingml/2006/main">
             <a:r>
-              <a:t>쉐이빙과 드랩 장면을 짧게 소개합니다.</a:t>
+              <a:t>MegaDerm is a sheet acellular dermal matrix. HIGHST stocks hydrated and freeze-dried types. The stated thickness and sizes describe HIGHST's inventory. MegaFill is a micronized form of acellular dermal matrix. The photograph is supplied by HIGHST. Individual packages are not assigned type labels.</a:t>
+            </a:r>
+          </a:p>
+          <a:p xmlns:a="http://schemas.openxmlformats.org/drawingml/2006/main">
+            <a:r>
+              <a:t/>
+            </a:r>
+          </a:p>
+          <a:p xmlns:a="http://schemas.openxmlformats.org/drawingml/2006/main">
+            <a:r>
+              <a:t>Sources</a:t>
+            </a:r>
+          </a:p>
+          <a:p xmlns:a="http://schemas.openxmlformats.org/drawingml/2006/main">
+            <a:r>
+              <a:t>https://lncbio.co.kr/theme/basic/images/L%26CBIO_catalog.pdf</a:t>
             </a:r>
           </a:p>
         </p:txBody>
@@ -658,7 +974,22 @@
           <a:lstStyle xmlns:a="http://schemas.openxmlformats.org/drawingml/2006/main"/>
           <a:p xmlns:a="http://schemas.openxmlformats.org/drawingml/2006/main">
             <a:r>
-              <a:t>포경수술선 절개 수술영상 10분.</a:t>
+              <a:t>Blood and urine testing: liver function, blood glucose, inflammatory markers and STI screening are the categories provided by HIGHST. Penile biothesiometry assesses vibration perception thresholds and penile sensitivity. It contributes to the clinical assessment rather than establishing a diagnosis of premature ejaculation by itself.</a:t>
+            </a:r>
+          </a:p>
+          <a:p xmlns:a="http://schemas.openxmlformats.org/drawingml/2006/main">
+            <a:r>
+              <a:t/>
+            </a:r>
+          </a:p>
+          <a:p xmlns:a="http://schemas.openxmlformats.org/drawingml/2006/main">
+            <a:r>
+              <a:t>Sources</a:t>
+            </a:r>
+          </a:p>
+          <a:p xmlns:a="http://schemas.openxmlformats.org/drawingml/2006/main">
+            <a:r>
+              <a:t>https://pubmed.ncbi.nlm.nih.gov/28874780/</a:t>
             </a:r>
           </a:p>
         </p:txBody>
@@ -728,7 +1059,7 @@
           <a:lstStyle xmlns:a="http://schemas.openxmlformats.org/drawingml/2006/main"/>
           <a:p xmlns:a="http://schemas.openxmlformats.org/drawingml/2006/main">
             <a:r>
-              <a:t>치골절개 수술영상 10분.</a:t>
+              <a:t>Shaving and draping.</a:t>
             </a:r>
           </a:p>
         </p:txBody>
@@ -798,7 +1129,7 @@
           <a:lstStyle xmlns:a="http://schemas.openxmlformats.org/drawingml/2006/main"/>
           <a:p xmlns:a="http://schemas.openxmlformats.org/drawingml/2006/main">
             <a:r>
-              <a:t>재수술 영상 10분.</a:t>
+              <a:t>Case 1: Pubic Incision.</a:t>
             </a:r>
           </a:p>
         </p:txBody>
@@ -868,7 +1199,147 @@
           <a:lstStyle xmlns:a="http://schemas.openxmlformats.org/drawingml/2006/main"/>
           <a:p xmlns:a="http://schemas.openxmlformats.org/drawingml/2006/main">
             <a:r>
-              <a:t>질의응답.</a:t>
+              <a:t>Case 2: Circumcision-line Incision.</a:t>
+            </a:r>
+          </a:p>
+        </p:txBody>
+      </p:sp>
+      <p:sp>
+        <p:nvSpPr>
+          <p:cNvPr id="4" name="Slide Number Placeholder 3"/>
+          <p:cNvSpPr>
+            <a:spLocks xmlns:a="http://schemas.openxmlformats.org/drawingml/2006/main" noGrp="1"/>
+          </p:cNvSpPr>
+          <p:nvPr>
+            <p:ph type="sldNum" idx="5"/>
+          </p:nvPr>
+        </p:nvSpPr>
+        <p:spPr/>
+        <p:txBody>
+          <a:bodyPr xmlns:a="http://schemas.openxmlformats.org/drawingml/2006/main"/>
+          <a:lstStyle xmlns:a="http://schemas.openxmlformats.org/drawingml/2006/main"/>
+          <a:p xmlns:a="http://schemas.openxmlformats.org/drawingml/2006/main"/>
+        </p:txBody>
+      </p:sp>
+    </p:spTree>
+  </p:cSld>
+  <p:clrMapOvr>
+    <a:masterClrMapping xmlns:a="http://schemas.openxmlformats.org/drawingml/2006/main"/>
+  </p:clrMapOvr>
+</p:notes>
+</file>
+
+<file path=ppt/notesSlides/notesSlide8.xml><?xml version="1.0" encoding="utf-8"?>
+<p:notes xmlns:p="http://schemas.openxmlformats.org/presentationml/2006/main">
+  <p:cSld>
+    <p:spTree>
+      <p:nvGrpSpPr>
+        <p:cNvPr id="1" name=""/>
+        <p:cNvGrpSpPr/>
+        <p:nvPr/>
+      </p:nvGrpSpPr>
+      <p:grpSpPr>
+        <a:xfrm xmlns:a="http://schemas.openxmlformats.org/drawingml/2006/main"/>
+      </p:grpSpPr>
+      <p:sp>
+        <p:nvSpPr>
+          <p:cNvPr id="2" name="Slide Image Placeholder 1"/>
+          <p:cNvSpPr>
+            <a:spLocks xmlns:a="http://schemas.openxmlformats.org/drawingml/2006/main" noGrp="1"/>
+          </p:cNvSpPr>
+          <p:nvPr>
+            <p:ph type="sldImg" idx="0"/>
+          </p:nvPr>
+        </p:nvSpPr>
+        <p:spPr/>
+      </p:sp>
+      <p:sp>
+        <p:nvSpPr>
+          <p:cNvPr id="3" name="Notes Placeholder 2"/>
+          <p:cNvSpPr>
+            <a:spLocks xmlns:a="http://schemas.openxmlformats.org/drawingml/2006/main" noGrp="1"/>
+          </p:cNvSpPr>
+          <p:nvPr>
+            <p:ph type="body" idx="1"/>
+          </p:nvPr>
+        </p:nvSpPr>
+        <p:spPr/>
+        <p:txBody>
+          <a:bodyPr xmlns:a="http://schemas.openxmlformats.org/drawingml/2006/main"/>
+          <a:lstStyle xmlns:a="http://schemas.openxmlformats.org/drawingml/2006/main"/>
+          <a:p xmlns:a="http://schemas.openxmlformats.org/drawingml/2006/main">
+            <a:r>
+              <a:t>Case 3: Secondary Dermal Grafting.</a:t>
+            </a:r>
+          </a:p>
+        </p:txBody>
+      </p:sp>
+      <p:sp>
+        <p:nvSpPr>
+          <p:cNvPr id="4" name="Slide Number Placeholder 3"/>
+          <p:cNvSpPr>
+            <a:spLocks xmlns:a="http://schemas.openxmlformats.org/drawingml/2006/main" noGrp="1"/>
+          </p:cNvSpPr>
+          <p:nvPr>
+            <p:ph type="sldNum" idx="5"/>
+          </p:nvPr>
+        </p:nvSpPr>
+        <p:spPr/>
+        <p:txBody>
+          <a:bodyPr xmlns:a="http://schemas.openxmlformats.org/drawingml/2006/main"/>
+          <a:lstStyle xmlns:a="http://schemas.openxmlformats.org/drawingml/2006/main"/>
+          <a:p xmlns:a="http://schemas.openxmlformats.org/drawingml/2006/main"/>
+        </p:txBody>
+      </p:sp>
+    </p:spTree>
+  </p:cSld>
+  <p:clrMapOvr>
+    <a:masterClrMapping xmlns:a="http://schemas.openxmlformats.org/drawingml/2006/main"/>
+  </p:clrMapOvr>
+</p:notes>
+</file>
+
+<file path=ppt/notesSlides/notesSlide9.xml><?xml version="1.0" encoding="utf-8"?>
+<p:notes xmlns:p="http://schemas.openxmlformats.org/presentationml/2006/main">
+  <p:cSld>
+    <p:spTree>
+      <p:nvGrpSpPr>
+        <p:cNvPr id="1" name=""/>
+        <p:cNvGrpSpPr/>
+        <p:nvPr/>
+      </p:nvGrpSpPr>
+      <p:grpSpPr>
+        <a:xfrm xmlns:a="http://schemas.openxmlformats.org/drawingml/2006/main"/>
+      </p:grpSpPr>
+      <p:sp>
+        <p:nvSpPr>
+          <p:cNvPr id="2" name="Slide Image Placeholder 1"/>
+          <p:cNvSpPr>
+            <a:spLocks xmlns:a="http://schemas.openxmlformats.org/drawingml/2006/main" noGrp="1"/>
+          </p:cNvSpPr>
+          <p:nvPr>
+            <p:ph type="sldImg" idx="0"/>
+          </p:nvPr>
+        </p:nvSpPr>
+        <p:spPr/>
+      </p:sp>
+      <p:sp>
+        <p:nvSpPr>
+          <p:cNvPr id="3" name="Notes Placeholder 2"/>
+          <p:cNvSpPr>
+            <a:spLocks xmlns:a="http://schemas.openxmlformats.org/drawingml/2006/main" noGrp="1"/>
+          </p:cNvSpPr>
+          <p:nvPr>
+            <p:ph type="body" idx="1"/>
+          </p:nvPr>
+        </p:nvSpPr>
+        <p:spPr/>
+        <p:txBody>
+          <a:bodyPr xmlns:a="http://schemas.openxmlformats.org/drawingml/2006/main"/>
+          <a:lstStyle xmlns:a="http://schemas.openxmlformats.org/drawingml/2006/main"/>
+          <a:p xmlns:a="http://schemas.openxmlformats.org/drawingml/2006/main">
+            <a:r>
+              <a:t>Case 4: Revision Surgery.</a:t>
             </a:r>
           </a:p>
         </p:txBody>
@@ -901,6 +1372,1661 @@
 <file path=ppt/slideLayouts/slideLayout1.xml><?xml version="1.0" encoding="utf-8"?>
 <p:sldLayout xmlns:p="http://schemas.openxmlformats.org/presentationml/2006/main" type="title">
   <p:cSld name="Title Slide">
+    <p:spTree>
+      <p:nvGrpSpPr>
+        <p:cNvPr id="1" name=""/>
+        <p:cNvGrpSpPr/>
+        <p:nvPr/>
+      </p:nvGrpSpPr>
+      <p:grpSpPr>
+        <a:xfrm xmlns:a="http://schemas.openxmlformats.org/drawingml/2006/main"/>
+      </p:grpSpPr>
+      <p:sp>
+        <p:nvSpPr>
+          <p:cNvPr id="3" name="Title">
+            <a:extLst xmlns:a="http://schemas.openxmlformats.org/drawingml/2006/main">
+              <a:ext uri="{FF2B5EF4-FFF2-40B4-BE49-F238E27FC236}">
+                <a16:creationId xmlns:a16="http://schemas.microsoft.com/office/drawing/2014/main" id="{DFF83339-D245-4B2E-ABDA-9E77C27F17A5}"/>
+              </a:ext>
+            </a:extLst>
+          </p:cNvPr>
+          <p:cNvSpPr>
+            <a:spLocks xmlns:a="http://schemas.openxmlformats.org/drawingml/2006/main" noGrp="1"/>
+          </p:cNvSpPr>
+          <p:nvPr>
+            <p:ph type="title" idx="0"/>
+          </p:nvPr>
+        </p:nvSpPr>
+        <p:spPr>
+          <a:xfrm xmlns:a="http://schemas.openxmlformats.org/drawingml/2006/main">
+            <a:off x="1219200" y="2590800"/>
+            <a:ext cx="9753600" cy="990600"/>
+          </a:xfrm>
+          <a:prstGeom xmlns:a="http://schemas.openxmlformats.org/drawingml/2006/main" prst="rect">
+            <a:avLst/>
+          </a:prstGeom>
+          <a:noFill xmlns:a="http://schemas.openxmlformats.org/drawingml/2006/main"/>
+          <a:ln xmlns:a="http://schemas.openxmlformats.org/drawingml/2006/main">
+            <a:noFill/>
+            <a:prstDash val="solid"/>
+          </a:ln>
+        </p:spPr>
+        <p:txBody>
+          <a:bodyPr xmlns:a="http://schemas.openxmlformats.org/drawingml/2006/main" wrap="square" lIns="0" tIns="0" rIns="0" bIns="0" anchor="ctr">
+            <a:normAutofit/>
+          </a:bodyPr>
+          <a:lstStyle xmlns:a="http://schemas.openxmlformats.org/drawingml/2006/main">
+            <a:defPPr algn="ctr">
+              <a:defRPr sz="4800" b="1">
+                <a:solidFill>
+                  <a:schemeClr val="tx1"/>
+                </a:solidFill>
+                <a:latin typeface="+mj-lt"/>
+                <a:ea typeface="+mj-lt"/>
+                <a:cs typeface="+mj-lt"/>
+              </a:defRPr>
+            </a:defPPr>
+            <a:lvl1pPr marL="0" indent="0">
+              <a:lnSpc>
+                <a:spcPct val="110000"/>
+              </a:lnSpc>
+              <a:spcBef>
+                <a:spcPts val="0"/>
+              </a:spcBef>
+              <a:spcAft>
+                <a:spcPts val="0"/>
+              </a:spcAft>
+              <a:buNone/>
+            </a:lvl1pPr>
+            <a:lvl2pPr marL="0" indent="0">
+              <a:lnSpc>
+                <a:spcPct val="110000"/>
+              </a:lnSpc>
+              <a:spcBef>
+                <a:spcPts val="0"/>
+              </a:spcBef>
+              <a:spcAft>
+                <a:spcPts val="0"/>
+              </a:spcAft>
+              <a:buNone/>
+            </a:lvl2pPr>
+            <a:lvl3pPr marL="0" indent="0">
+              <a:lnSpc>
+                <a:spcPct val="110000"/>
+              </a:lnSpc>
+              <a:spcBef>
+                <a:spcPts val="0"/>
+              </a:spcBef>
+              <a:spcAft>
+                <a:spcPts val="0"/>
+              </a:spcAft>
+              <a:buNone/>
+            </a:lvl3pPr>
+            <a:lvl4pPr marL="0" indent="0">
+              <a:lnSpc>
+                <a:spcPct val="110000"/>
+              </a:lnSpc>
+              <a:spcBef>
+                <a:spcPts val="0"/>
+              </a:spcBef>
+              <a:spcAft>
+                <a:spcPts val="0"/>
+              </a:spcAft>
+              <a:buNone/>
+            </a:lvl4pPr>
+            <a:lvl5pPr marL="0" indent="0">
+              <a:lnSpc>
+                <a:spcPct val="110000"/>
+              </a:lnSpc>
+              <a:spcBef>
+                <a:spcPts val="0"/>
+              </a:spcBef>
+              <a:spcAft>
+                <a:spcPts val="0"/>
+              </a:spcAft>
+              <a:buNone/>
+            </a:lvl5pPr>
+            <a:lvl6pPr marL="0" indent="0">
+              <a:lnSpc>
+                <a:spcPct val="110000"/>
+              </a:lnSpc>
+              <a:spcBef>
+                <a:spcPts val="0"/>
+              </a:spcBef>
+              <a:spcAft>
+                <a:spcPts val="0"/>
+              </a:spcAft>
+              <a:buNone/>
+            </a:lvl6pPr>
+            <a:lvl7pPr marL="0" indent="0">
+              <a:lnSpc>
+                <a:spcPct val="110000"/>
+              </a:lnSpc>
+              <a:spcBef>
+                <a:spcPts val="0"/>
+              </a:spcBef>
+              <a:spcAft>
+                <a:spcPts val="0"/>
+              </a:spcAft>
+              <a:buNone/>
+            </a:lvl7pPr>
+            <a:lvl8pPr marL="0" indent="0">
+              <a:lnSpc>
+                <a:spcPct val="110000"/>
+              </a:lnSpc>
+              <a:spcBef>
+                <a:spcPts val="0"/>
+              </a:spcBef>
+              <a:spcAft>
+                <a:spcPts val="0"/>
+              </a:spcAft>
+              <a:buNone/>
+            </a:lvl8pPr>
+            <a:lvl9pPr marL="0" indent="0">
+              <a:lnSpc>
+                <a:spcPct val="110000"/>
+              </a:lnSpc>
+              <a:spcBef>
+                <a:spcPts val="0"/>
+              </a:spcBef>
+              <a:spcAft>
+                <a:spcPts val="0"/>
+              </a:spcAft>
+              <a:buNone/>
+            </a:lvl9pPr>
+          </a:lstStyle>
+          <a:p xmlns:a="http://schemas.openxmlformats.org/drawingml/2006/main"/>
+        </p:txBody>
+      </p:sp>
+      <p:sp>
+        <p:nvSpPr>
+          <p:cNvPr id="2" name="Subtitle">
+            <a:extLst xmlns:a="http://schemas.openxmlformats.org/drawingml/2006/main">
+              <a:ext uri="{FF2B5EF4-FFF2-40B4-BE49-F238E27FC236}">
+                <a16:creationId xmlns:a16="http://schemas.microsoft.com/office/drawing/2014/main" id="{231E1271-4C2E-4046-AC23-C70339173395}"/>
+              </a:ext>
+            </a:extLst>
+          </p:cNvPr>
+          <p:cNvSpPr>
+            <a:spLocks xmlns:a="http://schemas.openxmlformats.org/drawingml/2006/main" noGrp="1"/>
+          </p:cNvSpPr>
+          <p:nvPr>
+            <p:ph type="subTitle" idx="1"/>
+          </p:nvPr>
+        </p:nvSpPr>
+        <p:spPr>
+          <a:xfrm xmlns:a="http://schemas.openxmlformats.org/drawingml/2006/main">
+            <a:off x="1828800" y="3771900"/>
+            <a:ext cx="8534400" cy="762000"/>
+          </a:xfrm>
+          <a:prstGeom xmlns:a="http://schemas.openxmlformats.org/drawingml/2006/main" prst="rect">
+            <a:avLst/>
+          </a:prstGeom>
+          <a:noFill xmlns:a="http://schemas.openxmlformats.org/drawingml/2006/main"/>
+          <a:ln xmlns:a="http://schemas.openxmlformats.org/drawingml/2006/main">
+            <a:noFill/>
+            <a:prstDash val="solid"/>
+          </a:ln>
+        </p:spPr>
+        <p:txBody>
+          <a:bodyPr xmlns:a="http://schemas.openxmlformats.org/drawingml/2006/main" wrap="square" lIns="0" tIns="0" rIns="0" bIns="0" anchor="ctr">
+            <a:normAutofit/>
+          </a:bodyPr>
+          <a:lstStyle xmlns:a="http://schemas.openxmlformats.org/drawingml/2006/main">
+            <a:defPPr algn="ctr">
+              <a:defRPr sz="2100" b="0">
+                <a:solidFill>
+                  <a:schemeClr val="tx1"/>
+                </a:solidFill>
+                <a:latin typeface="+mn-lt"/>
+                <a:ea typeface="+mn-lt"/>
+                <a:cs typeface="+mn-lt"/>
+              </a:defRPr>
+            </a:defPPr>
+            <a:lvl1pPr marL="0" indent="0">
+              <a:lnSpc>
+                <a:spcPct val="110000"/>
+              </a:lnSpc>
+              <a:spcBef>
+                <a:spcPts val="0"/>
+              </a:spcBef>
+              <a:spcAft>
+                <a:spcPts val="0"/>
+              </a:spcAft>
+              <a:buNone/>
+            </a:lvl1pPr>
+            <a:lvl2pPr marL="0" indent="0">
+              <a:lnSpc>
+                <a:spcPct val="110000"/>
+              </a:lnSpc>
+              <a:spcBef>
+                <a:spcPts val="0"/>
+              </a:spcBef>
+              <a:spcAft>
+                <a:spcPts val="0"/>
+              </a:spcAft>
+              <a:buNone/>
+            </a:lvl2pPr>
+            <a:lvl3pPr marL="0" indent="0">
+              <a:lnSpc>
+                <a:spcPct val="110000"/>
+              </a:lnSpc>
+              <a:spcBef>
+                <a:spcPts val="0"/>
+              </a:spcBef>
+              <a:spcAft>
+                <a:spcPts val="0"/>
+              </a:spcAft>
+              <a:buNone/>
+            </a:lvl3pPr>
+            <a:lvl4pPr marL="0" indent="0">
+              <a:lnSpc>
+                <a:spcPct val="110000"/>
+              </a:lnSpc>
+              <a:spcBef>
+                <a:spcPts val="0"/>
+              </a:spcBef>
+              <a:spcAft>
+                <a:spcPts val="0"/>
+              </a:spcAft>
+              <a:buNone/>
+            </a:lvl4pPr>
+            <a:lvl5pPr marL="0" indent="0">
+              <a:lnSpc>
+                <a:spcPct val="110000"/>
+              </a:lnSpc>
+              <a:spcBef>
+                <a:spcPts val="0"/>
+              </a:spcBef>
+              <a:spcAft>
+                <a:spcPts val="0"/>
+              </a:spcAft>
+              <a:buNone/>
+            </a:lvl5pPr>
+            <a:lvl6pPr marL="0" indent="0">
+              <a:lnSpc>
+                <a:spcPct val="110000"/>
+              </a:lnSpc>
+              <a:spcBef>
+                <a:spcPts val="0"/>
+              </a:spcBef>
+              <a:spcAft>
+                <a:spcPts val="0"/>
+              </a:spcAft>
+              <a:buNone/>
+            </a:lvl6pPr>
+            <a:lvl7pPr marL="0" indent="0">
+              <a:lnSpc>
+                <a:spcPct val="110000"/>
+              </a:lnSpc>
+              <a:spcBef>
+                <a:spcPts val="0"/>
+              </a:spcBef>
+              <a:spcAft>
+                <a:spcPts val="0"/>
+              </a:spcAft>
+              <a:buNone/>
+            </a:lvl7pPr>
+            <a:lvl8pPr marL="0" indent="0">
+              <a:lnSpc>
+                <a:spcPct val="110000"/>
+              </a:lnSpc>
+              <a:spcBef>
+                <a:spcPts val="0"/>
+              </a:spcBef>
+              <a:spcAft>
+                <a:spcPts val="0"/>
+              </a:spcAft>
+              <a:buNone/>
+            </a:lvl8pPr>
+            <a:lvl9pPr marL="0" indent="0">
+              <a:lnSpc>
+                <a:spcPct val="110000"/>
+              </a:lnSpc>
+              <a:spcBef>
+                <a:spcPts val="0"/>
+              </a:spcBef>
+              <a:spcAft>
+                <a:spcPts val="0"/>
+              </a:spcAft>
+              <a:buNone/>
+            </a:lvl9pPr>
+          </a:lstStyle>
+          <a:p xmlns:a="http://schemas.openxmlformats.org/drawingml/2006/main"/>
+        </p:txBody>
+      </p:sp>
+    </p:spTree>
+  </p:cSld>
+</p:sldLayout>
+</file>
+
+<file path=ppt/slideLayouts/slideLayout2.xml><?xml version="1.0" encoding="utf-8"?>
+<p:sldLayout xmlns:p="http://schemas.openxmlformats.org/presentationml/2006/main">
+  <p:cSld name="Section Header">
+    <p:spTree>
+      <p:nvGrpSpPr>
+        <p:cNvPr id="1" name=""/>
+        <p:cNvGrpSpPr/>
+        <p:nvPr/>
+      </p:nvGrpSpPr>
+      <p:grpSpPr>
+        <a:xfrm xmlns:a="http://schemas.openxmlformats.org/drawingml/2006/main"/>
+      </p:grpSpPr>
+      <p:sp>
+        <p:nvSpPr>
+          <p:cNvPr id="2" name="Section title">
+            <a:extLst xmlns:a="http://schemas.openxmlformats.org/drawingml/2006/main">
+              <a:ext uri="{FF2B5EF4-FFF2-40B4-BE49-F238E27FC236}">
+                <a16:creationId xmlns:a16="http://schemas.microsoft.com/office/drawing/2014/main" id="{4B294207-DF9A-4FEB-AC1F-BE20EAFD81D3}"/>
+              </a:ext>
+            </a:extLst>
+          </p:cNvPr>
+          <p:cNvSpPr>
+            <a:spLocks xmlns:a="http://schemas.openxmlformats.org/drawingml/2006/main" noGrp="1"/>
+          </p:cNvSpPr>
+          <p:nvPr>
+            <p:ph type="title" idx="0"/>
+          </p:nvPr>
+        </p:nvSpPr>
+        <p:spPr>
+          <a:xfrm xmlns:a="http://schemas.openxmlformats.org/drawingml/2006/main">
+            <a:off x="1219200" y="2857500"/>
+            <a:ext cx="9753600" cy="1143000"/>
+          </a:xfrm>
+          <a:prstGeom xmlns:a="http://schemas.openxmlformats.org/drawingml/2006/main" prst="rect">
+            <a:avLst/>
+          </a:prstGeom>
+          <a:noFill xmlns:a="http://schemas.openxmlformats.org/drawingml/2006/main"/>
+          <a:ln xmlns:a="http://schemas.openxmlformats.org/drawingml/2006/main">
+            <a:noFill/>
+            <a:prstDash val="solid"/>
+          </a:ln>
+        </p:spPr>
+        <p:txBody>
+          <a:bodyPr xmlns:a="http://schemas.openxmlformats.org/drawingml/2006/main" wrap="square" lIns="0" tIns="0" rIns="0" bIns="0" anchor="ctr">
+            <a:normAutofit/>
+          </a:bodyPr>
+          <a:lstStyle xmlns:a="http://schemas.openxmlformats.org/drawingml/2006/main">
+            <a:defPPr algn="ctr">
+              <a:defRPr sz="4200" b="1">
+                <a:solidFill>
+                  <a:schemeClr val="tx1"/>
+                </a:solidFill>
+                <a:latin typeface="+mj-lt"/>
+                <a:ea typeface="+mj-lt"/>
+                <a:cs typeface="+mj-lt"/>
+              </a:defRPr>
+            </a:defPPr>
+            <a:lvl1pPr marL="0" indent="0">
+              <a:lnSpc>
+                <a:spcPct val="110000"/>
+              </a:lnSpc>
+              <a:spcBef>
+                <a:spcPts val="0"/>
+              </a:spcBef>
+              <a:spcAft>
+                <a:spcPts val="0"/>
+              </a:spcAft>
+              <a:buNone/>
+            </a:lvl1pPr>
+            <a:lvl2pPr marL="0" indent="0">
+              <a:lnSpc>
+                <a:spcPct val="110000"/>
+              </a:lnSpc>
+              <a:spcBef>
+                <a:spcPts val="0"/>
+              </a:spcBef>
+              <a:spcAft>
+                <a:spcPts val="0"/>
+              </a:spcAft>
+              <a:buNone/>
+            </a:lvl2pPr>
+            <a:lvl3pPr marL="0" indent="0">
+              <a:lnSpc>
+                <a:spcPct val="110000"/>
+              </a:lnSpc>
+              <a:spcBef>
+                <a:spcPts val="0"/>
+              </a:spcBef>
+              <a:spcAft>
+                <a:spcPts val="0"/>
+              </a:spcAft>
+              <a:buNone/>
+            </a:lvl3pPr>
+            <a:lvl4pPr marL="0" indent="0">
+              <a:lnSpc>
+                <a:spcPct val="110000"/>
+              </a:lnSpc>
+              <a:spcBef>
+                <a:spcPts val="0"/>
+              </a:spcBef>
+              <a:spcAft>
+                <a:spcPts val="0"/>
+              </a:spcAft>
+              <a:buNone/>
+            </a:lvl4pPr>
+            <a:lvl5pPr marL="0" indent="0">
+              <a:lnSpc>
+                <a:spcPct val="110000"/>
+              </a:lnSpc>
+              <a:spcBef>
+                <a:spcPts val="0"/>
+              </a:spcBef>
+              <a:spcAft>
+                <a:spcPts val="0"/>
+              </a:spcAft>
+              <a:buNone/>
+            </a:lvl5pPr>
+            <a:lvl6pPr marL="0" indent="0">
+              <a:lnSpc>
+                <a:spcPct val="110000"/>
+              </a:lnSpc>
+              <a:spcBef>
+                <a:spcPts val="0"/>
+              </a:spcBef>
+              <a:spcAft>
+                <a:spcPts val="0"/>
+              </a:spcAft>
+              <a:buNone/>
+            </a:lvl6pPr>
+            <a:lvl7pPr marL="0" indent="0">
+              <a:lnSpc>
+                <a:spcPct val="110000"/>
+              </a:lnSpc>
+              <a:spcBef>
+                <a:spcPts val="0"/>
+              </a:spcBef>
+              <a:spcAft>
+                <a:spcPts val="0"/>
+              </a:spcAft>
+              <a:buNone/>
+            </a:lvl7pPr>
+            <a:lvl8pPr marL="0" indent="0">
+              <a:lnSpc>
+                <a:spcPct val="110000"/>
+              </a:lnSpc>
+              <a:spcBef>
+                <a:spcPts val="0"/>
+              </a:spcBef>
+              <a:spcAft>
+                <a:spcPts val="0"/>
+              </a:spcAft>
+              <a:buNone/>
+            </a:lvl8pPr>
+            <a:lvl9pPr marL="0" indent="0">
+              <a:lnSpc>
+                <a:spcPct val="110000"/>
+              </a:lnSpc>
+              <a:spcBef>
+                <a:spcPts val="0"/>
+              </a:spcBef>
+              <a:spcAft>
+                <a:spcPts val="0"/>
+              </a:spcAft>
+              <a:buNone/>
+            </a:lvl9pPr>
+          </a:lstStyle>
+          <a:p xmlns:a="http://schemas.openxmlformats.org/drawingml/2006/main"/>
+        </p:txBody>
+      </p:sp>
+    </p:spTree>
+  </p:cSld>
+</p:sldLayout>
+</file>
+
+<file path=ppt/slideLayouts/slideLayout3.xml><?xml version="1.0" encoding="utf-8"?>
+<p:sldLayout xmlns:p="http://schemas.openxmlformats.org/presentationml/2006/main">
+  <p:cSld name="Title and Body">
+    <p:spTree>
+      <p:nvGrpSpPr>
+        <p:cNvPr id="1" name=""/>
+        <p:cNvGrpSpPr/>
+        <p:nvPr/>
+      </p:nvGrpSpPr>
+      <p:grpSpPr>
+        <a:xfrm xmlns:a="http://schemas.openxmlformats.org/drawingml/2006/main"/>
+      </p:grpSpPr>
+      <p:sp>
+        <p:nvSpPr>
+          <p:cNvPr id="3" name="Title">
+            <a:extLst xmlns:a="http://schemas.openxmlformats.org/drawingml/2006/main">
+              <a:ext uri="{FF2B5EF4-FFF2-40B4-BE49-F238E27FC236}">
+                <a16:creationId xmlns:a16="http://schemas.microsoft.com/office/drawing/2014/main" id="{9810C8EC-7BBB-453D-AC9E-549ACB7B00C8}"/>
+              </a:ext>
+            </a:extLst>
+          </p:cNvPr>
+          <p:cNvSpPr>
+            <a:spLocks xmlns:a="http://schemas.openxmlformats.org/drawingml/2006/main" noGrp="1"/>
+          </p:cNvSpPr>
+          <p:nvPr>
+            <p:ph type="title" idx="0"/>
+          </p:nvPr>
+        </p:nvSpPr>
+        <p:spPr>
+          <a:xfrm xmlns:a="http://schemas.openxmlformats.org/drawingml/2006/main">
+            <a:off x="685800" y="533400"/>
+            <a:ext cx="10820400" cy="838200"/>
+          </a:xfrm>
+          <a:prstGeom xmlns:a="http://schemas.openxmlformats.org/drawingml/2006/main" prst="rect">
+            <a:avLst/>
+          </a:prstGeom>
+          <a:noFill xmlns:a="http://schemas.openxmlformats.org/drawingml/2006/main"/>
+          <a:ln xmlns:a="http://schemas.openxmlformats.org/drawingml/2006/main">
+            <a:noFill/>
+            <a:prstDash val="solid"/>
+          </a:ln>
+        </p:spPr>
+        <p:txBody>
+          <a:bodyPr xmlns:a="http://schemas.openxmlformats.org/drawingml/2006/main" wrap="square" lIns="0" tIns="0" rIns="0" bIns="0" anchor="t">
+            <a:normAutofit/>
+          </a:bodyPr>
+          <a:lstStyle xmlns:a="http://schemas.openxmlformats.org/drawingml/2006/main">
+            <a:defPPr algn="l">
+              <a:defRPr sz="3300" b="1">
+                <a:solidFill>
+                  <a:schemeClr val="tx1"/>
+                </a:solidFill>
+                <a:latin typeface="+mj-lt"/>
+                <a:ea typeface="+mj-lt"/>
+                <a:cs typeface="+mj-lt"/>
+              </a:defRPr>
+            </a:defPPr>
+            <a:lvl1pPr marL="0" indent="0">
+              <a:lnSpc>
+                <a:spcPct val="110000"/>
+              </a:lnSpc>
+              <a:spcBef>
+                <a:spcPts val="0"/>
+              </a:spcBef>
+              <a:spcAft>
+                <a:spcPts val="0"/>
+              </a:spcAft>
+              <a:buNone/>
+            </a:lvl1pPr>
+            <a:lvl2pPr marL="0" indent="0">
+              <a:lnSpc>
+                <a:spcPct val="110000"/>
+              </a:lnSpc>
+              <a:spcBef>
+                <a:spcPts val="0"/>
+              </a:spcBef>
+              <a:spcAft>
+                <a:spcPts val="0"/>
+              </a:spcAft>
+              <a:buNone/>
+            </a:lvl2pPr>
+            <a:lvl3pPr marL="0" indent="0">
+              <a:lnSpc>
+                <a:spcPct val="110000"/>
+              </a:lnSpc>
+              <a:spcBef>
+                <a:spcPts val="0"/>
+              </a:spcBef>
+              <a:spcAft>
+                <a:spcPts val="0"/>
+              </a:spcAft>
+              <a:buNone/>
+            </a:lvl3pPr>
+            <a:lvl4pPr marL="0" indent="0">
+              <a:lnSpc>
+                <a:spcPct val="110000"/>
+              </a:lnSpc>
+              <a:spcBef>
+                <a:spcPts val="0"/>
+              </a:spcBef>
+              <a:spcAft>
+                <a:spcPts val="0"/>
+              </a:spcAft>
+              <a:buNone/>
+            </a:lvl4pPr>
+            <a:lvl5pPr marL="0" indent="0">
+              <a:lnSpc>
+                <a:spcPct val="110000"/>
+              </a:lnSpc>
+              <a:spcBef>
+                <a:spcPts val="0"/>
+              </a:spcBef>
+              <a:spcAft>
+                <a:spcPts val="0"/>
+              </a:spcAft>
+              <a:buNone/>
+            </a:lvl5pPr>
+            <a:lvl6pPr marL="0" indent="0">
+              <a:lnSpc>
+                <a:spcPct val="110000"/>
+              </a:lnSpc>
+              <a:spcBef>
+                <a:spcPts val="0"/>
+              </a:spcBef>
+              <a:spcAft>
+                <a:spcPts val="0"/>
+              </a:spcAft>
+              <a:buNone/>
+            </a:lvl6pPr>
+            <a:lvl7pPr marL="0" indent="0">
+              <a:lnSpc>
+                <a:spcPct val="110000"/>
+              </a:lnSpc>
+              <a:spcBef>
+                <a:spcPts val="0"/>
+              </a:spcBef>
+              <a:spcAft>
+                <a:spcPts val="0"/>
+              </a:spcAft>
+              <a:buNone/>
+            </a:lvl7pPr>
+            <a:lvl8pPr marL="0" indent="0">
+              <a:lnSpc>
+                <a:spcPct val="110000"/>
+              </a:lnSpc>
+              <a:spcBef>
+                <a:spcPts val="0"/>
+              </a:spcBef>
+              <a:spcAft>
+                <a:spcPts val="0"/>
+              </a:spcAft>
+              <a:buNone/>
+            </a:lvl8pPr>
+            <a:lvl9pPr marL="0" indent="0">
+              <a:lnSpc>
+                <a:spcPct val="110000"/>
+              </a:lnSpc>
+              <a:spcBef>
+                <a:spcPts val="0"/>
+              </a:spcBef>
+              <a:spcAft>
+                <a:spcPts val="0"/>
+              </a:spcAft>
+              <a:buNone/>
+            </a:lvl9pPr>
+          </a:lstStyle>
+          <a:p xmlns:a="http://schemas.openxmlformats.org/drawingml/2006/main"/>
+        </p:txBody>
+      </p:sp>
+      <p:sp>
+        <p:nvSpPr>
+          <p:cNvPr id="2" name="Body">
+            <a:extLst xmlns:a="http://schemas.openxmlformats.org/drawingml/2006/main">
+              <a:ext uri="{FF2B5EF4-FFF2-40B4-BE49-F238E27FC236}">
+                <a16:creationId xmlns:a16="http://schemas.microsoft.com/office/drawing/2014/main" id="{A1C39492-0184-49F2-90E6-55C5DA445E90}"/>
+              </a:ext>
+            </a:extLst>
+          </p:cNvPr>
+          <p:cNvSpPr>
+            <a:spLocks xmlns:a="http://schemas.openxmlformats.org/drawingml/2006/main" noGrp="1"/>
+          </p:cNvSpPr>
+          <p:nvPr>
+            <p:ph type="body" idx="1"/>
+          </p:nvPr>
+        </p:nvSpPr>
+        <p:spPr>
+          <a:xfrm xmlns:a="http://schemas.openxmlformats.org/drawingml/2006/main">
+            <a:off x="685800" y="1905000"/>
+            <a:ext cx="10820400" cy="4267200"/>
+          </a:xfrm>
+          <a:prstGeom xmlns:a="http://schemas.openxmlformats.org/drawingml/2006/main" prst="rect">
+            <a:avLst/>
+          </a:prstGeom>
+          <a:noFill xmlns:a="http://schemas.openxmlformats.org/drawingml/2006/main"/>
+          <a:ln xmlns:a="http://schemas.openxmlformats.org/drawingml/2006/main">
+            <a:noFill/>
+            <a:prstDash val="solid"/>
+          </a:ln>
+        </p:spPr>
+        <p:txBody>
+          <a:bodyPr xmlns:a="http://schemas.openxmlformats.org/drawingml/2006/main" wrap="square" lIns="0" tIns="0" rIns="0" bIns="0" anchor="t">
+            <a:normAutofit/>
+          </a:bodyPr>
+          <a:lstStyle xmlns:a="http://schemas.openxmlformats.org/drawingml/2006/main">
+            <a:defPPr algn="l">
+              <a:defRPr sz="2250" b="0">
+                <a:solidFill>
+                  <a:schemeClr val="tx1"/>
+                </a:solidFill>
+                <a:latin typeface="+mn-lt"/>
+                <a:ea typeface="+mn-lt"/>
+                <a:cs typeface="+mn-lt"/>
+              </a:defRPr>
+            </a:defPPr>
+            <a:lvl1pPr marL="228600" indent="-228600">
+              <a:lnSpc>
+                <a:spcPct val="110000"/>
+              </a:lnSpc>
+              <a:spcBef>
+                <a:spcPts val="0"/>
+              </a:spcBef>
+              <a:spcAft>
+                <a:spcPts val="1200"/>
+              </a:spcAft>
+              <a:buChar char="•"/>
+            </a:lvl1pPr>
+            <a:lvl2pPr marL="533400" indent="-228600">
+              <a:lnSpc>
+                <a:spcPct val="110000"/>
+              </a:lnSpc>
+              <a:spcBef>
+                <a:spcPts val="0"/>
+              </a:spcBef>
+              <a:spcAft>
+                <a:spcPts val="1200"/>
+              </a:spcAft>
+              <a:buChar char="•"/>
+            </a:lvl2pPr>
+            <a:lvl3pPr marL="838200" indent="-228600">
+              <a:lnSpc>
+                <a:spcPct val="110000"/>
+              </a:lnSpc>
+              <a:spcBef>
+                <a:spcPts val="0"/>
+              </a:spcBef>
+              <a:spcAft>
+                <a:spcPts val="1200"/>
+              </a:spcAft>
+              <a:buChar char="•"/>
+            </a:lvl3pPr>
+            <a:lvl4pPr marL="1143000" indent="-228600">
+              <a:lnSpc>
+                <a:spcPct val="110000"/>
+              </a:lnSpc>
+              <a:spcBef>
+                <a:spcPts val="0"/>
+              </a:spcBef>
+              <a:spcAft>
+                <a:spcPts val="1200"/>
+              </a:spcAft>
+              <a:buChar char="•"/>
+            </a:lvl4pPr>
+            <a:lvl5pPr marL="1447800" indent="-228600">
+              <a:lnSpc>
+                <a:spcPct val="110000"/>
+              </a:lnSpc>
+              <a:spcBef>
+                <a:spcPts val="0"/>
+              </a:spcBef>
+              <a:spcAft>
+                <a:spcPts val="1200"/>
+              </a:spcAft>
+              <a:buChar char="•"/>
+            </a:lvl5pPr>
+            <a:lvl6pPr marL="1752600" indent="-228600">
+              <a:lnSpc>
+                <a:spcPct val="110000"/>
+              </a:lnSpc>
+              <a:spcBef>
+                <a:spcPts val="0"/>
+              </a:spcBef>
+              <a:spcAft>
+                <a:spcPts val="1200"/>
+              </a:spcAft>
+              <a:buChar char="•"/>
+            </a:lvl6pPr>
+            <a:lvl7pPr marL="2057400" indent="-228600">
+              <a:lnSpc>
+                <a:spcPct val="110000"/>
+              </a:lnSpc>
+              <a:spcBef>
+                <a:spcPts val="0"/>
+              </a:spcBef>
+              <a:spcAft>
+                <a:spcPts val="1200"/>
+              </a:spcAft>
+              <a:buChar char="•"/>
+            </a:lvl7pPr>
+            <a:lvl8pPr marL="2362200" indent="-228600">
+              <a:lnSpc>
+                <a:spcPct val="110000"/>
+              </a:lnSpc>
+              <a:spcBef>
+                <a:spcPts val="0"/>
+              </a:spcBef>
+              <a:spcAft>
+                <a:spcPts val="1200"/>
+              </a:spcAft>
+              <a:buChar char="•"/>
+            </a:lvl8pPr>
+            <a:lvl9pPr marL="2667000" indent="-228600">
+              <a:lnSpc>
+                <a:spcPct val="110000"/>
+              </a:lnSpc>
+              <a:spcBef>
+                <a:spcPts val="0"/>
+              </a:spcBef>
+              <a:spcAft>
+                <a:spcPts val="1200"/>
+              </a:spcAft>
+              <a:buChar char="•"/>
+            </a:lvl9pPr>
+          </a:lstStyle>
+          <a:p xmlns:a="http://schemas.openxmlformats.org/drawingml/2006/main"/>
+        </p:txBody>
+      </p:sp>
+    </p:spTree>
+  </p:cSld>
+</p:sldLayout>
+</file>
+
+<file path=ppt/slideLayouts/slideLayout4.xml><?xml version="1.0" encoding="utf-8"?>
+<p:sldLayout xmlns:p="http://schemas.openxmlformats.org/presentationml/2006/main">
+  <p:cSld name="Title and Two Column">
+    <p:spTree>
+      <p:nvGrpSpPr>
+        <p:cNvPr id="1" name=""/>
+        <p:cNvGrpSpPr/>
+        <p:nvPr/>
+      </p:nvGrpSpPr>
+      <p:grpSpPr>
+        <a:xfrm xmlns:a="http://schemas.openxmlformats.org/drawingml/2006/main"/>
+      </p:grpSpPr>
+      <p:sp>
+        <p:nvSpPr>
+          <p:cNvPr id="4" name="Title">
+            <a:extLst xmlns:a="http://schemas.openxmlformats.org/drawingml/2006/main">
+              <a:ext uri="{FF2B5EF4-FFF2-40B4-BE49-F238E27FC236}">
+                <a16:creationId xmlns:a16="http://schemas.microsoft.com/office/drawing/2014/main" id="{7B08000C-B7BC-4E60-B6F1-032AC46BE36C}"/>
+              </a:ext>
+            </a:extLst>
+          </p:cNvPr>
+          <p:cNvSpPr>
+            <a:spLocks xmlns:a="http://schemas.openxmlformats.org/drawingml/2006/main" noGrp="1"/>
+          </p:cNvSpPr>
+          <p:nvPr>
+            <p:ph type="title" idx="0"/>
+          </p:nvPr>
+        </p:nvSpPr>
+        <p:spPr>
+          <a:xfrm xmlns:a="http://schemas.openxmlformats.org/drawingml/2006/main">
+            <a:off x="685800" y="533400"/>
+            <a:ext cx="10820400" cy="838200"/>
+          </a:xfrm>
+          <a:prstGeom xmlns:a="http://schemas.openxmlformats.org/drawingml/2006/main" prst="rect">
+            <a:avLst/>
+          </a:prstGeom>
+          <a:noFill xmlns:a="http://schemas.openxmlformats.org/drawingml/2006/main"/>
+          <a:ln xmlns:a="http://schemas.openxmlformats.org/drawingml/2006/main">
+            <a:noFill/>
+            <a:prstDash val="solid"/>
+          </a:ln>
+        </p:spPr>
+        <p:txBody>
+          <a:bodyPr xmlns:a="http://schemas.openxmlformats.org/drawingml/2006/main" wrap="square" lIns="0" tIns="0" rIns="0" bIns="0" anchor="t">
+            <a:normAutofit/>
+          </a:bodyPr>
+          <a:lstStyle xmlns:a="http://schemas.openxmlformats.org/drawingml/2006/main">
+            <a:defPPr algn="l">
+              <a:defRPr sz="3300" b="1">
+                <a:solidFill>
+                  <a:schemeClr val="tx1"/>
+                </a:solidFill>
+                <a:latin typeface="+mj-lt"/>
+                <a:ea typeface="+mj-lt"/>
+                <a:cs typeface="+mj-lt"/>
+              </a:defRPr>
+            </a:defPPr>
+            <a:lvl1pPr marL="0" indent="0">
+              <a:lnSpc>
+                <a:spcPct val="110000"/>
+              </a:lnSpc>
+              <a:spcBef>
+                <a:spcPts val="0"/>
+              </a:spcBef>
+              <a:spcAft>
+                <a:spcPts val="0"/>
+              </a:spcAft>
+              <a:buNone/>
+            </a:lvl1pPr>
+            <a:lvl2pPr marL="0" indent="0">
+              <a:lnSpc>
+                <a:spcPct val="110000"/>
+              </a:lnSpc>
+              <a:spcBef>
+                <a:spcPts val="0"/>
+              </a:spcBef>
+              <a:spcAft>
+                <a:spcPts val="0"/>
+              </a:spcAft>
+              <a:buNone/>
+            </a:lvl2pPr>
+            <a:lvl3pPr marL="0" indent="0">
+              <a:lnSpc>
+                <a:spcPct val="110000"/>
+              </a:lnSpc>
+              <a:spcBef>
+                <a:spcPts val="0"/>
+              </a:spcBef>
+              <a:spcAft>
+                <a:spcPts val="0"/>
+              </a:spcAft>
+              <a:buNone/>
+            </a:lvl3pPr>
+            <a:lvl4pPr marL="0" indent="0">
+              <a:lnSpc>
+                <a:spcPct val="110000"/>
+              </a:lnSpc>
+              <a:spcBef>
+                <a:spcPts val="0"/>
+              </a:spcBef>
+              <a:spcAft>
+                <a:spcPts val="0"/>
+              </a:spcAft>
+              <a:buNone/>
+            </a:lvl4pPr>
+            <a:lvl5pPr marL="0" indent="0">
+              <a:lnSpc>
+                <a:spcPct val="110000"/>
+              </a:lnSpc>
+              <a:spcBef>
+                <a:spcPts val="0"/>
+              </a:spcBef>
+              <a:spcAft>
+                <a:spcPts val="0"/>
+              </a:spcAft>
+              <a:buNone/>
+            </a:lvl5pPr>
+            <a:lvl6pPr marL="0" indent="0">
+              <a:lnSpc>
+                <a:spcPct val="110000"/>
+              </a:lnSpc>
+              <a:spcBef>
+                <a:spcPts val="0"/>
+              </a:spcBef>
+              <a:spcAft>
+                <a:spcPts val="0"/>
+              </a:spcAft>
+              <a:buNone/>
+            </a:lvl6pPr>
+            <a:lvl7pPr marL="0" indent="0">
+              <a:lnSpc>
+                <a:spcPct val="110000"/>
+              </a:lnSpc>
+              <a:spcBef>
+                <a:spcPts val="0"/>
+              </a:spcBef>
+              <a:spcAft>
+                <a:spcPts val="0"/>
+              </a:spcAft>
+              <a:buNone/>
+            </a:lvl7pPr>
+            <a:lvl8pPr marL="0" indent="0">
+              <a:lnSpc>
+                <a:spcPct val="110000"/>
+              </a:lnSpc>
+              <a:spcBef>
+                <a:spcPts val="0"/>
+              </a:spcBef>
+              <a:spcAft>
+                <a:spcPts val="0"/>
+              </a:spcAft>
+              <a:buNone/>
+            </a:lvl8pPr>
+            <a:lvl9pPr marL="0" indent="0">
+              <a:lnSpc>
+                <a:spcPct val="110000"/>
+              </a:lnSpc>
+              <a:spcBef>
+                <a:spcPts val="0"/>
+              </a:spcBef>
+              <a:spcAft>
+                <a:spcPts val="0"/>
+              </a:spcAft>
+              <a:buNone/>
+            </a:lvl9pPr>
+          </a:lstStyle>
+          <a:p xmlns:a="http://schemas.openxmlformats.org/drawingml/2006/main"/>
+        </p:txBody>
+      </p:sp>
+      <p:sp>
+        <p:nvSpPr>
+          <p:cNvPr id="2" name="Left column">
+            <a:extLst xmlns:a="http://schemas.openxmlformats.org/drawingml/2006/main">
+              <a:ext uri="{FF2B5EF4-FFF2-40B4-BE49-F238E27FC236}">
+                <a16:creationId xmlns:a16="http://schemas.microsoft.com/office/drawing/2014/main" id="{EE93A09D-1399-49E3-BEC1-96FBE352A982}"/>
+              </a:ext>
+            </a:extLst>
+          </p:cNvPr>
+          <p:cNvSpPr>
+            <a:spLocks xmlns:a="http://schemas.openxmlformats.org/drawingml/2006/main" noGrp="1"/>
+          </p:cNvSpPr>
+          <p:nvPr>
+            <p:ph type="body" idx="1"/>
+          </p:nvPr>
+        </p:nvSpPr>
+        <p:spPr>
+          <a:xfrm xmlns:a="http://schemas.openxmlformats.org/drawingml/2006/main">
+            <a:off x="685800" y="1905000"/>
+            <a:ext cx="5029200" cy="4267200"/>
+          </a:xfrm>
+          <a:prstGeom xmlns:a="http://schemas.openxmlformats.org/drawingml/2006/main" prst="rect">
+            <a:avLst/>
+          </a:prstGeom>
+          <a:noFill xmlns:a="http://schemas.openxmlformats.org/drawingml/2006/main"/>
+          <a:ln xmlns:a="http://schemas.openxmlformats.org/drawingml/2006/main">
+            <a:noFill/>
+            <a:prstDash val="solid"/>
+          </a:ln>
+        </p:spPr>
+        <p:txBody>
+          <a:bodyPr xmlns:a="http://schemas.openxmlformats.org/drawingml/2006/main" wrap="square" lIns="0" tIns="0" rIns="0" bIns="0" anchor="t">
+            <a:normAutofit/>
+          </a:bodyPr>
+          <a:lstStyle xmlns:a="http://schemas.openxmlformats.org/drawingml/2006/main">
+            <a:defPPr algn="l">
+              <a:defRPr sz="2100" b="0">
+                <a:solidFill>
+                  <a:schemeClr val="tx1"/>
+                </a:solidFill>
+                <a:latin typeface="+mn-lt"/>
+                <a:ea typeface="+mn-lt"/>
+                <a:cs typeface="+mn-lt"/>
+              </a:defRPr>
+            </a:defPPr>
+            <a:lvl1pPr marL="228600" indent="-228600">
+              <a:lnSpc>
+                <a:spcPct val="110000"/>
+              </a:lnSpc>
+              <a:spcBef>
+                <a:spcPts val="0"/>
+              </a:spcBef>
+              <a:spcAft>
+                <a:spcPts val="1200"/>
+              </a:spcAft>
+              <a:buChar char="•"/>
+            </a:lvl1pPr>
+            <a:lvl2pPr marL="533400" indent="-228600">
+              <a:lnSpc>
+                <a:spcPct val="110000"/>
+              </a:lnSpc>
+              <a:spcBef>
+                <a:spcPts val="0"/>
+              </a:spcBef>
+              <a:spcAft>
+                <a:spcPts val="1200"/>
+              </a:spcAft>
+              <a:buChar char="•"/>
+            </a:lvl2pPr>
+            <a:lvl3pPr marL="838200" indent="-228600">
+              <a:lnSpc>
+                <a:spcPct val="110000"/>
+              </a:lnSpc>
+              <a:spcBef>
+                <a:spcPts val="0"/>
+              </a:spcBef>
+              <a:spcAft>
+                <a:spcPts val="1200"/>
+              </a:spcAft>
+              <a:buChar char="•"/>
+            </a:lvl3pPr>
+            <a:lvl4pPr marL="1143000" indent="-228600">
+              <a:lnSpc>
+                <a:spcPct val="110000"/>
+              </a:lnSpc>
+              <a:spcBef>
+                <a:spcPts val="0"/>
+              </a:spcBef>
+              <a:spcAft>
+                <a:spcPts val="1200"/>
+              </a:spcAft>
+              <a:buChar char="•"/>
+            </a:lvl4pPr>
+            <a:lvl5pPr marL="1447800" indent="-228600">
+              <a:lnSpc>
+                <a:spcPct val="110000"/>
+              </a:lnSpc>
+              <a:spcBef>
+                <a:spcPts val="0"/>
+              </a:spcBef>
+              <a:spcAft>
+                <a:spcPts val="1200"/>
+              </a:spcAft>
+              <a:buChar char="•"/>
+            </a:lvl5pPr>
+            <a:lvl6pPr marL="1752600" indent="-228600">
+              <a:lnSpc>
+                <a:spcPct val="110000"/>
+              </a:lnSpc>
+              <a:spcBef>
+                <a:spcPts val="0"/>
+              </a:spcBef>
+              <a:spcAft>
+                <a:spcPts val="1200"/>
+              </a:spcAft>
+              <a:buChar char="•"/>
+            </a:lvl6pPr>
+            <a:lvl7pPr marL="2057400" indent="-228600">
+              <a:lnSpc>
+                <a:spcPct val="110000"/>
+              </a:lnSpc>
+              <a:spcBef>
+                <a:spcPts val="0"/>
+              </a:spcBef>
+              <a:spcAft>
+                <a:spcPts val="1200"/>
+              </a:spcAft>
+              <a:buChar char="•"/>
+            </a:lvl7pPr>
+            <a:lvl8pPr marL="2362200" indent="-228600">
+              <a:lnSpc>
+                <a:spcPct val="110000"/>
+              </a:lnSpc>
+              <a:spcBef>
+                <a:spcPts val="0"/>
+              </a:spcBef>
+              <a:spcAft>
+                <a:spcPts val="1200"/>
+              </a:spcAft>
+              <a:buChar char="•"/>
+            </a:lvl8pPr>
+            <a:lvl9pPr marL="2667000" indent="-228600">
+              <a:lnSpc>
+                <a:spcPct val="110000"/>
+              </a:lnSpc>
+              <a:spcBef>
+                <a:spcPts val="0"/>
+              </a:spcBef>
+              <a:spcAft>
+                <a:spcPts val="1200"/>
+              </a:spcAft>
+              <a:buChar char="•"/>
+            </a:lvl9pPr>
+          </a:lstStyle>
+          <a:p xmlns:a="http://schemas.openxmlformats.org/drawingml/2006/main"/>
+        </p:txBody>
+      </p:sp>
+      <p:sp>
+        <p:nvSpPr>
+          <p:cNvPr id="3" name="Right column">
+            <a:extLst xmlns:a="http://schemas.openxmlformats.org/drawingml/2006/main">
+              <a:ext uri="{FF2B5EF4-FFF2-40B4-BE49-F238E27FC236}">
+                <a16:creationId xmlns:a16="http://schemas.microsoft.com/office/drawing/2014/main" id="{787AF9D1-680E-441E-999C-D89F800948C6}"/>
+              </a:ext>
+            </a:extLst>
+          </p:cNvPr>
+          <p:cNvSpPr>
+            <a:spLocks xmlns:a="http://schemas.openxmlformats.org/drawingml/2006/main" noGrp="1"/>
+          </p:cNvSpPr>
+          <p:nvPr>
+            <p:ph type="body" idx="2"/>
+          </p:nvPr>
+        </p:nvSpPr>
+        <p:spPr>
+          <a:xfrm xmlns:a="http://schemas.openxmlformats.org/drawingml/2006/main">
+            <a:off x="6477000" y="1905000"/>
+            <a:ext cx="5029200" cy="4267200"/>
+          </a:xfrm>
+          <a:prstGeom xmlns:a="http://schemas.openxmlformats.org/drawingml/2006/main" prst="rect">
+            <a:avLst/>
+          </a:prstGeom>
+          <a:noFill xmlns:a="http://schemas.openxmlformats.org/drawingml/2006/main"/>
+          <a:ln xmlns:a="http://schemas.openxmlformats.org/drawingml/2006/main">
+            <a:noFill/>
+            <a:prstDash val="solid"/>
+          </a:ln>
+        </p:spPr>
+        <p:txBody>
+          <a:bodyPr xmlns:a="http://schemas.openxmlformats.org/drawingml/2006/main" wrap="square" lIns="0" tIns="0" rIns="0" bIns="0" anchor="t">
+            <a:normAutofit/>
+          </a:bodyPr>
+          <a:lstStyle xmlns:a="http://schemas.openxmlformats.org/drawingml/2006/main">
+            <a:defPPr algn="l">
+              <a:defRPr sz="2100" b="0">
+                <a:solidFill>
+                  <a:schemeClr val="tx1"/>
+                </a:solidFill>
+                <a:latin typeface="+mn-lt"/>
+                <a:ea typeface="+mn-lt"/>
+                <a:cs typeface="+mn-lt"/>
+              </a:defRPr>
+            </a:defPPr>
+            <a:lvl1pPr marL="228600" indent="-228600">
+              <a:lnSpc>
+                <a:spcPct val="110000"/>
+              </a:lnSpc>
+              <a:spcBef>
+                <a:spcPts val="0"/>
+              </a:spcBef>
+              <a:spcAft>
+                <a:spcPts val="1200"/>
+              </a:spcAft>
+              <a:buChar char="•"/>
+            </a:lvl1pPr>
+            <a:lvl2pPr marL="533400" indent="-228600">
+              <a:lnSpc>
+                <a:spcPct val="110000"/>
+              </a:lnSpc>
+              <a:spcBef>
+                <a:spcPts val="0"/>
+              </a:spcBef>
+              <a:spcAft>
+                <a:spcPts val="1200"/>
+              </a:spcAft>
+              <a:buChar char="•"/>
+            </a:lvl2pPr>
+            <a:lvl3pPr marL="838200" indent="-228600">
+              <a:lnSpc>
+                <a:spcPct val="110000"/>
+              </a:lnSpc>
+              <a:spcBef>
+                <a:spcPts val="0"/>
+              </a:spcBef>
+              <a:spcAft>
+                <a:spcPts val="1200"/>
+              </a:spcAft>
+              <a:buChar char="•"/>
+            </a:lvl3pPr>
+            <a:lvl4pPr marL="1143000" indent="-228600">
+              <a:lnSpc>
+                <a:spcPct val="110000"/>
+              </a:lnSpc>
+              <a:spcBef>
+                <a:spcPts val="0"/>
+              </a:spcBef>
+              <a:spcAft>
+                <a:spcPts val="1200"/>
+              </a:spcAft>
+              <a:buChar char="•"/>
+            </a:lvl4pPr>
+            <a:lvl5pPr marL="1447800" indent="-228600">
+              <a:lnSpc>
+                <a:spcPct val="110000"/>
+              </a:lnSpc>
+              <a:spcBef>
+                <a:spcPts val="0"/>
+              </a:spcBef>
+              <a:spcAft>
+                <a:spcPts val="1200"/>
+              </a:spcAft>
+              <a:buChar char="•"/>
+            </a:lvl5pPr>
+            <a:lvl6pPr marL="1752600" indent="-228600">
+              <a:lnSpc>
+                <a:spcPct val="110000"/>
+              </a:lnSpc>
+              <a:spcBef>
+                <a:spcPts val="0"/>
+              </a:spcBef>
+              <a:spcAft>
+                <a:spcPts val="1200"/>
+              </a:spcAft>
+              <a:buChar char="•"/>
+            </a:lvl6pPr>
+            <a:lvl7pPr marL="2057400" indent="-228600">
+              <a:lnSpc>
+                <a:spcPct val="110000"/>
+              </a:lnSpc>
+              <a:spcBef>
+                <a:spcPts val="0"/>
+              </a:spcBef>
+              <a:spcAft>
+                <a:spcPts val="1200"/>
+              </a:spcAft>
+              <a:buChar char="•"/>
+            </a:lvl7pPr>
+            <a:lvl8pPr marL="2362200" indent="-228600">
+              <a:lnSpc>
+                <a:spcPct val="110000"/>
+              </a:lnSpc>
+              <a:spcBef>
+                <a:spcPts val="0"/>
+              </a:spcBef>
+              <a:spcAft>
+                <a:spcPts val="1200"/>
+              </a:spcAft>
+              <a:buChar char="•"/>
+            </a:lvl8pPr>
+            <a:lvl9pPr marL="2667000" indent="-228600">
+              <a:lnSpc>
+                <a:spcPct val="110000"/>
+              </a:lnSpc>
+              <a:spcBef>
+                <a:spcPts val="0"/>
+              </a:spcBef>
+              <a:spcAft>
+                <a:spcPts val="1200"/>
+              </a:spcAft>
+              <a:buChar char="•"/>
+            </a:lvl9pPr>
+          </a:lstStyle>
+          <a:p xmlns:a="http://schemas.openxmlformats.org/drawingml/2006/main"/>
+        </p:txBody>
+      </p:sp>
+    </p:spTree>
+  </p:cSld>
+</p:sldLayout>
+</file>
+
+<file path=ppt/slideLayouts/slideLayout5.xml><?xml version="1.0" encoding="utf-8"?>
+<p:sldLayout xmlns:p="http://schemas.openxmlformats.org/presentationml/2006/main">
+  <p:cSld name="Title and One Column">
+    <p:spTree>
+      <p:nvGrpSpPr>
+        <p:cNvPr id="1" name=""/>
+        <p:cNvGrpSpPr/>
+        <p:nvPr/>
+      </p:nvGrpSpPr>
+      <p:grpSpPr>
+        <a:xfrm xmlns:a="http://schemas.openxmlformats.org/drawingml/2006/main"/>
+      </p:grpSpPr>
+      <p:sp>
+        <p:nvSpPr>
+          <p:cNvPr id="3" name="Title">
+            <a:extLst xmlns:a="http://schemas.openxmlformats.org/drawingml/2006/main">
+              <a:ext uri="{FF2B5EF4-FFF2-40B4-BE49-F238E27FC236}">
+                <a16:creationId xmlns:a16="http://schemas.microsoft.com/office/drawing/2014/main" id="{CE80A213-2133-4D8E-AFDE-2367A1F6ED15}"/>
+              </a:ext>
+            </a:extLst>
+          </p:cNvPr>
+          <p:cNvSpPr>
+            <a:spLocks xmlns:a="http://schemas.openxmlformats.org/drawingml/2006/main" noGrp="1"/>
+          </p:cNvSpPr>
+          <p:nvPr>
+            <p:ph type="title" idx="0"/>
+          </p:nvPr>
+        </p:nvSpPr>
+        <p:spPr>
+          <a:xfrm xmlns:a="http://schemas.openxmlformats.org/drawingml/2006/main">
+            <a:off x="685800" y="533400"/>
+            <a:ext cx="10820400" cy="838200"/>
+          </a:xfrm>
+          <a:prstGeom xmlns:a="http://schemas.openxmlformats.org/drawingml/2006/main" prst="rect">
+            <a:avLst/>
+          </a:prstGeom>
+          <a:noFill xmlns:a="http://schemas.openxmlformats.org/drawingml/2006/main"/>
+          <a:ln xmlns:a="http://schemas.openxmlformats.org/drawingml/2006/main">
+            <a:noFill/>
+            <a:prstDash val="solid"/>
+          </a:ln>
+        </p:spPr>
+        <p:txBody>
+          <a:bodyPr xmlns:a="http://schemas.openxmlformats.org/drawingml/2006/main" wrap="square" lIns="0" tIns="0" rIns="0" bIns="0" anchor="t">
+            <a:normAutofit/>
+          </a:bodyPr>
+          <a:lstStyle xmlns:a="http://schemas.openxmlformats.org/drawingml/2006/main">
+            <a:defPPr algn="l">
+              <a:defRPr sz="3300" b="1">
+                <a:solidFill>
+                  <a:schemeClr val="tx1"/>
+                </a:solidFill>
+                <a:latin typeface="+mj-lt"/>
+                <a:ea typeface="+mj-lt"/>
+                <a:cs typeface="+mj-lt"/>
+              </a:defRPr>
+            </a:defPPr>
+            <a:lvl1pPr marL="0" indent="0">
+              <a:lnSpc>
+                <a:spcPct val="110000"/>
+              </a:lnSpc>
+              <a:spcBef>
+                <a:spcPts val="0"/>
+              </a:spcBef>
+              <a:spcAft>
+                <a:spcPts val="0"/>
+              </a:spcAft>
+              <a:buNone/>
+            </a:lvl1pPr>
+            <a:lvl2pPr marL="0" indent="0">
+              <a:lnSpc>
+                <a:spcPct val="110000"/>
+              </a:lnSpc>
+              <a:spcBef>
+                <a:spcPts val="0"/>
+              </a:spcBef>
+              <a:spcAft>
+                <a:spcPts val="0"/>
+              </a:spcAft>
+              <a:buNone/>
+            </a:lvl2pPr>
+            <a:lvl3pPr marL="0" indent="0">
+              <a:lnSpc>
+                <a:spcPct val="110000"/>
+              </a:lnSpc>
+              <a:spcBef>
+                <a:spcPts val="0"/>
+              </a:spcBef>
+              <a:spcAft>
+                <a:spcPts val="0"/>
+              </a:spcAft>
+              <a:buNone/>
+            </a:lvl3pPr>
+            <a:lvl4pPr marL="0" indent="0">
+              <a:lnSpc>
+                <a:spcPct val="110000"/>
+              </a:lnSpc>
+              <a:spcBef>
+                <a:spcPts val="0"/>
+              </a:spcBef>
+              <a:spcAft>
+                <a:spcPts val="0"/>
+              </a:spcAft>
+              <a:buNone/>
+            </a:lvl4pPr>
+            <a:lvl5pPr marL="0" indent="0">
+              <a:lnSpc>
+                <a:spcPct val="110000"/>
+              </a:lnSpc>
+              <a:spcBef>
+                <a:spcPts val="0"/>
+              </a:spcBef>
+              <a:spcAft>
+                <a:spcPts val="0"/>
+              </a:spcAft>
+              <a:buNone/>
+            </a:lvl5pPr>
+            <a:lvl6pPr marL="0" indent="0">
+              <a:lnSpc>
+                <a:spcPct val="110000"/>
+              </a:lnSpc>
+              <a:spcBef>
+                <a:spcPts val="0"/>
+              </a:spcBef>
+              <a:spcAft>
+                <a:spcPts val="0"/>
+              </a:spcAft>
+              <a:buNone/>
+            </a:lvl6pPr>
+            <a:lvl7pPr marL="0" indent="0">
+              <a:lnSpc>
+                <a:spcPct val="110000"/>
+              </a:lnSpc>
+              <a:spcBef>
+                <a:spcPts val="0"/>
+              </a:spcBef>
+              <a:spcAft>
+                <a:spcPts val="0"/>
+              </a:spcAft>
+              <a:buNone/>
+            </a:lvl7pPr>
+            <a:lvl8pPr marL="0" indent="0">
+              <a:lnSpc>
+                <a:spcPct val="110000"/>
+              </a:lnSpc>
+              <a:spcBef>
+                <a:spcPts val="0"/>
+              </a:spcBef>
+              <a:spcAft>
+                <a:spcPts val="0"/>
+              </a:spcAft>
+              <a:buNone/>
+            </a:lvl8pPr>
+            <a:lvl9pPr marL="0" indent="0">
+              <a:lnSpc>
+                <a:spcPct val="110000"/>
+              </a:lnSpc>
+              <a:spcBef>
+                <a:spcPts val="0"/>
+              </a:spcBef>
+              <a:spcAft>
+                <a:spcPts val="0"/>
+              </a:spcAft>
+              <a:buNone/>
+            </a:lvl9pPr>
+          </a:lstStyle>
+          <a:p xmlns:a="http://schemas.openxmlformats.org/drawingml/2006/main"/>
+        </p:txBody>
+      </p:sp>
+      <p:sp>
+        <p:nvSpPr>
+          <p:cNvPr id="2" name="Left column">
+            <a:extLst xmlns:a="http://schemas.openxmlformats.org/drawingml/2006/main">
+              <a:ext uri="{FF2B5EF4-FFF2-40B4-BE49-F238E27FC236}">
+                <a16:creationId xmlns:a16="http://schemas.microsoft.com/office/drawing/2014/main" id="{B35536F0-13E0-43BD-BD2E-112E03531E0B}"/>
+              </a:ext>
+            </a:extLst>
+          </p:cNvPr>
+          <p:cNvSpPr>
+            <a:spLocks xmlns:a="http://schemas.openxmlformats.org/drawingml/2006/main" noGrp="1"/>
+          </p:cNvSpPr>
+          <p:nvPr>
+            <p:ph type="body" idx="1"/>
+          </p:nvPr>
+        </p:nvSpPr>
+        <p:spPr>
+          <a:xfrm xmlns:a="http://schemas.openxmlformats.org/drawingml/2006/main">
+            <a:off x="685800" y="1905000"/>
+            <a:ext cx="5029200" cy="4267200"/>
+          </a:xfrm>
+          <a:prstGeom xmlns:a="http://schemas.openxmlformats.org/drawingml/2006/main" prst="rect">
+            <a:avLst/>
+          </a:prstGeom>
+          <a:noFill xmlns:a="http://schemas.openxmlformats.org/drawingml/2006/main"/>
+          <a:ln xmlns:a="http://schemas.openxmlformats.org/drawingml/2006/main">
+            <a:noFill/>
+            <a:prstDash val="solid"/>
+          </a:ln>
+        </p:spPr>
+        <p:txBody>
+          <a:bodyPr xmlns:a="http://schemas.openxmlformats.org/drawingml/2006/main" wrap="square" lIns="0" tIns="0" rIns="0" bIns="0" anchor="t">
+            <a:normAutofit/>
+          </a:bodyPr>
+          <a:lstStyle xmlns:a="http://schemas.openxmlformats.org/drawingml/2006/main">
+            <a:defPPr algn="l">
+              <a:defRPr sz="2250" b="0">
+                <a:solidFill>
+                  <a:schemeClr val="tx1"/>
+                </a:solidFill>
+                <a:latin typeface="+mn-lt"/>
+                <a:ea typeface="+mn-lt"/>
+                <a:cs typeface="+mn-lt"/>
+              </a:defRPr>
+            </a:defPPr>
+            <a:lvl1pPr marL="228600" indent="-228600">
+              <a:lnSpc>
+                <a:spcPct val="110000"/>
+              </a:lnSpc>
+              <a:spcBef>
+                <a:spcPts val="0"/>
+              </a:spcBef>
+              <a:spcAft>
+                <a:spcPts val="1200"/>
+              </a:spcAft>
+              <a:buChar char="•"/>
+            </a:lvl1pPr>
+            <a:lvl2pPr marL="533400" indent="-228600">
+              <a:lnSpc>
+                <a:spcPct val="110000"/>
+              </a:lnSpc>
+              <a:spcBef>
+                <a:spcPts val="0"/>
+              </a:spcBef>
+              <a:spcAft>
+                <a:spcPts val="1200"/>
+              </a:spcAft>
+              <a:buChar char="•"/>
+            </a:lvl2pPr>
+            <a:lvl3pPr marL="838200" indent="-228600">
+              <a:lnSpc>
+                <a:spcPct val="110000"/>
+              </a:lnSpc>
+              <a:spcBef>
+                <a:spcPts val="0"/>
+              </a:spcBef>
+              <a:spcAft>
+                <a:spcPts val="1200"/>
+              </a:spcAft>
+              <a:buChar char="•"/>
+            </a:lvl3pPr>
+            <a:lvl4pPr marL="1143000" indent="-228600">
+              <a:lnSpc>
+                <a:spcPct val="110000"/>
+              </a:lnSpc>
+              <a:spcBef>
+                <a:spcPts val="0"/>
+              </a:spcBef>
+              <a:spcAft>
+                <a:spcPts val="1200"/>
+              </a:spcAft>
+              <a:buChar char="•"/>
+            </a:lvl4pPr>
+            <a:lvl5pPr marL="1447800" indent="-228600">
+              <a:lnSpc>
+                <a:spcPct val="110000"/>
+              </a:lnSpc>
+              <a:spcBef>
+                <a:spcPts val="0"/>
+              </a:spcBef>
+              <a:spcAft>
+                <a:spcPts val="1200"/>
+              </a:spcAft>
+              <a:buChar char="•"/>
+            </a:lvl5pPr>
+            <a:lvl6pPr marL="1752600" indent="-228600">
+              <a:lnSpc>
+                <a:spcPct val="110000"/>
+              </a:lnSpc>
+              <a:spcBef>
+                <a:spcPts val="0"/>
+              </a:spcBef>
+              <a:spcAft>
+                <a:spcPts val="1200"/>
+              </a:spcAft>
+              <a:buChar char="•"/>
+            </a:lvl6pPr>
+            <a:lvl7pPr marL="2057400" indent="-228600">
+              <a:lnSpc>
+                <a:spcPct val="110000"/>
+              </a:lnSpc>
+              <a:spcBef>
+                <a:spcPts val="0"/>
+              </a:spcBef>
+              <a:spcAft>
+                <a:spcPts val="1200"/>
+              </a:spcAft>
+              <a:buChar char="•"/>
+            </a:lvl7pPr>
+            <a:lvl8pPr marL="2362200" indent="-228600">
+              <a:lnSpc>
+                <a:spcPct val="110000"/>
+              </a:lnSpc>
+              <a:spcBef>
+                <a:spcPts val="0"/>
+              </a:spcBef>
+              <a:spcAft>
+                <a:spcPts val="1200"/>
+              </a:spcAft>
+              <a:buChar char="•"/>
+            </a:lvl8pPr>
+            <a:lvl9pPr marL="2667000" indent="-228600">
+              <a:lnSpc>
+                <a:spcPct val="110000"/>
+              </a:lnSpc>
+              <a:spcBef>
+                <a:spcPts val="0"/>
+              </a:spcBef>
+              <a:spcAft>
+                <a:spcPts val="1200"/>
+              </a:spcAft>
+              <a:buChar char="•"/>
+            </a:lvl9pPr>
+          </a:lstStyle>
+          <a:p xmlns:a="http://schemas.openxmlformats.org/drawingml/2006/main"/>
+        </p:txBody>
+      </p:sp>
+    </p:spTree>
+  </p:cSld>
+</p:sldLayout>
+</file>
+
+<file path=ppt/slideLayouts/slideLayout6.xml><?xml version="1.0" encoding="utf-8"?>
+<p:sldLayout xmlns:p="http://schemas.openxmlformats.org/presentationml/2006/main" type="blank">
+  <p:cSld name="Blank">
     <p:spTree>
       <p:nvGrpSpPr>
         <p:cNvPr id="1" name=""/>
@@ -936,7 +3062,12 @@
   </p:cSld>
   <p:clrMap bg1="lt1" tx1="dk1" bg2="lt2" tx2="dk2" accent1="accent1" accent2="accent2" accent3="accent3" accent4="accent4" accent5="accent5" accent6="accent6" hlink="hlink" folHlink="folHlink"/>
   <p:sldLayoutIdLst>
-    <p:sldLayoutId xmlns:r="http://schemas.openxmlformats.org/officeDocument/2006/relationships" id="2147483649" r:id="R56341f5e9be0464c"/>
+    <p:sldLayoutId xmlns:r="http://schemas.openxmlformats.org/officeDocument/2006/relationships" id="2147483649" r:id="R8ec28c2138814f47"/>
+    <p:sldLayoutId xmlns:r="http://schemas.openxmlformats.org/officeDocument/2006/relationships" id="2147483650" r:id="R419ef0738e9a49df"/>
+    <p:sldLayoutId xmlns:r="http://schemas.openxmlformats.org/officeDocument/2006/relationships" id="2147483651" r:id="Rf361d240b0b24942"/>
+    <p:sldLayoutId xmlns:r="http://schemas.openxmlformats.org/officeDocument/2006/relationships" id="2147483652" r:id="R5364b7972616439a"/>
+    <p:sldLayoutId xmlns:r="http://schemas.openxmlformats.org/officeDocument/2006/relationships" id="2147483653" r:id="Rb4310c30b8d24709"/>
+    <p:sldLayoutId xmlns:r="http://schemas.openxmlformats.org/officeDocument/2006/relationships" id="2147483654" r:id="Rdcd5164da0cb475f"/>
   </p:sldLayoutIdLst>
   <p:txStyles>
     <p:titleStyle>
@@ -1259,16 +3390,16 @@
         <a:srgbClr val="96607D"/>
       </a:folHlink>
     </a:clrScheme>
-    <a:fontScheme name="Office">
+    <a:fontScheme name="">
       <a:majorFont>
-        <a:latin typeface="Calibri Light"/>
-        <a:ea typeface="Calibri Light"/>
-        <a:cs typeface="Calibri Light"/>
+        <a:latin typeface="Aptos"/>
+        <a:ea typeface=""/>
+        <a:cs typeface=""/>
       </a:majorFont>
       <a:minorFont>
-        <a:latin typeface="Calibri"/>
-        <a:ea typeface="Calibri"/>
-        <a:cs typeface="Calibri"/>
+        <a:latin typeface="Aptos"/>
+        <a:ea typeface=""/>
+        <a:cs typeface=""/>
       </a:minorFont>
     </a:fontScheme>
     <a:fmtScheme name="ChatGPT">
@@ -1487,7 +3618,7 @@
           <p:cNvPr id="12" name="">
             <a:extLst xmlns:a="http://schemas.openxmlformats.org/drawingml/2006/main">
               <a:ext uri="{FF2B5EF4-FFF2-40B4-BE49-F238E27FC236}">
-                <a16:creationId xmlns:a16="http://schemas.microsoft.com/office/drawing/2014/main" id="{96EE7C58-31FA-4B26-84D6-97FC0F67FB86}"/>
+                <a16:creationId xmlns:a16="http://schemas.microsoft.com/office/drawing/2014/main" id="{96B05340-9A2A-4DBF-8D5A-2D2B166E59FA}"/>
               </a:ext>
             </a:extLst>
           </p:cNvPr>
@@ -1514,14 +3645,20 @@
       </p:sp>
       <p:pic>
         <p:nvPicPr>
-          <p:cNvPr id="13" name=""/>
+          <p:cNvPr id="2" name="">
+            <a:extLst xmlns:a="http://schemas.openxmlformats.org/drawingml/2006/main">
+              <a:ext uri="{FF2B5EF4-FFF2-40B4-BE49-F238E27FC236}">
+                <a16:creationId xmlns:a16="http://schemas.microsoft.com/office/drawing/2014/main" id="{CF151C7E-BEF0-4BC4-9E94-EDC309A30CEB}"/>
+              </a:ext>
+            </a:extLst>
+          </p:cNvPr>
           <p:cNvPicPr>
             <a:picLocks xmlns:a="http://schemas.openxmlformats.org/drawingml/2006/main" noChangeAspect="1"/>
           </p:cNvPicPr>
           <p:nvPr/>
         </p:nvPicPr>
         <p:blipFill>
-          <a:blip xmlns:r="http://schemas.openxmlformats.org/officeDocument/2006/relationships" xmlns:a="http://schemas.openxmlformats.org/drawingml/2006/main" r:embed="Rd27aece6dacd4be7"/>
+          <a:blip xmlns:r="http://schemas.openxmlformats.org/officeDocument/2006/relationships" xmlns:a="http://schemas.openxmlformats.org/drawingml/2006/main" r:embed="R88c024e62d0a426c"/>
           <a:stretch xmlns:a="http://schemas.openxmlformats.org/drawingml/2006/main"/>
         </p:blipFill>
         <p:spPr>
@@ -1536,14 +3673,20 @@
       </p:pic>
       <p:pic>
         <p:nvPicPr>
-          <p:cNvPr id="14" name=""/>
+          <p:cNvPr id="3" name="">
+            <a:extLst xmlns:a="http://schemas.openxmlformats.org/drawingml/2006/main">
+              <a:ext uri="{FF2B5EF4-FFF2-40B4-BE49-F238E27FC236}">
+                <a16:creationId xmlns:a16="http://schemas.microsoft.com/office/drawing/2014/main" id="{82292135-6740-487A-913B-279C4D47DB27}"/>
+              </a:ext>
+            </a:extLst>
+          </p:cNvPr>
           <p:cNvPicPr>
             <a:picLocks xmlns:a="http://schemas.openxmlformats.org/drawingml/2006/main" noChangeAspect="1"/>
           </p:cNvPicPr>
           <p:nvPr/>
         </p:nvPicPr>
         <p:blipFill>
-          <a:blip xmlns:r="http://schemas.openxmlformats.org/officeDocument/2006/relationships" xmlns:a="http://schemas.openxmlformats.org/drawingml/2006/main" r:embed="Rf8870758f48e43dc"/>
+          <a:blip xmlns:r="http://schemas.openxmlformats.org/officeDocument/2006/relationships" xmlns:a="http://schemas.openxmlformats.org/drawingml/2006/main" r:embed="R6fc0c611984e42a3"/>
           <a:stretch xmlns:a="http://schemas.openxmlformats.org/drawingml/2006/main"/>
         </p:blipFill>
         <p:spPr>
@@ -1561,7 +3704,7 @@
           <p:cNvPr id="4" name="">
             <a:extLst xmlns:a="http://schemas.openxmlformats.org/drawingml/2006/main">
               <a:ext uri="{FF2B5EF4-FFF2-40B4-BE49-F238E27FC236}">
-                <a16:creationId xmlns:a16="http://schemas.microsoft.com/office/drawing/2014/main" id="{A542FA97-A9AA-4943-83E8-78F9525F99A2}"/>
+                <a16:creationId xmlns:a16="http://schemas.microsoft.com/office/drawing/2014/main" id="{EA12E331-2937-486C-B124-DB66BAE2B54C}"/>
               </a:ext>
             </a:extLst>
           </p:cNvPr>
@@ -1587,7 +3730,18 @@
           <a:bodyPr xmlns:a="http://schemas.openxmlformats.org/drawingml/2006/main" wrap="square" lIns="0" tIns="0" rIns="0" bIns="0" anchor="t">
             <a:noAutofit/>
           </a:bodyPr>
-          <a:lstStyle xmlns:a="http://schemas.openxmlformats.org/drawingml/2006/main"/>
+          <a:lstStyle xmlns:a="http://schemas.openxmlformats.org/drawingml/2006/main">
+            <a:defPPr>
+              <a:defRPr sz="1050" b="1">
+                <a:solidFill>
+                  <a:srgbClr val="9B7744"/>
+                </a:solidFill>
+                <a:latin typeface="Pretendard"/>
+                <a:ea typeface="Pretendard"/>
+                <a:cs typeface="Pretendard"/>
+              </a:defRPr>
+            </a:defPPr>
+          </a:lstStyle>
           <a:p xmlns:a="http://schemas.openxmlformats.org/drawingml/2006/main">
             <a:pPr>
               <a:defRPr sz="1050" b="1">
@@ -1618,7 +3772,7 @@
           <p:cNvPr id="5" name="">
             <a:extLst xmlns:a="http://schemas.openxmlformats.org/drawingml/2006/main">
               <a:ext uri="{FF2B5EF4-FFF2-40B4-BE49-F238E27FC236}">
-                <a16:creationId xmlns:a16="http://schemas.microsoft.com/office/drawing/2014/main" id="{3DC9F8EF-D88E-4AC6-91E5-6220FEA394B1}"/>
+                <a16:creationId xmlns:a16="http://schemas.microsoft.com/office/drawing/2014/main" id="{A138A14A-B9A4-44FA-A27D-800821902457}"/>
               </a:ext>
             </a:extLst>
           </p:cNvPr>
@@ -1644,7 +3798,18 @@
           <a:bodyPr xmlns:a="http://schemas.openxmlformats.org/drawingml/2006/main" wrap="square" lIns="0" tIns="0" rIns="0" bIns="0" anchor="t">
             <a:noAutofit/>
           </a:bodyPr>
-          <a:lstStyle xmlns:a="http://schemas.openxmlformats.org/drawingml/2006/main"/>
+          <a:lstStyle xmlns:a="http://schemas.openxmlformats.org/drawingml/2006/main">
+            <a:defPPr>
+              <a:defRPr sz="4950" b="1">
+                <a:solidFill>
+                  <a:srgbClr val="1B1D19"/>
+                </a:solidFill>
+                <a:latin typeface="Pretendard"/>
+                <a:ea typeface="Pretendard"/>
+                <a:cs typeface="Pretendard"/>
+              </a:defRPr>
+            </a:defPPr>
+          </a:lstStyle>
           <a:p xmlns:a="http://schemas.openxmlformats.org/drawingml/2006/main">
             <a:pPr>
               <a:defRPr sz="4950" b="1">
@@ -1721,7 +3886,7 @@
           <p:cNvPr id="6" name="">
             <a:extLst xmlns:a="http://schemas.openxmlformats.org/drawingml/2006/main">
               <a:ext uri="{FF2B5EF4-FFF2-40B4-BE49-F238E27FC236}">
-                <a16:creationId xmlns:a16="http://schemas.microsoft.com/office/drawing/2014/main" id="{3D760FD1-81C1-4201-B0C0-2E50013A266E}"/>
+                <a16:creationId xmlns:a16="http://schemas.microsoft.com/office/drawing/2014/main" id="{77A71D03-6B2D-4C85-846C-0CC13418E1A8}"/>
               </a:ext>
             </a:extLst>
           </p:cNvPr>
@@ -1747,7 +3912,18 @@
           <a:bodyPr xmlns:a="http://schemas.openxmlformats.org/drawingml/2006/main" wrap="square" lIns="0" tIns="0" rIns="0" bIns="0" anchor="t">
             <a:noAutofit/>
           </a:bodyPr>
-          <a:lstStyle xmlns:a="http://schemas.openxmlformats.org/drawingml/2006/main"/>
+          <a:lstStyle xmlns:a="http://schemas.openxmlformats.org/drawingml/2006/main">
+            <a:defPPr>
+              <a:defRPr sz="1800" b="0">
+                <a:solidFill>
+                  <a:srgbClr val="6B7265"/>
+                </a:solidFill>
+                <a:latin typeface="Pretendard"/>
+                <a:ea typeface="Pretendard"/>
+                <a:cs typeface="Pretendard"/>
+              </a:defRPr>
+            </a:defPPr>
+          </a:lstStyle>
           <a:p xmlns:a="http://schemas.openxmlformats.org/drawingml/2006/main">
             <a:pPr>
               <a:defRPr sz="1800" b="0">
@@ -1768,7 +3944,7 @@
                 <a:ea typeface="Pretendard"/>
                 <a:cs typeface="Pretendard"/>
               </a:rPr>
-              <a:t>Operative Videos</a:t>
+              <a:t>Clinical Cases and Perioperative Care</a:t>
             </a:r>
           </a:p>
         </p:txBody>
@@ -1778,7 +3954,7 @@
           <p:cNvPr id="7" name="">
             <a:extLst xmlns:a="http://schemas.openxmlformats.org/drawingml/2006/main">
               <a:ext uri="{FF2B5EF4-FFF2-40B4-BE49-F238E27FC236}">
-                <a16:creationId xmlns:a16="http://schemas.microsoft.com/office/drawing/2014/main" id="{8CF266DD-BB40-4A25-B5ED-02EAB95C1AC0}"/>
+                <a16:creationId xmlns:a16="http://schemas.microsoft.com/office/drawing/2014/main" id="{F00020FD-002B-4A61-AD32-80F0D9403B83}"/>
               </a:ext>
             </a:extLst>
           </p:cNvPr>
@@ -1808,7 +3984,7 @@
           <p:cNvPr id="8" name="">
             <a:extLst xmlns:a="http://schemas.openxmlformats.org/drawingml/2006/main">
               <a:ext uri="{FF2B5EF4-FFF2-40B4-BE49-F238E27FC236}">
-                <a16:creationId xmlns:a16="http://schemas.microsoft.com/office/drawing/2014/main" id="{22EAD373-4A81-43F2-B34D-F30ABA419566}"/>
+                <a16:creationId xmlns:a16="http://schemas.microsoft.com/office/drawing/2014/main" id="{37E7F3F9-5F5B-46AF-AC8E-030117740298}"/>
               </a:ext>
             </a:extLst>
           </p:cNvPr>
@@ -1834,7 +4010,18 @@
           <a:bodyPr xmlns:a="http://schemas.openxmlformats.org/drawingml/2006/main" wrap="square" lIns="0" tIns="0" rIns="0" bIns="0" anchor="t">
             <a:noAutofit/>
           </a:bodyPr>
-          <a:lstStyle xmlns:a="http://schemas.openxmlformats.org/drawingml/2006/main"/>
+          <a:lstStyle xmlns:a="http://schemas.openxmlformats.org/drawingml/2006/main">
+            <a:defPPr>
+              <a:defRPr sz="1800" b="1">
+                <a:solidFill>
+                  <a:srgbClr val="1B1D19"/>
+                </a:solidFill>
+                <a:latin typeface="Pretendard"/>
+                <a:ea typeface="Pretendard"/>
+                <a:cs typeface="Pretendard"/>
+              </a:defRPr>
+            </a:defPPr>
+          </a:lstStyle>
           <a:p xmlns:a="http://schemas.openxmlformats.org/drawingml/2006/main">
             <a:pPr>
               <a:defRPr sz="1800" b="1">
@@ -1865,7 +4052,7 @@
           <p:cNvPr id="9" name="">
             <a:extLst xmlns:a="http://schemas.openxmlformats.org/drawingml/2006/main">
               <a:ext uri="{FF2B5EF4-FFF2-40B4-BE49-F238E27FC236}">
-                <a16:creationId xmlns:a16="http://schemas.microsoft.com/office/drawing/2014/main" id="{9B00477D-B705-46E0-B4B7-F4E7FF8D9FA3}"/>
+                <a16:creationId xmlns:a16="http://schemas.microsoft.com/office/drawing/2014/main" id="{1576C54B-CCC2-4AED-A8E2-7CF7649B23A6}"/>
               </a:ext>
             </a:extLst>
           </p:cNvPr>
@@ -1891,7 +4078,18 @@
           <a:bodyPr xmlns:a="http://schemas.openxmlformats.org/drawingml/2006/main" wrap="square" lIns="0" tIns="0" rIns="0" bIns="0" anchor="t">
             <a:noAutofit/>
           </a:bodyPr>
-          <a:lstStyle xmlns:a="http://schemas.openxmlformats.org/drawingml/2006/main"/>
+          <a:lstStyle xmlns:a="http://schemas.openxmlformats.org/drawingml/2006/main">
+            <a:defPPr>
+              <a:defRPr sz="1200" b="0">
+                <a:solidFill>
+                  <a:srgbClr val="6B7265"/>
+                </a:solidFill>
+                <a:latin typeface="Pretendard"/>
+                <a:ea typeface="Pretendard"/>
+                <a:cs typeface="Pretendard"/>
+              </a:defRPr>
+            </a:defPPr>
+          </a:lstStyle>
           <a:p xmlns:a="http://schemas.openxmlformats.org/drawingml/2006/main">
             <a:pPr>
               <a:defRPr sz="1200" b="0">
@@ -1922,7 +4120,7 @@
           <p:cNvPr id="10" name="">
             <a:extLst xmlns:a="http://schemas.openxmlformats.org/drawingml/2006/main">
               <a:ext uri="{FF2B5EF4-FFF2-40B4-BE49-F238E27FC236}">
-                <a16:creationId xmlns:a16="http://schemas.microsoft.com/office/drawing/2014/main" id="{0D3712D6-C877-4FF7-B615-8C299E15D2A0}"/>
+                <a16:creationId xmlns:a16="http://schemas.microsoft.com/office/drawing/2014/main" id="{8F137CD0-F9C1-4C70-A547-E216B1EC1724}"/>
               </a:ext>
             </a:extLst>
           </p:cNvPr>
@@ -1948,7 +4146,18 @@
           <a:bodyPr xmlns:a="http://schemas.openxmlformats.org/drawingml/2006/main" wrap="square" lIns="0" tIns="0" rIns="0" bIns="0" anchor="t">
             <a:noAutofit/>
           </a:bodyPr>
-          <a:lstStyle xmlns:a="http://schemas.openxmlformats.org/drawingml/2006/main"/>
+          <a:lstStyle xmlns:a="http://schemas.openxmlformats.org/drawingml/2006/main">
+            <a:defPPr>
+              <a:defRPr sz="975" b="0">
+                <a:solidFill>
+                  <a:srgbClr val="858B7E"/>
+                </a:solidFill>
+                <a:latin typeface="Pretendard"/>
+                <a:ea typeface="Pretendard"/>
+                <a:cs typeface="Pretendard"/>
+              </a:defRPr>
+            </a:defPPr>
+          </a:lstStyle>
           <a:p xmlns:a="http://schemas.openxmlformats.org/drawingml/2006/main">
             <a:pPr>
               <a:defRPr sz="975" b="0">
@@ -1979,7 +4188,7 @@
           <p:cNvPr id="11" name="">
             <a:extLst xmlns:a="http://schemas.openxmlformats.org/drawingml/2006/main">
               <a:ext uri="{FF2B5EF4-FFF2-40B4-BE49-F238E27FC236}">
-                <a16:creationId xmlns:a16="http://schemas.microsoft.com/office/drawing/2014/main" id="{EC5CEF8B-182E-4B68-A029-670ACF99CE81}"/>
+                <a16:creationId xmlns:a16="http://schemas.microsoft.com/office/drawing/2014/main" id="{3ED7AD41-F0FC-4AA7-839B-979EF0624324}"/>
               </a:ext>
             </a:extLst>
           </p:cNvPr>
@@ -2005,7 +4214,18 @@
           <a:bodyPr xmlns:a="http://schemas.openxmlformats.org/drawingml/2006/main" wrap="square" lIns="0" tIns="0" rIns="0" bIns="0" anchor="t">
             <a:noAutofit/>
           </a:bodyPr>
-          <a:lstStyle xmlns:a="http://schemas.openxmlformats.org/drawingml/2006/main"/>
+          <a:lstStyle xmlns:a="http://schemas.openxmlformats.org/drawingml/2006/main">
+            <a:defPPr>
+              <a:defRPr sz="975" b="0">
+                <a:solidFill>
+                  <a:srgbClr val="858B7E"/>
+                </a:solidFill>
+                <a:latin typeface="Pretendard"/>
+                <a:ea typeface="Pretendard"/>
+                <a:cs typeface="Pretendard"/>
+              </a:defRPr>
+            </a:defPPr>
+          </a:lstStyle>
           <a:p xmlns:a="http://schemas.openxmlformats.org/drawingml/2006/main">
             <a:pPr>
               <a:defRPr sz="975" b="0">
@@ -2034,7 +4254,2365 @@
     </p:spTree>
     <p:extLst>
       <p:ext uri="{BB962C8B-B14F-4D97-AF65-F5344CB8AC3E}">
-        <p14:creationId xmlns:p14="http://schemas.microsoft.com/office/powerpoint/2010/main" val="93795208"/>
+        <p14:creationId xmlns:p14="http://schemas.microsoft.com/office/powerpoint/2010/main" val="1674288663"/>
+      </p:ext>
+    </p:extLst>
+  </p:cSld>
+</p:sld>
+</file>
+
+<file path=ppt/slides/slide10.xml><?xml version="1.0" encoding="utf-8"?>
+<p:sld xmlns:p="http://schemas.openxmlformats.org/presentationml/2006/main">
+  <p:cSld>
+    <p:bg>
+      <p:bgPr>
+        <a:solidFill xmlns:a="http://schemas.openxmlformats.org/drawingml/2006/main">
+          <a:srgbClr val="FFFFFF"/>
+        </a:solidFill>
+      </p:bgPr>
+    </p:bg>
+    <p:spTree>
+      <p:nvGrpSpPr>
+        <p:cNvPr id="1" name=""/>
+        <p:cNvGrpSpPr/>
+        <p:nvPr/>
+      </p:nvGrpSpPr>
+      <p:grpSpPr>
+        <a:xfrm xmlns:a="http://schemas.openxmlformats.org/drawingml/2006/main"/>
+      </p:grpSpPr>
+      <p:sp>
+        <p:nvSpPr>
+          <p:cNvPr id="7" name="">
+            <a:extLst xmlns:a="http://schemas.openxmlformats.org/drawingml/2006/main">
+              <a:ext uri="{FF2B5EF4-FFF2-40B4-BE49-F238E27FC236}">
+                <a16:creationId xmlns:a16="http://schemas.microsoft.com/office/drawing/2014/main" id="{935FAA76-0F42-49D4-8EBC-42741517C759}"/>
+              </a:ext>
+            </a:extLst>
+          </p:cNvPr>
+          <p:cNvSpPr>
+            <a:spLocks xmlns:a="http://schemas.openxmlformats.org/drawingml/2006/main" noGrp="1"/>
+          </p:cNvSpPr>
+          <p:nvPr/>
+        </p:nvSpPr>
+        <p:spPr>
+          <a:xfrm xmlns:a="http://schemas.openxmlformats.org/drawingml/2006/main">
+            <a:off x="685800" y="619125"/>
+            <a:ext cx="10668000" cy="247650"/>
+          </a:xfrm>
+          <a:prstGeom xmlns:a="http://schemas.openxmlformats.org/drawingml/2006/main" prst="rect">
+            <a:avLst/>
+          </a:prstGeom>
+          <a:noFill xmlns:a="http://schemas.openxmlformats.org/drawingml/2006/main"/>
+          <a:ln xmlns:a="http://schemas.openxmlformats.org/drawingml/2006/main" w="0">
+            <a:noFill/>
+          </a:ln>
+        </p:spPr>
+        <p:txBody>
+          <a:bodyPr xmlns:a="http://schemas.openxmlformats.org/drawingml/2006/main" wrap="square" lIns="0" tIns="0" rIns="0" bIns="0" anchor="t">
+            <a:noAutofit/>
+          </a:bodyPr>
+          <a:lstStyle xmlns:a="http://schemas.openxmlformats.org/drawingml/2006/main">
+            <a:defPPr>
+              <a:defRPr sz="1050" b="1">
+                <a:solidFill>
+                  <a:srgbClr val="9B7744"/>
+                </a:solidFill>
+                <a:latin typeface="Pretendard"/>
+                <a:ea typeface="Pretendard"/>
+                <a:cs typeface="Pretendard"/>
+              </a:defRPr>
+            </a:defPPr>
+          </a:lstStyle>
+          <a:p xmlns:a="http://schemas.openxmlformats.org/drawingml/2006/main">
+            <a:pPr>
+              <a:defRPr sz="1050" b="1">
+                <a:solidFill>
+                  <a:srgbClr val="9B7744"/>
+                </a:solidFill>
+                <a:latin typeface="Pretendard"/>
+                <a:ea typeface="Pretendard"/>
+                <a:cs typeface="Pretendard"/>
+              </a:defRPr>
+            </a:pPr>
+            <a:r>
+              <a:rPr sz="1050" b="1">
+                <a:solidFill>
+                  <a:srgbClr val="9B7744"/>
+                </a:solidFill>
+                <a:latin typeface="Pretendard"/>
+                <a:ea typeface="Pretendard"/>
+                <a:cs typeface="Pretendard"/>
+              </a:rPr>
+              <a:t>CLINICAL CASES / CASE 5</a:t>
+            </a:r>
+          </a:p>
+        </p:txBody>
+      </p:sp>
+      <p:sp>
+        <p:nvSpPr>
+          <p:cNvPr id="2" name="">
+            <a:extLst xmlns:a="http://schemas.openxmlformats.org/drawingml/2006/main">
+              <a:ext uri="{FF2B5EF4-FFF2-40B4-BE49-F238E27FC236}">
+                <a16:creationId xmlns:a16="http://schemas.microsoft.com/office/drawing/2014/main" id="{87404876-D910-452A-9E9E-7FF58A962C18}"/>
+              </a:ext>
+            </a:extLst>
+          </p:cNvPr>
+          <p:cNvSpPr>
+            <a:spLocks xmlns:a="http://schemas.openxmlformats.org/drawingml/2006/main" noGrp="1"/>
+          </p:cNvSpPr>
+          <p:nvPr/>
+        </p:nvSpPr>
+        <p:spPr>
+          <a:xfrm xmlns:a="http://schemas.openxmlformats.org/drawingml/2006/main">
+            <a:off x="685800" y="1047750"/>
+            <a:ext cx="10820400" cy="1085850"/>
+          </a:xfrm>
+          <a:prstGeom xmlns:a="http://schemas.openxmlformats.org/drawingml/2006/main" prst="rect">
+            <a:avLst/>
+          </a:prstGeom>
+          <a:noFill xmlns:a="http://schemas.openxmlformats.org/drawingml/2006/main"/>
+          <a:ln xmlns:a="http://schemas.openxmlformats.org/drawingml/2006/main" w="0">
+            <a:noFill/>
+          </a:ln>
+        </p:spPr>
+        <p:txBody>
+          <a:bodyPr xmlns:a="http://schemas.openxmlformats.org/drawingml/2006/main" wrap="square" lIns="0" tIns="0" rIns="0" bIns="0" anchor="t">
+            <a:noAutofit/>
+          </a:bodyPr>
+          <a:lstStyle xmlns:a="http://schemas.openxmlformats.org/drawingml/2006/main">
+            <a:defPPr>
+              <a:defRPr sz="3450" b="1">
+                <a:solidFill>
+                  <a:srgbClr val="1B1D19"/>
+                </a:solidFill>
+                <a:latin typeface="Pretendard"/>
+                <a:ea typeface="Pretendard"/>
+                <a:cs typeface="Pretendard"/>
+              </a:defRPr>
+            </a:defPPr>
+          </a:lstStyle>
+          <a:p xmlns:a="http://schemas.openxmlformats.org/drawingml/2006/main">
+            <a:pPr>
+              <a:defRPr sz="3450" b="1">
+                <a:solidFill>
+                  <a:srgbClr val="1B1D19"/>
+                </a:solidFill>
+                <a:latin typeface="Pretendard"/>
+                <a:ea typeface="Pretendard"/>
+                <a:cs typeface="Pretendard"/>
+              </a:defRPr>
+            </a:pPr>
+            <a:r>
+              <a:rPr sz="3450" b="1">
+                <a:solidFill>
+                  <a:srgbClr val="1B1D19"/>
+                </a:solidFill>
+                <a:latin typeface="Pretendard"/>
+                <a:ea typeface="Pretendard"/>
+                <a:cs typeface="Pretendard"/>
+              </a:rPr>
+              <a:t>Contour Step-off Correction</a:t>
+            </a:r>
+          </a:p>
+        </p:txBody>
+      </p:sp>
+      <p:sp>
+        <p:nvSpPr>
+          <p:cNvPr id="3" name="">
+            <a:extLst xmlns:a="http://schemas.openxmlformats.org/drawingml/2006/main">
+              <a:ext uri="{FF2B5EF4-FFF2-40B4-BE49-F238E27FC236}">
+                <a16:creationId xmlns:a16="http://schemas.microsoft.com/office/drawing/2014/main" id="{6D01EE4C-4CB4-4277-B37D-97B801B80D96}"/>
+              </a:ext>
+            </a:extLst>
+          </p:cNvPr>
+          <p:cNvSpPr>
+            <a:spLocks xmlns:a="http://schemas.openxmlformats.org/drawingml/2006/main" noGrp="1"/>
+          </p:cNvSpPr>
+          <p:nvPr/>
+        </p:nvSpPr>
+        <p:spPr>
+          <a:xfrm xmlns:a="http://schemas.openxmlformats.org/drawingml/2006/main">
+            <a:off x="685800" y="2476500"/>
+            <a:ext cx="10820400" cy="3524250"/>
+          </a:xfrm>
+          <a:prstGeom xmlns:a="http://schemas.openxmlformats.org/drawingml/2006/main" prst="rect">
+            <a:avLst/>
+          </a:prstGeom>
+          <a:solidFill xmlns:a="http://schemas.openxmlformats.org/drawingml/2006/main">
+            <a:srgbClr val="F7F7F3"/>
+          </a:solidFill>
+          <a:ln xmlns:a="http://schemas.openxmlformats.org/drawingml/2006/main" w="0">
+            <a:noFill/>
+          </a:ln>
+        </p:spPr>
+      </p:sp>
+      <p:sp>
+        <p:nvSpPr>
+          <p:cNvPr id="4" name="">
+            <a:extLst xmlns:a="http://schemas.openxmlformats.org/drawingml/2006/main">
+              <a:ext uri="{FF2B5EF4-FFF2-40B4-BE49-F238E27FC236}">
+                <a16:creationId xmlns:a16="http://schemas.microsoft.com/office/drawing/2014/main" id="{ABCA1C07-9410-4344-95E3-92D6A6A8F5BD}"/>
+              </a:ext>
+            </a:extLst>
+          </p:cNvPr>
+          <p:cNvSpPr>
+            <a:spLocks xmlns:a="http://schemas.openxmlformats.org/drawingml/2006/main" noGrp="1"/>
+          </p:cNvSpPr>
+          <p:nvPr/>
+        </p:nvSpPr>
+        <p:spPr>
+          <a:xfrm xmlns:a="http://schemas.openxmlformats.org/drawingml/2006/main">
+            <a:off x="685800" y="2476500"/>
+            <a:ext cx="10820400" cy="9525"/>
+          </a:xfrm>
+          <a:prstGeom xmlns:a="http://schemas.openxmlformats.org/drawingml/2006/main" prst="rect">
+            <a:avLst/>
+          </a:prstGeom>
+          <a:solidFill xmlns:a="http://schemas.openxmlformats.org/drawingml/2006/main">
+            <a:srgbClr val="DEDFD6"/>
+          </a:solidFill>
+          <a:ln xmlns:a="http://schemas.openxmlformats.org/drawingml/2006/main" w="0">
+            <a:noFill/>
+          </a:ln>
+        </p:spPr>
+      </p:sp>
+      <p:sp>
+        <p:nvSpPr>
+          <p:cNvPr id="5" name="">
+            <a:extLst xmlns:a="http://schemas.openxmlformats.org/drawingml/2006/main">
+              <a:ext uri="{FF2B5EF4-FFF2-40B4-BE49-F238E27FC236}">
+                <a16:creationId xmlns:a16="http://schemas.microsoft.com/office/drawing/2014/main" id="{1D6AC46C-7F38-4264-877F-0ED987440B3B}"/>
+              </a:ext>
+            </a:extLst>
+          </p:cNvPr>
+          <p:cNvSpPr>
+            <a:spLocks xmlns:a="http://schemas.openxmlformats.org/drawingml/2006/main" noGrp="1"/>
+          </p:cNvSpPr>
+          <p:nvPr/>
+        </p:nvSpPr>
+        <p:spPr>
+          <a:xfrm xmlns:a="http://schemas.openxmlformats.org/drawingml/2006/main">
+            <a:off x="685800" y="6448425"/>
+            <a:ext cx="10191750" cy="228600"/>
+          </a:xfrm>
+          <a:prstGeom xmlns:a="http://schemas.openxmlformats.org/drawingml/2006/main" prst="rect">
+            <a:avLst/>
+          </a:prstGeom>
+          <a:noFill xmlns:a="http://schemas.openxmlformats.org/drawingml/2006/main"/>
+          <a:ln xmlns:a="http://schemas.openxmlformats.org/drawingml/2006/main" w="0">
+            <a:noFill/>
+          </a:ln>
+        </p:spPr>
+        <p:txBody>
+          <a:bodyPr xmlns:a="http://schemas.openxmlformats.org/drawingml/2006/main" wrap="square" lIns="0" tIns="0" rIns="0" bIns="0" anchor="t">
+            <a:noAutofit/>
+          </a:bodyPr>
+          <a:lstStyle xmlns:a="http://schemas.openxmlformats.org/drawingml/2006/main">
+            <a:defPPr>
+              <a:defRPr sz="975" b="0">
+                <a:solidFill>
+                  <a:srgbClr val="858B7E"/>
+                </a:solidFill>
+                <a:latin typeface="Pretendard"/>
+                <a:ea typeface="Pretendard"/>
+                <a:cs typeface="Pretendard"/>
+              </a:defRPr>
+            </a:defPPr>
+          </a:lstStyle>
+          <a:p xmlns:a="http://schemas.openxmlformats.org/drawingml/2006/main">
+            <a:pPr>
+              <a:defRPr sz="975" b="0">
+                <a:solidFill>
+                  <a:srgbClr val="858B7E"/>
+                </a:solidFill>
+                <a:latin typeface="Pretendard"/>
+                <a:ea typeface="Pretendard"/>
+                <a:cs typeface="Pretendard"/>
+              </a:defRPr>
+            </a:pPr>
+            <a:r>
+              <a:rPr sz="975" b="0">
+                <a:solidFill>
+                  <a:srgbClr val="858B7E"/>
+                </a:solidFill>
+                <a:latin typeface="Pretendard"/>
+                <a:ea typeface="Pretendard"/>
+                <a:cs typeface="Pretendard"/>
+              </a:rPr>
+              <a:t>Jinmo Koo · HIGHST Urology</a:t>
+            </a:r>
+          </a:p>
+        </p:txBody>
+      </p:sp>
+      <p:sp>
+        <p:nvSpPr>
+          <p:cNvPr id="6" name="">
+            <a:extLst xmlns:a="http://schemas.openxmlformats.org/drawingml/2006/main">
+              <a:ext uri="{FF2B5EF4-FFF2-40B4-BE49-F238E27FC236}">
+                <a16:creationId xmlns:a16="http://schemas.microsoft.com/office/drawing/2014/main" id="{FE38069A-2B4F-44DC-ADC3-FE280B741246}"/>
+              </a:ext>
+            </a:extLst>
+          </p:cNvPr>
+          <p:cNvSpPr>
+            <a:spLocks xmlns:a="http://schemas.openxmlformats.org/drawingml/2006/main" noGrp="1"/>
+          </p:cNvSpPr>
+          <p:nvPr/>
+        </p:nvSpPr>
+        <p:spPr>
+          <a:xfrm xmlns:a="http://schemas.openxmlformats.org/drawingml/2006/main">
+            <a:off x="11134725" y="6448425"/>
+            <a:ext cx="371475" cy="228600"/>
+          </a:xfrm>
+          <a:prstGeom xmlns:a="http://schemas.openxmlformats.org/drawingml/2006/main" prst="rect">
+            <a:avLst/>
+          </a:prstGeom>
+          <a:noFill xmlns:a="http://schemas.openxmlformats.org/drawingml/2006/main"/>
+          <a:ln xmlns:a="http://schemas.openxmlformats.org/drawingml/2006/main" w="0">
+            <a:noFill/>
+          </a:ln>
+        </p:spPr>
+        <p:txBody>
+          <a:bodyPr xmlns:a="http://schemas.openxmlformats.org/drawingml/2006/main" wrap="square" lIns="0" tIns="0" rIns="0" bIns="0" anchor="t">
+            <a:noAutofit/>
+          </a:bodyPr>
+          <a:lstStyle xmlns:a="http://schemas.openxmlformats.org/drawingml/2006/main">
+            <a:defPPr>
+              <a:defRPr sz="975" b="0">
+                <a:solidFill>
+                  <a:srgbClr val="858B7E"/>
+                </a:solidFill>
+                <a:latin typeface="Pretendard"/>
+                <a:ea typeface="Pretendard"/>
+                <a:cs typeface="Pretendard"/>
+              </a:defRPr>
+            </a:defPPr>
+          </a:lstStyle>
+          <a:p xmlns:a="http://schemas.openxmlformats.org/drawingml/2006/main">
+            <a:pPr>
+              <a:defRPr sz="975" b="0">
+                <a:solidFill>
+                  <a:srgbClr val="858B7E"/>
+                </a:solidFill>
+                <a:latin typeface="Pretendard"/>
+                <a:ea typeface="Pretendard"/>
+                <a:cs typeface="Pretendard"/>
+              </a:defRPr>
+            </a:pPr>
+            <a:r>
+              <a:rPr sz="975" b="0">
+                <a:solidFill>
+                  <a:srgbClr val="858B7E"/>
+                </a:solidFill>
+                <a:latin typeface="Pretendard"/>
+                <a:ea typeface="Pretendard"/>
+                <a:cs typeface="Pretendard"/>
+              </a:rPr>
+              <a:t>10</a:t>
+            </a:r>
+          </a:p>
+        </p:txBody>
+      </p:sp>
+    </p:spTree>
+    <p:extLst>
+      <p:ext uri="{BB962C8B-B14F-4D97-AF65-F5344CB8AC3E}">
+        <p14:creationId xmlns:p14="http://schemas.microsoft.com/office/powerpoint/2010/main" val="1276128630"/>
+      </p:ext>
+    </p:extLst>
+  </p:cSld>
+</p:sld>
+</file>
+
+<file path=ppt/slides/slide11.xml><?xml version="1.0" encoding="utf-8"?>
+<p:sld xmlns:p="http://schemas.openxmlformats.org/presentationml/2006/main">
+  <p:cSld>
+    <p:bg>
+      <p:bgPr>
+        <a:solidFill xmlns:a="http://schemas.openxmlformats.org/drawingml/2006/main">
+          <a:srgbClr val="FFFFFF"/>
+        </a:solidFill>
+      </p:bgPr>
+    </p:bg>
+    <p:spTree>
+      <p:nvGrpSpPr>
+        <p:cNvPr id="1" name=""/>
+        <p:cNvGrpSpPr/>
+        <p:nvPr/>
+      </p:nvGrpSpPr>
+      <p:grpSpPr>
+        <a:xfrm xmlns:a="http://schemas.openxmlformats.org/drawingml/2006/main"/>
+      </p:grpSpPr>
+      <p:sp>
+        <p:nvSpPr>
+          <p:cNvPr id="18" name="">
+            <a:extLst xmlns:a="http://schemas.openxmlformats.org/drawingml/2006/main">
+              <a:ext uri="{FF2B5EF4-FFF2-40B4-BE49-F238E27FC236}">
+                <a16:creationId xmlns:a16="http://schemas.microsoft.com/office/drawing/2014/main" id="{1641EB78-54AF-416A-A4B3-E04FF21F1502}"/>
+              </a:ext>
+            </a:extLst>
+          </p:cNvPr>
+          <p:cNvSpPr>
+            <a:spLocks xmlns:a="http://schemas.openxmlformats.org/drawingml/2006/main" noGrp="1"/>
+          </p:cNvSpPr>
+          <p:nvPr/>
+        </p:nvSpPr>
+        <p:spPr>
+          <a:xfrm xmlns:a="http://schemas.openxmlformats.org/drawingml/2006/main">
+            <a:off x="685800" y="619125"/>
+            <a:ext cx="10668000" cy="247650"/>
+          </a:xfrm>
+          <a:prstGeom xmlns:a="http://schemas.openxmlformats.org/drawingml/2006/main" prst="rect">
+            <a:avLst/>
+          </a:prstGeom>
+          <a:noFill xmlns:a="http://schemas.openxmlformats.org/drawingml/2006/main"/>
+          <a:ln xmlns:a="http://schemas.openxmlformats.org/drawingml/2006/main" w="0">
+            <a:noFill/>
+          </a:ln>
+        </p:spPr>
+        <p:txBody>
+          <a:bodyPr xmlns:a="http://schemas.openxmlformats.org/drawingml/2006/main" wrap="square" lIns="0" tIns="0" rIns="0" bIns="0" anchor="t">
+            <a:noAutofit/>
+          </a:bodyPr>
+          <a:lstStyle xmlns:a="http://schemas.openxmlformats.org/drawingml/2006/main">
+            <a:defPPr>
+              <a:defRPr sz="1050" b="1">
+                <a:solidFill>
+                  <a:srgbClr val="9B7744"/>
+                </a:solidFill>
+                <a:latin typeface="Pretendard"/>
+                <a:ea typeface="Pretendard"/>
+                <a:cs typeface="Pretendard"/>
+              </a:defRPr>
+            </a:defPPr>
+          </a:lstStyle>
+          <a:p xmlns:a="http://schemas.openxmlformats.org/drawingml/2006/main">
+            <a:pPr>
+              <a:defRPr sz="1050" b="1">
+                <a:solidFill>
+                  <a:srgbClr val="9B7744"/>
+                </a:solidFill>
+                <a:latin typeface="Pretendard"/>
+                <a:ea typeface="Pretendard"/>
+                <a:cs typeface="Pretendard"/>
+              </a:defRPr>
+            </a:pPr>
+            <a:r>
+              <a:rPr sz="1050" b="1">
+                <a:solidFill>
+                  <a:srgbClr val="9B7744"/>
+                </a:solidFill>
+                <a:latin typeface="Pretendard"/>
+                <a:ea typeface="Pretendard"/>
+                <a:cs typeface="Pretendard"/>
+              </a:rPr>
+              <a:t>COMPLICATIONS</a:t>
+            </a:r>
+          </a:p>
+        </p:txBody>
+      </p:sp>
+      <p:sp>
+        <p:nvSpPr>
+          <p:cNvPr id="2" name="">
+            <a:extLst xmlns:a="http://schemas.openxmlformats.org/drawingml/2006/main">
+              <a:ext uri="{FF2B5EF4-FFF2-40B4-BE49-F238E27FC236}">
+                <a16:creationId xmlns:a16="http://schemas.microsoft.com/office/drawing/2014/main" id="{E15F6225-9FD0-4FB0-96E6-5EA4079E1F98}"/>
+              </a:ext>
+            </a:extLst>
+          </p:cNvPr>
+          <p:cNvSpPr>
+            <a:spLocks xmlns:a="http://schemas.openxmlformats.org/drawingml/2006/main" noGrp="1"/>
+          </p:cNvSpPr>
+          <p:nvPr/>
+        </p:nvSpPr>
+        <p:spPr>
+          <a:xfrm xmlns:a="http://schemas.openxmlformats.org/drawingml/2006/main">
+            <a:off x="685800" y="1047750"/>
+            <a:ext cx="10820400" cy="1085850"/>
+          </a:xfrm>
+          <a:prstGeom xmlns:a="http://schemas.openxmlformats.org/drawingml/2006/main" prst="rect">
+            <a:avLst/>
+          </a:prstGeom>
+          <a:noFill xmlns:a="http://schemas.openxmlformats.org/drawingml/2006/main"/>
+          <a:ln xmlns:a="http://schemas.openxmlformats.org/drawingml/2006/main" w="0">
+            <a:noFill/>
+          </a:ln>
+        </p:spPr>
+        <p:txBody>
+          <a:bodyPr xmlns:a="http://schemas.openxmlformats.org/drawingml/2006/main" wrap="square" lIns="0" tIns="0" rIns="0" bIns="0" anchor="t">
+            <a:noAutofit/>
+          </a:bodyPr>
+          <a:lstStyle xmlns:a="http://schemas.openxmlformats.org/drawingml/2006/main">
+            <a:defPPr>
+              <a:defRPr sz="3450" b="1">
+                <a:solidFill>
+                  <a:srgbClr val="1B1D19"/>
+                </a:solidFill>
+                <a:latin typeface="Pretendard"/>
+                <a:ea typeface="Pretendard"/>
+                <a:cs typeface="Pretendard"/>
+              </a:defRPr>
+            </a:defPPr>
+          </a:lstStyle>
+          <a:p xmlns:a="http://schemas.openxmlformats.org/drawingml/2006/main">
+            <a:pPr>
+              <a:defRPr sz="3450" b="1">
+                <a:solidFill>
+                  <a:srgbClr val="1B1D19"/>
+                </a:solidFill>
+                <a:latin typeface="Pretendard"/>
+                <a:ea typeface="Pretendard"/>
+                <a:cs typeface="Pretendard"/>
+              </a:defRPr>
+            </a:pPr>
+            <a:r>
+              <a:rPr sz="3450" b="1">
+                <a:solidFill>
+                  <a:srgbClr val="1B1D19"/>
+                </a:solidFill>
+                <a:latin typeface="Pretendard"/>
+                <a:ea typeface="Pretendard"/>
+                <a:cs typeface="Pretendard"/>
+              </a:rPr>
+              <a:t>Potential Complications</a:t>
+            </a:r>
+          </a:p>
+        </p:txBody>
+      </p:sp>
+      <p:sp>
+        <p:nvSpPr>
+          <p:cNvPr id="3" name="">
+            <a:extLst xmlns:a="http://schemas.openxmlformats.org/drawingml/2006/main">
+              <a:ext uri="{FF2B5EF4-FFF2-40B4-BE49-F238E27FC236}">
+                <a16:creationId xmlns:a16="http://schemas.microsoft.com/office/drawing/2014/main" id="{B4CFC121-9CB4-454F-BB99-8112ED7BF0E0}"/>
+              </a:ext>
+            </a:extLst>
+          </p:cNvPr>
+          <p:cNvSpPr>
+            <a:spLocks xmlns:a="http://schemas.openxmlformats.org/drawingml/2006/main" noGrp="1"/>
+          </p:cNvSpPr>
+          <p:nvPr/>
+        </p:nvSpPr>
+        <p:spPr>
+          <a:xfrm xmlns:a="http://schemas.openxmlformats.org/drawingml/2006/main">
+            <a:off x="685800" y="2305050"/>
+            <a:ext cx="10820400" cy="9525"/>
+          </a:xfrm>
+          <a:prstGeom xmlns:a="http://schemas.openxmlformats.org/drawingml/2006/main" prst="rect">
+            <a:avLst/>
+          </a:prstGeom>
+          <a:solidFill xmlns:a="http://schemas.openxmlformats.org/drawingml/2006/main">
+            <a:srgbClr val="DEDFD6"/>
+          </a:solidFill>
+          <a:ln xmlns:a="http://schemas.openxmlformats.org/drawingml/2006/main" w="0">
+            <a:noFill/>
+          </a:ln>
+        </p:spPr>
+      </p:sp>
+      <p:sp>
+        <p:nvSpPr>
+          <p:cNvPr id="4" name="">
+            <a:extLst xmlns:a="http://schemas.openxmlformats.org/drawingml/2006/main">
+              <a:ext uri="{FF2B5EF4-FFF2-40B4-BE49-F238E27FC236}">
+                <a16:creationId xmlns:a16="http://schemas.microsoft.com/office/drawing/2014/main" id="{09F3AFB9-612A-46C9-B4D8-93351C06E5B8}"/>
+              </a:ext>
+            </a:extLst>
+          </p:cNvPr>
+          <p:cNvSpPr>
+            <a:spLocks xmlns:a="http://schemas.openxmlformats.org/drawingml/2006/main" noGrp="1"/>
+          </p:cNvSpPr>
+          <p:nvPr/>
+        </p:nvSpPr>
+        <p:spPr>
+          <a:xfrm xmlns:a="http://schemas.openxmlformats.org/drawingml/2006/main">
+            <a:off x="685800" y="2524125"/>
+            <a:ext cx="361950" cy="342900"/>
+          </a:xfrm>
+          <a:prstGeom xmlns:a="http://schemas.openxmlformats.org/drawingml/2006/main" prst="rect">
+            <a:avLst/>
+          </a:prstGeom>
+          <a:noFill xmlns:a="http://schemas.openxmlformats.org/drawingml/2006/main"/>
+          <a:ln xmlns:a="http://schemas.openxmlformats.org/drawingml/2006/main" w="0">
+            <a:noFill/>
+          </a:ln>
+        </p:spPr>
+        <p:txBody>
+          <a:bodyPr xmlns:a="http://schemas.openxmlformats.org/drawingml/2006/main" wrap="square" lIns="0" tIns="0" rIns="0" bIns="0" anchor="t">
+            <a:noAutofit/>
+          </a:bodyPr>
+          <a:lstStyle xmlns:a="http://schemas.openxmlformats.org/drawingml/2006/main">
+            <a:defPPr>
+              <a:defRPr sz="1125" b="0">
+                <a:solidFill>
+                  <a:srgbClr val="9B7744"/>
+                </a:solidFill>
+                <a:latin typeface="Pretendard"/>
+                <a:ea typeface="Pretendard"/>
+                <a:cs typeface="Pretendard"/>
+              </a:defRPr>
+            </a:defPPr>
+          </a:lstStyle>
+          <a:p xmlns:a="http://schemas.openxmlformats.org/drawingml/2006/main">
+            <a:pPr>
+              <a:defRPr sz="1125" b="0">
+                <a:solidFill>
+                  <a:srgbClr val="9B7744"/>
+                </a:solidFill>
+                <a:latin typeface="Pretendard"/>
+                <a:ea typeface="Pretendard"/>
+                <a:cs typeface="Pretendard"/>
+              </a:defRPr>
+            </a:pPr>
+            <a:r>
+              <a:rPr sz="1125" b="0">
+                <a:solidFill>
+                  <a:srgbClr val="9B7744"/>
+                </a:solidFill>
+                <a:latin typeface="Pretendard"/>
+                <a:ea typeface="Pretendard"/>
+                <a:cs typeface="Pretendard"/>
+              </a:rPr>
+              <a:t>01</a:t>
+            </a:r>
+          </a:p>
+        </p:txBody>
+      </p:sp>
+      <p:sp>
+        <p:nvSpPr>
+          <p:cNvPr id="5" name="">
+            <a:extLst xmlns:a="http://schemas.openxmlformats.org/drawingml/2006/main">
+              <a:ext uri="{FF2B5EF4-FFF2-40B4-BE49-F238E27FC236}">
+                <a16:creationId xmlns:a16="http://schemas.microsoft.com/office/drawing/2014/main" id="{59C5243D-8CF6-441E-8755-39D61524EA58}"/>
+              </a:ext>
+            </a:extLst>
+          </p:cNvPr>
+          <p:cNvSpPr>
+            <a:spLocks xmlns:a="http://schemas.openxmlformats.org/drawingml/2006/main" noGrp="1"/>
+          </p:cNvSpPr>
+          <p:nvPr/>
+        </p:nvSpPr>
+        <p:spPr>
+          <a:xfrm xmlns:a="http://schemas.openxmlformats.org/drawingml/2006/main">
+            <a:off x="1181100" y="2495550"/>
+            <a:ext cx="10325100" cy="381000"/>
+          </a:xfrm>
+          <a:prstGeom xmlns:a="http://schemas.openxmlformats.org/drawingml/2006/main" prst="rect">
+            <a:avLst/>
+          </a:prstGeom>
+          <a:noFill xmlns:a="http://schemas.openxmlformats.org/drawingml/2006/main"/>
+          <a:ln xmlns:a="http://schemas.openxmlformats.org/drawingml/2006/main" w="0">
+            <a:noFill/>
+          </a:ln>
+        </p:spPr>
+        <p:txBody>
+          <a:bodyPr xmlns:a="http://schemas.openxmlformats.org/drawingml/2006/main" wrap="square" lIns="0" tIns="0" rIns="0" bIns="0" anchor="t">
+            <a:noAutofit/>
+          </a:bodyPr>
+          <a:lstStyle xmlns:a="http://schemas.openxmlformats.org/drawingml/2006/main">
+            <a:defPPr>
+              <a:defRPr sz="2175" b="1">
+                <a:solidFill>
+                  <a:srgbClr val="1B1D19"/>
+                </a:solidFill>
+                <a:latin typeface="Pretendard"/>
+                <a:ea typeface="Pretendard"/>
+                <a:cs typeface="Pretendard"/>
+              </a:defRPr>
+            </a:defPPr>
+          </a:lstStyle>
+          <a:p xmlns:a="http://schemas.openxmlformats.org/drawingml/2006/main">
+            <a:pPr>
+              <a:defRPr sz="2175" b="1">
+                <a:solidFill>
+                  <a:srgbClr val="1B1D19"/>
+                </a:solidFill>
+                <a:latin typeface="Pretendard"/>
+                <a:ea typeface="Pretendard"/>
+                <a:cs typeface="Pretendard"/>
+              </a:defRPr>
+            </a:pPr>
+            <a:r>
+              <a:rPr sz="2175" b="1">
+                <a:solidFill>
+                  <a:srgbClr val="1B1D19"/>
+                </a:solidFill>
+                <a:latin typeface="Pretendard"/>
+                <a:ea typeface="Pretendard"/>
+                <a:cs typeface="Pretendard"/>
+              </a:rPr>
+              <a:t>Bleeding and swelling</a:t>
+            </a:r>
+          </a:p>
+        </p:txBody>
+      </p:sp>
+      <p:sp>
+        <p:nvSpPr>
+          <p:cNvPr id="6" name="">
+            <a:extLst xmlns:a="http://schemas.openxmlformats.org/drawingml/2006/main">
+              <a:ext uri="{FF2B5EF4-FFF2-40B4-BE49-F238E27FC236}">
+                <a16:creationId xmlns:a16="http://schemas.microsoft.com/office/drawing/2014/main" id="{96C0E520-300B-4FDA-8A1E-8C5E3562A073}"/>
+              </a:ext>
+            </a:extLst>
+          </p:cNvPr>
+          <p:cNvSpPr>
+            <a:spLocks xmlns:a="http://schemas.openxmlformats.org/drawingml/2006/main" noGrp="1"/>
+          </p:cNvSpPr>
+          <p:nvPr/>
+        </p:nvSpPr>
+        <p:spPr>
+          <a:xfrm xmlns:a="http://schemas.openxmlformats.org/drawingml/2006/main">
+            <a:off x="1181100" y="2933700"/>
+            <a:ext cx="10058400" cy="476250"/>
+          </a:xfrm>
+          <a:prstGeom xmlns:a="http://schemas.openxmlformats.org/drawingml/2006/main" prst="rect">
+            <a:avLst/>
+          </a:prstGeom>
+          <a:noFill xmlns:a="http://schemas.openxmlformats.org/drawingml/2006/main"/>
+          <a:ln xmlns:a="http://schemas.openxmlformats.org/drawingml/2006/main" w="0">
+            <a:noFill/>
+          </a:ln>
+        </p:spPr>
+        <p:txBody>
+          <a:bodyPr xmlns:a="http://schemas.openxmlformats.org/drawingml/2006/main" wrap="square" lIns="0" tIns="0" rIns="0" bIns="0" anchor="t">
+            <a:noAutofit/>
+          </a:bodyPr>
+          <a:lstStyle xmlns:a="http://schemas.openxmlformats.org/drawingml/2006/main">
+            <a:defPPr>
+              <a:defRPr sz="1725" b="0">
+                <a:solidFill>
+                  <a:srgbClr val="6B7265"/>
+                </a:solidFill>
+                <a:latin typeface="Pretendard"/>
+                <a:ea typeface="Pretendard"/>
+                <a:cs typeface="Pretendard"/>
+              </a:defRPr>
+            </a:defPPr>
+          </a:lstStyle>
+          <a:p xmlns:a="http://schemas.openxmlformats.org/drawingml/2006/main">
+            <a:pPr>
+              <a:defRPr sz="1725" b="0">
+                <a:solidFill>
+                  <a:srgbClr val="6B7265"/>
+                </a:solidFill>
+                <a:latin typeface="Pretendard"/>
+                <a:ea typeface="Pretendard"/>
+                <a:cs typeface="Pretendard"/>
+              </a:defRPr>
+            </a:pPr>
+            <a:r>
+              <a:rPr sz="1725" b="0">
+                <a:solidFill>
+                  <a:srgbClr val="6B7265"/>
+                </a:solidFill>
+                <a:latin typeface="Pretendard"/>
+                <a:ea typeface="Pretendard"/>
+                <a:cs typeface="Pretendard"/>
+              </a:rPr>
+              <a:t>Hematoma, foreskin edema</a:t>
+            </a:r>
+          </a:p>
+        </p:txBody>
+      </p:sp>
+      <p:sp>
+        <p:nvSpPr>
+          <p:cNvPr id="7" name="">
+            <a:extLst xmlns:a="http://schemas.openxmlformats.org/drawingml/2006/main">
+              <a:ext uri="{FF2B5EF4-FFF2-40B4-BE49-F238E27FC236}">
+                <a16:creationId xmlns:a16="http://schemas.microsoft.com/office/drawing/2014/main" id="{958D912B-F18C-4EBB-82D4-4F60A03951AE}"/>
+              </a:ext>
+            </a:extLst>
+          </p:cNvPr>
+          <p:cNvSpPr>
+            <a:spLocks xmlns:a="http://schemas.openxmlformats.org/drawingml/2006/main" noGrp="1"/>
+          </p:cNvSpPr>
+          <p:nvPr/>
+        </p:nvSpPr>
+        <p:spPr>
+          <a:xfrm xmlns:a="http://schemas.openxmlformats.org/drawingml/2006/main">
+            <a:off x="685800" y="3448050"/>
+            <a:ext cx="10820400" cy="9525"/>
+          </a:xfrm>
+          <a:prstGeom xmlns:a="http://schemas.openxmlformats.org/drawingml/2006/main" prst="rect">
+            <a:avLst/>
+          </a:prstGeom>
+          <a:solidFill xmlns:a="http://schemas.openxmlformats.org/drawingml/2006/main">
+            <a:srgbClr val="DEDFD6"/>
+          </a:solidFill>
+          <a:ln xmlns:a="http://schemas.openxmlformats.org/drawingml/2006/main" w="0">
+            <a:noFill/>
+          </a:ln>
+        </p:spPr>
+      </p:sp>
+      <p:sp>
+        <p:nvSpPr>
+          <p:cNvPr id="8" name="">
+            <a:extLst xmlns:a="http://schemas.openxmlformats.org/drawingml/2006/main">
+              <a:ext uri="{FF2B5EF4-FFF2-40B4-BE49-F238E27FC236}">
+                <a16:creationId xmlns:a16="http://schemas.microsoft.com/office/drawing/2014/main" id="{AE214B36-D551-4F2C-97A2-5F930FC97448}"/>
+              </a:ext>
+            </a:extLst>
+          </p:cNvPr>
+          <p:cNvSpPr>
+            <a:spLocks xmlns:a="http://schemas.openxmlformats.org/drawingml/2006/main" noGrp="1"/>
+          </p:cNvSpPr>
+          <p:nvPr/>
+        </p:nvSpPr>
+        <p:spPr>
+          <a:xfrm xmlns:a="http://schemas.openxmlformats.org/drawingml/2006/main">
+            <a:off x="685800" y="3667125"/>
+            <a:ext cx="361950" cy="342900"/>
+          </a:xfrm>
+          <a:prstGeom xmlns:a="http://schemas.openxmlformats.org/drawingml/2006/main" prst="rect">
+            <a:avLst/>
+          </a:prstGeom>
+          <a:noFill xmlns:a="http://schemas.openxmlformats.org/drawingml/2006/main"/>
+          <a:ln xmlns:a="http://schemas.openxmlformats.org/drawingml/2006/main" w="0">
+            <a:noFill/>
+          </a:ln>
+        </p:spPr>
+        <p:txBody>
+          <a:bodyPr xmlns:a="http://schemas.openxmlformats.org/drawingml/2006/main" wrap="square" lIns="0" tIns="0" rIns="0" bIns="0" anchor="t">
+            <a:noAutofit/>
+          </a:bodyPr>
+          <a:lstStyle xmlns:a="http://schemas.openxmlformats.org/drawingml/2006/main">
+            <a:defPPr>
+              <a:defRPr sz="1125" b="0">
+                <a:solidFill>
+                  <a:srgbClr val="9B7744"/>
+                </a:solidFill>
+                <a:latin typeface="Pretendard"/>
+                <a:ea typeface="Pretendard"/>
+                <a:cs typeface="Pretendard"/>
+              </a:defRPr>
+            </a:defPPr>
+          </a:lstStyle>
+          <a:p xmlns:a="http://schemas.openxmlformats.org/drawingml/2006/main">
+            <a:pPr>
+              <a:defRPr sz="1125" b="0">
+                <a:solidFill>
+                  <a:srgbClr val="9B7744"/>
+                </a:solidFill>
+                <a:latin typeface="Pretendard"/>
+                <a:ea typeface="Pretendard"/>
+                <a:cs typeface="Pretendard"/>
+              </a:defRPr>
+            </a:pPr>
+            <a:r>
+              <a:rPr sz="1125" b="0">
+                <a:solidFill>
+                  <a:srgbClr val="9B7744"/>
+                </a:solidFill>
+                <a:latin typeface="Pretendard"/>
+                <a:ea typeface="Pretendard"/>
+                <a:cs typeface="Pretendard"/>
+              </a:rPr>
+              <a:t>02</a:t>
+            </a:r>
+          </a:p>
+        </p:txBody>
+      </p:sp>
+      <p:sp>
+        <p:nvSpPr>
+          <p:cNvPr id="9" name="">
+            <a:extLst xmlns:a="http://schemas.openxmlformats.org/drawingml/2006/main">
+              <a:ext uri="{FF2B5EF4-FFF2-40B4-BE49-F238E27FC236}">
+                <a16:creationId xmlns:a16="http://schemas.microsoft.com/office/drawing/2014/main" id="{09FD8EF6-1E58-41C3-8BC2-A05569FA4528}"/>
+              </a:ext>
+            </a:extLst>
+          </p:cNvPr>
+          <p:cNvSpPr>
+            <a:spLocks xmlns:a="http://schemas.openxmlformats.org/drawingml/2006/main" noGrp="1"/>
+          </p:cNvSpPr>
+          <p:nvPr/>
+        </p:nvSpPr>
+        <p:spPr>
+          <a:xfrm xmlns:a="http://schemas.openxmlformats.org/drawingml/2006/main">
+            <a:off x="1181100" y="3638550"/>
+            <a:ext cx="10325100" cy="381000"/>
+          </a:xfrm>
+          <a:prstGeom xmlns:a="http://schemas.openxmlformats.org/drawingml/2006/main" prst="rect">
+            <a:avLst/>
+          </a:prstGeom>
+          <a:noFill xmlns:a="http://schemas.openxmlformats.org/drawingml/2006/main"/>
+          <a:ln xmlns:a="http://schemas.openxmlformats.org/drawingml/2006/main" w="0">
+            <a:noFill/>
+          </a:ln>
+        </p:spPr>
+        <p:txBody>
+          <a:bodyPr xmlns:a="http://schemas.openxmlformats.org/drawingml/2006/main" wrap="square" lIns="0" tIns="0" rIns="0" bIns="0" anchor="t">
+            <a:noAutofit/>
+          </a:bodyPr>
+          <a:lstStyle xmlns:a="http://schemas.openxmlformats.org/drawingml/2006/main">
+            <a:defPPr>
+              <a:defRPr sz="2175" b="1">
+                <a:solidFill>
+                  <a:srgbClr val="1B1D19"/>
+                </a:solidFill>
+                <a:latin typeface="Pretendard"/>
+                <a:ea typeface="Pretendard"/>
+                <a:cs typeface="Pretendard"/>
+              </a:defRPr>
+            </a:defPPr>
+          </a:lstStyle>
+          <a:p xmlns:a="http://schemas.openxmlformats.org/drawingml/2006/main">
+            <a:pPr>
+              <a:defRPr sz="2175" b="1">
+                <a:solidFill>
+                  <a:srgbClr val="1B1D19"/>
+                </a:solidFill>
+                <a:latin typeface="Pretendard"/>
+                <a:ea typeface="Pretendard"/>
+                <a:cs typeface="Pretendard"/>
+              </a:defRPr>
+            </a:pPr>
+            <a:r>
+              <a:rPr sz="2175" b="1">
+                <a:solidFill>
+                  <a:srgbClr val="1B1D19"/>
+                </a:solidFill>
+                <a:latin typeface="Pretendard"/>
+                <a:ea typeface="Pretendard"/>
+                <a:cs typeface="Pretendard"/>
+              </a:rPr>
+              <a:t>Wound complications</a:t>
+            </a:r>
+          </a:p>
+        </p:txBody>
+      </p:sp>
+      <p:sp>
+        <p:nvSpPr>
+          <p:cNvPr id="10" name="">
+            <a:extLst xmlns:a="http://schemas.openxmlformats.org/drawingml/2006/main">
+              <a:ext uri="{FF2B5EF4-FFF2-40B4-BE49-F238E27FC236}">
+                <a16:creationId xmlns:a16="http://schemas.microsoft.com/office/drawing/2014/main" id="{FE70D58C-9B01-49D3-9461-ED10C842A8B4}"/>
+              </a:ext>
+            </a:extLst>
+          </p:cNvPr>
+          <p:cNvSpPr>
+            <a:spLocks xmlns:a="http://schemas.openxmlformats.org/drawingml/2006/main" noGrp="1"/>
+          </p:cNvSpPr>
+          <p:nvPr/>
+        </p:nvSpPr>
+        <p:spPr>
+          <a:xfrm xmlns:a="http://schemas.openxmlformats.org/drawingml/2006/main">
+            <a:off x="1181100" y="4076700"/>
+            <a:ext cx="10058400" cy="476250"/>
+          </a:xfrm>
+          <a:prstGeom xmlns:a="http://schemas.openxmlformats.org/drawingml/2006/main" prst="rect">
+            <a:avLst/>
+          </a:prstGeom>
+          <a:noFill xmlns:a="http://schemas.openxmlformats.org/drawingml/2006/main"/>
+          <a:ln xmlns:a="http://schemas.openxmlformats.org/drawingml/2006/main" w="0">
+            <a:noFill/>
+          </a:ln>
+        </p:spPr>
+        <p:txBody>
+          <a:bodyPr xmlns:a="http://schemas.openxmlformats.org/drawingml/2006/main" wrap="square" lIns="0" tIns="0" rIns="0" bIns="0" anchor="t">
+            <a:noAutofit/>
+          </a:bodyPr>
+          <a:lstStyle xmlns:a="http://schemas.openxmlformats.org/drawingml/2006/main">
+            <a:defPPr>
+              <a:defRPr sz="1725" b="0">
+                <a:solidFill>
+                  <a:srgbClr val="6B7265"/>
+                </a:solidFill>
+                <a:latin typeface="Pretendard"/>
+                <a:ea typeface="Pretendard"/>
+                <a:cs typeface="Pretendard"/>
+              </a:defRPr>
+            </a:defPPr>
+          </a:lstStyle>
+          <a:p xmlns:a="http://schemas.openxmlformats.org/drawingml/2006/main">
+            <a:pPr>
+              <a:defRPr sz="1725" b="0">
+                <a:solidFill>
+                  <a:srgbClr val="6B7265"/>
+                </a:solidFill>
+                <a:latin typeface="Pretendard"/>
+                <a:ea typeface="Pretendard"/>
+                <a:cs typeface="Pretendard"/>
+              </a:defRPr>
+            </a:pPr>
+            <a:r>
+              <a:rPr sz="1725" b="0">
+                <a:solidFill>
+                  <a:srgbClr val="6B7265"/>
+                </a:solidFill>
+                <a:latin typeface="Pretendard"/>
+                <a:ea typeface="Pretendard"/>
+                <a:cs typeface="Pretendard"/>
+              </a:rPr>
+              <a:t>Delayed healing, infection, skin necrosis</a:t>
+            </a:r>
+          </a:p>
+        </p:txBody>
+      </p:sp>
+      <p:sp>
+        <p:nvSpPr>
+          <p:cNvPr id="11" name="">
+            <a:extLst xmlns:a="http://schemas.openxmlformats.org/drawingml/2006/main">
+              <a:ext uri="{FF2B5EF4-FFF2-40B4-BE49-F238E27FC236}">
+                <a16:creationId xmlns:a16="http://schemas.microsoft.com/office/drawing/2014/main" id="{C8BFFAD2-A761-4C95-BFC1-15CDB9FDDCAB}"/>
+              </a:ext>
+            </a:extLst>
+          </p:cNvPr>
+          <p:cNvSpPr>
+            <a:spLocks xmlns:a="http://schemas.openxmlformats.org/drawingml/2006/main" noGrp="1"/>
+          </p:cNvSpPr>
+          <p:nvPr/>
+        </p:nvSpPr>
+        <p:spPr>
+          <a:xfrm xmlns:a="http://schemas.openxmlformats.org/drawingml/2006/main">
+            <a:off x="685800" y="4591050"/>
+            <a:ext cx="10820400" cy="9525"/>
+          </a:xfrm>
+          <a:prstGeom xmlns:a="http://schemas.openxmlformats.org/drawingml/2006/main" prst="rect">
+            <a:avLst/>
+          </a:prstGeom>
+          <a:solidFill xmlns:a="http://schemas.openxmlformats.org/drawingml/2006/main">
+            <a:srgbClr val="DEDFD6"/>
+          </a:solidFill>
+          <a:ln xmlns:a="http://schemas.openxmlformats.org/drawingml/2006/main" w="0">
+            <a:noFill/>
+          </a:ln>
+        </p:spPr>
+      </p:sp>
+      <p:sp>
+        <p:nvSpPr>
+          <p:cNvPr id="12" name="">
+            <a:extLst xmlns:a="http://schemas.openxmlformats.org/drawingml/2006/main">
+              <a:ext uri="{FF2B5EF4-FFF2-40B4-BE49-F238E27FC236}">
+                <a16:creationId xmlns:a16="http://schemas.microsoft.com/office/drawing/2014/main" id="{DEF4BCE0-F5F4-4971-AA29-7FC1B0032F08}"/>
+              </a:ext>
+            </a:extLst>
+          </p:cNvPr>
+          <p:cNvSpPr>
+            <a:spLocks xmlns:a="http://schemas.openxmlformats.org/drawingml/2006/main" noGrp="1"/>
+          </p:cNvSpPr>
+          <p:nvPr/>
+        </p:nvSpPr>
+        <p:spPr>
+          <a:xfrm xmlns:a="http://schemas.openxmlformats.org/drawingml/2006/main">
+            <a:off x="685800" y="4810125"/>
+            <a:ext cx="361950" cy="342900"/>
+          </a:xfrm>
+          <a:prstGeom xmlns:a="http://schemas.openxmlformats.org/drawingml/2006/main" prst="rect">
+            <a:avLst/>
+          </a:prstGeom>
+          <a:noFill xmlns:a="http://schemas.openxmlformats.org/drawingml/2006/main"/>
+          <a:ln xmlns:a="http://schemas.openxmlformats.org/drawingml/2006/main" w="0">
+            <a:noFill/>
+          </a:ln>
+        </p:spPr>
+        <p:txBody>
+          <a:bodyPr xmlns:a="http://schemas.openxmlformats.org/drawingml/2006/main" wrap="square" lIns="0" tIns="0" rIns="0" bIns="0" anchor="t">
+            <a:noAutofit/>
+          </a:bodyPr>
+          <a:lstStyle xmlns:a="http://schemas.openxmlformats.org/drawingml/2006/main">
+            <a:defPPr>
+              <a:defRPr sz="1125" b="0">
+                <a:solidFill>
+                  <a:srgbClr val="9B7744"/>
+                </a:solidFill>
+                <a:latin typeface="Pretendard"/>
+                <a:ea typeface="Pretendard"/>
+                <a:cs typeface="Pretendard"/>
+              </a:defRPr>
+            </a:defPPr>
+          </a:lstStyle>
+          <a:p xmlns:a="http://schemas.openxmlformats.org/drawingml/2006/main">
+            <a:pPr>
+              <a:defRPr sz="1125" b="0">
+                <a:solidFill>
+                  <a:srgbClr val="9B7744"/>
+                </a:solidFill>
+                <a:latin typeface="Pretendard"/>
+                <a:ea typeface="Pretendard"/>
+                <a:cs typeface="Pretendard"/>
+              </a:defRPr>
+            </a:pPr>
+            <a:r>
+              <a:rPr sz="1125" b="0">
+                <a:solidFill>
+                  <a:srgbClr val="9B7744"/>
+                </a:solidFill>
+                <a:latin typeface="Pretendard"/>
+                <a:ea typeface="Pretendard"/>
+                <a:cs typeface="Pretendard"/>
+              </a:rPr>
+              <a:t>03</a:t>
+            </a:r>
+          </a:p>
+        </p:txBody>
+      </p:sp>
+      <p:sp>
+        <p:nvSpPr>
+          <p:cNvPr id="13" name="">
+            <a:extLst xmlns:a="http://schemas.openxmlformats.org/drawingml/2006/main">
+              <a:ext uri="{FF2B5EF4-FFF2-40B4-BE49-F238E27FC236}">
+                <a16:creationId xmlns:a16="http://schemas.microsoft.com/office/drawing/2014/main" id="{ECEBEFDD-6A48-46ED-BB77-5F57811725A3}"/>
+              </a:ext>
+            </a:extLst>
+          </p:cNvPr>
+          <p:cNvSpPr>
+            <a:spLocks xmlns:a="http://schemas.openxmlformats.org/drawingml/2006/main" noGrp="1"/>
+          </p:cNvSpPr>
+          <p:nvPr/>
+        </p:nvSpPr>
+        <p:spPr>
+          <a:xfrm xmlns:a="http://schemas.openxmlformats.org/drawingml/2006/main">
+            <a:off x="1181100" y="4781550"/>
+            <a:ext cx="10325100" cy="381000"/>
+          </a:xfrm>
+          <a:prstGeom xmlns:a="http://schemas.openxmlformats.org/drawingml/2006/main" prst="rect">
+            <a:avLst/>
+          </a:prstGeom>
+          <a:noFill xmlns:a="http://schemas.openxmlformats.org/drawingml/2006/main"/>
+          <a:ln xmlns:a="http://schemas.openxmlformats.org/drawingml/2006/main" w="0">
+            <a:noFill/>
+          </a:ln>
+        </p:spPr>
+        <p:txBody>
+          <a:bodyPr xmlns:a="http://schemas.openxmlformats.org/drawingml/2006/main" wrap="square" lIns="0" tIns="0" rIns="0" bIns="0" anchor="t">
+            <a:noAutofit/>
+          </a:bodyPr>
+          <a:lstStyle xmlns:a="http://schemas.openxmlformats.org/drawingml/2006/main">
+            <a:defPPr>
+              <a:defRPr sz="2175" b="1">
+                <a:solidFill>
+                  <a:srgbClr val="1B1D19"/>
+                </a:solidFill>
+                <a:latin typeface="Pretendard"/>
+                <a:ea typeface="Pretendard"/>
+                <a:cs typeface="Pretendard"/>
+              </a:defRPr>
+            </a:defPPr>
+          </a:lstStyle>
+          <a:p xmlns:a="http://schemas.openxmlformats.org/drawingml/2006/main">
+            <a:pPr>
+              <a:defRPr sz="2175" b="1">
+                <a:solidFill>
+                  <a:srgbClr val="1B1D19"/>
+                </a:solidFill>
+                <a:latin typeface="Pretendard"/>
+                <a:ea typeface="Pretendard"/>
+                <a:cs typeface="Pretendard"/>
+              </a:defRPr>
+            </a:pPr>
+            <a:r>
+              <a:rPr sz="2175" b="1">
+                <a:solidFill>
+                  <a:srgbClr val="1B1D19"/>
+                </a:solidFill>
+                <a:latin typeface="Pretendard"/>
+                <a:ea typeface="Pretendard"/>
+                <a:cs typeface="Pretendard"/>
+              </a:rPr>
+              <a:t>Contour and discomfort</a:t>
+            </a:r>
+          </a:p>
+        </p:txBody>
+      </p:sp>
+      <p:sp>
+        <p:nvSpPr>
+          <p:cNvPr id="14" name="">
+            <a:extLst xmlns:a="http://schemas.openxmlformats.org/drawingml/2006/main">
+              <a:ext uri="{FF2B5EF4-FFF2-40B4-BE49-F238E27FC236}">
+                <a16:creationId xmlns:a16="http://schemas.microsoft.com/office/drawing/2014/main" id="{735B6ACA-A0CC-4AAE-B58E-EBFA839E6D3A}"/>
+              </a:ext>
+            </a:extLst>
+          </p:cNvPr>
+          <p:cNvSpPr>
+            <a:spLocks xmlns:a="http://schemas.openxmlformats.org/drawingml/2006/main" noGrp="1"/>
+          </p:cNvSpPr>
+          <p:nvPr/>
+        </p:nvSpPr>
+        <p:spPr>
+          <a:xfrm xmlns:a="http://schemas.openxmlformats.org/drawingml/2006/main">
+            <a:off x="1181100" y="5219700"/>
+            <a:ext cx="10058400" cy="476250"/>
+          </a:xfrm>
+          <a:prstGeom xmlns:a="http://schemas.openxmlformats.org/drawingml/2006/main" prst="rect">
+            <a:avLst/>
+          </a:prstGeom>
+          <a:noFill xmlns:a="http://schemas.openxmlformats.org/drawingml/2006/main"/>
+          <a:ln xmlns:a="http://schemas.openxmlformats.org/drawingml/2006/main" w="0">
+            <a:noFill/>
+          </a:ln>
+        </p:spPr>
+        <p:txBody>
+          <a:bodyPr xmlns:a="http://schemas.openxmlformats.org/drawingml/2006/main" wrap="square" lIns="0" tIns="0" rIns="0" bIns="0" anchor="t">
+            <a:noAutofit/>
+          </a:bodyPr>
+          <a:lstStyle xmlns:a="http://schemas.openxmlformats.org/drawingml/2006/main">
+            <a:defPPr>
+              <a:defRPr sz="1725" b="0">
+                <a:solidFill>
+                  <a:srgbClr val="6B7265"/>
+                </a:solidFill>
+                <a:latin typeface="Pretendard"/>
+                <a:ea typeface="Pretendard"/>
+                <a:cs typeface="Pretendard"/>
+              </a:defRPr>
+            </a:defPPr>
+          </a:lstStyle>
+          <a:p xmlns:a="http://schemas.openxmlformats.org/drawingml/2006/main">
+            <a:pPr>
+              <a:defRPr sz="1725" b="0">
+                <a:solidFill>
+                  <a:srgbClr val="6B7265"/>
+                </a:solidFill>
+                <a:latin typeface="Pretendard"/>
+                <a:ea typeface="Pretendard"/>
+                <a:cs typeface="Pretendard"/>
+              </a:defRPr>
+            </a:pPr>
+            <a:r>
+              <a:rPr sz="1725" b="0">
+                <a:solidFill>
+                  <a:srgbClr val="6B7265"/>
+                </a:solidFill>
+                <a:latin typeface="Pretendard"/>
+                <a:ea typeface="Pretendard"/>
+                <a:cs typeface="Pretendard"/>
+              </a:rPr>
+              <a:t>Graft contour irregularity, discomfort during erection</a:t>
+            </a:r>
+          </a:p>
+        </p:txBody>
+      </p:sp>
+      <p:sp>
+        <p:nvSpPr>
+          <p:cNvPr id="15" name="">
+            <a:extLst xmlns:a="http://schemas.openxmlformats.org/drawingml/2006/main">
+              <a:ext uri="{FF2B5EF4-FFF2-40B4-BE49-F238E27FC236}">
+                <a16:creationId xmlns:a16="http://schemas.microsoft.com/office/drawing/2014/main" id="{38D60911-B5A3-4B0F-A7B3-E8442C8BB1E9}"/>
+              </a:ext>
+            </a:extLst>
+          </p:cNvPr>
+          <p:cNvSpPr>
+            <a:spLocks xmlns:a="http://schemas.openxmlformats.org/drawingml/2006/main" noGrp="1"/>
+          </p:cNvSpPr>
+          <p:nvPr/>
+        </p:nvSpPr>
+        <p:spPr>
+          <a:xfrm xmlns:a="http://schemas.openxmlformats.org/drawingml/2006/main">
+            <a:off x="685800" y="6019800"/>
+            <a:ext cx="10287000" cy="266700"/>
+          </a:xfrm>
+          <a:prstGeom xmlns:a="http://schemas.openxmlformats.org/drawingml/2006/main" prst="rect">
+            <a:avLst/>
+          </a:prstGeom>
+          <a:noFill xmlns:a="http://schemas.openxmlformats.org/drawingml/2006/main"/>
+          <a:ln xmlns:a="http://schemas.openxmlformats.org/drawingml/2006/main" w="0">
+            <a:noFill/>
+          </a:ln>
+        </p:spPr>
+        <p:txBody>
+          <a:bodyPr xmlns:a="http://schemas.openxmlformats.org/drawingml/2006/main" wrap="square" lIns="0" tIns="0" rIns="0" bIns="0" anchor="t">
+            <a:noAutofit/>
+          </a:bodyPr>
+          <a:lstStyle xmlns:a="http://schemas.openxmlformats.org/drawingml/2006/main">
+            <a:defPPr>
+              <a:defRPr sz="1050" b="0">
+                <a:solidFill>
+                  <a:srgbClr val="6B7265"/>
+                </a:solidFill>
+                <a:latin typeface="Pretendard"/>
+                <a:ea typeface="Pretendard"/>
+                <a:cs typeface="Pretendard"/>
+              </a:defRPr>
+            </a:defPPr>
+          </a:lstStyle>
+          <a:p xmlns:a="http://schemas.openxmlformats.org/drawingml/2006/main">
+            <a:pPr>
+              <a:defRPr sz="1050" b="0">
+                <a:solidFill>
+                  <a:srgbClr val="6B7265"/>
+                </a:solidFill>
+                <a:latin typeface="Pretendard"/>
+                <a:ea typeface="Pretendard"/>
+                <a:cs typeface="Pretendard"/>
+              </a:defRPr>
+            </a:pPr>
+            <a:r>
+              <a:rPr sz="1050" b="0">
+                <a:solidFill>
+                  <a:srgbClr val="6B7265"/>
+                </a:solidFill>
+                <a:latin typeface="Pretendard"/>
+                <a:ea typeface="Pretendard"/>
+                <a:cs typeface="Pretendard"/>
+              </a:rPr>
+              <a:t>Reported in ADM augmentation literature</a:t>
+            </a:r>
+          </a:p>
+        </p:txBody>
+      </p:sp>
+      <p:sp>
+        <p:nvSpPr>
+          <p:cNvPr id="16" name="">
+            <a:extLst xmlns:a="http://schemas.openxmlformats.org/drawingml/2006/main">
+              <a:ext uri="{FF2B5EF4-FFF2-40B4-BE49-F238E27FC236}">
+                <a16:creationId xmlns:a16="http://schemas.microsoft.com/office/drawing/2014/main" id="{327F96A0-F3FA-450E-90FC-FED9CB7F9F2B}"/>
+              </a:ext>
+            </a:extLst>
+          </p:cNvPr>
+          <p:cNvSpPr>
+            <a:spLocks xmlns:a="http://schemas.openxmlformats.org/drawingml/2006/main" noGrp="1"/>
+          </p:cNvSpPr>
+          <p:nvPr/>
+        </p:nvSpPr>
+        <p:spPr>
+          <a:xfrm xmlns:a="http://schemas.openxmlformats.org/drawingml/2006/main">
+            <a:off x="685800" y="6448425"/>
+            <a:ext cx="10191750" cy="228600"/>
+          </a:xfrm>
+          <a:prstGeom xmlns:a="http://schemas.openxmlformats.org/drawingml/2006/main" prst="rect">
+            <a:avLst/>
+          </a:prstGeom>
+          <a:noFill xmlns:a="http://schemas.openxmlformats.org/drawingml/2006/main"/>
+          <a:ln xmlns:a="http://schemas.openxmlformats.org/drawingml/2006/main" w="0">
+            <a:noFill/>
+          </a:ln>
+        </p:spPr>
+        <p:txBody>
+          <a:bodyPr xmlns:a="http://schemas.openxmlformats.org/drawingml/2006/main" wrap="square" lIns="0" tIns="0" rIns="0" bIns="0" anchor="t">
+            <a:noAutofit/>
+          </a:bodyPr>
+          <a:lstStyle xmlns:a="http://schemas.openxmlformats.org/drawingml/2006/main">
+            <a:defPPr>
+              <a:defRPr sz="975" b="0">
+                <a:solidFill>
+                  <a:srgbClr val="858B7E"/>
+                </a:solidFill>
+                <a:latin typeface="Pretendard"/>
+                <a:ea typeface="Pretendard"/>
+                <a:cs typeface="Pretendard"/>
+              </a:defRPr>
+            </a:defPPr>
+          </a:lstStyle>
+          <a:p xmlns:a="http://schemas.openxmlformats.org/drawingml/2006/main">
+            <a:pPr>
+              <a:defRPr sz="975" b="0">
+                <a:solidFill>
+                  <a:srgbClr val="858B7E"/>
+                </a:solidFill>
+                <a:latin typeface="Pretendard"/>
+                <a:ea typeface="Pretendard"/>
+                <a:cs typeface="Pretendard"/>
+              </a:defRPr>
+            </a:pPr>
+            <a:r>
+              <a:rPr sz="975" b="0">
+                <a:solidFill>
+                  <a:srgbClr val="858B7E"/>
+                </a:solidFill>
+                <a:latin typeface="Pretendard"/>
+                <a:ea typeface="Pretendard"/>
+                <a:cs typeface="Pretendard"/>
+              </a:rPr>
+              <a:t>Jinmo Koo · HIGHST Urology</a:t>
+            </a:r>
+          </a:p>
+        </p:txBody>
+      </p:sp>
+      <p:sp>
+        <p:nvSpPr>
+          <p:cNvPr id="17" name="">
+            <a:extLst xmlns:a="http://schemas.openxmlformats.org/drawingml/2006/main">
+              <a:ext uri="{FF2B5EF4-FFF2-40B4-BE49-F238E27FC236}">
+                <a16:creationId xmlns:a16="http://schemas.microsoft.com/office/drawing/2014/main" id="{87D73E79-B6C6-4E17-985B-CEF9C59FF17E}"/>
+              </a:ext>
+            </a:extLst>
+          </p:cNvPr>
+          <p:cNvSpPr>
+            <a:spLocks xmlns:a="http://schemas.openxmlformats.org/drawingml/2006/main" noGrp="1"/>
+          </p:cNvSpPr>
+          <p:nvPr/>
+        </p:nvSpPr>
+        <p:spPr>
+          <a:xfrm xmlns:a="http://schemas.openxmlformats.org/drawingml/2006/main">
+            <a:off x="11134725" y="6448425"/>
+            <a:ext cx="371475" cy="228600"/>
+          </a:xfrm>
+          <a:prstGeom xmlns:a="http://schemas.openxmlformats.org/drawingml/2006/main" prst="rect">
+            <a:avLst/>
+          </a:prstGeom>
+          <a:noFill xmlns:a="http://schemas.openxmlformats.org/drawingml/2006/main"/>
+          <a:ln xmlns:a="http://schemas.openxmlformats.org/drawingml/2006/main" w="0">
+            <a:noFill/>
+          </a:ln>
+        </p:spPr>
+        <p:txBody>
+          <a:bodyPr xmlns:a="http://schemas.openxmlformats.org/drawingml/2006/main" wrap="square" lIns="0" tIns="0" rIns="0" bIns="0" anchor="t">
+            <a:noAutofit/>
+          </a:bodyPr>
+          <a:lstStyle xmlns:a="http://schemas.openxmlformats.org/drawingml/2006/main">
+            <a:defPPr>
+              <a:defRPr sz="975" b="0">
+                <a:solidFill>
+                  <a:srgbClr val="858B7E"/>
+                </a:solidFill>
+                <a:latin typeface="Pretendard"/>
+                <a:ea typeface="Pretendard"/>
+                <a:cs typeface="Pretendard"/>
+              </a:defRPr>
+            </a:defPPr>
+          </a:lstStyle>
+          <a:p xmlns:a="http://schemas.openxmlformats.org/drawingml/2006/main">
+            <a:pPr>
+              <a:defRPr sz="975" b="0">
+                <a:solidFill>
+                  <a:srgbClr val="858B7E"/>
+                </a:solidFill>
+                <a:latin typeface="Pretendard"/>
+                <a:ea typeface="Pretendard"/>
+                <a:cs typeface="Pretendard"/>
+              </a:defRPr>
+            </a:pPr>
+            <a:r>
+              <a:rPr sz="975" b="0">
+                <a:solidFill>
+                  <a:srgbClr val="858B7E"/>
+                </a:solidFill>
+                <a:latin typeface="Pretendard"/>
+                <a:ea typeface="Pretendard"/>
+                <a:cs typeface="Pretendard"/>
+              </a:rPr>
+              <a:t>11</a:t>
+            </a:r>
+          </a:p>
+        </p:txBody>
+      </p:sp>
+    </p:spTree>
+    <p:extLst>
+      <p:ext uri="{BB962C8B-B14F-4D97-AF65-F5344CB8AC3E}">
+        <p14:creationId xmlns:p14="http://schemas.microsoft.com/office/powerpoint/2010/main" val="884401329"/>
+      </p:ext>
+    </p:extLst>
+  </p:cSld>
+</p:sld>
+</file>
+
+<file path=ppt/slides/slide12.xml><?xml version="1.0" encoding="utf-8"?>
+<p:sld xmlns:p="http://schemas.openxmlformats.org/presentationml/2006/main">
+  <p:cSld>
+    <p:bg>
+      <p:bgPr>
+        <a:solidFill xmlns:a="http://schemas.openxmlformats.org/drawingml/2006/main">
+          <a:srgbClr val="FFFFFF"/>
+        </a:solidFill>
+      </p:bgPr>
+    </p:bg>
+    <p:spTree>
+      <p:nvGrpSpPr>
+        <p:cNvPr id="1" name=""/>
+        <p:cNvGrpSpPr/>
+        <p:nvPr/>
+      </p:nvGrpSpPr>
+      <p:grpSpPr>
+        <a:xfrm xmlns:a="http://schemas.openxmlformats.org/drawingml/2006/main"/>
+      </p:grpSpPr>
+      <p:sp>
+        <p:nvSpPr>
+          <p:cNvPr id="11" name="">
+            <a:extLst xmlns:a="http://schemas.openxmlformats.org/drawingml/2006/main">
+              <a:ext uri="{FF2B5EF4-FFF2-40B4-BE49-F238E27FC236}">
+                <a16:creationId xmlns:a16="http://schemas.microsoft.com/office/drawing/2014/main" id="{C8BB1151-99E3-4577-A6A7-70D308B4322C}"/>
+              </a:ext>
+            </a:extLst>
+          </p:cNvPr>
+          <p:cNvSpPr>
+            <a:spLocks xmlns:a="http://schemas.openxmlformats.org/drawingml/2006/main" noGrp="1"/>
+          </p:cNvSpPr>
+          <p:nvPr/>
+        </p:nvSpPr>
+        <p:spPr>
+          <a:xfrm xmlns:a="http://schemas.openxmlformats.org/drawingml/2006/main">
+            <a:off x="685800" y="619125"/>
+            <a:ext cx="10668000" cy="247650"/>
+          </a:xfrm>
+          <a:prstGeom xmlns:a="http://schemas.openxmlformats.org/drawingml/2006/main" prst="rect">
+            <a:avLst/>
+          </a:prstGeom>
+          <a:noFill xmlns:a="http://schemas.openxmlformats.org/drawingml/2006/main"/>
+          <a:ln xmlns:a="http://schemas.openxmlformats.org/drawingml/2006/main" w="0">
+            <a:noFill/>
+          </a:ln>
+        </p:spPr>
+        <p:txBody>
+          <a:bodyPr xmlns:a="http://schemas.openxmlformats.org/drawingml/2006/main" wrap="square" lIns="0" tIns="0" rIns="0" bIns="0" anchor="t">
+            <a:noAutofit/>
+          </a:bodyPr>
+          <a:lstStyle xmlns:a="http://schemas.openxmlformats.org/drawingml/2006/main">
+            <a:defPPr>
+              <a:defRPr sz="1050" b="1">
+                <a:solidFill>
+                  <a:srgbClr val="9B7744"/>
+                </a:solidFill>
+                <a:latin typeface="Pretendard"/>
+                <a:ea typeface="Pretendard"/>
+                <a:cs typeface="Pretendard"/>
+              </a:defRPr>
+            </a:defPPr>
+          </a:lstStyle>
+          <a:p xmlns:a="http://schemas.openxmlformats.org/drawingml/2006/main">
+            <a:pPr>
+              <a:defRPr sz="1050" b="1">
+                <a:solidFill>
+                  <a:srgbClr val="9B7744"/>
+                </a:solidFill>
+                <a:latin typeface="Pretendard"/>
+                <a:ea typeface="Pretendard"/>
+                <a:cs typeface="Pretendard"/>
+              </a:defRPr>
+            </a:pPr>
+            <a:r>
+              <a:rPr sz="1050" b="1">
+                <a:solidFill>
+                  <a:srgbClr val="9B7744"/>
+                </a:solidFill>
+                <a:latin typeface="Pretendard"/>
+                <a:ea typeface="Pretendard"/>
+                <a:cs typeface="Pretendard"/>
+              </a:rPr>
+              <a:t>AFTERCARE</a:t>
+            </a:r>
+          </a:p>
+        </p:txBody>
+      </p:sp>
+      <p:sp>
+        <p:nvSpPr>
+          <p:cNvPr id="2" name="">
+            <a:extLst xmlns:a="http://schemas.openxmlformats.org/drawingml/2006/main">
+              <a:ext uri="{FF2B5EF4-FFF2-40B4-BE49-F238E27FC236}">
+                <a16:creationId xmlns:a16="http://schemas.microsoft.com/office/drawing/2014/main" id="{C4E4469A-998C-4139-A4EC-AA09CB3C0DD6}"/>
+              </a:ext>
+            </a:extLst>
+          </p:cNvPr>
+          <p:cNvSpPr>
+            <a:spLocks xmlns:a="http://schemas.openxmlformats.org/drawingml/2006/main" noGrp="1"/>
+          </p:cNvSpPr>
+          <p:nvPr/>
+        </p:nvSpPr>
+        <p:spPr>
+          <a:xfrm xmlns:a="http://schemas.openxmlformats.org/drawingml/2006/main">
+            <a:off x="685800" y="1047750"/>
+            <a:ext cx="10820400" cy="1085850"/>
+          </a:xfrm>
+          <a:prstGeom xmlns:a="http://schemas.openxmlformats.org/drawingml/2006/main" prst="rect">
+            <a:avLst/>
+          </a:prstGeom>
+          <a:noFill xmlns:a="http://schemas.openxmlformats.org/drawingml/2006/main"/>
+          <a:ln xmlns:a="http://schemas.openxmlformats.org/drawingml/2006/main" w="0">
+            <a:noFill/>
+          </a:ln>
+        </p:spPr>
+        <p:txBody>
+          <a:bodyPr xmlns:a="http://schemas.openxmlformats.org/drawingml/2006/main" wrap="square" lIns="0" tIns="0" rIns="0" bIns="0" anchor="t">
+            <a:noAutofit/>
+          </a:bodyPr>
+          <a:lstStyle xmlns:a="http://schemas.openxmlformats.org/drawingml/2006/main">
+            <a:defPPr>
+              <a:defRPr sz="3450" b="1">
+                <a:solidFill>
+                  <a:srgbClr val="1B1D19"/>
+                </a:solidFill>
+                <a:latin typeface="Pretendard"/>
+                <a:ea typeface="Pretendard"/>
+                <a:cs typeface="Pretendard"/>
+              </a:defRPr>
+            </a:defPPr>
+          </a:lstStyle>
+          <a:p xmlns:a="http://schemas.openxmlformats.org/drawingml/2006/main">
+            <a:pPr>
+              <a:defRPr sz="3450" b="1">
+                <a:solidFill>
+                  <a:srgbClr val="1B1D19"/>
+                </a:solidFill>
+                <a:latin typeface="Pretendard"/>
+                <a:ea typeface="Pretendard"/>
+                <a:cs typeface="Pretendard"/>
+              </a:defRPr>
+            </a:pPr>
+            <a:r>
+              <a:rPr sz="3450" b="1">
+                <a:solidFill>
+                  <a:srgbClr val="1B1D19"/>
+                </a:solidFill>
+                <a:latin typeface="Pretendard"/>
+                <a:ea typeface="Pretendard"/>
+                <a:cs typeface="Pretendard"/>
+              </a:rPr>
+              <a:t>Postoperative Care &amp; Dressing</a:t>
+            </a:r>
+          </a:p>
+        </p:txBody>
+      </p:sp>
+      <p:sp>
+        <p:nvSpPr>
+          <p:cNvPr id="3" name="">
+            <a:extLst xmlns:a="http://schemas.openxmlformats.org/drawingml/2006/main">
+              <a:ext uri="{FF2B5EF4-FFF2-40B4-BE49-F238E27FC236}">
+                <a16:creationId xmlns:a16="http://schemas.microsoft.com/office/drawing/2014/main" id="{DDA2F534-5913-4470-BAE8-0C1193A1133B}"/>
+              </a:ext>
+            </a:extLst>
+          </p:cNvPr>
+          <p:cNvSpPr>
+            <a:spLocks xmlns:a="http://schemas.openxmlformats.org/drawingml/2006/main" noGrp="1"/>
+          </p:cNvSpPr>
+          <p:nvPr/>
+        </p:nvSpPr>
+        <p:spPr>
+          <a:xfrm xmlns:a="http://schemas.openxmlformats.org/drawingml/2006/main">
+            <a:off x="685800" y="2457450"/>
+            <a:ext cx="5105400" cy="19050"/>
+          </a:xfrm>
+          <a:prstGeom xmlns:a="http://schemas.openxmlformats.org/drawingml/2006/main" prst="rect">
+            <a:avLst/>
+          </a:prstGeom>
+          <a:solidFill xmlns:a="http://schemas.openxmlformats.org/drawingml/2006/main">
+            <a:srgbClr val="B5915D"/>
+          </a:solidFill>
+          <a:ln xmlns:a="http://schemas.openxmlformats.org/drawingml/2006/main" w="0">
+            <a:noFill/>
+          </a:ln>
+        </p:spPr>
+      </p:sp>
+      <p:sp>
+        <p:nvSpPr>
+          <p:cNvPr id="4" name="">
+            <a:extLst xmlns:a="http://schemas.openxmlformats.org/drawingml/2006/main">
+              <a:ext uri="{FF2B5EF4-FFF2-40B4-BE49-F238E27FC236}">
+                <a16:creationId xmlns:a16="http://schemas.microsoft.com/office/drawing/2014/main" id="{A5C183D9-AD2F-4F8F-90D4-D9C8D8CB32DD}"/>
+              </a:ext>
+            </a:extLst>
+          </p:cNvPr>
+          <p:cNvSpPr>
+            <a:spLocks xmlns:a="http://schemas.openxmlformats.org/drawingml/2006/main" noGrp="1"/>
+          </p:cNvSpPr>
+          <p:nvPr/>
+        </p:nvSpPr>
+        <p:spPr>
+          <a:xfrm xmlns:a="http://schemas.openxmlformats.org/drawingml/2006/main">
+            <a:off x="685800" y="2781300"/>
+            <a:ext cx="5105400" cy="590550"/>
+          </a:xfrm>
+          <a:prstGeom xmlns:a="http://schemas.openxmlformats.org/drawingml/2006/main" prst="rect">
+            <a:avLst/>
+          </a:prstGeom>
+          <a:noFill xmlns:a="http://schemas.openxmlformats.org/drawingml/2006/main"/>
+          <a:ln xmlns:a="http://schemas.openxmlformats.org/drawingml/2006/main" w="0">
+            <a:noFill/>
+          </a:ln>
+        </p:spPr>
+        <p:txBody>
+          <a:bodyPr xmlns:a="http://schemas.openxmlformats.org/drawingml/2006/main" wrap="square" lIns="0" tIns="0" rIns="0" bIns="0" anchor="t">
+            <a:noAutofit/>
+          </a:bodyPr>
+          <a:lstStyle xmlns:a="http://schemas.openxmlformats.org/drawingml/2006/main">
+            <a:defPPr>
+              <a:defRPr sz="2325" b="1">
+                <a:solidFill>
+                  <a:srgbClr val="1B1D19"/>
+                </a:solidFill>
+                <a:latin typeface="Pretendard"/>
+                <a:ea typeface="Pretendard"/>
+                <a:cs typeface="Pretendard"/>
+              </a:defRPr>
+            </a:defPPr>
+          </a:lstStyle>
+          <a:p xmlns:a="http://schemas.openxmlformats.org/drawingml/2006/main">
+            <a:pPr>
+              <a:defRPr sz="2325" b="1">
+                <a:solidFill>
+                  <a:srgbClr val="1B1D19"/>
+                </a:solidFill>
+                <a:latin typeface="Pretendard"/>
+                <a:ea typeface="Pretendard"/>
+                <a:cs typeface="Pretendard"/>
+              </a:defRPr>
+            </a:pPr>
+            <a:r>
+              <a:rPr sz="2325" b="1">
+                <a:solidFill>
+                  <a:srgbClr val="1B1D19"/>
+                </a:solidFill>
+                <a:latin typeface="Pretendard"/>
+                <a:ea typeface="Pretendard"/>
+                <a:cs typeface="Pretendard"/>
+              </a:rPr>
+              <a:t>Postoperative care</a:t>
+            </a:r>
+          </a:p>
+        </p:txBody>
+      </p:sp>
+      <p:sp>
+        <p:nvSpPr>
+          <p:cNvPr id="5" name="">
+            <a:extLst xmlns:a="http://schemas.openxmlformats.org/drawingml/2006/main">
+              <a:ext uri="{FF2B5EF4-FFF2-40B4-BE49-F238E27FC236}">
+                <a16:creationId xmlns:a16="http://schemas.microsoft.com/office/drawing/2014/main" id="{466DB7A4-9AF0-427B-A298-25F8EB89AAE7}"/>
+              </a:ext>
+            </a:extLst>
+          </p:cNvPr>
+          <p:cNvSpPr>
+            <a:spLocks xmlns:a="http://schemas.openxmlformats.org/drawingml/2006/main" noGrp="1"/>
+          </p:cNvSpPr>
+          <p:nvPr/>
+        </p:nvSpPr>
+        <p:spPr>
+          <a:xfrm xmlns:a="http://schemas.openxmlformats.org/drawingml/2006/main">
+            <a:off x="685800" y="3581400"/>
+            <a:ext cx="5105400" cy="2190750"/>
+          </a:xfrm>
+          <a:prstGeom xmlns:a="http://schemas.openxmlformats.org/drawingml/2006/main" prst="rect">
+            <a:avLst/>
+          </a:prstGeom>
+          <a:solidFill xmlns:a="http://schemas.openxmlformats.org/drawingml/2006/main">
+            <a:srgbClr val="F7F7F3"/>
+          </a:solidFill>
+          <a:ln xmlns:a="http://schemas.openxmlformats.org/drawingml/2006/main" w="0">
+            <a:noFill/>
+          </a:ln>
+        </p:spPr>
+      </p:sp>
+      <p:sp>
+        <p:nvSpPr>
+          <p:cNvPr id="6" name="">
+            <a:extLst xmlns:a="http://schemas.openxmlformats.org/drawingml/2006/main">
+              <a:ext uri="{FF2B5EF4-FFF2-40B4-BE49-F238E27FC236}">
+                <a16:creationId xmlns:a16="http://schemas.microsoft.com/office/drawing/2014/main" id="{D6075F67-3FC5-4C35-A19F-4F50AAFC5A45}"/>
+              </a:ext>
+            </a:extLst>
+          </p:cNvPr>
+          <p:cNvSpPr>
+            <a:spLocks xmlns:a="http://schemas.openxmlformats.org/drawingml/2006/main" noGrp="1"/>
+          </p:cNvSpPr>
+          <p:nvPr/>
+        </p:nvSpPr>
+        <p:spPr>
+          <a:xfrm xmlns:a="http://schemas.openxmlformats.org/drawingml/2006/main">
+            <a:off x="6400800" y="2457450"/>
+            <a:ext cx="5105400" cy="19050"/>
+          </a:xfrm>
+          <a:prstGeom xmlns:a="http://schemas.openxmlformats.org/drawingml/2006/main" prst="rect">
+            <a:avLst/>
+          </a:prstGeom>
+          <a:solidFill xmlns:a="http://schemas.openxmlformats.org/drawingml/2006/main">
+            <a:srgbClr val="B5915D"/>
+          </a:solidFill>
+          <a:ln xmlns:a="http://schemas.openxmlformats.org/drawingml/2006/main" w="0">
+            <a:noFill/>
+          </a:ln>
+        </p:spPr>
+      </p:sp>
+      <p:sp>
+        <p:nvSpPr>
+          <p:cNvPr id="7" name="">
+            <a:extLst xmlns:a="http://schemas.openxmlformats.org/drawingml/2006/main">
+              <a:ext uri="{FF2B5EF4-FFF2-40B4-BE49-F238E27FC236}">
+                <a16:creationId xmlns:a16="http://schemas.microsoft.com/office/drawing/2014/main" id="{0C7AEE1E-63B4-4705-BC11-C9AC2468B77F}"/>
+              </a:ext>
+            </a:extLst>
+          </p:cNvPr>
+          <p:cNvSpPr>
+            <a:spLocks xmlns:a="http://schemas.openxmlformats.org/drawingml/2006/main" noGrp="1"/>
+          </p:cNvSpPr>
+          <p:nvPr/>
+        </p:nvSpPr>
+        <p:spPr>
+          <a:xfrm xmlns:a="http://schemas.openxmlformats.org/drawingml/2006/main">
+            <a:off x="6400800" y="2781300"/>
+            <a:ext cx="5105400" cy="590550"/>
+          </a:xfrm>
+          <a:prstGeom xmlns:a="http://schemas.openxmlformats.org/drawingml/2006/main" prst="rect">
+            <a:avLst/>
+          </a:prstGeom>
+          <a:noFill xmlns:a="http://schemas.openxmlformats.org/drawingml/2006/main"/>
+          <a:ln xmlns:a="http://schemas.openxmlformats.org/drawingml/2006/main" w="0">
+            <a:noFill/>
+          </a:ln>
+        </p:spPr>
+        <p:txBody>
+          <a:bodyPr xmlns:a="http://schemas.openxmlformats.org/drawingml/2006/main" wrap="square" lIns="0" tIns="0" rIns="0" bIns="0" anchor="t">
+            <a:noAutofit/>
+          </a:bodyPr>
+          <a:lstStyle xmlns:a="http://schemas.openxmlformats.org/drawingml/2006/main">
+            <a:defPPr>
+              <a:defRPr sz="2325" b="1">
+                <a:solidFill>
+                  <a:srgbClr val="1B1D19"/>
+                </a:solidFill>
+                <a:latin typeface="Pretendard"/>
+                <a:ea typeface="Pretendard"/>
+                <a:cs typeface="Pretendard"/>
+              </a:defRPr>
+            </a:defPPr>
+          </a:lstStyle>
+          <a:p xmlns:a="http://schemas.openxmlformats.org/drawingml/2006/main">
+            <a:pPr>
+              <a:defRPr sz="2325" b="1">
+                <a:solidFill>
+                  <a:srgbClr val="1B1D19"/>
+                </a:solidFill>
+                <a:latin typeface="Pretendard"/>
+                <a:ea typeface="Pretendard"/>
+                <a:cs typeface="Pretendard"/>
+              </a:defRPr>
+            </a:pPr>
+            <a:r>
+              <a:rPr sz="2325" b="1">
+                <a:solidFill>
+                  <a:srgbClr val="1B1D19"/>
+                </a:solidFill>
+                <a:latin typeface="Pretendard"/>
+                <a:ea typeface="Pretendard"/>
+                <a:cs typeface="Pretendard"/>
+              </a:rPr>
+              <a:t>Dressing technique</a:t>
+            </a:r>
+          </a:p>
+        </p:txBody>
+      </p:sp>
+      <p:sp>
+        <p:nvSpPr>
+          <p:cNvPr id="8" name="">
+            <a:extLst xmlns:a="http://schemas.openxmlformats.org/drawingml/2006/main">
+              <a:ext uri="{FF2B5EF4-FFF2-40B4-BE49-F238E27FC236}">
+                <a16:creationId xmlns:a16="http://schemas.microsoft.com/office/drawing/2014/main" id="{C8939E1E-1C06-41FA-9252-51B9498D950C}"/>
+              </a:ext>
+            </a:extLst>
+          </p:cNvPr>
+          <p:cNvSpPr>
+            <a:spLocks xmlns:a="http://schemas.openxmlformats.org/drawingml/2006/main" noGrp="1"/>
+          </p:cNvSpPr>
+          <p:nvPr/>
+        </p:nvSpPr>
+        <p:spPr>
+          <a:xfrm xmlns:a="http://schemas.openxmlformats.org/drawingml/2006/main">
+            <a:off x="6400800" y="3581400"/>
+            <a:ext cx="5105400" cy="2190750"/>
+          </a:xfrm>
+          <a:prstGeom xmlns:a="http://schemas.openxmlformats.org/drawingml/2006/main" prst="rect">
+            <a:avLst/>
+          </a:prstGeom>
+          <a:solidFill xmlns:a="http://schemas.openxmlformats.org/drawingml/2006/main">
+            <a:srgbClr val="F7F7F3"/>
+          </a:solidFill>
+          <a:ln xmlns:a="http://schemas.openxmlformats.org/drawingml/2006/main" w="0">
+            <a:noFill/>
+          </a:ln>
+        </p:spPr>
+      </p:sp>
+      <p:sp>
+        <p:nvSpPr>
+          <p:cNvPr id="9" name="">
+            <a:extLst xmlns:a="http://schemas.openxmlformats.org/drawingml/2006/main">
+              <a:ext uri="{FF2B5EF4-FFF2-40B4-BE49-F238E27FC236}">
+                <a16:creationId xmlns:a16="http://schemas.microsoft.com/office/drawing/2014/main" id="{E4144403-600B-40D5-8CD8-EAE1C84EF8DA}"/>
+              </a:ext>
+            </a:extLst>
+          </p:cNvPr>
+          <p:cNvSpPr>
+            <a:spLocks xmlns:a="http://schemas.openxmlformats.org/drawingml/2006/main" noGrp="1"/>
+          </p:cNvSpPr>
+          <p:nvPr/>
+        </p:nvSpPr>
+        <p:spPr>
+          <a:xfrm xmlns:a="http://schemas.openxmlformats.org/drawingml/2006/main">
+            <a:off x="685800" y="6448425"/>
+            <a:ext cx="10191750" cy="228600"/>
+          </a:xfrm>
+          <a:prstGeom xmlns:a="http://schemas.openxmlformats.org/drawingml/2006/main" prst="rect">
+            <a:avLst/>
+          </a:prstGeom>
+          <a:noFill xmlns:a="http://schemas.openxmlformats.org/drawingml/2006/main"/>
+          <a:ln xmlns:a="http://schemas.openxmlformats.org/drawingml/2006/main" w="0">
+            <a:noFill/>
+          </a:ln>
+        </p:spPr>
+        <p:txBody>
+          <a:bodyPr xmlns:a="http://schemas.openxmlformats.org/drawingml/2006/main" wrap="square" lIns="0" tIns="0" rIns="0" bIns="0" anchor="t">
+            <a:noAutofit/>
+          </a:bodyPr>
+          <a:lstStyle xmlns:a="http://schemas.openxmlformats.org/drawingml/2006/main">
+            <a:defPPr>
+              <a:defRPr sz="975" b="0">
+                <a:solidFill>
+                  <a:srgbClr val="858B7E"/>
+                </a:solidFill>
+                <a:latin typeface="Pretendard"/>
+                <a:ea typeface="Pretendard"/>
+                <a:cs typeface="Pretendard"/>
+              </a:defRPr>
+            </a:defPPr>
+          </a:lstStyle>
+          <a:p xmlns:a="http://schemas.openxmlformats.org/drawingml/2006/main">
+            <a:pPr>
+              <a:defRPr sz="975" b="0">
+                <a:solidFill>
+                  <a:srgbClr val="858B7E"/>
+                </a:solidFill>
+                <a:latin typeface="Pretendard"/>
+                <a:ea typeface="Pretendard"/>
+                <a:cs typeface="Pretendard"/>
+              </a:defRPr>
+            </a:pPr>
+            <a:r>
+              <a:rPr sz="975" b="0">
+                <a:solidFill>
+                  <a:srgbClr val="858B7E"/>
+                </a:solidFill>
+                <a:latin typeface="Pretendard"/>
+                <a:ea typeface="Pretendard"/>
+                <a:cs typeface="Pretendard"/>
+              </a:rPr>
+              <a:t>Jinmo Koo · HIGHST Urology</a:t>
+            </a:r>
+          </a:p>
+        </p:txBody>
+      </p:sp>
+      <p:sp>
+        <p:nvSpPr>
+          <p:cNvPr id="10" name="">
+            <a:extLst xmlns:a="http://schemas.openxmlformats.org/drawingml/2006/main">
+              <a:ext uri="{FF2B5EF4-FFF2-40B4-BE49-F238E27FC236}">
+                <a16:creationId xmlns:a16="http://schemas.microsoft.com/office/drawing/2014/main" id="{5B507C1A-6DDB-40B9-89A3-F7E6510D0639}"/>
+              </a:ext>
+            </a:extLst>
+          </p:cNvPr>
+          <p:cNvSpPr>
+            <a:spLocks xmlns:a="http://schemas.openxmlformats.org/drawingml/2006/main" noGrp="1"/>
+          </p:cNvSpPr>
+          <p:nvPr/>
+        </p:nvSpPr>
+        <p:spPr>
+          <a:xfrm xmlns:a="http://schemas.openxmlformats.org/drawingml/2006/main">
+            <a:off x="11134725" y="6448425"/>
+            <a:ext cx="371475" cy="228600"/>
+          </a:xfrm>
+          <a:prstGeom xmlns:a="http://schemas.openxmlformats.org/drawingml/2006/main" prst="rect">
+            <a:avLst/>
+          </a:prstGeom>
+          <a:noFill xmlns:a="http://schemas.openxmlformats.org/drawingml/2006/main"/>
+          <a:ln xmlns:a="http://schemas.openxmlformats.org/drawingml/2006/main" w="0">
+            <a:noFill/>
+          </a:ln>
+        </p:spPr>
+        <p:txBody>
+          <a:bodyPr xmlns:a="http://schemas.openxmlformats.org/drawingml/2006/main" wrap="square" lIns="0" tIns="0" rIns="0" bIns="0" anchor="t">
+            <a:noAutofit/>
+          </a:bodyPr>
+          <a:lstStyle xmlns:a="http://schemas.openxmlformats.org/drawingml/2006/main">
+            <a:defPPr>
+              <a:defRPr sz="975" b="0">
+                <a:solidFill>
+                  <a:srgbClr val="858B7E"/>
+                </a:solidFill>
+                <a:latin typeface="Pretendard"/>
+                <a:ea typeface="Pretendard"/>
+                <a:cs typeface="Pretendard"/>
+              </a:defRPr>
+            </a:defPPr>
+          </a:lstStyle>
+          <a:p xmlns:a="http://schemas.openxmlformats.org/drawingml/2006/main">
+            <a:pPr>
+              <a:defRPr sz="975" b="0">
+                <a:solidFill>
+                  <a:srgbClr val="858B7E"/>
+                </a:solidFill>
+                <a:latin typeface="Pretendard"/>
+                <a:ea typeface="Pretendard"/>
+                <a:cs typeface="Pretendard"/>
+              </a:defRPr>
+            </a:pPr>
+            <a:r>
+              <a:rPr sz="975" b="0">
+                <a:solidFill>
+                  <a:srgbClr val="858B7E"/>
+                </a:solidFill>
+                <a:latin typeface="Pretendard"/>
+                <a:ea typeface="Pretendard"/>
+                <a:cs typeface="Pretendard"/>
+              </a:rPr>
+              <a:t>12</a:t>
+            </a:r>
+          </a:p>
+        </p:txBody>
+      </p:sp>
+    </p:spTree>
+    <p:extLst>
+      <p:ext uri="{BB962C8B-B14F-4D97-AF65-F5344CB8AC3E}">
+        <p14:creationId xmlns:p14="http://schemas.microsoft.com/office/powerpoint/2010/main" val="562450353"/>
+      </p:ext>
+    </p:extLst>
+  </p:cSld>
+</p:sld>
+</file>
+
+<file path=ppt/slides/slide13.xml><?xml version="1.0" encoding="utf-8"?>
+<p:sld xmlns:p="http://schemas.openxmlformats.org/presentationml/2006/main">
+  <p:cSld>
+    <p:bg>
+      <p:bgPr>
+        <a:solidFill xmlns:a="http://schemas.openxmlformats.org/drawingml/2006/main">
+          <a:srgbClr val="FFFFFF"/>
+        </a:solidFill>
+      </p:bgPr>
+    </p:bg>
+    <p:spTree>
+      <p:nvGrpSpPr>
+        <p:cNvPr id="1" name=""/>
+        <p:cNvGrpSpPr/>
+        <p:nvPr/>
+      </p:nvGrpSpPr>
+      <p:grpSpPr>
+        <a:xfrm xmlns:a="http://schemas.openxmlformats.org/drawingml/2006/main"/>
+      </p:grpSpPr>
+      <p:sp>
+        <p:nvSpPr>
+          <p:cNvPr id="6" name="">
+            <a:extLst xmlns:a="http://schemas.openxmlformats.org/drawingml/2006/main">
+              <a:ext uri="{FF2B5EF4-FFF2-40B4-BE49-F238E27FC236}">
+                <a16:creationId xmlns:a16="http://schemas.microsoft.com/office/drawing/2014/main" id="{126FBA1D-E772-4ADE-88D7-888D23E48184}"/>
+              </a:ext>
+            </a:extLst>
+          </p:cNvPr>
+          <p:cNvSpPr>
+            <a:spLocks xmlns:a="http://schemas.openxmlformats.org/drawingml/2006/main" noGrp="1"/>
+          </p:cNvSpPr>
+          <p:nvPr/>
+        </p:nvSpPr>
+        <p:spPr>
+          <a:xfrm xmlns:a="http://schemas.openxmlformats.org/drawingml/2006/main">
+            <a:off x="685800" y="619125"/>
+            <a:ext cx="10668000" cy="247650"/>
+          </a:xfrm>
+          <a:prstGeom xmlns:a="http://schemas.openxmlformats.org/drawingml/2006/main" prst="rect">
+            <a:avLst/>
+          </a:prstGeom>
+          <a:noFill xmlns:a="http://schemas.openxmlformats.org/drawingml/2006/main"/>
+          <a:ln xmlns:a="http://schemas.openxmlformats.org/drawingml/2006/main" w="0">
+            <a:noFill/>
+          </a:ln>
+        </p:spPr>
+        <p:txBody>
+          <a:bodyPr xmlns:a="http://schemas.openxmlformats.org/drawingml/2006/main" wrap="square" lIns="0" tIns="0" rIns="0" bIns="0" anchor="t">
+            <a:noAutofit/>
+          </a:bodyPr>
+          <a:lstStyle xmlns:a="http://schemas.openxmlformats.org/drawingml/2006/main">
+            <a:defPPr>
+              <a:defRPr sz="1050" b="1">
+                <a:solidFill>
+                  <a:srgbClr val="9B7744"/>
+                </a:solidFill>
+                <a:latin typeface="Pretendard"/>
+                <a:ea typeface="Pretendard"/>
+                <a:cs typeface="Pretendard"/>
+              </a:defRPr>
+            </a:defPPr>
+          </a:lstStyle>
+          <a:p xmlns:a="http://schemas.openxmlformats.org/drawingml/2006/main">
+            <a:pPr>
+              <a:defRPr sz="1050" b="1">
+                <a:solidFill>
+                  <a:srgbClr val="9B7744"/>
+                </a:solidFill>
+                <a:latin typeface="Pretendard"/>
+                <a:ea typeface="Pretendard"/>
+                <a:cs typeface="Pretendard"/>
+              </a:defRPr>
+            </a:pPr>
+            <a:r>
+              <a:rPr sz="1050" b="1">
+                <a:solidFill>
+                  <a:srgbClr val="9B7744"/>
+                </a:solidFill>
+                <a:latin typeface="Pretendard"/>
+                <a:ea typeface="Pretendard"/>
+                <a:cs typeface="Pretendard"/>
+              </a:rPr>
+              <a:t>DISCUSSION</a:t>
+            </a:r>
+          </a:p>
+        </p:txBody>
+      </p:sp>
+      <p:sp>
+        <p:nvSpPr>
+          <p:cNvPr id="2" name="">
+            <a:extLst xmlns:a="http://schemas.openxmlformats.org/drawingml/2006/main">
+              <a:ext uri="{FF2B5EF4-FFF2-40B4-BE49-F238E27FC236}">
+                <a16:creationId xmlns:a16="http://schemas.microsoft.com/office/drawing/2014/main" id="{ABFA644C-4B5B-4AA9-BED6-643FA07DBC6F}"/>
+              </a:ext>
+            </a:extLst>
+          </p:cNvPr>
+          <p:cNvSpPr>
+            <a:spLocks xmlns:a="http://schemas.openxmlformats.org/drawingml/2006/main" noGrp="1"/>
+          </p:cNvSpPr>
+          <p:nvPr/>
+        </p:nvSpPr>
+        <p:spPr>
+          <a:xfrm xmlns:a="http://schemas.openxmlformats.org/drawingml/2006/main">
+            <a:off x="685800" y="1047750"/>
+            <a:ext cx="10820400" cy="1085850"/>
+          </a:xfrm>
+          <a:prstGeom xmlns:a="http://schemas.openxmlformats.org/drawingml/2006/main" prst="rect">
+            <a:avLst/>
+          </a:prstGeom>
+          <a:noFill xmlns:a="http://schemas.openxmlformats.org/drawingml/2006/main"/>
+          <a:ln xmlns:a="http://schemas.openxmlformats.org/drawingml/2006/main" w="0">
+            <a:noFill/>
+          </a:ln>
+        </p:spPr>
+        <p:txBody>
+          <a:bodyPr xmlns:a="http://schemas.openxmlformats.org/drawingml/2006/main" wrap="square" lIns="0" tIns="0" rIns="0" bIns="0" anchor="t">
+            <a:noAutofit/>
+          </a:bodyPr>
+          <a:lstStyle xmlns:a="http://schemas.openxmlformats.org/drawingml/2006/main">
+            <a:defPPr>
+              <a:defRPr sz="3450" b="1">
+                <a:solidFill>
+                  <a:srgbClr val="1B1D19"/>
+                </a:solidFill>
+                <a:latin typeface="Pretendard"/>
+                <a:ea typeface="Pretendard"/>
+                <a:cs typeface="Pretendard"/>
+              </a:defRPr>
+            </a:defPPr>
+          </a:lstStyle>
+          <a:p xmlns:a="http://schemas.openxmlformats.org/drawingml/2006/main">
+            <a:pPr>
+              <a:defRPr sz="3450" b="1">
+                <a:solidFill>
+                  <a:srgbClr val="1B1D19"/>
+                </a:solidFill>
+                <a:latin typeface="Pretendard"/>
+                <a:ea typeface="Pretendard"/>
+                <a:cs typeface="Pretendard"/>
+              </a:defRPr>
+            </a:pPr>
+            <a:r>
+              <a:rPr sz="3450" b="1">
+                <a:solidFill>
+                  <a:srgbClr val="1B1D19"/>
+                </a:solidFill>
+                <a:latin typeface="Pretendard"/>
+                <a:ea typeface="Pretendard"/>
+                <a:cs typeface="Pretendard"/>
+              </a:rPr>
+              <a:t>Questions &amp; Answers</a:t>
+            </a:r>
+          </a:p>
+        </p:txBody>
+      </p:sp>
+      <p:sp>
+        <p:nvSpPr>
+          <p:cNvPr id="3" name="">
+            <a:extLst xmlns:a="http://schemas.openxmlformats.org/drawingml/2006/main">
+              <a:ext uri="{FF2B5EF4-FFF2-40B4-BE49-F238E27FC236}">
+                <a16:creationId xmlns:a16="http://schemas.microsoft.com/office/drawing/2014/main" id="{ED143D55-2943-421C-AC90-01C07B258874}"/>
+              </a:ext>
+            </a:extLst>
+          </p:cNvPr>
+          <p:cNvSpPr>
+            <a:spLocks xmlns:a="http://schemas.openxmlformats.org/drawingml/2006/main" noGrp="1"/>
+          </p:cNvSpPr>
+          <p:nvPr/>
+        </p:nvSpPr>
+        <p:spPr>
+          <a:xfrm xmlns:a="http://schemas.openxmlformats.org/drawingml/2006/main">
+            <a:off x="685800" y="3143250"/>
+            <a:ext cx="10477500" cy="857250"/>
+          </a:xfrm>
+          <a:prstGeom xmlns:a="http://schemas.openxmlformats.org/drawingml/2006/main" prst="rect">
+            <a:avLst/>
+          </a:prstGeom>
+          <a:noFill xmlns:a="http://schemas.openxmlformats.org/drawingml/2006/main"/>
+          <a:ln xmlns:a="http://schemas.openxmlformats.org/drawingml/2006/main" w="0">
+            <a:noFill/>
+          </a:ln>
+        </p:spPr>
+        <p:txBody>
+          <a:bodyPr xmlns:a="http://schemas.openxmlformats.org/drawingml/2006/main" wrap="square" lIns="0" tIns="0" rIns="0" bIns="0" anchor="t">
+            <a:noAutofit/>
+          </a:bodyPr>
+          <a:lstStyle xmlns:a="http://schemas.openxmlformats.org/drawingml/2006/main">
+            <a:defPPr>
+              <a:defRPr sz="3225" b="0">
+                <a:solidFill>
+                  <a:srgbClr val="6B7265"/>
+                </a:solidFill>
+                <a:latin typeface="Pretendard"/>
+                <a:ea typeface="Pretendard"/>
+                <a:cs typeface="Pretendard"/>
+              </a:defRPr>
+            </a:defPPr>
+          </a:lstStyle>
+          <a:p xmlns:a="http://schemas.openxmlformats.org/drawingml/2006/main">
+            <a:pPr>
+              <a:defRPr sz="3225" b="0">
+                <a:solidFill>
+                  <a:srgbClr val="6B7265"/>
+                </a:solidFill>
+                <a:latin typeface="Pretendard"/>
+                <a:ea typeface="Pretendard"/>
+                <a:cs typeface="Pretendard"/>
+              </a:defRPr>
+            </a:pPr>
+            <a:r>
+              <a:rPr sz="3225" b="0">
+                <a:solidFill>
+                  <a:srgbClr val="6B7265"/>
+                </a:solidFill>
+                <a:latin typeface="Pretendard"/>
+                <a:ea typeface="Pretendard"/>
+                <a:cs typeface="Pretendard"/>
+              </a:rPr>
+              <a:t>Thank you</a:t>
+            </a:r>
+          </a:p>
+        </p:txBody>
+      </p:sp>
+      <p:sp>
+        <p:nvSpPr>
+          <p:cNvPr id="4" name="">
+            <a:extLst xmlns:a="http://schemas.openxmlformats.org/drawingml/2006/main">
+              <a:ext uri="{FF2B5EF4-FFF2-40B4-BE49-F238E27FC236}">
+                <a16:creationId xmlns:a16="http://schemas.microsoft.com/office/drawing/2014/main" id="{D117886A-E861-4523-897C-B5F2AC9087EB}"/>
+              </a:ext>
+            </a:extLst>
+          </p:cNvPr>
+          <p:cNvSpPr>
+            <a:spLocks xmlns:a="http://schemas.openxmlformats.org/drawingml/2006/main" noGrp="1"/>
+          </p:cNvSpPr>
+          <p:nvPr/>
+        </p:nvSpPr>
+        <p:spPr>
+          <a:xfrm xmlns:a="http://schemas.openxmlformats.org/drawingml/2006/main">
+            <a:off x="685800" y="6448425"/>
+            <a:ext cx="10191750" cy="228600"/>
+          </a:xfrm>
+          <a:prstGeom xmlns:a="http://schemas.openxmlformats.org/drawingml/2006/main" prst="rect">
+            <a:avLst/>
+          </a:prstGeom>
+          <a:noFill xmlns:a="http://schemas.openxmlformats.org/drawingml/2006/main"/>
+          <a:ln xmlns:a="http://schemas.openxmlformats.org/drawingml/2006/main" w="0">
+            <a:noFill/>
+          </a:ln>
+        </p:spPr>
+        <p:txBody>
+          <a:bodyPr xmlns:a="http://schemas.openxmlformats.org/drawingml/2006/main" wrap="square" lIns="0" tIns="0" rIns="0" bIns="0" anchor="t">
+            <a:noAutofit/>
+          </a:bodyPr>
+          <a:lstStyle xmlns:a="http://schemas.openxmlformats.org/drawingml/2006/main">
+            <a:defPPr>
+              <a:defRPr sz="975" b="0">
+                <a:solidFill>
+                  <a:srgbClr val="858B7E"/>
+                </a:solidFill>
+                <a:latin typeface="Pretendard"/>
+                <a:ea typeface="Pretendard"/>
+                <a:cs typeface="Pretendard"/>
+              </a:defRPr>
+            </a:defPPr>
+          </a:lstStyle>
+          <a:p xmlns:a="http://schemas.openxmlformats.org/drawingml/2006/main">
+            <a:pPr>
+              <a:defRPr sz="975" b="0">
+                <a:solidFill>
+                  <a:srgbClr val="858B7E"/>
+                </a:solidFill>
+                <a:latin typeface="Pretendard"/>
+                <a:ea typeface="Pretendard"/>
+                <a:cs typeface="Pretendard"/>
+              </a:defRPr>
+            </a:pPr>
+            <a:r>
+              <a:rPr sz="975" b="0">
+                <a:solidFill>
+                  <a:srgbClr val="858B7E"/>
+                </a:solidFill>
+                <a:latin typeface="Pretendard"/>
+                <a:ea typeface="Pretendard"/>
+                <a:cs typeface="Pretendard"/>
+              </a:rPr>
+              <a:t>Jinmo Koo · HIGHST Urology</a:t>
+            </a:r>
+          </a:p>
+        </p:txBody>
+      </p:sp>
+      <p:sp>
+        <p:nvSpPr>
+          <p:cNvPr id="5" name="">
+            <a:extLst xmlns:a="http://schemas.openxmlformats.org/drawingml/2006/main">
+              <a:ext uri="{FF2B5EF4-FFF2-40B4-BE49-F238E27FC236}">
+                <a16:creationId xmlns:a16="http://schemas.microsoft.com/office/drawing/2014/main" id="{13037A85-78B9-487E-9BE6-7BC2BD631F35}"/>
+              </a:ext>
+            </a:extLst>
+          </p:cNvPr>
+          <p:cNvSpPr>
+            <a:spLocks xmlns:a="http://schemas.openxmlformats.org/drawingml/2006/main" noGrp="1"/>
+          </p:cNvSpPr>
+          <p:nvPr/>
+        </p:nvSpPr>
+        <p:spPr>
+          <a:xfrm xmlns:a="http://schemas.openxmlformats.org/drawingml/2006/main">
+            <a:off x="11134725" y="6448425"/>
+            <a:ext cx="371475" cy="228600"/>
+          </a:xfrm>
+          <a:prstGeom xmlns:a="http://schemas.openxmlformats.org/drawingml/2006/main" prst="rect">
+            <a:avLst/>
+          </a:prstGeom>
+          <a:noFill xmlns:a="http://schemas.openxmlformats.org/drawingml/2006/main"/>
+          <a:ln xmlns:a="http://schemas.openxmlformats.org/drawingml/2006/main" w="0">
+            <a:noFill/>
+          </a:ln>
+        </p:spPr>
+        <p:txBody>
+          <a:bodyPr xmlns:a="http://schemas.openxmlformats.org/drawingml/2006/main" wrap="square" lIns="0" tIns="0" rIns="0" bIns="0" anchor="t">
+            <a:noAutofit/>
+          </a:bodyPr>
+          <a:lstStyle xmlns:a="http://schemas.openxmlformats.org/drawingml/2006/main">
+            <a:defPPr>
+              <a:defRPr sz="975" b="0">
+                <a:solidFill>
+                  <a:srgbClr val="858B7E"/>
+                </a:solidFill>
+                <a:latin typeface="Pretendard"/>
+                <a:ea typeface="Pretendard"/>
+                <a:cs typeface="Pretendard"/>
+              </a:defRPr>
+            </a:defPPr>
+          </a:lstStyle>
+          <a:p xmlns:a="http://schemas.openxmlformats.org/drawingml/2006/main">
+            <a:pPr>
+              <a:defRPr sz="975" b="0">
+                <a:solidFill>
+                  <a:srgbClr val="858B7E"/>
+                </a:solidFill>
+                <a:latin typeface="Pretendard"/>
+                <a:ea typeface="Pretendard"/>
+                <a:cs typeface="Pretendard"/>
+              </a:defRPr>
+            </a:pPr>
+            <a:r>
+              <a:rPr sz="975" b="0">
+                <a:solidFill>
+                  <a:srgbClr val="858B7E"/>
+                </a:solidFill>
+                <a:latin typeface="Pretendard"/>
+                <a:ea typeface="Pretendard"/>
+                <a:cs typeface="Pretendard"/>
+              </a:rPr>
+              <a:t>13</a:t>
+            </a:r>
+          </a:p>
+        </p:txBody>
+      </p:sp>
+    </p:spTree>
+    <p:extLst>
+      <p:ext uri="{BB962C8B-B14F-4D97-AF65-F5344CB8AC3E}">
+        <p14:creationId xmlns:p14="http://schemas.microsoft.com/office/powerpoint/2010/main" val="954744155"/>
       </p:ext>
     </p:extLst>
   </p:cSld>
@@ -2062,10 +6640,10 @@
       </p:grpSpPr>
       <p:sp>
         <p:nvSpPr>
-          <p:cNvPr id="13" name="">
-            <a:extLst xmlns:a="http://schemas.openxmlformats.org/drawingml/2006/main">
-              <a:ext uri="{FF2B5EF4-FFF2-40B4-BE49-F238E27FC236}">
-                <a16:creationId xmlns:a16="http://schemas.microsoft.com/office/drawing/2014/main" id="{3AB05B2E-44DD-423F-B20A-A56BE472F7CF}"/>
+          <p:cNvPr id="7" name="">
+            <a:extLst xmlns:a="http://schemas.openxmlformats.org/drawingml/2006/main">
+              <a:ext uri="{FF2B5EF4-FFF2-40B4-BE49-F238E27FC236}">
+                <a16:creationId xmlns:a16="http://schemas.microsoft.com/office/drawing/2014/main" id="{19AC6689-3F5F-4B9E-9CFE-A2019EC9892B}"/>
               </a:ext>
             </a:extLst>
           </p:cNvPr>
@@ -2091,7 +6669,18 @@
           <a:bodyPr xmlns:a="http://schemas.openxmlformats.org/drawingml/2006/main" wrap="square" lIns="0" tIns="0" rIns="0" bIns="0" anchor="t">
             <a:noAutofit/>
           </a:bodyPr>
-          <a:lstStyle xmlns:a="http://schemas.openxmlformats.org/drawingml/2006/main"/>
+          <a:lstStyle xmlns:a="http://schemas.openxmlformats.org/drawingml/2006/main">
+            <a:defPPr>
+              <a:defRPr sz="1050" b="1">
+                <a:solidFill>
+                  <a:srgbClr val="9B7744"/>
+                </a:solidFill>
+                <a:latin typeface="Pretendard"/>
+                <a:ea typeface="Pretendard"/>
+                <a:cs typeface="Pretendard"/>
+              </a:defRPr>
+            </a:defPPr>
+          </a:lstStyle>
           <a:p xmlns:a="http://schemas.openxmlformats.org/drawingml/2006/main">
             <a:pPr>
               <a:defRPr sz="1050" b="1">
@@ -2112,7 +6701,7 @@
                 <a:ea typeface="Pretendard"/>
                 <a:cs typeface="Pretendard"/>
               </a:rPr>
-              <a:t>PREPARATION</a:t>
+              <a:t>SPEAKER</a:t>
             </a:r>
           </a:p>
         </p:txBody>
@@ -2122,7 +6711,7 @@
           <p:cNvPr id="2" name="">
             <a:extLst xmlns:a="http://schemas.openxmlformats.org/drawingml/2006/main">
               <a:ext uri="{FF2B5EF4-FFF2-40B4-BE49-F238E27FC236}">
-                <a16:creationId xmlns:a16="http://schemas.microsoft.com/office/drawing/2014/main" id="{9BAFE847-8DB3-44B8-8DC4-46AD98CD1862}"/>
+                <a16:creationId xmlns:a16="http://schemas.microsoft.com/office/drawing/2014/main" id="{42A995E7-3A62-4ADC-8D38-2ECE8ED4E90F}"/>
               </a:ext>
             </a:extLst>
           </p:cNvPr>
@@ -2148,7 +6737,18 @@
           <a:bodyPr xmlns:a="http://schemas.openxmlformats.org/drawingml/2006/main" wrap="square" lIns="0" tIns="0" rIns="0" bIns="0" anchor="t">
             <a:noAutofit/>
           </a:bodyPr>
-          <a:lstStyle xmlns:a="http://schemas.openxmlformats.org/drawingml/2006/main"/>
+          <a:lstStyle xmlns:a="http://schemas.openxmlformats.org/drawingml/2006/main">
+            <a:defPPr>
+              <a:defRPr sz="3450" b="1">
+                <a:solidFill>
+                  <a:srgbClr val="1B1D19"/>
+                </a:solidFill>
+                <a:latin typeface="Pretendard"/>
+                <a:ea typeface="Pretendard"/>
+                <a:cs typeface="Pretendard"/>
+              </a:defRPr>
+            </a:defPPr>
+          </a:lstStyle>
           <a:p xmlns:a="http://schemas.openxmlformats.org/drawingml/2006/main">
             <a:pPr>
               <a:defRPr sz="3450" b="1">
@@ -2169,7 +6769,7 @@
                 <a:ea typeface="Pretendard"/>
                 <a:cs typeface="Pretendard"/>
               </a:rPr>
-              <a:t>Blood and Urine Testing</a:t>
+              <a:t>Jinmo Koo</a:t>
             </a:r>
           </a:p>
         </p:txBody>
@@ -2179,19 +6779,19 @@
           <p:cNvPr id="3" name="">
             <a:extLst xmlns:a="http://schemas.openxmlformats.org/drawingml/2006/main">
               <a:ext uri="{FF2B5EF4-FFF2-40B4-BE49-F238E27FC236}">
-                <a16:creationId xmlns:a16="http://schemas.microsoft.com/office/drawing/2014/main" id="{139F0470-F3A9-4E74-8F5A-317720581390}"/>
-              </a:ext>
-            </a:extLst>
-          </p:cNvPr>
-          <p:cNvSpPr>
-            <a:spLocks xmlns:a="http://schemas.openxmlformats.org/drawingml/2006/main" noGrp="1"/>
-          </p:cNvSpPr>
-          <p:nvPr/>
-        </p:nvSpPr>
-        <p:spPr>
-          <a:xfrm xmlns:a="http://schemas.openxmlformats.org/drawingml/2006/main">
-            <a:off x="685800" y="2314575"/>
-            <a:ext cx="10820400" cy="504825"/>
+                <a16:creationId xmlns:a16="http://schemas.microsoft.com/office/drawing/2014/main" id="{5D6A2554-AC42-4A00-B220-62CA0E191F3B}"/>
+              </a:ext>
+            </a:extLst>
+          </p:cNvPr>
+          <p:cNvSpPr>
+            <a:spLocks xmlns:a="http://schemas.openxmlformats.org/drawingml/2006/main" noGrp="1"/>
+          </p:cNvSpPr>
+          <p:nvPr/>
+        </p:nvSpPr>
+        <p:spPr>
+          <a:xfrm xmlns:a="http://schemas.openxmlformats.org/drawingml/2006/main">
+            <a:off x="685800" y="2724150"/>
+            <a:ext cx="8096250" cy="609600"/>
           </a:xfrm>
           <a:prstGeom xmlns:a="http://schemas.openxmlformats.org/drawingml/2006/main" prst="rect">
             <a:avLst/>
@@ -2205,12 +6805,23 @@
           <a:bodyPr xmlns:a="http://schemas.openxmlformats.org/drawingml/2006/main" wrap="square" lIns="0" tIns="0" rIns="0" bIns="0" anchor="t">
             <a:noAutofit/>
           </a:bodyPr>
-          <a:lstStyle xmlns:a="http://schemas.openxmlformats.org/drawingml/2006/main"/>
+          <a:lstStyle xmlns:a="http://schemas.openxmlformats.org/drawingml/2006/main">
+            <a:defPPr>
+              <a:defRPr sz="2550" b="0">
+                <a:solidFill>
+                  <a:srgbClr val="6B7265"/>
+                </a:solidFill>
+                <a:latin typeface="Pretendard"/>
+                <a:ea typeface="Pretendard"/>
+                <a:cs typeface="Pretendard"/>
+              </a:defRPr>
+            </a:defPPr>
+          </a:lstStyle>
           <a:p xmlns:a="http://schemas.openxmlformats.org/drawingml/2006/main">
             <a:pPr>
               <a:defRPr sz="2550" b="0">
                 <a:solidFill>
-                  <a:srgbClr val="1B1D19"/>
+                  <a:srgbClr val="6B7265"/>
                 </a:solidFill>
                 <a:latin typeface="Pretendard"/>
                 <a:ea typeface="Pretendard"/>
@@ -2220,65 +6831,63 @@
             <a:r>
               <a:rPr sz="2550" b="0">
                 <a:solidFill>
-                  <a:srgbClr val="1B1D19"/>
+                  <a:srgbClr val="6B7265"/>
                 </a:solidFill>
                 <a:latin typeface="Pretendard"/>
                 <a:ea typeface="Pretendard"/>
                 <a:cs typeface="Pretendard"/>
               </a:rPr>
-              <a:t>Liver function</a:t>
-            </a:r>
-          </a:p>
-        </p:txBody>
-      </p:sp>
-      <p:sp>
-        <p:nvSpPr>
+              <a:t>HIGHST Urology</a:t>
+            </a:r>
+          </a:p>
+        </p:txBody>
+      </p:sp>
+      <p:pic>
+        <p:nvPicPr>
           <p:cNvPr id="4" name="">
             <a:extLst xmlns:a="http://schemas.openxmlformats.org/drawingml/2006/main">
               <a:ext uri="{FF2B5EF4-FFF2-40B4-BE49-F238E27FC236}">
-                <a16:creationId xmlns:a16="http://schemas.microsoft.com/office/drawing/2014/main" id="{F7FC0FE6-9146-49BE-8762-27E1B1C6EA85}"/>
-              </a:ext>
-            </a:extLst>
-          </p:cNvPr>
-          <p:cNvSpPr>
-            <a:spLocks xmlns:a="http://schemas.openxmlformats.org/drawingml/2006/main" noGrp="1"/>
-          </p:cNvSpPr>
-          <p:nvPr/>
-        </p:nvSpPr>
-        <p:spPr>
-          <a:xfrm xmlns:a="http://schemas.openxmlformats.org/drawingml/2006/main">
-            <a:off x="685800" y="2914650"/>
-            <a:ext cx="10820400" cy="9525"/>
-          </a:xfrm>
-          <a:prstGeom xmlns:a="http://schemas.openxmlformats.org/drawingml/2006/main" prst="rect">
-            <a:avLst/>
-          </a:prstGeom>
-          <a:solidFill xmlns:a="http://schemas.openxmlformats.org/drawingml/2006/main">
-            <a:srgbClr val="DEDFD6"/>
-          </a:solidFill>
-          <a:ln xmlns:a="http://schemas.openxmlformats.org/drawingml/2006/main" w="0">
-            <a:noFill/>
-          </a:ln>
-        </p:spPr>
-      </p:sp>
+                <a16:creationId xmlns:a16="http://schemas.microsoft.com/office/drawing/2014/main" id="{2B02EE4B-4058-4826-A53A-4ED36A3D39D5}"/>
+              </a:ext>
+            </a:extLst>
+          </p:cNvPr>
+          <p:cNvPicPr>
+            <a:picLocks xmlns:a="http://schemas.openxmlformats.org/drawingml/2006/main" noChangeAspect="1"/>
+          </p:cNvPicPr>
+          <p:nvPr/>
+        </p:nvPicPr>
+        <p:blipFill>
+          <a:blip xmlns:r="http://schemas.openxmlformats.org/officeDocument/2006/relationships" xmlns:a="http://schemas.openxmlformats.org/drawingml/2006/main" r:embed="R7afef12476e24d17"/>
+          <a:stretch xmlns:a="http://schemas.openxmlformats.org/drawingml/2006/main"/>
+        </p:blipFill>
+        <p:spPr>
+          <a:xfrm xmlns:a="http://schemas.openxmlformats.org/drawingml/2006/main">
+            <a:off x="685800" y="4812204"/>
+            <a:ext cx="2571750" cy="729266"/>
+          </a:xfrm>
+          <a:prstGeom xmlns:a="http://schemas.openxmlformats.org/drawingml/2006/main" prst="rect">
+            <a:avLst/>
+          </a:prstGeom>
+        </p:spPr>
+      </p:pic>
       <p:sp>
         <p:nvSpPr>
           <p:cNvPr id="5" name="">
             <a:extLst xmlns:a="http://schemas.openxmlformats.org/drawingml/2006/main">
               <a:ext uri="{FF2B5EF4-FFF2-40B4-BE49-F238E27FC236}">
-                <a16:creationId xmlns:a16="http://schemas.microsoft.com/office/drawing/2014/main" id="{86F5FF4D-9895-4DAE-8FA4-1619FC558410}"/>
-              </a:ext>
-            </a:extLst>
-          </p:cNvPr>
-          <p:cNvSpPr>
-            <a:spLocks xmlns:a="http://schemas.openxmlformats.org/drawingml/2006/main" noGrp="1"/>
-          </p:cNvSpPr>
-          <p:nvPr/>
-        </p:nvSpPr>
-        <p:spPr>
-          <a:xfrm xmlns:a="http://schemas.openxmlformats.org/drawingml/2006/main">
-            <a:off x="685800" y="3143250"/>
-            <a:ext cx="10820400" cy="504825"/>
+                <a16:creationId xmlns:a16="http://schemas.microsoft.com/office/drawing/2014/main" id="{EAC85E11-7C31-448B-BEB9-F668D49E452C}"/>
+              </a:ext>
+            </a:extLst>
+          </p:cNvPr>
+          <p:cNvSpPr>
+            <a:spLocks xmlns:a="http://schemas.openxmlformats.org/drawingml/2006/main" noGrp="1"/>
+          </p:cNvSpPr>
+          <p:nvPr/>
+        </p:nvSpPr>
+        <p:spPr>
+          <a:xfrm xmlns:a="http://schemas.openxmlformats.org/drawingml/2006/main">
+            <a:off x="685800" y="6448425"/>
+            <a:ext cx="10191750" cy="228600"/>
           </a:xfrm>
           <a:prstGeom xmlns:a="http://schemas.openxmlformats.org/drawingml/2006/main" prst="rect">
             <a:avLst/>
@@ -2292,12 +6901,23 @@
           <a:bodyPr xmlns:a="http://schemas.openxmlformats.org/drawingml/2006/main" wrap="square" lIns="0" tIns="0" rIns="0" bIns="0" anchor="t">
             <a:noAutofit/>
           </a:bodyPr>
-          <a:lstStyle xmlns:a="http://schemas.openxmlformats.org/drawingml/2006/main"/>
+          <a:lstStyle xmlns:a="http://schemas.openxmlformats.org/drawingml/2006/main">
+            <a:defPPr>
+              <a:defRPr sz="975" b="0">
+                <a:solidFill>
+                  <a:srgbClr val="858B7E"/>
+                </a:solidFill>
+                <a:latin typeface="Pretendard"/>
+                <a:ea typeface="Pretendard"/>
+                <a:cs typeface="Pretendard"/>
+              </a:defRPr>
+            </a:defPPr>
+          </a:lstStyle>
           <a:p xmlns:a="http://schemas.openxmlformats.org/drawingml/2006/main">
             <a:pPr>
-              <a:defRPr sz="2550" b="0">
-                <a:solidFill>
-                  <a:srgbClr val="1B1D19"/>
+              <a:defRPr sz="975" b="0">
+                <a:solidFill>
+                  <a:srgbClr val="858B7E"/>
                 </a:solidFill>
                 <a:latin typeface="Pretendard"/>
                 <a:ea typeface="Pretendard"/>
@@ -2305,15 +6925,15 @@
               </a:defRPr>
             </a:pPr>
             <a:r>
-              <a:rPr sz="2550" b="0">
-                <a:solidFill>
-                  <a:srgbClr val="1B1D19"/>
+              <a:rPr sz="975" b="0">
+                <a:solidFill>
+                  <a:srgbClr val="858B7E"/>
                 </a:solidFill>
                 <a:latin typeface="Pretendard"/>
                 <a:ea typeface="Pretendard"/>
                 <a:cs typeface="Pretendard"/>
               </a:rPr>
-              <a:t>Blood glucose</a:t>
+              <a:t>Jinmo Koo · HIGHST Urology</a:t>
             </a:r>
           </a:p>
         </p:txBody>
@@ -2323,49 +6943,19 @@
           <p:cNvPr id="6" name="">
             <a:extLst xmlns:a="http://schemas.openxmlformats.org/drawingml/2006/main">
               <a:ext uri="{FF2B5EF4-FFF2-40B4-BE49-F238E27FC236}">
-                <a16:creationId xmlns:a16="http://schemas.microsoft.com/office/drawing/2014/main" id="{DE8B1900-FDAF-4960-A0AB-9C7C97F4FC8D}"/>
-              </a:ext>
-            </a:extLst>
-          </p:cNvPr>
-          <p:cNvSpPr>
-            <a:spLocks xmlns:a="http://schemas.openxmlformats.org/drawingml/2006/main" noGrp="1"/>
-          </p:cNvSpPr>
-          <p:nvPr/>
-        </p:nvSpPr>
-        <p:spPr>
-          <a:xfrm xmlns:a="http://schemas.openxmlformats.org/drawingml/2006/main">
-            <a:off x="685800" y="3743325"/>
-            <a:ext cx="10820400" cy="9525"/>
-          </a:xfrm>
-          <a:prstGeom xmlns:a="http://schemas.openxmlformats.org/drawingml/2006/main" prst="rect">
-            <a:avLst/>
-          </a:prstGeom>
-          <a:solidFill xmlns:a="http://schemas.openxmlformats.org/drawingml/2006/main">
-            <a:srgbClr val="DEDFD6"/>
-          </a:solidFill>
-          <a:ln xmlns:a="http://schemas.openxmlformats.org/drawingml/2006/main" w="0">
-            <a:noFill/>
-          </a:ln>
-        </p:spPr>
-      </p:sp>
-      <p:sp>
-        <p:nvSpPr>
-          <p:cNvPr id="7" name="">
-            <a:extLst xmlns:a="http://schemas.openxmlformats.org/drawingml/2006/main">
-              <a:ext uri="{FF2B5EF4-FFF2-40B4-BE49-F238E27FC236}">
-                <a16:creationId xmlns:a16="http://schemas.microsoft.com/office/drawing/2014/main" id="{13F30283-AE81-4583-9BEC-B77C63189611}"/>
-              </a:ext>
-            </a:extLst>
-          </p:cNvPr>
-          <p:cNvSpPr>
-            <a:spLocks xmlns:a="http://schemas.openxmlformats.org/drawingml/2006/main" noGrp="1"/>
-          </p:cNvSpPr>
-          <p:nvPr/>
-        </p:nvSpPr>
-        <p:spPr>
-          <a:xfrm xmlns:a="http://schemas.openxmlformats.org/drawingml/2006/main">
-            <a:off x="685800" y="3971925"/>
-            <a:ext cx="10820400" cy="504825"/>
+                <a16:creationId xmlns:a16="http://schemas.microsoft.com/office/drawing/2014/main" id="{7D7E2129-2755-4F59-A5B0-A4FF24EC0A7E}"/>
+              </a:ext>
+            </a:extLst>
+          </p:cNvPr>
+          <p:cNvSpPr>
+            <a:spLocks xmlns:a="http://schemas.openxmlformats.org/drawingml/2006/main" noGrp="1"/>
+          </p:cNvSpPr>
+          <p:nvPr/>
+        </p:nvSpPr>
+        <p:spPr>
+          <a:xfrm xmlns:a="http://schemas.openxmlformats.org/drawingml/2006/main">
+            <a:off x="11134725" y="6448425"/>
+            <a:ext cx="371475" cy="228600"/>
           </a:xfrm>
           <a:prstGeom xmlns:a="http://schemas.openxmlformats.org/drawingml/2006/main" prst="rect">
             <a:avLst/>
@@ -2379,183 +6969,8 @@
           <a:bodyPr xmlns:a="http://schemas.openxmlformats.org/drawingml/2006/main" wrap="square" lIns="0" tIns="0" rIns="0" bIns="0" anchor="t">
             <a:noAutofit/>
           </a:bodyPr>
-          <a:lstStyle xmlns:a="http://schemas.openxmlformats.org/drawingml/2006/main"/>
-          <a:p xmlns:a="http://schemas.openxmlformats.org/drawingml/2006/main">
-            <a:pPr>
-              <a:defRPr sz="2550" b="0">
-                <a:solidFill>
-                  <a:srgbClr val="1B1D19"/>
-                </a:solidFill>
-                <a:latin typeface="Pretendard"/>
-                <a:ea typeface="Pretendard"/>
-                <a:cs typeface="Pretendard"/>
-              </a:defRPr>
-            </a:pPr>
-            <a:r>
-              <a:rPr sz="2550" b="0">
-                <a:solidFill>
-                  <a:srgbClr val="1B1D19"/>
-                </a:solidFill>
-                <a:latin typeface="Pretendard"/>
-                <a:ea typeface="Pretendard"/>
-                <a:cs typeface="Pretendard"/>
-              </a:rPr>
-              <a:t>Inflammatory markers</a:t>
-            </a:r>
-          </a:p>
-        </p:txBody>
-      </p:sp>
-      <p:sp>
-        <p:nvSpPr>
-          <p:cNvPr id="8" name="">
-            <a:extLst xmlns:a="http://schemas.openxmlformats.org/drawingml/2006/main">
-              <a:ext uri="{FF2B5EF4-FFF2-40B4-BE49-F238E27FC236}">
-                <a16:creationId xmlns:a16="http://schemas.microsoft.com/office/drawing/2014/main" id="{2504AE08-020E-428C-BD99-C2328B18231A}"/>
-              </a:ext>
-            </a:extLst>
-          </p:cNvPr>
-          <p:cNvSpPr>
-            <a:spLocks xmlns:a="http://schemas.openxmlformats.org/drawingml/2006/main" noGrp="1"/>
-          </p:cNvSpPr>
-          <p:nvPr/>
-        </p:nvSpPr>
-        <p:spPr>
-          <a:xfrm xmlns:a="http://schemas.openxmlformats.org/drawingml/2006/main">
-            <a:off x="685800" y="4572000"/>
-            <a:ext cx="10820400" cy="9525"/>
-          </a:xfrm>
-          <a:prstGeom xmlns:a="http://schemas.openxmlformats.org/drawingml/2006/main" prst="rect">
-            <a:avLst/>
-          </a:prstGeom>
-          <a:solidFill xmlns:a="http://schemas.openxmlformats.org/drawingml/2006/main">
-            <a:srgbClr val="DEDFD6"/>
-          </a:solidFill>
-          <a:ln xmlns:a="http://schemas.openxmlformats.org/drawingml/2006/main" w="0">
-            <a:noFill/>
-          </a:ln>
-        </p:spPr>
-      </p:sp>
-      <p:sp>
-        <p:nvSpPr>
-          <p:cNvPr id="9" name="">
-            <a:extLst xmlns:a="http://schemas.openxmlformats.org/drawingml/2006/main">
-              <a:ext uri="{FF2B5EF4-FFF2-40B4-BE49-F238E27FC236}">
-                <a16:creationId xmlns:a16="http://schemas.microsoft.com/office/drawing/2014/main" id="{FF8BB811-04DA-4093-B9E6-29AC9A51D8CA}"/>
-              </a:ext>
-            </a:extLst>
-          </p:cNvPr>
-          <p:cNvSpPr>
-            <a:spLocks xmlns:a="http://schemas.openxmlformats.org/drawingml/2006/main" noGrp="1"/>
-          </p:cNvSpPr>
-          <p:nvPr/>
-        </p:nvSpPr>
-        <p:spPr>
-          <a:xfrm xmlns:a="http://schemas.openxmlformats.org/drawingml/2006/main">
-            <a:off x="685800" y="4800600"/>
-            <a:ext cx="10820400" cy="504825"/>
-          </a:xfrm>
-          <a:prstGeom xmlns:a="http://schemas.openxmlformats.org/drawingml/2006/main" prst="rect">
-            <a:avLst/>
-          </a:prstGeom>
-          <a:noFill xmlns:a="http://schemas.openxmlformats.org/drawingml/2006/main"/>
-          <a:ln xmlns:a="http://schemas.openxmlformats.org/drawingml/2006/main" w="0">
-            <a:noFill/>
-          </a:ln>
-        </p:spPr>
-        <p:txBody>
-          <a:bodyPr xmlns:a="http://schemas.openxmlformats.org/drawingml/2006/main" wrap="square" lIns="0" tIns="0" rIns="0" bIns="0" anchor="t">
-            <a:noAutofit/>
-          </a:bodyPr>
-          <a:lstStyle xmlns:a="http://schemas.openxmlformats.org/drawingml/2006/main"/>
-          <a:p xmlns:a="http://schemas.openxmlformats.org/drawingml/2006/main">
-            <a:pPr>
-              <a:defRPr sz="2550" b="0">
-                <a:solidFill>
-                  <a:srgbClr val="1B1D19"/>
-                </a:solidFill>
-                <a:latin typeface="Pretendard"/>
-                <a:ea typeface="Pretendard"/>
-                <a:cs typeface="Pretendard"/>
-              </a:defRPr>
-            </a:pPr>
-            <a:r>
-              <a:rPr sz="2550" b="0">
-                <a:solidFill>
-                  <a:srgbClr val="1B1D19"/>
-                </a:solidFill>
-                <a:latin typeface="Pretendard"/>
-                <a:ea typeface="Pretendard"/>
-                <a:cs typeface="Pretendard"/>
-              </a:rPr>
-              <a:t>STI screening</a:t>
-            </a:r>
-          </a:p>
-        </p:txBody>
-      </p:sp>
-      <p:sp>
-        <p:nvSpPr>
-          <p:cNvPr id="10" name="">
-            <a:extLst xmlns:a="http://schemas.openxmlformats.org/drawingml/2006/main">
-              <a:ext uri="{FF2B5EF4-FFF2-40B4-BE49-F238E27FC236}">
-                <a16:creationId xmlns:a16="http://schemas.microsoft.com/office/drawing/2014/main" id="{D5D9A8CC-C97F-4835-BF8B-C37657B03FEA}"/>
-              </a:ext>
-            </a:extLst>
-          </p:cNvPr>
-          <p:cNvSpPr>
-            <a:spLocks xmlns:a="http://schemas.openxmlformats.org/drawingml/2006/main" noGrp="1"/>
-          </p:cNvSpPr>
-          <p:nvPr/>
-        </p:nvSpPr>
-        <p:spPr>
-          <a:xfrm xmlns:a="http://schemas.openxmlformats.org/drawingml/2006/main">
-            <a:off x="685800" y="5400675"/>
-            <a:ext cx="10820400" cy="9525"/>
-          </a:xfrm>
-          <a:prstGeom xmlns:a="http://schemas.openxmlformats.org/drawingml/2006/main" prst="rect">
-            <a:avLst/>
-          </a:prstGeom>
-          <a:solidFill xmlns:a="http://schemas.openxmlformats.org/drawingml/2006/main">
-            <a:srgbClr val="DEDFD6"/>
-          </a:solidFill>
-          <a:ln xmlns:a="http://schemas.openxmlformats.org/drawingml/2006/main" w="0">
-            <a:noFill/>
-          </a:ln>
-        </p:spPr>
-      </p:sp>
-      <p:sp>
-        <p:nvSpPr>
-          <p:cNvPr id="11" name="">
-            <a:extLst xmlns:a="http://schemas.openxmlformats.org/drawingml/2006/main">
-              <a:ext uri="{FF2B5EF4-FFF2-40B4-BE49-F238E27FC236}">
-                <a16:creationId xmlns:a16="http://schemas.microsoft.com/office/drawing/2014/main" id="{203CDE0C-A666-4D56-9FE4-D4BD5AE9BAF4}"/>
-              </a:ext>
-            </a:extLst>
-          </p:cNvPr>
-          <p:cNvSpPr>
-            <a:spLocks xmlns:a="http://schemas.openxmlformats.org/drawingml/2006/main" noGrp="1"/>
-          </p:cNvSpPr>
-          <p:nvPr/>
-        </p:nvSpPr>
-        <p:spPr>
-          <a:xfrm xmlns:a="http://schemas.openxmlformats.org/drawingml/2006/main">
-            <a:off x="685800" y="6448425"/>
-            <a:ext cx="10191750" cy="228600"/>
-          </a:xfrm>
-          <a:prstGeom xmlns:a="http://schemas.openxmlformats.org/drawingml/2006/main" prst="rect">
-            <a:avLst/>
-          </a:prstGeom>
-          <a:noFill xmlns:a="http://schemas.openxmlformats.org/drawingml/2006/main"/>
-          <a:ln xmlns:a="http://schemas.openxmlformats.org/drawingml/2006/main" w="0">
-            <a:noFill/>
-          </a:ln>
-        </p:spPr>
-        <p:txBody>
-          <a:bodyPr xmlns:a="http://schemas.openxmlformats.org/drawingml/2006/main" wrap="square" lIns="0" tIns="0" rIns="0" bIns="0" anchor="t">
-            <a:noAutofit/>
-          </a:bodyPr>
-          <a:lstStyle xmlns:a="http://schemas.openxmlformats.org/drawingml/2006/main"/>
-          <a:p xmlns:a="http://schemas.openxmlformats.org/drawingml/2006/main">
-            <a:pPr>
+          <a:lstStyle xmlns:a="http://schemas.openxmlformats.org/drawingml/2006/main">
+            <a:defPPr>
               <a:defRPr sz="975" b="0">
                 <a:solidFill>
                   <a:srgbClr val="858B7E"/>
@@ -2564,53 +6979,8 @@
                 <a:ea typeface="Pretendard"/>
                 <a:cs typeface="Pretendard"/>
               </a:defRPr>
-            </a:pPr>
-            <a:r>
-              <a:rPr sz="975" b="0">
-                <a:solidFill>
-                  <a:srgbClr val="858B7E"/>
-                </a:solidFill>
-                <a:latin typeface="Pretendard"/>
-                <a:ea typeface="Pretendard"/>
-                <a:cs typeface="Pretendard"/>
-              </a:rPr>
-              <a:t>Jinmo Koo · HIGHST Urology</a:t>
-            </a:r>
-          </a:p>
-        </p:txBody>
-      </p:sp>
-      <p:sp>
-        <p:nvSpPr>
-          <p:cNvPr id="12" name="">
-            <a:extLst xmlns:a="http://schemas.openxmlformats.org/drawingml/2006/main">
-              <a:ext uri="{FF2B5EF4-FFF2-40B4-BE49-F238E27FC236}">
-                <a16:creationId xmlns:a16="http://schemas.microsoft.com/office/drawing/2014/main" id="{07B943E0-CB85-4015-BC72-3C0169E77B68}"/>
-              </a:ext>
-            </a:extLst>
-          </p:cNvPr>
-          <p:cNvSpPr>
-            <a:spLocks xmlns:a="http://schemas.openxmlformats.org/drawingml/2006/main" noGrp="1"/>
-          </p:cNvSpPr>
-          <p:nvPr/>
-        </p:nvSpPr>
-        <p:spPr>
-          <a:xfrm xmlns:a="http://schemas.openxmlformats.org/drawingml/2006/main">
-            <a:off x="11134725" y="6448425"/>
-            <a:ext cx="371475" cy="228600"/>
-          </a:xfrm>
-          <a:prstGeom xmlns:a="http://schemas.openxmlformats.org/drawingml/2006/main" prst="rect">
-            <a:avLst/>
-          </a:prstGeom>
-          <a:noFill xmlns:a="http://schemas.openxmlformats.org/drawingml/2006/main"/>
-          <a:ln xmlns:a="http://schemas.openxmlformats.org/drawingml/2006/main" w="0">
-            <a:noFill/>
-          </a:ln>
-        </p:spPr>
-        <p:txBody>
-          <a:bodyPr xmlns:a="http://schemas.openxmlformats.org/drawingml/2006/main" wrap="square" lIns="0" tIns="0" rIns="0" bIns="0" anchor="t">
-            <a:noAutofit/>
-          </a:bodyPr>
-          <a:lstStyle xmlns:a="http://schemas.openxmlformats.org/drawingml/2006/main"/>
+            </a:defPPr>
+          </a:lstStyle>
           <a:p xmlns:a="http://schemas.openxmlformats.org/drawingml/2006/main">
             <a:pPr>
               <a:defRPr sz="975" b="0">
@@ -2639,7 +7009,7 @@
     </p:spTree>
     <p:extLst>
       <p:ext uri="{BB962C8B-B14F-4D97-AF65-F5344CB8AC3E}">
-        <p14:creationId xmlns:p14="http://schemas.microsoft.com/office/powerpoint/2010/main" val="776090300"/>
+        <p14:creationId xmlns:p14="http://schemas.microsoft.com/office/powerpoint/2010/main" val="1512088029"/>
       </p:ext>
     </p:extLst>
   </p:cSld>
@@ -2667,10 +7037,10 @@
       </p:grpSpPr>
       <p:sp>
         <p:nvSpPr>
-          <p:cNvPr id="13" name="">
-            <a:extLst xmlns:a="http://schemas.openxmlformats.org/drawingml/2006/main">
-              <a:ext uri="{FF2B5EF4-FFF2-40B4-BE49-F238E27FC236}">
-                <a16:creationId xmlns:a16="http://schemas.microsoft.com/office/drawing/2014/main" id="{F88F7F38-7B62-42D3-BF1E-9839043BF38A}"/>
+          <p:cNvPr id="14" name="">
+            <a:extLst xmlns:a="http://schemas.openxmlformats.org/drawingml/2006/main">
+              <a:ext uri="{FF2B5EF4-FFF2-40B4-BE49-F238E27FC236}">
+                <a16:creationId xmlns:a16="http://schemas.microsoft.com/office/drawing/2014/main" id="{41FA0637-7BCD-4D2B-8099-9912B9DC734D}"/>
               </a:ext>
             </a:extLst>
           </p:cNvPr>
@@ -2696,7 +7066,18 @@
           <a:bodyPr xmlns:a="http://schemas.openxmlformats.org/drawingml/2006/main" wrap="square" lIns="0" tIns="0" rIns="0" bIns="0" anchor="t">
             <a:noAutofit/>
           </a:bodyPr>
-          <a:lstStyle xmlns:a="http://schemas.openxmlformats.org/drawingml/2006/main"/>
+          <a:lstStyle xmlns:a="http://schemas.openxmlformats.org/drawingml/2006/main">
+            <a:defPPr>
+              <a:defRPr sz="1050" b="1">
+                <a:solidFill>
+                  <a:srgbClr val="9B7744"/>
+                </a:solidFill>
+                <a:latin typeface="Pretendard"/>
+                <a:ea typeface="Pretendard"/>
+                <a:cs typeface="Pretendard"/>
+              </a:defRPr>
+            </a:defPPr>
+          </a:lstStyle>
           <a:p xmlns:a="http://schemas.openxmlformats.org/drawingml/2006/main">
             <a:pPr>
               <a:defRPr sz="1050" b="1">
@@ -2717,7 +7098,7 @@
                 <a:ea typeface="Pretendard"/>
                 <a:cs typeface="Pretendard"/>
               </a:rPr>
-              <a:t>PREPARATION</a:t>
+              <a:t>MATERIALS</a:t>
             </a:r>
           </a:p>
         </p:txBody>
@@ -2727,7 +7108,7 @@
           <p:cNvPr id="2" name="">
             <a:extLst xmlns:a="http://schemas.openxmlformats.org/drawingml/2006/main">
               <a:ext uri="{FF2B5EF4-FFF2-40B4-BE49-F238E27FC236}">
-                <a16:creationId xmlns:a16="http://schemas.microsoft.com/office/drawing/2014/main" id="{7C5E3E1A-BAA4-4ACC-9772-02B40BFFED03}"/>
+                <a16:creationId xmlns:a16="http://schemas.microsoft.com/office/drawing/2014/main" id="{3E14A33F-1167-4EB0-9020-1CBFCABCC988}"/>
               </a:ext>
             </a:extLst>
           </p:cNvPr>
@@ -2753,7 +7134,18 @@
           <a:bodyPr xmlns:a="http://schemas.openxmlformats.org/drawingml/2006/main" wrap="square" lIns="0" tIns="0" rIns="0" bIns="0" anchor="t">
             <a:noAutofit/>
           </a:bodyPr>
-          <a:lstStyle xmlns:a="http://schemas.openxmlformats.org/drawingml/2006/main"/>
+          <a:lstStyle xmlns:a="http://schemas.openxmlformats.org/drawingml/2006/main">
+            <a:defPPr>
+              <a:defRPr sz="3450" b="1">
+                <a:solidFill>
+                  <a:srgbClr val="1B1D19"/>
+                </a:solidFill>
+                <a:latin typeface="Pretendard"/>
+                <a:ea typeface="Pretendard"/>
+                <a:cs typeface="Pretendard"/>
+              </a:defRPr>
+            </a:defPPr>
+          </a:lstStyle>
           <a:p xmlns:a="http://schemas.openxmlformats.org/drawingml/2006/main">
             <a:pPr>
               <a:defRPr sz="3450" b="1">
@@ -2774,7 +7166,7 @@
                 <a:ea typeface="Pretendard"/>
                 <a:cs typeface="Pretendard"/>
               </a:rPr>
-              <a:t>Shaving and Draping</a:t>
+              <a:t>MegaDerm &amp; MegaFill</a:t>
             </a:r>
           </a:p>
         </p:txBody>
@@ -2784,25 +7176,25 @@
           <p:cNvPr id="3" name="">
             <a:extLst xmlns:a="http://schemas.openxmlformats.org/drawingml/2006/main">
               <a:ext uri="{FF2B5EF4-FFF2-40B4-BE49-F238E27FC236}">
-                <a16:creationId xmlns:a16="http://schemas.microsoft.com/office/drawing/2014/main" id="{AB02A82F-5C22-4C5F-946C-4DE825115499}"/>
-              </a:ext>
-            </a:extLst>
-          </p:cNvPr>
-          <p:cNvSpPr>
-            <a:spLocks xmlns:a="http://schemas.openxmlformats.org/drawingml/2006/main" noGrp="1"/>
-          </p:cNvSpPr>
-          <p:nvPr/>
-        </p:nvSpPr>
-        <p:spPr>
-          <a:xfrm xmlns:a="http://schemas.openxmlformats.org/drawingml/2006/main">
-            <a:off x="685800" y="2457450"/>
-            <a:ext cx="5105400" cy="19050"/>
+                <a16:creationId xmlns:a16="http://schemas.microsoft.com/office/drawing/2014/main" id="{6A75E9FC-C00F-4B52-AF56-F962A22EB70C}"/>
+              </a:ext>
+            </a:extLst>
+          </p:cNvPr>
+          <p:cNvSpPr>
+            <a:spLocks xmlns:a="http://schemas.openxmlformats.org/drawingml/2006/main" noGrp="1"/>
+          </p:cNvSpPr>
+          <p:nvPr/>
+        </p:nvSpPr>
+        <p:spPr>
+          <a:xfrm xmlns:a="http://schemas.openxmlformats.org/drawingml/2006/main">
+            <a:off x="685800" y="2333625"/>
+            <a:ext cx="4972050" cy="9525"/>
           </a:xfrm>
           <a:prstGeom xmlns:a="http://schemas.openxmlformats.org/drawingml/2006/main" prst="rect">
             <a:avLst/>
           </a:prstGeom>
           <a:solidFill xmlns:a="http://schemas.openxmlformats.org/drawingml/2006/main">
-            <a:srgbClr val="B5915D"/>
+            <a:srgbClr val="DEDFD6"/>
           </a:solidFill>
           <a:ln xmlns:a="http://schemas.openxmlformats.org/drawingml/2006/main" w="0">
             <a:noFill/>
@@ -2814,19 +7206,19 @@
           <p:cNvPr id="4" name="">
             <a:extLst xmlns:a="http://schemas.openxmlformats.org/drawingml/2006/main">
               <a:ext uri="{FF2B5EF4-FFF2-40B4-BE49-F238E27FC236}">
-                <a16:creationId xmlns:a16="http://schemas.microsoft.com/office/drawing/2014/main" id="{B8EA337E-917E-40C4-9777-B2DF4AE804C7}"/>
-              </a:ext>
-            </a:extLst>
-          </p:cNvPr>
-          <p:cNvSpPr>
-            <a:spLocks xmlns:a="http://schemas.openxmlformats.org/drawingml/2006/main" noGrp="1"/>
-          </p:cNvSpPr>
-          <p:nvPr/>
-        </p:nvSpPr>
-        <p:spPr>
-          <a:xfrm xmlns:a="http://schemas.openxmlformats.org/drawingml/2006/main">
-            <a:off x="685800" y="2714625"/>
-            <a:ext cx="5105400" cy="257175"/>
+                <a16:creationId xmlns:a16="http://schemas.microsoft.com/office/drawing/2014/main" id="{E8C23097-2194-40B0-B927-16007989B932}"/>
+              </a:ext>
+            </a:extLst>
+          </p:cNvPr>
+          <p:cNvSpPr>
+            <a:spLocks xmlns:a="http://schemas.openxmlformats.org/drawingml/2006/main" noGrp="1"/>
+          </p:cNvSpPr>
+          <p:nvPr/>
+        </p:nvSpPr>
+        <p:spPr>
+          <a:xfrm xmlns:a="http://schemas.openxmlformats.org/drawingml/2006/main">
+            <a:off x="685800" y="2524125"/>
+            <a:ext cx="4972050" cy="476250"/>
           </a:xfrm>
           <a:prstGeom xmlns:a="http://schemas.openxmlformats.org/drawingml/2006/main" prst="rect">
             <a:avLst/>
@@ -2840,12 +7232,23 @@
           <a:bodyPr xmlns:a="http://schemas.openxmlformats.org/drawingml/2006/main" wrap="square" lIns="0" tIns="0" rIns="0" bIns="0" anchor="t">
             <a:noAutofit/>
           </a:bodyPr>
-          <a:lstStyle xmlns:a="http://schemas.openxmlformats.org/drawingml/2006/main"/>
+          <a:lstStyle xmlns:a="http://schemas.openxmlformats.org/drawingml/2006/main">
+            <a:defPPr>
+              <a:defRPr sz="2475" b="1">
+                <a:solidFill>
+                  <a:srgbClr val="1B1D19"/>
+                </a:solidFill>
+                <a:latin typeface="Pretendard"/>
+                <a:ea typeface="Pretendard"/>
+                <a:cs typeface="Pretendard"/>
+              </a:defRPr>
+            </a:defPPr>
+          </a:lstStyle>
           <a:p xmlns:a="http://schemas.openxmlformats.org/drawingml/2006/main">
             <a:pPr>
-              <a:defRPr sz="1125" b="0">
-                <a:solidFill>
-                  <a:srgbClr val="9B7744"/>
+              <a:defRPr sz="2475" b="1">
+                <a:solidFill>
+                  <a:srgbClr val="1B1D19"/>
                 </a:solidFill>
                 <a:latin typeface="Pretendard"/>
                 <a:ea typeface="Pretendard"/>
@@ -2853,15 +7256,15 @@
               </a:defRPr>
             </a:pPr>
             <a:r>
-              <a:rPr sz="1125" b="0">
-                <a:solidFill>
-                  <a:srgbClr val="9B7744"/>
+              <a:rPr sz="2475" b="1">
+                <a:solidFill>
+                  <a:srgbClr val="1B1D19"/>
                 </a:solidFill>
                 <a:latin typeface="Pretendard"/>
                 <a:ea typeface="Pretendard"/>
                 <a:cs typeface="Pretendard"/>
               </a:rPr>
-              <a:t>01</a:t>
+              <a:t>MegaDerm</a:t>
             </a:r>
           </a:p>
         </p:txBody>
@@ -2871,19 +7274,19 @@
           <p:cNvPr id="5" name="">
             <a:extLst xmlns:a="http://schemas.openxmlformats.org/drawingml/2006/main">
               <a:ext uri="{FF2B5EF4-FFF2-40B4-BE49-F238E27FC236}">
-                <a16:creationId xmlns:a16="http://schemas.microsoft.com/office/drawing/2014/main" id="{E08F795B-CCDB-4169-B338-84ADA9DE4F65}"/>
-              </a:ext>
-            </a:extLst>
-          </p:cNvPr>
-          <p:cNvSpPr>
-            <a:spLocks xmlns:a="http://schemas.openxmlformats.org/drawingml/2006/main" noGrp="1"/>
-          </p:cNvSpPr>
-          <p:nvPr/>
-        </p:nvSpPr>
-        <p:spPr>
-          <a:xfrm xmlns:a="http://schemas.openxmlformats.org/drawingml/2006/main">
-            <a:off x="685800" y="3257550"/>
-            <a:ext cx="5105400" cy="952500"/>
+                <a16:creationId xmlns:a16="http://schemas.microsoft.com/office/drawing/2014/main" id="{B1CAB92A-E17D-4566-84A4-CBD268A61BA0}"/>
+              </a:ext>
+            </a:extLst>
+          </p:cNvPr>
+          <p:cNvSpPr>
+            <a:spLocks xmlns:a="http://schemas.openxmlformats.org/drawingml/2006/main" noGrp="1"/>
+          </p:cNvSpPr>
+          <p:nvPr/>
+        </p:nvSpPr>
+        <p:spPr>
+          <a:xfrm xmlns:a="http://schemas.openxmlformats.org/drawingml/2006/main">
+            <a:off x="685800" y="3114675"/>
+            <a:ext cx="4972050" cy="914400"/>
           </a:xfrm>
           <a:prstGeom xmlns:a="http://schemas.openxmlformats.org/drawingml/2006/main" prst="rect">
             <a:avLst/>
@@ -2897,12 +7300,23 @@
           <a:bodyPr xmlns:a="http://schemas.openxmlformats.org/drawingml/2006/main" wrap="square" lIns="0" tIns="0" rIns="0" bIns="0" anchor="t">
             <a:noAutofit/>
           </a:bodyPr>
-          <a:lstStyle xmlns:a="http://schemas.openxmlformats.org/drawingml/2006/main"/>
+          <a:lstStyle xmlns:a="http://schemas.openxmlformats.org/drawingml/2006/main">
+            <a:defPPr>
+              <a:defRPr sz="1800" b="0">
+                <a:solidFill>
+                  <a:srgbClr val="6B7265"/>
+                </a:solidFill>
+                <a:latin typeface="Pretendard"/>
+                <a:ea typeface="Pretendard"/>
+                <a:cs typeface="Pretendard"/>
+              </a:defRPr>
+            </a:defPPr>
+          </a:lstStyle>
           <a:p xmlns:a="http://schemas.openxmlformats.org/drawingml/2006/main">
             <a:pPr>
-              <a:defRPr sz="2700" b="1">
-                <a:solidFill>
-                  <a:srgbClr val="1B1D19"/>
+              <a:defRPr sz="1800" b="0">
+                <a:solidFill>
+                  <a:srgbClr val="6B7265"/>
                 </a:solidFill>
                 <a:latin typeface="Pretendard"/>
                 <a:ea typeface="Pretendard"/>
@@ -2910,15 +7324,38 @@
               </a:defRPr>
             </a:pPr>
             <a:r>
-              <a:rPr sz="2700" b="1">
-                <a:solidFill>
-                  <a:srgbClr val="1B1D19"/>
+              <a:rPr sz="1800" b="0">
+                <a:solidFill>
+                  <a:srgbClr val="6B7265"/>
                 </a:solidFill>
                 <a:latin typeface="Pretendard"/>
                 <a:ea typeface="Pretendard"/>
                 <a:cs typeface="Pretendard"/>
               </a:rPr>
-              <a:t>Shaving</a:t>
+              <a:t>Acellular dermal matrix</a:t>
+            </a:r>
+          </a:p>
+          <a:p xmlns:a="http://schemas.openxmlformats.org/drawingml/2006/main">
+            <a:pPr>
+              <a:defRPr sz="1800" b="0">
+                <a:solidFill>
+                  <a:srgbClr val="6B7265"/>
+                </a:solidFill>
+                <a:latin typeface="Pretendard"/>
+                <a:ea typeface="Pretendard"/>
+                <a:cs typeface="Pretendard"/>
+              </a:defRPr>
+            </a:pPr>
+            <a:r>
+              <a:rPr sz="1800" b="0">
+                <a:solidFill>
+                  <a:srgbClr val="6B7265"/>
+                </a:solidFill>
+                <a:latin typeface="Pretendard"/>
+                <a:ea typeface="Pretendard"/>
+                <a:cs typeface="Pretendard"/>
+              </a:rPr>
+              <a:t>Hydrated / Freeze-dried</a:t>
             </a:r>
           </a:p>
         </p:txBody>
@@ -2928,19 +7365,49 @@
           <p:cNvPr id="6" name="">
             <a:extLst xmlns:a="http://schemas.openxmlformats.org/drawingml/2006/main">
               <a:ext uri="{FF2B5EF4-FFF2-40B4-BE49-F238E27FC236}">
-                <a16:creationId xmlns:a16="http://schemas.microsoft.com/office/drawing/2014/main" id="{766235FF-4AD0-4B00-8EB2-96C9B1923065}"/>
-              </a:ext>
-            </a:extLst>
-          </p:cNvPr>
-          <p:cNvSpPr>
-            <a:spLocks xmlns:a="http://schemas.openxmlformats.org/drawingml/2006/main" noGrp="1"/>
-          </p:cNvSpPr>
-          <p:nvPr/>
-        </p:nvSpPr>
-        <p:spPr>
-          <a:xfrm xmlns:a="http://schemas.openxmlformats.org/drawingml/2006/main">
-            <a:off x="685800" y="4400550"/>
-            <a:ext cx="5105400" cy="1295400"/>
+                <a16:creationId xmlns:a16="http://schemas.microsoft.com/office/drawing/2014/main" id="{BC00328C-D1E5-4D50-953E-6547CB358114}"/>
+              </a:ext>
+            </a:extLst>
+          </p:cNvPr>
+          <p:cNvSpPr>
+            <a:spLocks xmlns:a="http://schemas.openxmlformats.org/drawingml/2006/main" noGrp="1"/>
+          </p:cNvSpPr>
+          <p:nvPr/>
+        </p:nvSpPr>
+        <p:spPr>
+          <a:xfrm xmlns:a="http://schemas.openxmlformats.org/drawingml/2006/main">
+            <a:off x="685800" y="4057650"/>
+            <a:ext cx="4972050" cy="9525"/>
+          </a:xfrm>
+          <a:prstGeom xmlns:a="http://schemas.openxmlformats.org/drawingml/2006/main" prst="rect">
+            <a:avLst/>
+          </a:prstGeom>
+          <a:solidFill xmlns:a="http://schemas.openxmlformats.org/drawingml/2006/main">
+            <a:srgbClr val="DEDFD6"/>
+          </a:solidFill>
+          <a:ln xmlns:a="http://schemas.openxmlformats.org/drawingml/2006/main" w="0">
+            <a:noFill/>
+          </a:ln>
+        </p:spPr>
+      </p:sp>
+      <p:sp>
+        <p:nvSpPr>
+          <p:cNvPr id="7" name="">
+            <a:extLst xmlns:a="http://schemas.openxmlformats.org/drawingml/2006/main">
+              <a:ext uri="{FF2B5EF4-FFF2-40B4-BE49-F238E27FC236}">
+                <a16:creationId xmlns:a16="http://schemas.microsoft.com/office/drawing/2014/main" id="{85F599C9-EBB4-4C53-B30F-C75B68AD6DEB}"/>
+              </a:ext>
+            </a:extLst>
+          </p:cNvPr>
+          <p:cNvSpPr>
+            <a:spLocks xmlns:a="http://schemas.openxmlformats.org/drawingml/2006/main" noGrp="1"/>
+          </p:cNvSpPr>
+          <p:nvPr/>
+        </p:nvSpPr>
+        <p:spPr>
+          <a:xfrm xmlns:a="http://schemas.openxmlformats.org/drawingml/2006/main">
+            <a:off x="685800" y="4248150"/>
+            <a:ext cx="4972050" cy="476250"/>
           </a:xfrm>
           <a:prstGeom xmlns:a="http://schemas.openxmlformats.org/drawingml/2006/main" prst="rect">
             <a:avLst/>
@@ -2954,62 +7421,61 @@
           <a:bodyPr xmlns:a="http://schemas.openxmlformats.org/drawingml/2006/main" wrap="square" lIns="0" tIns="0" rIns="0" bIns="0" anchor="t">
             <a:noAutofit/>
           </a:bodyPr>
-          <a:lstStyle xmlns:a="http://schemas.openxmlformats.org/drawingml/2006/main"/>
-          <a:p xmlns:a="http://schemas.openxmlformats.org/drawingml/2006/main">
-            <a:r>
-              <a:t/>
-            </a:r>
-          </a:p>
-        </p:txBody>
-      </p:sp>
-      <p:sp>
-        <p:nvSpPr>
-          <p:cNvPr id="7" name="">
-            <a:extLst xmlns:a="http://schemas.openxmlformats.org/drawingml/2006/main">
-              <a:ext uri="{FF2B5EF4-FFF2-40B4-BE49-F238E27FC236}">
-                <a16:creationId xmlns:a16="http://schemas.microsoft.com/office/drawing/2014/main" id="{9B6F2321-2CE7-4DDB-859A-DAAD927E84EC}"/>
-              </a:ext>
-            </a:extLst>
-          </p:cNvPr>
-          <p:cNvSpPr>
-            <a:spLocks xmlns:a="http://schemas.openxmlformats.org/drawingml/2006/main" noGrp="1"/>
-          </p:cNvSpPr>
-          <p:nvPr/>
-        </p:nvSpPr>
-        <p:spPr>
-          <a:xfrm xmlns:a="http://schemas.openxmlformats.org/drawingml/2006/main">
-            <a:off x="6400800" y="2457450"/>
-            <a:ext cx="5105400" cy="19050"/>
-          </a:xfrm>
-          <a:prstGeom xmlns:a="http://schemas.openxmlformats.org/drawingml/2006/main" prst="rect">
-            <a:avLst/>
-          </a:prstGeom>
-          <a:solidFill xmlns:a="http://schemas.openxmlformats.org/drawingml/2006/main">
-            <a:srgbClr val="B5915D"/>
-          </a:solidFill>
-          <a:ln xmlns:a="http://schemas.openxmlformats.org/drawingml/2006/main" w="0">
-            <a:noFill/>
-          </a:ln>
-        </p:spPr>
+          <a:lstStyle xmlns:a="http://schemas.openxmlformats.org/drawingml/2006/main">
+            <a:defPPr>
+              <a:defRPr sz="2475" b="1">
+                <a:solidFill>
+                  <a:srgbClr val="1B1D19"/>
+                </a:solidFill>
+                <a:latin typeface="Pretendard"/>
+                <a:ea typeface="Pretendard"/>
+                <a:cs typeface="Pretendard"/>
+              </a:defRPr>
+            </a:defPPr>
+          </a:lstStyle>
+          <a:p xmlns:a="http://schemas.openxmlformats.org/drawingml/2006/main">
+            <a:pPr>
+              <a:defRPr sz="2475" b="1">
+                <a:solidFill>
+                  <a:srgbClr val="1B1D19"/>
+                </a:solidFill>
+                <a:latin typeface="Pretendard"/>
+                <a:ea typeface="Pretendard"/>
+                <a:cs typeface="Pretendard"/>
+              </a:defRPr>
+            </a:pPr>
+            <a:r>
+              <a:rPr sz="2475" b="1">
+                <a:solidFill>
+                  <a:srgbClr val="1B1D19"/>
+                </a:solidFill>
+                <a:latin typeface="Pretendard"/>
+                <a:ea typeface="Pretendard"/>
+                <a:cs typeface="Pretendard"/>
+              </a:rPr>
+              <a:t>MegaFill</a:t>
+            </a:r>
+          </a:p>
+        </p:txBody>
       </p:sp>
       <p:sp>
         <p:nvSpPr>
           <p:cNvPr id="8" name="">
             <a:extLst xmlns:a="http://schemas.openxmlformats.org/drawingml/2006/main">
               <a:ext uri="{FF2B5EF4-FFF2-40B4-BE49-F238E27FC236}">
-                <a16:creationId xmlns:a16="http://schemas.microsoft.com/office/drawing/2014/main" id="{4F334D97-2032-4929-9E78-4F76C515A10A}"/>
-              </a:ext>
-            </a:extLst>
-          </p:cNvPr>
-          <p:cNvSpPr>
-            <a:spLocks xmlns:a="http://schemas.openxmlformats.org/drawingml/2006/main" noGrp="1"/>
-          </p:cNvSpPr>
-          <p:nvPr/>
-        </p:nvSpPr>
-        <p:spPr>
-          <a:xfrm xmlns:a="http://schemas.openxmlformats.org/drawingml/2006/main">
-            <a:off x="6400800" y="2714625"/>
-            <a:ext cx="5105400" cy="257175"/>
+                <a16:creationId xmlns:a16="http://schemas.microsoft.com/office/drawing/2014/main" id="{A621CF02-38AA-4310-888F-B9D7EB22E6E0}"/>
+              </a:ext>
+            </a:extLst>
+          </p:cNvPr>
+          <p:cNvSpPr>
+            <a:spLocks xmlns:a="http://schemas.openxmlformats.org/drawingml/2006/main" noGrp="1"/>
+          </p:cNvSpPr>
+          <p:nvPr/>
+        </p:nvSpPr>
+        <p:spPr>
+          <a:xfrm xmlns:a="http://schemas.openxmlformats.org/drawingml/2006/main">
+            <a:off x="685800" y="4838700"/>
+            <a:ext cx="4972050" cy="914400"/>
           </a:xfrm>
           <a:prstGeom xmlns:a="http://schemas.openxmlformats.org/drawingml/2006/main" prst="rect">
             <a:avLst/>
@@ -3023,12 +7489,23 @@
           <a:bodyPr xmlns:a="http://schemas.openxmlformats.org/drawingml/2006/main" wrap="square" lIns="0" tIns="0" rIns="0" bIns="0" anchor="t">
             <a:noAutofit/>
           </a:bodyPr>
-          <a:lstStyle xmlns:a="http://schemas.openxmlformats.org/drawingml/2006/main"/>
+          <a:lstStyle xmlns:a="http://schemas.openxmlformats.org/drawingml/2006/main">
+            <a:defPPr>
+              <a:defRPr sz="1800" b="0">
+                <a:solidFill>
+                  <a:srgbClr val="6B7265"/>
+                </a:solidFill>
+                <a:latin typeface="Pretendard"/>
+                <a:ea typeface="Pretendard"/>
+                <a:cs typeface="Pretendard"/>
+              </a:defRPr>
+            </a:defPPr>
+          </a:lstStyle>
           <a:p xmlns:a="http://schemas.openxmlformats.org/drawingml/2006/main">
             <a:pPr>
-              <a:defRPr sz="1125" b="0">
-                <a:solidFill>
-                  <a:srgbClr val="9B7744"/>
+              <a:defRPr sz="1800" b="0">
+                <a:solidFill>
+                  <a:srgbClr val="6B7265"/>
                 </a:solidFill>
                 <a:latin typeface="Pretendard"/>
                 <a:ea typeface="Pretendard"/>
@@ -3036,15 +7513,15 @@
               </a:defRPr>
             </a:pPr>
             <a:r>
-              <a:rPr sz="1125" b="0">
-                <a:solidFill>
-                  <a:srgbClr val="9B7744"/>
+              <a:rPr sz="1800" b="0">
+                <a:solidFill>
+                  <a:srgbClr val="6B7265"/>
                 </a:solidFill>
                 <a:latin typeface="Pretendard"/>
                 <a:ea typeface="Pretendard"/>
                 <a:cs typeface="Pretendard"/>
               </a:rPr>
-              <a:t>02</a:t>
+              <a:t>Micronized acellular dermal matrix</a:t>
             </a:r>
           </a:p>
         </p:txBody>
@@ -3054,19 +7531,77 @@
           <p:cNvPr id="9" name="">
             <a:extLst xmlns:a="http://schemas.openxmlformats.org/drawingml/2006/main">
               <a:ext uri="{FF2B5EF4-FFF2-40B4-BE49-F238E27FC236}">
-                <a16:creationId xmlns:a16="http://schemas.microsoft.com/office/drawing/2014/main" id="{B2147846-0D5C-4C85-8160-97AA63A26158}"/>
-              </a:ext>
-            </a:extLst>
-          </p:cNvPr>
-          <p:cNvSpPr>
-            <a:spLocks xmlns:a="http://schemas.openxmlformats.org/drawingml/2006/main" noGrp="1"/>
-          </p:cNvSpPr>
-          <p:nvPr/>
-        </p:nvSpPr>
-        <p:spPr>
-          <a:xfrm xmlns:a="http://schemas.openxmlformats.org/drawingml/2006/main">
-            <a:off x="6400800" y="3257550"/>
-            <a:ext cx="5105400" cy="952500"/>
+                <a16:creationId xmlns:a16="http://schemas.microsoft.com/office/drawing/2014/main" id="{3C14D2DB-679B-40C1-A5D5-27335BB4C1CB}"/>
+              </a:ext>
+            </a:extLst>
+          </p:cNvPr>
+          <p:cNvSpPr>
+            <a:spLocks xmlns:a="http://schemas.openxmlformats.org/drawingml/2006/main" noGrp="1"/>
+          </p:cNvSpPr>
+          <p:nvPr/>
+        </p:nvSpPr>
+        <p:spPr>
+          <a:xfrm xmlns:a="http://schemas.openxmlformats.org/drawingml/2006/main">
+            <a:off x="6248400" y="2333625"/>
+            <a:ext cx="5257800" cy="3209925"/>
+          </a:xfrm>
+          <a:prstGeom xmlns:a="http://schemas.openxmlformats.org/drawingml/2006/main" prst="rect">
+            <a:avLst/>
+          </a:prstGeom>
+          <a:solidFill xmlns:a="http://schemas.openxmlformats.org/drawingml/2006/main">
+            <a:srgbClr val="F4F3EE"/>
+          </a:solidFill>
+          <a:ln xmlns:a="http://schemas.openxmlformats.org/drawingml/2006/main" w="0">
+            <a:noFill/>
+          </a:ln>
+        </p:spPr>
+      </p:sp>
+      <p:pic>
+        <p:nvPicPr>
+          <p:cNvPr id="10" name="">
+            <a:extLst xmlns:a="http://schemas.openxmlformats.org/drawingml/2006/main">
+              <a:ext uri="{FF2B5EF4-FFF2-40B4-BE49-F238E27FC236}">
+                <a16:creationId xmlns:a16="http://schemas.microsoft.com/office/drawing/2014/main" id="{79244196-60DA-4526-9BFA-93CA6E5B5436}"/>
+              </a:ext>
+            </a:extLst>
+          </p:cNvPr>
+          <p:cNvPicPr>
+            <a:picLocks xmlns:a="http://schemas.openxmlformats.org/drawingml/2006/main" noChangeAspect="1"/>
+          </p:cNvPicPr>
+          <p:nvPr/>
+        </p:nvPicPr>
+        <p:blipFill>
+          <a:blip xmlns:r="http://schemas.openxmlformats.org/officeDocument/2006/relationships" xmlns:a="http://schemas.openxmlformats.org/drawingml/2006/main" r:embed="R02ba854ae7b54be1"/>
+          <a:stretch xmlns:a="http://schemas.openxmlformats.org/drawingml/2006/main"/>
+        </p:blipFill>
+        <p:spPr>
+          <a:xfrm xmlns:a="http://schemas.openxmlformats.org/drawingml/2006/main">
+            <a:off x="6343650" y="2507820"/>
+            <a:ext cx="5067300" cy="2861534"/>
+          </a:xfrm>
+          <a:prstGeom xmlns:a="http://schemas.openxmlformats.org/drawingml/2006/main" prst="rect">
+            <a:avLst/>
+          </a:prstGeom>
+        </p:spPr>
+      </p:pic>
+      <p:sp>
+        <p:nvSpPr>
+          <p:cNvPr id="11" name="">
+            <a:extLst xmlns:a="http://schemas.openxmlformats.org/drawingml/2006/main">
+              <a:ext uri="{FF2B5EF4-FFF2-40B4-BE49-F238E27FC236}">
+                <a16:creationId xmlns:a16="http://schemas.microsoft.com/office/drawing/2014/main" id="{E7C19899-8E58-4432-BABD-1C1B5E934E85}"/>
+              </a:ext>
+            </a:extLst>
+          </p:cNvPr>
+          <p:cNvSpPr>
+            <a:spLocks xmlns:a="http://schemas.openxmlformats.org/drawingml/2006/main" noGrp="1"/>
+          </p:cNvSpPr>
+          <p:nvPr/>
+        </p:nvSpPr>
+        <p:spPr>
+          <a:xfrm xmlns:a="http://schemas.openxmlformats.org/drawingml/2006/main">
+            <a:off x="685800" y="6019800"/>
+            <a:ext cx="10287000" cy="266700"/>
           </a:xfrm>
           <a:prstGeom xmlns:a="http://schemas.openxmlformats.org/drawingml/2006/main" prst="rect">
             <a:avLst/>
@@ -3080,12 +7615,23 @@
           <a:bodyPr xmlns:a="http://schemas.openxmlformats.org/drawingml/2006/main" wrap="square" lIns="0" tIns="0" rIns="0" bIns="0" anchor="t">
             <a:noAutofit/>
           </a:bodyPr>
-          <a:lstStyle xmlns:a="http://schemas.openxmlformats.org/drawingml/2006/main"/>
+          <a:lstStyle xmlns:a="http://schemas.openxmlformats.org/drawingml/2006/main">
+            <a:defPPr>
+              <a:defRPr sz="1050" b="0">
+                <a:solidFill>
+                  <a:srgbClr val="6B7265"/>
+                </a:solidFill>
+                <a:latin typeface="Pretendard"/>
+                <a:ea typeface="Pretendard"/>
+                <a:cs typeface="Pretendard"/>
+              </a:defRPr>
+            </a:defPPr>
+          </a:lstStyle>
           <a:p xmlns:a="http://schemas.openxmlformats.org/drawingml/2006/main">
             <a:pPr>
-              <a:defRPr sz="2700" b="1">
-                <a:solidFill>
-                  <a:srgbClr val="1B1D19"/>
+              <a:defRPr sz="1050" b="0">
+                <a:solidFill>
+                  <a:srgbClr val="6B7265"/>
                 </a:solidFill>
                 <a:latin typeface="Pretendard"/>
                 <a:ea typeface="Pretendard"/>
@@ -3093,37 +7639,37 @@
               </a:defRPr>
             </a:pPr>
             <a:r>
-              <a:rPr sz="2700" b="1">
-                <a:solidFill>
-                  <a:srgbClr val="1B1D19"/>
+              <a:rPr sz="1050" b="0">
+                <a:solidFill>
+                  <a:srgbClr val="6B7265"/>
                 </a:solidFill>
                 <a:latin typeface="Pretendard"/>
                 <a:ea typeface="Pretendard"/>
                 <a:cs typeface="Pretendard"/>
               </a:rPr>
-              <a:t>Draping</a:t>
-            </a:r>
-          </a:p>
-        </p:txBody>
-      </p:sp>
-      <p:sp>
-        <p:nvSpPr>
-          <p:cNvPr id="10" name="">
-            <a:extLst xmlns:a="http://schemas.openxmlformats.org/drawingml/2006/main">
-              <a:ext uri="{FF2B5EF4-FFF2-40B4-BE49-F238E27FC236}">
-                <a16:creationId xmlns:a16="http://schemas.microsoft.com/office/drawing/2014/main" id="{24D6D981-C510-4E0C-93F5-C92832B48D6D}"/>
-              </a:ext>
-            </a:extLst>
-          </p:cNvPr>
-          <p:cNvSpPr>
-            <a:spLocks xmlns:a="http://schemas.openxmlformats.org/drawingml/2006/main" noGrp="1"/>
-          </p:cNvSpPr>
-          <p:nvPr/>
-        </p:nvSpPr>
-        <p:spPr>
-          <a:xfrm xmlns:a="http://schemas.openxmlformats.org/drawingml/2006/main">
-            <a:off x="6400800" y="4400550"/>
-            <a:ext cx="5105400" cy="1295400"/>
+              <a:t>MegaDerm stock at HIGHST: 3–5 mm / 5 × 6, 5 × 8, 5 × 10, 6 × 12 cm</a:t>
+            </a:r>
+          </a:p>
+        </p:txBody>
+      </p:sp>
+      <p:sp>
+        <p:nvSpPr>
+          <p:cNvPr id="12" name="">
+            <a:extLst xmlns:a="http://schemas.openxmlformats.org/drawingml/2006/main">
+              <a:ext uri="{FF2B5EF4-FFF2-40B4-BE49-F238E27FC236}">
+                <a16:creationId xmlns:a16="http://schemas.microsoft.com/office/drawing/2014/main" id="{54FF2910-0FA8-4EDD-97D9-104BDB16A4D6}"/>
+              </a:ext>
+            </a:extLst>
+          </p:cNvPr>
+          <p:cNvSpPr>
+            <a:spLocks xmlns:a="http://schemas.openxmlformats.org/drawingml/2006/main" noGrp="1"/>
+          </p:cNvSpPr>
+          <p:nvPr/>
+        </p:nvSpPr>
+        <p:spPr>
+          <a:xfrm xmlns:a="http://schemas.openxmlformats.org/drawingml/2006/main">
+            <a:off x="685800" y="6448425"/>
+            <a:ext cx="10191750" cy="228600"/>
           </a:xfrm>
           <a:prstGeom xmlns:a="http://schemas.openxmlformats.org/drawingml/2006/main" prst="rect">
             <a:avLst/>
@@ -3137,32 +7683,61 @@
           <a:bodyPr xmlns:a="http://schemas.openxmlformats.org/drawingml/2006/main" wrap="square" lIns="0" tIns="0" rIns="0" bIns="0" anchor="t">
             <a:noAutofit/>
           </a:bodyPr>
-          <a:lstStyle xmlns:a="http://schemas.openxmlformats.org/drawingml/2006/main"/>
-          <a:p xmlns:a="http://schemas.openxmlformats.org/drawingml/2006/main">
-            <a:r>
-              <a:t/>
-            </a:r>
-          </a:p>
-        </p:txBody>
-      </p:sp>
-      <p:sp>
-        <p:nvSpPr>
-          <p:cNvPr id="11" name="">
-            <a:extLst xmlns:a="http://schemas.openxmlformats.org/drawingml/2006/main">
-              <a:ext uri="{FF2B5EF4-FFF2-40B4-BE49-F238E27FC236}">
-                <a16:creationId xmlns:a16="http://schemas.microsoft.com/office/drawing/2014/main" id="{D1501083-5044-458C-97E4-481654202E62}"/>
-              </a:ext>
-            </a:extLst>
-          </p:cNvPr>
-          <p:cNvSpPr>
-            <a:spLocks xmlns:a="http://schemas.openxmlformats.org/drawingml/2006/main" noGrp="1"/>
-          </p:cNvSpPr>
-          <p:nvPr/>
-        </p:nvSpPr>
-        <p:spPr>
-          <a:xfrm xmlns:a="http://schemas.openxmlformats.org/drawingml/2006/main">
-            <a:off x="685800" y="6448425"/>
-            <a:ext cx="10191750" cy="228600"/>
+          <a:lstStyle xmlns:a="http://schemas.openxmlformats.org/drawingml/2006/main">
+            <a:defPPr>
+              <a:defRPr sz="975" b="0">
+                <a:solidFill>
+                  <a:srgbClr val="858B7E"/>
+                </a:solidFill>
+                <a:latin typeface="Pretendard"/>
+                <a:ea typeface="Pretendard"/>
+                <a:cs typeface="Pretendard"/>
+              </a:defRPr>
+            </a:defPPr>
+          </a:lstStyle>
+          <a:p xmlns:a="http://schemas.openxmlformats.org/drawingml/2006/main">
+            <a:pPr>
+              <a:defRPr sz="975" b="0">
+                <a:solidFill>
+                  <a:srgbClr val="858B7E"/>
+                </a:solidFill>
+                <a:latin typeface="Pretendard"/>
+                <a:ea typeface="Pretendard"/>
+                <a:cs typeface="Pretendard"/>
+              </a:defRPr>
+            </a:pPr>
+            <a:r>
+              <a:rPr sz="975" b="0">
+                <a:solidFill>
+                  <a:srgbClr val="858B7E"/>
+                </a:solidFill>
+                <a:latin typeface="Pretendard"/>
+                <a:ea typeface="Pretendard"/>
+                <a:cs typeface="Pretendard"/>
+              </a:rPr>
+              <a:t>Jinmo Koo · HIGHST Urology</a:t>
+            </a:r>
+          </a:p>
+        </p:txBody>
+      </p:sp>
+      <p:sp>
+        <p:nvSpPr>
+          <p:cNvPr id="13" name="">
+            <a:extLst xmlns:a="http://schemas.openxmlformats.org/drawingml/2006/main">
+              <a:ext uri="{FF2B5EF4-FFF2-40B4-BE49-F238E27FC236}">
+                <a16:creationId xmlns:a16="http://schemas.microsoft.com/office/drawing/2014/main" id="{5D427DF1-2DCA-434A-85C1-4572AC051BC7}"/>
+              </a:ext>
+            </a:extLst>
+          </p:cNvPr>
+          <p:cNvSpPr>
+            <a:spLocks xmlns:a="http://schemas.openxmlformats.org/drawingml/2006/main" noGrp="1"/>
+          </p:cNvSpPr>
+          <p:nvPr/>
+        </p:nvSpPr>
+        <p:spPr>
+          <a:xfrm xmlns:a="http://schemas.openxmlformats.org/drawingml/2006/main">
+            <a:off x="11134725" y="6448425"/>
+            <a:ext cx="371475" cy="228600"/>
           </a:xfrm>
           <a:prstGeom xmlns:a="http://schemas.openxmlformats.org/drawingml/2006/main" prst="rect">
             <a:avLst/>
@@ -3176,9 +7751,8 @@
           <a:bodyPr xmlns:a="http://schemas.openxmlformats.org/drawingml/2006/main" wrap="square" lIns="0" tIns="0" rIns="0" bIns="0" anchor="t">
             <a:noAutofit/>
           </a:bodyPr>
-          <a:lstStyle xmlns:a="http://schemas.openxmlformats.org/drawingml/2006/main"/>
-          <a:p xmlns:a="http://schemas.openxmlformats.org/drawingml/2006/main">
-            <a:pPr>
+          <a:lstStyle xmlns:a="http://schemas.openxmlformats.org/drawingml/2006/main">
+            <a:defPPr>
               <a:defRPr sz="975" b="0">
                 <a:solidFill>
                   <a:srgbClr val="858B7E"/>
@@ -3187,53 +7761,8 @@
                 <a:ea typeface="Pretendard"/>
                 <a:cs typeface="Pretendard"/>
               </a:defRPr>
-            </a:pPr>
-            <a:r>
-              <a:rPr sz="975" b="0">
-                <a:solidFill>
-                  <a:srgbClr val="858B7E"/>
-                </a:solidFill>
-                <a:latin typeface="Pretendard"/>
-                <a:ea typeface="Pretendard"/>
-                <a:cs typeface="Pretendard"/>
-              </a:rPr>
-              <a:t>Jinmo Koo · HIGHST Urology</a:t>
-            </a:r>
-          </a:p>
-        </p:txBody>
-      </p:sp>
-      <p:sp>
-        <p:nvSpPr>
-          <p:cNvPr id="12" name="">
-            <a:extLst xmlns:a="http://schemas.openxmlformats.org/drawingml/2006/main">
-              <a:ext uri="{FF2B5EF4-FFF2-40B4-BE49-F238E27FC236}">
-                <a16:creationId xmlns:a16="http://schemas.microsoft.com/office/drawing/2014/main" id="{136C96CD-C978-42DD-9F11-1FE627ABDE6F}"/>
-              </a:ext>
-            </a:extLst>
-          </p:cNvPr>
-          <p:cNvSpPr>
-            <a:spLocks xmlns:a="http://schemas.openxmlformats.org/drawingml/2006/main" noGrp="1"/>
-          </p:cNvSpPr>
-          <p:nvPr/>
-        </p:nvSpPr>
-        <p:spPr>
-          <a:xfrm xmlns:a="http://schemas.openxmlformats.org/drawingml/2006/main">
-            <a:off x="11134725" y="6448425"/>
-            <a:ext cx="371475" cy="228600"/>
-          </a:xfrm>
-          <a:prstGeom xmlns:a="http://schemas.openxmlformats.org/drawingml/2006/main" prst="rect">
-            <a:avLst/>
-          </a:prstGeom>
-          <a:noFill xmlns:a="http://schemas.openxmlformats.org/drawingml/2006/main"/>
-          <a:ln xmlns:a="http://schemas.openxmlformats.org/drawingml/2006/main" w="0">
-            <a:noFill/>
-          </a:ln>
-        </p:spPr>
-        <p:txBody>
-          <a:bodyPr xmlns:a="http://schemas.openxmlformats.org/drawingml/2006/main" wrap="square" lIns="0" tIns="0" rIns="0" bIns="0" anchor="t">
-            <a:noAutofit/>
-          </a:bodyPr>
-          <a:lstStyle xmlns:a="http://schemas.openxmlformats.org/drawingml/2006/main"/>
+            </a:defPPr>
+          </a:lstStyle>
           <a:p xmlns:a="http://schemas.openxmlformats.org/drawingml/2006/main">
             <a:pPr>
               <a:defRPr sz="975" b="0">
@@ -3262,7 +7791,7 @@
     </p:spTree>
     <p:extLst>
       <p:ext uri="{BB962C8B-B14F-4D97-AF65-F5344CB8AC3E}">
-        <p14:creationId xmlns:p14="http://schemas.microsoft.com/office/powerpoint/2010/main" val="566938131"/>
+        <p14:creationId xmlns:p14="http://schemas.microsoft.com/office/powerpoint/2010/main" val="166693471"/>
       </p:ext>
     </p:extLst>
   </p:cSld>
@@ -3290,10 +7819,10 @@
       </p:grpSpPr>
       <p:sp>
         <p:nvSpPr>
-          <p:cNvPr id="8" name="">
-            <a:extLst xmlns:a="http://schemas.openxmlformats.org/drawingml/2006/main">
-              <a:ext uri="{FF2B5EF4-FFF2-40B4-BE49-F238E27FC236}">
-                <a16:creationId xmlns:a16="http://schemas.microsoft.com/office/drawing/2014/main" id="{4CD52C42-05A4-4A75-A1F2-7D983C7BA524}"/>
+          <p:cNvPr id="11" name="">
+            <a:extLst xmlns:a="http://schemas.openxmlformats.org/drawingml/2006/main">
+              <a:ext uri="{FF2B5EF4-FFF2-40B4-BE49-F238E27FC236}">
+                <a16:creationId xmlns:a16="http://schemas.microsoft.com/office/drawing/2014/main" id="{CEE8034F-4844-4DB1-954A-DE9488427816}"/>
               </a:ext>
             </a:extLst>
           </p:cNvPr>
@@ -3319,7 +7848,18 @@
           <a:bodyPr xmlns:a="http://schemas.openxmlformats.org/drawingml/2006/main" wrap="square" lIns="0" tIns="0" rIns="0" bIns="0" anchor="t">
             <a:noAutofit/>
           </a:bodyPr>
-          <a:lstStyle xmlns:a="http://schemas.openxmlformats.org/drawingml/2006/main"/>
+          <a:lstStyle xmlns:a="http://schemas.openxmlformats.org/drawingml/2006/main">
+            <a:defPPr>
+              <a:defRPr sz="1050" b="1">
+                <a:solidFill>
+                  <a:srgbClr val="9B7744"/>
+                </a:solidFill>
+                <a:latin typeface="Pretendard"/>
+                <a:ea typeface="Pretendard"/>
+                <a:cs typeface="Pretendard"/>
+              </a:defRPr>
+            </a:defPPr>
+          </a:lstStyle>
           <a:p xmlns:a="http://schemas.openxmlformats.org/drawingml/2006/main">
             <a:pPr>
               <a:defRPr sz="1050" b="1">
@@ -3340,7 +7880,7 @@
                 <a:ea typeface="Pretendard"/>
                 <a:cs typeface="Pretendard"/>
               </a:rPr>
-              <a:t>OPERATIVE VIDEOS</a:t>
+              <a:t>EVALUATION</a:t>
             </a:r>
           </a:p>
         </p:txBody>
@@ -3350,7 +7890,7 @@
           <p:cNvPr id="2" name="">
             <a:extLst xmlns:a="http://schemas.openxmlformats.org/drawingml/2006/main">
               <a:ext uri="{FF2B5EF4-FFF2-40B4-BE49-F238E27FC236}">
-                <a16:creationId xmlns:a16="http://schemas.microsoft.com/office/drawing/2014/main" id="{5DB7BF32-9B8E-43DB-A33C-504514FE5B05}"/>
+                <a16:creationId xmlns:a16="http://schemas.microsoft.com/office/drawing/2014/main" id="{23933B68-ADF3-47FB-B68C-055DB0C63C06}"/>
               </a:ext>
             </a:extLst>
           </p:cNvPr>
@@ -3376,7 +7916,18 @@
           <a:bodyPr xmlns:a="http://schemas.openxmlformats.org/drawingml/2006/main" wrap="square" lIns="0" tIns="0" rIns="0" bIns="0" anchor="t">
             <a:noAutofit/>
           </a:bodyPr>
-          <a:lstStyle xmlns:a="http://schemas.openxmlformats.org/drawingml/2006/main"/>
+          <a:lstStyle xmlns:a="http://schemas.openxmlformats.org/drawingml/2006/main">
+            <a:defPPr>
+              <a:defRPr sz="3450" b="1">
+                <a:solidFill>
+                  <a:srgbClr val="1B1D19"/>
+                </a:solidFill>
+                <a:latin typeface="Pretendard"/>
+                <a:ea typeface="Pretendard"/>
+                <a:cs typeface="Pretendard"/>
+              </a:defRPr>
+            </a:defPPr>
+          </a:lstStyle>
           <a:p xmlns:a="http://schemas.openxmlformats.org/drawingml/2006/main">
             <a:pPr>
               <a:defRPr sz="3450" b="1">
@@ -3397,7 +7948,7 @@
                 <a:ea typeface="Pretendard"/>
                 <a:cs typeface="Pretendard"/>
               </a:rPr>
-              <a:t>Circumcision-line Incision</a:t>
+              <a:t>Preoperative Evaluation</a:t>
             </a:r>
           </a:p>
         </p:txBody>
@@ -3407,19 +7958,49 @@
           <p:cNvPr id="3" name="">
             <a:extLst xmlns:a="http://schemas.openxmlformats.org/drawingml/2006/main">
               <a:ext uri="{FF2B5EF4-FFF2-40B4-BE49-F238E27FC236}">
-                <a16:creationId xmlns:a16="http://schemas.microsoft.com/office/drawing/2014/main" id="{735FAC7B-5C49-4173-B195-2807AB8C71C7}"/>
-              </a:ext>
-            </a:extLst>
-          </p:cNvPr>
-          <p:cNvSpPr>
-            <a:spLocks xmlns:a="http://schemas.openxmlformats.org/drawingml/2006/main" noGrp="1"/>
-          </p:cNvSpPr>
-          <p:nvPr/>
-        </p:nvSpPr>
-        <p:spPr>
-          <a:xfrm xmlns:a="http://schemas.openxmlformats.org/drawingml/2006/main">
-            <a:off x="685800" y="2819400"/>
-            <a:ext cx="9048750" cy="333375"/>
+                <a16:creationId xmlns:a16="http://schemas.microsoft.com/office/drawing/2014/main" id="{1FDB2E83-E5CC-4256-B617-593EFA117E55}"/>
+              </a:ext>
+            </a:extLst>
+          </p:cNvPr>
+          <p:cNvSpPr>
+            <a:spLocks xmlns:a="http://schemas.openxmlformats.org/drawingml/2006/main" noGrp="1"/>
+          </p:cNvSpPr>
+          <p:nvPr/>
+        </p:nvSpPr>
+        <p:spPr>
+          <a:xfrm xmlns:a="http://schemas.openxmlformats.org/drawingml/2006/main">
+            <a:off x="685800" y="2457450"/>
+            <a:ext cx="5105400" cy="19050"/>
+          </a:xfrm>
+          <a:prstGeom xmlns:a="http://schemas.openxmlformats.org/drawingml/2006/main" prst="rect">
+            <a:avLst/>
+          </a:prstGeom>
+          <a:solidFill xmlns:a="http://schemas.openxmlformats.org/drawingml/2006/main">
+            <a:srgbClr val="B5915D"/>
+          </a:solidFill>
+          <a:ln xmlns:a="http://schemas.openxmlformats.org/drawingml/2006/main" w="0">
+            <a:noFill/>
+          </a:ln>
+        </p:spPr>
+      </p:sp>
+      <p:sp>
+        <p:nvSpPr>
+          <p:cNvPr id="4" name="">
+            <a:extLst xmlns:a="http://schemas.openxmlformats.org/drawingml/2006/main">
+              <a:ext uri="{FF2B5EF4-FFF2-40B4-BE49-F238E27FC236}">
+                <a16:creationId xmlns:a16="http://schemas.microsoft.com/office/drawing/2014/main" id="{BC3F2C1A-B114-4A51-A606-3A79B6D7BED8}"/>
+              </a:ext>
+            </a:extLst>
+          </p:cNvPr>
+          <p:cNvSpPr>
+            <a:spLocks xmlns:a="http://schemas.openxmlformats.org/drawingml/2006/main" noGrp="1"/>
+          </p:cNvSpPr>
+          <p:nvPr/>
+        </p:nvSpPr>
+        <p:spPr>
+          <a:xfrm xmlns:a="http://schemas.openxmlformats.org/drawingml/2006/main">
+            <a:off x="685800" y="2781300"/>
+            <a:ext cx="5105400" cy="590550"/>
           </a:xfrm>
           <a:prstGeom xmlns:a="http://schemas.openxmlformats.org/drawingml/2006/main" prst="rect">
             <a:avLst/>
@@ -3433,12 +8014,23 @@
           <a:bodyPr xmlns:a="http://schemas.openxmlformats.org/drawingml/2006/main" wrap="square" lIns="0" tIns="0" rIns="0" bIns="0" anchor="t">
             <a:noAutofit/>
           </a:bodyPr>
-          <a:lstStyle xmlns:a="http://schemas.openxmlformats.org/drawingml/2006/main"/>
+          <a:lstStyle xmlns:a="http://schemas.openxmlformats.org/drawingml/2006/main">
+            <a:defPPr>
+              <a:defRPr sz="2325" b="1">
+                <a:solidFill>
+                  <a:srgbClr val="1B1D19"/>
+                </a:solidFill>
+                <a:latin typeface="Pretendard"/>
+                <a:ea typeface="Pretendard"/>
+                <a:cs typeface="Pretendard"/>
+              </a:defRPr>
+            </a:defPPr>
+          </a:lstStyle>
           <a:p xmlns:a="http://schemas.openxmlformats.org/drawingml/2006/main">
             <a:pPr>
-              <a:defRPr sz="1350" b="1">
-                <a:solidFill>
-                  <a:srgbClr val="9B7744"/>
+              <a:defRPr sz="2325" b="1">
+                <a:solidFill>
+                  <a:srgbClr val="1B1D19"/>
                 </a:solidFill>
                 <a:latin typeface="Pretendard"/>
                 <a:ea typeface="Pretendard"/>
@@ -3446,37 +8038,37 @@
               </a:defRPr>
             </a:pPr>
             <a:r>
-              <a:rPr sz="1350" b="1">
-                <a:solidFill>
-                  <a:srgbClr val="9B7744"/>
+              <a:rPr sz="2325" b="1">
+                <a:solidFill>
+                  <a:srgbClr val="1B1D19"/>
                 </a:solidFill>
                 <a:latin typeface="Pretendard"/>
                 <a:ea typeface="Pretendard"/>
                 <a:cs typeface="Pretendard"/>
               </a:rPr>
-              <a:t>OPERATIVE VIDEO 01</a:t>
-            </a:r>
-          </a:p>
-        </p:txBody>
-      </p:sp>
-      <p:sp>
-        <p:nvSpPr>
-          <p:cNvPr id="4" name="">
-            <a:extLst xmlns:a="http://schemas.openxmlformats.org/drawingml/2006/main">
-              <a:ext uri="{FF2B5EF4-FFF2-40B4-BE49-F238E27FC236}">
-                <a16:creationId xmlns:a16="http://schemas.microsoft.com/office/drawing/2014/main" id="{7B6AFE1E-82D7-411A-94AE-F5EE6653C049}"/>
-              </a:ext>
-            </a:extLst>
-          </p:cNvPr>
-          <p:cNvSpPr>
-            <a:spLocks xmlns:a="http://schemas.openxmlformats.org/drawingml/2006/main" noGrp="1"/>
-          </p:cNvSpPr>
-          <p:nvPr/>
-        </p:nvSpPr>
-        <p:spPr>
-          <a:xfrm xmlns:a="http://schemas.openxmlformats.org/drawingml/2006/main">
-            <a:off x="685800" y="3371850"/>
-            <a:ext cx="2000250" cy="1571625"/>
+              <a:t>Blood and urine testing</a:t>
+            </a:r>
+          </a:p>
+        </p:txBody>
+      </p:sp>
+      <p:sp>
+        <p:nvSpPr>
+          <p:cNvPr id="5" name="">
+            <a:extLst xmlns:a="http://schemas.openxmlformats.org/drawingml/2006/main">
+              <a:ext uri="{FF2B5EF4-FFF2-40B4-BE49-F238E27FC236}">
+                <a16:creationId xmlns:a16="http://schemas.microsoft.com/office/drawing/2014/main" id="{177BF92D-0C4C-404F-9BBE-7C0D52668515}"/>
+              </a:ext>
+            </a:extLst>
+          </p:cNvPr>
+          <p:cNvSpPr>
+            <a:spLocks xmlns:a="http://schemas.openxmlformats.org/drawingml/2006/main" noGrp="1"/>
+          </p:cNvSpPr>
+          <p:nvPr/>
+        </p:nvSpPr>
+        <p:spPr>
+          <a:xfrm xmlns:a="http://schemas.openxmlformats.org/drawingml/2006/main">
+            <a:off x="685800" y="3581400"/>
+            <a:ext cx="5105400" cy="2095500"/>
           </a:xfrm>
           <a:prstGeom xmlns:a="http://schemas.openxmlformats.org/drawingml/2006/main" prst="rect">
             <a:avLst/>
@@ -3490,12 +8082,23 @@
           <a:bodyPr xmlns:a="http://schemas.openxmlformats.org/drawingml/2006/main" wrap="square" lIns="0" tIns="0" rIns="0" bIns="0" anchor="t">
             <a:noAutofit/>
           </a:bodyPr>
-          <a:lstStyle xmlns:a="http://schemas.openxmlformats.org/drawingml/2006/main"/>
+          <a:lstStyle xmlns:a="http://schemas.openxmlformats.org/drawingml/2006/main">
+            <a:defPPr>
+              <a:defRPr sz="2025" b="0">
+                <a:solidFill>
+                  <a:srgbClr val="6B7265"/>
+                </a:solidFill>
+                <a:latin typeface="Pretendard"/>
+                <a:ea typeface="Pretendard"/>
+                <a:cs typeface="Pretendard"/>
+              </a:defRPr>
+            </a:defPPr>
+          </a:lstStyle>
           <a:p xmlns:a="http://schemas.openxmlformats.org/drawingml/2006/main">
             <a:pPr>
-              <a:defRPr sz="9750" b="0">
-                <a:solidFill>
-                  <a:srgbClr val="1B1D19"/>
+              <a:defRPr sz="2025" b="0">
+                <a:solidFill>
+                  <a:srgbClr val="6B7265"/>
                 </a:solidFill>
                 <a:latin typeface="Pretendard"/>
                 <a:ea typeface="Pretendard"/>
@@ -3503,37 +8106,136 @@
               </a:defRPr>
             </a:pPr>
             <a:r>
-              <a:rPr sz="9750" b="0">
-                <a:solidFill>
-                  <a:srgbClr val="1B1D19"/>
+              <a:rPr sz="2025" b="0">
+                <a:solidFill>
+                  <a:srgbClr val="6B7265"/>
                 </a:solidFill>
                 <a:latin typeface="Pretendard"/>
                 <a:ea typeface="Pretendard"/>
                 <a:cs typeface="Pretendard"/>
               </a:rPr>
-              <a:t>10</a:t>
-            </a:r>
-          </a:p>
-        </p:txBody>
-      </p:sp>
-      <p:sp>
-        <p:nvSpPr>
-          <p:cNvPr id="5" name="">
-            <a:extLst xmlns:a="http://schemas.openxmlformats.org/drawingml/2006/main">
-              <a:ext uri="{FF2B5EF4-FFF2-40B4-BE49-F238E27FC236}">
-                <a16:creationId xmlns:a16="http://schemas.microsoft.com/office/drawing/2014/main" id="{5D2C0820-4B5F-446B-B463-32402EAF2797}"/>
-              </a:ext>
-            </a:extLst>
-          </p:cNvPr>
-          <p:cNvSpPr>
-            <a:spLocks xmlns:a="http://schemas.openxmlformats.org/drawingml/2006/main" noGrp="1"/>
-          </p:cNvSpPr>
-          <p:nvPr/>
-        </p:nvSpPr>
-        <p:spPr>
-          <a:xfrm xmlns:a="http://schemas.openxmlformats.org/drawingml/2006/main">
-            <a:off x="2562225" y="4210050"/>
-            <a:ext cx="3048000" cy="542925"/>
+              <a:t>Liver function</a:t>
+            </a:r>
+          </a:p>
+          <a:p xmlns:a="http://schemas.openxmlformats.org/drawingml/2006/main">
+            <a:pPr>
+              <a:defRPr sz="2025" b="0">
+                <a:solidFill>
+                  <a:srgbClr val="6B7265"/>
+                </a:solidFill>
+                <a:latin typeface="Pretendard"/>
+                <a:ea typeface="Pretendard"/>
+                <a:cs typeface="Pretendard"/>
+              </a:defRPr>
+            </a:pPr>
+            <a:r>
+              <a:rPr sz="2025" b="0">
+                <a:solidFill>
+                  <a:srgbClr val="6B7265"/>
+                </a:solidFill>
+                <a:latin typeface="Pretendard"/>
+                <a:ea typeface="Pretendard"/>
+                <a:cs typeface="Pretendard"/>
+              </a:rPr>
+              <a:t>Blood glucose</a:t>
+            </a:r>
+          </a:p>
+          <a:p xmlns:a="http://schemas.openxmlformats.org/drawingml/2006/main">
+            <a:pPr>
+              <a:defRPr sz="2025" b="0">
+                <a:solidFill>
+                  <a:srgbClr val="6B7265"/>
+                </a:solidFill>
+                <a:latin typeface="Pretendard"/>
+                <a:ea typeface="Pretendard"/>
+                <a:cs typeface="Pretendard"/>
+              </a:defRPr>
+            </a:pPr>
+            <a:r>
+              <a:rPr sz="2025" b="0">
+                <a:solidFill>
+                  <a:srgbClr val="6B7265"/>
+                </a:solidFill>
+                <a:latin typeface="Pretendard"/>
+                <a:ea typeface="Pretendard"/>
+                <a:cs typeface="Pretendard"/>
+              </a:rPr>
+              <a:t>Inflammatory markers</a:t>
+            </a:r>
+          </a:p>
+          <a:p xmlns:a="http://schemas.openxmlformats.org/drawingml/2006/main">
+            <a:pPr>
+              <a:defRPr sz="2025" b="0">
+                <a:solidFill>
+                  <a:srgbClr val="6B7265"/>
+                </a:solidFill>
+                <a:latin typeface="Pretendard"/>
+                <a:ea typeface="Pretendard"/>
+                <a:cs typeface="Pretendard"/>
+              </a:defRPr>
+            </a:pPr>
+            <a:r>
+              <a:rPr sz="2025" b="0">
+                <a:solidFill>
+                  <a:srgbClr val="6B7265"/>
+                </a:solidFill>
+                <a:latin typeface="Pretendard"/>
+                <a:ea typeface="Pretendard"/>
+                <a:cs typeface="Pretendard"/>
+              </a:rPr>
+              <a:t>STI screening</a:t>
+            </a:r>
+          </a:p>
+        </p:txBody>
+      </p:sp>
+      <p:sp>
+        <p:nvSpPr>
+          <p:cNvPr id="6" name="">
+            <a:extLst xmlns:a="http://schemas.openxmlformats.org/drawingml/2006/main">
+              <a:ext uri="{FF2B5EF4-FFF2-40B4-BE49-F238E27FC236}">
+                <a16:creationId xmlns:a16="http://schemas.microsoft.com/office/drawing/2014/main" id="{CF9DA849-676F-46BD-9963-0B22F3CC0786}"/>
+              </a:ext>
+            </a:extLst>
+          </p:cNvPr>
+          <p:cNvSpPr>
+            <a:spLocks xmlns:a="http://schemas.openxmlformats.org/drawingml/2006/main" noGrp="1"/>
+          </p:cNvSpPr>
+          <p:nvPr/>
+        </p:nvSpPr>
+        <p:spPr>
+          <a:xfrm xmlns:a="http://schemas.openxmlformats.org/drawingml/2006/main">
+            <a:off x="6400800" y="2457450"/>
+            <a:ext cx="5105400" cy="19050"/>
+          </a:xfrm>
+          <a:prstGeom xmlns:a="http://schemas.openxmlformats.org/drawingml/2006/main" prst="rect">
+            <a:avLst/>
+          </a:prstGeom>
+          <a:solidFill xmlns:a="http://schemas.openxmlformats.org/drawingml/2006/main">
+            <a:srgbClr val="B5915D"/>
+          </a:solidFill>
+          <a:ln xmlns:a="http://schemas.openxmlformats.org/drawingml/2006/main" w="0">
+            <a:noFill/>
+          </a:ln>
+        </p:spPr>
+      </p:sp>
+      <p:sp>
+        <p:nvSpPr>
+          <p:cNvPr id="7" name="">
+            <a:extLst xmlns:a="http://schemas.openxmlformats.org/drawingml/2006/main">
+              <a:ext uri="{FF2B5EF4-FFF2-40B4-BE49-F238E27FC236}">
+                <a16:creationId xmlns:a16="http://schemas.microsoft.com/office/drawing/2014/main" id="{6C8D8D65-3D9B-44D2-ADFF-EE2FCBC30F7A}"/>
+              </a:ext>
+            </a:extLst>
+          </p:cNvPr>
+          <p:cNvSpPr>
+            <a:spLocks xmlns:a="http://schemas.openxmlformats.org/drawingml/2006/main" noGrp="1"/>
+          </p:cNvSpPr>
+          <p:nvPr/>
+        </p:nvSpPr>
+        <p:spPr>
+          <a:xfrm xmlns:a="http://schemas.openxmlformats.org/drawingml/2006/main">
+            <a:off x="6400800" y="2781300"/>
+            <a:ext cx="5105400" cy="590550"/>
           </a:xfrm>
           <a:prstGeom xmlns:a="http://schemas.openxmlformats.org/drawingml/2006/main" prst="rect">
             <a:avLst/>
@@ -3547,12 +8249,23 @@
           <a:bodyPr xmlns:a="http://schemas.openxmlformats.org/drawingml/2006/main" wrap="square" lIns="0" tIns="0" rIns="0" bIns="0" anchor="t">
             <a:noAutofit/>
           </a:bodyPr>
-          <a:lstStyle xmlns:a="http://schemas.openxmlformats.org/drawingml/2006/main"/>
+          <a:lstStyle xmlns:a="http://schemas.openxmlformats.org/drawingml/2006/main">
+            <a:defPPr>
+              <a:defRPr sz="2325" b="1">
+                <a:solidFill>
+                  <a:srgbClr val="1B1D19"/>
+                </a:solidFill>
+                <a:latin typeface="Pretendard"/>
+                <a:ea typeface="Pretendard"/>
+                <a:cs typeface="Pretendard"/>
+              </a:defRPr>
+            </a:defPPr>
+          </a:lstStyle>
           <a:p xmlns:a="http://schemas.openxmlformats.org/drawingml/2006/main">
             <a:pPr>
-              <a:defRPr sz="2400" b="0">
-                <a:solidFill>
-                  <a:srgbClr val="6B7265"/>
+              <a:defRPr sz="2325" b="1">
+                <a:solidFill>
+                  <a:srgbClr val="1B1D19"/>
                 </a:solidFill>
                 <a:latin typeface="Pretendard"/>
                 <a:ea typeface="Pretendard"/>
@@ -3560,37 +8273,37 @@
               </a:defRPr>
             </a:pPr>
             <a:r>
-              <a:rPr sz="2400" b="0">
-                <a:solidFill>
-                  <a:srgbClr val="6B7265"/>
+              <a:rPr sz="2325" b="1">
+                <a:solidFill>
+                  <a:srgbClr val="1B1D19"/>
                 </a:solidFill>
                 <a:latin typeface="Pretendard"/>
                 <a:ea typeface="Pretendard"/>
                 <a:cs typeface="Pretendard"/>
               </a:rPr>
-              <a:t>minutes</a:t>
-            </a:r>
-          </a:p>
-        </p:txBody>
-      </p:sp>
-      <p:sp>
-        <p:nvSpPr>
-          <p:cNvPr id="6" name="">
-            <a:extLst xmlns:a="http://schemas.openxmlformats.org/drawingml/2006/main">
-              <a:ext uri="{FF2B5EF4-FFF2-40B4-BE49-F238E27FC236}">
-                <a16:creationId xmlns:a16="http://schemas.microsoft.com/office/drawing/2014/main" id="{41DA1210-D391-4187-9804-9CF1242A471D}"/>
-              </a:ext>
-            </a:extLst>
-          </p:cNvPr>
-          <p:cNvSpPr>
-            <a:spLocks xmlns:a="http://schemas.openxmlformats.org/drawingml/2006/main" noGrp="1"/>
-          </p:cNvSpPr>
-          <p:nvPr/>
-        </p:nvSpPr>
-        <p:spPr>
-          <a:xfrm xmlns:a="http://schemas.openxmlformats.org/drawingml/2006/main">
-            <a:off x="685800" y="6448425"/>
-            <a:ext cx="10191750" cy="228600"/>
+              <a:t>Penile biothesiometry</a:t>
+            </a:r>
+          </a:p>
+        </p:txBody>
+      </p:sp>
+      <p:sp>
+        <p:nvSpPr>
+          <p:cNvPr id="8" name="">
+            <a:extLst xmlns:a="http://schemas.openxmlformats.org/drawingml/2006/main">
+              <a:ext uri="{FF2B5EF4-FFF2-40B4-BE49-F238E27FC236}">
+                <a16:creationId xmlns:a16="http://schemas.microsoft.com/office/drawing/2014/main" id="{6DA09B24-34C0-4F4E-BB21-A5CE8085E5E4}"/>
+              </a:ext>
+            </a:extLst>
+          </p:cNvPr>
+          <p:cNvSpPr>
+            <a:spLocks xmlns:a="http://schemas.openxmlformats.org/drawingml/2006/main" noGrp="1"/>
+          </p:cNvSpPr>
+          <p:nvPr/>
+        </p:nvSpPr>
+        <p:spPr>
+          <a:xfrm xmlns:a="http://schemas.openxmlformats.org/drawingml/2006/main">
+            <a:off x="6400800" y="3581400"/>
+            <a:ext cx="5105400" cy="2095500"/>
           </a:xfrm>
           <a:prstGeom xmlns:a="http://schemas.openxmlformats.org/drawingml/2006/main" prst="rect">
             <a:avLst/>
@@ -3604,12 +8317,23 @@
           <a:bodyPr xmlns:a="http://schemas.openxmlformats.org/drawingml/2006/main" wrap="square" lIns="0" tIns="0" rIns="0" bIns="0" anchor="t">
             <a:noAutofit/>
           </a:bodyPr>
-          <a:lstStyle xmlns:a="http://schemas.openxmlformats.org/drawingml/2006/main"/>
+          <a:lstStyle xmlns:a="http://schemas.openxmlformats.org/drawingml/2006/main">
+            <a:defPPr>
+              <a:defRPr sz="2025" b="0">
+                <a:solidFill>
+                  <a:srgbClr val="6B7265"/>
+                </a:solidFill>
+                <a:latin typeface="Pretendard"/>
+                <a:ea typeface="Pretendard"/>
+                <a:cs typeface="Pretendard"/>
+              </a:defRPr>
+            </a:defPPr>
+          </a:lstStyle>
           <a:p xmlns:a="http://schemas.openxmlformats.org/drawingml/2006/main">
             <a:pPr>
-              <a:defRPr sz="975" b="0">
-                <a:solidFill>
-                  <a:srgbClr val="858B7E"/>
+              <a:defRPr sz="2025" b="0">
+                <a:solidFill>
+                  <a:srgbClr val="6B7265"/>
                 </a:solidFill>
                 <a:latin typeface="Pretendard"/>
                 <a:ea typeface="Pretendard"/>
@@ -3617,37 +8341,60 @@
               </a:defRPr>
             </a:pPr>
             <a:r>
-              <a:rPr sz="975" b="0">
-                <a:solidFill>
-                  <a:srgbClr val="858B7E"/>
+              <a:rPr sz="2025" b="0">
+                <a:solidFill>
+                  <a:srgbClr val="6B7265"/>
                 </a:solidFill>
                 <a:latin typeface="Pretendard"/>
                 <a:ea typeface="Pretendard"/>
                 <a:cs typeface="Pretendard"/>
               </a:rPr>
-              <a:t>Jinmo Koo · HIGHST Urology</a:t>
-            </a:r>
-          </a:p>
-        </p:txBody>
-      </p:sp>
-      <p:sp>
-        <p:nvSpPr>
-          <p:cNvPr id="7" name="">
-            <a:extLst xmlns:a="http://schemas.openxmlformats.org/drawingml/2006/main">
-              <a:ext uri="{FF2B5EF4-FFF2-40B4-BE49-F238E27FC236}">
-                <a16:creationId xmlns:a16="http://schemas.microsoft.com/office/drawing/2014/main" id="{6D0D0A1B-908C-4E7F-BEBF-6D6EC2C2D162}"/>
-              </a:ext>
-            </a:extLst>
-          </p:cNvPr>
-          <p:cNvSpPr>
-            <a:spLocks xmlns:a="http://schemas.openxmlformats.org/drawingml/2006/main" noGrp="1"/>
-          </p:cNvSpPr>
-          <p:nvPr/>
-        </p:nvSpPr>
-        <p:spPr>
-          <a:xfrm xmlns:a="http://schemas.openxmlformats.org/drawingml/2006/main">
-            <a:off x="11134725" y="6448425"/>
-            <a:ext cx="371475" cy="228600"/>
+              <a:t>Vibration perception threshold</a:t>
+            </a:r>
+          </a:p>
+          <a:p xmlns:a="http://schemas.openxmlformats.org/drawingml/2006/main">
+            <a:pPr>
+              <a:defRPr sz="2025" b="0">
+                <a:solidFill>
+                  <a:srgbClr val="6B7265"/>
+                </a:solidFill>
+                <a:latin typeface="Pretendard"/>
+                <a:ea typeface="Pretendard"/>
+                <a:cs typeface="Pretendard"/>
+              </a:defRPr>
+            </a:pPr>
+            <a:r>
+              <a:rPr sz="2025" b="0">
+                <a:solidFill>
+                  <a:srgbClr val="6B7265"/>
+                </a:solidFill>
+                <a:latin typeface="Pretendard"/>
+                <a:ea typeface="Pretendard"/>
+                <a:cs typeface="Pretendard"/>
+              </a:rPr>
+              <a:t>Penile sensitivity assessment</a:t>
+            </a:r>
+          </a:p>
+        </p:txBody>
+      </p:sp>
+      <p:sp>
+        <p:nvSpPr>
+          <p:cNvPr id="9" name="">
+            <a:extLst xmlns:a="http://schemas.openxmlformats.org/drawingml/2006/main">
+              <a:ext uri="{FF2B5EF4-FFF2-40B4-BE49-F238E27FC236}">
+                <a16:creationId xmlns:a16="http://schemas.microsoft.com/office/drawing/2014/main" id="{7A059DBF-826D-4647-8C79-22E7CB1E2438}"/>
+              </a:ext>
+            </a:extLst>
+          </p:cNvPr>
+          <p:cNvSpPr>
+            <a:spLocks xmlns:a="http://schemas.openxmlformats.org/drawingml/2006/main" noGrp="1"/>
+          </p:cNvSpPr>
+          <p:nvPr/>
+        </p:nvSpPr>
+        <p:spPr>
+          <a:xfrm xmlns:a="http://schemas.openxmlformats.org/drawingml/2006/main">
+            <a:off x="685800" y="6448425"/>
+            <a:ext cx="10191750" cy="228600"/>
           </a:xfrm>
           <a:prstGeom xmlns:a="http://schemas.openxmlformats.org/drawingml/2006/main" prst="rect">
             <a:avLst/>
@@ -3661,7 +8408,86 @@
           <a:bodyPr xmlns:a="http://schemas.openxmlformats.org/drawingml/2006/main" wrap="square" lIns="0" tIns="0" rIns="0" bIns="0" anchor="t">
             <a:noAutofit/>
           </a:bodyPr>
-          <a:lstStyle xmlns:a="http://schemas.openxmlformats.org/drawingml/2006/main"/>
+          <a:lstStyle xmlns:a="http://schemas.openxmlformats.org/drawingml/2006/main">
+            <a:defPPr>
+              <a:defRPr sz="975" b="0">
+                <a:solidFill>
+                  <a:srgbClr val="858B7E"/>
+                </a:solidFill>
+                <a:latin typeface="Pretendard"/>
+                <a:ea typeface="Pretendard"/>
+                <a:cs typeface="Pretendard"/>
+              </a:defRPr>
+            </a:defPPr>
+          </a:lstStyle>
+          <a:p xmlns:a="http://schemas.openxmlformats.org/drawingml/2006/main">
+            <a:pPr>
+              <a:defRPr sz="975" b="0">
+                <a:solidFill>
+                  <a:srgbClr val="858B7E"/>
+                </a:solidFill>
+                <a:latin typeface="Pretendard"/>
+                <a:ea typeface="Pretendard"/>
+                <a:cs typeface="Pretendard"/>
+              </a:defRPr>
+            </a:pPr>
+            <a:r>
+              <a:rPr sz="975" b="0">
+                <a:solidFill>
+                  <a:srgbClr val="858B7E"/>
+                </a:solidFill>
+                <a:latin typeface="Pretendard"/>
+                <a:ea typeface="Pretendard"/>
+                <a:cs typeface="Pretendard"/>
+              </a:rPr>
+              <a:t>Jinmo Koo · HIGHST Urology</a:t>
+            </a:r>
+          </a:p>
+        </p:txBody>
+      </p:sp>
+      <p:sp>
+        <p:nvSpPr>
+          <p:cNvPr id="10" name="">
+            <a:extLst xmlns:a="http://schemas.openxmlformats.org/drawingml/2006/main">
+              <a:ext uri="{FF2B5EF4-FFF2-40B4-BE49-F238E27FC236}">
+                <a16:creationId xmlns:a16="http://schemas.microsoft.com/office/drawing/2014/main" id="{E92250C4-B235-4E3A-A708-107858DA0D03}"/>
+              </a:ext>
+            </a:extLst>
+          </p:cNvPr>
+          <p:cNvSpPr>
+            <a:spLocks xmlns:a="http://schemas.openxmlformats.org/drawingml/2006/main" noGrp="1"/>
+          </p:cNvSpPr>
+          <p:nvPr/>
+        </p:nvSpPr>
+        <p:spPr>
+          <a:xfrm xmlns:a="http://schemas.openxmlformats.org/drawingml/2006/main">
+            <a:off x="11134725" y="6448425"/>
+            <a:ext cx="371475" cy="228600"/>
+          </a:xfrm>
+          <a:prstGeom xmlns:a="http://schemas.openxmlformats.org/drawingml/2006/main" prst="rect">
+            <a:avLst/>
+          </a:prstGeom>
+          <a:noFill xmlns:a="http://schemas.openxmlformats.org/drawingml/2006/main"/>
+          <a:ln xmlns:a="http://schemas.openxmlformats.org/drawingml/2006/main" w="0">
+            <a:noFill/>
+          </a:ln>
+        </p:spPr>
+        <p:txBody>
+          <a:bodyPr xmlns:a="http://schemas.openxmlformats.org/drawingml/2006/main" wrap="square" lIns="0" tIns="0" rIns="0" bIns="0" anchor="t">
+            <a:noAutofit/>
+          </a:bodyPr>
+          <a:lstStyle xmlns:a="http://schemas.openxmlformats.org/drawingml/2006/main">
+            <a:defPPr>
+              <a:defRPr sz="975" b="0">
+                <a:solidFill>
+                  <a:srgbClr val="858B7E"/>
+                </a:solidFill>
+                <a:latin typeface="Pretendard"/>
+                <a:ea typeface="Pretendard"/>
+                <a:cs typeface="Pretendard"/>
+              </a:defRPr>
+            </a:defPPr>
+          </a:lstStyle>
           <a:p xmlns:a="http://schemas.openxmlformats.org/drawingml/2006/main">
             <a:pPr>
               <a:defRPr sz="975" b="0">
@@ -3690,7 +8516,7 @@
     </p:spTree>
     <p:extLst>
       <p:ext uri="{BB962C8B-B14F-4D97-AF65-F5344CB8AC3E}">
-        <p14:creationId xmlns:p14="http://schemas.microsoft.com/office/powerpoint/2010/main" val="884713077"/>
+        <p14:creationId xmlns:p14="http://schemas.microsoft.com/office/powerpoint/2010/main" val="1644659298"/>
       </p:ext>
     </p:extLst>
   </p:cSld>
@@ -3721,7 +8547,7 @@
           <p:cNvPr id="8" name="">
             <a:extLst xmlns:a="http://schemas.openxmlformats.org/drawingml/2006/main">
               <a:ext uri="{FF2B5EF4-FFF2-40B4-BE49-F238E27FC236}">
-                <a16:creationId xmlns:a16="http://schemas.microsoft.com/office/drawing/2014/main" id="{59FFB771-D46C-4CCB-A9E9-5DCC0B806112}"/>
+                <a16:creationId xmlns:a16="http://schemas.microsoft.com/office/drawing/2014/main" id="{59313924-4CB2-42C7-AA81-1F54F12CAA85}"/>
               </a:ext>
             </a:extLst>
           </p:cNvPr>
@@ -3747,7 +8573,18 @@
           <a:bodyPr xmlns:a="http://schemas.openxmlformats.org/drawingml/2006/main" wrap="square" lIns="0" tIns="0" rIns="0" bIns="0" anchor="t">
             <a:noAutofit/>
           </a:bodyPr>
-          <a:lstStyle xmlns:a="http://schemas.openxmlformats.org/drawingml/2006/main"/>
+          <a:lstStyle xmlns:a="http://schemas.openxmlformats.org/drawingml/2006/main">
+            <a:defPPr>
+              <a:defRPr sz="1050" b="1">
+                <a:solidFill>
+                  <a:srgbClr val="9B7744"/>
+                </a:solidFill>
+                <a:latin typeface="Pretendard"/>
+                <a:ea typeface="Pretendard"/>
+                <a:cs typeface="Pretendard"/>
+              </a:defRPr>
+            </a:defPPr>
+          </a:lstStyle>
           <a:p xmlns:a="http://schemas.openxmlformats.org/drawingml/2006/main">
             <a:pPr>
               <a:defRPr sz="1050" b="1">
@@ -3768,7 +8605,7 @@
                 <a:ea typeface="Pretendard"/>
                 <a:cs typeface="Pretendard"/>
               </a:rPr>
-              <a:t>OPERATIVE VIDEOS</a:t>
+              <a:t>PREPARATION</a:t>
             </a:r>
           </a:p>
         </p:txBody>
@@ -3778,7 +8615,7 @@
           <p:cNvPr id="2" name="">
             <a:extLst xmlns:a="http://schemas.openxmlformats.org/drawingml/2006/main">
               <a:ext uri="{FF2B5EF4-FFF2-40B4-BE49-F238E27FC236}">
-                <a16:creationId xmlns:a16="http://schemas.microsoft.com/office/drawing/2014/main" id="{F607CB29-F69F-48A4-8E94-C7CDB78640AB}"/>
+                <a16:creationId xmlns:a16="http://schemas.microsoft.com/office/drawing/2014/main" id="{EAB64E31-ABD2-4700-A796-3237C7CA1D46}"/>
               </a:ext>
             </a:extLst>
           </p:cNvPr>
@@ -3804,7 +8641,18 @@
           <a:bodyPr xmlns:a="http://schemas.openxmlformats.org/drawingml/2006/main" wrap="square" lIns="0" tIns="0" rIns="0" bIns="0" anchor="t">
             <a:noAutofit/>
           </a:bodyPr>
-          <a:lstStyle xmlns:a="http://schemas.openxmlformats.org/drawingml/2006/main"/>
+          <a:lstStyle xmlns:a="http://schemas.openxmlformats.org/drawingml/2006/main">
+            <a:defPPr>
+              <a:defRPr sz="3450" b="1">
+                <a:solidFill>
+                  <a:srgbClr val="1B1D19"/>
+                </a:solidFill>
+                <a:latin typeface="Pretendard"/>
+                <a:ea typeface="Pretendard"/>
+                <a:cs typeface="Pretendard"/>
+              </a:defRPr>
+            </a:defPPr>
+          </a:lstStyle>
           <a:p xmlns:a="http://schemas.openxmlformats.org/drawingml/2006/main">
             <a:pPr>
               <a:defRPr sz="3450" b="1">
@@ -3825,7 +8673,7 @@
                 <a:ea typeface="Pretendard"/>
                 <a:cs typeface="Pretendard"/>
               </a:rPr>
-              <a:t>Pubic Incision</a:t>
+              <a:t>Surgical Preparation</a:t>
             </a:r>
           </a:p>
         </p:txBody>
@@ -3835,19 +8683,19 @@
           <p:cNvPr id="3" name="">
             <a:extLst xmlns:a="http://schemas.openxmlformats.org/drawingml/2006/main">
               <a:ext uri="{FF2B5EF4-FFF2-40B4-BE49-F238E27FC236}">
-                <a16:creationId xmlns:a16="http://schemas.microsoft.com/office/drawing/2014/main" id="{C92F236E-150F-4305-A206-4189AF40751A}"/>
-              </a:ext>
-            </a:extLst>
-          </p:cNvPr>
-          <p:cNvSpPr>
-            <a:spLocks xmlns:a="http://schemas.openxmlformats.org/drawingml/2006/main" noGrp="1"/>
-          </p:cNvSpPr>
-          <p:nvPr/>
-        </p:nvSpPr>
-        <p:spPr>
-          <a:xfrm xmlns:a="http://schemas.openxmlformats.org/drawingml/2006/main">
-            <a:off x="685800" y="2819400"/>
-            <a:ext cx="9048750" cy="333375"/>
+                <a16:creationId xmlns:a16="http://schemas.microsoft.com/office/drawing/2014/main" id="{27F6E472-B46B-4F83-8115-60CA691802F9}"/>
+              </a:ext>
+            </a:extLst>
+          </p:cNvPr>
+          <p:cNvSpPr>
+            <a:spLocks xmlns:a="http://schemas.openxmlformats.org/drawingml/2006/main" noGrp="1"/>
+          </p:cNvSpPr>
+          <p:nvPr/>
+        </p:nvSpPr>
+        <p:spPr>
+          <a:xfrm xmlns:a="http://schemas.openxmlformats.org/drawingml/2006/main">
+            <a:off x="685800" y="1905000"/>
+            <a:ext cx="10820400" cy="438150"/>
           </a:xfrm>
           <a:prstGeom xmlns:a="http://schemas.openxmlformats.org/drawingml/2006/main" prst="rect">
             <a:avLst/>
@@ -3861,12 +8709,23 @@
           <a:bodyPr xmlns:a="http://schemas.openxmlformats.org/drawingml/2006/main" wrap="square" lIns="0" tIns="0" rIns="0" bIns="0" anchor="t">
             <a:noAutofit/>
           </a:bodyPr>
-          <a:lstStyle xmlns:a="http://schemas.openxmlformats.org/drawingml/2006/main"/>
+          <a:lstStyle xmlns:a="http://schemas.openxmlformats.org/drawingml/2006/main">
+            <a:defPPr>
+              <a:defRPr sz="2025" b="0">
+                <a:solidFill>
+                  <a:srgbClr val="6B7265"/>
+                </a:solidFill>
+                <a:latin typeface="Pretendard"/>
+                <a:ea typeface="Pretendard"/>
+                <a:cs typeface="Pretendard"/>
+              </a:defRPr>
+            </a:defPPr>
+          </a:lstStyle>
           <a:p xmlns:a="http://schemas.openxmlformats.org/drawingml/2006/main">
             <a:pPr>
-              <a:defRPr sz="1350" b="1">
-                <a:solidFill>
-                  <a:srgbClr val="9B7744"/>
+              <a:defRPr sz="2025" b="0">
+                <a:solidFill>
+                  <a:srgbClr val="6B7265"/>
                 </a:solidFill>
                 <a:latin typeface="Pretendard"/>
                 <a:ea typeface="Pretendard"/>
@@ -3874,15 +8733,15 @@
               </a:defRPr>
             </a:pPr>
             <a:r>
-              <a:rPr sz="1350" b="1">
-                <a:solidFill>
-                  <a:srgbClr val="9B7744"/>
+              <a:rPr sz="2025" b="0">
+                <a:solidFill>
+                  <a:srgbClr val="6B7265"/>
                 </a:solidFill>
                 <a:latin typeface="Pretendard"/>
                 <a:ea typeface="Pretendard"/>
                 <a:cs typeface="Pretendard"/>
               </a:rPr>
-              <a:t>OPERATIVE VIDEO 02</a:t>
+              <a:t>Shaving and Draping</a:t>
             </a:r>
           </a:p>
         </p:txBody>
@@ -3892,19 +8751,79 @@
           <p:cNvPr id="4" name="">
             <a:extLst xmlns:a="http://schemas.openxmlformats.org/drawingml/2006/main">
               <a:ext uri="{FF2B5EF4-FFF2-40B4-BE49-F238E27FC236}">
-                <a16:creationId xmlns:a16="http://schemas.microsoft.com/office/drawing/2014/main" id="{5B47CE83-4DA4-4F46-9977-B95CC83C511F}"/>
-              </a:ext>
-            </a:extLst>
-          </p:cNvPr>
-          <p:cNvSpPr>
-            <a:spLocks xmlns:a="http://schemas.openxmlformats.org/drawingml/2006/main" noGrp="1"/>
-          </p:cNvSpPr>
-          <p:nvPr/>
-        </p:nvSpPr>
-        <p:spPr>
-          <a:xfrm xmlns:a="http://schemas.openxmlformats.org/drawingml/2006/main">
-            <a:off x="685800" y="3371850"/>
-            <a:ext cx="2000250" cy="1571625"/>
+                <a16:creationId xmlns:a16="http://schemas.microsoft.com/office/drawing/2014/main" id="{1C592E53-5251-46C8-B27E-E3C85A6E1F9E}"/>
+              </a:ext>
+            </a:extLst>
+          </p:cNvPr>
+          <p:cNvSpPr>
+            <a:spLocks xmlns:a="http://schemas.openxmlformats.org/drawingml/2006/main" noGrp="1"/>
+          </p:cNvSpPr>
+          <p:nvPr/>
+        </p:nvSpPr>
+        <p:spPr>
+          <a:xfrm xmlns:a="http://schemas.openxmlformats.org/drawingml/2006/main">
+            <a:off x="685800" y="2476500"/>
+            <a:ext cx="10820400" cy="3524250"/>
+          </a:xfrm>
+          <a:prstGeom xmlns:a="http://schemas.openxmlformats.org/drawingml/2006/main" prst="rect">
+            <a:avLst/>
+          </a:prstGeom>
+          <a:solidFill xmlns:a="http://schemas.openxmlformats.org/drawingml/2006/main">
+            <a:srgbClr val="F7F7F3"/>
+          </a:solidFill>
+          <a:ln xmlns:a="http://schemas.openxmlformats.org/drawingml/2006/main" w="0">
+            <a:noFill/>
+          </a:ln>
+        </p:spPr>
+      </p:sp>
+      <p:sp>
+        <p:nvSpPr>
+          <p:cNvPr id="5" name="">
+            <a:extLst xmlns:a="http://schemas.openxmlformats.org/drawingml/2006/main">
+              <a:ext uri="{FF2B5EF4-FFF2-40B4-BE49-F238E27FC236}">
+                <a16:creationId xmlns:a16="http://schemas.microsoft.com/office/drawing/2014/main" id="{BD488A3C-F2ED-40A8-ABFC-B4F185074FC7}"/>
+              </a:ext>
+            </a:extLst>
+          </p:cNvPr>
+          <p:cNvSpPr>
+            <a:spLocks xmlns:a="http://schemas.openxmlformats.org/drawingml/2006/main" noGrp="1"/>
+          </p:cNvSpPr>
+          <p:nvPr/>
+        </p:nvSpPr>
+        <p:spPr>
+          <a:xfrm xmlns:a="http://schemas.openxmlformats.org/drawingml/2006/main">
+            <a:off x="685800" y="2476500"/>
+            <a:ext cx="10820400" cy="9525"/>
+          </a:xfrm>
+          <a:prstGeom xmlns:a="http://schemas.openxmlformats.org/drawingml/2006/main" prst="rect">
+            <a:avLst/>
+          </a:prstGeom>
+          <a:solidFill xmlns:a="http://schemas.openxmlformats.org/drawingml/2006/main">
+            <a:srgbClr val="DEDFD6"/>
+          </a:solidFill>
+          <a:ln xmlns:a="http://schemas.openxmlformats.org/drawingml/2006/main" w="0">
+            <a:noFill/>
+          </a:ln>
+        </p:spPr>
+      </p:sp>
+      <p:sp>
+        <p:nvSpPr>
+          <p:cNvPr id="6" name="">
+            <a:extLst xmlns:a="http://schemas.openxmlformats.org/drawingml/2006/main">
+              <a:ext uri="{FF2B5EF4-FFF2-40B4-BE49-F238E27FC236}">
+                <a16:creationId xmlns:a16="http://schemas.microsoft.com/office/drawing/2014/main" id="{A500D701-E50C-4299-BB33-F114B9E59545}"/>
+              </a:ext>
+            </a:extLst>
+          </p:cNvPr>
+          <p:cNvSpPr>
+            <a:spLocks xmlns:a="http://schemas.openxmlformats.org/drawingml/2006/main" noGrp="1"/>
+          </p:cNvSpPr>
+          <p:nvPr/>
+        </p:nvSpPr>
+        <p:spPr>
+          <a:xfrm xmlns:a="http://schemas.openxmlformats.org/drawingml/2006/main">
+            <a:off x="685800" y="6448425"/>
+            <a:ext cx="10191750" cy="228600"/>
           </a:xfrm>
           <a:prstGeom xmlns:a="http://schemas.openxmlformats.org/drawingml/2006/main" prst="rect">
             <a:avLst/>
@@ -3918,12 +8837,23 @@
           <a:bodyPr xmlns:a="http://schemas.openxmlformats.org/drawingml/2006/main" wrap="square" lIns="0" tIns="0" rIns="0" bIns="0" anchor="t">
             <a:noAutofit/>
           </a:bodyPr>
-          <a:lstStyle xmlns:a="http://schemas.openxmlformats.org/drawingml/2006/main"/>
+          <a:lstStyle xmlns:a="http://schemas.openxmlformats.org/drawingml/2006/main">
+            <a:defPPr>
+              <a:defRPr sz="975" b="0">
+                <a:solidFill>
+                  <a:srgbClr val="858B7E"/>
+                </a:solidFill>
+                <a:latin typeface="Pretendard"/>
+                <a:ea typeface="Pretendard"/>
+                <a:cs typeface="Pretendard"/>
+              </a:defRPr>
+            </a:defPPr>
+          </a:lstStyle>
           <a:p xmlns:a="http://schemas.openxmlformats.org/drawingml/2006/main">
             <a:pPr>
-              <a:defRPr sz="9750" b="0">
-                <a:solidFill>
-                  <a:srgbClr val="1B1D19"/>
+              <a:defRPr sz="975" b="0">
+                <a:solidFill>
+                  <a:srgbClr val="858B7E"/>
                 </a:solidFill>
                 <a:latin typeface="Pretendard"/>
                 <a:ea typeface="Pretendard"/>
@@ -3931,37 +8861,37 @@
               </a:defRPr>
             </a:pPr>
             <a:r>
-              <a:rPr sz="9750" b="0">
-                <a:solidFill>
-                  <a:srgbClr val="1B1D19"/>
+              <a:rPr sz="975" b="0">
+                <a:solidFill>
+                  <a:srgbClr val="858B7E"/>
                 </a:solidFill>
                 <a:latin typeface="Pretendard"/>
                 <a:ea typeface="Pretendard"/>
                 <a:cs typeface="Pretendard"/>
               </a:rPr>
-              <a:t>10</a:t>
-            </a:r>
-          </a:p>
-        </p:txBody>
-      </p:sp>
-      <p:sp>
-        <p:nvSpPr>
-          <p:cNvPr id="5" name="">
-            <a:extLst xmlns:a="http://schemas.openxmlformats.org/drawingml/2006/main">
-              <a:ext uri="{FF2B5EF4-FFF2-40B4-BE49-F238E27FC236}">
-                <a16:creationId xmlns:a16="http://schemas.microsoft.com/office/drawing/2014/main" id="{B54B1DA1-B5D2-48B8-B7F4-41DA4B68AB57}"/>
-              </a:ext>
-            </a:extLst>
-          </p:cNvPr>
-          <p:cNvSpPr>
-            <a:spLocks xmlns:a="http://schemas.openxmlformats.org/drawingml/2006/main" noGrp="1"/>
-          </p:cNvSpPr>
-          <p:nvPr/>
-        </p:nvSpPr>
-        <p:spPr>
-          <a:xfrm xmlns:a="http://schemas.openxmlformats.org/drawingml/2006/main">
-            <a:off x="2562225" y="4210050"/>
-            <a:ext cx="3048000" cy="542925"/>
+              <a:t>Jinmo Koo · HIGHST Urology</a:t>
+            </a:r>
+          </a:p>
+        </p:txBody>
+      </p:sp>
+      <p:sp>
+        <p:nvSpPr>
+          <p:cNvPr id="7" name="">
+            <a:extLst xmlns:a="http://schemas.openxmlformats.org/drawingml/2006/main">
+              <a:ext uri="{FF2B5EF4-FFF2-40B4-BE49-F238E27FC236}">
+                <a16:creationId xmlns:a16="http://schemas.microsoft.com/office/drawing/2014/main" id="{7CDA10AE-2699-4029-9081-2DFF6700F3F4}"/>
+              </a:ext>
+            </a:extLst>
+          </p:cNvPr>
+          <p:cNvSpPr>
+            <a:spLocks xmlns:a="http://schemas.openxmlformats.org/drawingml/2006/main" noGrp="1"/>
+          </p:cNvSpPr>
+          <p:nvPr/>
+        </p:nvSpPr>
+        <p:spPr>
+          <a:xfrm xmlns:a="http://schemas.openxmlformats.org/drawingml/2006/main">
+            <a:off x="11134725" y="6448425"/>
+            <a:ext cx="371475" cy="228600"/>
           </a:xfrm>
           <a:prstGeom xmlns:a="http://schemas.openxmlformats.org/drawingml/2006/main" prst="rect">
             <a:avLst/>
@@ -3975,66 +8905,8 @@
           <a:bodyPr xmlns:a="http://schemas.openxmlformats.org/drawingml/2006/main" wrap="square" lIns="0" tIns="0" rIns="0" bIns="0" anchor="t">
             <a:noAutofit/>
           </a:bodyPr>
-          <a:lstStyle xmlns:a="http://schemas.openxmlformats.org/drawingml/2006/main"/>
-          <a:p xmlns:a="http://schemas.openxmlformats.org/drawingml/2006/main">
-            <a:pPr>
-              <a:defRPr sz="2400" b="0">
-                <a:solidFill>
-                  <a:srgbClr val="6B7265"/>
-                </a:solidFill>
-                <a:latin typeface="Pretendard"/>
-                <a:ea typeface="Pretendard"/>
-                <a:cs typeface="Pretendard"/>
-              </a:defRPr>
-            </a:pPr>
-            <a:r>
-              <a:rPr sz="2400" b="0">
-                <a:solidFill>
-                  <a:srgbClr val="6B7265"/>
-                </a:solidFill>
-                <a:latin typeface="Pretendard"/>
-                <a:ea typeface="Pretendard"/>
-                <a:cs typeface="Pretendard"/>
-              </a:rPr>
-              <a:t>minutes</a:t>
-            </a:r>
-          </a:p>
-        </p:txBody>
-      </p:sp>
-      <p:sp>
-        <p:nvSpPr>
-          <p:cNvPr id="6" name="">
-            <a:extLst xmlns:a="http://schemas.openxmlformats.org/drawingml/2006/main">
-              <a:ext uri="{FF2B5EF4-FFF2-40B4-BE49-F238E27FC236}">
-                <a16:creationId xmlns:a16="http://schemas.microsoft.com/office/drawing/2014/main" id="{FDA8503C-D21C-4DAC-86F4-A4E427A9A144}"/>
-              </a:ext>
-            </a:extLst>
-          </p:cNvPr>
-          <p:cNvSpPr>
-            <a:spLocks xmlns:a="http://schemas.openxmlformats.org/drawingml/2006/main" noGrp="1"/>
-          </p:cNvSpPr>
-          <p:nvPr/>
-        </p:nvSpPr>
-        <p:spPr>
-          <a:xfrm xmlns:a="http://schemas.openxmlformats.org/drawingml/2006/main">
-            <a:off x="685800" y="6448425"/>
-            <a:ext cx="10191750" cy="228600"/>
-          </a:xfrm>
-          <a:prstGeom xmlns:a="http://schemas.openxmlformats.org/drawingml/2006/main" prst="rect">
-            <a:avLst/>
-          </a:prstGeom>
-          <a:noFill xmlns:a="http://schemas.openxmlformats.org/drawingml/2006/main"/>
-          <a:ln xmlns:a="http://schemas.openxmlformats.org/drawingml/2006/main" w="0">
-            <a:noFill/>
-          </a:ln>
-        </p:spPr>
-        <p:txBody>
-          <a:bodyPr xmlns:a="http://schemas.openxmlformats.org/drawingml/2006/main" wrap="square" lIns="0" tIns="0" rIns="0" bIns="0" anchor="t">
-            <a:noAutofit/>
-          </a:bodyPr>
-          <a:lstStyle xmlns:a="http://schemas.openxmlformats.org/drawingml/2006/main"/>
-          <a:p xmlns:a="http://schemas.openxmlformats.org/drawingml/2006/main">
-            <a:pPr>
+          <a:lstStyle xmlns:a="http://schemas.openxmlformats.org/drawingml/2006/main">
+            <a:defPPr>
               <a:defRPr sz="975" b="0">
                 <a:solidFill>
                   <a:srgbClr val="858B7E"/>
@@ -4043,53 +8915,8 @@
                 <a:ea typeface="Pretendard"/>
                 <a:cs typeface="Pretendard"/>
               </a:defRPr>
-            </a:pPr>
-            <a:r>
-              <a:rPr sz="975" b="0">
-                <a:solidFill>
-                  <a:srgbClr val="858B7E"/>
-                </a:solidFill>
-                <a:latin typeface="Pretendard"/>
-                <a:ea typeface="Pretendard"/>
-                <a:cs typeface="Pretendard"/>
-              </a:rPr>
-              <a:t>Jinmo Koo · HIGHST Urology</a:t>
-            </a:r>
-          </a:p>
-        </p:txBody>
-      </p:sp>
-      <p:sp>
-        <p:nvSpPr>
-          <p:cNvPr id="7" name="">
-            <a:extLst xmlns:a="http://schemas.openxmlformats.org/drawingml/2006/main">
-              <a:ext uri="{FF2B5EF4-FFF2-40B4-BE49-F238E27FC236}">
-                <a16:creationId xmlns:a16="http://schemas.microsoft.com/office/drawing/2014/main" id="{5AD98252-CEE5-4162-9666-0EAF4F5D97CD}"/>
-              </a:ext>
-            </a:extLst>
-          </p:cNvPr>
-          <p:cNvSpPr>
-            <a:spLocks xmlns:a="http://schemas.openxmlformats.org/drawingml/2006/main" noGrp="1"/>
-          </p:cNvSpPr>
-          <p:nvPr/>
-        </p:nvSpPr>
-        <p:spPr>
-          <a:xfrm xmlns:a="http://schemas.openxmlformats.org/drawingml/2006/main">
-            <a:off x="11134725" y="6448425"/>
-            <a:ext cx="371475" cy="228600"/>
-          </a:xfrm>
-          <a:prstGeom xmlns:a="http://schemas.openxmlformats.org/drawingml/2006/main" prst="rect">
-            <a:avLst/>
-          </a:prstGeom>
-          <a:noFill xmlns:a="http://schemas.openxmlformats.org/drawingml/2006/main"/>
-          <a:ln xmlns:a="http://schemas.openxmlformats.org/drawingml/2006/main" w="0">
-            <a:noFill/>
-          </a:ln>
-        </p:spPr>
-        <p:txBody>
-          <a:bodyPr xmlns:a="http://schemas.openxmlformats.org/drawingml/2006/main" wrap="square" lIns="0" tIns="0" rIns="0" bIns="0" anchor="t">
-            <a:noAutofit/>
-          </a:bodyPr>
-          <a:lstStyle xmlns:a="http://schemas.openxmlformats.org/drawingml/2006/main"/>
+            </a:defPPr>
+          </a:lstStyle>
           <a:p xmlns:a="http://schemas.openxmlformats.org/drawingml/2006/main">
             <a:pPr>
               <a:defRPr sz="975" b="0">
@@ -4118,7 +8945,7 @@
     </p:spTree>
     <p:extLst>
       <p:ext uri="{BB962C8B-B14F-4D97-AF65-F5344CB8AC3E}">
-        <p14:creationId xmlns:p14="http://schemas.microsoft.com/office/powerpoint/2010/main" val="145768507"/>
+        <p14:creationId xmlns:p14="http://schemas.microsoft.com/office/powerpoint/2010/main" val="1678491422"/>
       </p:ext>
     </p:extLst>
   </p:cSld>
@@ -4146,10 +8973,10 @@
       </p:grpSpPr>
       <p:sp>
         <p:nvSpPr>
-          <p:cNvPr id="8" name="">
-            <a:extLst xmlns:a="http://schemas.openxmlformats.org/drawingml/2006/main">
-              <a:ext uri="{FF2B5EF4-FFF2-40B4-BE49-F238E27FC236}">
-                <a16:creationId xmlns:a16="http://schemas.microsoft.com/office/drawing/2014/main" id="{705FA95E-CC93-409B-B4EA-2D15A87AE62E}"/>
+          <p:cNvPr id="7" name="">
+            <a:extLst xmlns:a="http://schemas.openxmlformats.org/drawingml/2006/main">
+              <a:ext uri="{FF2B5EF4-FFF2-40B4-BE49-F238E27FC236}">
+                <a16:creationId xmlns:a16="http://schemas.microsoft.com/office/drawing/2014/main" id="{C2BE8916-F124-40BA-9FE0-C9C301FE86C6}"/>
               </a:ext>
             </a:extLst>
           </p:cNvPr>
@@ -4175,7 +9002,18 @@
           <a:bodyPr xmlns:a="http://schemas.openxmlformats.org/drawingml/2006/main" wrap="square" lIns="0" tIns="0" rIns="0" bIns="0" anchor="t">
             <a:noAutofit/>
           </a:bodyPr>
-          <a:lstStyle xmlns:a="http://schemas.openxmlformats.org/drawingml/2006/main"/>
+          <a:lstStyle xmlns:a="http://schemas.openxmlformats.org/drawingml/2006/main">
+            <a:defPPr>
+              <a:defRPr sz="1050" b="1">
+                <a:solidFill>
+                  <a:srgbClr val="9B7744"/>
+                </a:solidFill>
+                <a:latin typeface="Pretendard"/>
+                <a:ea typeface="Pretendard"/>
+                <a:cs typeface="Pretendard"/>
+              </a:defRPr>
+            </a:defPPr>
+          </a:lstStyle>
           <a:p xmlns:a="http://schemas.openxmlformats.org/drawingml/2006/main">
             <a:pPr>
               <a:defRPr sz="1050" b="1">
@@ -4196,7 +9034,7 @@
                 <a:ea typeface="Pretendard"/>
                 <a:cs typeface="Pretendard"/>
               </a:rPr>
-              <a:t>OPERATIVE VIDEOS</a:t>
+              <a:t>CLINICAL CASES / CASE 1</a:t>
             </a:r>
           </a:p>
         </p:txBody>
@@ -4206,7 +9044,7 @@
           <p:cNvPr id="2" name="">
             <a:extLst xmlns:a="http://schemas.openxmlformats.org/drawingml/2006/main">
               <a:ext uri="{FF2B5EF4-FFF2-40B4-BE49-F238E27FC236}">
-                <a16:creationId xmlns:a16="http://schemas.microsoft.com/office/drawing/2014/main" id="{763794AE-9D15-4DEC-B437-60C0F2328AAD}"/>
+                <a16:creationId xmlns:a16="http://schemas.microsoft.com/office/drawing/2014/main" id="{BB8DF67A-9CEB-4B74-9D62-B4E3089E2615}"/>
               </a:ext>
             </a:extLst>
           </p:cNvPr>
@@ -4232,7 +9070,18 @@
           <a:bodyPr xmlns:a="http://schemas.openxmlformats.org/drawingml/2006/main" wrap="square" lIns="0" tIns="0" rIns="0" bIns="0" anchor="t">
             <a:noAutofit/>
           </a:bodyPr>
-          <a:lstStyle xmlns:a="http://schemas.openxmlformats.org/drawingml/2006/main"/>
+          <a:lstStyle xmlns:a="http://schemas.openxmlformats.org/drawingml/2006/main">
+            <a:defPPr>
+              <a:defRPr sz="3450" b="1">
+                <a:solidFill>
+                  <a:srgbClr val="1B1D19"/>
+                </a:solidFill>
+                <a:latin typeface="Pretendard"/>
+                <a:ea typeface="Pretendard"/>
+                <a:cs typeface="Pretendard"/>
+              </a:defRPr>
+            </a:defPPr>
+          </a:lstStyle>
           <a:p xmlns:a="http://schemas.openxmlformats.org/drawingml/2006/main">
             <a:pPr>
               <a:defRPr sz="3450" b="1">
@@ -4253,7 +9102,7 @@
                 <a:ea typeface="Pretendard"/>
                 <a:cs typeface="Pretendard"/>
               </a:rPr>
-              <a:t>Revision Surgery</a:t>
+              <a:t>Pubic Incision</a:t>
             </a:r>
           </a:p>
         </p:txBody>
@@ -4263,19 +9112,79 @@
           <p:cNvPr id="3" name="">
             <a:extLst xmlns:a="http://schemas.openxmlformats.org/drawingml/2006/main">
               <a:ext uri="{FF2B5EF4-FFF2-40B4-BE49-F238E27FC236}">
-                <a16:creationId xmlns:a16="http://schemas.microsoft.com/office/drawing/2014/main" id="{CCF30C2E-4866-4E92-984E-5D4FFA0C6DD3}"/>
-              </a:ext>
-            </a:extLst>
-          </p:cNvPr>
-          <p:cNvSpPr>
-            <a:spLocks xmlns:a="http://schemas.openxmlformats.org/drawingml/2006/main" noGrp="1"/>
-          </p:cNvSpPr>
-          <p:nvPr/>
-        </p:nvSpPr>
-        <p:spPr>
-          <a:xfrm xmlns:a="http://schemas.openxmlformats.org/drawingml/2006/main">
-            <a:off x="685800" y="2819400"/>
-            <a:ext cx="9048750" cy="333375"/>
+                <a16:creationId xmlns:a16="http://schemas.microsoft.com/office/drawing/2014/main" id="{9A45B733-0414-408A-A97F-3BCA1D42C97E}"/>
+              </a:ext>
+            </a:extLst>
+          </p:cNvPr>
+          <p:cNvSpPr>
+            <a:spLocks xmlns:a="http://schemas.openxmlformats.org/drawingml/2006/main" noGrp="1"/>
+          </p:cNvSpPr>
+          <p:nvPr/>
+        </p:nvSpPr>
+        <p:spPr>
+          <a:xfrm xmlns:a="http://schemas.openxmlformats.org/drawingml/2006/main">
+            <a:off x="685800" y="2476500"/>
+            <a:ext cx="10820400" cy="3524250"/>
+          </a:xfrm>
+          <a:prstGeom xmlns:a="http://schemas.openxmlformats.org/drawingml/2006/main" prst="rect">
+            <a:avLst/>
+          </a:prstGeom>
+          <a:solidFill xmlns:a="http://schemas.openxmlformats.org/drawingml/2006/main">
+            <a:srgbClr val="F7F7F3"/>
+          </a:solidFill>
+          <a:ln xmlns:a="http://schemas.openxmlformats.org/drawingml/2006/main" w="0">
+            <a:noFill/>
+          </a:ln>
+        </p:spPr>
+      </p:sp>
+      <p:sp>
+        <p:nvSpPr>
+          <p:cNvPr id="4" name="">
+            <a:extLst xmlns:a="http://schemas.openxmlformats.org/drawingml/2006/main">
+              <a:ext uri="{FF2B5EF4-FFF2-40B4-BE49-F238E27FC236}">
+                <a16:creationId xmlns:a16="http://schemas.microsoft.com/office/drawing/2014/main" id="{F44BFDE8-8F44-47BF-B01E-AF1D1AE766F8}"/>
+              </a:ext>
+            </a:extLst>
+          </p:cNvPr>
+          <p:cNvSpPr>
+            <a:spLocks xmlns:a="http://schemas.openxmlformats.org/drawingml/2006/main" noGrp="1"/>
+          </p:cNvSpPr>
+          <p:nvPr/>
+        </p:nvSpPr>
+        <p:spPr>
+          <a:xfrm xmlns:a="http://schemas.openxmlformats.org/drawingml/2006/main">
+            <a:off x="685800" y="2476500"/>
+            <a:ext cx="10820400" cy="9525"/>
+          </a:xfrm>
+          <a:prstGeom xmlns:a="http://schemas.openxmlformats.org/drawingml/2006/main" prst="rect">
+            <a:avLst/>
+          </a:prstGeom>
+          <a:solidFill xmlns:a="http://schemas.openxmlformats.org/drawingml/2006/main">
+            <a:srgbClr val="DEDFD6"/>
+          </a:solidFill>
+          <a:ln xmlns:a="http://schemas.openxmlformats.org/drawingml/2006/main" w="0">
+            <a:noFill/>
+          </a:ln>
+        </p:spPr>
+      </p:sp>
+      <p:sp>
+        <p:nvSpPr>
+          <p:cNvPr id="5" name="">
+            <a:extLst xmlns:a="http://schemas.openxmlformats.org/drawingml/2006/main">
+              <a:ext uri="{FF2B5EF4-FFF2-40B4-BE49-F238E27FC236}">
+                <a16:creationId xmlns:a16="http://schemas.microsoft.com/office/drawing/2014/main" id="{F3D0BA2F-B139-4261-86D8-31E0876B798E}"/>
+              </a:ext>
+            </a:extLst>
+          </p:cNvPr>
+          <p:cNvSpPr>
+            <a:spLocks xmlns:a="http://schemas.openxmlformats.org/drawingml/2006/main" noGrp="1"/>
+          </p:cNvSpPr>
+          <p:nvPr/>
+        </p:nvSpPr>
+        <p:spPr>
+          <a:xfrm xmlns:a="http://schemas.openxmlformats.org/drawingml/2006/main">
+            <a:off x="685800" y="6448425"/>
+            <a:ext cx="10191750" cy="228600"/>
           </a:xfrm>
           <a:prstGeom xmlns:a="http://schemas.openxmlformats.org/drawingml/2006/main" prst="rect">
             <a:avLst/>
@@ -4289,12 +9198,23 @@
           <a:bodyPr xmlns:a="http://schemas.openxmlformats.org/drawingml/2006/main" wrap="square" lIns="0" tIns="0" rIns="0" bIns="0" anchor="t">
             <a:noAutofit/>
           </a:bodyPr>
-          <a:lstStyle xmlns:a="http://schemas.openxmlformats.org/drawingml/2006/main"/>
+          <a:lstStyle xmlns:a="http://schemas.openxmlformats.org/drawingml/2006/main">
+            <a:defPPr>
+              <a:defRPr sz="975" b="0">
+                <a:solidFill>
+                  <a:srgbClr val="858B7E"/>
+                </a:solidFill>
+                <a:latin typeface="Pretendard"/>
+                <a:ea typeface="Pretendard"/>
+                <a:cs typeface="Pretendard"/>
+              </a:defRPr>
+            </a:defPPr>
+          </a:lstStyle>
           <a:p xmlns:a="http://schemas.openxmlformats.org/drawingml/2006/main">
             <a:pPr>
-              <a:defRPr sz="1350" b="1">
-                <a:solidFill>
-                  <a:srgbClr val="9B7744"/>
+              <a:defRPr sz="975" b="0">
+                <a:solidFill>
+                  <a:srgbClr val="858B7E"/>
                 </a:solidFill>
                 <a:latin typeface="Pretendard"/>
                 <a:ea typeface="Pretendard"/>
@@ -4302,37 +9222,37 @@
               </a:defRPr>
             </a:pPr>
             <a:r>
-              <a:rPr sz="1350" b="1">
-                <a:solidFill>
-                  <a:srgbClr val="9B7744"/>
+              <a:rPr sz="975" b="0">
+                <a:solidFill>
+                  <a:srgbClr val="858B7E"/>
                 </a:solidFill>
                 <a:latin typeface="Pretendard"/>
                 <a:ea typeface="Pretendard"/>
                 <a:cs typeface="Pretendard"/>
               </a:rPr>
-              <a:t>OPERATIVE VIDEO 03</a:t>
-            </a:r>
-          </a:p>
-        </p:txBody>
-      </p:sp>
-      <p:sp>
-        <p:nvSpPr>
-          <p:cNvPr id="4" name="">
-            <a:extLst xmlns:a="http://schemas.openxmlformats.org/drawingml/2006/main">
-              <a:ext uri="{FF2B5EF4-FFF2-40B4-BE49-F238E27FC236}">
-                <a16:creationId xmlns:a16="http://schemas.microsoft.com/office/drawing/2014/main" id="{3AEDCEF5-8A4F-407A-A7C1-E7DDE81202D4}"/>
-              </a:ext>
-            </a:extLst>
-          </p:cNvPr>
-          <p:cNvSpPr>
-            <a:spLocks xmlns:a="http://schemas.openxmlformats.org/drawingml/2006/main" noGrp="1"/>
-          </p:cNvSpPr>
-          <p:nvPr/>
-        </p:nvSpPr>
-        <p:spPr>
-          <a:xfrm xmlns:a="http://schemas.openxmlformats.org/drawingml/2006/main">
-            <a:off x="685800" y="3371850"/>
-            <a:ext cx="2000250" cy="1571625"/>
+              <a:t>Jinmo Koo · HIGHST Urology</a:t>
+            </a:r>
+          </a:p>
+        </p:txBody>
+      </p:sp>
+      <p:sp>
+        <p:nvSpPr>
+          <p:cNvPr id="6" name="">
+            <a:extLst xmlns:a="http://schemas.openxmlformats.org/drawingml/2006/main">
+              <a:ext uri="{FF2B5EF4-FFF2-40B4-BE49-F238E27FC236}">
+                <a16:creationId xmlns:a16="http://schemas.microsoft.com/office/drawing/2014/main" id="{9926DE49-2B3E-43F9-AF6D-CA92086C4BE5}"/>
+              </a:ext>
+            </a:extLst>
+          </p:cNvPr>
+          <p:cNvSpPr>
+            <a:spLocks xmlns:a="http://schemas.openxmlformats.org/drawingml/2006/main" noGrp="1"/>
+          </p:cNvSpPr>
+          <p:nvPr/>
+        </p:nvSpPr>
+        <p:spPr>
+          <a:xfrm xmlns:a="http://schemas.openxmlformats.org/drawingml/2006/main">
+            <a:off x="11134725" y="6448425"/>
+            <a:ext cx="371475" cy="228600"/>
           </a:xfrm>
           <a:prstGeom xmlns:a="http://schemas.openxmlformats.org/drawingml/2006/main" prst="rect">
             <a:avLst/>
@@ -4346,123 +9266,8 @@
           <a:bodyPr xmlns:a="http://schemas.openxmlformats.org/drawingml/2006/main" wrap="square" lIns="0" tIns="0" rIns="0" bIns="0" anchor="t">
             <a:noAutofit/>
           </a:bodyPr>
-          <a:lstStyle xmlns:a="http://schemas.openxmlformats.org/drawingml/2006/main"/>
-          <a:p xmlns:a="http://schemas.openxmlformats.org/drawingml/2006/main">
-            <a:pPr>
-              <a:defRPr sz="9750" b="0">
-                <a:solidFill>
-                  <a:srgbClr val="1B1D19"/>
-                </a:solidFill>
-                <a:latin typeface="Pretendard"/>
-                <a:ea typeface="Pretendard"/>
-                <a:cs typeface="Pretendard"/>
-              </a:defRPr>
-            </a:pPr>
-            <a:r>
-              <a:rPr sz="9750" b="0">
-                <a:solidFill>
-                  <a:srgbClr val="1B1D19"/>
-                </a:solidFill>
-                <a:latin typeface="Pretendard"/>
-                <a:ea typeface="Pretendard"/>
-                <a:cs typeface="Pretendard"/>
-              </a:rPr>
-              <a:t>10</a:t>
-            </a:r>
-          </a:p>
-        </p:txBody>
-      </p:sp>
-      <p:sp>
-        <p:nvSpPr>
-          <p:cNvPr id="5" name="">
-            <a:extLst xmlns:a="http://schemas.openxmlformats.org/drawingml/2006/main">
-              <a:ext uri="{FF2B5EF4-FFF2-40B4-BE49-F238E27FC236}">
-                <a16:creationId xmlns:a16="http://schemas.microsoft.com/office/drawing/2014/main" id="{DDFF16B4-4372-4B91-B832-718636E289EC}"/>
-              </a:ext>
-            </a:extLst>
-          </p:cNvPr>
-          <p:cNvSpPr>
-            <a:spLocks xmlns:a="http://schemas.openxmlformats.org/drawingml/2006/main" noGrp="1"/>
-          </p:cNvSpPr>
-          <p:nvPr/>
-        </p:nvSpPr>
-        <p:spPr>
-          <a:xfrm xmlns:a="http://schemas.openxmlformats.org/drawingml/2006/main">
-            <a:off x="2562225" y="4210050"/>
-            <a:ext cx="3048000" cy="542925"/>
-          </a:xfrm>
-          <a:prstGeom xmlns:a="http://schemas.openxmlformats.org/drawingml/2006/main" prst="rect">
-            <a:avLst/>
-          </a:prstGeom>
-          <a:noFill xmlns:a="http://schemas.openxmlformats.org/drawingml/2006/main"/>
-          <a:ln xmlns:a="http://schemas.openxmlformats.org/drawingml/2006/main" w="0">
-            <a:noFill/>
-          </a:ln>
-        </p:spPr>
-        <p:txBody>
-          <a:bodyPr xmlns:a="http://schemas.openxmlformats.org/drawingml/2006/main" wrap="square" lIns="0" tIns="0" rIns="0" bIns="0" anchor="t">
-            <a:noAutofit/>
-          </a:bodyPr>
-          <a:lstStyle xmlns:a="http://schemas.openxmlformats.org/drawingml/2006/main"/>
-          <a:p xmlns:a="http://schemas.openxmlformats.org/drawingml/2006/main">
-            <a:pPr>
-              <a:defRPr sz="2400" b="0">
-                <a:solidFill>
-                  <a:srgbClr val="6B7265"/>
-                </a:solidFill>
-                <a:latin typeface="Pretendard"/>
-                <a:ea typeface="Pretendard"/>
-                <a:cs typeface="Pretendard"/>
-              </a:defRPr>
-            </a:pPr>
-            <a:r>
-              <a:rPr sz="2400" b="0">
-                <a:solidFill>
-                  <a:srgbClr val="6B7265"/>
-                </a:solidFill>
-                <a:latin typeface="Pretendard"/>
-                <a:ea typeface="Pretendard"/>
-                <a:cs typeface="Pretendard"/>
-              </a:rPr>
-              <a:t>minutes</a:t>
-            </a:r>
-          </a:p>
-        </p:txBody>
-      </p:sp>
-      <p:sp>
-        <p:nvSpPr>
-          <p:cNvPr id="6" name="">
-            <a:extLst xmlns:a="http://schemas.openxmlformats.org/drawingml/2006/main">
-              <a:ext uri="{FF2B5EF4-FFF2-40B4-BE49-F238E27FC236}">
-                <a16:creationId xmlns:a16="http://schemas.microsoft.com/office/drawing/2014/main" id="{10336960-E182-4359-86F2-DF001E93BB6E}"/>
-              </a:ext>
-            </a:extLst>
-          </p:cNvPr>
-          <p:cNvSpPr>
-            <a:spLocks xmlns:a="http://schemas.openxmlformats.org/drawingml/2006/main" noGrp="1"/>
-          </p:cNvSpPr>
-          <p:nvPr/>
-        </p:nvSpPr>
-        <p:spPr>
-          <a:xfrm xmlns:a="http://schemas.openxmlformats.org/drawingml/2006/main">
-            <a:off x="685800" y="6448425"/>
-            <a:ext cx="10191750" cy="228600"/>
-          </a:xfrm>
-          <a:prstGeom xmlns:a="http://schemas.openxmlformats.org/drawingml/2006/main" prst="rect">
-            <a:avLst/>
-          </a:prstGeom>
-          <a:noFill xmlns:a="http://schemas.openxmlformats.org/drawingml/2006/main"/>
-          <a:ln xmlns:a="http://schemas.openxmlformats.org/drawingml/2006/main" w="0">
-            <a:noFill/>
-          </a:ln>
-        </p:spPr>
-        <p:txBody>
-          <a:bodyPr xmlns:a="http://schemas.openxmlformats.org/drawingml/2006/main" wrap="square" lIns="0" tIns="0" rIns="0" bIns="0" anchor="t">
-            <a:noAutofit/>
-          </a:bodyPr>
-          <a:lstStyle xmlns:a="http://schemas.openxmlformats.org/drawingml/2006/main"/>
-          <a:p xmlns:a="http://schemas.openxmlformats.org/drawingml/2006/main">
-            <a:pPr>
+          <a:lstStyle xmlns:a="http://schemas.openxmlformats.org/drawingml/2006/main">
+            <a:defPPr>
               <a:defRPr sz="975" b="0">
                 <a:solidFill>
                   <a:srgbClr val="858B7E"/>
@@ -4471,53 +9276,8 @@
                 <a:ea typeface="Pretendard"/>
                 <a:cs typeface="Pretendard"/>
               </a:defRPr>
-            </a:pPr>
-            <a:r>
-              <a:rPr sz="975" b="0">
-                <a:solidFill>
-                  <a:srgbClr val="858B7E"/>
-                </a:solidFill>
-                <a:latin typeface="Pretendard"/>
-                <a:ea typeface="Pretendard"/>
-                <a:cs typeface="Pretendard"/>
-              </a:rPr>
-              <a:t>Jinmo Koo · HIGHST Urology</a:t>
-            </a:r>
-          </a:p>
-        </p:txBody>
-      </p:sp>
-      <p:sp>
-        <p:nvSpPr>
-          <p:cNvPr id="7" name="">
-            <a:extLst xmlns:a="http://schemas.openxmlformats.org/drawingml/2006/main">
-              <a:ext uri="{FF2B5EF4-FFF2-40B4-BE49-F238E27FC236}">
-                <a16:creationId xmlns:a16="http://schemas.microsoft.com/office/drawing/2014/main" id="{0DA7A5DF-02C4-4F8D-A3DD-72F550B6C3BA}"/>
-              </a:ext>
-            </a:extLst>
-          </p:cNvPr>
-          <p:cNvSpPr>
-            <a:spLocks xmlns:a="http://schemas.openxmlformats.org/drawingml/2006/main" noGrp="1"/>
-          </p:cNvSpPr>
-          <p:nvPr/>
-        </p:nvSpPr>
-        <p:spPr>
-          <a:xfrm xmlns:a="http://schemas.openxmlformats.org/drawingml/2006/main">
-            <a:off x="11134725" y="6448425"/>
-            <a:ext cx="371475" cy="228600"/>
-          </a:xfrm>
-          <a:prstGeom xmlns:a="http://schemas.openxmlformats.org/drawingml/2006/main" prst="rect">
-            <a:avLst/>
-          </a:prstGeom>
-          <a:noFill xmlns:a="http://schemas.openxmlformats.org/drawingml/2006/main"/>
-          <a:ln xmlns:a="http://schemas.openxmlformats.org/drawingml/2006/main" w="0">
-            <a:noFill/>
-          </a:ln>
-        </p:spPr>
-        <p:txBody>
-          <a:bodyPr xmlns:a="http://schemas.openxmlformats.org/drawingml/2006/main" wrap="square" lIns="0" tIns="0" rIns="0" bIns="0" anchor="t">
-            <a:noAutofit/>
-          </a:bodyPr>
-          <a:lstStyle xmlns:a="http://schemas.openxmlformats.org/drawingml/2006/main"/>
+            </a:defPPr>
+          </a:lstStyle>
           <a:p xmlns:a="http://schemas.openxmlformats.org/drawingml/2006/main">
             <a:pPr>
               <a:defRPr sz="975" b="0">
@@ -4546,7 +9306,7 @@
     </p:spTree>
     <p:extLst>
       <p:ext uri="{BB962C8B-B14F-4D97-AF65-F5344CB8AC3E}">
-        <p14:creationId xmlns:p14="http://schemas.microsoft.com/office/powerpoint/2010/main" val="599440703"/>
+        <p14:creationId xmlns:p14="http://schemas.microsoft.com/office/powerpoint/2010/main" val="1262187417"/>
       </p:ext>
     </p:extLst>
   </p:cSld>
@@ -4574,10 +9334,10 @@
       </p:grpSpPr>
       <p:sp>
         <p:nvSpPr>
-          <p:cNvPr id="6" name="">
-            <a:extLst xmlns:a="http://schemas.openxmlformats.org/drawingml/2006/main">
-              <a:ext uri="{FF2B5EF4-FFF2-40B4-BE49-F238E27FC236}">
-                <a16:creationId xmlns:a16="http://schemas.microsoft.com/office/drawing/2014/main" id="{1DDCA4E1-C97E-427F-8A97-036D98E69FB1}"/>
+          <p:cNvPr id="7" name="">
+            <a:extLst xmlns:a="http://schemas.openxmlformats.org/drawingml/2006/main">
+              <a:ext uri="{FF2B5EF4-FFF2-40B4-BE49-F238E27FC236}">
+                <a16:creationId xmlns:a16="http://schemas.microsoft.com/office/drawing/2014/main" id="{1EF6444E-05B3-48B9-9BE6-7DBF6EEB14E2}"/>
               </a:ext>
             </a:extLst>
           </p:cNvPr>
@@ -4603,7 +9363,18 @@
           <a:bodyPr xmlns:a="http://schemas.openxmlformats.org/drawingml/2006/main" wrap="square" lIns="0" tIns="0" rIns="0" bIns="0" anchor="t">
             <a:noAutofit/>
           </a:bodyPr>
-          <a:lstStyle xmlns:a="http://schemas.openxmlformats.org/drawingml/2006/main"/>
+          <a:lstStyle xmlns:a="http://schemas.openxmlformats.org/drawingml/2006/main">
+            <a:defPPr>
+              <a:defRPr sz="1050" b="1">
+                <a:solidFill>
+                  <a:srgbClr val="9B7744"/>
+                </a:solidFill>
+                <a:latin typeface="Pretendard"/>
+                <a:ea typeface="Pretendard"/>
+                <a:cs typeface="Pretendard"/>
+              </a:defRPr>
+            </a:defPPr>
+          </a:lstStyle>
           <a:p xmlns:a="http://schemas.openxmlformats.org/drawingml/2006/main">
             <a:pPr>
               <a:defRPr sz="1050" b="1">
@@ -4624,7 +9395,7 @@
                 <a:ea typeface="Pretendard"/>
                 <a:cs typeface="Pretendard"/>
               </a:rPr>
-              <a:t>DISCUSSION</a:t>
+              <a:t>CLINICAL CASES / CASE 2</a:t>
             </a:r>
           </a:p>
         </p:txBody>
@@ -4634,7 +9405,7 @@
           <p:cNvPr id="2" name="">
             <a:extLst xmlns:a="http://schemas.openxmlformats.org/drawingml/2006/main">
               <a:ext uri="{FF2B5EF4-FFF2-40B4-BE49-F238E27FC236}">
-                <a16:creationId xmlns:a16="http://schemas.microsoft.com/office/drawing/2014/main" id="{313C6C77-900B-4F0F-A36E-E7B8DC60081A}"/>
+                <a16:creationId xmlns:a16="http://schemas.microsoft.com/office/drawing/2014/main" id="{1938ABD2-93CD-49D9-8706-A37EA8D107CB}"/>
               </a:ext>
             </a:extLst>
           </p:cNvPr>
@@ -4660,7 +9431,18 @@
           <a:bodyPr xmlns:a="http://schemas.openxmlformats.org/drawingml/2006/main" wrap="square" lIns="0" tIns="0" rIns="0" bIns="0" anchor="t">
             <a:noAutofit/>
           </a:bodyPr>
-          <a:lstStyle xmlns:a="http://schemas.openxmlformats.org/drawingml/2006/main"/>
+          <a:lstStyle xmlns:a="http://schemas.openxmlformats.org/drawingml/2006/main">
+            <a:defPPr>
+              <a:defRPr sz="3450" b="1">
+                <a:solidFill>
+                  <a:srgbClr val="1B1D19"/>
+                </a:solidFill>
+                <a:latin typeface="Pretendard"/>
+                <a:ea typeface="Pretendard"/>
+                <a:cs typeface="Pretendard"/>
+              </a:defRPr>
+            </a:defPPr>
+          </a:lstStyle>
           <a:p xmlns:a="http://schemas.openxmlformats.org/drawingml/2006/main">
             <a:pPr>
               <a:defRPr sz="3450" b="1">
@@ -4681,7 +9463,7 @@
                 <a:ea typeface="Pretendard"/>
                 <a:cs typeface="Pretendard"/>
               </a:rPr>
-              <a:t>Discussion</a:t>
+              <a:t>Circumcision-line Incision</a:t>
             </a:r>
           </a:p>
         </p:txBody>
@@ -4691,19 +9473,79 @@
           <p:cNvPr id="3" name="">
             <a:extLst xmlns:a="http://schemas.openxmlformats.org/drawingml/2006/main">
               <a:ext uri="{FF2B5EF4-FFF2-40B4-BE49-F238E27FC236}">
-                <a16:creationId xmlns:a16="http://schemas.microsoft.com/office/drawing/2014/main" id="{A042EF0E-636E-4325-AE0A-22A0619C5C83}"/>
-              </a:ext>
-            </a:extLst>
-          </p:cNvPr>
-          <p:cNvSpPr>
-            <a:spLocks xmlns:a="http://schemas.openxmlformats.org/drawingml/2006/main" noGrp="1"/>
-          </p:cNvSpPr>
-          <p:nvPr/>
-        </p:nvSpPr>
-        <p:spPr>
-          <a:xfrm xmlns:a="http://schemas.openxmlformats.org/drawingml/2006/main">
-            <a:off x="685800" y="3143250"/>
-            <a:ext cx="10477500" cy="857250"/>
+                <a16:creationId xmlns:a16="http://schemas.microsoft.com/office/drawing/2014/main" id="{EB331DD9-45E7-47C1-848D-C802A9BBB777}"/>
+              </a:ext>
+            </a:extLst>
+          </p:cNvPr>
+          <p:cNvSpPr>
+            <a:spLocks xmlns:a="http://schemas.openxmlformats.org/drawingml/2006/main" noGrp="1"/>
+          </p:cNvSpPr>
+          <p:nvPr/>
+        </p:nvSpPr>
+        <p:spPr>
+          <a:xfrm xmlns:a="http://schemas.openxmlformats.org/drawingml/2006/main">
+            <a:off x="685800" y="2476500"/>
+            <a:ext cx="10820400" cy="3524250"/>
+          </a:xfrm>
+          <a:prstGeom xmlns:a="http://schemas.openxmlformats.org/drawingml/2006/main" prst="rect">
+            <a:avLst/>
+          </a:prstGeom>
+          <a:solidFill xmlns:a="http://schemas.openxmlformats.org/drawingml/2006/main">
+            <a:srgbClr val="F7F7F3"/>
+          </a:solidFill>
+          <a:ln xmlns:a="http://schemas.openxmlformats.org/drawingml/2006/main" w="0">
+            <a:noFill/>
+          </a:ln>
+        </p:spPr>
+      </p:sp>
+      <p:sp>
+        <p:nvSpPr>
+          <p:cNvPr id="4" name="">
+            <a:extLst xmlns:a="http://schemas.openxmlformats.org/drawingml/2006/main">
+              <a:ext uri="{FF2B5EF4-FFF2-40B4-BE49-F238E27FC236}">
+                <a16:creationId xmlns:a16="http://schemas.microsoft.com/office/drawing/2014/main" id="{45862A7A-1B3C-4716-8525-B789BEDE51C7}"/>
+              </a:ext>
+            </a:extLst>
+          </p:cNvPr>
+          <p:cNvSpPr>
+            <a:spLocks xmlns:a="http://schemas.openxmlformats.org/drawingml/2006/main" noGrp="1"/>
+          </p:cNvSpPr>
+          <p:nvPr/>
+        </p:nvSpPr>
+        <p:spPr>
+          <a:xfrm xmlns:a="http://schemas.openxmlformats.org/drawingml/2006/main">
+            <a:off x="685800" y="2476500"/>
+            <a:ext cx="10820400" cy="9525"/>
+          </a:xfrm>
+          <a:prstGeom xmlns:a="http://schemas.openxmlformats.org/drawingml/2006/main" prst="rect">
+            <a:avLst/>
+          </a:prstGeom>
+          <a:solidFill xmlns:a="http://schemas.openxmlformats.org/drawingml/2006/main">
+            <a:srgbClr val="DEDFD6"/>
+          </a:solidFill>
+          <a:ln xmlns:a="http://schemas.openxmlformats.org/drawingml/2006/main" w="0">
+            <a:noFill/>
+          </a:ln>
+        </p:spPr>
+      </p:sp>
+      <p:sp>
+        <p:nvSpPr>
+          <p:cNvPr id="5" name="">
+            <a:extLst xmlns:a="http://schemas.openxmlformats.org/drawingml/2006/main">
+              <a:ext uri="{FF2B5EF4-FFF2-40B4-BE49-F238E27FC236}">
+                <a16:creationId xmlns:a16="http://schemas.microsoft.com/office/drawing/2014/main" id="{5CF3D837-3167-44C3-B0DA-9E41992E9134}"/>
+              </a:ext>
+            </a:extLst>
+          </p:cNvPr>
+          <p:cNvSpPr>
+            <a:spLocks xmlns:a="http://schemas.openxmlformats.org/drawingml/2006/main" noGrp="1"/>
+          </p:cNvSpPr>
+          <p:nvPr/>
+        </p:nvSpPr>
+        <p:spPr>
+          <a:xfrm xmlns:a="http://schemas.openxmlformats.org/drawingml/2006/main">
+            <a:off x="685800" y="6448425"/>
+            <a:ext cx="10191750" cy="228600"/>
           </a:xfrm>
           <a:prstGeom xmlns:a="http://schemas.openxmlformats.org/drawingml/2006/main" prst="rect">
             <a:avLst/>
@@ -4717,12 +9559,23 @@
           <a:bodyPr xmlns:a="http://schemas.openxmlformats.org/drawingml/2006/main" wrap="square" lIns="0" tIns="0" rIns="0" bIns="0" anchor="t">
             <a:noAutofit/>
           </a:bodyPr>
-          <a:lstStyle xmlns:a="http://schemas.openxmlformats.org/drawingml/2006/main"/>
+          <a:lstStyle xmlns:a="http://schemas.openxmlformats.org/drawingml/2006/main">
+            <a:defPPr>
+              <a:defRPr sz="975" b="0">
+                <a:solidFill>
+                  <a:srgbClr val="858B7E"/>
+                </a:solidFill>
+                <a:latin typeface="Pretendard"/>
+                <a:ea typeface="Pretendard"/>
+                <a:cs typeface="Pretendard"/>
+              </a:defRPr>
+            </a:defPPr>
+          </a:lstStyle>
           <a:p xmlns:a="http://schemas.openxmlformats.org/drawingml/2006/main">
             <a:pPr>
-              <a:defRPr sz="3225" b="0">
-                <a:solidFill>
-                  <a:srgbClr val="6B7265"/>
+              <a:defRPr sz="975" b="0">
+                <a:solidFill>
+                  <a:srgbClr val="858B7E"/>
                 </a:solidFill>
                 <a:latin typeface="Pretendard"/>
                 <a:ea typeface="Pretendard"/>
@@ -4730,37 +9583,37 @@
               </a:defRPr>
             </a:pPr>
             <a:r>
-              <a:rPr sz="3225" b="0">
-                <a:solidFill>
-                  <a:srgbClr val="6B7265"/>
+              <a:rPr sz="975" b="0">
+                <a:solidFill>
+                  <a:srgbClr val="858B7E"/>
                 </a:solidFill>
                 <a:latin typeface="Pretendard"/>
                 <a:ea typeface="Pretendard"/>
                 <a:cs typeface="Pretendard"/>
               </a:rPr>
-              <a:t>Questions &amp; Answers</a:t>
-            </a:r>
-          </a:p>
-        </p:txBody>
-      </p:sp>
-      <p:sp>
-        <p:nvSpPr>
-          <p:cNvPr id="4" name="">
-            <a:extLst xmlns:a="http://schemas.openxmlformats.org/drawingml/2006/main">
-              <a:ext uri="{FF2B5EF4-FFF2-40B4-BE49-F238E27FC236}">
-                <a16:creationId xmlns:a16="http://schemas.microsoft.com/office/drawing/2014/main" id="{8100BFF6-A655-47DB-9B6C-2A75E340A3A8}"/>
-              </a:ext>
-            </a:extLst>
-          </p:cNvPr>
-          <p:cNvSpPr>
-            <a:spLocks xmlns:a="http://schemas.openxmlformats.org/drawingml/2006/main" noGrp="1"/>
-          </p:cNvSpPr>
-          <p:nvPr/>
-        </p:nvSpPr>
-        <p:spPr>
-          <a:xfrm xmlns:a="http://schemas.openxmlformats.org/drawingml/2006/main">
-            <a:off x="685800" y="6448425"/>
-            <a:ext cx="10191750" cy="228600"/>
+              <a:t>Jinmo Koo · HIGHST Urology</a:t>
+            </a:r>
+          </a:p>
+        </p:txBody>
+      </p:sp>
+      <p:sp>
+        <p:nvSpPr>
+          <p:cNvPr id="6" name="">
+            <a:extLst xmlns:a="http://schemas.openxmlformats.org/drawingml/2006/main">
+              <a:ext uri="{FF2B5EF4-FFF2-40B4-BE49-F238E27FC236}">
+                <a16:creationId xmlns:a16="http://schemas.microsoft.com/office/drawing/2014/main" id="{E2268D9C-0E15-49A3-89D4-94F46CBF47C5}"/>
+              </a:ext>
+            </a:extLst>
+          </p:cNvPr>
+          <p:cNvSpPr>
+            <a:spLocks xmlns:a="http://schemas.openxmlformats.org/drawingml/2006/main" noGrp="1"/>
+          </p:cNvSpPr>
+          <p:nvPr/>
+        </p:nvSpPr>
+        <p:spPr>
+          <a:xfrm xmlns:a="http://schemas.openxmlformats.org/drawingml/2006/main">
+            <a:off x="11134725" y="6448425"/>
+            <a:ext cx="371475" cy="228600"/>
           </a:xfrm>
           <a:prstGeom xmlns:a="http://schemas.openxmlformats.org/drawingml/2006/main" prst="rect">
             <a:avLst/>
@@ -4774,7 +9627,18 @@
           <a:bodyPr xmlns:a="http://schemas.openxmlformats.org/drawingml/2006/main" wrap="square" lIns="0" tIns="0" rIns="0" bIns="0" anchor="t">
             <a:noAutofit/>
           </a:bodyPr>
-          <a:lstStyle xmlns:a="http://schemas.openxmlformats.org/drawingml/2006/main"/>
+          <a:lstStyle xmlns:a="http://schemas.openxmlformats.org/drawingml/2006/main">
+            <a:defPPr>
+              <a:defRPr sz="975" b="0">
+                <a:solidFill>
+                  <a:srgbClr val="858B7E"/>
+                </a:solidFill>
+                <a:latin typeface="Pretendard"/>
+                <a:ea typeface="Pretendard"/>
+                <a:cs typeface="Pretendard"/>
+              </a:defRPr>
+            </a:defPPr>
+          </a:lstStyle>
           <a:p xmlns:a="http://schemas.openxmlformats.org/drawingml/2006/main">
             <a:pPr>
               <a:defRPr sz="975" b="0">
@@ -4795,29 +9659,58 @@
                 <a:ea typeface="Pretendard"/>
                 <a:cs typeface="Pretendard"/>
               </a:rPr>
-              <a:t>Jinmo Koo · HIGHST Urology</a:t>
-            </a:r>
-          </a:p>
-        </p:txBody>
-      </p:sp>
-      <p:sp>
-        <p:nvSpPr>
-          <p:cNvPr id="5" name="">
-            <a:extLst xmlns:a="http://schemas.openxmlformats.org/drawingml/2006/main">
-              <a:ext uri="{FF2B5EF4-FFF2-40B4-BE49-F238E27FC236}">
-                <a16:creationId xmlns:a16="http://schemas.microsoft.com/office/drawing/2014/main" id="{66AE2689-E21F-4C0C-85C7-045F5D146FF4}"/>
-              </a:ext>
-            </a:extLst>
-          </p:cNvPr>
-          <p:cNvSpPr>
-            <a:spLocks xmlns:a="http://schemas.openxmlformats.org/drawingml/2006/main" noGrp="1"/>
-          </p:cNvSpPr>
-          <p:nvPr/>
-        </p:nvSpPr>
-        <p:spPr>
-          <a:xfrm xmlns:a="http://schemas.openxmlformats.org/drawingml/2006/main">
-            <a:off x="11134725" y="6448425"/>
-            <a:ext cx="371475" cy="228600"/>
+              <a:t>07</a:t>
+            </a:r>
+          </a:p>
+        </p:txBody>
+      </p:sp>
+    </p:spTree>
+    <p:extLst>
+      <p:ext uri="{BB962C8B-B14F-4D97-AF65-F5344CB8AC3E}">
+        <p14:creationId xmlns:p14="http://schemas.microsoft.com/office/powerpoint/2010/main" val="1958312374"/>
+      </p:ext>
+    </p:extLst>
+  </p:cSld>
+</p:sld>
+</file>
+
+<file path=ppt/slides/slide8.xml><?xml version="1.0" encoding="utf-8"?>
+<p:sld xmlns:p="http://schemas.openxmlformats.org/presentationml/2006/main">
+  <p:cSld>
+    <p:bg>
+      <p:bgPr>
+        <a:solidFill xmlns:a="http://schemas.openxmlformats.org/drawingml/2006/main">
+          <a:srgbClr val="FFFFFF"/>
+        </a:solidFill>
+      </p:bgPr>
+    </p:bg>
+    <p:spTree>
+      <p:nvGrpSpPr>
+        <p:cNvPr id="1" name=""/>
+        <p:cNvGrpSpPr/>
+        <p:nvPr/>
+      </p:nvGrpSpPr>
+      <p:grpSpPr>
+        <a:xfrm xmlns:a="http://schemas.openxmlformats.org/drawingml/2006/main"/>
+      </p:grpSpPr>
+      <p:sp>
+        <p:nvSpPr>
+          <p:cNvPr id="7" name="">
+            <a:extLst xmlns:a="http://schemas.openxmlformats.org/drawingml/2006/main">
+              <a:ext uri="{FF2B5EF4-FFF2-40B4-BE49-F238E27FC236}">
+                <a16:creationId xmlns:a16="http://schemas.microsoft.com/office/drawing/2014/main" id="{D466A3F6-32AE-4398-A580-801E9483DB3B}"/>
+              </a:ext>
+            </a:extLst>
+          </p:cNvPr>
+          <p:cNvSpPr>
+            <a:spLocks xmlns:a="http://schemas.openxmlformats.org/drawingml/2006/main" noGrp="1"/>
+          </p:cNvSpPr>
+          <p:nvPr/>
+        </p:nvSpPr>
+        <p:spPr>
+          <a:xfrm xmlns:a="http://schemas.openxmlformats.org/drawingml/2006/main">
+            <a:off x="685800" y="619125"/>
+            <a:ext cx="10668000" cy="247650"/>
           </a:xfrm>
           <a:prstGeom xmlns:a="http://schemas.openxmlformats.org/drawingml/2006/main" prst="rect">
             <a:avLst/>
@@ -4831,7 +9724,214 @@
           <a:bodyPr xmlns:a="http://schemas.openxmlformats.org/drawingml/2006/main" wrap="square" lIns="0" tIns="0" rIns="0" bIns="0" anchor="t">
             <a:noAutofit/>
           </a:bodyPr>
-          <a:lstStyle xmlns:a="http://schemas.openxmlformats.org/drawingml/2006/main"/>
+          <a:lstStyle xmlns:a="http://schemas.openxmlformats.org/drawingml/2006/main">
+            <a:defPPr>
+              <a:defRPr sz="1050" b="1">
+                <a:solidFill>
+                  <a:srgbClr val="9B7744"/>
+                </a:solidFill>
+                <a:latin typeface="Pretendard"/>
+                <a:ea typeface="Pretendard"/>
+                <a:cs typeface="Pretendard"/>
+              </a:defRPr>
+            </a:defPPr>
+          </a:lstStyle>
+          <a:p xmlns:a="http://schemas.openxmlformats.org/drawingml/2006/main">
+            <a:pPr>
+              <a:defRPr sz="1050" b="1">
+                <a:solidFill>
+                  <a:srgbClr val="9B7744"/>
+                </a:solidFill>
+                <a:latin typeface="Pretendard"/>
+                <a:ea typeface="Pretendard"/>
+                <a:cs typeface="Pretendard"/>
+              </a:defRPr>
+            </a:pPr>
+            <a:r>
+              <a:rPr sz="1050" b="1">
+                <a:solidFill>
+                  <a:srgbClr val="9B7744"/>
+                </a:solidFill>
+                <a:latin typeface="Pretendard"/>
+                <a:ea typeface="Pretendard"/>
+                <a:cs typeface="Pretendard"/>
+              </a:rPr>
+              <a:t>CLINICAL CASES / CASE 3</a:t>
+            </a:r>
+          </a:p>
+        </p:txBody>
+      </p:sp>
+      <p:sp>
+        <p:nvSpPr>
+          <p:cNvPr id="2" name="">
+            <a:extLst xmlns:a="http://schemas.openxmlformats.org/drawingml/2006/main">
+              <a:ext uri="{FF2B5EF4-FFF2-40B4-BE49-F238E27FC236}">
+                <a16:creationId xmlns:a16="http://schemas.microsoft.com/office/drawing/2014/main" id="{F7F96C13-E289-4BC5-9CD2-A157E5B9311D}"/>
+              </a:ext>
+            </a:extLst>
+          </p:cNvPr>
+          <p:cNvSpPr>
+            <a:spLocks xmlns:a="http://schemas.openxmlformats.org/drawingml/2006/main" noGrp="1"/>
+          </p:cNvSpPr>
+          <p:nvPr/>
+        </p:nvSpPr>
+        <p:spPr>
+          <a:xfrm xmlns:a="http://schemas.openxmlformats.org/drawingml/2006/main">
+            <a:off x="685800" y="1047750"/>
+            <a:ext cx="10820400" cy="1085850"/>
+          </a:xfrm>
+          <a:prstGeom xmlns:a="http://schemas.openxmlformats.org/drawingml/2006/main" prst="rect">
+            <a:avLst/>
+          </a:prstGeom>
+          <a:noFill xmlns:a="http://schemas.openxmlformats.org/drawingml/2006/main"/>
+          <a:ln xmlns:a="http://schemas.openxmlformats.org/drawingml/2006/main" w="0">
+            <a:noFill/>
+          </a:ln>
+        </p:spPr>
+        <p:txBody>
+          <a:bodyPr xmlns:a="http://schemas.openxmlformats.org/drawingml/2006/main" wrap="square" lIns="0" tIns="0" rIns="0" bIns="0" anchor="t">
+            <a:noAutofit/>
+          </a:bodyPr>
+          <a:lstStyle xmlns:a="http://schemas.openxmlformats.org/drawingml/2006/main">
+            <a:defPPr>
+              <a:defRPr sz="3450" b="1">
+                <a:solidFill>
+                  <a:srgbClr val="1B1D19"/>
+                </a:solidFill>
+                <a:latin typeface="Pretendard"/>
+                <a:ea typeface="Pretendard"/>
+                <a:cs typeface="Pretendard"/>
+              </a:defRPr>
+            </a:defPPr>
+          </a:lstStyle>
+          <a:p xmlns:a="http://schemas.openxmlformats.org/drawingml/2006/main">
+            <a:pPr>
+              <a:defRPr sz="3450" b="1">
+                <a:solidFill>
+                  <a:srgbClr val="1B1D19"/>
+                </a:solidFill>
+                <a:latin typeface="Pretendard"/>
+                <a:ea typeface="Pretendard"/>
+                <a:cs typeface="Pretendard"/>
+              </a:defRPr>
+            </a:pPr>
+            <a:r>
+              <a:rPr sz="3450" b="1">
+                <a:solidFill>
+                  <a:srgbClr val="1B1D19"/>
+                </a:solidFill>
+                <a:latin typeface="Pretendard"/>
+                <a:ea typeface="Pretendard"/>
+                <a:cs typeface="Pretendard"/>
+              </a:rPr>
+              <a:t>Secondary Dermal Grafting</a:t>
+            </a:r>
+          </a:p>
+        </p:txBody>
+      </p:sp>
+      <p:sp>
+        <p:nvSpPr>
+          <p:cNvPr id="3" name="">
+            <a:extLst xmlns:a="http://schemas.openxmlformats.org/drawingml/2006/main">
+              <a:ext uri="{FF2B5EF4-FFF2-40B4-BE49-F238E27FC236}">
+                <a16:creationId xmlns:a16="http://schemas.microsoft.com/office/drawing/2014/main" id="{DB5D83B1-FB32-4F03-A83C-CE0FE3925D6D}"/>
+              </a:ext>
+            </a:extLst>
+          </p:cNvPr>
+          <p:cNvSpPr>
+            <a:spLocks xmlns:a="http://schemas.openxmlformats.org/drawingml/2006/main" noGrp="1"/>
+          </p:cNvSpPr>
+          <p:nvPr/>
+        </p:nvSpPr>
+        <p:spPr>
+          <a:xfrm xmlns:a="http://schemas.openxmlformats.org/drawingml/2006/main">
+            <a:off x="685800" y="2476500"/>
+            <a:ext cx="10820400" cy="3524250"/>
+          </a:xfrm>
+          <a:prstGeom xmlns:a="http://schemas.openxmlformats.org/drawingml/2006/main" prst="rect">
+            <a:avLst/>
+          </a:prstGeom>
+          <a:solidFill xmlns:a="http://schemas.openxmlformats.org/drawingml/2006/main">
+            <a:srgbClr val="F7F7F3"/>
+          </a:solidFill>
+          <a:ln xmlns:a="http://schemas.openxmlformats.org/drawingml/2006/main" w="0">
+            <a:noFill/>
+          </a:ln>
+        </p:spPr>
+      </p:sp>
+      <p:sp>
+        <p:nvSpPr>
+          <p:cNvPr id="4" name="">
+            <a:extLst xmlns:a="http://schemas.openxmlformats.org/drawingml/2006/main">
+              <a:ext uri="{FF2B5EF4-FFF2-40B4-BE49-F238E27FC236}">
+                <a16:creationId xmlns:a16="http://schemas.microsoft.com/office/drawing/2014/main" id="{475E92F1-2928-43A2-A589-9044670B9B41}"/>
+              </a:ext>
+            </a:extLst>
+          </p:cNvPr>
+          <p:cNvSpPr>
+            <a:spLocks xmlns:a="http://schemas.openxmlformats.org/drawingml/2006/main" noGrp="1"/>
+          </p:cNvSpPr>
+          <p:nvPr/>
+        </p:nvSpPr>
+        <p:spPr>
+          <a:xfrm xmlns:a="http://schemas.openxmlformats.org/drawingml/2006/main">
+            <a:off x="685800" y="2476500"/>
+            <a:ext cx="10820400" cy="9525"/>
+          </a:xfrm>
+          <a:prstGeom xmlns:a="http://schemas.openxmlformats.org/drawingml/2006/main" prst="rect">
+            <a:avLst/>
+          </a:prstGeom>
+          <a:solidFill xmlns:a="http://schemas.openxmlformats.org/drawingml/2006/main">
+            <a:srgbClr val="DEDFD6"/>
+          </a:solidFill>
+          <a:ln xmlns:a="http://schemas.openxmlformats.org/drawingml/2006/main" w="0">
+            <a:noFill/>
+          </a:ln>
+        </p:spPr>
+      </p:sp>
+      <p:sp>
+        <p:nvSpPr>
+          <p:cNvPr id="5" name="">
+            <a:extLst xmlns:a="http://schemas.openxmlformats.org/drawingml/2006/main">
+              <a:ext uri="{FF2B5EF4-FFF2-40B4-BE49-F238E27FC236}">
+                <a16:creationId xmlns:a16="http://schemas.microsoft.com/office/drawing/2014/main" id="{3193C1B5-E6A2-470E-8870-6BB97D4F224A}"/>
+              </a:ext>
+            </a:extLst>
+          </p:cNvPr>
+          <p:cNvSpPr>
+            <a:spLocks xmlns:a="http://schemas.openxmlformats.org/drawingml/2006/main" noGrp="1"/>
+          </p:cNvSpPr>
+          <p:nvPr/>
+        </p:nvSpPr>
+        <p:spPr>
+          <a:xfrm xmlns:a="http://schemas.openxmlformats.org/drawingml/2006/main">
+            <a:off x="685800" y="6448425"/>
+            <a:ext cx="10191750" cy="228600"/>
+          </a:xfrm>
+          <a:prstGeom xmlns:a="http://schemas.openxmlformats.org/drawingml/2006/main" prst="rect">
+            <a:avLst/>
+          </a:prstGeom>
+          <a:noFill xmlns:a="http://schemas.openxmlformats.org/drawingml/2006/main"/>
+          <a:ln xmlns:a="http://schemas.openxmlformats.org/drawingml/2006/main" w="0">
+            <a:noFill/>
+          </a:ln>
+        </p:spPr>
+        <p:txBody>
+          <a:bodyPr xmlns:a="http://schemas.openxmlformats.org/drawingml/2006/main" wrap="square" lIns="0" tIns="0" rIns="0" bIns="0" anchor="t">
+            <a:noAutofit/>
+          </a:bodyPr>
+          <a:lstStyle xmlns:a="http://schemas.openxmlformats.org/drawingml/2006/main">
+            <a:defPPr>
+              <a:defRPr sz="975" b="0">
+                <a:solidFill>
+                  <a:srgbClr val="858B7E"/>
+                </a:solidFill>
+                <a:latin typeface="Pretendard"/>
+                <a:ea typeface="Pretendard"/>
+                <a:cs typeface="Pretendard"/>
+              </a:defRPr>
+            </a:defPPr>
+          </a:lstStyle>
           <a:p xmlns:a="http://schemas.openxmlformats.org/drawingml/2006/main">
             <a:pPr>
               <a:defRPr sz="975" b="0">
@@ -4852,7 +9952,75 @@
                 <a:ea typeface="Pretendard"/>
                 <a:cs typeface="Pretendard"/>
               </a:rPr>
-              <a:t>07</a:t>
+              <a:t>Jinmo Koo · HIGHST Urology</a:t>
+            </a:r>
+          </a:p>
+        </p:txBody>
+      </p:sp>
+      <p:sp>
+        <p:nvSpPr>
+          <p:cNvPr id="6" name="">
+            <a:extLst xmlns:a="http://schemas.openxmlformats.org/drawingml/2006/main">
+              <a:ext uri="{FF2B5EF4-FFF2-40B4-BE49-F238E27FC236}">
+                <a16:creationId xmlns:a16="http://schemas.microsoft.com/office/drawing/2014/main" id="{F8177788-03CB-4E2B-830A-5C5E30F4F195}"/>
+              </a:ext>
+            </a:extLst>
+          </p:cNvPr>
+          <p:cNvSpPr>
+            <a:spLocks xmlns:a="http://schemas.openxmlformats.org/drawingml/2006/main" noGrp="1"/>
+          </p:cNvSpPr>
+          <p:nvPr/>
+        </p:nvSpPr>
+        <p:spPr>
+          <a:xfrm xmlns:a="http://schemas.openxmlformats.org/drawingml/2006/main">
+            <a:off x="11134725" y="6448425"/>
+            <a:ext cx="371475" cy="228600"/>
+          </a:xfrm>
+          <a:prstGeom xmlns:a="http://schemas.openxmlformats.org/drawingml/2006/main" prst="rect">
+            <a:avLst/>
+          </a:prstGeom>
+          <a:noFill xmlns:a="http://schemas.openxmlformats.org/drawingml/2006/main"/>
+          <a:ln xmlns:a="http://schemas.openxmlformats.org/drawingml/2006/main" w="0">
+            <a:noFill/>
+          </a:ln>
+        </p:spPr>
+        <p:txBody>
+          <a:bodyPr xmlns:a="http://schemas.openxmlformats.org/drawingml/2006/main" wrap="square" lIns="0" tIns="0" rIns="0" bIns="0" anchor="t">
+            <a:noAutofit/>
+          </a:bodyPr>
+          <a:lstStyle xmlns:a="http://schemas.openxmlformats.org/drawingml/2006/main">
+            <a:defPPr>
+              <a:defRPr sz="975" b="0">
+                <a:solidFill>
+                  <a:srgbClr val="858B7E"/>
+                </a:solidFill>
+                <a:latin typeface="Pretendard"/>
+                <a:ea typeface="Pretendard"/>
+                <a:cs typeface="Pretendard"/>
+              </a:defRPr>
+            </a:defPPr>
+          </a:lstStyle>
+          <a:p xmlns:a="http://schemas.openxmlformats.org/drawingml/2006/main">
+            <a:pPr>
+              <a:defRPr sz="975" b="0">
+                <a:solidFill>
+                  <a:srgbClr val="858B7E"/>
+                </a:solidFill>
+                <a:latin typeface="Pretendard"/>
+                <a:ea typeface="Pretendard"/>
+                <a:cs typeface="Pretendard"/>
+              </a:defRPr>
+            </a:pPr>
+            <a:r>
+              <a:rPr sz="975" b="0">
+                <a:solidFill>
+                  <a:srgbClr val="858B7E"/>
+                </a:solidFill>
+                <a:latin typeface="Pretendard"/>
+                <a:ea typeface="Pretendard"/>
+                <a:cs typeface="Pretendard"/>
+              </a:rPr>
+              <a:t>08</a:t>
             </a:r>
           </a:p>
         </p:txBody>
@@ -4860,7 +10028,368 @@
     </p:spTree>
     <p:extLst>
       <p:ext uri="{BB962C8B-B14F-4D97-AF65-F5344CB8AC3E}">
-        <p14:creationId xmlns:p14="http://schemas.microsoft.com/office/powerpoint/2010/main" val="1603018472"/>
+        <p14:creationId xmlns:p14="http://schemas.microsoft.com/office/powerpoint/2010/main" val="1475275216"/>
+      </p:ext>
+    </p:extLst>
+  </p:cSld>
+</p:sld>
+</file>
+
+<file path=ppt/slides/slide9.xml><?xml version="1.0" encoding="utf-8"?>
+<p:sld xmlns:p="http://schemas.openxmlformats.org/presentationml/2006/main">
+  <p:cSld>
+    <p:bg>
+      <p:bgPr>
+        <a:solidFill xmlns:a="http://schemas.openxmlformats.org/drawingml/2006/main">
+          <a:srgbClr val="FFFFFF"/>
+        </a:solidFill>
+      </p:bgPr>
+    </p:bg>
+    <p:spTree>
+      <p:nvGrpSpPr>
+        <p:cNvPr id="1" name=""/>
+        <p:cNvGrpSpPr/>
+        <p:nvPr/>
+      </p:nvGrpSpPr>
+      <p:grpSpPr>
+        <a:xfrm xmlns:a="http://schemas.openxmlformats.org/drawingml/2006/main"/>
+      </p:grpSpPr>
+      <p:sp>
+        <p:nvSpPr>
+          <p:cNvPr id="7" name="">
+            <a:extLst xmlns:a="http://schemas.openxmlformats.org/drawingml/2006/main">
+              <a:ext uri="{FF2B5EF4-FFF2-40B4-BE49-F238E27FC236}">
+                <a16:creationId xmlns:a16="http://schemas.microsoft.com/office/drawing/2014/main" id="{E26F117D-C965-46F2-8D0C-AEDE8C63CF1E}"/>
+              </a:ext>
+            </a:extLst>
+          </p:cNvPr>
+          <p:cNvSpPr>
+            <a:spLocks xmlns:a="http://schemas.openxmlformats.org/drawingml/2006/main" noGrp="1"/>
+          </p:cNvSpPr>
+          <p:nvPr/>
+        </p:nvSpPr>
+        <p:spPr>
+          <a:xfrm xmlns:a="http://schemas.openxmlformats.org/drawingml/2006/main">
+            <a:off x="685800" y="619125"/>
+            <a:ext cx="10668000" cy="247650"/>
+          </a:xfrm>
+          <a:prstGeom xmlns:a="http://schemas.openxmlformats.org/drawingml/2006/main" prst="rect">
+            <a:avLst/>
+          </a:prstGeom>
+          <a:noFill xmlns:a="http://schemas.openxmlformats.org/drawingml/2006/main"/>
+          <a:ln xmlns:a="http://schemas.openxmlformats.org/drawingml/2006/main" w="0">
+            <a:noFill/>
+          </a:ln>
+        </p:spPr>
+        <p:txBody>
+          <a:bodyPr xmlns:a="http://schemas.openxmlformats.org/drawingml/2006/main" wrap="square" lIns="0" tIns="0" rIns="0" bIns="0" anchor="t">
+            <a:noAutofit/>
+          </a:bodyPr>
+          <a:lstStyle xmlns:a="http://schemas.openxmlformats.org/drawingml/2006/main">
+            <a:defPPr>
+              <a:defRPr sz="1050" b="1">
+                <a:solidFill>
+                  <a:srgbClr val="9B7744"/>
+                </a:solidFill>
+                <a:latin typeface="Pretendard"/>
+                <a:ea typeface="Pretendard"/>
+                <a:cs typeface="Pretendard"/>
+              </a:defRPr>
+            </a:defPPr>
+          </a:lstStyle>
+          <a:p xmlns:a="http://schemas.openxmlformats.org/drawingml/2006/main">
+            <a:pPr>
+              <a:defRPr sz="1050" b="1">
+                <a:solidFill>
+                  <a:srgbClr val="9B7744"/>
+                </a:solidFill>
+                <a:latin typeface="Pretendard"/>
+                <a:ea typeface="Pretendard"/>
+                <a:cs typeface="Pretendard"/>
+              </a:defRPr>
+            </a:pPr>
+            <a:r>
+              <a:rPr sz="1050" b="1">
+                <a:solidFill>
+                  <a:srgbClr val="9B7744"/>
+                </a:solidFill>
+                <a:latin typeface="Pretendard"/>
+                <a:ea typeface="Pretendard"/>
+                <a:cs typeface="Pretendard"/>
+              </a:rPr>
+              <a:t>CLINICAL CASES / CASE 4</a:t>
+            </a:r>
+          </a:p>
+        </p:txBody>
+      </p:sp>
+      <p:sp>
+        <p:nvSpPr>
+          <p:cNvPr id="2" name="">
+            <a:extLst xmlns:a="http://schemas.openxmlformats.org/drawingml/2006/main">
+              <a:ext uri="{FF2B5EF4-FFF2-40B4-BE49-F238E27FC236}">
+                <a16:creationId xmlns:a16="http://schemas.microsoft.com/office/drawing/2014/main" id="{7F8A4A38-A66D-438F-A285-706B31E85F06}"/>
+              </a:ext>
+            </a:extLst>
+          </p:cNvPr>
+          <p:cNvSpPr>
+            <a:spLocks xmlns:a="http://schemas.openxmlformats.org/drawingml/2006/main" noGrp="1"/>
+          </p:cNvSpPr>
+          <p:nvPr/>
+        </p:nvSpPr>
+        <p:spPr>
+          <a:xfrm xmlns:a="http://schemas.openxmlformats.org/drawingml/2006/main">
+            <a:off x="685800" y="1047750"/>
+            <a:ext cx="10820400" cy="1085850"/>
+          </a:xfrm>
+          <a:prstGeom xmlns:a="http://schemas.openxmlformats.org/drawingml/2006/main" prst="rect">
+            <a:avLst/>
+          </a:prstGeom>
+          <a:noFill xmlns:a="http://schemas.openxmlformats.org/drawingml/2006/main"/>
+          <a:ln xmlns:a="http://schemas.openxmlformats.org/drawingml/2006/main" w="0">
+            <a:noFill/>
+          </a:ln>
+        </p:spPr>
+        <p:txBody>
+          <a:bodyPr xmlns:a="http://schemas.openxmlformats.org/drawingml/2006/main" wrap="square" lIns="0" tIns="0" rIns="0" bIns="0" anchor="t">
+            <a:noAutofit/>
+          </a:bodyPr>
+          <a:lstStyle xmlns:a="http://schemas.openxmlformats.org/drawingml/2006/main">
+            <a:defPPr>
+              <a:defRPr sz="3450" b="1">
+                <a:solidFill>
+                  <a:srgbClr val="1B1D19"/>
+                </a:solidFill>
+                <a:latin typeface="Pretendard"/>
+                <a:ea typeface="Pretendard"/>
+                <a:cs typeface="Pretendard"/>
+              </a:defRPr>
+            </a:defPPr>
+          </a:lstStyle>
+          <a:p xmlns:a="http://schemas.openxmlformats.org/drawingml/2006/main">
+            <a:pPr>
+              <a:defRPr sz="3450" b="1">
+                <a:solidFill>
+                  <a:srgbClr val="1B1D19"/>
+                </a:solidFill>
+                <a:latin typeface="Pretendard"/>
+                <a:ea typeface="Pretendard"/>
+                <a:cs typeface="Pretendard"/>
+              </a:defRPr>
+            </a:pPr>
+            <a:r>
+              <a:rPr sz="3450" b="1">
+                <a:solidFill>
+                  <a:srgbClr val="1B1D19"/>
+                </a:solidFill>
+                <a:latin typeface="Pretendard"/>
+                <a:ea typeface="Pretendard"/>
+                <a:cs typeface="Pretendard"/>
+              </a:rPr>
+              <a:t>Revision Surgery</a:t>
+            </a:r>
+          </a:p>
+        </p:txBody>
+      </p:sp>
+      <p:sp>
+        <p:nvSpPr>
+          <p:cNvPr id="3" name="">
+            <a:extLst xmlns:a="http://schemas.openxmlformats.org/drawingml/2006/main">
+              <a:ext uri="{FF2B5EF4-FFF2-40B4-BE49-F238E27FC236}">
+                <a16:creationId xmlns:a16="http://schemas.microsoft.com/office/drawing/2014/main" id="{C29630FB-6746-4EE6-A392-31F1D2832346}"/>
+              </a:ext>
+            </a:extLst>
+          </p:cNvPr>
+          <p:cNvSpPr>
+            <a:spLocks xmlns:a="http://schemas.openxmlformats.org/drawingml/2006/main" noGrp="1"/>
+          </p:cNvSpPr>
+          <p:nvPr/>
+        </p:nvSpPr>
+        <p:spPr>
+          <a:xfrm xmlns:a="http://schemas.openxmlformats.org/drawingml/2006/main">
+            <a:off x="685800" y="2476500"/>
+            <a:ext cx="10820400" cy="3524250"/>
+          </a:xfrm>
+          <a:prstGeom xmlns:a="http://schemas.openxmlformats.org/drawingml/2006/main" prst="rect">
+            <a:avLst/>
+          </a:prstGeom>
+          <a:solidFill xmlns:a="http://schemas.openxmlformats.org/drawingml/2006/main">
+            <a:srgbClr val="F7F7F3"/>
+          </a:solidFill>
+          <a:ln xmlns:a="http://schemas.openxmlformats.org/drawingml/2006/main" w="0">
+            <a:noFill/>
+          </a:ln>
+        </p:spPr>
+      </p:sp>
+      <p:sp>
+        <p:nvSpPr>
+          <p:cNvPr id="4" name="">
+            <a:extLst xmlns:a="http://schemas.openxmlformats.org/drawingml/2006/main">
+              <a:ext uri="{FF2B5EF4-FFF2-40B4-BE49-F238E27FC236}">
+                <a16:creationId xmlns:a16="http://schemas.microsoft.com/office/drawing/2014/main" id="{8E8BF48F-6D48-4377-B60C-69C975137443}"/>
+              </a:ext>
+            </a:extLst>
+          </p:cNvPr>
+          <p:cNvSpPr>
+            <a:spLocks xmlns:a="http://schemas.openxmlformats.org/drawingml/2006/main" noGrp="1"/>
+          </p:cNvSpPr>
+          <p:nvPr/>
+        </p:nvSpPr>
+        <p:spPr>
+          <a:xfrm xmlns:a="http://schemas.openxmlformats.org/drawingml/2006/main">
+            <a:off x="685800" y="2476500"/>
+            <a:ext cx="10820400" cy="9525"/>
+          </a:xfrm>
+          <a:prstGeom xmlns:a="http://schemas.openxmlformats.org/drawingml/2006/main" prst="rect">
+            <a:avLst/>
+          </a:prstGeom>
+          <a:solidFill xmlns:a="http://schemas.openxmlformats.org/drawingml/2006/main">
+            <a:srgbClr val="DEDFD6"/>
+          </a:solidFill>
+          <a:ln xmlns:a="http://schemas.openxmlformats.org/drawingml/2006/main" w="0">
+            <a:noFill/>
+          </a:ln>
+        </p:spPr>
+      </p:sp>
+      <p:sp>
+        <p:nvSpPr>
+          <p:cNvPr id="5" name="">
+            <a:extLst xmlns:a="http://schemas.openxmlformats.org/drawingml/2006/main">
+              <a:ext uri="{FF2B5EF4-FFF2-40B4-BE49-F238E27FC236}">
+                <a16:creationId xmlns:a16="http://schemas.microsoft.com/office/drawing/2014/main" id="{B6FC73C6-3792-4FA0-8900-D35457C6281C}"/>
+              </a:ext>
+            </a:extLst>
+          </p:cNvPr>
+          <p:cNvSpPr>
+            <a:spLocks xmlns:a="http://schemas.openxmlformats.org/drawingml/2006/main" noGrp="1"/>
+          </p:cNvSpPr>
+          <p:nvPr/>
+        </p:nvSpPr>
+        <p:spPr>
+          <a:xfrm xmlns:a="http://schemas.openxmlformats.org/drawingml/2006/main">
+            <a:off x="685800" y="6448425"/>
+            <a:ext cx="10191750" cy="228600"/>
+          </a:xfrm>
+          <a:prstGeom xmlns:a="http://schemas.openxmlformats.org/drawingml/2006/main" prst="rect">
+            <a:avLst/>
+          </a:prstGeom>
+          <a:noFill xmlns:a="http://schemas.openxmlformats.org/drawingml/2006/main"/>
+          <a:ln xmlns:a="http://schemas.openxmlformats.org/drawingml/2006/main" w="0">
+            <a:noFill/>
+          </a:ln>
+        </p:spPr>
+        <p:txBody>
+          <a:bodyPr xmlns:a="http://schemas.openxmlformats.org/drawingml/2006/main" wrap="square" lIns="0" tIns="0" rIns="0" bIns="0" anchor="t">
+            <a:noAutofit/>
+          </a:bodyPr>
+          <a:lstStyle xmlns:a="http://schemas.openxmlformats.org/drawingml/2006/main">
+            <a:defPPr>
+              <a:defRPr sz="975" b="0">
+                <a:solidFill>
+                  <a:srgbClr val="858B7E"/>
+                </a:solidFill>
+                <a:latin typeface="Pretendard"/>
+                <a:ea typeface="Pretendard"/>
+                <a:cs typeface="Pretendard"/>
+              </a:defRPr>
+            </a:defPPr>
+          </a:lstStyle>
+          <a:p xmlns:a="http://schemas.openxmlformats.org/drawingml/2006/main">
+            <a:pPr>
+              <a:defRPr sz="975" b="0">
+                <a:solidFill>
+                  <a:srgbClr val="858B7E"/>
+                </a:solidFill>
+                <a:latin typeface="Pretendard"/>
+                <a:ea typeface="Pretendard"/>
+                <a:cs typeface="Pretendard"/>
+              </a:defRPr>
+            </a:pPr>
+            <a:r>
+              <a:rPr sz="975" b="0">
+                <a:solidFill>
+                  <a:srgbClr val="858B7E"/>
+                </a:solidFill>
+                <a:latin typeface="Pretendard"/>
+                <a:ea typeface="Pretendard"/>
+                <a:cs typeface="Pretendard"/>
+              </a:rPr>
+              <a:t>Jinmo Koo · HIGHST Urology</a:t>
+            </a:r>
+          </a:p>
+        </p:txBody>
+      </p:sp>
+      <p:sp>
+        <p:nvSpPr>
+          <p:cNvPr id="6" name="">
+            <a:extLst xmlns:a="http://schemas.openxmlformats.org/drawingml/2006/main">
+              <a:ext uri="{FF2B5EF4-FFF2-40B4-BE49-F238E27FC236}">
+                <a16:creationId xmlns:a16="http://schemas.microsoft.com/office/drawing/2014/main" id="{72BA43B7-87E9-4E07-9911-33427DD427C3}"/>
+              </a:ext>
+            </a:extLst>
+          </p:cNvPr>
+          <p:cNvSpPr>
+            <a:spLocks xmlns:a="http://schemas.openxmlformats.org/drawingml/2006/main" noGrp="1"/>
+          </p:cNvSpPr>
+          <p:nvPr/>
+        </p:nvSpPr>
+        <p:spPr>
+          <a:xfrm xmlns:a="http://schemas.openxmlformats.org/drawingml/2006/main">
+            <a:off x="11134725" y="6448425"/>
+            <a:ext cx="371475" cy="228600"/>
+          </a:xfrm>
+          <a:prstGeom xmlns:a="http://schemas.openxmlformats.org/drawingml/2006/main" prst="rect">
+            <a:avLst/>
+          </a:prstGeom>
+          <a:noFill xmlns:a="http://schemas.openxmlformats.org/drawingml/2006/main"/>
+          <a:ln xmlns:a="http://schemas.openxmlformats.org/drawingml/2006/main" w="0">
+            <a:noFill/>
+          </a:ln>
+        </p:spPr>
+        <p:txBody>
+          <a:bodyPr xmlns:a="http://schemas.openxmlformats.org/drawingml/2006/main" wrap="square" lIns="0" tIns="0" rIns="0" bIns="0" anchor="t">
+            <a:noAutofit/>
+          </a:bodyPr>
+          <a:lstStyle xmlns:a="http://schemas.openxmlformats.org/drawingml/2006/main">
+            <a:defPPr>
+              <a:defRPr sz="975" b="0">
+                <a:solidFill>
+                  <a:srgbClr val="858B7E"/>
+                </a:solidFill>
+                <a:latin typeface="Pretendard"/>
+                <a:ea typeface="Pretendard"/>
+                <a:cs typeface="Pretendard"/>
+              </a:defRPr>
+            </a:defPPr>
+          </a:lstStyle>
+          <a:p xmlns:a="http://schemas.openxmlformats.org/drawingml/2006/main">
+            <a:pPr>
+              <a:defRPr sz="975" b="0">
+                <a:solidFill>
+                  <a:srgbClr val="858B7E"/>
+                </a:solidFill>
+                <a:latin typeface="Pretendard"/>
+                <a:ea typeface="Pretendard"/>
+                <a:cs typeface="Pretendard"/>
+              </a:defRPr>
+            </a:pPr>
+            <a:r>
+              <a:rPr sz="975" b="0">
+                <a:solidFill>
+                  <a:srgbClr val="858B7E"/>
+                </a:solidFill>
+                <a:latin typeface="Pretendard"/>
+                <a:ea typeface="Pretendard"/>
+                <a:cs typeface="Pretendard"/>
+              </a:rPr>
+              <a:t>09</a:t>
+            </a:r>
+          </a:p>
+        </p:txBody>
+      </p:sp>
+    </p:spTree>
+    <p:extLst>
+      <p:ext uri="{BB962C8B-B14F-4D97-AF65-F5344CB8AC3E}">
+        <p14:creationId xmlns:p14="http://schemas.microsoft.com/office/powerpoint/2010/main" val="542315525"/>
       </p:ext>
     </p:extLst>
   </p:cSld>
@@ -4908,16 +10437,16 @@
         <a:srgbClr val="96607D"/>
       </a:folHlink>
     </a:clrScheme>
-    <a:fontScheme name="Office">
+    <a:fontScheme name="">
       <a:majorFont>
-        <a:latin typeface="Calibri Light"/>
-        <a:ea typeface="Calibri Light"/>
-        <a:cs typeface="Calibri Light"/>
+        <a:latin typeface="Aptos"/>
+        <a:ea typeface=""/>
+        <a:cs typeface=""/>
       </a:majorFont>
       <a:minorFont>
-        <a:latin typeface="Calibri"/>
-        <a:ea typeface="Calibri"/>
-        <a:cs typeface="Calibri"/>
+        <a:latin typeface="Aptos"/>
+        <a:ea typeface=""/>
+        <a:cs typeface=""/>
       </a:minorFont>
     </a:fontScheme>
     <a:fmtScheme name="ChatGPT">

--- a/downloads/highst-perioperative-webinar.pptx
+++ b/downloads/highst-perioperative-webinar.pptx
@@ -2,25 +2,27 @@
 <file path=ppt/presentation.xml><?xml version="1.0" encoding="utf-8"?>
 <p:presentation xmlns:p="http://schemas.openxmlformats.org/presentationml/2006/main">
   <p:sldMasterIdLst>
-    <p:sldMasterId xmlns:r="http://schemas.openxmlformats.org/officeDocument/2006/relationships" id="2147483648" r:id="Rcdac964020c64f02"/>
+    <p:sldMasterId xmlns:r="http://schemas.openxmlformats.org/officeDocument/2006/relationships" id="2147483648" r:id="R3ee2d0f966a248e7"/>
   </p:sldMasterIdLst>
   <p:notesMasterIdLst>
-    <p:notesMasterId xmlns:r="http://schemas.openxmlformats.org/officeDocument/2006/relationships" r:id="Rd381d0ac93c64cdf"/>
+    <p:notesMasterId xmlns:r="http://schemas.openxmlformats.org/officeDocument/2006/relationships" r:id="R662b736467ee40c6"/>
   </p:notesMasterIdLst>
   <p:sldIdLst>
-    <p:sldId xmlns:r="http://schemas.openxmlformats.org/officeDocument/2006/relationships" id="256" r:id="R883df41215e9476a"/>
-    <p:sldId xmlns:r="http://schemas.openxmlformats.org/officeDocument/2006/relationships" id="257" r:id="R361fe6cafc884a2f"/>
-    <p:sldId xmlns:r="http://schemas.openxmlformats.org/officeDocument/2006/relationships" id="258" r:id="Rd6d9022cc57f4138"/>
-    <p:sldId xmlns:r="http://schemas.openxmlformats.org/officeDocument/2006/relationships" id="259" r:id="R4ebbeac608954932"/>
-    <p:sldId xmlns:r="http://schemas.openxmlformats.org/officeDocument/2006/relationships" id="260" r:id="Ra87306a1b98a4b66"/>
-    <p:sldId xmlns:r="http://schemas.openxmlformats.org/officeDocument/2006/relationships" id="261" r:id="Rc69b21ed0c334032"/>
-    <p:sldId xmlns:r="http://schemas.openxmlformats.org/officeDocument/2006/relationships" id="262" r:id="Rea80cfc2dfc84b1b"/>
-    <p:sldId xmlns:r="http://schemas.openxmlformats.org/officeDocument/2006/relationships" id="263" r:id="R51c65b9b8f614ac9"/>
-    <p:sldId xmlns:r="http://schemas.openxmlformats.org/officeDocument/2006/relationships" id="264" r:id="R241d719947c64e27"/>
-    <p:sldId xmlns:r="http://schemas.openxmlformats.org/officeDocument/2006/relationships" id="265" r:id="R1b1ccb8d61c44eec"/>
-    <p:sldId xmlns:r="http://schemas.openxmlformats.org/officeDocument/2006/relationships" id="266" r:id="R5f5c0bde7cbf42f9"/>
-    <p:sldId xmlns:r="http://schemas.openxmlformats.org/officeDocument/2006/relationships" id="267" r:id="R45e9c3bf6e5c4148"/>
-    <p:sldId xmlns:r="http://schemas.openxmlformats.org/officeDocument/2006/relationships" id="268" r:id="Ra68bfba97e004b4d"/>
+    <p:sldId xmlns:r="http://schemas.openxmlformats.org/officeDocument/2006/relationships" id="256" r:id="R5ae23c2c2cbc4e2c"/>
+    <p:sldId xmlns:r="http://schemas.openxmlformats.org/officeDocument/2006/relationships" id="257" r:id="Rc6519a8fb2c2492d"/>
+    <p:sldId xmlns:r="http://schemas.openxmlformats.org/officeDocument/2006/relationships" id="258" r:id="R80c16b392c344c00"/>
+    <p:sldId xmlns:r="http://schemas.openxmlformats.org/officeDocument/2006/relationships" id="259" r:id="R6a706f3b62e8485e"/>
+    <p:sldId xmlns:r="http://schemas.openxmlformats.org/officeDocument/2006/relationships" id="260" r:id="Rbfc97fb5a5e744ac"/>
+    <p:sldId xmlns:r="http://schemas.openxmlformats.org/officeDocument/2006/relationships" id="261" r:id="R2b21da0f6fb64faa"/>
+    <p:sldId xmlns:r="http://schemas.openxmlformats.org/officeDocument/2006/relationships" id="262" r:id="Rb894b300af5545fe"/>
+    <p:sldId xmlns:r="http://schemas.openxmlformats.org/officeDocument/2006/relationships" id="263" r:id="Ra60f04e9ce5747ea"/>
+    <p:sldId xmlns:r="http://schemas.openxmlformats.org/officeDocument/2006/relationships" id="264" r:id="R8db459d1f1704378"/>
+    <p:sldId xmlns:r="http://schemas.openxmlformats.org/officeDocument/2006/relationships" id="265" r:id="R827d67de1f7d4901"/>
+    <p:sldId xmlns:r="http://schemas.openxmlformats.org/officeDocument/2006/relationships" id="266" r:id="Rad1aa5f85d024365"/>
+    <p:sldId xmlns:r="http://schemas.openxmlformats.org/officeDocument/2006/relationships" id="267" r:id="R9aa08bb171204ccb"/>
+    <p:sldId xmlns:r="http://schemas.openxmlformats.org/officeDocument/2006/relationships" id="268" r:id="R61a426fd01014238"/>
+    <p:sldId xmlns:r="http://schemas.openxmlformats.org/officeDocument/2006/relationships" id="269" r:id="Rbd40dde7d8ed4d55"/>
+    <p:sldId xmlns:r="http://schemas.openxmlformats.org/officeDocument/2006/relationships" id="270" r:id="R0a6981511179472b"/>
   </p:sldIdLst>
   <p:sldSz cx="12192000" cy="6858000"/>
   <p:notesSz cx="6858000" cy="9144000"/>
@@ -524,7 +526,7 @@
           <a:lstStyle xmlns:a="http://schemas.openxmlformats.org/drawingml/2006/main"/>
           <a:p xmlns:a="http://schemas.openxmlformats.org/drawingml/2006/main">
             <a:r>
-              <a:t>Case 5: Contour Step-off Correction.</a:t>
+              <a:t>Case 3: Secondary Dermal Grafting.</a:t>
             </a:r>
           </a:p>
         </p:txBody>
@@ -594,22 +596,7 @@
           <a:lstStyle xmlns:a="http://schemas.openxmlformats.org/drawingml/2006/main"/>
           <a:p xmlns:a="http://schemas.openxmlformats.org/drawingml/2006/main">
             <a:r>
-              <a:t>These categories are reported in published ADM augmentation literature. They do not represent HIGHST or MegaDerm-specific outcome data. No incidence rates are extrapolated to HIGHST.</a:t>
-            </a:r>
-          </a:p>
-          <a:p xmlns:a="http://schemas.openxmlformats.org/drawingml/2006/main">
-            <a:r>
-              <a:t/>
-            </a:r>
-          </a:p>
-          <a:p xmlns:a="http://schemas.openxmlformats.org/drawingml/2006/main">
-            <a:r>
-              <a:t>Sources</a:t>
-            </a:r>
-          </a:p>
-          <a:p xmlns:a="http://schemas.openxmlformats.org/drawingml/2006/main">
-            <a:r>
-              <a:t>https://pubmed.ncbi.nlm.nih.gov/31420614/</a:t>
+              <a:t>Case 4: Revision Surgery.</a:t>
             </a:r>
           </a:p>
         </p:txBody>
@@ -679,7 +666,7 @@
           <a:lstStyle xmlns:a="http://schemas.openxmlformats.org/drawingml/2006/main"/>
           <a:p xmlns:a="http://schemas.openxmlformats.org/drawingml/2006/main">
             <a:r>
-              <a:t>Postoperative care and dressing technique.</a:t>
+              <a:t>Case 5: Contour Step-off Correction.</a:t>
             </a:r>
           </a:p>
         </p:txBody>
@@ -749,6 +736,161 @@
           <a:lstStyle xmlns:a="http://schemas.openxmlformats.org/drawingml/2006/main"/>
           <a:p xmlns:a="http://schemas.openxmlformats.org/drawingml/2006/main">
             <a:r>
+              <a:t>These categories are reported in published ADM augmentation literature. They do not represent HIGHST or MegaDerm-specific outcome data. No incidence rates are extrapolated to HIGHST.</a:t>
+            </a:r>
+          </a:p>
+          <a:p xmlns:a="http://schemas.openxmlformats.org/drawingml/2006/main">
+            <a:r>
+              <a:t/>
+            </a:r>
+          </a:p>
+          <a:p xmlns:a="http://schemas.openxmlformats.org/drawingml/2006/main">
+            <a:r>
+              <a:t>Sources</a:t>
+            </a:r>
+          </a:p>
+          <a:p xmlns:a="http://schemas.openxmlformats.org/drawingml/2006/main">
+            <a:r>
+              <a:t>https://pubmed.ncbi.nlm.nih.gov/31420614/</a:t>
+            </a:r>
+          </a:p>
+        </p:txBody>
+      </p:sp>
+      <p:sp>
+        <p:nvSpPr>
+          <p:cNvPr id="4" name="Slide Number Placeholder 3"/>
+          <p:cNvSpPr>
+            <a:spLocks xmlns:a="http://schemas.openxmlformats.org/drawingml/2006/main" noGrp="1"/>
+          </p:cNvSpPr>
+          <p:nvPr>
+            <p:ph type="sldNum" idx="5"/>
+          </p:nvPr>
+        </p:nvSpPr>
+        <p:spPr/>
+        <p:txBody>
+          <a:bodyPr xmlns:a="http://schemas.openxmlformats.org/drawingml/2006/main"/>
+          <a:lstStyle xmlns:a="http://schemas.openxmlformats.org/drawingml/2006/main"/>
+          <a:p xmlns:a="http://schemas.openxmlformats.org/drawingml/2006/main"/>
+        </p:txBody>
+      </p:sp>
+    </p:spTree>
+  </p:cSld>
+  <p:clrMapOvr>
+    <a:masterClrMapping xmlns:a="http://schemas.openxmlformats.org/drawingml/2006/main"/>
+  </p:clrMapOvr>
+</p:notes>
+</file>
+
+<file path=ppt/notesSlides/notesSlide14.xml><?xml version="1.0" encoding="utf-8"?>
+<p:notes xmlns:p="http://schemas.openxmlformats.org/presentationml/2006/main">
+  <p:cSld>
+    <p:spTree>
+      <p:nvGrpSpPr>
+        <p:cNvPr id="1" name=""/>
+        <p:cNvGrpSpPr/>
+        <p:nvPr/>
+      </p:nvGrpSpPr>
+      <p:grpSpPr>
+        <a:xfrm xmlns:a="http://schemas.openxmlformats.org/drawingml/2006/main"/>
+      </p:grpSpPr>
+      <p:sp>
+        <p:nvSpPr>
+          <p:cNvPr id="2" name="Slide Image Placeholder 1"/>
+          <p:cNvSpPr>
+            <a:spLocks xmlns:a="http://schemas.openxmlformats.org/drawingml/2006/main" noGrp="1"/>
+          </p:cNvSpPr>
+          <p:nvPr>
+            <p:ph type="sldImg" idx="0"/>
+          </p:nvPr>
+        </p:nvSpPr>
+        <p:spPr/>
+      </p:sp>
+      <p:sp>
+        <p:nvSpPr>
+          <p:cNvPr id="3" name="Notes Placeholder 2"/>
+          <p:cNvSpPr>
+            <a:spLocks xmlns:a="http://schemas.openxmlformats.org/drawingml/2006/main" noGrp="1"/>
+          </p:cNvSpPr>
+          <p:nvPr>
+            <p:ph type="body" idx="1"/>
+          </p:nvPr>
+        </p:nvSpPr>
+        <p:spPr/>
+        <p:txBody>
+          <a:bodyPr xmlns:a="http://schemas.openxmlformats.org/drawingml/2006/main"/>
+          <a:lstStyle xmlns:a="http://schemas.openxmlformats.org/drawingml/2006/main"/>
+          <a:p xmlns:a="http://schemas.openxmlformats.org/drawingml/2006/main">
+            <a:r>
+              <a:t>Postoperative care and dressing technique.</a:t>
+            </a:r>
+          </a:p>
+        </p:txBody>
+      </p:sp>
+      <p:sp>
+        <p:nvSpPr>
+          <p:cNvPr id="4" name="Slide Number Placeholder 3"/>
+          <p:cNvSpPr>
+            <a:spLocks xmlns:a="http://schemas.openxmlformats.org/drawingml/2006/main" noGrp="1"/>
+          </p:cNvSpPr>
+          <p:nvPr>
+            <p:ph type="sldNum" idx="5"/>
+          </p:nvPr>
+        </p:nvSpPr>
+        <p:spPr/>
+        <p:txBody>
+          <a:bodyPr xmlns:a="http://schemas.openxmlformats.org/drawingml/2006/main"/>
+          <a:lstStyle xmlns:a="http://schemas.openxmlformats.org/drawingml/2006/main"/>
+          <a:p xmlns:a="http://schemas.openxmlformats.org/drawingml/2006/main"/>
+        </p:txBody>
+      </p:sp>
+    </p:spTree>
+  </p:cSld>
+  <p:clrMapOvr>
+    <a:masterClrMapping xmlns:a="http://schemas.openxmlformats.org/drawingml/2006/main"/>
+  </p:clrMapOvr>
+</p:notes>
+</file>
+
+<file path=ppt/notesSlides/notesSlide15.xml><?xml version="1.0" encoding="utf-8"?>
+<p:notes xmlns:p="http://schemas.openxmlformats.org/presentationml/2006/main">
+  <p:cSld>
+    <p:spTree>
+      <p:nvGrpSpPr>
+        <p:cNvPr id="1" name=""/>
+        <p:cNvGrpSpPr/>
+        <p:nvPr/>
+      </p:nvGrpSpPr>
+      <p:grpSpPr>
+        <a:xfrm xmlns:a="http://schemas.openxmlformats.org/drawingml/2006/main"/>
+      </p:grpSpPr>
+      <p:sp>
+        <p:nvSpPr>
+          <p:cNvPr id="2" name="Slide Image Placeholder 1"/>
+          <p:cNvSpPr>
+            <a:spLocks xmlns:a="http://schemas.openxmlformats.org/drawingml/2006/main" noGrp="1"/>
+          </p:cNvSpPr>
+          <p:nvPr>
+            <p:ph type="sldImg" idx="0"/>
+          </p:nvPr>
+        </p:nvSpPr>
+        <p:spPr/>
+      </p:sp>
+      <p:sp>
+        <p:nvSpPr>
+          <p:cNvPr id="3" name="Notes Placeholder 2"/>
+          <p:cNvSpPr>
+            <a:spLocks xmlns:a="http://schemas.openxmlformats.org/drawingml/2006/main" noGrp="1"/>
+          </p:cNvSpPr>
+          <p:nvPr>
+            <p:ph type="body" idx="1"/>
+          </p:nvPr>
+        </p:nvSpPr>
+        <p:spPr/>
+        <p:txBody>
+          <a:bodyPr xmlns:a="http://schemas.openxmlformats.org/drawingml/2006/main"/>
+          <a:lstStyle xmlns:a="http://schemas.openxmlformats.org/drawingml/2006/main"/>
+          <a:p xmlns:a="http://schemas.openxmlformats.org/drawingml/2006/main">
+            <a:r>
               <a:t>Thank you.</a:t>
             </a:r>
           </a:p>
@@ -974,7 +1116,7 @@
           <a:lstStyle xmlns:a="http://schemas.openxmlformats.org/drawingml/2006/main"/>
           <a:p xmlns:a="http://schemas.openxmlformats.org/drawingml/2006/main">
             <a:r>
-              <a:t>Blood and urine testing: liver function, blood glucose, inflammatory markers and STI screening are the categories provided by HIGHST. Penile biothesiometry assesses vibration perception thresholds and penile sensitivity. It contributes to the clinical assessment rather than establishing a diagnosis of premature ejaculation by itself.</a:t>
+              <a:t>The preoperative evaluation includes the International Index of Erectile Function (IIEF) and the Premature Ejaculation Diagnostic Tool (PEDT).</a:t>
             </a:r>
           </a:p>
           <a:p xmlns:a="http://schemas.openxmlformats.org/drawingml/2006/main">
@@ -989,7 +1131,12 @@
           </a:p>
           <a:p xmlns:a="http://schemas.openxmlformats.org/drawingml/2006/main">
             <a:r>
-              <a:t>https://pubmed.ncbi.nlm.nih.gov/28874780/</a:t>
+              <a:t>https://pubmed.ncbi.nlm.nih.gov/9187685/</a:t>
+            </a:r>
+          </a:p>
+          <a:p xmlns:a="http://schemas.openxmlformats.org/drawingml/2006/main">
+            <a:r>
+              <a:t>https://pubmed.ncbi.nlm.nih.gov/17568761/</a:t>
             </a:r>
           </a:p>
         </p:txBody>
@@ -1059,7 +1206,22 @@
           <a:lstStyle xmlns:a="http://schemas.openxmlformats.org/drawingml/2006/main"/>
           <a:p xmlns:a="http://schemas.openxmlformats.org/drawingml/2006/main">
             <a:r>
-              <a:t>Shaving and draping.</a:t>
+              <a:t>The list reflects the preoperative tests provided by HIGHST. Blood glucose and HbA1c are listed separately. HbA1c denotes glycated hemoglobin. HPV and syphilis are separate entries. The slide does not assign a specimen type or testing method to HPV.</a:t>
+            </a:r>
+          </a:p>
+          <a:p xmlns:a="http://schemas.openxmlformats.org/drawingml/2006/main">
+            <a:r>
+              <a:t/>
+            </a:r>
+          </a:p>
+          <a:p xmlns:a="http://schemas.openxmlformats.org/drawingml/2006/main">
+            <a:r>
+              <a:t>Sources</a:t>
+            </a:r>
+          </a:p>
+          <a:p xmlns:a="http://schemas.openxmlformats.org/drawingml/2006/main">
+            <a:r>
+              <a:t>https://www.niddk.nih.gov/health-information/diagnostic-tests/a1c-test/</a:t>
             </a:r>
           </a:p>
         </p:txBody>
@@ -1129,7 +1291,22 @@
           <a:lstStyle xmlns:a="http://schemas.openxmlformats.org/drawingml/2006/main"/>
           <a:p xmlns:a="http://schemas.openxmlformats.org/drawingml/2006/main">
             <a:r>
-              <a:t>Case 1: Pubic Incision.</a:t>
+              <a:t>Physical examination includes penile length measurement in the flaccid and stretched states. Penile biothesiometry assesses vibration perception thresholds and penile sensitivity.</a:t>
+            </a:r>
+          </a:p>
+          <a:p xmlns:a="http://schemas.openxmlformats.org/drawingml/2006/main">
+            <a:r>
+              <a:t/>
+            </a:r>
+          </a:p>
+          <a:p xmlns:a="http://schemas.openxmlformats.org/drawingml/2006/main">
+            <a:r>
+              <a:t>Sources</a:t>
+            </a:r>
+          </a:p>
+          <a:p xmlns:a="http://schemas.openxmlformats.org/drawingml/2006/main">
+            <a:r>
+              <a:t>https://pubmed.ncbi.nlm.nih.gov/28874780/</a:t>
             </a:r>
           </a:p>
         </p:txBody>
@@ -1199,7 +1376,7 @@
           <a:lstStyle xmlns:a="http://schemas.openxmlformats.org/drawingml/2006/main"/>
           <a:p xmlns:a="http://schemas.openxmlformats.org/drawingml/2006/main">
             <a:r>
-              <a:t>Case 2: Circumcision-line Incision.</a:t>
+              <a:t>Shaving and draping.</a:t>
             </a:r>
           </a:p>
         </p:txBody>
@@ -1269,7 +1446,7 @@
           <a:lstStyle xmlns:a="http://schemas.openxmlformats.org/drawingml/2006/main"/>
           <a:p xmlns:a="http://schemas.openxmlformats.org/drawingml/2006/main">
             <a:r>
-              <a:t>Case 3: Secondary Dermal Grafting.</a:t>
+              <a:t>Case 1: Pubic Incision.</a:t>
             </a:r>
           </a:p>
         </p:txBody>
@@ -1339,7 +1516,7 @@
           <a:lstStyle xmlns:a="http://schemas.openxmlformats.org/drawingml/2006/main"/>
           <a:p xmlns:a="http://schemas.openxmlformats.org/drawingml/2006/main">
             <a:r>
-              <a:t>Case 4: Revision Surgery.</a:t>
+              <a:t>Case 2: Circumcision-line Incision.</a:t>
             </a:r>
           </a:p>
         </p:txBody>
@@ -1386,7 +1563,7 @@
           <p:cNvPr id="3" name="Title">
             <a:extLst xmlns:a="http://schemas.openxmlformats.org/drawingml/2006/main">
               <a:ext uri="{FF2B5EF4-FFF2-40B4-BE49-F238E27FC236}">
-                <a16:creationId xmlns:a16="http://schemas.microsoft.com/office/drawing/2014/main" id="{DFF83339-D245-4B2E-ABDA-9E77C27F17A5}"/>
+                <a16:creationId xmlns:a16="http://schemas.microsoft.com/office/drawing/2014/main" id="{04E1E01B-7363-44BD-B532-825C5E8B50BA}"/>
               </a:ext>
             </a:extLst>
           </p:cNvPr>
@@ -1543,7 +1720,7 @@
           <p:cNvPr id="2" name="Subtitle">
             <a:extLst xmlns:a="http://schemas.openxmlformats.org/drawingml/2006/main">
               <a:ext uri="{FF2B5EF4-FFF2-40B4-BE49-F238E27FC236}">
-                <a16:creationId xmlns:a16="http://schemas.microsoft.com/office/drawing/2014/main" id="{231E1271-4C2E-4046-AC23-C70339173395}"/>
+                <a16:creationId xmlns:a16="http://schemas.microsoft.com/office/drawing/2014/main" id="{0DB0C217-E39C-4A44-85FA-7689BAF07F8A}"/>
               </a:ext>
             </a:extLst>
           </p:cNvPr>
@@ -1717,7 +1894,7 @@
           <p:cNvPr id="2" name="Section title">
             <a:extLst xmlns:a="http://schemas.openxmlformats.org/drawingml/2006/main">
               <a:ext uri="{FF2B5EF4-FFF2-40B4-BE49-F238E27FC236}">
-                <a16:creationId xmlns:a16="http://schemas.microsoft.com/office/drawing/2014/main" id="{4B294207-DF9A-4FEB-AC1F-BE20EAFD81D3}"/>
+                <a16:creationId xmlns:a16="http://schemas.microsoft.com/office/drawing/2014/main" id="{7EF962CF-EA9B-490C-B2D1-A2C9F7EB71E5}"/>
               </a:ext>
             </a:extLst>
           </p:cNvPr>
@@ -1891,7 +2068,7 @@
           <p:cNvPr id="3" name="Title">
             <a:extLst xmlns:a="http://schemas.openxmlformats.org/drawingml/2006/main">
               <a:ext uri="{FF2B5EF4-FFF2-40B4-BE49-F238E27FC236}">
-                <a16:creationId xmlns:a16="http://schemas.microsoft.com/office/drawing/2014/main" id="{9810C8EC-7BBB-453D-AC9E-549ACB7B00C8}"/>
+                <a16:creationId xmlns:a16="http://schemas.microsoft.com/office/drawing/2014/main" id="{59F10B97-08C3-4FBE-8102-C3C0A53937B6}"/>
               </a:ext>
             </a:extLst>
           </p:cNvPr>
@@ -2048,7 +2225,7 @@
           <p:cNvPr id="2" name="Body">
             <a:extLst xmlns:a="http://schemas.openxmlformats.org/drawingml/2006/main">
               <a:ext uri="{FF2B5EF4-FFF2-40B4-BE49-F238E27FC236}">
-                <a16:creationId xmlns:a16="http://schemas.microsoft.com/office/drawing/2014/main" id="{A1C39492-0184-49F2-90E6-55C5DA445E90}"/>
+                <a16:creationId xmlns:a16="http://schemas.microsoft.com/office/drawing/2014/main" id="{22E19779-C792-4F35-93B5-9C9D449FC4DD}"/>
               </a:ext>
             </a:extLst>
           </p:cNvPr>
@@ -2222,7 +2399,7 @@
           <p:cNvPr id="4" name="Title">
             <a:extLst xmlns:a="http://schemas.openxmlformats.org/drawingml/2006/main">
               <a:ext uri="{FF2B5EF4-FFF2-40B4-BE49-F238E27FC236}">
-                <a16:creationId xmlns:a16="http://schemas.microsoft.com/office/drawing/2014/main" id="{7B08000C-B7BC-4E60-B6F1-032AC46BE36C}"/>
+                <a16:creationId xmlns:a16="http://schemas.microsoft.com/office/drawing/2014/main" id="{9755860D-6D27-46B1-A619-B13BC637AF1F}"/>
               </a:ext>
             </a:extLst>
           </p:cNvPr>
@@ -2379,7 +2556,7 @@
           <p:cNvPr id="2" name="Left column">
             <a:extLst xmlns:a="http://schemas.openxmlformats.org/drawingml/2006/main">
               <a:ext uri="{FF2B5EF4-FFF2-40B4-BE49-F238E27FC236}">
-                <a16:creationId xmlns:a16="http://schemas.microsoft.com/office/drawing/2014/main" id="{EE93A09D-1399-49E3-BEC1-96FBE352A982}"/>
+                <a16:creationId xmlns:a16="http://schemas.microsoft.com/office/drawing/2014/main" id="{2EF09A62-5371-481B-802D-99DB67FD733C}"/>
               </a:ext>
             </a:extLst>
           </p:cNvPr>
@@ -2536,7 +2713,7 @@
           <p:cNvPr id="3" name="Right column">
             <a:extLst xmlns:a="http://schemas.openxmlformats.org/drawingml/2006/main">
               <a:ext uri="{FF2B5EF4-FFF2-40B4-BE49-F238E27FC236}">
-                <a16:creationId xmlns:a16="http://schemas.microsoft.com/office/drawing/2014/main" id="{787AF9D1-680E-441E-999C-D89F800948C6}"/>
+                <a16:creationId xmlns:a16="http://schemas.microsoft.com/office/drawing/2014/main" id="{1A04455C-729E-4417-9DFD-2ADBC8C6FD0F}"/>
               </a:ext>
             </a:extLst>
           </p:cNvPr>
@@ -2710,7 +2887,7 @@
           <p:cNvPr id="3" name="Title">
             <a:extLst xmlns:a="http://schemas.openxmlformats.org/drawingml/2006/main">
               <a:ext uri="{FF2B5EF4-FFF2-40B4-BE49-F238E27FC236}">
-                <a16:creationId xmlns:a16="http://schemas.microsoft.com/office/drawing/2014/main" id="{CE80A213-2133-4D8E-AFDE-2367A1F6ED15}"/>
+                <a16:creationId xmlns:a16="http://schemas.microsoft.com/office/drawing/2014/main" id="{6A9B795A-96EC-4BF6-8947-D97B7C52EA9F}"/>
               </a:ext>
             </a:extLst>
           </p:cNvPr>
@@ -2867,7 +3044,7 @@
           <p:cNvPr id="2" name="Left column">
             <a:extLst xmlns:a="http://schemas.openxmlformats.org/drawingml/2006/main">
               <a:ext uri="{FF2B5EF4-FFF2-40B4-BE49-F238E27FC236}">
-                <a16:creationId xmlns:a16="http://schemas.microsoft.com/office/drawing/2014/main" id="{B35536F0-13E0-43BD-BD2E-112E03531E0B}"/>
+                <a16:creationId xmlns:a16="http://schemas.microsoft.com/office/drawing/2014/main" id="{F2CEF8B2-72F4-49CD-8519-C5362ADA65AA}"/>
               </a:ext>
             </a:extLst>
           </p:cNvPr>
@@ -3062,12 +3239,12 @@
   </p:cSld>
   <p:clrMap bg1="lt1" tx1="dk1" bg2="lt2" tx2="dk2" accent1="accent1" accent2="accent2" accent3="accent3" accent4="accent4" accent5="accent5" accent6="accent6" hlink="hlink" folHlink="folHlink"/>
   <p:sldLayoutIdLst>
-    <p:sldLayoutId xmlns:r="http://schemas.openxmlformats.org/officeDocument/2006/relationships" id="2147483649" r:id="R8ec28c2138814f47"/>
-    <p:sldLayoutId xmlns:r="http://schemas.openxmlformats.org/officeDocument/2006/relationships" id="2147483650" r:id="R419ef0738e9a49df"/>
-    <p:sldLayoutId xmlns:r="http://schemas.openxmlformats.org/officeDocument/2006/relationships" id="2147483651" r:id="Rf361d240b0b24942"/>
-    <p:sldLayoutId xmlns:r="http://schemas.openxmlformats.org/officeDocument/2006/relationships" id="2147483652" r:id="R5364b7972616439a"/>
-    <p:sldLayoutId xmlns:r="http://schemas.openxmlformats.org/officeDocument/2006/relationships" id="2147483653" r:id="Rb4310c30b8d24709"/>
-    <p:sldLayoutId xmlns:r="http://schemas.openxmlformats.org/officeDocument/2006/relationships" id="2147483654" r:id="Rdcd5164da0cb475f"/>
+    <p:sldLayoutId xmlns:r="http://schemas.openxmlformats.org/officeDocument/2006/relationships" id="2147483649" r:id="Rb344a4b21ece4bae"/>
+    <p:sldLayoutId xmlns:r="http://schemas.openxmlformats.org/officeDocument/2006/relationships" id="2147483650" r:id="Rebb8a7672b6e4f3f"/>
+    <p:sldLayoutId xmlns:r="http://schemas.openxmlformats.org/officeDocument/2006/relationships" id="2147483651" r:id="R093bad8932324621"/>
+    <p:sldLayoutId xmlns:r="http://schemas.openxmlformats.org/officeDocument/2006/relationships" id="2147483652" r:id="R55bc0cd5caa04312"/>
+    <p:sldLayoutId xmlns:r="http://schemas.openxmlformats.org/officeDocument/2006/relationships" id="2147483653" r:id="Rc93deddcb524408a"/>
+    <p:sldLayoutId xmlns:r="http://schemas.openxmlformats.org/officeDocument/2006/relationships" id="2147483654" r:id="R1ed98b9186be40eb"/>
   </p:sldLayoutIdLst>
   <p:txStyles>
     <p:titleStyle>
@@ -3618,7 +3795,7 @@
           <p:cNvPr id="12" name="">
             <a:extLst xmlns:a="http://schemas.openxmlformats.org/drawingml/2006/main">
               <a:ext uri="{FF2B5EF4-FFF2-40B4-BE49-F238E27FC236}">
-                <a16:creationId xmlns:a16="http://schemas.microsoft.com/office/drawing/2014/main" id="{96B05340-9A2A-4DBF-8D5A-2D2B166E59FA}"/>
+                <a16:creationId xmlns:a16="http://schemas.microsoft.com/office/drawing/2014/main" id="{60A17C08-0291-4BB8-9CD6-EA7B12570B55}"/>
               </a:ext>
             </a:extLst>
           </p:cNvPr>
@@ -3648,7 +3825,7 @@
           <p:cNvPr id="2" name="">
             <a:extLst xmlns:a="http://schemas.openxmlformats.org/drawingml/2006/main">
               <a:ext uri="{FF2B5EF4-FFF2-40B4-BE49-F238E27FC236}">
-                <a16:creationId xmlns:a16="http://schemas.microsoft.com/office/drawing/2014/main" id="{CF151C7E-BEF0-4BC4-9E94-EDC309A30CEB}"/>
+                <a16:creationId xmlns:a16="http://schemas.microsoft.com/office/drawing/2014/main" id="{E9D60992-BE13-41F4-A4FF-2895FF317E3B}"/>
               </a:ext>
             </a:extLst>
           </p:cNvPr>
@@ -3658,7 +3835,7 @@
           <p:nvPr/>
         </p:nvPicPr>
         <p:blipFill>
-          <a:blip xmlns:r="http://schemas.openxmlformats.org/officeDocument/2006/relationships" xmlns:a="http://schemas.openxmlformats.org/drawingml/2006/main" r:embed="R88c024e62d0a426c"/>
+          <a:blip xmlns:r="http://schemas.openxmlformats.org/officeDocument/2006/relationships" xmlns:a="http://schemas.openxmlformats.org/drawingml/2006/main" r:embed="Rcfe4123ce0df497c"/>
           <a:stretch xmlns:a="http://schemas.openxmlformats.org/drawingml/2006/main"/>
         </p:blipFill>
         <p:spPr>
@@ -3676,7 +3853,7 @@
           <p:cNvPr id="3" name="">
             <a:extLst xmlns:a="http://schemas.openxmlformats.org/drawingml/2006/main">
               <a:ext uri="{FF2B5EF4-FFF2-40B4-BE49-F238E27FC236}">
-                <a16:creationId xmlns:a16="http://schemas.microsoft.com/office/drawing/2014/main" id="{82292135-6740-487A-913B-279C4D47DB27}"/>
+                <a16:creationId xmlns:a16="http://schemas.microsoft.com/office/drawing/2014/main" id="{768CDA7B-AE7B-4661-9687-21736A7E0F2F}"/>
               </a:ext>
             </a:extLst>
           </p:cNvPr>
@@ -3686,7 +3863,7 @@
           <p:nvPr/>
         </p:nvPicPr>
         <p:blipFill>
-          <a:blip xmlns:r="http://schemas.openxmlformats.org/officeDocument/2006/relationships" xmlns:a="http://schemas.openxmlformats.org/drawingml/2006/main" r:embed="R6fc0c611984e42a3"/>
+          <a:blip xmlns:r="http://schemas.openxmlformats.org/officeDocument/2006/relationships" xmlns:a="http://schemas.openxmlformats.org/drawingml/2006/main" r:embed="R379bd318452e4983"/>
           <a:stretch xmlns:a="http://schemas.openxmlformats.org/drawingml/2006/main"/>
         </p:blipFill>
         <p:spPr>
@@ -3704,7 +3881,7 @@
           <p:cNvPr id="4" name="">
             <a:extLst xmlns:a="http://schemas.openxmlformats.org/drawingml/2006/main">
               <a:ext uri="{FF2B5EF4-FFF2-40B4-BE49-F238E27FC236}">
-                <a16:creationId xmlns:a16="http://schemas.microsoft.com/office/drawing/2014/main" id="{EA12E331-2937-486C-B124-DB66BAE2B54C}"/>
+                <a16:creationId xmlns:a16="http://schemas.microsoft.com/office/drawing/2014/main" id="{974C58B9-07FB-4959-BFA5-05853CDE11B5}"/>
               </a:ext>
             </a:extLst>
           </p:cNvPr>
@@ -3772,7 +3949,7 @@
           <p:cNvPr id="5" name="">
             <a:extLst xmlns:a="http://schemas.openxmlformats.org/drawingml/2006/main">
               <a:ext uri="{FF2B5EF4-FFF2-40B4-BE49-F238E27FC236}">
-                <a16:creationId xmlns:a16="http://schemas.microsoft.com/office/drawing/2014/main" id="{A138A14A-B9A4-44FA-A27D-800821902457}"/>
+                <a16:creationId xmlns:a16="http://schemas.microsoft.com/office/drawing/2014/main" id="{700E3104-921D-4B87-A290-4D1CA8E4053A}"/>
               </a:ext>
             </a:extLst>
           </p:cNvPr>
@@ -3886,7 +4063,7 @@
           <p:cNvPr id="6" name="">
             <a:extLst xmlns:a="http://schemas.openxmlformats.org/drawingml/2006/main">
               <a:ext uri="{FF2B5EF4-FFF2-40B4-BE49-F238E27FC236}">
-                <a16:creationId xmlns:a16="http://schemas.microsoft.com/office/drawing/2014/main" id="{77A71D03-6B2D-4C85-846C-0CC13418E1A8}"/>
+                <a16:creationId xmlns:a16="http://schemas.microsoft.com/office/drawing/2014/main" id="{38AE132E-234C-4572-911D-B9397A9D1DB0}"/>
               </a:ext>
             </a:extLst>
           </p:cNvPr>
@@ -3954,7 +4131,7 @@
           <p:cNvPr id="7" name="">
             <a:extLst xmlns:a="http://schemas.openxmlformats.org/drawingml/2006/main">
               <a:ext uri="{FF2B5EF4-FFF2-40B4-BE49-F238E27FC236}">
-                <a16:creationId xmlns:a16="http://schemas.microsoft.com/office/drawing/2014/main" id="{F00020FD-002B-4A61-AD32-80F0D9403B83}"/>
+                <a16:creationId xmlns:a16="http://schemas.microsoft.com/office/drawing/2014/main" id="{088CEF62-5682-4B76-89B9-094A7A600652}"/>
               </a:ext>
             </a:extLst>
           </p:cNvPr>
@@ -3984,7 +4161,7 @@
           <p:cNvPr id="8" name="">
             <a:extLst xmlns:a="http://schemas.openxmlformats.org/drawingml/2006/main">
               <a:ext uri="{FF2B5EF4-FFF2-40B4-BE49-F238E27FC236}">
-                <a16:creationId xmlns:a16="http://schemas.microsoft.com/office/drawing/2014/main" id="{37E7F3F9-5F5B-46AF-AC8E-030117740298}"/>
+                <a16:creationId xmlns:a16="http://schemas.microsoft.com/office/drawing/2014/main" id="{87602927-C006-42BD-9425-B280D4F64674}"/>
               </a:ext>
             </a:extLst>
           </p:cNvPr>
@@ -4052,7 +4229,7 @@
           <p:cNvPr id="9" name="">
             <a:extLst xmlns:a="http://schemas.openxmlformats.org/drawingml/2006/main">
               <a:ext uri="{FF2B5EF4-FFF2-40B4-BE49-F238E27FC236}">
-                <a16:creationId xmlns:a16="http://schemas.microsoft.com/office/drawing/2014/main" id="{1576C54B-CCC2-4AED-A8E2-7CF7649B23A6}"/>
+                <a16:creationId xmlns:a16="http://schemas.microsoft.com/office/drawing/2014/main" id="{461B9079-3623-40F3-B4BF-0A256C9B39B0}"/>
               </a:ext>
             </a:extLst>
           </p:cNvPr>
@@ -4120,7 +4297,7 @@
           <p:cNvPr id="10" name="">
             <a:extLst xmlns:a="http://schemas.openxmlformats.org/drawingml/2006/main">
               <a:ext uri="{FF2B5EF4-FFF2-40B4-BE49-F238E27FC236}">
-                <a16:creationId xmlns:a16="http://schemas.microsoft.com/office/drawing/2014/main" id="{8F137CD0-F9C1-4C70-A547-E216B1EC1724}"/>
+                <a16:creationId xmlns:a16="http://schemas.microsoft.com/office/drawing/2014/main" id="{7B527F81-49AF-4A38-8077-9DC953FD8AF8}"/>
               </a:ext>
             </a:extLst>
           </p:cNvPr>
@@ -4188,7 +4365,7 @@
           <p:cNvPr id="11" name="">
             <a:extLst xmlns:a="http://schemas.openxmlformats.org/drawingml/2006/main">
               <a:ext uri="{FF2B5EF4-FFF2-40B4-BE49-F238E27FC236}">
-                <a16:creationId xmlns:a16="http://schemas.microsoft.com/office/drawing/2014/main" id="{3ED7AD41-F0FC-4AA7-839B-979EF0624324}"/>
+                <a16:creationId xmlns:a16="http://schemas.microsoft.com/office/drawing/2014/main" id="{67A76F45-FBE8-48C3-BDC7-1F569099100E}"/>
               </a:ext>
             </a:extLst>
           </p:cNvPr>
@@ -4254,7 +4431,7 @@
     </p:spTree>
     <p:extLst>
       <p:ext uri="{BB962C8B-B14F-4D97-AF65-F5344CB8AC3E}">
-        <p14:creationId xmlns:p14="http://schemas.microsoft.com/office/powerpoint/2010/main" val="1674288663"/>
+        <p14:creationId xmlns:p14="http://schemas.microsoft.com/office/powerpoint/2010/main" val="723943149"/>
       </p:ext>
     </p:extLst>
   </p:cSld>
@@ -4285,7 +4462,7 @@
           <p:cNvPr id="7" name="">
             <a:extLst xmlns:a="http://schemas.openxmlformats.org/drawingml/2006/main">
               <a:ext uri="{FF2B5EF4-FFF2-40B4-BE49-F238E27FC236}">
-                <a16:creationId xmlns:a16="http://schemas.microsoft.com/office/drawing/2014/main" id="{935FAA76-0F42-49D4-8EBC-42741517C759}"/>
+                <a16:creationId xmlns:a16="http://schemas.microsoft.com/office/drawing/2014/main" id="{72BE3D15-ACE0-4D5E-83F1-BDDFEB081C82}"/>
               </a:ext>
             </a:extLst>
           </p:cNvPr>
@@ -4343,7 +4520,7 @@
                 <a:ea typeface="Pretendard"/>
                 <a:cs typeface="Pretendard"/>
               </a:rPr>
-              <a:t>CLINICAL CASES / CASE 5</a:t>
+              <a:t>CLINICAL CASES / CASE 3</a:t>
             </a:r>
           </a:p>
         </p:txBody>
@@ -4353,7 +4530,7 @@
           <p:cNvPr id="2" name="">
             <a:extLst xmlns:a="http://schemas.openxmlformats.org/drawingml/2006/main">
               <a:ext uri="{FF2B5EF4-FFF2-40B4-BE49-F238E27FC236}">
-                <a16:creationId xmlns:a16="http://schemas.microsoft.com/office/drawing/2014/main" id="{87404876-D910-452A-9E9E-7FF58A962C18}"/>
+                <a16:creationId xmlns:a16="http://schemas.microsoft.com/office/drawing/2014/main" id="{038D4BD8-41E3-43D0-84A8-6AD3BA001BC3}"/>
               </a:ext>
             </a:extLst>
           </p:cNvPr>
@@ -4411,7 +4588,7 @@
                 <a:ea typeface="Pretendard"/>
                 <a:cs typeface="Pretendard"/>
               </a:rPr>
-              <a:t>Contour Step-off Correction</a:t>
+              <a:t>Secondary Dermal Grafting</a:t>
             </a:r>
           </a:p>
         </p:txBody>
@@ -4421,7 +4598,7 @@
           <p:cNvPr id="3" name="">
             <a:extLst xmlns:a="http://schemas.openxmlformats.org/drawingml/2006/main">
               <a:ext uri="{FF2B5EF4-FFF2-40B4-BE49-F238E27FC236}">
-                <a16:creationId xmlns:a16="http://schemas.microsoft.com/office/drawing/2014/main" id="{6D01EE4C-4CB4-4277-B37D-97B801B80D96}"/>
+                <a16:creationId xmlns:a16="http://schemas.microsoft.com/office/drawing/2014/main" id="{B8D191B4-66E3-4D73-A05E-38C10DFF53FF}"/>
               </a:ext>
             </a:extLst>
           </p:cNvPr>
@@ -4451,7 +4628,7 @@
           <p:cNvPr id="4" name="">
             <a:extLst xmlns:a="http://schemas.openxmlformats.org/drawingml/2006/main">
               <a:ext uri="{FF2B5EF4-FFF2-40B4-BE49-F238E27FC236}">
-                <a16:creationId xmlns:a16="http://schemas.microsoft.com/office/drawing/2014/main" id="{ABCA1C07-9410-4344-95E3-92D6A6A8F5BD}"/>
+                <a16:creationId xmlns:a16="http://schemas.microsoft.com/office/drawing/2014/main" id="{15C9CFD1-0437-4E56-812E-2435E8CE7B25}"/>
               </a:ext>
             </a:extLst>
           </p:cNvPr>
@@ -4481,7 +4658,7 @@
           <p:cNvPr id="5" name="">
             <a:extLst xmlns:a="http://schemas.openxmlformats.org/drawingml/2006/main">
               <a:ext uri="{FF2B5EF4-FFF2-40B4-BE49-F238E27FC236}">
-                <a16:creationId xmlns:a16="http://schemas.microsoft.com/office/drawing/2014/main" id="{1D6AC46C-7F38-4264-877F-0ED987440B3B}"/>
+                <a16:creationId xmlns:a16="http://schemas.microsoft.com/office/drawing/2014/main" id="{260AC76E-F290-41E4-A8D1-986817883B4E}"/>
               </a:ext>
             </a:extLst>
           </p:cNvPr>
@@ -4549,7 +4726,7 @@
           <p:cNvPr id="6" name="">
             <a:extLst xmlns:a="http://schemas.openxmlformats.org/drawingml/2006/main">
               <a:ext uri="{FF2B5EF4-FFF2-40B4-BE49-F238E27FC236}">
-                <a16:creationId xmlns:a16="http://schemas.microsoft.com/office/drawing/2014/main" id="{FE38069A-2B4F-44DC-ADC3-FE280B741246}"/>
+                <a16:creationId xmlns:a16="http://schemas.microsoft.com/office/drawing/2014/main" id="{F8B96786-0866-4819-BC45-45632059886B}"/>
               </a:ext>
             </a:extLst>
           </p:cNvPr>
@@ -4615,7 +4792,7 @@
     </p:spTree>
     <p:extLst>
       <p:ext uri="{BB962C8B-B14F-4D97-AF65-F5344CB8AC3E}">
-        <p14:creationId xmlns:p14="http://schemas.microsoft.com/office/powerpoint/2010/main" val="1276128630"/>
+        <p14:creationId xmlns:p14="http://schemas.microsoft.com/office/powerpoint/2010/main" val="658523851"/>
       </p:ext>
     </p:extLst>
   </p:cSld>
@@ -4643,10 +4820,10 @@
       </p:grpSpPr>
       <p:sp>
         <p:nvSpPr>
-          <p:cNvPr id="18" name="">
-            <a:extLst xmlns:a="http://schemas.openxmlformats.org/drawingml/2006/main">
-              <a:ext uri="{FF2B5EF4-FFF2-40B4-BE49-F238E27FC236}">
-                <a16:creationId xmlns:a16="http://schemas.microsoft.com/office/drawing/2014/main" id="{1641EB78-54AF-416A-A4B3-E04FF21F1502}"/>
+          <p:cNvPr id="7" name="">
+            <a:extLst xmlns:a="http://schemas.openxmlformats.org/drawingml/2006/main">
+              <a:ext uri="{FF2B5EF4-FFF2-40B4-BE49-F238E27FC236}">
+                <a16:creationId xmlns:a16="http://schemas.microsoft.com/office/drawing/2014/main" id="{975012B8-D0FF-494A-8DCD-81F0BF8AB51A}"/>
               </a:ext>
             </a:extLst>
           </p:cNvPr>
@@ -4704,7 +4881,7 @@
                 <a:ea typeface="Pretendard"/>
                 <a:cs typeface="Pretendard"/>
               </a:rPr>
-              <a:t>COMPLICATIONS</a:t>
+              <a:t>CLINICAL CASES / CASE 4</a:t>
             </a:r>
           </a:p>
         </p:txBody>
@@ -4714,7 +4891,7 @@
           <p:cNvPr id="2" name="">
             <a:extLst xmlns:a="http://schemas.openxmlformats.org/drawingml/2006/main">
               <a:ext uri="{FF2B5EF4-FFF2-40B4-BE49-F238E27FC236}">
-                <a16:creationId xmlns:a16="http://schemas.microsoft.com/office/drawing/2014/main" id="{E15F6225-9FD0-4FB0-96E6-5EA4079E1F98}"/>
+                <a16:creationId xmlns:a16="http://schemas.microsoft.com/office/drawing/2014/main" id="{E1C36471-6E9B-4FD8-B72E-9D39D714D517}"/>
               </a:ext>
             </a:extLst>
           </p:cNvPr>
@@ -4772,7 +4949,7 @@
                 <a:ea typeface="Pretendard"/>
                 <a:cs typeface="Pretendard"/>
               </a:rPr>
-              <a:t>Potential Complications</a:t>
+              <a:t>Revision Surgery</a:t>
             </a:r>
           </a:p>
         </p:txBody>
@@ -4782,18 +4959,48 @@
           <p:cNvPr id="3" name="">
             <a:extLst xmlns:a="http://schemas.openxmlformats.org/drawingml/2006/main">
               <a:ext uri="{FF2B5EF4-FFF2-40B4-BE49-F238E27FC236}">
-                <a16:creationId xmlns:a16="http://schemas.microsoft.com/office/drawing/2014/main" id="{B4CFC121-9CB4-454F-BB99-8112ED7BF0E0}"/>
-              </a:ext>
-            </a:extLst>
-          </p:cNvPr>
-          <p:cNvSpPr>
-            <a:spLocks xmlns:a="http://schemas.openxmlformats.org/drawingml/2006/main" noGrp="1"/>
-          </p:cNvSpPr>
-          <p:nvPr/>
-        </p:nvSpPr>
-        <p:spPr>
-          <a:xfrm xmlns:a="http://schemas.openxmlformats.org/drawingml/2006/main">
-            <a:off x="685800" y="2305050"/>
+                <a16:creationId xmlns:a16="http://schemas.microsoft.com/office/drawing/2014/main" id="{2EDDAC19-9688-4730-B9E6-337892C56B41}"/>
+              </a:ext>
+            </a:extLst>
+          </p:cNvPr>
+          <p:cNvSpPr>
+            <a:spLocks xmlns:a="http://schemas.openxmlformats.org/drawingml/2006/main" noGrp="1"/>
+          </p:cNvSpPr>
+          <p:nvPr/>
+        </p:nvSpPr>
+        <p:spPr>
+          <a:xfrm xmlns:a="http://schemas.openxmlformats.org/drawingml/2006/main">
+            <a:off x="685800" y="2476500"/>
+            <a:ext cx="10820400" cy="3524250"/>
+          </a:xfrm>
+          <a:prstGeom xmlns:a="http://schemas.openxmlformats.org/drawingml/2006/main" prst="rect">
+            <a:avLst/>
+          </a:prstGeom>
+          <a:solidFill xmlns:a="http://schemas.openxmlformats.org/drawingml/2006/main">
+            <a:srgbClr val="F7F7F3"/>
+          </a:solidFill>
+          <a:ln xmlns:a="http://schemas.openxmlformats.org/drawingml/2006/main" w="0">
+            <a:noFill/>
+          </a:ln>
+        </p:spPr>
+      </p:sp>
+      <p:sp>
+        <p:nvSpPr>
+          <p:cNvPr id="4" name="">
+            <a:extLst xmlns:a="http://schemas.openxmlformats.org/drawingml/2006/main">
+              <a:ext uri="{FF2B5EF4-FFF2-40B4-BE49-F238E27FC236}">
+                <a16:creationId xmlns:a16="http://schemas.microsoft.com/office/drawing/2014/main" id="{BF0A7C99-99DE-42BB-947A-4A271945DB81}"/>
+              </a:ext>
+            </a:extLst>
+          </p:cNvPr>
+          <p:cNvSpPr>
+            <a:spLocks xmlns:a="http://schemas.openxmlformats.org/drawingml/2006/main" noGrp="1"/>
+          </p:cNvSpPr>
+          <p:nvPr/>
+        </p:nvSpPr>
+        <p:spPr>
+          <a:xfrm xmlns:a="http://schemas.openxmlformats.org/drawingml/2006/main">
+            <a:off x="685800" y="2476500"/>
             <a:ext cx="10820400" cy="9525"/>
           </a:xfrm>
           <a:prstGeom xmlns:a="http://schemas.openxmlformats.org/drawingml/2006/main" prst="rect">
@@ -4809,750 +5016,10 @@
       </p:sp>
       <p:sp>
         <p:nvSpPr>
-          <p:cNvPr id="4" name="">
-            <a:extLst xmlns:a="http://schemas.openxmlformats.org/drawingml/2006/main">
-              <a:ext uri="{FF2B5EF4-FFF2-40B4-BE49-F238E27FC236}">
-                <a16:creationId xmlns:a16="http://schemas.microsoft.com/office/drawing/2014/main" id="{09F3AFB9-612A-46C9-B4D8-93351C06E5B8}"/>
-              </a:ext>
-            </a:extLst>
-          </p:cNvPr>
-          <p:cNvSpPr>
-            <a:spLocks xmlns:a="http://schemas.openxmlformats.org/drawingml/2006/main" noGrp="1"/>
-          </p:cNvSpPr>
-          <p:nvPr/>
-        </p:nvSpPr>
-        <p:spPr>
-          <a:xfrm xmlns:a="http://schemas.openxmlformats.org/drawingml/2006/main">
-            <a:off x="685800" y="2524125"/>
-            <a:ext cx="361950" cy="342900"/>
-          </a:xfrm>
-          <a:prstGeom xmlns:a="http://schemas.openxmlformats.org/drawingml/2006/main" prst="rect">
-            <a:avLst/>
-          </a:prstGeom>
-          <a:noFill xmlns:a="http://schemas.openxmlformats.org/drawingml/2006/main"/>
-          <a:ln xmlns:a="http://schemas.openxmlformats.org/drawingml/2006/main" w="0">
-            <a:noFill/>
-          </a:ln>
-        </p:spPr>
-        <p:txBody>
-          <a:bodyPr xmlns:a="http://schemas.openxmlformats.org/drawingml/2006/main" wrap="square" lIns="0" tIns="0" rIns="0" bIns="0" anchor="t">
-            <a:noAutofit/>
-          </a:bodyPr>
-          <a:lstStyle xmlns:a="http://schemas.openxmlformats.org/drawingml/2006/main">
-            <a:defPPr>
-              <a:defRPr sz="1125" b="0">
-                <a:solidFill>
-                  <a:srgbClr val="9B7744"/>
-                </a:solidFill>
-                <a:latin typeface="Pretendard"/>
-                <a:ea typeface="Pretendard"/>
-                <a:cs typeface="Pretendard"/>
-              </a:defRPr>
-            </a:defPPr>
-          </a:lstStyle>
-          <a:p xmlns:a="http://schemas.openxmlformats.org/drawingml/2006/main">
-            <a:pPr>
-              <a:defRPr sz="1125" b="0">
-                <a:solidFill>
-                  <a:srgbClr val="9B7744"/>
-                </a:solidFill>
-                <a:latin typeface="Pretendard"/>
-                <a:ea typeface="Pretendard"/>
-                <a:cs typeface="Pretendard"/>
-              </a:defRPr>
-            </a:pPr>
-            <a:r>
-              <a:rPr sz="1125" b="0">
-                <a:solidFill>
-                  <a:srgbClr val="9B7744"/>
-                </a:solidFill>
-                <a:latin typeface="Pretendard"/>
-                <a:ea typeface="Pretendard"/>
-                <a:cs typeface="Pretendard"/>
-              </a:rPr>
-              <a:t>01</a:t>
-            </a:r>
-          </a:p>
-        </p:txBody>
-      </p:sp>
-      <p:sp>
-        <p:nvSpPr>
           <p:cNvPr id="5" name="">
             <a:extLst xmlns:a="http://schemas.openxmlformats.org/drawingml/2006/main">
               <a:ext uri="{FF2B5EF4-FFF2-40B4-BE49-F238E27FC236}">
-                <a16:creationId xmlns:a16="http://schemas.microsoft.com/office/drawing/2014/main" id="{59C5243D-8CF6-441E-8755-39D61524EA58}"/>
-              </a:ext>
-            </a:extLst>
-          </p:cNvPr>
-          <p:cNvSpPr>
-            <a:spLocks xmlns:a="http://schemas.openxmlformats.org/drawingml/2006/main" noGrp="1"/>
-          </p:cNvSpPr>
-          <p:nvPr/>
-        </p:nvSpPr>
-        <p:spPr>
-          <a:xfrm xmlns:a="http://schemas.openxmlformats.org/drawingml/2006/main">
-            <a:off x="1181100" y="2495550"/>
-            <a:ext cx="10325100" cy="381000"/>
-          </a:xfrm>
-          <a:prstGeom xmlns:a="http://schemas.openxmlformats.org/drawingml/2006/main" prst="rect">
-            <a:avLst/>
-          </a:prstGeom>
-          <a:noFill xmlns:a="http://schemas.openxmlformats.org/drawingml/2006/main"/>
-          <a:ln xmlns:a="http://schemas.openxmlformats.org/drawingml/2006/main" w="0">
-            <a:noFill/>
-          </a:ln>
-        </p:spPr>
-        <p:txBody>
-          <a:bodyPr xmlns:a="http://schemas.openxmlformats.org/drawingml/2006/main" wrap="square" lIns="0" tIns="0" rIns="0" bIns="0" anchor="t">
-            <a:noAutofit/>
-          </a:bodyPr>
-          <a:lstStyle xmlns:a="http://schemas.openxmlformats.org/drawingml/2006/main">
-            <a:defPPr>
-              <a:defRPr sz="2175" b="1">
-                <a:solidFill>
-                  <a:srgbClr val="1B1D19"/>
-                </a:solidFill>
-                <a:latin typeface="Pretendard"/>
-                <a:ea typeface="Pretendard"/>
-                <a:cs typeface="Pretendard"/>
-              </a:defRPr>
-            </a:defPPr>
-          </a:lstStyle>
-          <a:p xmlns:a="http://schemas.openxmlformats.org/drawingml/2006/main">
-            <a:pPr>
-              <a:defRPr sz="2175" b="1">
-                <a:solidFill>
-                  <a:srgbClr val="1B1D19"/>
-                </a:solidFill>
-                <a:latin typeface="Pretendard"/>
-                <a:ea typeface="Pretendard"/>
-                <a:cs typeface="Pretendard"/>
-              </a:defRPr>
-            </a:pPr>
-            <a:r>
-              <a:rPr sz="2175" b="1">
-                <a:solidFill>
-                  <a:srgbClr val="1B1D19"/>
-                </a:solidFill>
-                <a:latin typeface="Pretendard"/>
-                <a:ea typeface="Pretendard"/>
-                <a:cs typeface="Pretendard"/>
-              </a:rPr>
-              <a:t>Bleeding and swelling</a:t>
-            </a:r>
-          </a:p>
-        </p:txBody>
-      </p:sp>
-      <p:sp>
-        <p:nvSpPr>
-          <p:cNvPr id="6" name="">
-            <a:extLst xmlns:a="http://schemas.openxmlformats.org/drawingml/2006/main">
-              <a:ext uri="{FF2B5EF4-FFF2-40B4-BE49-F238E27FC236}">
-                <a16:creationId xmlns:a16="http://schemas.microsoft.com/office/drawing/2014/main" id="{96C0E520-300B-4FDA-8A1E-8C5E3562A073}"/>
-              </a:ext>
-            </a:extLst>
-          </p:cNvPr>
-          <p:cNvSpPr>
-            <a:spLocks xmlns:a="http://schemas.openxmlformats.org/drawingml/2006/main" noGrp="1"/>
-          </p:cNvSpPr>
-          <p:nvPr/>
-        </p:nvSpPr>
-        <p:spPr>
-          <a:xfrm xmlns:a="http://schemas.openxmlformats.org/drawingml/2006/main">
-            <a:off x="1181100" y="2933700"/>
-            <a:ext cx="10058400" cy="476250"/>
-          </a:xfrm>
-          <a:prstGeom xmlns:a="http://schemas.openxmlformats.org/drawingml/2006/main" prst="rect">
-            <a:avLst/>
-          </a:prstGeom>
-          <a:noFill xmlns:a="http://schemas.openxmlformats.org/drawingml/2006/main"/>
-          <a:ln xmlns:a="http://schemas.openxmlformats.org/drawingml/2006/main" w="0">
-            <a:noFill/>
-          </a:ln>
-        </p:spPr>
-        <p:txBody>
-          <a:bodyPr xmlns:a="http://schemas.openxmlformats.org/drawingml/2006/main" wrap="square" lIns="0" tIns="0" rIns="0" bIns="0" anchor="t">
-            <a:noAutofit/>
-          </a:bodyPr>
-          <a:lstStyle xmlns:a="http://schemas.openxmlformats.org/drawingml/2006/main">
-            <a:defPPr>
-              <a:defRPr sz="1725" b="0">
-                <a:solidFill>
-                  <a:srgbClr val="6B7265"/>
-                </a:solidFill>
-                <a:latin typeface="Pretendard"/>
-                <a:ea typeface="Pretendard"/>
-                <a:cs typeface="Pretendard"/>
-              </a:defRPr>
-            </a:defPPr>
-          </a:lstStyle>
-          <a:p xmlns:a="http://schemas.openxmlformats.org/drawingml/2006/main">
-            <a:pPr>
-              <a:defRPr sz="1725" b="0">
-                <a:solidFill>
-                  <a:srgbClr val="6B7265"/>
-                </a:solidFill>
-                <a:latin typeface="Pretendard"/>
-                <a:ea typeface="Pretendard"/>
-                <a:cs typeface="Pretendard"/>
-              </a:defRPr>
-            </a:pPr>
-            <a:r>
-              <a:rPr sz="1725" b="0">
-                <a:solidFill>
-                  <a:srgbClr val="6B7265"/>
-                </a:solidFill>
-                <a:latin typeface="Pretendard"/>
-                <a:ea typeface="Pretendard"/>
-                <a:cs typeface="Pretendard"/>
-              </a:rPr>
-              <a:t>Hematoma, foreskin edema</a:t>
-            </a:r>
-          </a:p>
-        </p:txBody>
-      </p:sp>
-      <p:sp>
-        <p:nvSpPr>
-          <p:cNvPr id="7" name="">
-            <a:extLst xmlns:a="http://schemas.openxmlformats.org/drawingml/2006/main">
-              <a:ext uri="{FF2B5EF4-FFF2-40B4-BE49-F238E27FC236}">
-                <a16:creationId xmlns:a16="http://schemas.microsoft.com/office/drawing/2014/main" id="{958D912B-F18C-4EBB-82D4-4F60A03951AE}"/>
-              </a:ext>
-            </a:extLst>
-          </p:cNvPr>
-          <p:cNvSpPr>
-            <a:spLocks xmlns:a="http://schemas.openxmlformats.org/drawingml/2006/main" noGrp="1"/>
-          </p:cNvSpPr>
-          <p:nvPr/>
-        </p:nvSpPr>
-        <p:spPr>
-          <a:xfrm xmlns:a="http://schemas.openxmlformats.org/drawingml/2006/main">
-            <a:off x="685800" y="3448050"/>
-            <a:ext cx="10820400" cy="9525"/>
-          </a:xfrm>
-          <a:prstGeom xmlns:a="http://schemas.openxmlformats.org/drawingml/2006/main" prst="rect">
-            <a:avLst/>
-          </a:prstGeom>
-          <a:solidFill xmlns:a="http://schemas.openxmlformats.org/drawingml/2006/main">
-            <a:srgbClr val="DEDFD6"/>
-          </a:solidFill>
-          <a:ln xmlns:a="http://schemas.openxmlformats.org/drawingml/2006/main" w="0">
-            <a:noFill/>
-          </a:ln>
-        </p:spPr>
-      </p:sp>
-      <p:sp>
-        <p:nvSpPr>
-          <p:cNvPr id="8" name="">
-            <a:extLst xmlns:a="http://schemas.openxmlformats.org/drawingml/2006/main">
-              <a:ext uri="{FF2B5EF4-FFF2-40B4-BE49-F238E27FC236}">
-                <a16:creationId xmlns:a16="http://schemas.microsoft.com/office/drawing/2014/main" id="{AE214B36-D551-4F2C-97A2-5F930FC97448}"/>
-              </a:ext>
-            </a:extLst>
-          </p:cNvPr>
-          <p:cNvSpPr>
-            <a:spLocks xmlns:a="http://schemas.openxmlformats.org/drawingml/2006/main" noGrp="1"/>
-          </p:cNvSpPr>
-          <p:nvPr/>
-        </p:nvSpPr>
-        <p:spPr>
-          <a:xfrm xmlns:a="http://schemas.openxmlformats.org/drawingml/2006/main">
-            <a:off x="685800" y="3667125"/>
-            <a:ext cx="361950" cy="342900"/>
-          </a:xfrm>
-          <a:prstGeom xmlns:a="http://schemas.openxmlformats.org/drawingml/2006/main" prst="rect">
-            <a:avLst/>
-          </a:prstGeom>
-          <a:noFill xmlns:a="http://schemas.openxmlformats.org/drawingml/2006/main"/>
-          <a:ln xmlns:a="http://schemas.openxmlformats.org/drawingml/2006/main" w="0">
-            <a:noFill/>
-          </a:ln>
-        </p:spPr>
-        <p:txBody>
-          <a:bodyPr xmlns:a="http://schemas.openxmlformats.org/drawingml/2006/main" wrap="square" lIns="0" tIns="0" rIns="0" bIns="0" anchor="t">
-            <a:noAutofit/>
-          </a:bodyPr>
-          <a:lstStyle xmlns:a="http://schemas.openxmlformats.org/drawingml/2006/main">
-            <a:defPPr>
-              <a:defRPr sz="1125" b="0">
-                <a:solidFill>
-                  <a:srgbClr val="9B7744"/>
-                </a:solidFill>
-                <a:latin typeface="Pretendard"/>
-                <a:ea typeface="Pretendard"/>
-                <a:cs typeface="Pretendard"/>
-              </a:defRPr>
-            </a:defPPr>
-          </a:lstStyle>
-          <a:p xmlns:a="http://schemas.openxmlformats.org/drawingml/2006/main">
-            <a:pPr>
-              <a:defRPr sz="1125" b="0">
-                <a:solidFill>
-                  <a:srgbClr val="9B7744"/>
-                </a:solidFill>
-                <a:latin typeface="Pretendard"/>
-                <a:ea typeface="Pretendard"/>
-                <a:cs typeface="Pretendard"/>
-              </a:defRPr>
-            </a:pPr>
-            <a:r>
-              <a:rPr sz="1125" b="0">
-                <a:solidFill>
-                  <a:srgbClr val="9B7744"/>
-                </a:solidFill>
-                <a:latin typeface="Pretendard"/>
-                <a:ea typeface="Pretendard"/>
-                <a:cs typeface="Pretendard"/>
-              </a:rPr>
-              <a:t>02</a:t>
-            </a:r>
-          </a:p>
-        </p:txBody>
-      </p:sp>
-      <p:sp>
-        <p:nvSpPr>
-          <p:cNvPr id="9" name="">
-            <a:extLst xmlns:a="http://schemas.openxmlformats.org/drawingml/2006/main">
-              <a:ext uri="{FF2B5EF4-FFF2-40B4-BE49-F238E27FC236}">
-                <a16:creationId xmlns:a16="http://schemas.microsoft.com/office/drawing/2014/main" id="{09FD8EF6-1E58-41C3-8BC2-A05569FA4528}"/>
-              </a:ext>
-            </a:extLst>
-          </p:cNvPr>
-          <p:cNvSpPr>
-            <a:spLocks xmlns:a="http://schemas.openxmlformats.org/drawingml/2006/main" noGrp="1"/>
-          </p:cNvSpPr>
-          <p:nvPr/>
-        </p:nvSpPr>
-        <p:spPr>
-          <a:xfrm xmlns:a="http://schemas.openxmlformats.org/drawingml/2006/main">
-            <a:off x="1181100" y="3638550"/>
-            <a:ext cx="10325100" cy="381000"/>
-          </a:xfrm>
-          <a:prstGeom xmlns:a="http://schemas.openxmlformats.org/drawingml/2006/main" prst="rect">
-            <a:avLst/>
-          </a:prstGeom>
-          <a:noFill xmlns:a="http://schemas.openxmlformats.org/drawingml/2006/main"/>
-          <a:ln xmlns:a="http://schemas.openxmlformats.org/drawingml/2006/main" w="0">
-            <a:noFill/>
-          </a:ln>
-        </p:spPr>
-        <p:txBody>
-          <a:bodyPr xmlns:a="http://schemas.openxmlformats.org/drawingml/2006/main" wrap="square" lIns="0" tIns="0" rIns="0" bIns="0" anchor="t">
-            <a:noAutofit/>
-          </a:bodyPr>
-          <a:lstStyle xmlns:a="http://schemas.openxmlformats.org/drawingml/2006/main">
-            <a:defPPr>
-              <a:defRPr sz="2175" b="1">
-                <a:solidFill>
-                  <a:srgbClr val="1B1D19"/>
-                </a:solidFill>
-                <a:latin typeface="Pretendard"/>
-                <a:ea typeface="Pretendard"/>
-                <a:cs typeface="Pretendard"/>
-              </a:defRPr>
-            </a:defPPr>
-          </a:lstStyle>
-          <a:p xmlns:a="http://schemas.openxmlformats.org/drawingml/2006/main">
-            <a:pPr>
-              <a:defRPr sz="2175" b="1">
-                <a:solidFill>
-                  <a:srgbClr val="1B1D19"/>
-                </a:solidFill>
-                <a:latin typeface="Pretendard"/>
-                <a:ea typeface="Pretendard"/>
-                <a:cs typeface="Pretendard"/>
-              </a:defRPr>
-            </a:pPr>
-            <a:r>
-              <a:rPr sz="2175" b="1">
-                <a:solidFill>
-                  <a:srgbClr val="1B1D19"/>
-                </a:solidFill>
-                <a:latin typeface="Pretendard"/>
-                <a:ea typeface="Pretendard"/>
-                <a:cs typeface="Pretendard"/>
-              </a:rPr>
-              <a:t>Wound complications</a:t>
-            </a:r>
-          </a:p>
-        </p:txBody>
-      </p:sp>
-      <p:sp>
-        <p:nvSpPr>
-          <p:cNvPr id="10" name="">
-            <a:extLst xmlns:a="http://schemas.openxmlformats.org/drawingml/2006/main">
-              <a:ext uri="{FF2B5EF4-FFF2-40B4-BE49-F238E27FC236}">
-                <a16:creationId xmlns:a16="http://schemas.microsoft.com/office/drawing/2014/main" id="{FE70D58C-9B01-49D3-9461-ED10C842A8B4}"/>
-              </a:ext>
-            </a:extLst>
-          </p:cNvPr>
-          <p:cNvSpPr>
-            <a:spLocks xmlns:a="http://schemas.openxmlformats.org/drawingml/2006/main" noGrp="1"/>
-          </p:cNvSpPr>
-          <p:nvPr/>
-        </p:nvSpPr>
-        <p:spPr>
-          <a:xfrm xmlns:a="http://schemas.openxmlformats.org/drawingml/2006/main">
-            <a:off x="1181100" y="4076700"/>
-            <a:ext cx="10058400" cy="476250"/>
-          </a:xfrm>
-          <a:prstGeom xmlns:a="http://schemas.openxmlformats.org/drawingml/2006/main" prst="rect">
-            <a:avLst/>
-          </a:prstGeom>
-          <a:noFill xmlns:a="http://schemas.openxmlformats.org/drawingml/2006/main"/>
-          <a:ln xmlns:a="http://schemas.openxmlformats.org/drawingml/2006/main" w="0">
-            <a:noFill/>
-          </a:ln>
-        </p:spPr>
-        <p:txBody>
-          <a:bodyPr xmlns:a="http://schemas.openxmlformats.org/drawingml/2006/main" wrap="square" lIns="0" tIns="0" rIns="0" bIns="0" anchor="t">
-            <a:noAutofit/>
-          </a:bodyPr>
-          <a:lstStyle xmlns:a="http://schemas.openxmlformats.org/drawingml/2006/main">
-            <a:defPPr>
-              <a:defRPr sz="1725" b="0">
-                <a:solidFill>
-                  <a:srgbClr val="6B7265"/>
-                </a:solidFill>
-                <a:latin typeface="Pretendard"/>
-                <a:ea typeface="Pretendard"/>
-                <a:cs typeface="Pretendard"/>
-              </a:defRPr>
-            </a:defPPr>
-          </a:lstStyle>
-          <a:p xmlns:a="http://schemas.openxmlformats.org/drawingml/2006/main">
-            <a:pPr>
-              <a:defRPr sz="1725" b="0">
-                <a:solidFill>
-                  <a:srgbClr val="6B7265"/>
-                </a:solidFill>
-                <a:latin typeface="Pretendard"/>
-                <a:ea typeface="Pretendard"/>
-                <a:cs typeface="Pretendard"/>
-              </a:defRPr>
-            </a:pPr>
-            <a:r>
-              <a:rPr sz="1725" b="0">
-                <a:solidFill>
-                  <a:srgbClr val="6B7265"/>
-                </a:solidFill>
-                <a:latin typeface="Pretendard"/>
-                <a:ea typeface="Pretendard"/>
-                <a:cs typeface="Pretendard"/>
-              </a:rPr>
-              <a:t>Delayed healing, infection, skin necrosis</a:t>
-            </a:r>
-          </a:p>
-        </p:txBody>
-      </p:sp>
-      <p:sp>
-        <p:nvSpPr>
-          <p:cNvPr id="11" name="">
-            <a:extLst xmlns:a="http://schemas.openxmlformats.org/drawingml/2006/main">
-              <a:ext uri="{FF2B5EF4-FFF2-40B4-BE49-F238E27FC236}">
-                <a16:creationId xmlns:a16="http://schemas.microsoft.com/office/drawing/2014/main" id="{C8BFFAD2-A761-4C95-BFC1-15CDB9FDDCAB}"/>
-              </a:ext>
-            </a:extLst>
-          </p:cNvPr>
-          <p:cNvSpPr>
-            <a:spLocks xmlns:a="http://schemas.openxmlformats.org/drawingml/2006/main" noGrp="1"/>
-          </p:cNvSpPr>
-          <p:nvPr/>
-        </p:nvSpPr>
-        <p:spPr>
-          <a:xfrm xmlns:a="http://schemas.openxmlformats.org/drawingml/2006/main">
-            <a:off x="685800" y="4591050"/>
-            <a:ext cx="10820400" cy="9525"/>
-          </a:xfrm>
-          <a:prstGeom xmlns:a="http://schemas.openxmlformats.org/drawingml/2006/main" prst="rect">
-            <a:avLst/>
-          </a:prstGeom>
-          <a:solidFill xmlns:a="http://schemas.openxmlformats.org/drawingml/2006/main">
-            <a:srgbClr val="DEDFD6"/>
-          </a:solidFill>
-          <a:ln xmlns:a="http://schemas.openxmlformats.org/drawingml/2006/main" w="0">
-            <a:noFill/>
-          </a:ln>
-        </p:spPr>
-      </p:sp>
-      <p:sp>
-        <p:nvSpPr>
-          <p:cNvPr id="12" name="">
-            <a:extLst xmlns:a="http://schemas.openxmlformats.org/drawingml/2006/main">
-              <a:ext uri="{FF2B5EF4-FFF2-40B4-BE49-F238E27FC236}">
-                <a16:creationId xmlns:a16="http://schemas.microsoft.com/office/drawing/2014/main" id="{DEF4BCE0-F5F4-4971-AA29-7FC1B0032F08}"/>
-              </a:ext>
-            </a:extLst>
-          </p:cNvPr>
-          <p:cNvSpPr>
-            <a:spLocks xmlns:a="http://schemas.openxmlformats.org/drawingml/2006/main" noGrp="1"/>
-          </p:cNvSpPr>
-          <p:nvPr/>
-        </p:nvSpPr>
-        <p:spPr>
-          <a:xfrm xmlns:a="http://schemas.openxmlformats.org/drawingml/2006/main">
-            <a:off x="685800" y="4810125"/>
-            <a:ext cx="361950" cy="342900"/>
-          </a:xfrm>
-          <a:prstGeom xmlns:a="http://schemas.openxmlformats.org/drawingml/2006/main" prst="rect">
-            <a:avLst/>
-          </a:prstGeom>
-          <a:noFill xmlns:a="http://schemas.openxmlformats.org/drawingml/2006/main"/>
-          <a:ln xmlns:a="http://schemas.openxmlformats.org/drawingml/2006/main" w="0">
-            <a:noFill/>
-          </a:ln>
-        </p:spPr>
-        <p:txBody>
-          <a:bodyPr xmlns:a="http://schemas.openxmlformats.org/drawingml/2006/main" wrap="square" lIns="0" tIns="0" rIns="0" bIns="0" anchor="t">
-            <a:noAutofit/>
-          </a:bodyPr>
-          <a:lstStyle xmlns:a="http://schemas.openxmlformats.org/drawingml/2006/main">
-            <a:defPPr>
-              <a:defRPr sz="1125" b="0">
-                <a:solidFill>
-                  <a:srgbClr val="9B7744"/>
-                </a:solidFill>
-                <a:latin typeface="Pretendard"/>
-                <a:ea typeface="Pretendard"/>
-                <a:cs typeface="Pretendard"/>
-              </a:defRPr>
-            </a:defPPr>
-          </a:lstStyle>
-          <a:p xmlns:a="http://schemas.openxmlformats.org/drawingml/2006/main">
-            <a:pPr>
-              <a:defRPr sz="1125" b="0">
-                <a:solidFill>
-                  <a:srgbClr val="9B7744"/>
-                </a:solidFill>
-                <a:latin typeface="Pretendard"/>
-                <a:ea typeface="Pretendard"/>
-                <a:cs typeface="Pretendard"/>
-              </a:defRPr>
-            </a:pPr>
-            <a:r>
-              <a:rPr sz="1125" b="0">
-                <a:solidFill>
-                  <a:srgbClr val="9B7744"/>
-                </a:solidFill>
-                <a:latin typeface="Pretendard"/>
-                <a:ea typeface="Pretendard"/>
-                <a:cs typeface="Pretendard"/>
-              </a:rPr>
-              <a:t>03</a:t>
-            </a:r>
-          </a:p>
-        </p:txBody>
-      </p:sp>
-      <p:sp>
-        <p:nvSpPr>
-          <p:cNvPr id="13" name="">
-            <a:extLst xmlns:a="http://schemas.openxmlformats.org/drawingml/2006/main">
-              <a:ext uri="{FF2B5EF4-FFF2-40B4-BE49-F238E27FC236}">
-                <a16:creationId xmlns:a16="http://schemas.microsoft.com/office/drawing/2014/main" id="{ECEBEFDD-6A48-46ED-BB77-5F57811725A3}"/>
-              </a:ext>
-            </a:extLst>
-          </p:cNvPr>
-          <p:cNvSpPr>
-            <a:spLocks xmlns:a="http://schemas.openxmlformats.org/drawingml/2006/main" noGrp="1"/>
-          </p:cNvSpPr>
-          <p:nvPr/>
-        </p:nvSpPr>
-        <p:spPr>
-          <a:xfrm xmlns:a="http://schemas.openxmlformats.org/drawingml/2006/main">
-            <a:off x="1181100" y="4781550"/>
-            <a:ext cx="10325100" cy="381000"/>
-          </a:xfrm>
-          <a:prstGeom xmlns:a="http://schemas.openxmlformats.org/drawingml/2006/main" prst="rect">
-            <a:avLst/>
-          </a:prstGeom>
-          <a:noFill xmlns:a="http://schemas.openxmlformats.org/drawingml/2006/main"/>
-          <a:ln xmlns:a="http://schemas.openxmlformats.org/drawingml/2006/main" w="0">
-            <a:noFill/>
-          </a:ln>
-        </p:spPr>
-        <p:txBody>
-          <a:bodyPr xmlns:a="http://schemas.openxmlformats.org/drawingml/2006/main" wrap="square" lIns="0" tIns="0" rIns="0" bIns="0" anchor="t">
-            <a:noAutofit/>
-          </a:bodyPr>
-          <a:lstStyle xmlns:a="http://schemas.openxmlformats.org/drawingml/2006/main">
-            <a:defPPr>
-              <a:defRPr sz="2175" b="1">
-                <a:solidFill>
-                  <a:srgbClr val="1B1D19"/>
-                </a:solidFill>
-                <a:latin typeface="Pretendard"/>
-                <a:ea typeface="Pretendard"/>
-                <a:cs typeface="Pretendard"/>
-              </a:defRPr>
-            </a:defPPr>
-          </a:lstStyle>
-          <a:p xmlns:a="http://schemas.openxmlformats.org/drawingml/2006/main">
-            <a:pPr>
-              <a:defRPr sz="2175" b="1">
-                <a:solidFill>
-                  <a:srgbClr val="1B1D19"/>
-                </a:solidFill>
-                <a:latin typeface="Pretendard"/>
-                <a:ea typeface="Pretendard"/>
-                <a:cs typeface="Pretendard"/>
-              </a:defRPr>
-            </a:pPr>
-            <a:r>
-              <a:rPr sz="2175" b="1">
-                <a:solidFill>
-                  <a:srgbClr val="1B1D19"/>
-                </a:solidFill>
-                <a:latin typeface="Pretendard"/>
-                <a:ea typeface="Pretendard"/>
-                <a:cs typeface="Pretendard"/>
-              </a:rPr>
-              <a:t>Contour and discomfort</a:t>
-            </a:r>
-          </a:p>
-        </p:txBody>
-      </p:sp>
-      <p:sp>
-        <p:nvSpPr>
-          <p:cNvPr id="14" name="">
-            <a:extLst xmlns:a="http://schemas.openxmlformats.org/drawingml/2006/main">
-              <a:ext uri="{FF2B5EF4-FFF2-40B4-BE49-F238E27FC236}">
-                <a16:creationId xmlns:a16="http://schemas.microsoft.com/office/drawing/2014/main" id="{735B6ACA-A0CC-4AAE-B58E-EBFA839E6D3A}"/>
-              </a:ext>
-            </a:extLst>
-          </p:cNvPr>
-          <p:cNvSpPr>
-            <a:spLocks xmlns:a="http://schemas.openxmlformats.org/drawingml/2006/main" noGrp="1"/>
-          </p:cNvSpPr>
-          <p:nvPr/>
-        </p:nvSpPr>
-        <p:spPr>
-          <a:xfrm xmlns:a="http://schemas.openxmlformats.org/drawingml/2006/main">
-            <a:off x="1181100" y="5219700"/>
-            <a:ext cx="10058400" cy="476250"/>
-          </a:xfrm>
-          <a:prstGeom xmlns:a="http://schemas.openxmlformats.org/drawingml/2006/main" prst="rect">
-            <a:avLst/>
-          </a:prstGeom>
-          <a:noFill xmlns:a="http://schemas.openxmlformats.org/drawingml/2006/main"/>
-          <a:ln xmlns:a="http://schemas.openxmlformats.org/drawingml/2006/main" w="0">
-            <a:noFill/>
-          </a:ln>
-        </p:spPr>
-        <p:txBody>
-          <a:bodyPr xmlns:a="http://schemas.openxmlformats.org/drawingml/2006/main" wrap="square" lIns="0" tIns="0" rIns="0" bIns="0" anchor="t">
-            <a:noAutofit/>
-          </a:bodyPr>
-          <a:lstStyle xmlns:a="http://schemas.openxmlformats.org/drawingml/2006/main">
-            <a:defPPr>
-              <a:defRPr sz="1725" b="0">
-                <a:solidFill>
-                  <a:srgbClr val="6B7265"/>
-                </a:solidFill>
-                <a:latin typeface="Pretendard"/>
-                <a:ea typeface="Pretendard"/>
-                <a:cs typeface="Pretendard"/>
-              </a:defRPr>
-            </a:defPPr>
-          </a:lstStyle>
-          <a:p xmlns:a="http://schemas.openxmlformats.org/drawingml/2006/main">
-            <a:pPr>
-              <a:defRPr sz="1725" b="0">
-                <a:solidFill>
-                  <a:srgbClr val="6B7265"/>
-                </a:solidFill>
-                <a:latin typeface="Pretendard"/>
-                <a:ea typeface="Pretendard"/>
-                <a:cs typeface="Pretendard"/>
-              </a:defRPr>
-            </a:pPr>
-            <a:r>
-              <a:rPr sz="1725" b="0">
-                <a:solidFill>
-                  <a:srgbClr val="6B7265"/>
-                </a:solidFill>
-                <a:latin typeface="Pretendard"/>
-                <a:ea typeface="Pretendard"/>
-                <a:cs typeface="Pretendard"/>
-              </a:rPr>
-              <a:t>Graft contour irregularity, discomfort during erection</a:t>
-            </a:r>
-          </a:p>
-        </p:txBody>
-      </p:sp>
-      <p:sp>
-        <p:nvSpPr>
-          <p:cNvPr id="15" name="">
-            <a:extLst xmlns:a="http://schemas.openxmlformats.org/drawingml/2006/main">
-              <a:ext uri="{FF2B5EF4-FFF2-40B4-BE49-F238E27FC236}">
-                <a16:creationId xmlns:a16="http://schemas.microsoft.com/office/drawing/2014/main" id="{38D60911-B5A3-4B0F-A7B3-E8442C8BB1E9}"/>
-              </a:ext>
-            </a:extLst>
-          </p:cNvPr>
-          <p:cNvSpPr>
-            <a:spLocks xmlns:a="http://schemas.openxmlformats.org/drawingml/2006/main" noGrp="1"/>
-          </p:cNvSpPr>
-          <p:nvPr/>
-        </p:nvSpPr>
-        <p:spPr>
-          <a:xfrm xmlns:a="http://schemas.openxmlformats.org/drawingml/2006/main">
-            <a:off x="685800" y="6019800"/>
-            <a:ext cx="10287000" cy="266700"/>
-          </a:xfrm>
-          <a:prstGeom xmlns:a="http://schemas.openxmlformats.org/drawingml/2006/main" prst="rect">
-            <a:avLst/>
-          </a:prstGeom>
-          <a:noFill xmlns:a="http://schemas.openxmlformats.org/drawingml/2006/main"/>
-          <a:ln xmlns:a="http://schemas.openxmlformats.org/drawingml/2006/main" w="0">
-            <a:noFill/>
-          </a:ln>
-        </p:spPr>
-        <p:txBody>
-          <a:bodyPr xmlns:a="http://schemas.openxmlformats.org/drawingml/2006/main" wrap="square" lIns="0" tIns="0" rIns="0" bIns="0" anchor="t">
-            <a:noAutofit/>
-          </a:bodyPr>
-          <a:lstStyle xmlns:a="http://schemas.openxmlformats.org/drawingml/2006/main">
-            <a:defPPr>
-              <a:defRPr sz="1050" b="0">
-                <a:solidFill>
-                  <a:srgbClr val="6B7265"/>
-                </a:solidFill>
-                <a:latin typeface="Pretendard"/>
-                <a:ea typeface="Pretendard"/>
-                <a:cs typeface="Pretendard"/>
-              </a:defRPr>
-            </a:defPPr>
-          </a:lstStyle>
-          <a:p xmlns:a="http://schemas.openxmlformats.org/drawingml/2006/main">
-            <a:pPr>
-              <a:defRPr sz="1050" b="0">
-                <a:solidFill>
-                  <a:srgbClr val="6B7265"/>
-                </a:solidFill>
-                <a:latin typeface="Pretendard"/>
-                <a:ea typeface="Pretendard"/>
-                <a:cs typeface="Pretendard"/>
-              </a:defRPr>
-            </a:pPr>
-            <a:r>
-              <a:rPr sz="1050" b="0">
-                <a:solidFill>
-                  <a:srgbClr val="6B7265"/>
-                </a:solidFill>
-                <a:latin typeface="Pretendard"/>
-                <a:ea typeface="Pretendard"/>
-                <a:cs typeface="Pretendard"/>
-              </a:rPr>
-              <a:t>Reported in ADM augmentation literature</a:t>
-            </a:r>
-          </a:p>
-        </p:txBody>
-      </p:sp>
-      <p:sp>
-        <p:nvSpPr>
-          <p:cNvPr id="16" name="">
-            <a:extLst xmlns:a="http://schemas.openxmlformats.org/drawingml/2006/main">
-              <a:ext uri="{FF2B5EF4-FFF2-40B4-BE49-F238E27FC236}">
-                <a16:creationId xmlns:a16="http://schemas.microsoft.com/office/drawing/2014/main" id="{327F96A0-F3FA-450E-90FC-FED9CB7F9F2B}"/>
+                <a16:creationId xmlns:a16="http://schemas.microsoft.com/office/drawing/2014/main" id="{DDF221EA-67D9-4240-8407-80A5B3485F04}"/>
               </a:ext>
             </a:extLst>
           </p:cNvPr>
@@ -5617,10 +5084,10 @@
       </p:sp>
       <p:sp>
         <p:nvSpPr>
-          <p:cNvPr id="17" name="">
-            <a:extLst xmlns:a="http://schemas.openxmlformats.org/drawingml/2006/main">
-              <a:ext uri="{FF2B5EF4-FFF2-40B4-BE49-F238E27FC236}">
-                <a16:creationId xmlns:a16="http://schemas.microsoft.com/office/drawing/2014/main" id="{87D73E79-B6C6-4E17-985B-CEF9C59FF17E}"/>
+          <p:cNvPr id="6" name="">
+            <a:extLst xmlns:a="http://schemas.openxmlformats.org/drawingml/2006/main">
+              <a:ext uri="{FF2B5EF4-FFF2-40B4-BE49-F238E27FC236}">
+                <a16:creationId xmlns:a16="http://schemas.microsoft.com/office/drawing/2014/main" id="{0946B173-3BD1-433E-B28E-A94B36D16DA3}"/>
               </a:ext>
             </a:extLst>
           </p:cNvPr>
@@ -5686,7 +5153,7 @@
     </p:spTree>
     <p:extLst>
       <p:ext uri="{BB962C8B-B14F-4D97-AF65-F5344CB8AC3E}">
-        <p14:creationId xmlns:p14="http://schemas.microsoft.com/office/powerpoint/2010/main" val="884401329"/>
+        <p14:creationId xmlns:p14="http://schemas.microsoft.com/office/powerpoint/2010/main" val="21090931"/>
       </p:ext>
     </p:extLst>
   </p:cSld>
@@ -5714,10 +5181,10 @@
       </p:grpSpPr>
       <p:sp>
         <p:nvSpPr>
-          <p:cNvPr id="11" name="">
-            <a:extLst xmlns:a="http://schemas.openxmlformats.org/drawingml/2006/main">
-              <a:ext uri="{FF2B5EF4-FFF2-40B4-BE49-F238E27FC236}">
-                <a16:creationId xmlns:a16="http://schemas.microsoft.com/office/drawing/2014/main" id="{C8BB1151-99E3-4577-A6A7-70D308B4322C}"/>
+          <p:cNvPr id="7" name="">
+            <a:extLst xmlns:a="http://schemas.openxmlformats.org/drawingml/2006/main">
+              <a:ext uri="{FF2B5EF4-FFF2-40B4-BE49-F238E27FC236}">
+                <a16:creationId xmlns:a16="http://schemas.microsoft.com/office/drawing/2014/main" id="{46D3BBE8-0691-430C-8DAD-A4EB5A105E29}"/>
               </a:ext>
             </a:extLst>
           </p:cNvPr>
@@ -5775,7 +5242,7 @@
                 <a:ea typeface="Pretendard"/>
                 <a:cs typeface="Pretendard"/>
               </a:rPr>
-              <a:t>AFTERCARE</a:t>
+              <a:t>CLINICAL CASES / CASE 5</a:t>
             </a:r>
           </a:p>
         </p:txBody>
@@ -5785,7 +5252,7 @@
           <p:cNvPr id="2" name="">
             <a:extLst xmlns:a="http://schemas.openxmlformats.org/drawingml/2006/main">
               <a:ext uri="{FF2B5EF4-FFF2-40B4-BE49-F238E27FC236}">
-                <a16:creationId xmlns:a16="http://schemas.microsoft.com/office/drawing/2014/main" id="{C4E4469A-998C-4139-A4EC-AA09CB3C0DD6}"/>
+                <a16:creationId xmlns:a16="http://schemas.microsoft.com/office/drawing/2014/main" id="{5A3B2B39-9BAE-43D7-AAD1-8FF71D5B148A}"/>
               </a:ext>
             </a:extLst>
           </p:cNvPr>
@@ -5843,7 +5310,7 @@
                 <a:ea typeface="Pretendard"/>
                 <a:cs typeface="Pretendard"/>
               </a:rPr>
-              <a:t>Postoperative Care &amp; Dressing</a:t>
+              <a:t>Contour Step-off Correction</a:t>
             </a:r>
           </a:p>
         </p:txBody>
@@ -5853,117 +5320,19 @@
           <p:cNvPr id="3" name="">
             <a:extLst xmlns:a="http://schemas.openxmlformats.org/drawingml/2006/main">
               <a:ext uri="{FF2B5EF4-FFF2-40B4-BE49-F238E27FC236}">
-                <a16:creationId xmlns:a16="http://schemas.microsoft.com/office/drawing/2014/main" id="{DDA2F534-5913-4470-BAE8-0C1193A1133B}"/>
-              </a:ext>
-            </a:extLst>
-          </p:cNvPr>
-          <p:cNvSpPr>
-            <a:spLocks xmlns:a="http://schemas.openxmlformats.org/drawingml/2006/main" noGrp="1"/>
-          </p:cNvSpPr>
-          <p:nvPr/>
-        </p:nvSpPr>
-        <p:spPr>
-          <a:xfrm xmlns:a="http://schemas.openxmlformats.org/drawingml/2006/main">
-            <a:off x="685800" y="2457450"/>
-            <a:ext cx="5105400" cy="19050"/>
-          </a:xfrm>
-          <a:prstGeom xmlns:a="http://schemas.openxmlformats.org/drawingml/2006/main" prst="rect">
-            <a:avLst/>
-          </a:prstGeom>
-          <a:solidFill xmlns:a="http://schemas.openxmlformats.org/drawingml/2006/main">
-            <a:srgbClr val="B5915D"/>
-          </a:solidFill>
-          <a:ln xmlns:a="http://schemas.openxmlformats.org/drawingml/2006/main" w="0">
-            <a:noFill/>
-          </a:ln>
-        </p:spPr>
-      </p:sp>
-      <p:sp>
-        <p:nvSpPr>
-          <p:cNvPr id="4" name="">
-            <a:extLst xmlns:a="http://schemas.openxmlformats.org/drawingml/2006/main">
-              <a:ext uri="{FF2B5EF4-FFF2-40B4-BE49-F238E27FC236}">
-                <a16:creationId xmlns:a16="http://schemas.microsoft.com/office/drawing/2014/main" id="{A5C183D9-AD2F-4F8F-90D4-D9C8D8CB32DD}"/>
-              </a:ext>
-            </a:extLst>
-          </p:cNvPr>
-          <p:cNvSpPr>
-            <a:spLocks xmlns:a="http://schemas.openxmlformats.org/drawingml/2006/main" noGrp="1"/>
-          </p:cNvSpPr>
-          <p:nvPr/>
-        </p:nvSpPr>
-        <p:spPr>
-          <a:xfrm xmlns:a="http://schemas.openxmlformats.org/drawingml/2006/main">
-            <a:off x="685800" y="2781300"/>
-            <a:ext cx="5105400" cy="590550"/>
-          </a:xfrm>
-          <a:prstGeom xmlns:a="http://schemas.openxmlformats.org/drawingml/2006/main" prst="rect">
-            <a:avLst/>
-          </a:prstGeom>
-          <a:noFill xmlns:a="http://schemas.openxmlformats.org/drawingml/2006/main"/>
-          <a:ln xmlns:a="http://schemas.openxmlformats.org/drawingml/2006/main" w="0">
-            <a:noFill/>
-          </a:ln>
-        </p:spPr>
-        <p:txBody>
-          <a:bodyPr xmlns:a="http://schemas.openxmlformats.org/drawingml/2006/main" wrap="square" lIns="0" tIns="0" rIns="0" bIns="0" anchor="t">
-            <a:noAutofit/>
-          </a:bodyPr>
-          <a:lstStyle xmlns:a="http://schemas.openxmlformats.org/drawingml/2006/main">
-            <a:defPPr>
-              <a:defRPr sz="2325" b="1">
-                <a:solidFill>
-                  <a:srgbClr val="1B1D19"/>
-                </a:solidFill>
-                <a:latin typeface="Pretendard"/>
-                <a:ea typeface="Pretendard"/>
-                <a:cs typeface="Pretendard"/>
-              </a:defRPr>
-            </a:defPPr>
-          </a:lstStyle>
-          <a:p xmlns:a="http://schemas.openxmlformats.org/drawingml/2006/main">
-            <a:pPr>
-              <a:defRPr sz="2325" b="1">
-                <a:solidFill>
-                  <a:srgbClr val="1B1D19"/>
-                </a:solidFill>
-                <a:latin typeface="Pretendard"/>
-                <a:ea typeface="Pretendard"/>
-                <a:cs typeface="Pretendard"/>
-              </a:defRPr>
-            </a:pPr>
-            <a:r>
-              <a:rPr sz="2325" b="1">
-                <a:solidFill>
-                  <a:srgbClr val="1B1D19"/>
-                </a:solidFill>
-                <a:latin typeface="Pretendard"/>
-                <a:ea typeface="Pretendard"/>
-                <a:cs typeface="Pretendard"/>
-              </a:rPr>
-              <a:t>Postoperative care</a:t>
-            </a:r>
-          </a:p>
-        </p:txBody>
-      </p:sp>
-      <p:sp>
-        <p:nvSpPr>
-          <p:cNvPr id="5" name="">
-            <a:extLst xmlns:a="http://schemas.openxmlformats.org/drawingml/2006/main">
-              <a:ext uri="{FF2B5EF4-FFF2-40B4-BE49-F238E27FC236}">
-                <a16:creationId xmlns:a16="http://schemas.microsoft.com/office/drawing/2014/main" id="{466DB7A4-9AF0-427B-A298-25F8EB89AAE7}"/>
-              </a:ext>
-            </a:extLst>
-          </p:cNvPr>
-          <p:cNvSpPr>
-            <a:spLocks xmlns:a="http://schemas.openxmlformats.org/drawingml/2006/main" noGrp="1"/>
-          </p:cNvSpPr>
-          <p:nvPr/>
-        </p:nvSpPr>
-        <p:spPr>
-          <a:xfrm xmlns:a="http://schemas.openxmlformats.org/drawingml/2006/main">
-            <a:off x="685800" y="3581400"/>
-            <a:ext cx="5105400" cy="2190750"/>
+                <a16:creationId xmlns:a16="http://schemas.microsoft.com/office/drawing/2014/main" id="{79FE073C-10FA-4C5D-B24D-1F2D1F74E221}"/>
+              </a:ext>
+            </a:extLst>
+          </p:cNvPr>
+          <p:cNvSpPr>
+            <a:spLocks xmlns:a="http://schemas.openxmlformats.org/drawingml/2006/main" noGrp="1"/>
+          </p:cNvSpPr>
+          <p:nvPr/>
+        </p:nvSpPr>
+        <p:spPr>
+          <a:xfrm xmlns:a="http://schemas.openxmlformats.org/drawingml/2006/main">
+            <a:off x="685800" y="2476500"/>
+            <a:ext cx="10820400" cy="3524250"/>
           </a:xfrm>
           <a:prstGeom xmlns:a="http://schemas.openxmlformats.org/drawingml/2006/main" prst="rect">
             <a:avLst/>
@@ -5978,28 +5347,28 @@
       </p:sp>
       <p:sp>
         <p:nvSpPr>
-          <p:cNvPr id="6" name="">
-            <a:extLst xmlns:a="http://schemas.openxmlformats.org/drawingml/2006/main">
-              <a:ext uri="{FF2B5EF4-FFF2-40B4-BE49-F238E27FC236}">
-                <a16:creationId xmlns:a16="http://schemas.microsoft.com/office/drawing/2014/main" id="{D6075F67-3FC5-4C35-A19F-4F50AAFC5A45}"/>
-              </a:ext>
-            </a:extLst>
-          </p:cNvPr>
-          <p:cNvSpPr>
-            <a:spLocks xmlns:a="http://schemas.openxmlformats.org/drawingml/2006/main" noGrp="1"/>
-          </p:cNvSpPr>
-          <p:nvPr/>
-        </p:nvSpPr>
-        <p:spPr>
-          <a:xfrm xmlns:a="http://schemas.openxmlformats.org/drawingml/2006/main">
-            <a:off x="6400800" y="2457450"/>
-            <a:ext cx="5105400" cy="19050"/>
+          <p:cNvPr id="4" name="">
+            <a:extLst xmlns:a="http://schemas.openxmlformats.org/drawingml/2006/main">
+              <a:ext uri="{FF2B5EF4-FFF2-40B4-BE49-F238E27FC236}">
+                <a16:creationId xmlns:a16="http://schemas.microsoft.com/office/drawing/2014/main" id="{9B816346-CD9B-4996-95B4-F4EA5AA96839}"/>
+              </a:ext>
+            </a:extLst>
+          </p:cNvPr>
+          <p:cNvSpPr>
+            <a:spLocks xmlns:a="http://schemas.openxmlformats.org/drawingml/2006/main" noGrp="1"/>
+          </p:cNvSpPr>
+          <p:nvPr/>
+        </p:nvSpPr>
+        <p:spPr>
+          <a:xfrm xmlns:a="http://schemas.openxmlformats.org/drawingml/2006/main">
+            <a:off x="685800" y="2476500"/>
+            <a:ext cx="10820400" cy="9525"/>
           </a:xfrm>
           <a:prstGeom xmlns:a="http://schemas.openxmlformats.org/drawingml/2006/main" prst="rect">
             <a:avLst/>
           </a:prstGeom>
           <a:solidFill xmlns:a="http://schemas.openxmlformats.org/drawingml/2006/main">
-            <a:srgbClr val="B5915D"/>
+            <a:srgbClr val="DEDFD6"/>
           </a:solidFill>
           <a:ln xmlns:a="http://schemas.openxmlformats.org/drawingml/2006/main" w="0">
             <a:noFill/>
@@ -6008,108 +5377,10 @@
       </p:sp>
       <p:sp>
         <p:nvSpPr>
-          <p:cNvPr id="7" name="">
-            <a:extLst xmlns:a="http://schemas.openxmlformats.org/drawingml/2006/main">
-              <a:ext uri="{FF2B5EF4-FFF2-40B4-BE49-F238E27FC236}">
-                <a16:creationId xmlns:a16="http://schemas.microsoft.com/office/drawing/2014/main" id="{0C7AEE1E-63B4-4705-BC11-C9AC2468B77F}"/>
-              </a:ext>
-            </a:extLst>
-          </p:cNvPr>
-          <p:cNvSpPr>
-            <a:spLocks xmlns:a="http://schemas.openxmlformats.org/drawingml/2006/main" noGrp="1"/>
-          </p:cNvSpPr>
-          <p:nvPr/>
-        </p:nvSpPr>
-        <p:spPr>
-          <a:xfrm xmlns:a="http://schemas.openxmlformats.org/drawingml/2006/main">
-            <a:off x="6400800" y="2781300"/>
-            <a:ext cx="5105400" cy="590550"/>
-          </a:xfrm>
-          <a:prstGeom xmlns:a="http://schemas.openxmlformats.org/drawingml/2006/main" prst="rect">
-            <a:avLst/>
-          </a:prstGeom>
-          <a:noFill xmlns:a="http://schemas.openxmlformats.org/drawingml/2006/main"/>
-          <a:ln xmlns:a="http://schemas.openxmlformats.org/drawingml/2006/main" w="0">
-            <a:noFill/>
-          </a:ln>
-        </p:spPr>
-        <p:txBody>
-          <a:bodyPr xmlns:a="http://schemas.openxmlformats.org/drawingml/2006/main" wrap="square" lIns="0" tIns="0" rIns="0" bIns="0" anchor="t">
-            <a:noAutofit/>
-          </a:bodyPr>
-          <a:lstStyle xmlns:a="http://schemas.openxmlformats.org/drawingml/2006/main">
-            <a:defPPr>
-              <a:defRPr sz="2325" b="1">
-                <a:solidFill>
-                  <a:srgbClr val="1B1D19"/>
-                </a:solidFill>
-                <a:latin typeface="Pretendard"/>
-                <a:ea typeface="Pretendard"/>
-                <a:cs typeface="Pretendard"/>
-              </a:defRPr>
-            </a:defPPr>
-          </a:lstStyle>
-          <a:p xmlns:a="http://schemas.openxmlformats.org/drawingml/2006/main">
-            <a:pPr>
-              <a:defRPr sz="2325" b="1">
-                <a:solidFill>
-                  <a:srgbClr val="1B1D19"/>
-                </a:solidFill>
-                <a:latin typeface="Pretendard"/>
-                <a:ea typeface="Pretendard"/>
-                <a:cs typeface="Pretendard"/>
-              </a:defRPr>
-            </a:pPr>
-            <a:r>
-              <a:rPr sz="2325" b="1">
-                <a:solidFill>
-                  <a:srgbClr val="1B1D19"/>
-                </a:solidFill>
-                <a:latin typeface="Pretendard"/>
-                <a:ea typeface="Pretendard"/>
-                <a:cs typeface="Pretendard"/>
-              </a:rPr>
-              <a:t>Dressing technique</a:t>
-            </a:r>
-          </a:p>
-        </p:txBody>
-      </p:sp>
-      <p:sp>
-        <p:nvSpPr>
-          <p:cNvPr id="8" name="">
-            <a:extLst xmlns:a="http://schemas.openxmlformats.org/drawingml/2006/main">
-              <a:ext uri="{FF2B5EF4-FFF2-40B4-BE49-F238E27FC236}">
-                <a16:creationId xmlns:a16="http://schemas.microsoft.com/office/drawing/2014/main" id="{C8939E1E-1C06-41FA-9252-51B9498D950C}"/>
-              </a:ext>
-            </a:extLst>
-          </p:cNvPr>
-          <p:cNvSpPr>
-            <a:spLocks xmlns:a="http://schemas.openxmlformats.org/drawingml/2006/main" noGrp="1"/>
-          </p:cNvSpPr>
-          <p:nvPr/>
-        </p:nvSpPr>
-        <p:spPr>
-          <a:xfrm xmlns:a="http://schemas.openxmlformats.org/drawingml/2006/main">
-            <a:off x="6400800" y="3581400"/>
-            <a:ext cx="5105400" cy="2190750"/>
-          </a:xfrm>
-          <a:prstGeom xmlns:a="http://schemas.openxmlformats.org/drawingml/2006/main" prst="rect">
-            <a:avLst/>
-          </a:prstGeom>
-          <a:solidFill xmlns:a="http://schemas.openxmlformats.org/drawingml/2006/main">
-            <a:srgbClr val="F7F7F3"/>
-          </a:solidFill>
-          <a:ln xmlns:a="http://schemas.openxmlformats.org/drawingml/2006/main" w="0">
-            <a:noFill/>
-          </a:ln>
-        </p:spPr>
-      </p:sp>
-      <p:sp>
-        <p:nvSpPr>
-          <p:cNvPr id="9" name="">
-            <a:extLst xmlns:a="http://schemas.openxmlformats.org/drawingml/2006/main">
-              <a:ext uri="{FF2B5EF4-FFF2-40B4-BE49-F238E27FC236}">
-                <a16:creationId xmlns:a16="http://schemas.microsoft.com/office/drawing/2014/main" id="{E4144403-600B-40D5-8CD8-EAE1C84EF8DA}"/>
+          <p:cNvPr id="5" name="">
+            <a:extLst xmlns:a="http://schemas.openxmlformats.org/drawingml/2006/main">
+              <a:ext uri="{FF2B5EF4-FFF2-40B4-BE49-F238E27FC236}">
+                <a16:creationId xmlns:a16="http://schemas.microsoft.com/office/drawing/2014/main" id="{76C54E36-AABC-4246-BF3A-9827C766718D}"/>
               </a:ext>
             </a:extLst>
           </p:cNvPr>
@@ -6174,10 +5445,10 @@
       </p:sp>
       <p:sp>
         <p:nvSpPr>
-          <p:cNvPr id="10" name="">
-            <a:extLst xmlns:a="http://schemas.openxmlformats.org/drawingml/2006/main">
-              <a:ext uri="{FF2B5EF4-FFF2-40B4-BE49-F238E27FC236}">
-                <a16:creationId xmlns:a16="http://schemas.microsoft.com/office/drawing/2014/main" id="{5B507C1A-6DDB-40B9-89A3-F7E6510D0639}"/>
+          <p:cNvPr id="6" name="">
+            <a:extLst xmlns:a="http://schemas.openxmlformats.org/drawingml/2006/main">
+              <a:ext uri="{FF2B5EF4-FFF2-40B4-BE49-F238E27FC236}">
+                <a16:creationId xmlns:a16="http://schemas.microsoft.com/office/drawing/2014/main" id="{8BEE52B9-8E31-42EE-954A-FD2DDA19A5AB}"/>
               </a:ext>
             </a:extLst>
           </p:cNvPr>
@@ -6243,7 +5514,7 @@
     </p:spTree>
     <p:extLst>
       <p:ext uri="{BB962C8B-B14F-4D97-AF65-F5344CB8AC3E}">
-        <p14:creationId xmlns:p14="http://schemas.microsoft.com/office/powerpoint/2010/main" val="562450353"/>
+        <p14:creationId xmlns:p14="http://schemas.microsoft.com/office/powerpoint/2010/main" val="1564626933"/>
       </p:ext>
     </p:extLst>
   </p:cSld>
@@ -6271,10 +5542,10 @@
       </p:grpSpPr>
       <p:sp>
         <p:nvSpPr>
-          <p:cNvPr id="6" name="">
-            <a:extLst xmlns:a="http://schemas.openxmlformats.org/drawingml/2006/main">
-              <a:ext uri="{FF2B5EF4-FFF2-40B4-BE49-F238E27FC236}">
-                <a16:creationId xmlns:a16="http://schemas.microsoft.com/office/drawing/2014/main" id="{126FBA1D-E772-4ADE-88D7-888D23E48184}"/>
+          <p:cNvPr id="18" name="">
+            <a:extLst xmlns:a="http://schemas.openxmlformats.org/drawingml/2006/main">
+              <a:ext uri="{FF2B5EF4-FFF2-40B4-BE49-F238E27FC236}">
+                <a16:creationId xmlns:a16="http://schemas.microsoft.com/office/drawing/2014/main" id="{A5DCA6E4-2AB0-4C7A-A319-EC32C74DC3EA}"/>
               </a:ext>
             </a:extLst>
           </p:cNvPr>
@@ -6332,7 +5603,7 @@
                 <a:ea typeface="Pretendard"/>
                 <a:cs typeface="Pretendard"/>
               </a:rPr>
-              <a:t>DISCUSSION</a:t>
+              <a:t>COMPLICATIONS</a:t>
             </a:r>
           </a:p>
         </p:txBody>
@@ -6342,7 +5613,7 @@
           <p:cNvPr id="2" name="">
             <a:extLst xmlns:a="http://schemas.openxmlformats.org/drawingml/2006/main">
               <a:ext uri="{FF2B5EF4-FFF2-40B4-BE49-F238E27FC236}">
-                <a16:creationId xmlns:a16="http://schemas.microsoft.com/office/drawing/2014/main" id="{ABFA644C-4B5B-4AA9-BED6-643FA07DBC6F}"/>
+                <a16:creationId xmlns:a16="http://schemas.microsoft.com/office/drawing/2014/main" id="{BF605903-5514-4286-AA0F-5C11F8450573}"/>
               </a:ext>
             </a:extLst>
           </p:cNvPr>
@@ -6400,6 +5671,1634 @@
                 <a:ea typeface="Pretendard"/>
                 <a:cs typeface="Pretendard"/>
               </a:rPr>
+              <a:t>Potential Complications</a:t>
+            </a:r>
+          </a:p>
+        </p:txBody>
+      </p:sp>
+      <p:sp>
+        <p:nvSpPr>
+          <p:cNvPr id="3" name="">
+            <a:extLst xmlns:a="http://schemas.openxmlformats.org/drawingml/2006/main">
+              <a:ext uri="{FF2B5EF4-FFF2-40B4-BE49-F238E27FC236}">
+                <a16:creationId xmlns:a16="http://schemas.microsoft.com/office/drawing/2014/main" id="{92E1628D-96B8-4ED4-8180-B5F9FCDB0C2B}"/>
+              </a:ext>
+            </a:extLst>
+          </p:cNvPr>
+          <p:cNvSpPr>
+            <a:spLocks xmlns:a="http://schemas.openxmlformats.org/drawingml/2006/main" noGrp="1"/>
+          </p:cNvSpPr>
+          <p:nvPr/>
+        </p:nvSpPr>
+        <p:spPr>
+          <a:xfrm xmlns:a="http://schemas.openxmlformats.org/drawingml/2006/main">
+            <a:off x="685800" y="2305050"/>
+            <a:ext cx="10820400" cy="9525"/>
+          </a:xfrm>
+          <a:prstGeom xmlns:a="http://schemas.openxmlformats.org/drawingml/2006/main" prst="rect">
+            <a:avLst/>
+          </a:prstGeom>
+          <a:solidFill xmlns:a="http://schemas.openxmlformats.org/drawingml/2006/main">
+            <a:srgbClr val="DEDFD6"/>
+          </a:solidFill>
+          <a:ln xmlns:a="http://schemas.openxmlformats.org/drawingml/2006/main" w="0">
+            <a:noFill/>
+          </a:ln>
+        </p:spPr>
+      </p:sp>
+      <p:sp>
+        <p:nvSpPr>
+          <p:cNvPr id="4" name="">
+            <a:extLst xmlns:a="http://schemas.openxmlformats.org/drawingml/2006/main">
+              <a:ext uri="{FF2B5EF4-FFF2-40B4-BE49-F238E27FC236}">
+                <a16:creationId xmlns:a16="http://schemas.microsoft.com/office/drawing/2014/main" id="{DB395F9D-2789-44D9-AD31-C8428FA6107D}"/>
+              </a:ext>
+            </a:extLst>
+          </p:cNvPr>
+          <p:cNvSpPr>
+            <a:spLocks xmlns:a="http://schemas.openxmlformats.org/drawingml/2006/main" noGrp="1"/>
+          </p:cNvSpPr>
+          <p:nvPr/>
+        </p:nvSpPr>
+        <p:spPr>
+          <a:xfrm xmlns:a="http://schemas.openxmlformats.org/drawingml/2006/main">
+            <a:off x="685800" y="2524125"/>
+            <a:ext cx="361950" cy="342900"/>
+          </a:xfrm>
+          <a:prstGeom xmlns:a="http://schemas.openxmlformats.org/drawingml/2006/main" prst="rect">
+            <a:avLst/>
+          </a:prstGeom>
+          <a:noFill xmlns:a="http://schemas.openxmlformats.org/drawingml/2006/main"/>
+          <a:ln xmlns:a="http://schemas.openxmlformats.org/drawingml/2006/main" w="0">
+            <a:noFill/>
+          </a:ln>
+        </p:spPr>
+        <p:txBody>
+          <a:bodyPr xmlns:a="http://schemas.openxmlformats.org/drawingml/2006/main" wrap="square" lIns="0" tIns="0" rIns="0" bIns="0" anchor="t">
+            <a:noAutofit/>
+          </a:bodyPr>
+          <a:lstStyle xmlns:a="http://schemas.openxmlformats.org/drawingml/2006/main">
+            <a:defPPr>
+              <a:defRPr sz="1125" b="0">
+                <a:solidFill>
+                  <a:srgbClr val="9B7744"/>
+                </a:solidFill>
+                <a:latin typeface="Pretendard"/>
+                <a:ea typeface="Pretendard"/>
+                <a:cs typeface="Pretendard"/>
+              </a:defRPr>
+            </a:defPPr>
+          </a:lstStyle>
+          <a:p xmlns:a="http://schemas.openxmlformats.org/drawingml/2006/main">
+            <a:pPr>
+              <a:defRPr sz="1125" b="0">
+                <a:solidFill>
+                  <a:srgbClr val="9B7744"/>
+                </a:solidFill>
+                <a:latin typeface="Pretendard"/>
+                <a:ea typeface="Pretendard"/>
+                <a:cs typeface="Pretendard"/>
+              </a:defRPr>
+            </a:pPr>
+            <a:r>
+              <a:rPr sz="1125" b="0">
+                <a:solidFill>
+                  <a:srgbClr val="9B7744"/>
+                </a:solidFill>
+                <a:latin typeface="Pretendard"/>
+                <a:ea typeface="Pretendard"/>
+                <a:cs typeface="Pretendard"/>
+              </a:rPr>
+              <a:t>01</a:t>
+            </a:r>
+          </a:p>
+        </p:txBody>
+      </p:sp>
+      <p:sp>
+        <p:nvSpPr>
+          <p:cNvPr id="5" name="">
+            <a:extLst xmlns:a="http://schemas.openxmlformats.org/drawingml/2006/main">
+              <a:ext uri="{FF2B5EF4-FFF2-40B4-BE49-F238E27FC236}">
+                <a16:creationId xmlns:a16="http://schemas.microsoft.com/office/drawing/2014/main" id="{033D9895-CF7B-4E28-B62D-5D27A7F865E2}"/>
+              </a:ext>
+            </a:extLst>
+          </p:cNvPr>
+          <p:cNvSpPr>
+            <a:spLocks xmlns:a="http://schemas.openxmlformats.org/drawingml/2006/main" noGrp="1"/>
+          </p:cNvSpPr>
+          <p:nvPr/>
+        </p:nvSpPr>
+        <p:spPr>
+          <a:xfrm xmlns:a="http://schemas.openxmlformats.org/drawingml/2006/main">
+            <a:off x="1181100" y="2495550"/>
+            <a:ext cx="10325100" cy="381000"/>
+          </a:xfrm>
+          <a:prstGeom xmlns:a="http://schemas.openxmlformats.org/drawingml/2006/main" prst="rect">
+            <a:avLst/>
+          </a:prstGeom>
+          <a:noFill xmlns:a="http://schemas.openxmlformats.org/drawingml/2006/main"/>
+          <a:ln xmlns:a="http://schemas.openxmlformats.org/drawingml/2006/main" w="0">
+            <a:noFill/>
+          </a:ln>
+        </p:spPr>
+        <p:txBody>
+          <a:bodyPr xmlns:a="http://schemas.openxmlformats.org/drawingml/2006/main" wrap="square" lIns="0" tIns="0" rIns="0" bIns="0" anchor="t">
+            <a:noAutofit/>
+          </a:bodyPr>
+          <a:lstStyle xmlns:a="http://schemas.openxmlformats.org/drawingml/2006/main">
+            <a:defPPr>
+              <a:defRPr sz="2175" b="1">
+                <a:solidFill>
+                  <a:srgbClr val="1B1D19"/>
+                </a:solidFill>
+                <a:latin typeface="Pretendard"/>
+                <a:ea typeface="Pretendard"/>
+                <a:cs typeface="Pretendard"/>
+              </a:defRPr>
+            </a:defPPr>
+          </a:lstStyle>
+          <a:p xmlns:a="http://schemas.openxmlformats.org/drawingml/2006/main">
+            <a:pPr>
+              <a:defRPr sz="2175" b="1">
+                <a:solidFill>
+                  <a:srgbClr val="1B1D19"/>
+                </a:solidFill>
+                <a:latin typeface="Pretendard"/>
+                <a:ea typeface="Pretendard"/>
+                <a:cs typeface="Pretendard"/>
+              </a:defRPr>
+            </a:pPr>
+            <a:r>
+              <a:rPr sz="2175" b="1">
+                <a:solidFill>
+                  <a:srgbClr val="1B1D19"/>
+                </a:solidFill>
+                <a:latin typeface="Pretendard"/>
+                <a:ea typeface="Pretendard"/>
+                <a:cs typeface="Pretendard"/>
+              </a:rPr>
+              <a:t>Bleeding and swelling</a:t>
+            </a:r>
+          </a:p>
+        </p:txBody>
+      </p:sp>
+      <p:sp>
+        <p:nvSpPr>
+          <p:cNvPr id="6" name="">
+            <a:extLst xmlns:a="http://schemas.openxmlformats.org/drawingml/2006/main">
+              <a:ext uri="{FF2B5EF4-FFF2-40B4-BE49-F238E27FC236}">
+                <a16:creationId xmlns:a16="http://schemas.microsoft.com/office/drawing/2014/main" id="{1CFC48B3-28A6-42E1-9D3B-8D3644AC3791}"/>
+              </a:ext>
+            </a:extLst>
+          </p:cNvPr>
+          <p:cNvSpPr>
+            <a:spLocks xmlns:a="http://schemas.openxmlformats.org/drawingml/2006/main" noGrp="1"/>
+          </p:cNvSpPr>
+          <p:nvPr/>
+        </p:nvSpPr>
+        <p:spPr>
+          <a:xfrm xmlns:a="http://schemas.openxmlformats.org/drawingml/2006/main">
+            <a:off x="1181100" y="2933700"/>
+            <a:ext cx="10058400" cy="476250"/>
+          </a:xfrm>
+          <a:prstGeom xmlns:a="http://schemas.openxmlformats.org/drawingml/2006/main" prst="rect">
+            <a:avLst/>
+          </a:prstGeom>
+          <a:noFill xmlns:a="http://schemas.openxmlformats.org/drawingml/2006/main"/>
+          <a:ln xmlns:a="http://schemas.openxmlformats.org/drawingml/2006/main" w="0">
+            <a:noFill/>
+          </a:ln>
+        </p:spPr>
+        <p:txBody>
+          <a:bodyPr xmlns:a="http://schemas.openxmlformats.org/drawingml/2006/main" wrap="square" lIns="0" tIns="0" rIns="0" bIns="0" anchor="t">
+            <a:noAutofit/>
+          </a:bodyPr>
+          <a:lstStyle xmlns:a="http://schemas.openxmlformats.org/drawingml/2006/main">
+            <a:defPPr>
+              <a:defRPr sz="1725" b="0">
+                <a:solidFill>
+                  <a:srgbClr val="6B7265"/>
+                </a:solidFill>
+                <a:latin typeface="Pretendard"/>
+                <a:ea typeface="Pretendard"/>
+                <a:cs typeface="Pretendard"/>
+              </a:defRPr>
+            </a:defPPr>
+          </a:lstStyle>
+          <a:p xmlns:a="http://schemas.openxmlformats.org/drawingml/2006/main">
+            <a:pPr>
+              <a:defRPr sz="1725" b="0">
+                <a:solidFill>
+                  <a:srgbClr val="6B7265"/>
+                </a:solidFill>
+                <a:latin typeface="Pretendard"/>
+                <a:ea typeface="Pretendard"/>
+                <a:cs typeface="Pretendard"/>
+              </a:defRPr>
+            </a:pPr>
+            <a:r>
+              <a:rPr sz="1725" b="0">
+                <a:solidFill>
+                  <a:srgbClr val="6B7265"/>
+                </a:solidFill>
+                <a:latin typeface="Pretendard"/>
+                <a:ea typeface="Pretendard"/>
+                <a:cs typeface="Pretendard"/>
+              </a:rPr>
+              <a:t>Hematoma, foreskin edema</a:t>
+            </a:r>
+          </a:p>
+        </p:txBody>
+      </p:sp>
+      <p:sp>
+        <p:nvSpPr>
+          <p:cNvPr id="7" name="">
+            <a:extLst xmlns:a="http://schemas.openxmlformats.org/drawingml/2006/main">
+              <a:ext uri="{FF2B5EF4-FFF2-40B4-BE49-F238E27FC236}">
+                <a16:creationId xmlns:a16="http://schemas.microsoft.com/office/drawing/2014/main" id="{D33755AD-F2E2-4076-982E-367B3666F250}"/>
+              </a:ext>
+            </a:extLst>
+          </p:cNvPr>
+          <p:cNvSpPr>
+            <a:spLocks xmlns:a="http://schemas.openxmlformats.org/drawingml/2006/main" noGrp="1"/>
+          </p:cNvSpPr>
+          <p:nvPr/>
+        </p:nvSpPr>
+        <p:spPr>
+          <a:xfrm xmlns:a="http://schemas.openxmlformats.org/drawingml/2006/main">
+            <a:off x="685800" y="3448050"/>
+            <a:ext cx="10820400" cy="9525"/>
+          </a:xfrm>
+          <a:prstGeom xmlns:a="http://schemas.openxmlformats.org/drawingml/2006/main" prst="rect">
+            <a:avLst/>
+          </a:prstGeom>
+          <a:solidFill xmlns:a="http://schemas.openxmlformats.org/drawingml/2006/main">
+            <a:srgbClr val="DEDFD6"/>
+          </a:solidFill>
+          <a:ln xmlns:a="http://schemas.openxmlformats.org/drawingml/2006/main" w="0">
+            <a:noFill/>
+          </a:ln>
+        </p:spPr>
+      </p:sp>
+      <p:sp>
+        <p:nvSpPr>
+          <p:cNvPr id="8" name="">
+            <a:extLst xmlns:a="http://schemas.openxmlformats.org/drawingml/2006/main">
+              <a:ext uri="{FF2B5EF4-FFF2-40B4-BE49-F238E27FC236}">
+                <a16:creationId xmlns:a16="http://schemas.microsoft.com/office/drawing/2014/main" id="{5EAA12F6-5B84-4D21-9CBF-0FCBDB83BE05}"/>
+              </a:ext>
+            </a:extLst>
+          </p:cNvPr>
+          <p:cNvSpPr>
+            <a:spLocks xmlns:a="http://schemas.openxmlformats.org/drawingml/2006/main" noGrp="1"/>
+          </p:cNvSpPr>
+          <p:nvPr/>
+        </p:nvSpPr>
+        <p:spPr>
+          <a:xfrm xmlns:a="http://schemas.openxmlformats.org/drawingml/2006/main">
+            <a:off x="685800" y="3667125"/>
+            <a:ext cx="361950" cy="342900"/>
+          </a:xfrm>
+          <a:prstGeom xmlns:a="http://schemas.openxmlformats.org/drawingml/2006/main" prst="rect">
+            <a:avLst/>
+          </a:prstGeom>
+          <a:noFill xmlns:a="http://schemas.openxmlformats.org/drawingml/2006/main"/>
+          <a:ln xmlns:a="http://schemas.openxmlformats.org/drawingml/2006/main" w="0">
+            <a:noFill/>
+          </a:ln>
+        </p:spPr>
+        <p:txBody>
+          <a:bodyPr xmlns:a="http://schemas.openxmlformats.org/drawingml/2006/main" wrap="square" lIns="0" tIns="0" rIns="0" bIns="0" anchor="t">
+            <a:noAutofit/>
+          </a:bodyPr>
+          <a:lstStyle xmlns:a="http://schemas.openxmlformats.org/drawingml/2006/main">
+            <a:defPPr>
+              <a:defRPr sz="1125" b="0">
+                <a:solidFill>
+                  <a:srgbClr val="9B7744"/>
+                </a:solidFill>
+                <a:latin typeface="Pretendard"/>
+                <a:ea typeface="Pretendard"/>
+                <a:cs typeface="Pretendard"/>
+              </a:defRPr>
+            </a:defPPr>
+          </a:lstStyle>
+          <a:p xmlns:a="http://schemas.openxmlformats.org/drawingml/2006/main">
+            <a:pPr>
+              <a:defRPr sz="1125" b="0">
+                <a:solidFill>
+                  <a:srgbClr val="9B7744"/>
+                </a:solidFill>
+                <a:latin typeface="Pretendard"/>
+                <a:ea typeface="Pretendard"/>
+                <a:cs typeface="Pretendard"/>
+              </a:defRPr>
+            </a:pPr>
+            <a:r>
+              <a:rPr sz="1125" b="0">
+                <a:solidFill>
+                  <a:srgbClr val="9B7744"/>
+                </a:solidFill>
+                <a:latin typeface="Pretendard"/>
+                <a:ea typeface="Pretendard"/>
+                <a:cs typeface="Pretendard"/>
+              </a:rPr>
+              <a:t>02</a:t>
+            </a:r>
+          </a:p>
+        </p:txBody>
+      </p:sp>
+      <p:sp>
+        <p:nvSpPr>
+          <p:cNvPr id="9" name="">
+            <a:extLst xmlns:a="http://schemas.openxmlformats.org/drawingml/2006/main">
+              <a:ext uri="{FF2B5EF4-FFF2-40B4-BE49-F238E27FC236}">
+                <a16:creationId xmlns:a16="http://schemas.microsoft.com/office/drawing/2014/main" id="{502C18D5-152B-446B-9D27-B6547693ACC0}"/>
+              </a:ext>
+            </a:extLst>
+          </p:cNvPr>
+          <p:cNvSpPr>
+            <a:spLocks xmlns:a="http://schemas.openxmlformats.org/drawingml/2006/main" noGrp="1"/>
+          </p:cNvSpPr>
+          <p:nvPr/>
+        </p:nvSpPr>
+        <p:spPr>
+          <a:xfrm xmlns:a="http://schemas.openxmlformats.org/drawingml/2006/main">
+            <a:off x="1181100" y="3638550"/>
+            <a:ext cx="10325100" cy="381000"/>
+          </a:xfrm>
+          <a:prstGeom xmlns:a="http://schemas.openxmlformats.org/drawingml/2006/main" prst="rect">
+            <a:avLst/>
+          </a:prstGeom>
+          <a:noFill xmlns:a="http://schemas.openxmlformats.org/drawingml/2006/main"/>
+          <a:ln xmlns:a="http://schemas.openxmlformats.org/drawingml/2006/main" w="0">
+            <a:noFill/>
+          </a:ln>
+        </p:spPr>
+        <p:txBody>
+          <a:bodyPr xmlns:a="http://schemas.openxmlformats.org/drawingml/2006/main" wrap="square" lIns="0" tIns="0" rIns="0" bIns="0" anchor="t">
+            <a:noAutofit/>
+          </a:bodyPr>
+          <a:lstStyle xmlns:a="http://schemas.openxmlformats.org/drawingml/2006/main">
+            <a:defPPr>
+              <a:defRPr sz="2175" b="1">
+                <a:solidFill>
+                  <a:srgbClr val="1B1D19"/>
+                </a:solidFill>
+                <a:latin typeface="Pretendard"/>
+                <a:ea typeface="Pretendard"/>
+                <a:cs typeface="Pretendard"/>
+              </a:defRPr>
+            </a:defPPr>
+          </a:lstStyle>
+          <a:p xmlns:a="http://schemas.openxmlformats.org/drawingml/2006/main">
+            <a:pPr>
+              <a:defRPr sz="2175" b="1">
+                <a:solidFill>
+                  <a:srgbClr val="1B1D19"/>
+                </a:solidFill>
+                <a:latin typeface="Pretendard"/>
+                <a:ea typeface="Pretendard"/>
+                <a:cs typeface="Pretendard"/>
+              </a:defRPr>
+            </a:pPr>
+            <a:r>
+              <a:rPr sz="2175" b="1">
+                <a:solidFill>
+                  <a:srgbClr val="1B1D19"/>
+                </a:solidFill>
+                <a:latin typeface="Pretendard"/>
+                <a:ea typeface="Pretendard"/>
+                <a:cs typeface="Pretendard"/>
+              </a:rPr>
+              <a:t>Wound complications</a:t>
+            </a:r>
+          </a:p>
+        </p:txBody>
+      </p:sp>
+      <p:sp>
+        <p:nvSpPr>
+          <p:cNvPr id="10" name="">
+            <a:extLst xmlns:a="http://schemas.openxmlformats.org/drawingml/2006/main">
+              <a:ext uri="{FF2B5EF4-FFF2-40B4-BE49-F238E27FC236}">
+                <a16:creationId xmlns:a16="http://schemas.microsoft.com/office/drawing/2014/main" id="{6904878B-BAD9-4999-861F-2DA7AE862BA8}"/>
+              </a:ext>
+            </a:extLst>
+          </p:cNvPr>
+          <p:cNvSpPr>
+            <a:spLocks xmlns:a="http://schemas.openxmlformats.org/drawingml/2006/main" noGrp="1"/>
+          </p:cNvSpPr>
+          <p:nvPr/>
+        </p:nvSpPr>
+        <p:spPr>
+          <a:xfrm xmlns:a="http://schemas.openxmlformats.org/drawingml/2006/main">
+            <a:off x="1181100" y="4076700"/>
+            <a:ext cx="10058400" cy="476250"/>
+          </a:xfrm>
+          <a:prstGeom xmlns:a="http://schemas.openxmlformats.org/drawingml/2006/main" prst="rect">
+            <a:avLst/>
+          </a:prstGeom>
+          <a:noFill xmlns:a="http://schemas.openxmlformats.org/drawingml/2006/main"/>
+          <a:ln xmlns:a="http://schemas.openxmlformats.org/drawingml/2006/main" w="0">
+            <a:noFill/>
+          </a:ln>
+        </p:spPr>
+        <p:txBody>
+          <a:bodyPr xmlns:a="http://schemas.openxmlformats.org/drawingml/2006/main" wrap="square" lIns="0" tIns="0" rIns="0" bIns="0" anchor="t">
+            <a:noAutofit/>
+          </a:bodyPr>
+          <a:lstStyle xmlns:a="http://schemas.openxmlformats.org/drawingml/2006/main">
+            <a:defPPr>
+              <a:defRPr sz="1725" b="0">
+                <a:solidFill>
+                  <a:srgbClr val="6B7265"/>
+                </a:solidFill>
+                <a:latin typeface="Pretendard"/>
+                <a:ea typeface="Pretendard"/>
+                <a:cs typeface="Pretendard"/>
+              </a:defRPr>
+            </a:defPPr>
+          </a:lstStyle>
+          <a:p xmlns:a="http://schemas.openxmlformats.org/drawingml/2006/main">
+            <a:pPr>
+              <a:defRPr sz="1725" b="0">
+                <a:solidFill>
+                  <a:srgbClr val="6B7265"/>
+                </a:solidFill>
+                <a:latin typeface="Pretendard"/>
+                <a:ea typeface="Pretendard"/>
+                <a:cs typeface="Pretendard"/>
+              </a:defRPr>
+            </a:pPr>
+            <a:r>
+              <a:rPr sz="1725" b="0">
+                <a:solidFill>
+                  <a:srgbClr val="6B7265"/>
+                </a:solidFill>
+                <a:latin typeface="Pretendard"/>
+                <a:ea typeface="Pretendard"/>
+                <a:cs typeface="Pretendard"/>
+              </a:rPr>
+              <a:t>Delayed healing, infection, skin necrosis</a:t>
+            </a:r>
+          </a:p>
+        </p:txBody>
+      </p:sp>
+      <p:sp>
+        <p:nvSpPr>
+          <p:cNvPr id="11" name="">
+            <a:extLst xmlns:a="http://schemas.openxmlformats.org/drawingml/2006/main">
+              <a:ext uri="{FF2B5EF4-FFF2-40B4-BE49-F238E27FC236}">
+                <a16:creationId xmlns:a16="http://schemas.microsoft.com/office/drawing/2014/main" id="{3F2BFF73-E5EE-47FC-844E-442AEA305DB0}"/>
+              </a:ext>
+            </a:extLst>
+          </p:cNvPr>
+          <p:cNvSpPr>
+            <a:spLocks xmlns:a="http://schemas.openxmlformats.org/drawingml/2006/main" noGrp="1"/>
+          </p:cNvSpPr>
+          <p:nvPr/>
+        </p:nvSpPr>
+        <p:spPr>
+          <a:xfrm xmlns:a="http://schemas.openxmlformats.org/drawingml/2006/main">
+            <a:off x="685800" y="4591050"/>
+            <a:ext cx="10820400" cy="9525"/>
+          </a:xfrm>
+          <a:prstGeom xmlns:a="http://schemas.openxmlformats.org/drawingml/2006/main" prst="rect">
+            <a:avLst/>
+          </a:prstGeom>
+          <a:solidFill xmlns:a="http://schemas.openxmlformats.org/drawingml/2006/main">
+            <a:srgbClr val="DEDFD6"/>
+          </a:solidFill>
+          <a:ln xmlns:a="http://schemas.openxmlformats.org/drawingml/2006/main" w="0">
+            <a:noFill/>
+          </a:ln>
+        </p:spPr>
+      </p:sp>
+      <p:sp>
+        <p:nvSpPr>
+          <p:cNvPr id="12" name="">
+            <a:extLst xmlns:a="http://schemas.openxmlformats.org/drawingml/2006/main">
+              <a:ext uri="{FF2B5EF4-FFF2-40B4-BE49-F238E27FC236}">
+                <a16:creationId xmlns:a16="http://schemas.microsoft.com/office/drawing/2014/main" id="{2DCAB5F1-CAD5-415F-A4A3-DEFC1E2C17BB}"/>
+              </a:ext>
+            </a:extLst>
+          </p:cNvPr>
+          <p:cNvSpPr>
+            <a:spLocks xmlns:a="http://schemas.openxmlformats.org/drawingml/2006/main" noGrp="1"/>
+          </p:cNvSpPr>
+          <p:nvPr/>
+        </p:nvSpPr>
+        <p:spPr>
+          <a:xfrm xmlns:a="http://schemas.openxmlformats.org/drawingml/2006/main">
+            <a:off x="685800" y="4810125"/>
+            <a:ext cx="361950" cy="342900"/>
+          </a:xfrm>
+          <a:prstGeom xmlns:a="http://schemas.openxmlformats.org/drawingml/2006/main" prst="rect">
+            <a:avLst/>
+          </a:prstGeom>
+          <a:noFill xmlns:a="http://schemas.openxmlformats.org/drawingml/2006/main"/>
+          <a:ln xmlns:a="http://schemas.openxmlformats.org/drawingml/2006/main" w="0">
+            <a:noFill/>
+          </a:ln>
+        </p:spPr>
+        <p:txBody>
+          <a:bodyPr xmlns:a="http://schemas.openxmlformats.org/drawingml/2006/main" wrap="square" lIns="0" tIns="0" rIns="0" bIns="0" anchor="t">
+            <a:noAutofit/>
+          </a:bodyPr>
+          <a:lstStyle xmlns:a="http://schemas.openxmlformats.org/drawingml/2006/main">
+            <a:defPPr>
+              <a:defRPr sz="1125" b="0">
+                <a:solidFill>
+                  <a:srgbClr val="9B7744"/>
+                </a:solidFill>
+                <a:latin typeface="Pretendard"/>
+                <a:ea typeface="Pretendard"/>
+                <a:cs typeface="Pretendard"/>
+              </a:defRPr>
+            </a:defPPr>
+          </a:lstStyle>
+          <a:p xmlns:a="http://schemas.openxmlformats.org/drawingml/2006/main">
+            <a:pPr>
+              <a:defRPr sz="1125" b="0">
+                <a:solidFill>
+                  <a:srgbClr val="9B7744"/>
+                </a:solidFill>
+                <a:latin typeface="Pretendard"/>
+                <a:ea typeface="Pretendard"/>
+                <a:cs typeface="Pretendard"/>
+              </a:defRPr>
+            </a:pPr>
+            <a:r>
+              <a:rPr sz="1125" b="0">
+                <a:solidFill>
+                  <a:srgbClr val="9B7744"/>
+                </a:solidFill>
+                <a:latin typeface="Pretendard"/>
+                <a:ea typeface="Pretendard"/>
+                <a:cs typeface="Pretendard"/>
+              </a:rPr>
+              <a:t>03</a:t>
+            </a:r>
+          </a:p>
+        </p:txBody>
+      </p:sp>
+      <p:sp>
+        <p:nvSpPr>
+          <p:cNvPr id="13" name="">
+            <a:extLst xmlns:a="http://schemas.openxmlformats.org/drawingml/2006/main">
+              <a:ext uri="{FF2B5EF4-FFF2-40B4-BE49-F238E27FC236}">
+                <a16:creationId xmlns:a16="http://schemas.microsoft.com/office/drawing/2014/main" id="{F97726D7-C57F-4CBE-AFCE-620A30C08B85}"/>
+              </a:ext>
+            </a:extLst>
+          </p:cNvPr>
+          <p:cNvSpPr>
+            <a:spLocks xmlns:a="http://schemas.openxmlformats.org/drawingml/2006/main" noGrp="1"/>
+          </p:cNvSpPr>
+          <p:nvPr/>
+        </p:nvSpPr>
+        <p:spPr>
+          <a:xfrm xmlns:a="http://schemas.openxmlformats.org/drawingml/2006/main">
+            <a:off x="1181100" y="4781550"/>
+            <a:ext cx="10325100" cy="381000"/>
+          </a:xfrm>
+          <a:prstGeom xmlns:a="http://schemas.openxmlformats.org/drawingml/2006/main" prst="rect">
+            <a:avLst/>
+          </a:prstGeom>
+          <a:noFill xmlns:a="http://schemas.openxmlformats.org/drawingml/2006/main"/>
+          <a:ln xmlns:a="http://schemas.openxmlformats.org/drawingml/2006/main" w="0">
+            <a:noFill/>
+          </a:ln>
+        </p:spPr>
+        <p:txBody>
+          <a:bodyPr xmlns:a="http://schemas.openxmlformats.org/drawingml/2006/main" wrap="square" lIns="0" tIns="0" rIns="0" bIns="0" anchor="t">
+            <a:noAutofit/>
+          </a:bodyPr>
+          <a:lstStyle xmlns:a="http://schemas.openxmlformats.org/drawingml/2006/main">
+            <a:defPPr>
+              <a:defRPr sz="2175" b="1">
+                <a:solidFill>
+                  <a:srgbClr val="1B1D19"/>
+                </a:solidFill>
+                <a:latin typeface="Pretendard"/>
+                <a:ea typeface="Pretendard"/>
+                <a:cs typeface="Pretendard"/>
+              </a:defRPr>
+            </a:defPPr>
+          </a:lstStyle>
+          <a:p xmlns:a="http://schemas.openxmlformats.org/drawingml/2006/main">
+            <a:pPr>
+              <a:defRPr sz="2175" b="1">
+                <a:solidFill>
+                  <a:srgbClr val="1B1D19"/>
+                </a:solidFill>
+                <a:latin typeface="Pretendard"/>
+                <a:ea typeface="Pretendard"/>
+                <a:cs typeface="Pretendard"/>
+              </a:defRPr>
+            </a:pPr>
+            <a:r>
+              <a:rPr sz="2175" b="1">
+                <a:solidFill>
+                  <a:srgbClr val="1B1D19"/>
+                </a:solidFill>
+                <a:latin typeface="Pretendard"/>
+                <a:ea typeface="Pretendard"/>
+                <a:cs typeface="Pretendard"/>
+              </a:rPr>
+              <a:t>Contour and discomfort</a:t>
+            </a:r>
+          </a:p>
+        </p:txBody>
+      </p:sp>
+      <p:sp>
+        <p:nvSpPr>
+          <p:cNvPr id="14" name="">
+            <a:extLst xmlns:a="http://schemas.openxmlformats.org/drawingml/2006/main">
+              <a:ext uri="{FF2B5EF4-FFF2-40B4-BE49-F238E27FC236}">
+                <a16:creationId xmlns:a16="http://schemas.microsoft.com/office/drawing/2014/main" id="{BD2AED3E-11A3-4C73-A42B-679179875424}"/>
+              </a:ext>
+            </a:extLst>
+          </p:cNvPr>
+          <p:cNvSpPr>
+            <a:spLocks xmlns:a="http://schemas.openxmlformats.org/drawingml/2006/main" noGrp="1"/>
+          </p:cNvSpPr>
+          <p:nvPr/>
+        </p:nvSpPr>
+        <p:spPr>
+          <a:xfrm xmlns:a="http://schemas.openxmlformats.org/drawingml/2006/main">
+            <a:off x="1181100" y="5219700"/>
+            <a:ext cx="10058400" cy="476250"/>
+          </a:xfrm>
+          <a:prstGeom xmlns:a="http://schemas.openxmlformats.org/drawingml/2006/main" prst="rect">
+            <a:avLst/>
+          </a:prstGeom>
+          <a:noFill xmlns:a="http://schemas.openxmlformats.org/drawingml/2006/main"/>
+          <a:ln xmlns:a="http://schemas.openxmlformats.org/drawingml/2006/main" w="0">
+            <a:noFill/>
+          </a:ln>
+        </p:spPr>
+        <p:txBody>
+          <a:bodyPr xmlns:a="http://schemas.openxmlformats.org/drawingml/2006/main" wrap="square" lIns="0" tIns="0" rIns="0" bIns="0" anchor="t">
+            <a:noAutofit/>
+          </a:bodyPr>
+          <a:lstStyle xmlns:a="http://schemas.openxmlformats.org/drawingml/2006/main">
+            <a:defPPr>
+              <a:defRPr sz="1725" b="0">
+                <a:solidFill>
+                  <a:srgbClr val="6B7265"/>
+                </a:solidFill>
+                <a:latin typeface="Pretendard"/>
+                <a:ea typeface="Pretendard"/>
+                <a:cs typeface="Pretendard"/>
+              </a:defRPr>
+            </a:defPPr>
+          </a:lstStyle>
+          <a:p xmlns:a="http://schemas.openxmlformats.org/drawingml/2006/main">
+            <a:pPr>
+              <a:defRPr sz="1725" b="0">
+                <a:solidFill>
+                  <a:srgbClr val="6B7265"/>
+                </a:solidFill>
+                <a:latin typeface="Pretendard"/>
+                <a:ea typeface="Pretendard"/>
+                <a:cs typeface="Pretendard"/>
+              </a:defRPr>
+            </a:pPr>
+            <a:r>
+              <a:rPr sz="1725" b="0">
+                <a:solidFill>
+                  <a:srgbClr val="6B7265"/>
+                </a:solidFill>
+                <a:latin typeface="Pretendard"/>
+                <a:ea typeface="Pretendard"/>
+                <a:cs typeface="Pretendard"/>
+              </a:rPr>
+              <a:t>Graft contour irregularity, discomfort during erection</a:t>
+            </a:r>
+          </a:p>
+        </p:txBody>
+      </p:sp>
+      <p:sp>
+        <p:nvSpPr>
+          <p:cNvPr id="15" name="">
+            <a:extLst xmlns:a="http://schemas.openxmlformats.org/drawingml/2006/main">
+              <a:ext uri="{FF2B5EF4-FFF2-40B4-BE49-F238E27FC236}">
+                <a16:creationId xmlns:a16="http://schemas.microsoft.com/office/drawing/2014/main" id="{B185C07A-A5FF-4BEE-82E6-20FD29B7E84F}"/>
+              </a:ext>
+            </a:extLst>
+          </p:cNvPr>
+          <p:cNvSpPr>
+            <a:spLocks xmlns:a="http://schemas.openxmlformats.org/drawingml/2006/main" noGrp="1"/>
+          </p:cNvSpPr>
+          <p:nvPr/>
+        </p:nvSpPr>
+        <p:spPr>
+          <a:xfrm xmlns:a="http://schemas.openxmlformats.org/drawingml/2006/main">
+            <a:off x="685800" y="6019800"/>
+            <a:ext cx="10287000" cy="266700"/>
+          </a:xfrm>
+          <a:prstGeom xmlns:a="http://schemas.openxmlformats.org/drawingml/2006/main" prst="rect">
+            <a:avLst/>
+          </a:prstGeom>
+          <a:noFill xmlns:a="http://schemas.openxmlformats.org/drawingml/2006/main"/>
+          <a:ln xmlns:a="http://schemas.openxmlformats.org/drawingml/2006/main" w="0">
+            <a:noFill/>
+          </a:ln>
+        </p:spPr>
+        <p:txBody>
+          <a:bodyPr xmlns:a="http://schemas.openxmlformats.org/drawingml/2006/main" wrap="square" lIns="0" tIns="0" rIns="0" bIns="0" anchor="t">
+            <a:noAutofit/>
+          </a:bodyPr>
+          <a:lstStyle xmlns:a="http://schemas.openxmlformats.org/drawingml/2006/main">
+            <a:defPPr>
+              <a:defRPr sz="1050" b="0">
+                <a:solidFill>
+                  <a:srgbClr val="6B7265"/>
+                </a:solidFill>
+                <a:latin typeface="Pretendard"/>
+                <a:ea typeface="Pretendard"/>
+                <a:cs typeface="Pretendard"/>
+              </a:defRPr>
+            </a:defPPr>
+          </a:lstStyle>
+          <a:p xmlns:a="http://schemas.openxmlformats.org/drawingml/2006/main">
+            <a:pPr>
+              <a:defRPr sz="1050" b="0">
+                <a:solidFill>
+                  <a:srgbClr val="6B7265"/>
+                </a:solidFill>
+                <a:latin typeface="Pretendard"/>
+                <a:ea typeface="Pretendard"/>
+                <a:cs typeface="Pretendard"/>
+              </a:defRPr>
+            </a:pPr>
+            <a:r>
+              <a:rPr sz="1050" b="0">
+                <a:solidFill>
+                  <a:srgbClr val="6B7265"/>
+                </a:solidFill>
+                <a:latin typeface="Pretendard"/>
+                <a:ea typeface="Pretendard"/>
+                <a:cs typeface="Pretendard"/>
+              </a:rPr>
+              <a:t>Reported in ADM augmentation literature</a:t>
+            </a:r>
+          </a:p>
+        </p:txBody>
+      </p:sp>
+      <p:sp>
+        <p:nvSpPr>
+          <p:cNvPr id="16" name="">
+            <a:extLst xmlns:a="http://schemas.openxmlformats.org/drawingml/2006/main">
+              <a:ext uri="{FF2B5EF4-FFF2-40B4-BE49-F238E27FC236}">
+                <a16:creationId xmlns:a16="http://schemas.microsoft.com/office/drawing/2014/main" id="{C9EECA77-8E8E-434B-B51A-EB9463AFE1D7}"/>
+              </a:ext>
+            </a:extLst>
+          </p:cNvPr>
+          <p:cNvSpPr>
+            <a:spLocks xmlns:a="http://schemas.openxmlformats.org/drawingml/2006/main" noGrp="1"/>
+          </p:cNvSpPr>
+          <p:nvPr/>
+        </p:nvSpPr>
+        <p:spPr>
+          <a:xfrm xmlns:a="http://schemas.openxmlformats.org/drawingml/2006/main">
+            <a:off x="685800" y="6448425"/>
+            <a:ext cx="10191750" cy="228600"/>
+          </a:xfrm>
+          <a:prstGeom xmlns:a="http://schemas.openxmlformats.org/drawingml/2006/main" prst="rect">
+            <a:avLst/>
+          </a:prstGeom>
+          <a:noFill xmlns:a="http://schemas.openxmlformats.org/drawingml/2006/main"/>
+          <a:ln xmlns:a="http://schemas.openxmlformats.org/drawingml/2006/main" w="0">
+            <a:noFill/>
+          </a:ln>
+        </p:spPr>
+        <p:txBody>
+          <a:bodyPr xmlns:a="http://schemas.openxmlformats.org/drawingml/2006/main" wrap="square" lIns="0" tIns="0" rIns="0" bIns="0" anchor="t">
+            <a:noAutofit/>
+          </a:bodyPr>
+          <a:lstStyle xmlns:a="http://schemas.openxmlformats.org/drawingml/2006/main">
+            <a:defPPr>
+              <a:defRPr sz="975" b="0">
+                <a:solidFill>
+                  <a:srgbClr val="858B7E"/>
+                </a:solidFill>
+                <a:latin typeface="Pretendard"/>
+                <a:ea typeface="Pretendard"/>
+                <a:cs typeface="Pretendard"/>
+              </a:defRPr>
+            </a:defPPr>
+          </a:lstStyle>
+          <a:p xmlns:a="http://schemas.openxmlformats.org/drawingml/2006/main">
+            <a:pPr>
+              <a:defRPr sz="975" b="0">
+                <a:solidFill>
+                  <a:srgbClr val="858B7E"/>
+                </a:solidFill>
+                <a:latin typeface="Pretendard"/>
+                <a:ea typeface="Pretendard"/>
+                <a:cs typeface="Pretendard"/>
+              </a:defRPr>
+            </a:pPr>
+            <a:r>
+              <a:rPr sz="975" b="0">
+                <a:solidFill>
+                  <a:srgbClr val="858B7E"/>
+                </a:solidFill>
+                <a:latin typeface="Pretendard"/>
+                <a:ea typeface="Pretendard"/>
+                <a:cs typeface="Pretendard"/>
+              </a:rPr>
+              <a:t>Jinmo Koo · HIGHST Urology</a:t>
+            </a:r>
+          </a:p>
+        </p:txBody>
+      </p:sp>
+      <p:sp>
+        <p:nvSpPr>
+          <p:cNvPr id="17" name="">
+            <a:extLst xmlns:a="http://schemas.openxmlformats.org/drawingml/2006/main">
+              <a:ext uri="{FF2B5EF4-FFF2-40B4-BE49-F238E27FC236}">
+                <a16:creationId xmlns:a16="http://schemas.microsoft.com/office/drawing/2014/main" id="{B6B2BCDE-283D-4A54-8CCF-B18D1DDB78DE}"/>
+              </a:ext>
+            </a:extLst>
+          </p:cNvPr>
+          <p:cNvSpPr>
+            <a:spLocks xmlns:a="http://schemas.openxmlformats.org/drawingml/2006/main" noGrp="1"/>
+          </p:cNvSpPr>
+          <p:nvPr/>
+        </p:nvSpPr>
+        <p:spPr>
+          <a:xfrm xmlns:a="http://schemas.openxmlformats.org/drawingml/2006/main">
+            <a:off x="11134725" y="6448425"/>
+            <a:ext cx="371475" cy="228600"/>
+          </a:xfrm>
+          <a:prstGeom xmlns:a="http://schemas.openxmlformats.org/drawingml/2006/main" prst="rect">
+            <a:avLst/>
+          </a:prstGeom>
+          <a:noFill xmlns:a="http://schemas.openxmlformats.org/drawingml/2006/main"/>
+          <a:ln xmlns:a="http://schemas.openxmlformats.org/drawingml/2006/main" w="0">
+            <a:noFill/>
+          </a:ln>
+        </p:spPr>
+        <p:txBody>
+          <a:bodyPr xmlns:a="http://schemas.openxmlformats.org/drawingml/2006/main" wrap="square" lIns="0" tIns="0" rIns="0" bIns="0" anchor="t">
+            <a:noAutofit/>
+          </a:bodyPr>
+          <a:lstStyle xmlns:a="http://schemas.openxmlformats.org/drawingml/2006/main">
+            <a:defPPr>
+              <a:defRPr sz="975" b="0">
+                <a:solidFill>
+                  <a:srgbClr val="858B7E"/>
+                </a:solidFill>
+                <a:latin typeface="Pretendard"/>
+                <a:ea typeface="Pretendard"/>
+                <a:cs typeface="Pretendard"/>
+              </a:defRPr>
+            </a:defPPr>
+          </a:lstStyle>
+          <a:p xmlns:a="http://schemas.openxmlformats.org/drawingml/2006/main">
+            <a:pPr>
+              <a:defRPr sz="975" b="0">
+                <a:solidFill>
+                  <a:srgbClr val="858B7E"/>
+                </a:solidFill>
+                <a:latin typeface="Pretendard"/>
+                <a:ea typeface="Pretendard"/>
+                <a:cs typeface="Pretendard"/>
+              </a:defRPr>
+            </a:pPr>
+            <a:r>
+              <a:rPr sz="975" b="0">
+                <a:solidFill>
+                  <a:srgbClr val="858B7E"/>
+                </a:solidFill>
+                <a:latin typeface="Pretendard"/>
+                <a:ea typeface="Pretendard"/>
+                <a:cs typeface="Pretendard"/>
+              </a:rPr>
+              <a:t>13</a:t>
+            </a:r>
+          </a:p>
+        </p:txBody>
+      </p:sp>
+    </p:spTree>
+    <p:extLst>
+      <p:ext uri="{BB962C8B-B14F-4D97-AF65-F5344CB8AC3E}">
+        <p14:creationId xmlns:p14="http://schemas.microsoft.com/office/powerpoint/2010/main" val="2044230986"/>
+      </p:ext>
+    </p:extLst>
+  </p:cSld>
+</p:sld>
+</file>
+
+<file path=ppt/slides/slide14.xml><?xml version="1.0" encoding="utf-8"?>
+<p:sld xmlns:p="http://schemas.openxmlformats.org/presentationml/2006/main">
+  <p:cSld>
+    <p:bg>
+      <p:bgPr>
+        <a:solidFill xmlns:a="http://schemas.openxmlformats.org/drawingml/2006/main">
+          <a:srgbClr val="FFFFFF"/>
+        </a:solidFill>
+      </p:bgPr>
+    </p:bg>
+    <p:spTree>
+      <p:nvGrpSpPr>
+        <p:cNvPr id="1" name=""/>
+        <p:cNvGrpSpPr/>
+        <p:nvPr/>
+      </p:nvGrpSpPr>
+      <p:grpSpPr>
+        <a:xfrm xmlns:a="http://schemas.openxmlformats.org/drawingml/2006/main"/>
+      </p:grpSpPr>
+      <p:sp>
+        <p:nvSpPr>
+          <p:cNvPr id="11" name="">
+            <a:extLst xmlns:a="http://schemas.openxmlformats.org/drawingml/2006/main">
+              <a:ext uri="{FF2B5EF4-FFF2-40B4-BE49-F238E27FC236}">
+                <a16:creationId xmlns:a16="http://schemas.microsoft.com/office/drawing/2014/main" id="{3FF51C7C-6406-4559-B95F-016B541D15BC}"/>
+              </a:ext>
+            </a:extLst>
+          </p:cNvPr>
+          <p:cNvSpPr>
+            <a:spLocks xmlns:a="http://schemas.openxmlformats.org/drawingml/2006/main" noGrp="1"/>
+          </p:cNvSpPr>
+          <p:nvPr/>
+        </p:nvSpPr>
+        <p:spPr>
+          <a:xfrm xmlns:a="http://schemas.openxmlformats.org/drawingml/2006/main">
+            <a:off x="685800" y="619125"/>
+            <a:ext cx="10668000" cy="247650"/>
+          </a:xfrm>
+          <a:prstGeom xmlns:a="http://schemas.openxmlformats.org/drawingml/2006/main" prst="rect">
+            <a:avLst/>
+          </a:prstGeom>
+          <a:noFill xmlns:a="http://schemas.openxmlformats.org/drawingml/2006/main"/>
+          <a:ln xmlns:a="http://schemas.openxmlformats.org/drawingml/2006/main" w="0">
+            <a:noFill/>
+          </a:ln>
+        </p:spPr>
+        <p:txBody>
+          <a:bodyPr xmlns:a="http://schemas.openxmlformats.org/drawingml/2006/main" wrap="square" lIns="0" tIns="0" rIns="0" bIns="0" anchor="t">
+            <a:noAutofit/>
+          </a:bodyPr>
+          <a:lstStyle xmlns:a="http://schemas.openxmlformats.org/drawingml/2006/main">
+            <a:defPPr>
+              <a:defRPr sz="1050" b="1">
+                <a:solidFill>
+                  <a:srgbClr val="9B7744"/>
+                </a:solidFill>
+                <a:latin typeface="Pretendard"/>
+                <a:ea typeface="Pretendard"/>
+                <a:cs typeface="Pretendard"/>
+              </a:defRPr>
+            </a:defPPr>
+          </a:lstStyle>
+          <a:p xmlns:a="http://schemas.openxmlformats.org/drawingml/2006/main">
+            <a:pPr>
+              <a:defRPr sz="1050" b="1">
+                <a:solidFill>
+                  <a:srgbClr val="9B7744"/>
+                </a:solidFill>
+                <a:latin typeface="Pretendard"/>
+                <a:ea typeface="Pretendard"/>
+                <a:cs typeface="Pretendard"/>
+              </a:defRPr>
+            </a:pPr>
+            <a:r>
+              <a:rPr sz="1050" b="1">
+                <a:solidFill>
+                  <a:srgbClr val="9B7744"/>
+                </a:solidFill>
+                <a:latin typeface="Pretendard"/>
+                <a:ea typeface="Pretendard"/>
+                <a:cs typeface="Pretendard"/>
+              </a:rPr>
+              <a:t>AFTERCARE</a:t>
+            </a:r>
+          </a:p>
+        </p:txBody>
+      </p:sp>
+      <p:sp>
+        <p:nvSpPr>
+          <p:cNvPr id="2" name="">
+            <a:extLst xmlns:a="http://schemas.openxmlformats.org/drawingml/2006/main">
+              <a:ext uri="{FF2B5EF4-FFF2-40B4-BE49-F238E27FC236}">
+                <a16:creationId xmlns:a16="http://schemas.microsoft.com/office/drawing/2014/main" id="{ABBAD620-ECCC-4B6C-A7D0-456170308BE5}"/>
+              </a:ext>
+            </a:extLst>
+          </p:cNvPr>
+          <p:cNvSpPr>
+            <a:spLocks xmlns:a="http://schemas.openxmlformats.org/drawingml/2006/main" noGrp="1"/>
+          </p:cNvSpPr>
+          <p:nvPr/>
+        </p:nvSpPr>
+        <p:spPr>
+          <a:xfrm xmlns:a="http://schemas.openxmlformats.org/drawingml/2006/main">
+            <a:off x="685800" y="1047750"/>
+            <a:ext cx="10820400" cy="1085850"/>
+          </a:xfrm>
+          <a:prstGeom xmlns:a="http://schemas.openxmlformats.org/drawingml/2006/main" prst="rect">
+            <a:avLst/>
+          </a:prstGeom>
+          <a:noFill xmlns:a="http://schemas.openxmlformats.org/drawingml/2006/main"/>
+          <a:ln xmlns:a="http://schemas.openxmlformats.org/drawingml/2006/main" w="0">
+            <a:noFill/>
+          </a:ln>
+        </p:spPr>
+        <p:txBody>
+          <a:bodyPr xmlns:a="http://schemas.openxmlformats.org/drawingml/2006/main" wrap="square" lIns="0" tIns="0" rIns="0" bIns="0" anchor="t">
+            <a:noAutofit/>
+          </a:bodyPr>
+          <a:lstStyle xmlns:a="http://schemas.openxmlformats.org/drawingml/2006/main">
+            <a:defPPr>
+              <a:defRPr sz="3450" b="1">
+                <a:solidFill>
+                  <a:srgbClr val="1B1D19"/>
+                </a:solidFill>
+                <a:latin typeface="Pretendard"/>
+                <a:ea typeface="Pretendard"/>
+                <a:cs typeface="Pretendard"/>
+              </a:defRPr>
+            </a:defPPr>
+          </a:lstStyle>
+          <a:p xmlns:a="http://schemas.openxmlformats.org/drawingml/2006/main">
+            <a:pPr>
+              <a:defRPr sz="3450" b="1">
+                <a:solidFill>
+                  <a:srgbClr val="1B1D19"/>
+                </a:solidFill>
+                <a:latin typeface="Pretendard"/>
+                <a:ea typeface="Pretendard"/>
+                <a:cs typeface="Pretendard"/>
+              </a:defRPr>
+            </a:pPr>
+            <a:r>
+              <a:rPr sz="3450" b="1">
+                <a:solidFill>
+                  <a:srgbClr val="1B1D19"/>
+                </a:solidFill>
+                <a:latin typeface="Pretendard"/>
+                <a:ea typeface="Pretendard"/>
+                <a:cs typeface="Pretendard"/>
+              </a:rPr>
+              <a:t>Postoperative Care &amp; Dressing</a:t>
+            </a:r>
+          </a:p>
+        </p:txBody>
+      </p:sp>
+      <p:sp>
+        <p:nvSpPr>
+          <p:cNvPr id="3" name="">
+            <a:extLst xmlns:a="http://schemas.openxmlformats.org/drawingml/2006/main">
+              <a:ext uri="{FF2B5EF4-FFF2-40B4-BE49-F238E27FC236}">
+                <a16:creationId xmlns:a16="http://schemas.microsoft.com/office/drawing/2014/main" id="{E1843804-A0DC-432F-BCA4-C16480447B6A}"/>
+              </a:ext>
+            </a:extLst>
+          </p:cNvPr>
+          <p:cNvSpPr>
+            <a:spLocks xmlns:a="http://schemas.openxmlformats.org/drawingml/2006/main" noGrp="1"/>
+          </p:cNvSpPr>
+          <p:nvPr/>
+        </p:nvSpPr>
+        <p:spPr>
+          <a:xfrm xmlns:a="http://schemas.openxmlformats.org/drawingml/2006/main">
+            <a:off x="685800" y="2457450"/>
+            <a:ext cx="5105400" cy="19050"/>
+          </a:xfrm>
+          <a:prstGeom xmlns:a="http://schemas.openxmlformats.org/drawingml/2006/main" prst="rect">
+            <a:avLst/>
+          </a:prstGeom>
+          <a:solidFill xmlns:a="http://schemas.openxmlformats.org/drawingml/2006/main">
+            <a:srgbClr val="B5915D"/>
+          </a:solidFill>
+          <a:ln xmlns:a="http://schemas.openxmlformats.org/drawingml/2006/main" w="0">
+            <a:noFill/>
+          </a:ln>
+        </p:spPr>
+      </p:sp>
+      <p:sp>
+        <p:nvSpPr>
+          <p:cNvPr id="4" name="">
+            <a:extLst xmlns:a="http://schemas.openxmlformats.org/drawingml/2006/main">
+              <a:ext uri="{FF2B5EF4-FFF2-40B4-BE49-F238E27FC236}">
+                <a16:creationId xmlns:a16="http://schemas.microsoft.com/office/drawing/2014/main" id="{FA5D9517-56AE-4F43-99F2-9FD5A0B09B33}"/>
+              </a:ext>
+            </a:extLst>
+          </p:cNvPr>
+          <p:cNvSpPr>
+            <a:spLocks xmlns:a="http://schemas.openxmlformats.org/drawingml/2006/main" noGrp="1"/>
+          </p:cNvSpPr>
+          <p:nvPr/>
+        </p:nvSpPr>
+        <p:spPr>
+          <a:xfrm xmlns:a="http://schemas.openxmlformats.org/drawingml/2006/main">
+            <a:off x="685800" y="2781300"/>
+            <a:ext cx="5105400" cy="590550"/>
+          </a:xfrm>
+          <a:prstGeom xmlns:a="http://schemas.openxmlformats.org/drawingml/2006/main" prst="rect">
+            <a:avLst/>
+          </a:prstGeom>
+          <a:noFill xmlns:a="http://schemas.openxmlformats.org/drawingml/2006/main"/>
+          <a:ln xmlns:a="http://schemas.openxmlformats.org/drawingml/2006/main" w="0">
+            <a:noFill/>
+          </a:ln>
+        </p:spPr>
+        <p:txBody>
+          <a:bodyPr xmlns:a="http://schemas.openxmlformats.org/drawingml/2006/main" wrap="square" lIns="0" tIns="0" rIns="0" bIns="0" anchor="t">
+            <a:noAutofit/>
+          </a:bodyPr>
+          <a:lstStyle xmlns:a="http://schemas.openxmlformats.org/drawingml/2006/main">
+            <a:defPPr>
+              <a:defRPr sz="2325" b="1">
+                <a:solidFill>
+                  <a:srgbClr val="1B1D19"/>
+                </a:solidFill>
+                <a:latin typeface="Pretendard"/>
+                <a:ea typeface="Pretendard"/>
+                <a:cs typeface="Pretendard"/>
+              </a:defRPr>
+            </a:defPPr>
+          </a:lstStyle>
+          <a:p xmlns:a="http://schemas.openxmlformats.org/drawingml/2006/main">
+            <a:pPr>
+              <a:defRPr sz="2325" b="1">
+                <a:solidFill>
+                  <a:srgbClr val="1B1D19"/>
+                </a:solidFill>
+                <a:latin typeface="Pretendard"/>
+                <a:ea typeface="Pretendard"/>
+                <a:cs typeface="Pretendard"/>
+              </a:defRPr>
+            </a:pPr>
+            <a:r>
+              <a:rPr sz="2325" b="1">
+                <a:solidFill>
+                  <a:srgbClr val="1B1D19"/>
+                </a:solidFill>
+                <a:latin typeface="Pretendard"/>
+                <a:ea typeface="Pretendard"/>
+                <a:cs typeface="Pretendard"/>
+              </a:rPr>
+              <a:t>Postoperative care</a:t>
+            </a:r>
+          </a:p>
+        </p:txBody>
+      </p:sp>
+      <p:sp>
+        <p:nvSpPr>
+          <p:cNvPr id="5" name="">
+            <a:extLst xmlns:a="http://schemas.openxmlformats.org/drawingml/2006/main">
+              <a:ext uri="{FF2B5EF4-FFF2-40B4-BE49-F238E27FC236}">
+                <a16:creationId xmlns:a16="http://schemas.microsoft.com/office/drawing/2014/main" id="{63110DCB-7D14-4213-A564-A1B3880538DD}"/>
+              </a:ext>
+            </a:extLst>
+          </p:cNvPr>
+          <p:cNvSpPr>
+            <a:spLocks xmlns:a="http://schemas.openxmlformats.org/drawingml/2006/main" noGrp="1"/>
+          </p:cNvSpPr>
+          <p:nvPr/>
+        </p:nvSpPr>
+        <p:spPr>
+          <a:xfrm xmlns:a="http://schemas.openxmlformats.org/drawingml/2006/main">
+            <a:off x="685800" y="3581400"/>
+            <a:ext cx="5105400" cy="2190750"/>
+          </a:xfrm>
+          <a:prstGeom xmlns:a="http://schemas.openxmlformats.org/drawingml/2006/main" prst="rect">
+            <a:avLst/>
+          </a:prstGeom>
+          <a:solidFill xmlns:a="http://schemas.openxmlformats.org/drawingml/2006/main">
+            <a:srgbClr val="F7F7F3"/>
+          </a:solidFill>
+          <a:ln xmlns:a="http://schemas.openxmlformats.org/drawingml/2006/main" w="0">
+            <a:noFill/>
+          </a:ln>
+        </p:spPr>
+      </p:sp>
+      <p:sp>
+        <p:nvSpPr>
+          <p:cNvPr id="6" name="">
+            <a:extLst xmlns:a="http://schemas.openxmlformats.org/drawingml/2006/main">
+              <a:ext uri="{FF2B5EF4-FFF2-40B4-BE49-F238E27FC236}">
+                <a16:creationId xmlns:a16="http://schemas.microsoft.com/office/drawing/2014/main" id="{54CE1670-956B-4E96-9580-93F866411493}"/>
+              </a:ext>
+            </a:extLst>
+          </p:cNvPr>
+          <p:cNvSpPr>
+            <a:spLocks xmlns:a="http://schemas.openxmlformats.org/drawingml/2006/main" noGrp="1"/>
+          </p:cNvSpPr>
+          <p:nvPr/>
+        </p:nvSpPr>
+        <p:spPr>
+          <a:xfrm xmlns:a="http://schemas.openxmlformats.org/drawingml/2006/main">
+            <a:off x="6400800" y="2457450"/>
+            <a:ext cx="5105400" cy="19050"/>
+          </a:xfrm>
+          <a:prstGeom xmlns:a="http://schemas.openxmlformats.org/drawingml/2006/main" prst="rect">
+            <a:avLst/>
+          </a:prstGeom>
+          <a:solidFill xmlns:a="http://schemas.openxmlformats.org/drawingml/2006/main">
+            <a:srgbClr val="B5915D"/>
+          </a:solidFill>
+          <a:ln xmlns:a="http://schemas.openxmlformats.org/drawingml/2006/main" w="0">
+            <a:noFill/>
+          </a:ln>
+        </p:spPr>
+      </p:sp>
+      <p:sp>
+        <p:nvSpPr>
+          <p:cNvPr id="7" name="">
+            <a:extLst xmlns:a="http://schemas.openxmlformats.org/drawingml/2006/main">
+              <a:ext uri="{FF2B5EF4-FFF2-40B4-BE49-F238E27FC236}">
+                <a16:creationId xmlns:a16="http://schemas.microsoft.com/office/drawing/2014/main" id="{001C981B-FF0D-4333-B79A-0AE0C0DAE421}"/>
+              </a:ext>
+            </a:extLst>
+          </p:cNvPr>
+          <p:cNvSpPr>
+            <a:spLocks xmlns:a="http://schemas.openxmlformats.org/drawingml/2006/main" noGrp="1"/>
+          </p:cNvSpPr>
+          <p:nvPr/>
+        </p:nvSpPr>
+        <p:spPr>
+          <a:xfrm xmlns:a="http://schemas.openxmlformats.org/drawingml/2006/main">
+            <a:off x="6400800" y="2781300"/>
+            <a:ext cx="5105400" cy="590550"/>
+          </a:xfrm>
+          <a:prstGeom xmlns:a="http://schemas.openxmlformats.org/drawingml/2006/main" prst="rect">
+            <a:avLst/>
+          </a:prstGeom>
+          <a:noFill xmlns:a="http://schemas.openxmlformats.org/drawingml/2006/main"/>
+          <a:ln xmlns:a="http://schemas.openxmlformats.org/drawingml/2006/main" w="0">
+            <a:noFill/>
+          </a:ln>
+        </p:spPr>
+        <p:txBody>
+          <a:bodyPr xmlns:a="http://schemas.openxmlformats.org/drawingml/2006/main" wrap="square" lIns="0" tIns="0" rIns="0" bIns="0" anchor="t">
+            <a:noAutofit/>
+          </a:bodyPr>
+          <a:lstStyle xmlns:a="http://schemas.openxmlformats.org/drawingml/2006/main">
+            <a:defPPr>
+              <a:defRPr sz="2325" b="1">
+                <a:solidFill>
+                  <a:srgbClr val="1B1D19"/>
+                </a:solidFill>
+                <a:latin typeface="Pretendard"/>
+                <a:ea typeface="Pretendard"/>
+                <a:cs typeface="Pretendard"/>
+              </a:defRPr>
+            </a:defPPr>
+          </a:lstStyle>
+          <a:p xmlns:a="http://schemas.openxmlformats.org/drawingml/2006/main">
+            <a:pPr>
+              <a:defRPr sz="2325" b="1">
+                <a:solidFill>
+                  <a:srgbClr val="1B1D19"/>
+                </a:solidFill>
+                <a:latin typeface="Pretendard"/>
+                <a:ea typeface="Pretendard"/>
+                <a:cs typeface="Pretendard"/>
+              </a:defRPr>
+            </a:pPr>
+            <a:r>
+              <a:rPr sz="2325" b="1">
+                <a:solidFill>
+                  <a:srgbClr val="1B1D19"/>
+                </a:solidFill>
+                <a:latin typeface="Pretendard"/>
+                <a:ea typeface="Pretendard"/>
+                <a:cs typeface="Pretendard"/>
+              </a:rPr>
+              <a:t>Dressing technique</a:t>
+            </a:r>
+          </a:p>
+        </p:txBody>
+      </p:sp>
+      <p:sp>
+        <p:nvSpPr>
+          <p:cNvPr id="8" name="">
+            <a:extLst xmlns:a="http://schemas.openxmlformats.org/drawingml/2006/main">
+              <a:ext uri="{FF2B5EF4-FFF2-40B4-BE49-F238E27FC236}">
+                <a16:creationId xmlns:a16="http://schemas.microsoft.com/office/drawing/2014/main" id="{AD648BDA-3AE7-4061-B8B1-96EB13575E94}"/>
+              </a:ext>
+            </a:extLst>
+          </p:cNvPr>
+          <p:cNvSpPr>
+            <a:spLocks xmlns:a="http://schemas.openxmlformats.org/drawingml/2006/main" noGrp="1"/>
+          </p:cNvSpPr>
+          <p:nvPr/>
+        </p:nvSpPr>
+        <p:spPr>
+          <a:xfrm xmlns:a="http://schemas.openxmlformats.org/drawingml/2006/main">
+            <a:off x="6400800" y="3581400"/>
+            <a:ext cx="5105400" cy="2190750"/>
+          </a:xfrm>
+          <a:prstGeom xmlns:a="http://schemas.openxmlformats.org/drawingml/2006/main" prst="rect">
+            <a:avLst/>
+          </a:prstGeom>
+          <a:solidFill xmlns:a="http://schemas.openxmlformats.org/drawingml/2006/main">
+            <a:srgbClr val="F7F7F3"/>
+          </a:solidFill>
+          <a:ln xmlns:a="http://schemas.openxmlformats.org/drawingml/2006/main" w="0">
+            <a:noFill/>
+          </a:ln>
+        </p:spPr>
+      </p:sp>
+      <p:sp>
+        <p:nvSpPr>
+          <p:cNvPr id="9" name="">
+            <a:extLst xmlns:a="http://schemas.openxmlformats.org/drawingml/2006/main">
+              <a:ext uri="{FF2B5EF4-FFF2-40B4-BE49-F238E27FC236}">
+                <a16:creationId xmlns:a16="http://schemas.microsoft.com/office/drawing/2014/main" id="{51B1AEAD-A70F-4EDB-A71C-719905B60DE5}"/>
+              </a:ext>
+            </a:extLst>
+          </p:cNvPr>
+          <p:cNvSpPr>
+            <a:spLocks xmlns:a="http://schemas.openxmlformats.org/drawingml/2006/main" noGrp="1"/>
+          </p:cNvSpPr>
+          <p:nvPr/>
+        </p:nvSpPr>
+        <p:spPr>
+          <a:xfrm xmlns:a="http://schemas.openxmlformats.org/drawingml/2006/main">
+            <a:off x="685800" y="6448425"/>
+            <a:ext cx="10191750" cy="228600"/>
+          </a:xfrm>
+          <a:prstGeom xmlns:a="http://schemas.openxmlformats.org/drawingml/2006/main" prst="rect">
+            <a:avLst/>
+          </a:prstGeom>
+          <a:noFill xmlns:a="http://schemas.openxmlformats.org/drawingml/2006/main"/>
+          <a:ln xmlns:a="http://schemas.openxmlformats.org/drawingml/2006/main" w="0">
+            <a:noFill/>
+          </a:ln>
+        </p:spPr>
+        <p:txBody>
+          <a:bodyPr xmlns:a="http://schemas.openxmlformats.org/drawingml/2006/main" wrap="square" lIns="0" tIns="0" rIns="0" bIns="0" anchor="t">
+            <a:noAutofit/>
+          </a:bodyPr>
+          <a:lstStyle xmlns:a="http://schemas.openxmlformats.org/drawingml/2006/main">
+            <a:defPPr>
+              <a:defRPr sz="975" b="0">
+                <a:solidFill>
+                  <a:srgbClr val="858B7E"/>
+                </a:solidFill>
+                <a:latin typeface="Pretendard"/>
+                <a:ea typeface="Pretendard"/>
+                <a:cs typeface="Pretendard"/>
+              </a:defRPr>
+            </a:defPPr>
+          </a:lstStyle>
+          <a:p xmlns:a="http://schemas.openxmlformats.org/drawingml/2006/main">
+            <a:pPr>
+              <a:defRPr sz="975" b="0">
+                <a:solidFill>
+                  <a:srgbClr val="858B7E"/>
+                </a:solidFill>
+                <a:latin typeface="Pretendard"/>
+                <a:ea typeface="Pretendard"/>
+                <a:cs typeface="Pretendard"/>
+              </a:defRPr>
+            </a:pPr>
+            <a:r>
+              <a:rPr sz="975" b="0">
+                <a:solidFill>
+                  <a:srgbClr val="858B7E"/>
+                </a:solidFill>
+                <a:latin typeface="Pretendard"/>
+                <a:ea typeface="Pretendard"/>
+                <a:cs typeface="Pretendard"/>
+              </a:rPr>
+              <a:t>Jinmo Koo · HIGHST Urology</a:t>
+            </a:r>
+          </a:p>
+        </p:txBody>
+      </p:sp>
+      <p:sp>
+        <p:nvSpPr>
+          <p:cNvPr id="10" name="">
+            <a:extLst xmlns:a="http://schemas.openxmlformats.org/drawingml/2006/main">
+              <a:ext uri="{FF2B5EF4-FFF2-40B4-BE49-F238E27FC236}">
+                <a16:creationId xmlns:a16="http://schemas.microsoft.com/office/drawing/2014/main" id="{2CE470A4-0C84-431B-BA1B-61801899B70F}"/>
+              </a:ext>
+            </a:extLst>
+          </p:cNvPr>
+          <p:cNvSpPr>
+            <a:spLocks xmlns:a="http://schemas.openxmlformats.org/drawingml/2006/main" noGrp="1"/>
+          </p:cNvSpPr>
+          <p:nvPr/>
+        </p:nvSpPr>
+        <p:spPr>
+          <a:xfrm xmlns:a="http://schemas.openxmlformats.org/drawingml/2006/main">
+            <a:off x="11134725" y="6448425"/>
+            <a:ext cx="371475" cy="228600"/>
+          </a:xfrm>
+          <a:prstGeom xmlns:a="http://schemas.openxmlformats.org/drawingml/2006/main" prst="rect">
+            <a:avLst/>
+          </a:prstGeom>
+          <a:noFill xmlns:a="http://schemas.openxmlformats.org/drawingml/2006/main"/>
+          <a:ln xmlns:a="http://schemas.openxmlformats.org/drawingml/2006/main" w="0">
+            <a:noFill/>
+          </a:ln>
+        </p:spPr>
+        <p:txBody>
+          <a:bodyPr xmlns:a="http://schemas.openxmlformats.org/drawingml/2006/main" wrap="square" lIns="0" tIns="0" rIns="0" bIns="0" anchor="t">
+            <a:noAutofit/>
+          </a:bodyPr>
+          <a:lstStyle xmlns:a="http://schemas.openxmlformats.org/drawingml/2006/main">
+            <a:defPPr>
+              <a:defRPr sz="975" b="0">
+                <a:solidFill>
+                  <a:srgbClr val="858B7E"/>
+                </a:solidFill>
+                <a:latin typeface="Pretendard"/>
+                <a:ea typeface="Pretendard"/>
+                <a:cs typeface="Pretendard"/>
+              </a:defRPr>
+            </a:defPPr>
+          </a:lstStyle>
+          <a:p xmlns:a="http://schemas.openxmlformats.org/drawingml/2006/main">
+            <a:pPr>
+              <a:defRPr sz="975" b="0">
+                <a:solidFill>
+                  <a:srgbClr val="858B7E"/>
+                </a:solidFill>
+                <a:latin typeface="Pretendard"/>
+                <a:ea typeface="Pretendard"/>
+                <a:cs typeface="Pretendard"/>
+              </a:defRPr>
+            </a:pPr>
+            <a:r>
+              <a:rPr sz="975" b="0">
+                <a:solidFill>
+                  <a:srgbClr val="858B7E"/>
+                </a:solidFill>
+                <a:latin typeface="Pretendard"/>
+                <a:ea typeface="Pretendard"/>
+                <a:cs typeface="Pretendard"/>
+              </a:rPr>
+              <a:t>14</a:t>
+            </a:r>
+          </a:p>
+        </p:txBody>
+      </p:sp>
+    </p:spTree>
+    <p:extLst>
+      <p:ext uri="{BB962C8B-B14F-4D97-AF65-F5344CB8AC3E}">
+        <p14:creationId xmlns:p14="http://schemas.microsoft.com/office/powerpoint/2010/main" val="113398340"/>
+      </p:ext>
+    </p:extLst>
+  </p:cSld>
+</p:sld>
+</file>
+
+<file path=ppt/slides/slide15.xml><?xml version="1.0" encoding="utf-8"?>
+<p:sld xmlns:p="http://schemas.openxmlformats.org/presentationml/2006/main">
+  <p:cSld>
+    <p:bg>
+      <p:bgPr>
+        <a:solidFill xmlns:a="http://schemas.openxmlformats.org/drawingml/2006/main">
+          <a:srgbClr val="FFFFFF"/>
+        </a:solidFill>
+      </p:bgPr>
+    </p:bg>
+    <p:spTree>
+      <p:nvGrpSpPr>
+        <p:cNvPr id="1" name=""/>
+        <p:cNvGrpSpPr/>
+        <p:nvPr/>
+      </p:nvGrpSpPr>
+      <p:grpSpPr>
+        <a:xfrm xmlns:a="http://schemas.openxmlformats.org/drawingml/2006/main"/>
+      </p:grpSpPr>
+      <p:sp>
+        <p:nvSpPr>
+          <p:cNvPr id="6" name="">
+            <a:extLst xmlns:a="http://schemas.openxmlformats.org/drawingml/2006/main">
+              <a:ext uri="{FF2B5EF4-FFF2-40B4-BE49-F238E27FC236}">
+                <a16:creationId xmlns:a16="http://schemas.microsoft.com/office/drawing/2014/main" id="{1B440F8E-C75A-41C4-A47C-A54B61A4E405}"/>
+              </a:ext>
+            </a:extLst>
+          </p:cNvPr>
+          <p:cNvSpPr>
+            <a:spLocks xmlns:a="http://schemas.openxmlformats.org/drawingml/2006/main" noGrp="1"/>
+          </p:cNvSpPr>
+          <p:nvPr/>
+        </p:nvSpPr>
+        <p:spPr>
+          <a:xfrm xmlns:a="http://schemas.openxmlformats.org/drawingml/2006/main">
+            <a:off x="685800" y="619125"/>
+            <a:ext cx="10668000" cy="247650"/>
+          </a:xfrm>
+          <a:prstGeom xmlns:a="http://schemas.openxmlformats.org/drawingml/2006/main" prst="rect">
+            <a:avLst/>
+          </a:prstGeom>
+          <a:noFill xmlns:a="http://schemas.openxmlformats.org/drawingml/2006/main"/>
+          <a:ln xmlns:a="http://schemas.openxmlformats.org/drawingml/2006/main" w="0">
+            <a:noFill/>
+          </a:ln>
+        </p:spPr>
+        <p:txBody>
+          <a:bodyPr xmlns:a="http://schemas.openxmlformats.org/drawingml/2006/main" wrap="square" lIns="0" tIns="0" rIns="0" bIns="0" anchor="t">
+            <a:noAutofit/>
+          </a:bodyPr>
+          <a:lstStyle xmlns:a="http://schemas.openxmlformats.org/drawingml/2006/main">
+            <a:defPPr>
+              <a:defRPr sz="1050" b="1">
+                <a:solidFill>
+                  <a:srgbClr val="9B7744"/>
+                </a:solidFill>
+                <a:latin typeface="Pretendard"/>
+                <a:ea typeface="Pretendard"/>
+                <a:cs typeface="Pretendard"/>
+              </a:defRPr>
+            </a:defPPr>
+          </a:lstStyle>
+          <a:p xmlns:a="http://schemas.openxmlformats.org/drawingml/2006/main">
+            <a:pPr>
+              <a:defRPr sz="1050" b="1">
+                <a:solidFill>
+                  <a:srgbClr val="9B7744"/>
+                </a:solidFill>
+                <a:latin typeface="Pretendard"/>
+                <a:ea typeface="Pretendard"/>
+                <a:cs typeface="Pretendard"/>
+              </a:defRPr>
+            </a:pPr>
+            <a:r>
+              <a:rPr sz="1050" b="1">
+                <a:solidFill>
+                  <a:srgbClr val="9B7744"/>
+                </a:solidFill>
+                <a:latin typeface="Pretendard"/>
+                <a:ea typeface="Pretendard"/>
+                <a:cs typeface="Pretendard"/>
+              </a:rPr>
+              <a:t>DISCUSSION</a:t>
+            </a:r>
+          </a:p>
+        </p:txBody>
+      </p:sp>
+      <p:sp>
+        <p:nvSpPr>
+          <p:cNvPr id="2" name="">
+            <a:extLst xmlns:a="http://schemas.openxmlformats.org/drawingml/2006/main">
+              <a:ext uri="{FF2B5EF4-FFF2-40B4-BE49-F238E27FC236}">
+                <a16:creationId xmlns:a16="http://schemas.microsoft.com/office/drawing/2014/main" id="{2E6249D1-F19E-439F-B358-B9642C1D3209}"/>
+              </a:ext>
+            </a:extLst>
+          </p:cNvPr>
+          <p:cNvSpPr>
+            <a:spLocks xmlns:a="http://schemas.openxmlformats.org/drawingml/2006/main" noGrp="1"/>
+          </p:cNvSpPr>
+          <p:nvPr/>
+        </p:nvSpPr>
+        <p:spPr>
+          <a:xfrm xmlns:a="http://schemas.openxmlformats.org/drawingml/2006/main">
+            <a:off x="685800" y="1047750"/>
+            <a:ext cx="10820400" cy="1085850"/>
+          </a:xfrm>
+          <a:prstGeom xmlns:a="http://schemas.openxmlformats.org/drawingml/2006/main" prst="rect">
+            <a:avLst/>
+          </a:prstGeom>
+          <a:noFill xmlns:a="http://schemas.openxmlformats.org/drawingml/2006/main"/>
+          <a:ln xmlns:a="http://schemas.openxmlformats.org/drawingml/2006/main" w="0">
+            <a:noFill/>
+          </a:ln>
+        </p:spPr>
+        <p:txBody>
+          <a:bodyPr xmlns:a="http://schemas.openxmlformats.org/drawingml/2006/main" wrap="square" lIns="0" tIns="0" rIns="0" bIns="0" anchor="t">
+            <a:noAutofit/>
+          </a:bodyPr>
+          <a:lstStyle xmlns:a="http://schemas.openxmlformats.org/drawingml/2006/main">
+            <a:defPPr>
+              <a:defRPr sz="3450" b="1">
+                <a:solidFill>
+                  <a:srgbClr val="1B1D19"/>
+                </a:solidFill>
+                <a:latin typeface="Pretendard"/>
+                <a:ea typeface="Pretendard"/>
+                <a:cs typeface="Pretendard"/>
+              </a:defRPr>
+            </a:defPPr>
+          </a:lstStyle>
+          <a:p xmlns:a="http://schemas.openxmlformats.org/drawingml/2006/main">
+            <a:pPr>
+              <a:defRPr sz="3450" b="1">
+                <a:solidFill>
+                  <a:srgbClr val="1B1D19"/>
+                </a:solidFill>
+                <a:latin typeface="Pretendard"/>
+                <a:ea typeface="Pretendard"/>
+                <a:cs typeface="Pretendard"/>
+              </a:defRPr>
+            </a:pPr>
+            <a:r>
+              <a:rPr sz="3450" b="1">
+                <a:solidFill>
+                  <a:srgbClr val="1B1D19"/>
+                </a:solidFill>
+                <a:latin typeface="Pretendard"/>
+                <a:ea typeface="Pretendard"/>
+                <a:cs typeface="Pretendard"/>
+              </a:rPr>
               <a:t>Questions &amp; Answers</a:t>
             </a:r>
           </a:p>
@@ -6410,7 +7309,7 @@
           <p:cNvPr id="3" name="">
             <a:extLst xmlns:a="http://schemas.openxmlformats.org/drawingml/2006/main">
               <a:ext uri="{FF2B5EF4-FFF2-40B4-BE49-F238E27FC236}">
-                <a16:creationId xmlns:a16="http://schemas.microsoft.com/office/drawing/2014/main" id="{ED143D55-2943-421C-AC90-01C07B258874}"/>
+                <a16:creationId xmlns:a16="http://schemas.microsoft.com/office/drawing/2014/main" id="{49DDCC07-55B4-4FF3-ADCD-1FE699A74A67}"/>
               </a:ext>
             </a:extLst>
           </p:cNvPr>
@@ -6478,7 +7377,7 @@
           <p:cNvPr id="4" name="">
             <a:extLst xmlns:a="http://schemas.openxmlformats.org/drawingml/2006/main">
               <a:ext uri="{FF2B5EF4-FFF2-40B4-BE49-F238E27FC236}">
-                <a16:creationId xmlns:a16="http://schemas.microsoft.com/office/drawing/2014/main" id="{D117886A-E861-4523-897C-B5F2AC9087EB}"/>
+                <a16:creationId xmlns:a16="http://schemas.microsoft.com/office/drawing/2014/main" id="{8F4DDEDD-616D-4046-9D44-02B58CB10F01}"/>
               </a:ext>
             </a:extLst>
           </p:cNvPr>
@@ -6546,7 +7445,7 @@
           <p:cNvPr id="5" name="">
             <a:extLst xmlns:a="http://schemas.openxmlformats.org/drawingml/2006/main">
               <a:ext uri="{FF2B5EF4-FFF2-40B4-BE49-F238E27FC236}">
-                <a16:creationId xmlns:a16="http://schemas.microsoft.com/office/drawing/2014/main" id="{13037A85-78B9-487E-9BE6-7BC2BD631F35}"/>
+                <a16:creationId xmlns:a16="http://schemas.microsoft.com/office/drawing/2014/main" id="{FF0733FA-C7AC-49AD-9C49-F0BEAEEEBA4C}"/>
               </a:ext>
             </a:extLst>
           </p:cNvPr>
@@ -6604,7 +7503,7 @@
                 <a:ea typeface="Pretendard"/>
                 <a:cs typeface="Pretendard"/>
               </a:rPr>
-              <a:t>13</a:t>
+              <a:t>15</a:t>
             </a:r>
           </a:p>
         </p:txBody>
@@ -6612,7 +7511,7 @@
     </p:spTree>
     <p:extLst>
       <p:ext uri="{BB962C8B-B14F-4D97-AF65-F5344CB8AC3E}">
-        <p14:creationId xmlns:p14="http://schemas.microsoft.com/office/powerpoint/2010/main" val="954744155"/>
+        <p14:creationId xmlns:p14="http://schemas.microsoft.com/office/powerpoint/2010/main" val="1409525333"/>
       </p:ext>
     </p:extLst>
   </p:cSld>
@@ -6643,7 +7542,7 @@
           <p:cNvPr id="7" name="">
             <a:extLst xmlns:a="http://schemas.openxmlformats.org/drawingml/2006/main">
               <a:ext uri="{FF2B5EF4-FFF2-40B4-BE49-F238E27FC236}">
-                <a16:creationId xmlns:a16="http://schemas.microsoft.com/office/drawing/2014/main" id="{19AC6689-3F5F-4B9E-9CFE-A2019EC9892B}"/>
+                <a16:creationId xmlns:a16="http://schemas.microsoft.com/office/drawing/2014/main" id="{2A21CD0C-3CCC-4814-B1D2-483FBAE9E1E4}"/>
               </a:ext>
             </a:extLst>
           </p:cNvPr>
@@ -6711,7 +7610,7 @@
           <p:cNvPr id="2" name="">
             <a:extLst xmlns:a="http://schemas.openxmlformats.org/drawingml/2006/main">
               <a:ext uri="{FF2B5EF4-FFF2-40B4-BE49-F238E27FC236}">
-                <a16:creationId xmlns:a16="http://schemas.microsoft.com/office/drawing/2014/main" id="{42A995E7-3A62-4ADC-8D38-2ECE8ED4E90F}"/>
+                <a16:creationId xmlns:a16="http://schemas.microsoft.com/office/drawing/2014/main" id="{24707496-FD04-40A8-BB45-F195CB0A5AB2}"/>
               </a:ext>
             </a:extLst>
           </p:cNvPr>
@@ -6779,7 +7678,7 @@
           <p:cNvPr id="3" name="">
             <a:extLst xmlns:a="http://schemas.openxmlformats.org/drawingml/2006/main">
               <a:ext uri="{FF2B5EF4-FFF2-40B4-BE49-F238E27FC236}">
-                <a16:creationId xmlns:a16="http://schemas.microsoft.com/office/drawing/2014/main" id="{5D6A2554-AC42-4A00-B220-62CA0E191F3B}"/>
+                <a16:creationId xmlns:a16="http://schemas.microsoft.com/office/drawing/2014/main" id="{2F7920E3-5D01-42BD-A53F-4C91B38700EF}"/>
               </a:ext>
             </a:extLst>
           </p:cNvPr>
@@ -6847,7 +7746,7 @@
           <p:cNvPr id="4" name="">
             <a:extLst xmlns:a="http://schemas.openxmlformats.org/drawingml/2006/main">
               <a:ext uri="{FF2B5EF4-FFF2-40B4-BE49-F238E27FC236}">
-                <a16:creationId xmlns:a16="http://schemas.microsoft.com/office/drawing/2014/main" id="{2B02EE4B-4058-4826-A53A-4ED36A3D39D5}"/>
+                <a16:creationId xmlns:a16="http://schemas.microsoft.com/office/drawing/2014/main" id="{FFA248D5-4D0E-44ED-9AB3-3120CBBB30C1}"/>
               </a:ext>
             </a:extLst>
           </p:cNvPr>
@@ -6857,7 +7756,7 @@
           <p:nvPr/>
         </p:nvPicPr>
         <p:blipFill>
-          <a:blip xmlns:r="http://schemas.openxmlformats.org/officeDocument/2006/relationships" xmlns:a="http://schemas.openxmlformats.org/drawingml/2006/main" r:embed="R7afef12476e24d17"/>
+          <a:blip xmlns:r="http://schemas.openxmlformats.org/officeDocument/2006/relationships" xmlns:a="http://schemas.openxmlformats.org/drawingml/2006/main" r:embed="R8653044f626d465b"/>
           <a:stretch xmlns:a="http://schemas.openxmlformats.org/drawingml/2006/main"/>
         </p:blipFill>
         <p:spPr>
@@ -6875,7 +7774,7 @@
           <p:cNvPr id="5" name="">
             <a:extLst xmlns:a="http://schemas.openxmlformats.org/drawingml/2006/main">
               <a:ext uri="{FF2B5EF4-FFF2-40B4-BE49-F238E27FC236}">
-                <a16:creationId xmlns:a16="http://schemas.microsoft.com/office/drawing/2014/main" id="{EAC85E11-7C31-448B-BEB9-F668D49E452C}"/>
+                <a16:creationId xmlns:a16="http://schemas.microsoft.com/office/drawing/2014/main" id="{26648A6C-5704-4F70-A9F7-06A133198D6A}"/>
               </a:ext>
             </a:extLst>
           </p:cNvPr>
@@ -6943,7 +7842,7 @@
           <p:cNvPr id="6" name="">
             <a:extLst xmlns:a="http://schemas.openxmlformats.org/drawingml/2006/main">
               <a:ext uri="{FF2B5EF4-FFF2-40B4-BE49-F238E27FC236}">
-                <a16:creationId xmlns:a16="http://schemas.microsoft.com/office/drawing/2014/main" id="{7D7E2129-2755-4F59-A5B0-A4FF24EC0A7E}"/>
+                <a16:creationId xmlns:a16="http://schemas.microsoft.com/office/drawing/2014/main" id="{632CB211-003D-46BC-922F-AA1723E2056D}"/>
               </a:ext>
             </a:extLst>
           </p:cNvPr>
@@ -7009,7 +7908,7 @@
     </p:spTree>
     <p:extLst>
       <p:ext uri="{BB962C8B-B14F-4D97-AF65-F5344CB8AC3E}">
-        <p14:creationId xmlns:p14="http://schemas.microsoft.com/office/powerpoint/2010/main" val="1512088029"/>
+        <p14:creationId xmlns:p14="http://schemas.microsoft.com/office/powerpoint/2010/main" val="329523382"/>
       </p:ext>
     </p:extLst>
   </p:cSld>
@@ -7040,7 +7939,7 @@
           <p:cNvPr id="14" name="">
             <a:extLst xmlns:a="http://schemas.openxmlformats.org/drawingml/2006/main">
               <a:ext uri="{FF2B5EF4-FFF2-40B4-BE49-F238E27FC236}">
-                <a16:creationId xmlns:a16="http://schemas.microsoft.com/office/drawing/2014/main" id="{41FA0637-7BCD-4D2B-8099-9912B9DC734D}"/>
+                <a16:creationId xmlns:a16="http://schemas.microsoft.com/office/drawing/2014/main" id="{7B5BE419-D4C8-4892-8EAC-69CF0B0E6E4F}"/>
               </a:ext>
             </a:extLst>
           </p:cNvPr>
@@ -7108,7 +8007,7 @@
           <p:cNvPr id="2" name="">
             <a:extLst xmlns:a="http://schemas.openxmlformats.org/drawingml/2006/main">
               <a:ext uri="{FF2B5EF4-FFF2-40B4-BE49-F238E27FC236}">
-                <a16:creationId xmlns:a16="http://schemas.microsoft.com/office/drawing/2014/main" id="{3E14A33F-1167-4EB0-9020-1CBFCABCC988}"/>
+                <a16:creationId xmlns:a16="http://schemas.microsoft.com/office/drawing/2014/main" id="{5A19D2AA-F309-45C1-8584-EED4502AFFC3}"/>
               </a:ext>
             </a:extLst>
           </p:cNvPr>
@@ -7176,7 +8075,7 @@
           <p:cNvPr id="3" name="">
             <a:extLst xmlns:a="http://schemas.openxmlformats.org/drawingml/2006/main">
               <a:ext uri="{FF2B5EF4-FFF2-40B4-BE49-F238E27FC236}">
-                <a16:creationId xmlns:a16="http://schemas.microsoft.com/office/drawing/2014/main" id="{6A75E9FC-C00F-4B52-AF56-F962A22EB70C}"/>
+                <a16:creationId xmlns:a16="http://schemas.microsoft.com/office/drawing/2014/main" id="{F2BD37C9-D41A-4CB4-886E-9BDBA28DAED6}"/>
               </a:ext>
             </a:extLst>
           </p:cNvPr>
@@ -7206,7 +8105,7 @@
           <p:cNvPr id="4" name="">
             <a:extLst xmlns:a="http://schemas.openxmlformats.org/drawingml/2006/main">
               <a:ext uri="{FF2B5EF4-FFF2-40B4-BE49-F238E27FC236}">
-                <a16:creationId xmlns:a16="http://schemas.microsoft.com/office/drawing/2014/main" id="{E8C23097-2194-40B0-B927-16007989B932}"/>
+                <a16:creationId xmlns:a16="http://schemas.microsoft.com/office/drawing/2014/main" id="{4448458E-C1A9-4748-A06C-4DE5850D9212}"/>
               </a:ext>
             </a:extLst>
           </p:cNvPr>
@@ -7274,7 +8173,7 @@
           <p:cNvPr id="5" name="">
             <a:extLst xmlns:a="http://schemas.openxmlformats.org/drawingml/2006/main">
               <a:ext uri="{FF2B5EF4-FFF2-40B4-BE49-F238E27FC236}">
-                <a16:creationId xmlns:a16="http://schemas.microsoft.com/office/drawing/2014/main" id="{B1CAB92A-E17D-4566-84A4-CBD268A61BA0}"/>
+                <a16:creationId xmlns:a16="http://schemas.microsoft.com/office/drawing/2014/main" id="{2F10588E-CA5D-4B7C-BECD-CB8EBDA9E02F}"/>
               </a:ext>
             </a:extLst>
           </p:cNvPr>
@@ -7365,7 +8264,7 @@
           <p:cNvPr id="6" name="">
             <a:extLst xmlns:a="http://schemas.openxmlformats.org/drawingml/2006/main">
               <a:ext uri="{FF2B5EF4-FFF2-40B4-BE49-F238E27FC236}">
-                <a16:creationId xmlns:a16="http://schemas.microsoft.com/office/drawing/2014/main" id="{BC00328C-D1E5-4D50-953E-6547CB358114}"/>
+                <a16:creationId xmlns:a16="http://schemas.microsoft.com/office/drawing/2014/main" id="{A0A2583C-6021-4D84-A077-6DAC2F194B4F}"/>
               </a:ext>
             </a:extLst>
           </p:cNvPr>
@@ -7395,7 +8294,7 @@
           <p:cNvPr id="7" name="">
             <a:extLst xmlns:a="http://schemas.openxmlformats.org/drawingml/2006/main">
               <a:ext uri="{FF2B5EF4-FFF2-40B4-BE49-F238E27FC236}">
-                <a16:creationId xmlns:a16="http://schemas.microsoft.com/office/drawing/2014/main" id="{85F599C9-EBB4-4C53-B30F-C75B68AD6DEB}"/>
+                <a16:creationId xmlns:a16="http://schemas.microsoft.com/office/drawing/2014/main" id="{5EDE8503-3D98-4A06-8012-C1FA64AB56DF}"/>
               </a:ext>
             </a:extLst>
           </p:cNvPr>
@@ -7463,7 +8362,7 @@
           <p:cNvPr id="8" name="">
             <a:extLst xmlns:a="http://schemas.openxmlformats.org/drawingml/2006/main">
               <a:ext uri="{FF2B5EF4-FFF2-40B4-BE49-F238E27FC236}">
-                <a16:creationId xmlns:a16="http://schemas.microsoft.com/office/drawing/2014/main" id="{A621CF02-38AA-4310-888F-B9D7EB22E6E0}"/>
+                <a16:creationId xmlns:a16="http://schemas.microsoft.com/office/drawing/2014/main" id="{785503D1-CB32-4F1A-AEA1-D641502C045C}"/>
               </a:ext>
             </a:extLst>
           </p:cNvPr>
@@ -7531,7 +8430,7 @@
           <p:cNvPr id="9" name="">
             <a:extLst xmlns:a="http://schemas.openxmlformats.org/drawingml/2006/main">
               <a:ext uri="{FF2B5EF4-FFF2-40B4-BE49-F238E27FC236}">
-                <a16:creationId xmlns:a16="http://schemas.microsoft.com/office/drawing/2014/main" id="{3C14D2DB-679B-40C1-A5D5-27335BB4C1CB}"/>
+                <a16:creationId xmlns:a16="http://schemas.microsoft.com/office/drawing/2014/main" id="{D4BA40E3-F0DE-4448-B9DE-5809182C49E7}"/>
               </a:ext>
             </a:extLst>
           </p:cNvPr>
@@ -7561,7 +8460,7 @@
           <p:cNvPr id="10" name="">
             <a:extLst xmlns:a="http://schemas.openxmlformats.org/drawingml/2006/main">
               <a:ext uri="{FF2B5EF4-FFF2-40B4-BE49-F238E27FC236}">
-                <a16:creationId xmlns:a16="http://schemas.microsoft.com/office/drawing/2014/main" id="{79244196-60DA-4526-9BFA-93CA6E5B5436}"/>
+                <a16:creationId xmlns:a16="http://schemas.microsoft.com/office/drawing/2014/main" id="{8108C06A-191A-4E36-9373-41FE0A14318A}"/>
               </a:ext>
             </a:extLst>
           </p:cNvPr>
@@ -7571,7 +8470,7 @@
           <p:nvPr/>
         </p:nvPicPr>
         <p:blipFill>
-          <a:blip xmlns:r="http://schemas.openxmlformats.org/officeDocument/2006/relationships" xmlns:a="http://schemas.openxmlformats.org/drawingml/2006/main" r:embed="R02ba854ae7b54be1"/>
+          <a:blip xmlns:r="http://schemas.openxmlformats.org/officeDocument/2006/relationships" xmlns:a="http://schemas.openxmlformats.org/drawingml/2006/main" r:embed="R83ae52e145c84415"/>
           <a:stretch xmlns:a="http://schemas.openxmlformats.org/drawingml/2006/main"/>
         </p:blipFill>
         <p:spPr>
@@ -7589,7 +8488,7 @@
           <p:cNvPr id="11" name="">
             <a:extLst xmlns:a="http://schemas.openxmlformats.org/drawingml/2006/main">
               <a:ext uri="{FF2B5EF4-FFF2-40B4-BE49-F238E27FC236}">
-                <a16:creationId xmlns:a16="http://schemas.microsoft.com/office/drawing/2014/main" id="{E7C19899-8E58-4432-BABD-1C1B5E934E85}"/>
+                <a16:creationId xmlns:a16="http://schemas.microsoft.com/office/drawing/2014/main" id="{3474C657-2D64-416C-8D2F-41F002551EDE}"/>
               </a:ext>
             </a:extLst>
           </p:cNvPr>
@@ -7657,7 +8556,7 @@
           <p:cNvPr id="12" name="">
             <a:extLst xmlns:a="http://schemas.openxmlformats.org/drawingml/2006/main">
               <a:ext uri="{FF2B5EF4-FFF2-40B4-BE49-F238E27FC236}">
-                <a16:creationId xmlns:a16="http://schemas.microsoft.com/office/drawing/2014/main" id="{54FF2910-0FA8-4EDD-97D9-104BDB16A4D6}"/>
+                <a16:creationId xmlns:a16="http://schemas.microsoft.com/office/drawing/2014/main" id="{F928B746-5265-4566-A7F8-F5B97EC7070B}"/>
               </a:ext>
             </a:extLst>
           </p:cNvPr>
@@ -7725,7 +8624,7 @@
           <p:cNvPr id="13" name="">
             <a:extLst xmlns:a="http://schemas.openxmlformats.org/drawingml/2006/main">
               <a:ext uri="{FF2B5EF4-FFF2-40B4-BE49-F238E27FC236}">
-                <a16:creationId xmlns:a16="http://schemas.microsoft.com/office/drawing/2014/main" id="{5D427DF1-2DCA-434A-85C1-4572AC051BC7}"/>
+                <a16:creationId xmlns:a16="http://schemas.microsoft.com/office/drawing/2014/main" id="{99294542-5840-44B2-A5CC-9A2A65DC892C}"/>
               </a:ext>
             </a:extLst>
           </p:cNvPr>
@@ -7791,7 +8690,7 @@
     </p:spTree>
     <p:extLst>
       <p:ext uri="{BB962C8B-B14F-4D97-AF65-F5344CB8AC3E}">
-        <p14:creationId xmlns:p14="http://schemas.microsoft.com/office/powerpoint/2010/main" val="166693471"/>
+        <p14:creationId xmlns:p14="http://schemas.microsoft.com/office/powerpoint/2010/main" val="1348005585"/>
       </p:ext>
     </p:extLst>
   </p:cSld>
@@ -7822,7 +8721,7 @@
           <p:cNvPr id="11" name="">
             <a:extLst xmlns:a="http://schemas.openxmlformats.org/drawingml/2006/main">
               <a:ext uri="{FF2B5EF4-FFF2-40B4-BE49-F238E27FC236}">
-                <a16:creationId xmlns:a16="http://schemas.microsoft.com/office/drawing/2014/main" id="{CEE8034F-4844-4DB1-954A-DE9488427816}"/>
+                <a16:creationId xmlns:a16="http://schemas.microsoft.com/office/drawing/2014/main" id="{45F5C1FA-C9BD-4BEC-BEA6-46D2B26D6FA6}"/>
               </a:ext>
             </a:extLst>
           </p:cNvPr>
@@ -7890,7 +8789,7 @@
           <p:cNvPr id="2" name="">
             <a:extLst xmlns:a="http://schemas.openxmlformats.org/drawingml/2006/main">
               <a:ext uri="{FF2B5EF4-FFF2-40B4-BE49-F238E27FC236}">
-                <a16:creationId xmlns:a16="http://schemas.microsoft.com/office/drawing/2014/main" id="{23933B68-ADF3-47FB-B68C-055DB0C63C06}"/>
+                <a16:creationId xmlns:a16="http://schemas.microsoft.com/office/drawing/2014/main" id="{04E0CFBE-2B10-4520-B9C1-63DCA71D1F20}"/>
               </a:ext>
             </a:extLst>
           </p:cNvPr>
@@ -7948,7 +8847,7 @@
                 <a:ea typeface="Pretendard"/>
                 <a:cs typeface="Pretendard"/>
               </a:rPr>
-              <a:t>Preoperative Evaluation</a:t>
+              <a:t>Patient Questionnaires</a:t>
             </a:r>
           </a:p>
         </p:txBody>
@@ -7958,7 +8857,7 @@
           <p:cNvPr id="3" name="">
             <a:extLst xmlns:a="http://schemas.openxmlformats.org/drawingml/2006/main">
               <a:ext uri="{FF2B5EF4-FFF2-40B4-BE49-F238E27FC236}">
-                <a16:creationId xmlns:a16="http://schemas.microsoft.com/office/drawing/2014/main" id="{1FDB2E83-E5CC-4256-B617-593EFA117E55}"/>
+                <a16:creationId xmlns:a16="http://schemas.microsoft.com/office/drawing/2014/main" id="{5258DF64-27C3-4B5B-BE98-82C4B2FAC97F}"/>
               </a:ext>
             </a:extLst>
           </p:cNvPr>
@@ -7988,7 +8887,7 @@
           <p:cNvPr id="4" name="">
             <a:extLst xmlns:a="http://schemas.openxmlformats.org/drawingml/2006/main">
               <a:ext uri="{FF2B5EF4-FFF2-40B4-BE49-F238E27FC236}">
-                <a16:creationId xmlns:a16="http://schemas.microsoft.com/office/drawing/2014/main" id="{BC3F2C1A-B114-4A51-A606-3A79B6D7BED8}"/>
+                <a16:creationId xmlns:a16="http://schemas.microsoft.com/office/drawing/2014/main" id="{FBAD99DC-EFF8-4799-86CE-0AFA8FF88EDD}"/>
               </a:ext>
             </a:extLst>
           </p:cNvPr>
@@ -8046,7 +8945,7 @@
                 <a:ea typeface="Pretendard"/>
                 <a:cs typeface="Pretendard"/>
               </a:rPr>
-              <a:t>Blood and urine testing</a:t>
+              <a:t>IIEF</a:t>
             </a:r>
           </a:p>
         </p:txBody>
@@ -8056,7 +8955,7 @@
           <p:cNvPr id="5" name="">
             <a:extLst xmlns:a="http://schemas.openxmlformats.org/drawingml/2006/main">
               <a:ext uri="{FF2B5EF4-FFF2-40B4-BE49-F238E27FC236}">
-                <a16:creationId xmlns:a16="http://schemas.microsoft.com/office/drawing/2014/main" id="{177BF92D-0C4C-404F-9BBE-7C0D52668515}"/>
+                <a16:creationId xmlns:a16="http://schemas.microsoft.com/office/drawing/2014/main" id="{B2D73DAB-9676-4220-A18F-E7D75FD2455E}"/>
               </a:ext>
             </a:extLst>
           </p:cNvPr>
@@ -8114,7 +9013,7 @@
                 <a:ea typeface="Pretendard"/>
                 <a:cs typeface="Pretendard"/>
               </a:rPr>
-              <a:t>Liver function</a:t>
+              <a:t>International Index</a:t>
             </a:r>
           </a:p>
           <a:p xmlns:a="http://schemas.openxmlformats.org/drawingml/2006/main">
@@ -8137,53 +9036,7 @@
                 <a:ea typeface="Pretendard"/>
                 <a:cs typeface="Pretendard"/>
               </a:rPr>
-              <a:t>Blood glucose</a:t>
-            </a:r>
-          </a:p>
-          <a:p xmlns:a="http://schemas.openxmlformats.org/drawingml/2006/main">
-            <a:pPr>
-              <a:defRPr sz="2025" b="0">
-                <a:solidFill>
-                  <a:srgbClr val="6B7265"/>
-                </a:solidFill>
-                <a:latin typeface="Pretendard"/>
-                <a:ea typeface="Pretendard"/>
-                <a:cs typeface="Pretendard"/>
-              </a:defRPr>
-            </a:pPr>
-            <a:r>
-              <a:rPr sz="2025" b="0">
-                <a:solidFill>
-                  <a:srgbClr val="6B7265"/>
-                </a:solidFill>
-                <a:latin typeface="Pretendard"/>
-                <a:ea typeface="Pretendard"/>
-                <a:cs typeface="Pretendard"/>
-              </a:rPr>
-              <a:t>Inflammatory markers</a:t>
-            </a:r>
-          </a:p>
-          <a:p xmlns:a="http://schemas.openxmlformats.org/drawingml/2006/main">
-            <a:pPr>
-              <a:defRPr sz="2025" b="0">
-                <a:solidFill>
-                  <a:srgbClr val="6B7265"/>
-                </a:solidFill>
-                <a:latin typeface="Pretendard"/>
-                <a:ea typeface="Pretendard"/>
-                <a:cs typeface="Pretendard"/>
-              </a:defRPr>
-            </a:pPr>
-            <a:r>
-              <a:rPr sz="2025" b="0">
-                <a:solidFill>
-                  <a:srgbClr val="6B7265"/>
-                </a:solidFill>
-                <a:latin typeface="Pretendard"/>
-                <a:ea typeface="Pretendard"/>
-                <a:cs typeface="Pretendard"/>
-              </a:rPr>
-              <a:t>STI screening</a:t>
+              <a:t>of Erectile Function</a:t>
             </a:r>
           </a:p>
         </p:txBody>
@@ -8193,7 +9046,7 @@
           <p:cNvPr id="6" name="">
             <a:extLst xmlns:a="http://schemas.openxmlformats.org/drawingml/2006/main">
               <a:ext uri="{FF2B5EF4-FFF2-40B4-BE49-F238E27FC236}">
-                <a16:creationId xmlns:a16="http://schemas.microsoft.com/office/drawing/2014/main" id="{CF9DA849-676F-46BD-9963-0B22F3CC0786}"/>
+                <a16:creationId xmlns:a16="http://schemas.microsoft.com/office/drawing/2014/main" id="{E53EA957-DD2F-4A4A-B16D-4D2229E33E0B}"/>
               </a:ext>
             </a:extLst>
           </p:cNvPr>
@@ -8223,7 +9076,7 @@
           <p:cNvPr id="7" name="">
             <a:extLst xmlns:a="http://schemas.openxmlformats.org/drawingml/2006/main">
               <a:ext uri="{FF2B5EF4-FFF2-40B4-BE49-F238E27FC236}">
-                <a16:creationId xmlns:a16="http://schemas.microsoft.com/office/drawing/2014/main" id="{6C8D8D65-3D9B-44D2-ADFF-EE2FCBC30F7A}"/>
+                <a16:creationId xmlns:a16="http://schemas.microsoft.com/office/drawing/2014/main" id="{358CCED7-97FA-4997-86D9-1E9E89087E0C}"/>
               </a:ext>
             </a:extLst>
           </p:cNvPr>
@@ -8281,7 +9134,7 @@
                 <a:ea typeface="Pretendard"/>
                 <a:cs typeface="Pretendard"/>
               </a:rPr>
-              <a:t>Penile biothesiometry</a:t>
+              <a:t>PEDT</a:t>
             </a:r>
           </a:p>
         </p:txBody>
@@ -8291,7 +9144,7 @@
           <p:cNvPr id="8" name="">
             <a:extLst xmlns:a="http://schemas.openxmlformats.org/drawingml/2006/main">
               <a:ext uri="{FF2B5EF4-FFF2-40B4-BE49-F238E27FC236}">
-                <a16:creationId xmlns:a16="http://schemas.microsoft.com/office/drawing/2014/main" id="{6DA09B24-34C0-4F4E-BB21-A5CE8085E5E4}"/>
+                <a16:creationId xmlns:a16="http://schemas.microsoft.com/office/drawing/2014/main" id="{1CE2ED1A-C06B-473D-B0F2-53C9397C6A4E}"/>
               </a:ext>
             </a:extLst>
           </p:cNvPr>
@@ -8349,7 +9202,7 @@
                 <a:ea typeface="Pretendard"/>
                 <a:cs typeface="Pretendard"/>
               </a:rPr>
-              <a:t>Vibration perception threshold</a:t>
+              <a:t>Premature Ejaculation</a:t>
             </a:r>
           </a:p>
           <a:p xmlns:a="http://schemas.openxmlformats.org/drawingml/2006/main">
@@ -8372,7 +9225,7 @@
                 <a:ea typeface="Pretendard"/>
                 <a:cs typeface="Pretendard"/>
               </a:rPr>
-              <a:t>Penile sensitivity assessment</a:t>
+              <a:t>Diagnostic Tool</a:t>
             </a:r>
           </a:p>
         </p:txBody>
@@ -8382,7 +9235,7 @@
           <p:cNvPr id="9" name="">
             <a:extLst xmlns:a="http://schemas.openxmlformats.org/drawingml/2006/main">
               <a:ext uri="{FF2B5EF4-FFF2-40B4-BE49-F238E27FC236}">
-                <a16:creationId xmlns:a16="http://schemas.microsoft.com/office/drawing/2014/main" id="{7A059DBF-826D-4647-8C79-22E7CB1E2438}"/>
+                <a16:creationId xmlns:a16="http://schemas.microsoft.com/office/drawing/2014/main" id="{658B2F2C-8078-4395-A961-D4641AAF4D9E}"/>
               </a:ext>
             </a:extLst>
           </p:cNvPr>
@@ -8450,7 +9303,7 @@
           <p:cNvPr id="10" name="">
             <a:extLst xmlns:a="http://schemas.openxmlformats.org/drawingml/2006/main">
               <a:ext uri="{FF2B5EF4-FFF2-40B4-BE49-F238E27FC236}">
-                <a16:creationId xmlns:a16="http://schemas.microsoft.com/office/drawing/2014/main" id="{E92250C4-B235-4E3A-A708-107858DA0D03}"/>
+                <a16:creationId xmlns:a16="http://schemas.microsoft.com/office/drawing/2014/main" id="{93B7FDB5-7333-4128-9FA8-3EEDECE0D3FF}"/>
               </a:ext>
             </a:extLst>
           </p:cNvPr>
@@ -8516,7 +9369,7 @@
     </p:spTree>
     <p:extLst>
       <p:ext uri="{BB962C8B-B14F-4D97-AF65-F5344CB8AC3E}">
-        <p14:creationId xmlns:p14="http://schemas.microsoft.com/office/powerpoint/2010/main" val="1644659298"/>
+        <p14:creationId xmlns:p14="http://schemas.microsoft.com/office/powerpoint/2010/main" val="1850138458"/>
       </p:ext>
     </p:extLst>
   </p:cSld>
@@ -8544,10 +9397,10 @@
       </p:grpSpPr>
       <p:sp>
         <p:nvSpPr>
-          <p:cNvPr id="8" name="">
-            <a:extLst xmlns:a="http://schemas.openxmlformats.org/drawingml/2006/main">
-              <a:ext uri="{FF2B5EF4-FFF2-40B4-BE49-F238E27FC236}">
-                <a16:creationId xmlns:a16="http://schemas.microsoft.com/office/drawing/2014/main" id="{59313924-4CB2-42C7-AA81-1F54F12CAA85}"/>
+          <p:cNvPr id="11" name="">
+            <a:extLst xmlns:a="http://schemas.openxmlformats.org/drawingml/2006/main">
+              <a:ext uri="{FF2B5EF4-FFF2-40B4-BE49-F238E27FC236}">
+                <a16:creationId xmlns:a16="http://schemas.microsoft.com/office/drawing/2014/main" id="{C8EBCD9F-2ED8-4215-B12E-397822845202}"/>
               </a:ext>
             </a:extLst>
           </p:cNvPr>
@@ -8605,7 +9458,7 @@
                 <a:ea typeface="Pretendard"/>
                 <a:cs typeface="Pretendard"/>
               </a:rPr>
-              <a:t>PREPARATION</a:t>
+              <a:t>EVALUATION</a:t>
             </a:r>
           </a:p>
         </p:txBody>
@@ -8615,7 +9468,7 @@
           <p:cNvPr id="2" name="">
             <a:extLst xmlns:a="http://schemas.openxmlformats.org/drawingml/2006/main">
               <a:ext uri="{FF2B5EF4-FFF2-40B4-BE49-F238E27FC236}">
-                <a16:creationId xmlns:a16="http://schemas.microsoft.com/office/drawing/2014/main" id="{EAB64E31-ABD2-4700-A796-3237C7CA1D46}"/>
+                <a16:creationId xmlns:a16="http://schemas.microsoft.com/office/drawing/2014/main" id="{52CDAA3B-7677-45C1-A057-9A5B9DFF40D3}"/>
               </a:ext>
             </a:extLst>
           </p:cNvPr>
@@ -8673,7 +9526,7 @@
                 <a:ea typeface="Pretendard"/>
                 <a:cs typeface="Pretendard"/>
               </a:rPr>
-              <a:t>Surgical Preparation</a:t>
+              <a:t>Laboratory &amp; Infection Screening</a:t>
             </a:r>
           </a:p>
         </p:txBody>
@@ -8683,19 +9536,117 @@
           <p:cNvPr id="3" name="">
             <a:extLst xmlns:a="http://schemas.openxmlformats.org/drawingml/2006/main">
               <a:ext uri="{FF2B5EF4-FFF2-40B4-BE49-F238E27FC236}">
-                <a16:creationId xmlns:a16="http://schemas.microsoft.com/office/drawing/2014/main" id="{27F6E472-B46B-4F83-8115-60CA691802F9}"/>
-              </a:ext>
-            </a:extLst>
-          </p:cNvPr>
-          <p:cNvSpPr>
-            <a:spLocks xmlns:a="http://schemas.openxmlformats.org/drawingml/2006/main" noGrp="1"/>
-          </p:cNvSpPr>
-          <p:nvPr/>
-        </p:nvSpPr>
-        <p:spPr>
-          <a:xfrm xmlns:a="http://schemas.openxmlformats.org/drawingml/2006/main">
-            <a:off x="685800" y="1905000"/>
-            <a:ext cx="10820400" cy="438150"/>
+                <a16:creationId xmlns:a16="http://schemas.microsoft.com/office/drawing/2014/main" id="{2D616E45-7D06-4057-A9B6-CCC9CBDE9193}"/>
+              </a:ext>
+            </a:extLst>
+          </p:cNvPr>
+          <p:cNvSpPr>
+            <a:spLocks xmlns:a="http://schemas.openxmlformats.org/drawingml/2006/main" noGrp="1"/>
+          </p:cNvSpPr>
+          <p:nvPr/>
+        </p:nvSpPr>
+        <p:spPr>
+          <a:xfrm xmlns:a="http://schemas.openxmlformats.org/drawingml/2006/main">
+            <a:off x="685800" y="2457450"/>
+            <a:ext cx="5105400" cy="19050"/>
+          </a:xfrm>
+          <a:prstGeom xmlns:a="http://schemas.openxmlformats.org/drawingml/2006/main" prst="rect">
+            <a:avLst/>
+          </a:prstGeom>
+          <a:solidFill xmlns:a="http://schemas.openxmlformats.org/drawingml/2006/main">
+            <a:srgbClr val="B5915D"/>
+          </a:solidFill>
+          <a:ln xmlns:a="http://schemas.openxmlformats.org/drawingml/2006/main" w="0">
+            <a:noFill/>
+          </a:ln>
+        </p:spPr>
+      </p:sp>
+      <p:sp>
+        <p:nvSpPr>
+          <p:cNvPr id="4" name="">
+            <a:extLst xmlns:a="http://schemas.openxmlformats.org/drawingml/2006/main">
+              <a:ext uri="{FF2B5EF4-FFF2-40B4-BE49-F238E27FC236}">
+                <a16:creationId xmlns:a16="http://schemas.microsoft.com/office/drawing/2014/main" id="{0B285D62-AE7E-4569-95FA-CF896AAD45AA}"/>
+              </a:ext>
+            </a:extLst>
+          </p:cNvPr>
+          <p:cNvSpPr>
+            <a:spLocks xmlns:a="http://schemas.openxmlformats.org/drawingml/2006/main" noGrp="1"/>
+          </p:cNvSpPr>
+          <p:nvPr/>
+        </p:nvSpPr>
+        <p:spPr>
+          <a:xfrm xmlns:a="http://schemas.openxmlformats.org/drawingml/2006/main">
+            <a:off x="685800" y="2781300"/>
+            <a:ext cx="5105400" cy="590550"/>
+          </a:xfrm>
+          <a:prstGeom xmlns:a="http://schemas.openxmlformats.org/drawingml/2006/main" prst="rect">
+            <a:avLst/>
+          </a:prstGeom>
+          <a:noFill xmlns:a="http://schemas.openxmlformats.org/drawingml/2006/main"/>
+          <a:ln xmlns:a="http://schemas.openxmlformats.org/drawingml/2006/main" w="0">
+            <a:noFill/>
+          </a:ln>
+        </p:spPr>
+        <p:txBody>
+          <a:bodyPr xmlns:a="http://schemas.openxmlformats.org/drawingml/2006/main" wrap="square" lIns="0" tIns="0" rIns="0" bIns="0" anchor="t">
+            <a:noAutofit/>
+          </a:bodyPr>
+          <a:lstStyle xmlns:a="http://schemas.openxmlformats.org/drawingml/2006/main">
+            <a:defPPr>
+              <a:defRPr sz="2325" b="1">
+                <a:solidFill>
+                  <a:srgbClr val="1B1D19"/>
+                </a:solidFill>
+                <a:latin typeface="Pretendard"/>
+                <a:ea typeface="Pretendard"/>
+                <a:cs typeface="Pretendard"/>
+              </a:defRPr>
+            </a:defPPr>
+          </a:lstStyle>
+          <a:p xmlns:a="http://schemas.openxmlformats.org/drawingml/2006/main">
+            <a:pPr>
+              <a:defRPr sz="2325" b="1">
+                <a:solidFill>
+                  <a:srgbClr val="1B1D19"/>
+                </a:solidFill>
+                <a:latin typeface="Pretendard"/>
+                <a:ea typeface="Pretendard"/>
+                <a:cs typeface="Pretendard"/>
+              </a:defRPr>
+            </a:pPr>
+            <a:r>
+              <a:rPr sz="2325" b="1">
+                <a:solidFill>
+                  <a:srgbClr val="1B1D19"/>
+                </a:solidFill>
+                <a:latin typeface="Pretendard"/>
+                <a:ea typeface="Pretendard"/>
+                <a:cs typeface="Pretendard"/>
+              </a:rPr>
+              <a:t>Blood tests</a:t>
+            </a:r>
+          </a:p>
+        </p:txBody>
+      </p:sp>
+      <p:sp>
+        <p:nvSpPr>
+          <p:cNvPr id="5" name="">
+            <a:extLst xmlns:a="http://schemas.openxmlformats.org/drawingml/2006/main">
+              <a:ext uri="{FF2B5EF4-FFF2-40B4-BE49-F238E27FC236}">
+                <a16:creationId xmlns:a16="http://schemas.microsoft.com/office/drawing/2014/main" id="{A29E4B90-374D-449F-A42D-C9BCFCD621E0}"/>
+              </a:ext>
+            </a:extLst>
+          </p:cNvPr>
+          <p:cNvSpPr>
+            <a:spLocks xmlns:a="http://schemas.openxmlformats.org/drawingml/2006/main" noGrp="1"/>
+          </p:cNvSpPr>
+          <p:nvPr/>
+        </p:nvSpPr>
+        <p:spPr>
+          <a:xfrm xmlns:a="http://schemas.openxmlformats.org/drawingml/2006/main">
+            <a:off x="685800" y="3581400"/>
+            <a:ext cx="5105400" cy="2095500"/>
           </a:xfrm>
           <a:prstGeom xmlns:a="http://schemas.openxmlformats.org/drawingml/2006/main" prst="rect">
             <a:avLst/>
@@ -8741,35 +9692,127 @@
                 <a:ea typeface="Pretendard"/>
                 <a:cs typeface="Pretendard"/>
               </a:rPr>
-              <a:t>Shaving and Draping</a:t>
-            </a:r>
-          </a:p>
-        </p:txBody>
-      </p:sp>
-      <p:sp>
-        <p:nvSpPr>
-          <p:cNvPr id="4" name="">
-            <a:extLst xmlns:a="http://schemas.openxmlformats.org/drawingml/2006/main">
-              <a:ext uri="{FF2B5EF4-FFF2-40B4-BE49-F238E27FC236}">
-                <a16:creationId xmlns:a16="http://schemas.microsoft.com/office/drawing/2014/main" id="{1C592E53-5251-46C8-B27E-E3C85A6E1F9E}"/>
-              </a:ext>
-            </a:extLst>
-          </p:cNvPr>
-          <p:cNvSpPr>
-            <a:spLocks xmlns:a="http://schemas.openxmlformats.org/drawingml/2006/main" noGrp="1"/>
-          </p:cNvSpPr>
-          <p:nvPr/>
-        </p:nvSpPr>
-        <p:spPr>
-          <a:xfrm xmlns:a="http://schemas.openxmlformats.org/drawingml/2006/main">
-            <a:off x="685800" y="2476500"/>
-            <a:ext cx="10820400" cy="3524250"/>
+              <a:t>Blood coagulation tests</a:t>
+            </a:r>
+          </a:p>
+          <a:p xmlns:a="http://schemas.openxmlformats.org/drawingml/2006/main">
+            <a:pPr>
+              <a:defRPr sz="2025" b="0">
+                <a:solidFill>
+                  <a:srgbClr val="6B7265"/>
+                </a:solidFill>
+                <a:latin typeface="Pretendard"/>
+                <a:ea typeface="Pretendard"/>
+                <a:cs typeface="Pretendard"/>
+              </a:defRPr>
+            </a:pPr>
+            <a:r>
+              <a:rPr sz="2025" b="0">
+                <a:solidFill>
+                  <a:srgbClr val="6B7265"/>
+                </a:solidFill>
+                <a:latin typeface="Pretendard"/>
+                <a:ea typeface="Pretendard"/>
+                <a:cs typeface="Pretendard"/>
+              </a:rPr>
+              <a:t>Complete blood count (CBC)</a:t>
+            </a:r>
+          </a:p>
+          <a:p xmlns:a="http://schemas.openxmlformats.org/drawingml/2006/main">
+            <a:pPr>
+              <a:defRPr sz="2025" b="0">
+                <a:solidFill>
+                  <a:srgbClr val="6B7265"/>
+                </a:solidFill>
+                <a:latin typeface="Pretendard"/>
+                <a:ea typeface="Pretendard"/>
+                <a:cs typeface="Pretendard"/>
+              </a:defRPr>
+            </a:pPr>
+            <a:r>
+              <a:rPr sz="2025" b="0">
+                <a:solidFill>
+                  <a:srgbClr val="6B7265"/>
+                </a:solidFill>
+                <a:latin typeface="Pretendard"/>
+                <a:ea typeface="Pretendard"/>
+                <a:cs typeface="Pretendard"/>
+              </a:rPr>
+              <a:t>Prostate-specific antigen (PSA)</a:t>
+            </a:r>
+          </a:p>
+          <a:p xmlns:a="http://schemas.openxmlformats.org/drawingml/2006/main">
+            <a:pPr>
+              <a:defRPr sz="2025" b="0">
+                <a:solidFill>
+                  <a:srgbClr val="6B7265"/>
+                </a:solidFill>
+                <a:latin typeface="Pretendard"/>
+                <a:ea typeface="Pretendard"/>
+                <a:cs typeface="Pretendard"/>
+              </a:defRPr>
+            </a:pPr>
+            <a:r>
+              <a:rPr sz="2025" b="0">
+                <a:solidFill>
+                  <a:srgbClr val="6B7265"/>
+                </a:solidFill>
+                <a:latin typeface="Pretendard"/>
+                <a:ea typeface="Pretendard"/>
+                <a:cs typeface="Pretendard"/>
+              </a:rPr>
+              <a:t>Blood glucose</a:t>
+            </a:r>
+          </a:p>
+          <a:p xmlns:a="http://schemas.openxmlformats.org/drawingml/2006/main">
+            <a:pPr>
+              <a:defRPr sz="2025" b="0">
+                <a:solidFill>
+                  <a:srgbClr val="6B7265"/>
+                </a:solidFill>
+                <a:latin typeface="Pretendard"/>
+                <a:ea typeface="Pretendard"/>
+                <a:cs typeface="Pretendard"/>
+              </a:defRPr>
+            </a:pPr>
+            <a:r>
+              <a:rPr sz="2025" b="0">
+                <a:solidFill>
+                  <a:srgbClr val="6B7265"/>
+                </a:solidFill>
+                <a:latin typeface="Pretendard"/>
+                <a:ea typeface="Pretendard"/>
+                <a:cs typeface="Pretendard"/>
+              </a:rPr>
+              <a:t>HbA1c (glycated hemoglobin)</a:t>
+            </a:r>
+          </a:p>
+        </p:txBody>
+      </p:sp>
+      <p:sp>
+        <p:nvSpPr>
+          <p:cNvPr id="6" name="">
+            <a:extLst xmlns:a="http://schemas.openxmlformats.org/drawingml/2006/main">
+              <a:ext uri="{FF2B5EF4-FFF2-40B4-BE49-F238E27FC236}">
+                <a16:creationId xmlns:a16="http://schemas.microsoft.com/office/drawing/2014/main" id="{967778B0-6A49-4F7E-AD2E-E83A2213A4ED}"/>
+              </a:ext>
+            </a:extLst>
+          </p:cNvPr>
+          <p:cNvSpPr>
+            <a:spLocks xmlns:a="http://schemas.openxmlformats.org/drawingml/2006/main" noGrp="1"/>
+          </p:cNvSpPr>
+          <p:nvPr/>
+        </p:nvSpPr>
+        <p:spPr>
+          <a:xfrm xmlns:a="http://schemas.openxmlformats.org/drawingml/2006/main">
+            <a:off x="6400800" y="2457450"/>
+            <a:ext cx="5105400" cy="19050"/>
           </a:xfrm>
           <a:prstGeom xmlns:a="http://schemas.openxmlformats.org/drawingml/2006/main" prst="rect">
             <a:avLst/>
           </a:prstGeom>
           <a:solidFill xmlns:a="http://schemas.openxmlformats.org/drawingml/2006/main">
-            <a:srgbClr val="F7F7F3"/>
+            <a:srgbClr val="B5915D"/>
           </a:solidFill>
           <a:ln xmlns:a="http://schemas.openxmlformats.org/drawingml/2006/main" w="0">
             <a:noFill/>
@@ -8778,40 +9821,238 @@
       </p:sp>
       <p:sp>
         <p:nvSpPr>
-          <p:cNvPr id="5" name="">
-            <a:extLst xmlns:a="http://schemas.openxmlformats.org/drawingml/2006/main">
-              <a:ext uri="{FF2B5EF4-FFF2-40B4-BE49-F238E27FC236}">
-                <a16:creationId xmlns:a16="http://schemas.microsoft.com/office/drawing/2014/main" id="{BD488A3C-F2ED-40A8-ABFC-B4F185074FC7}"/>
-              </a:ext>
-            </a:extLst>
-          </p:cNvPr>
-          <p:cNvSpPr>
-            <a:spLocks xmlns:a="http://schemas.openxmlformats.org/drawingml/2006/main" noGrp="1"/>
-          </p:cNvSpPr>
-          <p:nvPr/>
-        </p:nvSpPr>
-        <p:spPr>
-          <a:xfrm xmlns:a="http://schemas.openxmlformats.org/drawingml/2006/main">
-            <a:off x="685800" y="2476500"/>
-            <a:ext cx="10820400" cy="9525"/>
-          </a:xfrm>
-          <a:prstGeom xmlns:a="http://schemas.openxmlformats.org/drawingml/2006/main" prst="rect">
-            <a:avLst/>
-          </a:prstGeom>
-          <a:solidFill xmlns:a="http://schemas.openxmlformats.org/drawingml/2006/main">
-            <a:srgbClr val="DEDFD6"/>
-          </a:solidFill>
-          <a:ln xmlns:a="http://schemas.openxmlformats.org/drawingml/2006/main" w="0">
-            <a:noFill/>
-          </a:ln>
-        </p:spPr>
-      </p:sp>
-      <p:sp>
-        <p:nvSpPr>
-          <p:cNvPr id="6" name="">
-            <a:extLst xmlns:a="http://schemas.openxmlformats.org/drawingml/2006/main">
-              <a:ext uri="{FF2B5EF4-FFF2-40B4-BE49-F238E27FC236}">
-                <a16:creationId xmlns:a16="http://schemas.microsoft.com/office/drawing/2014/main" id="{A500D701-E50C-4299-BB33-F114B9E59545}"/>
+          <p:cNvPr id="7" name="">
+            <a:extLst xmlns:a="http://schemas.openxmlformats.org/drawingml/2006/main">
+              <a:ext uri="{FF2B5EF4-FFF2-40B4-BE49-F238E27FC236}">
+                <a16:creationId xmlns:a16="http://schemas.microsoft.com/office/drawing/2014/main" id="{38EA2078-2D58-4F8F-AF1C-EE34DDFF9A24}"/>
+              </a:ext>
+            </a:extLst>
+          </p:cNvPr>
+          <p:cNvSpPr>
+            <a:spLocks xmlns:a="http://schemas.openxmlformats.org/drawingml/2006/main" noGrp="1"/>
+          </p:cNvSpPr>
+          <p:nvPr/>
+        </p:nvSpPr>
+        <p:spPr>
+          <a:xfrm xmlns:a="http://schemas.openxmlformats.org/drawingml/2006/main">
+            <a:off x="6400800" y="2781300"/>
+            <a:ext cx="5105400" cy="590550"/>
+          </a:xfrm>
+          <a:prstGeom xmlns:a="http://schemas.openxmlformats.org/drawingml/2006/main" prst="rect">
+            <a:avLst/>
+          </a:prstGeom>
+          <a:noFill xmlns:a="http://schemas.openxmlformats.org/drawingml/2006/main"/>
+          <a:ln xmlns:a="http://schemas.openxmlformats.org/drawingml/2006/main" w="0">
+            <a:noFill/>
+          </a:ln>
+        </p:spPr>
+        <p:txBody>
+          <a:bodyPr xmlns:a="http://schemas.openxmlformats.org/drawingml/2006/main" wrap="square" lIns="0" tIns="0" rIns="0" bIns="0" anchor="t">
+            <a:noAutofit/>
+          </a:bodyPr>
+          <a:lstStyle xmlns:a="http://schemas.openxmlformats.org/drawingml/2006/main">
+            <a:defPPr>
+              <a:defRPr sz="2325" b="1">
+                <a:solidFill>
+                  <a:srgbClr val="1B1D19"/>
+                </a:solidFill>
+                <a:latin typeface="Pretendard"/>
+                <a:ea typeface="Pretendard"/>
+                <a:cs typeface="Pretendard"/>
+              </a:defRPr>
+            </a:defPPr>
+          </a:lstStyle>
+          <a:p xmlns:a="http://schemas.openxmlformats.org/drawingml/2006/main">
+            <a:pPr>
+              <a:defRPr sz="2325" b="1">
+                <a:solidFill>
+                  <a:srgbClr val="1B1D19"/>
+                </a:solidFill>
+                <a:latin typeface="Pretendard"/>
+                <a:ea typeface="Pretendard"/>
+                <a:cs typeface="Pretendard"/>
+              </a:defRPr>
+            </a:pPr>
+            <a:r>
+              <a:rPr sz="2325" b="1">
+                <a:solidFill>
+                  <a:srgbClr val="1B1D19"/>
+                </a:solidFill>
+                <a:latin typeface="Pretendard"/>
+                <a:ea typeface="Pretendard"/>
+                <a:cs typeface="Pretendard"/>
+              </a:rPr>
+              <a:t>Screening and other tests</a:t>
+            </a:r>
+          </a:p>
+        </p:txBody>
+      </p:sp>
+      <p:sp>
+        <p:nvSpPr>
+          <p:cNvPr id="8" name="">
+            <a:extLst xmlns:a="http://schemas.openxmlformats.org/drawingml/2006/main">
+              <a:ext uri="{FF2B5EF4-FFF2-40B4-BE49-F238E27FC236}">
+                <a16:creationId xmlns:a16="http://schemas.microsoft.com/office/drawing/2014/main" id="{9E0AC341-9617-42C7-A62B-709B114E118B}"/>
+              </a:ext>
+            </a:extLst>
+          </p:cNvPr>
+          <p:cNvSpPr>
+            <a:spLocks xmlns:a="http://schemas.openxmlformats.org/drawingml/2006/main" noGrp="1"/>
+          </p:cNvSpPr>
+          <p:nvPr/>
+        </p:nvSpPr>
+        <p:spPr>
+          <a:xfrm xmlns:a="http://schemas.openxmlformats.org/drawingml/2006/main">
+            <a:off x="6400800" y="3581400"/>
+            <a:ext cx="5105400" cy="2095500"/>
+          </a:xfrm>
+          <a:prstGeom xmlns:a="http://schemas.openxmlformats.org/drawingml/2006/main" prst="rect">
+            <a:avLst/>
+          </a:prstGeom>
+          <a:noFill xmlns:a="http://schemas.openxmlformats.org/drawingml/2006/main"/>
+          <a:ln xmlns:a="http://schemas.openxmlformats.org/drawingml/2006/main" w="0">
+            <a:noFill/>
+          </a:ln>
+        </p:spPr>
+        <p:txBody>
+          <a:bodyPr xmlns:a="http://schemas.openxmlformats.org/drawingml/2006/main" wrap="square" lIns="0" tIns="0" rIns="0" bIns="0" anchor="t">
+            <a:noAutofit/>
+          </a:bodyPr>
+          <a:lstStyle xmlns:a="http://schemas.openxmlformats.org/drawingml/2006/main">
+            <a:defPPr>
+              <a:defRPr sz="2025" b="0">
+                <a:solidFill>
+                  <a:srgbClr val="6B7265"/>
+                </a:solidFill>
+                <a:latin typeface="Pretendard"/>
+                <a:ea typeface="Pretendard"/>
+                <a:cs typeface="Pretendard"/>
+              </a:defRPr>
+            </a:defPPr>
+          </a:lstStyle>
+          <a:p xmlns:a="http://schemas.openxmlformats.org/drawingml/2006/main">
+            <a:pPr>
+              <a:defRPr sz="2025" b="0">
+                <a:solidFill>
+                  <a:srgbClr val="6B7265"/>
+                </a:solidFill>
+                <a:latin typeface="Pretendard"/>
+                <a:ea typeface="Pretendard"/>
+                <a:cs typeface="Pretendard"/>
+              </a:defRPr>
+            </a:pPr>
+            <a:r>
+              <a:rPr sz="2025" b="0">
+                <a:solidFill>
+                  <a:srgbClr val="6B7265"/>
+                </a:solidFill>
+                <a:latin typeface="Pretendard"/>
+                <a:ea typeface="Pretendard"/>
+                <a:cs typeface="Pretendard"/>
+              </a:rPr>
+              <a:t>HPV testing</a:t>
+            </a:r>
+          </a:p>
+          <a:p xmlns:a="http://schemas.openxmlformats.org/drawingml/2006/main">
+            <a:pPr>
+              <a:defRPr sz="2025" b="0">
+                <a:solidFill>
+                  <a:srgbClr val="6B7265"/>
+                </a:solidFill>
+                <a:latin typeface="Pretendard"/>
+                <a:ea typeface="Pretendard"/>
+                <a:cs typeface="Pretendard"/>
+              </a:defRPr>
+            </a:pPr>
+            <a:r>
+              <a:rPr sz="2025" b="0">
+                <a:solidFill>
+                  <a:srgbClr val="6B7265"/>
+                </a:solidFill>
+                <a:latin typeface="Pretendard"/>
+                <a:ea typeface="Pretendard"/>
+                <a:cs typeface="Pretendard"/>
+              </a:rPr>
+              <a:t>Syphilis testing</a:t>
+            </a:r>
+          </a:p>
+          <a:p xmlns:a="http://schemas.openxmlformats.org/drawingml/2006/main">
+            <a:pPr>
+              <a:defRPr sz="2025" b="0">
+                <a:solidFill>
+                  <a:srgbClr val="6B7265"/>
+                </a:solidFill>
+                <a:latin typeface="Pretendard"/>
+                <a:ea typeface="Pretendard"/>
+                <a:cs typeface="Pretendard"/>
+              </a:defRPr>
+            </a:pPr>
+            <a:r>
+              <a:rPr sz="2025" b="0">
+                <a:solidFill>
+                  <a:srgbClr val="6B7265"/>
+                </a:solidFill>
+                <a:latin typeface="Pretendard"/>
+                <a:ea typeface="Pretendard"/>
+                <a:cs typeface="Pretendard"/>
+              </a:rPr>
+              <a:t>Urine testing</a:t>
+            </a:r>
+          </a:p>
+          <a:p xmlns:a="http://schemas.openxmlformats.org/drawingml/2006/main">
+            <a:pPr>
+              <a:defRPr sz="2025" b="0">
+                <a:solidFill>
+                  <a:srgbClr val="6B7265"/>
+                </a:solidFill>
+                <a:latin typeface="Pretendard"/>
+                <a:ea typeface="Pretendard"/>
+                <a:cs typeface="Pretendard"/>
+              </a:defRPr>
+            </a:pPr>
+            <a:r>
+              <a:rPr sz="2025" b="0">
+                <a:solidFill>
+                  <a:srgbClr val="6B7265"/>
+                </a:solidFill>
+                <a:latin typeface="Pretendard"/>
+                <a:ea typeface="Pretendard"/>
+                <a:cs typeface="Pretendard"/>
+              </a:rPr>
+              <a:t>Liver function</a:t>
+            </a:r>
+          </a:p>
+          <a:p xmlns:a="http://schemas.openxmlformats.org/drawingml/2006/main">
+            <a:pPr>
+              <a:defRPr sz="2025" b="0">
+                <a:solidFill>
+                  <a:srgbClr val="6B7265"/>
+                </a:solidFill>
+                <a:latin typeface="Pretendard"/>
+                <a:ea typeface="Pretendard"/>
+                <a:cs typeface="Pretendard"/>
+              </a:defRPr>
+            </a:pPr>
+            <a:r>
+              <a:rPr sz="2025" b="0">
+                <a:solidFill>
+                  <a:srgbClr val="6B7265"/>
+                </a:solidFill>
+                <a:latin typeface="Pretendard"/>
+                <a:ea typeface="Pretendard"/>
+                <a:cs typeface="Pretendard"/>
+              </a:rPr>
+              <a:t>Inflammatory markers</a:t>
+            </a:r>
+          </a:p>
+        </p:txBody>
+      </p:sp>
+      <p:sp>
+        <p:nvSpPr>
+          <p:cNvPr id="9" name="">
+            <a:extLst xmlns:a="http://schemas.openxmlformats.org/drawingml/2006/main">
+              <a:ext uri="{FF2B5EF4-FFF2-40B4-BE49-F238E27FC236}">
+                <a16:creationId xmlns:a16="http://schemas.microsoft.com/office/drawing/2014/main" id="{E84E5F96-52C6-4ED9-AAFC-06C89511FECD}"/>
               </a:ext>
             </a:extLst>
           </p:cNvPr>
@@ -8876,10 +10117,10 @@
       </p:sp>
       <p:sp>
         <p:nvSpPr>
-          <p:cNvPr id="7" name="">
-            <a:extLst xmlns:a="http://schemas.openxmlformats.org/drawingml/2006/main">
-              <a:ext uri="{FF2B5EF4-FFF2-40B4-BE49-F238E27FC236}">
-                <a16:creationId xmlns:a16="http://schemas.microsoft.com/office/drawing/2014/main" id="{7CDA10AE-2699-4029-9081-2DFF6700F3F4}"/>
+          <p:cNvPr id="10" name="">
+            <a:extLst xmlns:a="http://schemas.openxmlformats.org/drawingml/2006/main">
+              <a:ext uri="{FF2B5EF4-FFF2-40B4-BE49-F238E27FC236}">
+                <a16:creationId xmlns:a16="http://schemas.microsoft.com/office/drawing/2014/main" id="{5138FC81-1ECC-46E1-A12B-FC02F519110C}"/>
               </a:ext>
             </a:extLst>
           </p:cNvPr>
@@ -8945,7 +10186,7 @@
     </p:spTree>
     <p:extLst>
       <p:ext uri="{BB962C8B-B14F-4D97-AF65-F5344CB8AC3E}">
-        <p14:creationId xmlns:p14="http://schemas.microsoft.com/office/powerpoint/2010/main" val="1678491422"/>
+        <p14:creationId xmlns:p14="http://schemas.microsoft.com/office/powerpoint/2010/main" val="1086705405"/>
       </p:ext>
     </p:extLst>
   </p:cSld>
@@ -8973,10 +10214,10 @@
       </p:grpSpPr>
       <p:sp>
         <p:nvSpPr>
-          <p:cNvPr id="7" name="">
-            <a:extLst xmlns:a="http://schemas.openxmlformats.org/drawingml/2006/main">
-              <a:ext uri="{FF2B5EF4-FFF2-40B4-BE49-F238E27FC236}">
-                <a16:creationId xmlns:a16="http://schemas.microsoft.com/office/drawing/2014/main" id="{C2BE8916-F124-40BA-9FE0-C9C301FE86C6}"/>
+          <p:cNvPr id="11" name="">
+            <a:extLst xmlns:a="http://schemas.openxmlformats.org/drawingml/2006/main">
+              <a:ext uri="{FF2B5EF4-FFF2-40B4-BE49-F238E27FC236}">
+                <a16:creationId xmlns:a16="http://schemas.microsoft.com/office/drawing/2014/main" id="{747A4D98-DABD-4C34-8447-840D20477763}"/>
               </a:ext>
             </a:extLst>
           </p:cNvPr>
@@ -9034,7 +10275,7 @@
                 <a:ea typeface="Pretendard"/>
                 <a:cs typeface="Pretendard"/>
               </a:rPr>
-              <a:t>CLINICAL CASES / CASE 1</a:t>
+              <a:t>EVALUATION</a:t>
             </a:r>
           </a:p>
         </p:txBody>
@@ -9044,7 +10285,7 @@
           <p:cNvPr id="2" name="">
             <a:extLst xmlns:a="http://schemas.openxmlformats.org/drawingml/2006/main">
               <a:ext uri="{FF2B5EF4-FFF2-40B4-BE49-F238E27FC236}">
-                <a16:creationId xmlns:a16="http://schemas.microsoft.com/office/drawing/2014/main" id="{BB8DF67A-9CEB-4B74-9D62-B4E3089E2615}"/>
+                <a16:creationId xmlns:a16="http://schemas.microsoft.com/office/drawing/2014/main" id="{2885118C-1C0D-49BA-9F77-B07F503FCBE6}"/>
               </a:ext>
             </a:extLst>
           </p:cNvPr>
@@ -9102,7 +10343,7 @@
                 <a:ea typeface="Pretendard"/>
                 <a:cs typeface="Pretendard"/>
               </a:rPr>
-              <a:t>Pubic Incision</a:t>
+              <a:t>Physical Examination</a:t>
             </a:r>
           </a:p>
         </p:txBody>
@@ -9112,25 +10353,25 @@
           <p:cNvPr id="3" name="">
             <a:extLst xmlns:a="http://schemas.openxmlformats.org/drawingml/2006/main">
               <a:ext uri="{FF2B5EF4-FFF2-40B4-BE49-F238E27FC236}">
-                <a16:creationId xmlns:a16="http://schemas.microsoft.com/office/drawing/2014/main" id="{9A45B733-0414-408A-A97F-3BCA1D42C97E}"/>
-              </a:ext>
-            </a:extLst>
-          </p:cNvPr>
-          <p:cNvSpPr>
-            <a:spLocks xmlns:a="http://schemas.openxmlformats.org/drawingml/2006/main" noGrp="1"/>
-          </p:cNvSpPr>
-          <p:nvPr/>
-        </p:nvSpPr>
-        <p:spPr>
-          <a:xfrm xmlns:a="http://schemas.openxmlformats.org/drawingml/2006/main">
-            <a:off x="685800" y="2476500"/>
-            <a:ext cx="10820400" cy="3524250"/>
+                <a16:creationId xmlns:a16="http://schemas.microsoft.com/office/drawing/2014/main" id="{99141F39-792F-4224-AF93-11A48237D807}"/>
+              </a:ext>
+            </a:extLst>
+          </p:cNvPr>
+          <p:cNvSpPr>
+            <a:spLocks xmlns:a="http://schemas.openxmlformats.org/drawingml/2006/main" noGrp="1"/>
+          </p:cNvSpPr>
+          <p:nvPr/>
+        </p:nvSpPr>
+        <p:spPr>
+          <a:xfrm xmlns:a="http://schemas.openxmlformats.org/drawingml/2006/main">
+            <a:off x="685800" y="2457450"/>
+            <a:ext cx="5105400" cy="19050"/>
           </a:xfrm>
           <a:prstGeom xmlns:a="http://schemas.openxmlformats.org/drawingml/2006/main" prst="rect">
             <a:avLst/>
           </a:prstGeom>
           <a:solidFill xmlns:a="http://schemas.openxmlformats.org/drawingml/2006/main">
-            <a:srgbClr val="F7F7F3"/>
+            <a:srgbClr val="B5915D"/>
           </a:solidFill>
           <a:ln xmlns:a="http://schemas.openxmlformats.org/drawingml/2006/main" w="0">
             <a:noFill/>
@@ -9142,25 +10383,184 @@
           <p:cNvPr id="4" name="">
             <a:extLst xmlns:a="http://schemas.openxmlformats.org/drawingml/2006/main">
               <a:ext uri="{FF2B5EF4-FFF2-40B4-BE49-F238E27FC236}">
-                <a16:creationId xmlns:a16="http://schemas.microsoft.com/office/drawing/2014/main" id="{F44BFDE8-8F44-47BF-B01E-AF1D1AE766F8}"/>
-              </a:ext>
-            </a:extLst>
-          </p:cNvPr>
-          <p:cNvSpPr>
-            <a:spLocks xmlns:a="http://schemas.openxmlformats.org/drawingml/2006/main" noGrp="1"/>
-          </p:cNvSpPr>
-          <p:nvPr/>
-        </p:nvSpPr>
-        <p:spPr>
-          <a:xfrm xmlns:a="http://schemas.openxmlformats.org/drawingml/2006/main">
-            <a:off x="685800" y="2476500"/>
-            <a:ext cx="10820400" cy="9525"/>
+                <a16:creationId xmlns:a16="http://schemas.microsoft.com/office/drawing/2014/main" id="{A3041062-A39F-499B-97A9-CB0C267EC7E4}"/>
+              </a:ext>
+            </a:extLst>
+          </p:cNvPr>
+          <p:cNvSpPr>
+            <a:spLocks xmlns:a="http://schemas.openxmlformats.org/drawingml/2006/main" noGrp="1"/>
+          </p:cNvSpPr>
+          <p:nvPr/>
+        </p:nvSpPr>
+        <p:spPr>
+          <a:xfrm xmlns:a="http://schemas.openxmlformats.org/drawingml/2006/main">
+            <a:off x="685800" y="2781300"/>
+            <a:ext cx="5105400" cy="590550"/>
+          </a:xfrm>
+          <a:prstGeom xmlns:a="http://schemas.openxmlformats.org/drawingml/2006/main" prst="rect">
+            <a:avLst/>
+          </a:prstGeom>
+          <a:noFill xmlns:a="http://schemas.openxmlformats.org/drawingml/2006/main"/>
+          <a:ln xmlns:a="http://schemas.openxmlformats.org/drawingml/2006/main" w="0">
+            <a:noFill/>
+          </a:ln>
+        </p:spPr>
+        <p:txBody>
+          <a:bodyPr xmlns:a="http://schemas.openxmlformats.org/drawingml/2006/main" wrap="square" lIns="0" tIns="0" rIns="0" bIns="0" anchor="t">
+            <a:noAutofit/>
+          </a:bodyPr>
+          <a:lstStyle xmlns:a="http://schemas.openxmlformats.org/drawingml/2006/main">
+            <a:defPPr>
+              <a:defRPr sz="2325" b="1">
+                <a:solidFill>
+                  <a:srgbClr val="1B1D19"/>
+                </a:solidFill>
+                <a:latin typeface="Pretendard"/>
+                <a:ea typeface="Pretendard"/>
+                <a:cs typeface="Pretendard"/>
+              </a:defRPr>
+            </a:defPPr>
+          </a:lstStyle>
+          <a:p xmlns:a="http://schemas.openxmlformats.org/drawingml/2006/main">
+            <a:pPr>
+              <a:defRPr sz="2325" b="1">
+                <a:solidFill>
+                  <a:srgbClr val="1B1D19"/>
+                </a:solidFill>
+                <a:latin typeface="Pretendard"/>
+                <a:ea typeface="Pretendard"/>
+                <a:cs typeface="Pretendard"/>
+              </a:defRPr>
+            </a:pPr>
+            <a:r>
+              <a:rPr sz="2325" b="1">
+                <a:solidFill>
+                  <a:srgbClr val="1B1D19"/>
+                </a:solidFill>
+                <a:latin typeface="Pretendard"/>
+                <a:ea typeface="Pretendard"/>
+                <a:cs typeface="Pretendard"/>
+              </a:rPr>
+              <a:t>Penile length measurement</a:t>
+            </a:r>
+          </a:p>
+        </p:txBody>
+      </p:sp>
+      <p:sp>
+        <p:nvSpPr>
+          <p:cNvPr id="5" name="">
+            <a:extLst xmlns:a="http://schemas.openxmlformats.org/drawingml/2006/main">
+              <a:ext uri="{FF2B5EF4-FFF2-40B4-BE49-F238E27FC236}">
+                <a16:creationId xmlns:a16="http://schemas.microsoft.com/office/drawing/2014/main" id="{E96C56F6-A6DE-415A-B921-EF0E68A0111B}"/>
+              </a:ext>
+            </a:extLst>
+          </p:cNvPr>
+          <p:cNvSpPr>
+            <a:spLocks xmlns:a="http://schemas.openxmlformats.org/drawingml/2006/main" noGrp="1"/>
+          </p:cNvSpPr>
+          <p:nvPr/>
+        </p:nvSpPr>
+        <p:spPr>
+          <a:xfrm xmlns:a="http://schemas.openxmlformats.org/drawingml/2006/main">
+            <a:off x="685800" y="3581400"/>
+            <a:ext cx="5105400" cy="2095500"/>
+          </a:xfrm>
+          <a:prstGeom xmlns:a="http://schemas.openxmlformats.org/drawingml/2006/main" prst="rect">
+            <a:avLst/>
+          </a:prstGeom>
+          <a:noFill xmlns:a="http://schemas.openxmlformats.org/drawingml/2006/main"/>
+          <a:ln xmlns:a="http://schemas.openxmlformats.org/drawingml/2006/main" w="0">
+            <a:noFill/>
+          </a:ln>
+        </p:spPr>
+        <p:txBody>
+          <a:bodyPr xmlns:a="http://schemas.openxmlformats.org/drawingml/2006/main" wrap="square" lIns="0" tIns="0" rIns="0" bIns="0" anchor="t">
+            <a:noAutofit/>
+          </a:bodyPr>
+          <a:lstStyle xmlns:a="http://schemas.openxmlformats.org/drawingml/2006/main">
+            <a:defPPr>
+              <a:defRPr sz="2025" b="0">
+                <a:solidFill>
+                  <a:srgbClr val="6B7265"/>
+                </a:solidFill>
+                <a:latin typeface="Pretendard"/>
+                <a:ea typeface="Pretendard"/>
+                <a:cs typeface="Pretendard"/>
+              </a:defRPr>
+            </a:defPPr>
+          </a:lstStyle>
+          <a:p xmlns:a="http://schemas.openxmlformats.org/drawingml/2006/main">
+            <a:pPr>
+              <a:defRPr sz="2025" b="0">
+                <a:solidFill>
+                  <a:srgbClr val="6B7265"/>
+                </a:solidFill>
+                <a:latin typeface="Pretendard"/>
+                <a:ea typeface="Pretendard"/>
+                <a:cs typeface="Pretendard"/>
+              </a:defRPr>
+            </a:pPr>
+            <a:r>
+              <a:rPr sz="2025" b="0">
+                <a:solidFill>
+                  <a:srgbClr val="6B7265"/>
+                </a:solidFill>
+                <a:latin typeface="Pretendard"/>
+                <a:ea typeface="Pretendard"/>
+                <a:cs typeface="Pretendard"/>
+              </a:rPr>
+              <a:t>Flaccid length</a:t>
+            </a:r>
+          </a:p>
+          <a:p xmlns:a="http://schemas.openxmlformats.org/drawingml/2006/main">
+            <a:pPr>
+              <a:defRPr sz="2025" b="0">
+                <a:solidFill>
+                  <a:srgbClr val="6B7265"/>
+                </a:solidFill>
+                <a:latin typeface="Pretendard"/>
+                <a:ea typeface="Pretendard"/>
+                <a:cs typeface="Pretendard"/>
+              </a:defRPr>
+            </a:pPr>
+            <a:r>
+              <a:rPr sz="2025" b="0">
+                <a:solidFill>
+                  <a:srgbClr val="6B7265"/>
+                </a:solidFill>
+                <a:latin typeface="Pretendard"/>
+                <a:ea typeface="Pretendard"/>
+                <a:cs typeface="Pretendard"/>
+              </a:rPr>
+              <a:t>Stretched length</a:t>
+            </a:r>
+          </a:p>
+        </p:txBody>
+      </p:sp>
+      <p:sp>
+        <p:nvSpPr>
+          <p:cNvPr id="6" name="">
+            <a:extLst xmlns:a="http://schemas.openxmlformats.org/drawingml/2006/main">
+              <a:ext uri="{FF2B5EF4-FFF2-40B4-BE49-F238E27FC236}">
+                <a16:creationId xmlns:a16="http://schemas.microsoft.com/office/drawing/2014/main" id="{410B884D-F818-4D1B-90D6-B7D3CAB08AFA}"/>
+              </a:ext>
+            </a:extLst>
+          </p:cNvPr>
+          <p:cNvSpPr>
+            <a:spLocks xmlns:a="http://schemas.openxmlformats.org/drawingml/2006/main" noGrp="1"/>
+          </p:cNvSpPr>
+          <p:nvPr/>
+        </p:nvSpPr>
+        <p:spPr>
+          <a:xfrm xmlns:a="http://schemas.openxmlformats.org/drawingml/2006/main">
+            <a:off x="6400800" y="2457450"/>
+            <a:ext cx="5105400" cy="19050"/>
           </a:xfrm>
           <a:prstGeom xmlns:a="http://schemas.openxmlformats.org/drawingml/2006/main" prst="rect">
             <a:avLst/>
           </a:prstGeom>
           <a:solidFill xmlns:a="http://schemas.openxmlformats.org/drawingml/2006/main">
-            <a:srgbClr val="DEDFD6"/>
+            <a:srgbClr val="B5915D"/>
           </a:solidFill>
           <a:ln xmlns:a="http://schemas.openxmlformats.org/drawingml/2006/main" w="0">
             <a:noFill/>
@@ -9169,10 +10569,169 @@
       </p:sp>
       <p:sp>
         <p:nvSpPr>
-          <p:cNvPr id="5" name="">
-            <a:extLst xmlns:a="http://schemas.openxmlformats.org/drawingml/2006/main">
-              <a:ext uri="{FF2B5EF4-FFF2-40B4-BE49-F238E27FC236}">
-                <a16:creationId xmlns:a16="http://schemas.microsoft.com/office/drawing/2014/main" id="{F3D0BA2F-B139-4261-86D8-31E0876B798E}"/>
+          <p:cNvPr id="7" name="">
+            <a:extLst xmlns:a="http://schemas.openxmlformats.org/drawingml/2006/main">
+              <a:ext uri="{FF2B5EF4-FFF2-40B4-BE49-F238E27FC236}">
+                <a16:creationId xmlns:a16="http://schemas.microsoft.com/office/drawing/2014/main" id="{A85A6D49-4DBA-4DC9-9FE5-91816415E5F3}"/>
+              </a:ext>
+            </a:extLst>
+          </p:cNvPr>
+          <p:cNvSpPr>
+            <a:spLocks xmlns:a="http://schemas.openxmlformats.org/drawingml/2006/main" noGrp="1"/>
+          </p:cNvSpPr>
+          <p:nvPr/>
+        </p:nvSpPr>
+        <p:spPr>
+          <a:xfrm xmlns:a="http://schemas.openxmlformats.org/drawingml/2006/main">
+            <a:off x="6400800" y="2781300"/>
+            <a:ext cx="5105400" cy="590550"/>
+          </a:xfrm>
+          <a:prstGeom xmlns:a="http://schemas.openxmlformats.org/drawingml/2006/main" prst="rect">
+            <a:avLst/>
+          </a:prstGeom>
+          <a:noFill xmlns:a="http://schemas.openxmlformats.org/drawingml/2006/main"/>
+          <a:ln xmlns:a="http://schemas.openxmlformats.org/drawingml/2006/main" w="0">
+            <a:noFill/>
+          </a:ln>
+        </p:spPr>
+        <p:txBody>
+          <a:bodyPr xmlns:a="http://schemas.openxmlformats.org/drawingml/2006/main" wrap="square" lIns="0" tIns="0" rIns="0" bIns="0" anchor="t">
+            <a:noAutofit/>
+          </a:bodyPr>
+          <a:lstStyle xmlns:a="http://schemas.openxmlformats.org/drawingml/2006/main">
+            <a:defPPr>
+              <a:defRPr sz="2325" b="1">
+                <a:solidFill>
+                  <a:srgbClr val="1B1D19"/>
+                </a:solidFill>
+                <a:latin typeface="Pretendard"/>
+                <a:ea typeface="Pretendard"/>
+                <a:cs typeface="Pretendard"/>
+              </a:defRPr>
+            </a:defPPr>
+          </a:lstStyle>
+          <a:p xmlns:a="http://schemas.openxmlformats.org/drawingml/2006/main">
+            <a:pPr>
+              <a:defRPr sz="2325" b="1">
+                <a:solidFill>
+                  <a:srgbClr val="1B1D19"/>
+                </a:solidFill>
+                <a:latin typeface="Pretendard"/>
+                <a:ea typeface="Pretendard"/>
+                <a:cs typeface="Pretendard"/>
+              </a:defRPr>
+            </a:pPr>
+            <a:r>
+              <a:rPr sz="2325" b="1">
+                <a:solidFill>
+                  <a:srgbClr val="1B1D19"/>
+                </a:solidFill>
+                <a:latin typeface="Pretendard"/>
+                <a:ea typeface="Pretendard"/>
+                <a:cs typeface="Pretendard"/>
+              </a:rPr>
+              <a:t>Penile biothesiometry</a:t>
+            </a:r>
+          </a:p>
+        </p:txBody>
+      </p:sp>
+      <p:sp>
+        <p:nvSpPr>
+          <p:cNvPr id="8" name="">
+            <a:extLst xmlns:a="http://schemas.openxmlformats.org/drawingml/2006/main">
+              <a:ext uri="{FF2B5EF4-FFF2-40B4-BE49-F238E27FC236}">
+                <a16:creationId xmlns:a16="http://schemas.microsoft.com/office/drawing/2014/main" id="{3C1C009A-CFDD-4D70-81AB-7399AEFBDB59}"/>
+              </a:ext>
+            </a:extLst>
+          </p:cNvPr>
+          <p:cNvSpPr>
+            <a:spLocks xmlns:a="http://schemas.openxmlformats.org/drawingml/2006/main" noGrp="1"/>
+          </p:cNvSpPr>
+          <p:nvPr/>
+        </p:nvSpPr>
+        <p:spPr>
+          <a:xfrm xmlns:a="http://schemas.openxmlformats.org/drawingml/2006/main">
+            <a:off x="6400800" y="3581400"/>
+            <a:ext cx="5105400" cy="2095500"/>
+          </a:xfrm>
+          <a:prstGeom xmlns:a="http://schemas.openxmlformats.org/drawingml/2006/main" prst="rect">
+            <a:avLst/>
+          </a:prstGeom>
+          <a:noFill xmlns:a="http://schemas.openxmlformats.org/drawingml/2006/main"/>
+          <a:ln xmlns:a="http://schemas.openxmlformats.org/drawingml/2006/main" w="0">
+            <a:noFill/>
+          </a:ln>
+        </p:spPr>
+        <p:txBody>
+          <a:bodyPr xmlns:a="http://schemas.openxmlformats.org/drawingml/2006/main" wrap="square" lIns="0" tIns="0" rIns="0" bIns="0" anchor="t">
+            <a:noAutofit/>
+          </a:bodyPr>
+          <a:lstStyle xmlns:a="http://schemas.openxmlformats.org/drawingml/2006/main">
+            <a:defPPr>
+              <a:defRPr sz="2025" b="0">
+                <a:solidFill>
+                  <a:srgbClr val="6B7265"/>
+                </a:solidFill>
+                <a:latin typeface="Pretendard"/>
+                <a:ea typeface="Pretendard"/>
+                <a:cs typeface="Pretendard"/>
+              </a:defRPr>
+            </a:defPPr>
+          </a:lstStyle>
+          <a:p xmlns:a="http://schemas.openxmlformats.org/drawingml/2006/main">
+            <a:pPr>
+              <a:defRPr sz="2025" b="0">
+                <a:solidFill>
+                  <a:srgbClr val="6B7265"/>
+                </a:solidFill>
+                <a:latin typeface="Pretendard"/>
+                <a:ea typeface="Pretendard"/>
+                <a:cs typeface="Pretendard"/>
+              </a:defRPr>
+            </a:pPr>
+            <a:r>
+              <a:rPr sz="2025" b="0">
+                <a:solidFill>
+                  <a:srgbClr val="6B7265"/>
+                </a:solidFill>
+                <a:latin typeface="Pretendard"/>
+                <a:ea typeface="Pretendard"/>
+                <a:cs typeface="Pretendard"/>
+              </a:rPr>
+              <a:t>Vibration perception threshold</a:t>
+            </a:r>
+          </a:p>
+          <a:p xmlns:a="http://schemas.openxmlformats.org/drawingml/2006/main">
+            <a:pPr>
+              <a:defRPr sz="2025" b="0">
+                <a:solidFill>
+                  <a:srgbClr val="6B7265"/>
+                </a:solidFill>
+                <a:latin typeface="Pretendard"/>
+                <a:ea typeface="Pretendard"/>
+                <a:cs typeface="Pretendard"/>
+              </a:defRPr>
+            </a:pPr>
+            <a:r>
+              <a:rPr sz="2025" b="0">
+                <a:solidFill>
+                  <a:srgbClr val="6B7265"/>
+                </a:solidFill>
+                <a:latin typeface="Pretendard"/>
+                <a:ea typeface="Pretendard"/>
+                <a:cs typeface="Pretendard"/>
+              </a:rPr>
+              <a:t>Penile sensitivity assessment</a:t>
+            </a:r>
+          </a:p>
+        </p:txBody>
+      </p:sp>
+      <p:sp>
+        <p:nvSpPr>
+          <p:cNvPr id="9" name="">
+            <a:extLst xmlns:a="http://schemas.openxmlformats.org/drawingml/2006/main">
+              <a:ext uri="{FF2B5EF4-FFF2-40B4-BE49-F238E27FC236}">
+                <a16:creationId xmlns:a16="http://schemas.microsoft.com/office/drawing/2014/main" id="{0431776F-2570-4FBE-8133-1D5DDB06CB81}"/>
               </a:ext>
             </a:extLst>
           </p:cNvPr>
@@ -9237,10 +10796,10 @@
       </p:sp>
       <p:sp>
         <p:nvSpPr>
-          <p:cNvPr id="6" name="">
-            <a:extLst xmlns:a="http://schemas.openxmlformats.org/drawingml/2006/main">
-              <a:ext uri="{FF2B5EF4-FFF2-40B4-BE49-F238E27FC236}">
-                <a16:creationId xmlns:a16="http://schemas.microsoft.com/office/drawing/2014/main" id="{9926DE49-2B3E-43F9-AF6D-CA92086C4BE5}"/>
+          <p:cNvPr id="10" name="">
+            <a:extLst xmlns:a="http://schemas.openxmlformats.org/drawingml/2006/main">
+              <a:ext uri="{FF2B5EF4-FFF2-40B4-BE49-F238E27FC236}">
+                <a16:creationId xmlns:a16="http://schemas.microsoft.com/office/drawing/2014/main" id="{87916EE4-6C36-42B8-8427-F0CB45660A15}"/>
               </a:ext>
             </a:extLst>
           </p:cNvPr>
@@ -9306,7 +10865,7 @@
     </p:spTree>
     <p:extLst>
       <p:ext uri="{BB962C8B-B14F-4D97-AF65-F5344CB8AC3E}">
-        <p14:creationId xmlns:p14="http://schemas.microsoft.com/office/powerpoint/2010/main" val="1262187417"/>
+        <p14:creationId xmlns:p14="http://schemas.microsoft.com/office/powerpoint/2010/main" val="236622401"/>
       </p:ext>
     </p:extLst>
   </p:cSld>
@@ -9334,10 +10893,10 @@
       </p:grpSpPr>
       <p:sp>
         <p:nvSpPr>
-          <p:cNvPr id="7" name="">
-            <a:extLst xmlns:a="http://schemas.openxmlformats.org/drawingml/2006/main">
-              <a:ext uri="{FF2B5EF4-FFF2-40B4-BE49-F238E27FC236}">
-                <a16:creationId xmlns:a16="http://schemas.microsoft.com/office/drawing/2014/main" id="{1EF6444E-05B3-48B9-9BE6-7DBF6EEB14E2}"/>
+          <p:cNvPr id="8" name="">
+            <a:extLst xmlns:a="http://schemas.openxmlformats.org/drawingml/2006/main">
+              <a:ext uri="{FF2B5EF4-FFF2-40B4-BE49-F238E27FC236}">
+                <a16:creationId xmlns:a16="http://schemas.microsoft.com/office/drawing/2014/main" id="{8CE9A5A0-C847-494F-BBB8-31AB0FC0D892}"/>
               </a:ext>
             </a:extLst>
           </p:cNvPr>
@@ -9395,7 +10954,7 @@
                 <a:ea typeface="Pretendard"/>
                 <a:cs typeface="Pretendard"/>
               </a:rPr>
-              <a:t>CLINICAL CASES / CASE 2</a:t>
+              <a:t>PREPARATION</a:t>
             </a:r>
           </a:p>
         </p:txBody>
@@ -9405,7 +10964,7 @@
           <p:cNvPr id="2" name="">
             <a:extLst xmlns:a="http://schemas.openxmlformats.org/drawingml/2006/main">
               <a:ext uri="{FF2B5EF4-FFF2-40B4-BE49-F238E27FC236}">
-                <a16:creationId xmlns:a16="http://schemas.microsoft.com/office/drawing/2014/main" id="{1938ABD2-93CD-49D9-8706-A37EA8D107CB}"/>
+                <a16:creationId xmlns:a16="http://schemas.microsoft.com/office/drawing/2014/main" id="{95D00165-6D68-494A-A980-DF1181E81F5F}"/>
               </a:ext>
             </a:extLst>
           </p:cNvPr>
@@ -9463,7 +11022,7 @@
                 <a:ea typeface="Pretendard"/>
                 <a:cs typeface="Pretendard"/>
               </a:rPr>
-              <a:t>Circumcision-line Incision</a:t>
+              <a:t>Surgical Preparation</a:t>
             </a:r>
           </a:p>
         </p:txBody>
@@ -9473,7 +11032,75 @@
           <p:cNvPr id="3" name="">
             <a:extLst xmlns:a="http://schemas.openxmlformats.org/drawingml/2006/main">
               <a:ext uri="{FF2B5EF4-FFF2-40B4-BE49-F238E27FC236}">
-                <a16:creationId xmlns:a16="http://schemas.microsoft.com/office/drawing/2014/main" id="{EB331DD9-45E7-47C1-848D-C802A9BBB777}"/>
+                <a16:creationId xmlns:a16="http://schemas.microsoft.com/office/drawing/2014/main" id="{FB106567-E7FB-4BC2-B194-4712F8924CE8}"/>
+              </a:ext>
+            </a:extLst>
+          </p:cNvPr>
+          <p:cNvSpPr>
+            <a:spLocks xmlns:a="http://schemas.openxmlformats.org/drawingml/2006/main" noGrp="1"/>
+          </p:cNvSpPr>
+          <p:nvPr/>
+        </p:nvSpPr>
+        <p:spPr>
+          <a:xfrm xmlns:a="http://schemas.openxmlformats.org/drawingml/2006/main">
+            <a:off x="685800" y="1905000"/>
+            <a:ext cx="10820400" cy="438150"/>
+          </a:xfrm>
+          <a:prstGeom xmlns:a="http://schemas.openxmlformats.org/drawingml/2006/main" prst="rect">
+            <a:avLst/>
+          </a:prstGeom>
+          <a:noFill xmlns:a="http://schemas.openxmlformats.org/drawingml/2006/main"/>
+          <a:ln xmlns:a="http://schemas.openxmlformats.org/drawingml/2006/main" w="0">
+            <a:noFill/>
+          </a:ln>
+        </p:spPr>
+        <p:txBody>
+          <a:bodyPr xmlns:a="http://schemas.openxmlformats.org/drawingml/2006/main" wrap="square" lIns="0" tIns="0" rIns="0" bIns="0" anchor="t">
+            <a:noAutofit/>
+          </a:bodyPr>
+          <a:lstStyle xmlns:a="http://schemas.openxmlformats.org/drawingml/2006/main">
+            <a:defPPr>
+              <a:defRPr sz="2025" b="0">
+                <a:solidFill>
+                  <a:srgbClr val="6B7265"/>
+                </a:solidFill>
+                <a:latin typeface="Pretendard"/>
+                <a:ea typeface="Pretendard"/>
+                <a:cs typeface="Pretendard"/>
+              </a:defRPr>
+            </a:defPPr>
+          </a:lstStyle>
+          <a:p xmlns:a="http://schemas.openxmlformats.org/drawingml/2006/main">
+            <a:pPr>
+              <a:defRPr sz="2025" b="0">
+                <a:solidFill>
+                  <a:srgbClr val="6B7265"/>
+                </a:solidFill>
+                <a:latin typeface="Pretendard"/>
+                <a:ea typeface="Pretendard"/>
+                <a:cs typeface="Pretendard"/>
+              </a:defRPr>
+            </a:pPr>
+            <a:r>
+              <a:rPr sz="2025" b="0">
+                <a:solidFill>
+                  <a:srgbClr val="6B7265"/>
+                </a:solidFill>
+                <a:latin typeface="Pretendard"/>
+                <a:ea typeface="Pretendard"/>
+                <a:cs typeface="Pretendard"/>
+              </a:rPr>
+              <a:t>Shaving and Draping</a:t>
+            </a:r>
+          </a:p>
+        </p:txBody>
+      </p:sp>
+      <p:sp>
+        <p:nvSpPr>
+          <p:cNvPr id="4" name="">
+            <a:extLst xmlns:a="http://schemas.openxmlformats.org/drawingml/2006/main">
+              <a:ext uri="{FF2B5EF4-FFF2-40B4-BE49-F238E27FC236}">
+                <a16:creationId xmlns:a16="http://schemas.microsoft.com/office/drawing/2014/main" id="{D2096399-3272-4D35-B8EC-4E1F47A8A6D7}"/>
               </a:ext>
             </a:extLst>
           </p:cNvPr>
@@ -9500,10 +11127,10 @@
       </p:sp>
       <p:sp>
         <p:nvSpPr>
-          <p:cNvPr id="4" name="">
-            <a:extLst xmlns:a="http://schemas.openxmlformats.org/drawingml/2006/main">
-              <a:ext uri="{FF2B5EF4-FFF2-40B4-BE49-F238E27FC236}">
-                <a16:creationId xmlns:a16="http://schemas.microsoft.com/office/drawing/2014/main" id="{45862A7A-1B3C-4716-8525-B789BEDE51C7}"/>
+          <p:cNvPr id="5" name="">
+            <a:extLst xmlns:a="http://schemas.openxmlformats.org/drawingml/2006/main">
+              <a:ext uri="{FF2B5EF4-FFF2-40B4-BE49-F238E27FC236}">
+                <a16:creationId xmlns:a16="http://schemas.microsoft.com/office/drawing/2014/main" id="{1292C0A0-3EFC-465A-B81C-2B248048DB48}"/>
               </a:ext>
             </a:extLst>
           </p:cNvPr>
@@ -9530,10 +11157,10 @@
       </p:sp>
       <p:sp>
         <p:nvSpPr>
-          <p:cNvPr id="5" name="">
-            <a:extLst xmlns:a="http://schemas.openxmlformats.org/drawingml/2006/main">
-              <a:ext uri="{FF2B5EF4-FFF2-40B4-BE49-F238E27FC236}">
-                <a16:creationId xmlns:a16="http://schemas.microsoft.com/office/drawing/2014/main" id="{5CF3D837-3167-44C3-B0DA-9E41992E9134}"/>
+          <p:cNvPr id="6" name="">
+            <a:extLst xmlns:a="http://schemas.openxmlformats.org/drawingml/2006/main">
+              <a:ext uri="{FF2B5EF4-FFF2-40B4-BE49-F238E27FC236}">
+                <a16:creationId xmlns:a16="http://schemas.microsoft.com/office/drawing/2014/main" id="{516B356D-D8B3-40CC-B0FF-DAB12EF044BC}"/>
               </a:ext>
             </a:extLst>
           </p:cNvPr>
@@ -9598,10 +11225,10 @@
       </p:sp>
       <p:sp>
         <p:nvSpPr>
-          <p:cNvPr id="6" name="">
-            <a:extLst xmlns:a="http://schemas.openxmlformats.org/drawingml/2006/main">
-              <a:ext uri="{FF2B5EF4-FFF2-40B4-BE49-F238E27FC236}">
-                <a16:creationId xmlns:a16="http://schemas.microsoft.com/office/drawing/2014/main" id="{E2268D9C-0E15-49A3-89D4-94F46CBF47C5}"/>
+          <p:cNvPr id="7" name="">
+            <a:extLst xmlns:a="http://schemas.openxmlformats.org/drawingml/2006/main">
+              <a:ext uri="{FF2B5EF4-FFF2-40B4-BE49-F238E27FC236}">
+                <a16:creationId xmlns:a16="http://schemas.microsoft.com/office/drawing/2014/main" id="{A3FE2D87-F399-462E-8053-1B60C9B20371}"/>
               </a:ext>
             </a:extLst>
           </p:cNvPr>
@@ -9667,7 +11294,7 @@
     </p:spTree>
     <p:extLst>
       <p:ext uri="{BB962C8B-B14F-4D97-AF65-F5344CB8AC3E}">
-        <p14:creationId xmlns:p14="http://schemas.microsoft.com/office/powerpoint/2010/main" val="1958312374"/>
+        <p14:creationId xmlns:p14="http://schemas.microsoft.com/office/powerpoint/2010/main" val="2143185249"/>
       </p:ext>
     </p:extLst>
   </p:cSld>
@@ -9698,7 +11325,7 @@
           <p:cNvPr id="7" name="">
             <a:extLst xmlns:a="http://schemas.openxmlformats.org/drawingml/2006/main">
               <a:ext uri="{FF2B5EF4-FFF2-40B4-BE49-F238E27FC236}">
-                <a16:creationId xmlns:a16="http://schemas.microsoft.com/office/drawing/2014/main" id="{D466A3F6-32AE-4398-A580-801E9483DB3B}"/>
+                <a16:creationId xmlns:a16="http://schemas.microsoft.com/office/drawing/2014/main" id="{7C99248E-09AA-410A-B19C-E79EF6B3C388}"/>
               </a:ext>
             </a:extLst>
           </p:cNvPr>
@@ -9756,7 +11383,7 @@
                 <a:ea typeface="Pretendard"/>
                 <a:cs typeface="Pretendard"/>
               </a:rPr>
-              <a:t>CLINICAL CASES / CASE 3</a:t>
+              <a:t>CLINICAL CASES / CASE 1</a:t>
             </a:r>
           </a:p>
         </p:txBody>
@@ -9766,7 +11393,7 @@
           <p:cNvPr id="2" name="">
             <a:extLst xmlns:a="http://schemas.openxmlformats.org/drawingml/2006/main">
               <a:ext uri="{FF2B5EF4-FFF2-40B4-BE49-F238E27FC236}">
-                <a16:creationId xmlns:a16="http://schemas.microsoft.com/office/drawing/2014/main" id="{F7F96C13-E289-4BC5-9CD2-A157E5B9311D}"/>
+                <a16:creationId xmlns:a16="http://schemas.microsoft.com/office/drawing/2014/main" id="{FE6E7A5B-691A-4104-B374-8C0977151C77}"/>
               </a:ext>
             </a:extLst>
           </p:cNvPr>
@@ -9824,7 +11451,7 @@
                 <a:ea typeface="Pretendard"/>
                 <a:cs typeface="Pretendard"/>
               </a:rPr>
-              <a:t>Secondary Dermal Grafting</a:t>
+              <a:t>Pubic Incision</a:t>
             </a:r>
           </a:p>
         </p:txBody>
@@ -9834,7 +11461,7 @@
           <p:cNvPr id="3" name="">
             <a:extLst xmlns:a="http://schemas.openxmlformats.org/drawingml/2006/main">
               <a:ext uri="{FF2B5EF4-FFF2-40B4-BE49-F238E27FC236}">
-                <a16:creationId xmlns:a16="http://schemas.microsoft.com/office/drawing/2014/main" id="{DB5D83B1-FB32-4F03-A83C-CE0FE3925D6D}"/>
+                <a16:creationId xmlns:a16="http://schemas.microsoft.com/office/drawing/2014/main" id="{FBD50AA4-1686-4523-80E6-AACCAA787376}"/>
               </a:ext>
             </a:extLst>
           </p:cNvPr>
@@ -9864,7 +11491,7 @@
           <p:cNvPr id="4" name="">
             <a:extLst xmlns:a="http://schemas.openxmlformats.org/drawingml/2006/main">
               <a:ext uri="{FF2B5EF4-FFF2-40B4-BE49-F238E27FC236}">
-                <a16:creationId xmlns:a16="http://schemas.microsoft.com/office/drawing/2014/main" id="{475E92F1-2928-43A2-A589-9044670B9B41}"/>
+                <a16:creationId xmlns:a16="http://schemas.microsoft.com/office/drawing/2014/main" id="{BC20EA18-3AE7-4C10-BE6B-B15781DAD9C6}"/>
               </a:ext>
             </a:extLst>
           </p:cNvPr>
@@ -9894,7 +11521,7 @@
           <p:cNvPr id="5" name="">
             <a:extLst xmlns:a="http://schemas.openxmlformats.org/drawingml/2006/main">
               <a:ext uri="{FF2B5EF4-FFF2-40B4-BE49-F238E27FC236}">
-                <a16:creationId xmlns:a16="http://schemas.microsoft.com/office/drawing/2014/main" id="{3193C1B5-E6A2-470E-8870-6BB97D4F224A}"/>
+                <a16:creationId xmlns:a16="http://schemas.microsoft.com/office/drawing/2014/main" id="{B45BE914-8DEF-4C3A-8475-EF10D7393F60}"/>
               </a:ext>
             </a:extLst>
           </p:cNvPr>
@@ -9962,7 +11589,7 @@
           <p:cNvPr id="6" name="">
             <a:extLst xmlns:a="http://schemas.openxmlformats.org/drawingml/2006/main">
               <a:ext uri="{FF2B5EF4-FFF2-40B4-BE49-F238E27FC236}">
-                <a16:creationId xmlns:a16="http://schemas.microsoft.com/office/drawing/2014/main" id="{F8177788-03CB-4E2B-830A-5C5E30F4F195}"/>
+                <a16:creationId xmlns:a16="http://schemas.microsoft.com/office/drawing/2014/main" id="{27861A6D-A58F-4794-BCCF-A177E16B717B}"/>
               </a:ext>
             </a:extLst>
           </p:cNvPr>
@@ -10028,7 +11655,7 @@
     </p:spTree>
     <p:extLst>
       <p:ext uri="{BB962C8B-B14F-4D97-AF65-F5344CB8AC3E}">
-        <p14:creationId xmlns:p14="http://schemas.microsoft.com/office/powerpoint/2010/main" val="1475275216"/>
+        <p14:creationId xmlns:p14="http://schemas.microsoft.com/office/powerpoint/2010/main" val="1564799833"/>
       </p:ext>
     </p:extLst>
   </p:cSld>
@@ -10059,7 +11686,7 @@
           <p:cNvPr id="7" name="">
             <a:extLst xmlns:a="http://schemas.openxmlformats.org/drawingml/2006/main">
               <a:ext uri="{FF2B5EF4-FFF2-40B4-BE49-F238E27FC236}">
-                <a16:creationId xmlns:a16="http://schemas.microsoft.com/office/drawing/2014/main" id="{E26F117D-C965-46F2-8D0C-AEDE8C63CF1E}"/>
+                <a16:creationId xmlns:a16="http://schemas.microsoft.com/office/drawing/2014/main" id="{EDA3E417-F6F1-4190-AC1C-C4F691BA177D}"/>
               </a:ext>
             </a:extLst>
           </p:cNvPr>
@@ -10117,7 +11744,7 @@
                 <a:ea typeface="Pretendard"/>
                 <a:cs typeface="Pretendard"/>
               </a:rPr>
-              <a:t>CLINICAL CASES / CASE 4</a:t>
+              <a:t>CLINICAL CASES / CASE 2</a:t>
             </a:r>
           </a:p>
         </p:txBody>
@@ -10127,7 +11754,7 @@
           <p:cNvPr id="2" name="">
             <a:extLst xmlns:a="http://schemas.openxmlformats.org/drawingml/2006/main">
               <a:ext uri="{FF2B5EF4-FFF2-40B4-BE49-F238E27FC236}">
-                <a16:creationId xmlns:a16="http://schemas.microsoft.com/office/drawing/2014/main" id="{7F8A4A38-A66D-438F-A285-706B31E85F06}"/>
+                <a16:creationId xmlns:a16="http://schemas.microsoft.com/office/drawing/2014/main" id="{D77CD645-0E07-4C93-B31E-717B65F5E591}"/>
               </a:ext>
             </a:extLst>
           </p:cNvPr>
@@ -10185,7 +11812,7 @@
                 <a:ea typeface="Pretendard"/>
                 <a:cs typeface="Pretendard"/>
               </a:rPr>
-              <a:t>Revision Surgery</a:t>
+              <a:t>Circumcision-line Incision</a:t>
             </a:r>
           </a:p>
         </p:txBody>
@@ -10195,7 +11822,7 @@
           <p:cNvPr id="3" name="">
             <a:extLst xmlns:a="http://schemas.openxmlformats.org/drawingml/2006/main">
               <a:ext uri="{FF2B5EF4-FFF2-40B4-BE49-F238E27FC236}">
-                <a16:creationId xmlns:a16="http://schemas.microsoft.com/office/drawing/2014/main" id="{C29630FB-6746-4EE6-A392-31F1D2832346}"/>
+                <a16:creationId xmlns:a16="http://schemas.microsoft.com/office/drawing/2014/main" id="{9E326510-E311-4A5E-B0C9-1E786FCCF01A}"/>
               </a:ext>
             </a:extLst>
           </p:cNvPr>
@@ -10225,7 +11852,7 @@
           <p:cNvPr id="4" name="">
             <a:extLst xmlns:a="http://schemas.openxmlformats.org/drawingml/2006/main">
               <a:ext uri="{FF2B5EF4-FFF2-40B4-BE49-F238E27FC236}">
-                <a16:creationId xmlns:a16="http://schemas.microsoft.com/office/drawing/2014/main" id="{8E8BF48F-6D48-4377-B60C-69C975137443}"/>
+                <a16:creationId xmlns:a16="http://schemas.microsoft.com/office/drawing/2014/main" id="{1DFF8C5B-1466-4933-A2A9-ADFDE69401FC}"/>
               </a:ext>
             </a:extLst>
           </p:cNvPr>
@@ -10255,7 +11882,7 @@
           <p:cNvPr id="5" name="">
             <a:extLst xmlns:a="http://schemas.openxmlformats.org/drawingml/2006/main">
               <a:ext uri="{FF2B5EF4-FFF2-40B4-BE49-F238E27FC236}">
-                <a16:creationId xmlns:a16="http://schemas.microsoft.com/office/drawing/2014/main" id="{B6FC73C6-3792-4FA0-8900-D35457C6281C}"/>
+                <a16:creationId xmlns:a16="http://schemas.microsoft.com/office/drawing/2014/main" id="{E725F7F3-79A2-4338-B6A7-5CAEE0200A5C}"/>
               </a:ext>
             </a:extLst>
           </p:cNvPr>
@@ -10323,7 +11950,7 @@
           <p:cNvPr id="6" name="">
             <a:extLst xmlns:a="http://schemas.openxmlformats.org/drawingml/2006/main">
               <a:ext uri="{FF2B5EF4-FFF2-40B4-BE49-F238E27FC236}">
-                <a16:creationId xmlns:a16="http://schemas.microsoft.com/office/drawing/2014/main" id="{72BA43B7-87E9-4E07-9911-33427DD427C3}"/>
+                <a16:creationId xmlns:a16="http://schemas.microsoft.com/office/drawing/2014/main" id="{3622CEBA-BEA1-4D94-9BA4-EE0D6E5F941C}"/>
               </a:ext>
             </a:extLst>
           </p:cNvPr>
@@ -10389,7 +12016,7 @@
     </p:spTree>
     <p:extLst>
       <p:ext uri="{BB962C8B-B14F-4D97-AF65-F5344CB8AC3E}">
-        <p14:creationId xmlns:p14="http://schemas.microsoft.com/office/powerpoint/2010/main" val="542315525"/>
+        <p14:creationId xmlns:p14="http://schemas.microsoft.com/office/powerpoint/2010/main" val="534160250"/>
       </p:ext>
     </p:extLst>
   </p:cSld>

--- a/downloads/highst-perioperative-webinar.pptx
+++ b/downloads/highst-perioperative-webinar.pptx
@@ -2,27 +2,27 @@
 <file path=ppt/presentation.xml><?xml version="1.0" encoding="utf-8"?>
 <p:presentation xmlns:p="http://schemas.openxmlformats.org/presentationml/2006/main">
   <p:sldMasterIdLst>
-    <p:sldMasterId xmlns:r="http://schemas.openxmlformats.org/officeDocument/2006/relationships" id="2147483648" r:id="R3ee2d0f966a248e7"/>
+    <p:sldMasterId xmlns:r="http://schemas.openxmlformats.org/officeDocument/2006/relationships" id="2147483648" r:id="Rcc4efa1c288b4ef1"/>
   </p:sldMasterIdLst>
   <p:notesMasterIdLst>
-    <p:notesMasterId xmlns:r="http://schemas.openxmlformats.org/officeDocument/2006/relationships" r:id="R662b736467ee40c6"/>
+    <p:notesMasterId xmlns:r="http://schemas.openxmlformats.org/officeDocument/2006/relationships" r:id="R5b3e87f3e91845dc"/>
   </p:notesMasterIdLst>
   <p:sldIdLst>
-    <p:sldId xmlns:r="http://schemas.openxmlformats.org/officeDocument/2006/relationships" id="256" r:id="R5ae23c2c2cbc4e2c"/>
-    <p:sldId xmlns:r="http://schemas.openxmlformats.org/officeDocument/2006/relationships" id="257" r:id="Rc6519a8fb2c2492d"/>
-    <p:sldId xmlns:r="http://schemas.openxmlformats.org/officeDocument/2006/relationships" id="258" r:id="R80c16b392c344c00"/>
-    <p:sldId xmlns:r="http://schemas.openxmlformats.org/officeDocument/2006/relationships" id="259" r:id="R6a706f3b62e8485e"/>
-    <p:sldId xmlns:r="http://schemas.openxmlformats.org/officeDocument/2006/relationships" id="260" r:id="Rbfc97fb5a5e744ac"/>
-    <p:sldId xmlns:r="http://schemas.openxmlformats.org/officeDocument/2006/relationships" id="261" r:id="R2b21da0f6fb64faa"/>
-    <p:sldId xmlns:r="http://schemas.openxmlformats.org/officeDocument/2006/relationships" id="262" r:id="Rb894b300af5545fe"/>
-    <p:sldId xmlns:r="http://schemas.openxmlformats.org/officeDocument/2006/relationships" id="263" r:id="Ra60f04e9ce5747ea"/>
-    <p:sldId xmlns:r="http://schemas.openxmlformats.org/officeDocument/2006/relationships" id="264" r:id="R8db459d1f1704378"/>
-    <p:sldId xmlns:r="http://schemas.openxmlformats.org/officeDocument/2006/relationships" id="265" r:id="R827d67de1f7d4901"/>
-    <p:sldId xmlns:r="http://schemas.openxmlformats.org/officeDocument/2006/relationships" id="266" r:id="Rad1aa5f85d024365"/>
-    <p:sldId xmlns:r="http://schemas.openxmlformats.org/officeDocument/2006/relationships" id="267" r:id="R9aa08bb171204ccb"/>
-    <p:sldId xmlns:r="http://schemas.openxmlformats.org/officeDocument/2006/relationships" id="268" r:id="R61a426fd01014238"/>
-    <p:sldId xmlns:r="http://schemas.openxmlformats.org/officeDocument/2006/relationships" id="269" r:id="Rbd40dde7d8ed4d55"/>
-    <p:sldId xmlns:r="http://schemas.openxmlformats.org/officeDocument/2006/relationships" id="270" r:id="R0a6981511179472b"/>
+    <p:sldId xmlns:r="http://schemas.openxmlformats.org/officeDocument/2006/relationships" id="256" r:id="R4c25997d9bc44673"/>
+    <p:sldId xmlns:r="http://schemas.openxmlformats.org/officeDocument/2006/relationships" id="257" r:id="Ra34716ee66604145"/>
+    <p:sldId xmlns:r="http://schemas.openxmlformats.org/officeDocument/2006/relationships" id="258" r:id="R1c053f9aed004e46"/>
+    <p:sldId xmlns:r="http://schemas.openxmlformats.org/officeDocument/2006/relationships" id="259" r:id="R5d6be922e3394221"/>
+    <p:sldId xmlns:r="http://schemas.openxmlformats.org/officeDocument/2006/relationships" id="260" r:id="Re071ba049aea43f8"/>
+    <p:sldId xmlns:r="http://schemas.openxmlformats.org/officeDocument/2006/relationships" id="261" r:id="Raff95f084a754c6b"/>
+    <p:sldId xmlns:r="http://schemas.openxmlformats.org/officeDocument/2006/relationships" id="262" r:id="R6e6cfbd7a0c146b1"/>
+    <p:sldId xmlns:r="http://schemas.openxmlformats.org/officeDocument/2006/relationships" id="263" r:id="Rb287d44de0134827"/>
+    <p:sldId xmlns:r="http://schemas.openxmlformats.org/officeDocument/2006/relationships" id="264" r:id="R4372b6e55b2e4f11"/>
+    <p:sldId xmlns:r="http://schemas.openxmlformats.org/officeDocument/2006/relationships" id="265" r:id="R1070a5fd12b24763"/>
+    <p:sldId xmlns:r="http://schemas.openxmlformats.org/officeDocument/2006/relationships" id="266" r:id="Rba9933b85e6141a0"/>
+    <p:sldId xmlns:r="http://schemas.openxmlformats.org/officeDocument/2006/relationships" id="267" r:id="R7f7f84753cc4478c"/>
+    <p:sldId xmlns:r="http://schemas.openxmlformats.org/officeDocument/2006/relationships" id="268" r:id="R938443632cb94a4c"/>
+    <p:sldId xmlns:r="http://schemas.openxmlformats.org/officeDocument/2006/relationships" id="269" r:id="Rfc2ff55228e94e0f"/>
+    <p:sldId xmlns:r="http://schemas.openxmlformats.org/officeDocument/2006/relationships" id="270" r:id="R6be3f0cec11a4ec8"/>
   </p:sldIdLst>
   <p:sldSz cx="12192000" cy="6858000"/>
   <p:notesSz cx="6858000" cy="9144000"/>
@@ -1206,7 +1206,7 @@
           <a:lstStyle xmlns:a="http://schemas.openxmlformats.org/drawingml/2006/main"/>
           <a:p xmlns:a="http://schemas.openxmlformats.org/drawingml/2006/main">
             <a:r>
-              <a:t>The list reflects the preoperative tests provided by HIGHST. Blood glucose and HbA1c are listed separately. HbA1c denotes glycated hemoglobin. HPV and syphilis are separate entries. The slide does not assign a specimen type or testing method to HPV.</a:t>
+              <a:t>Preoperative testing includes blood coagulation tests, complete blood count (CBC), prostate-specific antigen (PSA), blood glucose, glycated hemoglobin (HbA1c), HPV and syphilis testing, urine testing, liver function and inflammatory markers.</a:t>
             </a:r>
           </a:p>
           <a:p xmlns:a="http://schemas.openxmlformats.org/drawingml/2006/main">
@@ -1563,7 +1563,7 @@
           <p:cNvPr id="3" name="Title">
             <a:extLst xmlns:a="http://schemas.openxmlformats.org/drawingml/2006/main">
               <a:ext uri="{FF2B5EF4-FFF2-40B4-BE49-F238E27FC236}">
-                <a16:creationId xmlns:a16="http://schemas.microsoft.com/office/drawing/2014/main" id="{04E1E01B-7363-44BD-B532-825C5E8B50BA}"/>
+                <a16:creationId xmlns:a16="http://schemas.microsoft.com/office/drawing/2014/main" id="{83A30845-1A30-4200-82FE-AAF854C64535}"/>
               </a:ext>
             </a:extLst>
           </p:cNvPr>
@@ -1720,7 +1720,7 @@
           <p:cNvPr id="2" name="Subtitle">
             <a:extLst xmlns:a="http://schemas.openxmlformats.org/drawingml/2006/main">
               <a:ext uri="{FF2B5EF4-FFF2-40B4-BE49-F238E27FC236}">
-                <a16:creationId xmlns:a16="http://schemas.microsoft.com/office/drawing/2014/main" id="{0DB0C217-E39C-4A44-85FA-7689BAF07F8A}"/>
+                <a16:creationId xmlns:a16="http://schemas.microsoft.com/office/drawing/2014/main" id="{51CF4F87-CDD6-45FC-A767-BA911FA802A6}"/>
               </a:ext>
             </a:extLst>
           </p:cNvPr>
@@ -1894,7 +1894,7 @@
           <p:cNvPr id="2" name="Section title">
             <a:extLst xmlns:a="http://schemas.openxmlformats.org/drawingml/2006/main">
               <a:ext uri="{FF2B5EF4-FFF2-40B4-BE49-F238E27FC236}">
-                <a16:creationId xmlns:a16="http://schemas.microsoft.com/office/drawing/2014/main" id="{7EF962CF-EA9B-490C-B2D1-A2C9F7EB71E5}"/>
+                <a16:creationId xmlns:a16="http://schemas.microsoft.com/office/drawing/2014/main" id="{3EA20947-52AE-4F37-9C7A-C837300B0EFE}"/>
               </a:ext>
             </a:extLst>
           </p:cNvPr>
@@ -2068,7 +2068,7 @@
           <p:cNvPr id="3" name="Title">
             <a:extLst xmlns:a="http://schemas.openxmlformats.org/drawingml/2006/main">
               <a:ext uri="{FF2B5EF4-FFF2-40B4-BE49-F238E27FC236}">
-                <a16:creationId xmlns:a16="http://schemas.microsoft.com/office/drawing/2014/main" id="{59F10B97-08C3-4FBE-8102-C3C0A53937B6}"/>
+                <a16:creationId xmlns:a16="http://schemas.microsoft.com/office/drawing/2014/main" id="{1CD33F13-8A6C-43A5-844B-B0637746FEEF}"/>
               </a:ext>
             </a:extLst>
           </p:cNvPr>
@@ -2225,7 +2225,7 @@
           <p:cNvPr id="2" name="Body">
             <a:extLst xmlns:a="http://schemas.openxmlformats.org/drawingml/2006/main">
               <a:ext uri="{FF2B5EF4-FFF2-40B4-BE49-F238E27FC236}">
-                <a16:creationId xmlns:a16="http://schemas.microsoft.com/office/drawing/2014/main" id="{22E19779-C792-4F35-93B5-9C9D449FC4DD}"/>
+                <a16:creationId xmlns:a16="http://schemas.microsoft.com/office/drawing/2014/main" id="{9748D49E-2AC4-484A-B01F-73AC2A95F987}"/>
               </a:ext>
             </a:extLst>
           </p:cNvPr>
@@ -2399,7 +2399,7 @@
           <p:cNvPr id="4" name="Title">
             <a:extLst xmlns:a="http://schemas.openxmlformats.org/drawingml/2006/main">
               <a:ext uri="{FF2B5EF4-FFF2-40B4-BE49-F238E27FC236}">
-                <a16:creationId xmlns:a16="http://schemas.microsoft.com/office/drawing/2014/main" id="{9755860D-6D27-46B1-A619-B13BC637AF1F}"/>
+                <a16:creationId xmlns:a16="http://schemas.microsoft.com/office/drawing/2014/main" id="{74F7C5FD-DA8D-4180-B99C-400D5FDF496D}"/>
               </a:ext>
             </a:extLst>
           </p:cNvPr>
@@ -2556,7 +2556,7 @@
           <p:cNvPr id="2" name="Left column">
             <a:extLst xmlns:a="http://schemas.openxmlformats.org/drawingml/2006/main">
               <a:ext uri="{FF2B5EF4-FFF2-40B4-BE49-F238E27FC236}">
-                <a16:creationId xmlns:a16="http://schemas.microsoft.com/office/drawing/2014/main" id="{2EF09A62-5371-481B-802D-99DB67FD733C}"/>
+                <a16:creationId xmlns:a16="http://schemas.microsoft.com/office/drawing/2014/main" id="{68978989-A2E0-4EE9-92E1-A678E47ADA54}"/>
               </a:ext>
             </a:extLst>
           </p:cNvPr>
@@ -2713,7 +2713,7 @@
           <p:cNvPr id="3" name="Right column">
             <a:extLst xmlns:a="http://schemas.openxmlformats.org/drawingml/2006/main">
               <a:ext uri="{FF2B5EF4-FFF2-40B4-BE49-F238E27FC236}">
-                <a16:creationId xmlns:a16="http://schemas.microsoft.com/office/drawing/2014/main" id="{1A04455C-729E-4417-9DFD-2ADBC8C6FD0F}"/>
+                <a16:creationId xmlns:a16="http://schemas.microsoft.com/office/drawing/2014/main" id="{A2F1F952-AC79-44F5-B140-E319853E1231}"/>
               </a:ext>
             </a:extLst>
           </p:cNvPr>
@@ -2887,7 +2887,7 @@
           <p:cNvPr id="3" name="Title">
             <a:extLst xmlns:a="http://schemas.openxmlformats.org/drawingml/2006/main">
               <a:ext uri="{FF2B5EF4-FFF2-40B4-BE49-F238E27FC236}">
-                <a16:creationId xmlns:a16="http://schemas.microsoft.com/office/drawing/2014/main" id="{6A9B795A-96EC-4BF6-8947-D97B7C52EA9F}"/>
+                <a16:creationId xmlns:a16="http://schemas.microsoft.com/office/drawing/2014/main" id="{20245DB9-B556-4BD0-98E1-229C04B3BCEC}"/>
               </a:ext>
             </a:extLst>
           </p:cNvPr>
@@ -3044,7 +3044,7 @@
           <p:cNvPr id="2" name="Left column">
             <a:extLst xmlns:a="http://schemas.openxmlformats.org/drawingml/2006/main">
               <a:ext uri="{FF2B5EF4-FFF2-40B4-BE49-F238E27FC236}">
-                <a16:creationId xmlns:a16="http://schemas.microsoft.com/office/drawing/2014/main" id="{F2CEF8B2-72F4-49CD-8519-C5362ADA65AA}"/>
+                <a16:creationId xmlns:a16="http://schemas.microsoft.com/office/drawing/2014/main" id="{CD0A0566-3B7E-4505-B0AA-FE1170F845E3}"/>
               </a:ext>
             </a:extLst>
           </p:cNvPr>
@@ -3239,12 +3239,12 @@
   </p:cSld>
   <p:clrMap bg1="lt1" tx1="dk1" bg2="lt2" tx2="dk2" accent1="accent1" accent2="accent2" accent3="accent3" accent4="accent4" accent5="accent5" accent6="accent6" hlink="hlink" folHlink="folHlink"/>
   <p:sldLayoutIdLst>
-    <p:sldLayoutId xmlns:r="http://schemas.openxmlformats.org/officeDocument/2006/relationships" id="2147483649" r:id="Rb344a4b21ece4bae"/>
-    <p:sldLayoutId xmlns:r="http://schemas.openxmlformats.org/officeDocument/2006/relationships" id="2147483650" r:id="Rebb8a7672b6e4f3f"/>
-    <p:sldLayoutId xmlns:r="http://schemas.openxmlformats.org/officeDocument/2006/relationships" id="2147483651" r:id="R093bad8932324621"/>
-    <p:sldLayoutId xmlns:r="http://schemas.openxmlformats.org/officeDocument/2006/relationships" id="2147483652" r:id="R55bc0cd5caa04312"/>
-    <p:sldLayoutId xmlns:r="http://schemas.openxmlformats.org/officeDocument/2006/relationships" id="2147483653" r:id="Rc93deddcb524408a"/>
-    <p:sldLayoutId xmlns:r="http://schemas.openxmlformats.org/officeDocument/2006/relationships" id="2147483654" r:id="R1ed98b9186be40eb"/>
+    <p:sldLayoutId xmlns:r="http://schemas.openxmlformats.org/officeDocument/2006/relationships" id="2147483649" r:id="R5a2cd24448d54d55"/>
+    <p:sldLayoutId xmlns:r="http://schemas.openxmlformats.org/officeDocument/2006/relationships" id="2147483650" r:id="Rc7da571e9a8f45e1"/>
+    <p:sldLayoutId xmlns:r="http://schemas.openxmlformats.org/officeDocument/2006/relationships" id="2147483651" r:id="R3c870f87f4af4ee0"/>
+    <p:sldLayoutId xmlns:r="http://schemas.openxmlformats.org/officeDocument/2006/relationships" id="2147483652" r:id="Raaa64aea0ac1474c"/>
+    <p:sldLayoutId xmlns:r="http://schemas.openxmlformats.org/officeDocument/2006/relationships" id="2147483653" r:id="Reffff0882e434602"/>
+    <p:sldLayoutId xmlns:r="http://schemas.openxmlformats.org/officeDocument/2006/relationships" id="2147483654" r:id="R4f2d406ee2094f4a"/>
   </p:sldLayoutIdLst>
   <p:txStyles>
     <p:titleStyle>
@@ -3795,7 +3795,7 @@
           <p:cNvPr id="12" name="">
             <a:extLst xmlns:a="http://schemas.openxmlformats.org/drawingml/2006/main">
               <a:ext uri="{FF2B5EF4-FFF2-40B4-BE49-F238E27FC236}">
-                <a16:creationId xmlns:a16="http://schemas.microsoft.com/office/drawing/2014/main" id="{60A17C08-0291-4BB8-9CD6-EA7B12570B55}"/>
+                <a16:creationId xmlns:a16="http://schemas.microsoft.com/office/drawing/2014/main" id="{52FC47BC-909A-4676-B5DA-8C08CA5ED106}"/>
               </a:ext>
             </a:extLst>
           </p:cNvPr>
@@ -3825,7 +3825,7 @@
           <p:cNvPr id="2" name="">
             <a:extLst xmlns:a="http://schemas.openxmlformats.org/drawingml/2006/main">
               <a:ext uri="{FF2B5EF4-FFF2-40B4-BE49-F238E27FC236}">
-                <a16:creationId xmlns:a16="http://schemas.microsoft.com/office/drawing/2014/main" id="{E9D60992-BE13-41F4-A4FF-2895FF317E3B}"/>
+                <a16:creationId xmlns:a16="http://schemas.microsoft.com/office/drawing/2014/main" id="{9FFCB69E-8759-404E-8F7D-B5E07788423E}"/>
               </a:ext>
             </a:extLst>
           </p:cNvPr>
@@ -3835,7 +3835,7 @@
           <p:nvPr/>
         </p:nvPicPr>
         <p:blipFill>
-          <a:blip xmlns:r="http://schemas.openxmlformats.org/officeDocument/2006/relationships" xmlns:a="http://schemas.openxmlformats.org/drawingml/2006/main" r:embed="Rcfe4123ce0df497c"/>
+          <a:blip xmlns:r="http://schemas.openxmlformats.org/officeDocument/2006/relationships" xmlns:a="http://schemas.openxmlformats.org/drawingml/2006/main" r:embed="R2896c692362149b9"/>
           <a:stretch xmlns:a="http://schemas.openxmlformats.org/drawingml/2006/main"/>
         </p:blipFill>
         <p:spPr>
@@ -3853,7 +3853,7 @@
           <p:cNvPr id="3" name="">
             <a:extLst xmlns:a="http://schemas.openxmlformats.org/drawingml/2006/main">
               <a:ext uri="{FF2B5EF4-FFF2-40B4-BE49-F238E27FC236}">
-                <a16:creationId xmlns:a16="http://schemas.microsoft.com/office/drawing/2014/main" id="{768CDA7B-AE7B-4661-9687-21736A7E0F2F}"/>
+                <a16:creationId xmlns:a16="http://schemas.microsoft.com/office/drawing/2014/main" id="{ECBEBB88-520D-4540-9CEB-6B52F1FF5F20}"/>
               </a:ext>
             </a:extLst>
           </p:cNvPr>
@@ -3863,7 +3863,7 @@
           <p:nvPr/>
         </p:nvPicPr>
         <p:blipFill>
-          <a:blip xmlns:r="http://schemas.openxmlformats.org/officeDocument/2006/relationships" xmlns:a="http://schemas.openxmlformats.org/drawingml/2006/main" r:embed="R379bd318452e4983"/>
+          <a:blip xmlns:r="http://schemas.openxmlformats.org/officeDocument/2006/relationships" xmlns:a="http://schemas.openxmlformats.org/drawingml/2006/main" r:embed="R26958d57f78d4f77"/>
           <a:stretch xmlns:a="http://schemas.openxmlformats.org/drawingml/2006/main"/>
         </p:blipFill>
         <p:spPr>
@@ -3881,7 +3881,7 @@
           <p:cNvPr id="4" name="">
             <a:extLst xmlns:a="http://schemas.openxmlformats.org/drawingml/2006/main">
               <a:ext uri="{FF2B5EF4-FFF2-40B4-BE49-F238E27FC236}">
-                <a16:creationId xmlns:a16="http://schemas.microsoft.com/office/drawing/2014/main" id="{974C58B9-07FB-4959-BFA5-05853CDE11B5}"/>
+                <a16:creationId xmlns:a16="http://schemas.microsoft.com/office/drawing/2014/main" id="{0DE53793-EECC-42B0-8BC8-371032928C4F}"/>
               </a:ext>
             </a:extLst>
           </p:cNvPr>
@@ -3908,7 +3908,7 @@
             <a:noAutofit/>
           </a:bodyPr>
           <a:lstStyle xmlns:a="http://schemas.openxmlformats.org/drawingml/2006/main">
-            <a:defPPr>
+            <a:defPPr algn="l">
               <a:defRPr sz="1050" b="1">
                 <a:solidFill>
                   <a:srgbClr val="9B7744"/>
@@ -3920,7 +3920,7 @@
             </a:defPPr>
           </a:lstStyle>
           <a:p xmlns:a="http://schemas.openxmlformats.org/drawingml/2006/main">
-            <a:pPr>
+            <a:pPr algn="l">
               <a:defRPr sz="1050" b="1">
                 <a:solidFill>
                   <a:srgbClr val="9B7744"/>
@@ -3949,7 +3949,7 @@
           <p:cNvPr id="5" name="">
             <a:extLst xmlns:a="http://schemas.openxmlformats.org/drawingml/2006/main">
               <a:ext uri="{FF2B5EF4-FFF2-40B4-BE49-F238E27FC236}">
-                <a16:creationId xmlns:a16="http://schemas.microsoft.com/office/drawing/2014/main" id="{700E3104-921D-4B87-A290-4D1CA8E4053A}"/>
+                <a16:creationId xmlns:a16="http://schemas.microsoft.com/office/drawing/2014/main" id="{A656F724-0DFB-46ED-8484-C27E0813AB3E}"/>
               </a:ext>
             </a:extLst>
           </p:cNvPr>
@@ -3976,7 +3976,7 @@
             <a:noAutofit/>
           </a:bodyPr>
           <a:lstStyle xmlns:a="http://schemas.openxmlformats.org/drawingml/2006/main">
-            <a:defPPr>
+            <a:defPPr algn="l">
               <a:defRPr sz="4950" b="1">
                 <a:solidFill>
                   <a:srgbClr val="1B1D19"/>
@@ -3988,7 +3988,7 @@
             </a:defPPr>
           </a:lstStyle>
           <a:p xmlns:a="http://schemas.openxmlformats.org/drawingml/2006/main">
-            <a:pPr>
+            <a:pPr algn="l">
               <a:defRPr sz="4950" b="1">
                 <a:solidFill>
                   <a:srgbClr val="1B1D19"/>
@@ -4011,7 +4011,7 @@
             </a:r>
           </a:p>
           <a:p xmlns:a="http://schemas.openxmlformats.org/drawingml/2006/main">
-            <a:pPr>
+            <a:pPr algn="l">
               <a:defRPr sz="4950" b="1">
                 <a:solidFill>
                   <a:srgbClr val="1B1D19"/>
@@ -4034,7 +4034,7 @@
             </a:r>
           </a:p>
           <a:p xmlns:a="http://schemas.openxmlformats.org/drawingml/2006/main">
-            <a:pPr>
+            <a:pPr algn="l">
               <a:defRPr sz="4950" b="1">
                 <a:solidFill>
                   <a:srgbClr val="1B1D19"/>
@@ -4063,7 +4063,7 @@
           <p:cNvPr id="6" name="">
             <a:extLst xmlns:a="http://schemas.openxmlformats.org/drawingml/2006/main">
               <a:ext uri="{FF2B5EF4-FFF2-40B4-BE49-F238E27FC236}">
-                <a16:creationId xmlns:a16="http://schemas.microsoft.com/office/drawing/2014/main" id="{38AE132E-234C-4572-911D-B9397A9D1DB0}"/>
+                <a16:creationId xmlns:a16="http://schemas.microsoft.com/office/drawing/2014/main" id="{DC1705A2-81B4-4C73-A99F-8B746C38E81D}"/>
               </a:ext>
             </a:extLst>
           </p:cNvPr>
@@ -4090,7 +4090,7 @@
             <a:noAutofit/>
           </a:bodyPr>
           <a:lstStyle xmlns:a="http://schemas.openxmlformats.org/drawingml/2006/main">
-            <a:defPPr>
+            <a:defPPr algn="l">
               <a:defRPr sz="1800" b="0">
                 <a:solidFill>
                   <a:srgbClr val="6B7265"/>
@@ -4102,7 +4102,7 @@
             </a:defPPr>
           </a:lstStyle>
           <a:p xmlns:a="http://schemas.openxmlformats.org/drawingml/2006/main">
-            <a:pPr>
+            <a:pPr algn="l">
               <a:defRPr sz="1800" b="0">
                 <a:solidFill>
                   <a:srgbClr val="6B7265"/>
@@ -4131,7 +4131,7 @@
           <p:cNvPr id="7" name="">
             <a:extLst xmlns:a="http://schemas.openxmlformats.org/drawingml/2006/main">
               <a:ext uri="{FF2B5EF4-FFF2-40B4-BE49-F238E27FC236}">
-                <a16:creationId xmlns:a16="http://schemas.microsoft.com/office/drawing/2014/main" id="{088CEF62-5682-4B76-89B9-094A7A600652}"/>
+                <a16:creationId xmlns:a16="http://schemas.microsoft.com/office/drawing/2014/main" id="{F51C4B22-FC8A-4DB1-B6A8-A3A9E3C4CB36}"/>
               </a:ext>
             </a:extLst>
           </p:cNvPr>
@@ -4161,7 +4161,7 @@
           <p:cNvPr id="8" name="">
             <a:extLst xmlns:a="http://schemas.openxmlformats.org/drawingml/2006/main">
               <a:ext uri="{FF2B5EF4-FFF2-40B4-BE49-F238E27FC236}">
-                <a16:creationId xmlns:a16="http://schemas.microsoft.com/office/drawing/2014/main" id="{87602927-C006-42BD-9425-B280D4F64674}"/>
+                <a16:creationId xmlns:a16="http://schemas.microsoft.com/office/drawing/2014/main" id="{3846B4D2-64EE-43AF-9A2C-20F7EC9F6B6C}"/>
               </a:ext>
             </a:extLst>
           </p:cNvPr>
@@ -4188,7 +4188,7 @@
             <a:noAutofit/>
           </a:bodyPr>
           <a:lstStyle xmlns:a="http://schemas.openxmlformats.org/drawingml/2006/main">
-            <a:defPPr>
+            <a:defPPr algn="l">
               <a:defRPr sz="1800" b="1">
                 <a:solidFill>
                   <a:srgbClr val="1B1D19"/>
@@ -4200,7 +4200,7 @@
             </a:defPPr>
           </a:lstStyle>
           <a:p xmlns:a="http://schemas.openxmlformats.org/drawingml/2006/main">
-            <a:pPr>
+            <a:pPr algn="l">
               <a:defRPr sz="1800" b="1">
                 <a:solidFill>
                   <a:srgbClr val="1B1D19"/>
@@ -4229,7 +4229,7 @@
           <p:cNvPr id="9" name="">
             <a:extLst xmlns:a="http://schemas.openxmlformats.org/drawingml/2006/main">
               <a:ext uri="{FF2B5EF4-FFF2-40B4-BE49-F238E27FC236}">
-                <a16:creationId xmlns:a16="http://schemas.microsoft.com/office/drawing/2014/main" id="{461B9079-3623-40F3-B4BF-0A256C9B39B0}"/>
+                <a16:creationId xmlns:a16="http://schemas.microsoft.com/office/drawing/2014/main" id="{9FE8D573-79AD-4FAA-8BA9-3F68B2FBBCA3}"/>
               </a:ext>
             </a:extLst>
           </p:cNvPr>
@@ -4256,7 +4256,7 @@
             <a:noAutofit/>
           </a:bodyPr>
           <a:lstStyle xmlns:a="http://schemas.openxmlformats.org/drawingml/2006/main">
-            <a:defPPr>
+            <a:defPPr algn="l">
               <a:defRPr sz="1200" b="0">
                 <a:solidFill>
                   <a:srgbClr val="6B7265"/>
@@ -4268,7 +4268,7 @@
             </a:defPPr>
           </a:lstStyle>
           <a:p xmlns:a="http://schemas.openxmlformats.org/drawingml/2006/main">
-            <a:pPr>
+            <a:pPr algn="l">
               <a:defRPr sz="1200" b="0">
                 <a:solidFill>
                   <a:srgbClr val="6B7265"/>
@@ -4297,7 +4297,7 @@
           <p:cNvPr id="10" name="">
             <a:extLst xmlns:a="http://schemas.openxmlformats.org/drawingml/2006/main">
               <a:ext uri="{FF2B5EF4-FFF2-40B4-BE49-F238E27FC236}">
-                <a16:creationId xmlns:a16="http://schemas.microsoft.com/office/drawing/2014/main" id="{7B527F81-49AF-4A38-8077-9DC953FD8AF8}"/>
+                <a16:creationId xmlns:a16="http://schemas.microsoft.com/office/drawing/2014/main" id="{DCCB7398-DC6B-4C10-90EC-75B68A1CFF7D}"/>
               </a:ext>
             </a:extLst>
           </p:cNvPr>
@@ -4324,7 +4324,7 @@
             <a:noAutofit/>
           </a:bodyPr>
           <a:lstStyle xmlns:a="http://schemas.openxmlformats.org/drawingml/2006/main">
-            <a:defPPr>
+            <a:defPPr algn="l">
               <a:defRPr sz="975" b="0">
                 <a:solidFill>
                   <a:srgbClr val="858B7E"/>
@@ -4336,7 +4336,7 @@
             </a:defPPr>
           </a:lstStyle>
           <a:p xmlns:a="http://schemas.openxmlformats.org/drawingml/2006/main">
-            <a:pPr>
+            <a:pPr algn="l">
               <a:defRPr sz="975" b="0">
                 <a:solidFill>
                   <a:srgbClr val="858B7E"/>
@@ -4365,7 +4365,7 @@
           <p:cNvPr id="11" name="">
             <a:extLst xmlns:a="http://schemas.openxmlformats.org/drawingml/2006/main">
               <a:ext uri="{FF2B5EF4-FFF2-40B4-BE49-F238E27FC236}">
-                <a16:creationId xmlns:a16="http://schemas.microsoft.com/office/drawing/2014/main" id="{67A76F45-FBE8-48C3-BDC7-1F569099100E}"/>
+                <a16:creationId xmlns:a16="http://schemas.microsoft.com/office/drawing/2014/main" id="{E4899F88-F611-4927-8576-DA52F50E6009}"/>
               </a:ext>
             </a:extLst>
           </p:cNvPr>
@@ -4392,7 +4392,7 @@
             <a:noAutofit/>
           </a:bodyPr>
           <a:lstStyle xmlns:a="http://schemas.openxmlformats.org/drawingml/2006/main">
-            <a:defPPr>
+            <a:defPPr algn="l">
               <a:defRPr sz="975" b="0">
                 <a:solidFill>
                   <a:srgbClr val="858B7E"/>
@@ -4404,7 +4404,7 @@
             </a:defPPr>
           </a:lstStyle>
           <a:p xmlns:a="http://schemas.openxmlformats.org/drawingml/2006/main">
-            <a:pPr>
+            <a:pPr algn="l">
               <a:defRPr sz="975" b="0">
                 <a:solidFill>
                   <a:srgbClr val="858B7E"/>
@@ -4431,7 +4431,7 @@
     </p:spTree>
     <p:extLst>
       <p:ext uri="{BB962C8B-B14F-4D97-AF65-F5344CB8AC3E}">
-        <p14:creationId xmlns:p14="http://schemas.microsoft.com/office/powerpoint/2010/main" val="723943149"/>
+        <p14:creationId xmlns:p14="http://schemas.microsoft.com/office/powerpoint/2010/main" val="84154455"/>
       </p:ext>
     </p:extLst>
   </p:cSld>
@@ -4459,22 +4459,22 @@
       </p:grpSpPr>
       <p:sp>
         <p:nvSpPr>
-          <p:cNvPr id="7" name="">
-            <a:extLst xmlns:a="http://schemas.openxmlformats.org/drawingml/2006/main">
-              <a:ext uri="{FF2B5EF4-FFF2-40B4-BE49-F238E27FC236}">
-                <a16:creationId xmlns:a16="http://schemas.microsoft.com/office/drawing/2014/main" id="{72BE3D15-ACE0-4D5E-83F1-BDDFEB081C82}"/>
-              </a:ext>
-            </a:extLst>
-          </p:cNvPr>
-          <p:cNvSpPr>
-            <a:spLocks xmlns:a="http://schemas.openxmlformats.org/drawingml/2006/main" noGrp="1"/>
-          </p:cNvSpPr>
-          <p:nvPr/>
-        </p:nvSpPr>
-        <p:spPr>
-          <a:xfrm xmlns:a="http://schemas.openxmlformats.org/drawingml/2006/main">
-            <a:off x="685800" y="619125"/>
-            <a:ext cx="10668000" cy="247650"/>
+          <p:cNvPr id="6" name="">
+            <a:extLst xmlns:a="http://schemas.openxmlformats.org/drawingml/2006/main">
+              <a:ext uri="{FF2B5EF4-FFF2-40B4-BE49-F238E27FC236}">
+                <a16:creationId xmlns:a16="http://schemas.microsoft.com/office/drawing/2014/main" id="{4B3D57BD-51F6-4C5D-A45A-C790EEC67A2C}"/>
+              </a:ext>
+            </a:extLst>
+          </p:cNvPr>
+          <p:cNvSpPr>
+            <a:spLocks xmlns:a="http://schemas.openxmlformats.org/drawingml/2006/main" noGrp="1"/>
+          </p:cNvSpPr>
+          <p:nvPr/>
+        </p:nvSpPr>
+        <p:spPr>
+          <a:xfrm xmlns:a="http://schemas.openxmlformats.org/drawingml/2006/main">
+            <a:off x="914400" y="133350"/>
+            <a:ext cx="10363200" cy="152400"/>
           </a:xfrm>
           <a:prstGeom xmlns:a="http://schemas.openxmlformats.org/drawingml/2006/main" prst="rect">
             <a:avLst/>
@@ -4489,8 +4489,8 @@
             <a:noAutofit/>
           </a:bodyPr>
           <a:lstStyle xmlns:a="http://schemas.openxmlformats.org/drawingml/2006/main">
-            <a:defPPr>
-              <a:defRPr sz="1050" b="1">
+            <a:defPPr algn="l">
+              <a:defRPr sz="825" b="1">
                 <a:solidFill>
                   <a:srgbClr val="9B7744"/>
                 </a:solidFill>
@@ -4501,8 +4501,8 @@
             </a:defPPr>
           </a:lstStyle>
           <a:p xmlns:a="http://schemas.openxmlformats.org/drawingml/2006/main">
-            <a:pPr>
-              <a:defRPr sz="1050" b="1">
+            <a:pPr algn="l">
+              <a:defRPr sz="825" b="1">
                 <a:solidFill>
                   <a:srgbClr val="9B7744"/>
                 </a:solidFill>
@@ -4512,7 +4512,7 @@
               </a:defRPr>
             </a:pPr>
             <a:r>
-              <a:rPr sz="1050" b="1">
+              <a:rPr sz="825" b="1">
                 <a:solidFill>
                   <a:srgbClr val="9B7744"/>
                 </a:solidFill>
@@ -4530,19 +4530,19 @@
           <p:cNvPr id="2" name="">
             <a:extLst xmlns:a="http://schemas.openxmlformats.org/drawingml/2006/main">
               <a:ext uri="{FF2B5EF4-FFF2-40B4-BE49-F238E27FC236}">
-                <a16:creationId xmlns:a16="http://schemas.microsoft.com/office/drawing/2014/main" id="{038D4BD8-41E3-43D0-84A8-6AD3BA001BC3}"/>
-              </a:ext>
-            </a:extLst>
-          </p:cNvPr>
-          <p:cNvSpPr>
-            <a:spLocks xmlns:a="http://schemas.openxmlformats.org/drawingml/2006/main" noGrp="1"/>
-          </p:cNvSpPr>
-          <p:nvPr/>
-        </p:nvSpPr>
-        <p:spPr>
-          <a:xfrm xmlns:a="http://schemas.openxmlformats.org/drawingml/2006/main">
-            <a:off x="685800" y="1047750"/>
-            <a:ext cx="10820400" cy="1085850"/>
+                <a16:creationId xmlns:a16="http://schemas.microsoft.com/office/drawing/2014/main" id="{F82464B3-5E6E-4D7D-82C1-4E265536E151}"/>
+              </a:ext>
+            </a:extLst>
+          </p:cNvPr>
+          <p:cNvSpPr>
+            <a:spLocks xmlns:a="http://schemas.openxmlformats.org/drawingml/2006/main" noGrp="1"/>
+          </p:cNvSpPr>
+          <p:nvPr/>
+        </p:nvSpPr>
+        <p:spPr>
+          <a:xfrm xmlns:a="http://schemas.openxmlformats.org/drawingml/2006/main">
+            <a:off x="914400" y="304800"/>
+            <a:ext cx="10363200" cy="381000"/>
           </a:xfrm>
           <a:prstGeom xmlns:a="http://schemas.openxmlformats.org/drawingml/2006/main" prst="rect">
             <a:avLst/>
@@ -4557,8 +4557,8 @@
             <a:noAutofit/>
           </a:bodyPr>
           <a:lstStyle xmlns:a="http://schemas.openxmlformats.org/drawingml/2006/main">
-            <a:defPPr>
-              <a:defRPr sz="3450" b="1">
+            <a:defPPr algn="l">
+              <a:defRPr sz="2250" b="1">
                 <a:solidFill>
                   <a:srgbClr val="1B1D19"/>
                 </a:solidFill>
@@ -4569,8 +4569,8 @@
             </a:defPPr>
           </a:lstStyle>
           <a:p xmlns:a="http://schemas.openxmlformats.org/drawingml/2006/main">
-            <a:pPr>
-              <a:defRPr sz="3450" b="1">
+            <a:pPr algn="l">
+              <a:defRPr sz="2250" b="1">
                 <a:solidFill>
                   <a:srgbClr val="1B1D19"/>
                 </a:solidFill>
@@ -4580,7 +4580,7 @@
               </a:defRPr>
             </a:pPr>
             <a:r>
-              <a:rPr sz="3450" b="1">
+              <a:rPr sz="2250" b="1">
                 <a:solidFill>
                   <a:srgbClr val="1B1D19"/>
                 </a:solidFill>
@@ -4598,25 +4598,25 @@
           <p:cNvPr id="3" name="">
             <a:extLst xmlns:a="http://schemas.openxmlformats.org/drawingml/2006/main">
               <a:ext uri="{FF2B5EF4-FFF2-40B4-BE49-F238E27FC236}">
-                <a16:creationId xmlns:a16="http://schemas.microsoft.com/office/drawing/2014/main" id="{B8D191B4-66E3-4D73-A05E-38C10DFF53FF}"/>
-              </a:ext>
-            </a:extLst>
-          </p:cNvPr>
-          <p:cNvSpPr>
-            <a:spLocks xmlns:a="http://schemas.openxmlformats.org/drawingml/2006/main" noGrp="1"/>
-          </p:cNvSpPr>
-          <p:nvPr/>
-        </p:nvSpPr>
-        <p:spPr>
-          <a:xfrm xmlns:a="http://schemas.openxmlformats.org/drawingml/2006/main">
-            <a:off x="685800" y="2476500"/>
-            <a:ext cx="10820400" cy="3524250"/>
+                <a16:creationId xmlns:a16="http://schemas.microsoft.com/office/drawing/2014/main" id="{D4F6AB68-7854-4E4F-97B8-F030DA168BDB}"/>
+              </a:ext>
+            </a:extLst>
+          </p:cNvPr>
+          <p:cNvSpPr>
+            <a:spLocks xmlns:a="http://schemas.openxmlformats.org/drawingml/2006/main" noGrp="1"/>
+          </p:cNvSpPr>
+          <p:nvPr/>
+        </p:nvSpPr>
+        <p:spPr>
+          <a:xfrm xmlns:a="http://schemas.openxmlformats.org/drawingml/2006/main">
+            <a:off x="914400" y="723900"/>
+            <a:ext cx="10363200" cy="5829300"/>
           </a:xfrm>
           <a:prstGeom xmlns:a="http://schemas.openxmlformats.org/drawingml/2006/main" prst="rect">
             <a:avLst/>
           </a:prstGeom>
           <a:solidFill xmlns:a="http://schemas.openxmlformats.org/drawingml/2006/main">
-            <a:srgbClr val="F7F7F3"/>
+            <a:srgbClr val="F4F3EE"/>
           </a:solidFill>
           <a:ln xmlns:a="http://schemas.openxmlformats.org/drawingml/2006/main" w="0">
             <a:noFill/>
@@ -4628,49 +4628,19 @@
           <p:cNvPr id="4" name="">
             <a:extLst xmlns:a="http://schemas.openxmlformats.org/drawingml/2006/main">
               <a:ext uri="{FF2B5EF4-FFF2-40B4-BE49-F238E27FC236}">
-                <a16:creationId xmlns:a16="http://schemas.microsoft.com/office/drawing/2014/main" id="{15C9CFD1-0437-4E56-812E-2435E8CE7B25}"/>
-              </a:ext>
-            </a:extLst>
-          </p:cNvPr>
-          <p:cNvSpPr>
-            <a:spLocks xmlns:a="http://schemas.openxmlformats.org/drawingml/2006/main" noGrp="1"/>
-          </p:cNvSpPr>
-          <p:nvPr/>
-        </p:nvSpPr>
-        <p:spPr>
-          <a:xfrm xmlns:a="http://schemas.openxmlformats.org/drawingml/2006/main">
-            <a:off x="685800" y="2476500"/>
-            <a:ext cx="10820400" cy="9525"/>
-          </a:xfrm>
-          <a:prstGeom xmlns:a="http://schemas.openxmlformats.org/drawingml/2006/main" prst="rect">
-            <a:avLst/>
-          </a:prstGeom>
-          <a:solidFill xmlns:a="http://schemas.openxmlformats.org/drawingml/2006/main">
-            <a:srgbClr val="DEDFD6"/>
-          </a:solidFill>
-          <a:ln xmlns:a="http://schemas.openxmlformats.org/drawingml/2006/main" w="0">
-            <a:noFill/>
-          </a:ln>
-        </p:spPr>
-      </p:sp>
-      <p:sp>
-        <p:nvSpPr>
-          <p:cNvPr id="5" name="">
-            <a:extLst xmlns:a="http://schemas.openxmlformats.org/drawingml/2006/main">
-              <a:ext uri="{FF2B5EF4-FFF2-40B4-BE49-F238E27FC236}">
-                <a16:creationId xmlns:a16="http://schemas.microsoft.com/office/drawing/2014/main" id="{260AC76E-F290-41E4-A8D1-986817883B4E}"/>
-              </a:ext>
-            </a:extLst>
-          </p:cNvPr>
-          <p:cNvSpPr>
-            <a:spLocks xmlns:a="http://schemas.openxmlformats.org/drawingml/2006/main" noGrp="1"/>
-          </p:cNvSpPr>
-          <p:nvPr/>
-        </p:nvSpPr>
-        <p:spPr>
-          <a:xfrm xmlns:a="http://schemas.openxmlformats.org/drawingml/2006/main">
-            <a:off x="685800" y="6448425"/>
-            <a:ext cx="10191750" cy="228600"/>
+                <a16:creationId xmlns:a16="http://schemas.microsoft.com/office/drawing/2014/main" id="{E629B1D3-DE24-4EC4-9B99-9EED144C6D93}"/>
+              </a:ext>
+            </a:extLst>
+          </p:cNvPr>
+          <p:cNvSpPr>
+            <a:spLocks xmlns:a="http://schemas.openxmlformats.org/drawingml/2006/main" noGrp="1"/>
+          </p:cNvSpPr>
+          <p:nvPr/>
+        </p:nvSpPr>
+        <p:spPr>
+          <a:xfrm xmlns:a="http://schemas.openxmlformats.org/drawingml/2006/main">
+            <a:off x="914400" y="6667500"/>
+            <a:ext cx="9525000" cy="152400"/>
           </a:xfrm>
           <a:prstGeom xmlns:a="http://schemas.openxmlformats.org/drawingml/2006/main" prst="rect">
             <a:avLst/>
@@ -4685,8 +4655,8 @@
             <a:noAutofit/>
           </a:bodyPr>
           <a:lstStyle xmlns:a="http://schemas.openxmlformats.org/drawingml/2006/main">
-            <a:defPPr>
-              <a:defRPr sz="975" b="0">
+            <a:defPPr algn="l">
+              <a:defRPr sz="825" b="0">
                 <a:solidFill>
                   <a:srgbClr val="858B7E"/>
                 </a:solidFill>
@@ -4697,8 +4667,8 @@
             </a:defPPr>
           </a:lstStyle>
           <a:p xmlns:a="http://schemas.openxmlformats.org/drawingml/2006/main">
-            <a:pPr>
-              <a:defRPr sz="975" b="0">
+            <a:pPr algn="l">
+              <a:defRPr sz="825" b="0">
                 <a:solidFill>
                   <a:srgbClr val="858B7E"/>
                 </a:solidFill>
@@ -4708,7 +4678,7 @@
               </a:defRPr>
             </a:pPr>
             <a:r>
-              <a:rPr sz="975" b="0">
+              <a:rPr sz="825" b="0">
                 <a:solidFill>
                   <a:srgbClr val="858B7E"/>
                 </a:solidFill>
@@ -4723,22 +4693,22 @@
       </p:sp>
       <p:sp>
         <p:nvSpPr>
-          <p:cNvPr id="6" name="">
-            <a:extLst xmlns:a="http://schemas.openxmlformats.org/drawingml/2006/main">
-              <a:ext uri="{FF2B5EF4-FFF2-40B4-BE49-F238E27FC236}">
-                <a16:creationId xmlns:a16="http://schemas.microsoft.com/office/drawing/2014/main" id="{F8B96786-0866-4819-BC45-45632059886B}"/>
-              </a:ext>
-            </a:extLst>
-          </p:cNvPr>
-          <p:cNvSpPr>
-            <a:spLocks xmlns:a="http://schemas.openxmlformats.org/drawingml/2006/main" noGrp="1"/>
-          </p:cNvSpPr>
-          <p:nvPr/>
-        </p:nvSpPr>
-        <p:spPr>
-          <a:xfrm xmlns:a="http://schemas.openxmlformats.org/drawingml/2006/main">
-            <a:off x="11134725" y="6448425"/>
-            <a:ext cx="371475" cy="228600"/>
+          <p:cNvPr id="5" name="">
+            <a:extLst xmlns:a="http://schemas.openxmlformats.org/drawingml/2006/main">
+              <a:ext uri="{FF2B5EF4-FFF2-40B4-BE49-F238E27FC236}">
+                <a16:creationId xmlns:a16="http://schemas.microsoft.com/office/drawing/2014/main" id="{09CC2E0A-5DD9-47E6-9500-E3DA3DE4227C}"/>
+              </a:ext>
+            </a:extLst>
+          </p:cNvPr>
+          <p:cNvSpPr>
+            <a:spLocks xmlns:a="http://schemas.openxmlformats.org/drawingml/2006/main" noGrp="1"/>
+          </p:cNvSpPr>
+          <p:nvPr/>
+        </p:nvSpPr>
+        <p:spPr>
+          <a:xfrm xmlns:a="http://schemas.openxmlformats.org/drawingml/2006/main">
+            <a:off x="11049000" y="6667500"/>
+            <a:ext cx="228600" cy="152400"/>
           </a:xfrm>
           <a:prstGeom xmlns:a="http://schemas.openxmlformats.org/drawingml/2006/main" prst="rect">
             <a:avLst/>
@@ -4753,8 +4723,8 @@
             <a:noAutofit/>
           </a:bodyPr>
           <a:lstStyle xmlns:a="http://schemas.openxmlformats.org/drawingml/2006/main">
-            <a:defPPr>
-              <a:defRPr sz="975" b="0">
+            <a:defPPr algn="l">
+              <a:defRPr sz="825" b="0">
                 <a:solidFill>
                   <a:srgbClr val="858B7E"/>
                 </a:solidFill>
@@ -4765,8 +4735,8 @@
             </a:defPPr>
           </a:lstStyle>
           <a:p xmlns:a="http://schemas.openxmlformats.org/drawingml/2006/main">
-            <a:pPr>
-              <a:defRPr sz="975" b="0">
+            <a:pPr algn="l">
+              <a:defRPr sz="825" b="0">
                 <a:solidFill>
                   <a:srgbClr val="858B7E"/>
                 </a:solidFill>
@@ -4776,7 +4746,7 @@
               </a:defRPr>
             </a:pPr>
             <a:r>
-              <a:rPr sz="975" b="0">
+              <a:rPr sz="825" b="0">
                 <a:solidFill>
                   <a:srgbClr val="858B7E"/>
                 </a:solidFill>
@@ -4792,7 +4762,7 @@
     </p:spTree>
     <p:extLst>
       <p:ext uri="{BB962C8B-B14F-4D97-AF65-F5344CB8AC3E}">
-        <p14:creationId xmlns:p14="http://schemas.microsoft.com/office/powerpoint/2010/main" val="658523851"/>
+        <p14:creationId xmlns:p14="http://schemas.microsoft.com/office/powerpoint/2010/main" val="913285162"/>
       </p:ext>
     </p:extLst>
   </p:cSld>
@@ -4820,22 +4790,22 @@
       </p:grpSpPr>
       <p:sp>
         <p:nvSpPr>
-          <p:cNvPr id="7" name="">
-            <a:extLst xmlns:a="http://schemas.openxmlformats.org/drawingml/2006/main">
-              <a:ext uri="{FF2B5EF4-FFF2-40B4-BE49-F238E27FC236}">
-                <a16:creationId xmlns:a16="http://schemas.microsoft.com/office/drawing/2014/main" id="{975012B8-D0FF-494A-8DCD-81F0BF8AB51A}"/>
-              </a:ext>
-            </a:extLst>
-          </p:cNvPr>
-          <p:cNvSpPr>
-            <a:spLocks xmlns:a="http://schemas.openxmlformats.org/drawingml/2006/main" noGrp="1"/>
-          </p:cNvSpPr>
-          <p:nvPr/>
-        </p:nvSpPr>
-        <p:spPr>
-          <a:xfrm xmlns:a="http://schemas.openxmlformats.org/drawingml/2006/main">
-            <a:off x="685800" y="619125"/>
-            <a:ext cx="10668000" cy="247650"/>
+          <p:cNvPr id="6" name="">
+            <a:extLst xmlns:a="http://schemas.openxmlformats.org/drawingml/2006/main">
+              <a:ext uri="{FF2B5EF4-FFF2-40B4-BE49-F238E27FC236}">
+                <a16:creationId xmlns:a16="http://schemas.microsoft.com/office/drawing/2014/main" id="{B948F76B-13AF-4998-A6EB-DE7EF5FC1BF5}"/>
+              </a:ext>
+            </a:extLst>
+          </p:cNvPr>
+          <p:cNvSpPr>
+            <a:spLocks xmlns:a="http://schemas.openxmlformats.org/drawingml/2006/main" noGrp="1"/>
+          </p:cNvSpPr>
+          <p:nvPr/>
+        </p:nvSpPr>
+        <p:spPr>
+          <a:xfrm xmlns:a="http://schemas.openxmlformats.org/drawingml/2006/main">
+            <a:off x="914400" y="133350"/>
+            <a:ext cx="10363200" cy="152400"/>
           </a:xfrm>
           <a:prstGeom xmlns:a="http://schemas.openxmlformats.org/drawingml/2006/main" prst="rect">
             <a:avLst/>
@@ -4850,8 +4820,8 @@
             <a:noAutofit/>
           </a:bodyPr>
           <a:lstStyle xmlns:a="http://schemas.openxmlformats.org/drawingml/2006/main">
-            <a:defPPr>
-              <a:defRPr sz="1050" b="1">
+            <a:defPPr algn="l">
+              <a:defRPr sz="825" b="1">
                 <a:solidFill>
                   <a:srgbClr val="9B7744"/>
                 </a:solidFill>
@@ -4862,8 +4832,8 @@
             </a:defPPr>
           </a:lstStyle>
           <a:p xmlns:a="http://schemas.openxmlformats.org/drawingml/2006/main">
-            <a:pPr>
-              <a:defRPr sz="1050" b="1">
+            <a:pPr algn="l">
+              <a:defRPr sz="825" b="1">
                 <a:solidFill>
                   <a:srgbClr val="9B7744"/>
                 </a:solidFill>
@@ -4873,7 +4843,7 @@
               </a:defRPr>
             </a:pPr>
             <a:r>
-              <a:rPr sz="1050" b="1">
+              <a:rPr sz="825" b="1">
                 <a:solidFill>
                   <a:srgbClr val="9B7744"/>
                 </a:solidFill>
@@ -4891,19 +4861,19 @@
           <p:cNvPr id="2" name="">
             <a:extLst xmlns:a="http://schemas.openxmlformats.org/drawingml/2006/main">
               <a:ext uri="{FF2B5EF4-FFF2-40B4-BE49-F238E27FC236}">
-                <a16:creationId xmlns:a16="http://schemas.microsoft.com/office/drawing/2014/main" id="{E1C36471-6E9B-4FD8-B72E-9D39D714D517}"/>
-              </a:ext>
-            </a:extLst>
-          </p:cNvPr>
-          <p:cNvSpPr>
-            <a:spLocks xmlns:a="http://schemas.openxmlformats.org/drawingml/2006/main" noGrp="1"/>
-          </p:cNvSpPr>
-          <p:nvPr/>
-        </p:nvSpPr>
-        <p:spPr>
-          <a:xfrm xmlns:a="http://schemas.openxmlformats.org/drawingml/2006/main">
-            <a:off x="685800" y="1047750"/>
-            <a:ext cx="10820400" cy="1085850"/>
+                <a16:creationId xmlns:a16="http://schemas.microsoft.com/office/drawing/2014/main" id="{617B11E6-112E-4B64-8EA0-59E36EAF4231}"/>
+              </a:ext>
+            </a:extLst>
+          </p:cNvPr>
+          <p:cNvSpPr>
+            <a:spLocks xmlns:a="http://schemas.openxmlformats.org/drawingml/2006/main" noGrp="1"/>
+          </p:cNvSpPr>
+          <p:nvPr/>
+        </p:nvSpPr>
+        <p:spPr>
+          <a:xfrm xmlns:a="http://schemas.openxmlformats.org/drawingml/2006/main">
+            <a:off x="914400" y="304800"/>
+            <a:ext cx="10363200" cy="381000"/>
           </a:xfrm>
           <a:prstGeom xmlns:a="http://schemas.openxmlformats.org/drawingml/2006/main" prst="rect">
             <a:avLst/>
@@ -4918,8 +4888,8 @@
             <a:noAutofit/>
           </a:bodyPr>
           <a:lstStyle xmlns:a="http://schemas.openxmlformats.org/drawingml/2006/main">
-            <a:defPPr>
-              <a:defRPr sz="3450" b="1">
+            <a:defPPr algn="l">
+              <a:defRPr sz="2250" b="1">
                 <a:solidFill>
                   <a:srgbClr val="1B1D19"/>
                 </a:solidFill>
@@ -4930,8 +4900,8 @@
             </a:defPPr>
           </a:lstStyle>
           <a:p xmlns:a="http://schemas.openxmlformats.org/drawingml/2006/main">
-            <a:pPr>
-              <a:defRPr sz="3450" b="1">
+            <a:pPr algn="l">
+              <a:defRPr sz="2250" b="1">
                 <a:solidFill>
                   <a:srgbClr val="1B1D19"/>
                 </a:solidFill>
@@ -4941,7 +4911,7 @@
               </a:defRPr>
             </a:pPr>
             <a:r>
-              <a:rPr sz="3450" b="1">
+              <a:rPr sz="2250" b="1">
                 <a:solidFill>
                   <a:srgbClr val="1B1D19"/>
                 </a:solidFill>
@@ -4959,25 +4929,25 @@
           <p:cNvPr id="3" name="">
             <a:extLst xmlns:a="http://schemas.openxmlformats.org/drawingml/2006/main">
               <a:ext uri="{FF2B5EF4-FFF2-40B4-BE49-F238E27FC236}">
-                <a16:creationId xmlns:a16="http://schemas.microsoft.com/office/drawing/2014/main" id="{2EDDAC19-9688-4730-B9E6-337892C56B41}"/>
-              </a:ext>
-            </a:extLst>
-          </p:cNvPr>
-          <p:cNvSpPr>
-            <a:spLocks xmlns:a="http://schemas.openxmlformats.org/drawingml/2006/main" noGrp="1"/>
-          </p:cNvSpPr>
-          <p:nvPr/>
-        </p:nvSpPr>
-        <p:spPr>
-          <a:xfrm xmlns:a="http://schemas.openxmlformats.org/drawingml/2006/main">
-            <a:off x="685800" y="2476500"/>
-            <a:ext cx="10820400" cy="3524250"/>
+                <a16:creationId xmlns:a16="http://schemas.microsoft.com/office/drawing/2014/main" id="{C011A6B2-BEF1-47E5-8362-4588107CA265}"/>
+              </a:ext>
+            </a:extLst>
+          </p:cNvPr>
+          <p:cNvSpPr>
+            <a:spLocks xmlns:a="http://schemas.openxmlformats.org/drawingml/2006/main" noGrp="1"/>
+          </p:cNvSpPr>
+          <p:nvPr/>
+        </p:nvSpPr>
+        <p:spPr>
+          <a:xfrm xmlns:a="http://schemas.openxmlformats.org/drawingml/2006/main">
+            <a:off x="914400" y="723900"/>
+            <a:ext cx="10363200" cy="5829300"/>
           </a:xfrm>
           <a:prstGeom xmlns:a="http://schemas.openxmlformats.org/drawingml/2006/main" prst="rect">
             <a:avLst/>
           </a:prstGeom>
           <a:solidFill xmlns:a="http://schemas.openxmlformats.org/drawingml/2006/main">
-            <a:srgbClr val="F7F7F3"/>
+            <a:srgbClr val="F4F3EE"/>
           </a:solidFill>
           <a:ln xmlns:a="http://schemas.openxmlformats.org/drawingml/2006/main" w="0">
             <a:noFill/>
@@ -4989,49 +4959,19 @@
           <p:cNvPr id="4" name="">
             <a:extLst xmlns:a="http://schemas.openxmlformats.org/drawingml/2006/main">
               <a:ext uri="{FF2B5EF4-FFF2-40B4-BE49-F238E27FC236}">
-                <a16:creationId xmlns:a16="http://schemas.microsoft.com/office/drawing/2014/main" id="{BF0A7C99-99DE-42BB-947A-4A271945DB81}"/>
-              </a:ext>
-            </a:extLst>
-          </p:cNvPr>
-          <p:cNvSpPr>
-            <a:spLocks xmlns:a="http://schemas.openxmlformats.org/drawingml/2006/main" noGrp="1"/>
-          </p:cNvSpPr>
-          <p:nvPr/>
-        </p:nvSpPr>
-        <p:spPr>
-          <a:xfrm xmlns:a="http://schemas.openxmlformats.org/drawingml/2006/main">
-            <a:off x="685800" y="2476500"/>
-            <a:ext cx="10820400" cy="9525"/>
-          </a:xfrm>
-          <a:prstGeom xmlns:a="http://schemas.openxmlformats.org/drawingml/2006/main" prst="rect">
-            <a:avLst/>
-          </a:prstGeom>
-          <a:solidFill xmlns:a="http://schemas.openxmlformats.org/drawingml/2006/main">
-            <a:srgbClr val="DEDFD6"/>
-          </a:solidFill>
-          <a:ln xmlns:a="http://schemas.openxmlformats.org/drawingml/2006/main" w="0">
-            <a:noFill/>
-          </a:ln>
-        </p:spPr>
-      </p:sp>
-      <p:sp>
-        <p:nvSpPr>
-          <p:cNvPr id="5" name="">
-            <a:extLst xmlns:a="http://schemas.openxmlformats.org/drawingml/2006/main">
-              <a:ext uri="{FF2B5EF4-FFF2-40B4-BE49-F238E27FC236}">
-                <a16:creationId xmlns:a16="http://schemas.microsoft.com/office/drawing/2014/main" id="{DDF221EA-67D9-4240-8407-80A5B3485F04}"/>
-              </a:ext>
-            </a:extLst>
-          </p:cNvPr>
-          <p:cNvSpPr>
-            <a:spLocks xmlns:a="http://schemas.openxmlformats.org/drawingml/2006/main" noGrp="1"/>
-          </p:cNvSpPr>
-          <p:nvPr/>
-        </p:nvSpPr>
-        <p:spPr>
-          <a:xfrm xmlns:a="http://schemas.openxmlformats.org/drawingml/2006/main">
-            <a:off x="685800" y="6448425"/>
-            <a:ext cx="10191750" cy="228600"/>
+                <a16:creationId xmlns:a16="http://schemas.microsoft.com/office/drawing/2014/main" id="{CD4B71A4-92B3-47EF-810F-4E7A62655147}"/>
+              </a:ext>
+            </a:extLst>
+          </p:cNvPr>
+          <p:cNvSpPr>
+            <a:spLocks xmlns:a="http://schemas.openxmlformats.org/drawingml/2006/main" noGrp="1"/>
+          </p:cNvSpPr>
+          <p:nvPr/>
+        </p:nvSpPr>
+        <p:spPr>
+          <a:xfrm xmlns:a="http://schemas.openxmlformats.org/drawingml/2006/main">
+            <a:off x="914400" y="6667500"/>
+            <a:ext cx="9525000" cy="152400"/>
           </a:xfrm>
           <a:prstGeom xmlns:a="http://schemas.openxmlformats.org/drawingml/2006/main" prst="rect">
             <a:avLst/>
@@ -5046,8 +4986,8 @@
             <a:noAutofit/>
           </a:bodyPr>
           <a:lstStyle xmlns:a="http://schemas.openxmlformats.org/drawingml/2006/main">
-            <a:defPPr>
-              <a:defRPr sz="975" b="0">
+            <a:defPPr algn="l">
+              <a:defRPr sz="825" b="0">
                 <a:solidFill>
                   <a:srgbClr val="858B7E"/>
                 </a:solidFill>
@@ -5058,8 +4998,8 @@
             </a:defPPr>
           </a:lstStyle>
           <a:p xmlns:a="http://schemas.openxmlformats.org/drawingml/2006/main">
-            <a:pPr>
-              <a:defRPr sz="975" b="0">
+            <a:pPr algn="l">
+              <a:defRPr sz="825" b="0">
                 <a:solidFill>
                   <a:srgbClr val="858B7E"/>
                 </a:solidFill>
@@ -5069,7 +5009,7 @@
               </a:defRPr>
             </a:pPr>
             <a:r>
-              <a:rPr sz="975" b="0">
+              <a:rPr sz="825" b="0">
                 <a:solidFill>
                   <a:srgbClr val="858B7E"/>
                 </a:solidFill>
@@ -5084,22 +5024,22 @@
       </p:sp>
       <p:sp>
         <p:nvSpPr>
-          <p:cNvPr id="6" name="">
-            <a:extLst xmlns:a="http://schemas.openxmlformats.org/drawingml/2006/main">
-              <a:ext uri="{FF2B5EF4-FFF2-40B4-BE49-F238E27FC236}">
-                <a16:creationId xmlns:a16="http://schemas.microsoft.com/office/drawing/2014/main" id="{0946B173-3BD1-433E-B28E-A94B36D16DA3}"/>
-              </a:ext>
-            </a:extLst>
-          </p:cNvPr>
-          <p:cNvSpPr>
-            <a:spLocks xmlns:a="http://schemas.openxmlformats.org/drawingml/2006/main" noGrp="1"/>
-          </p:cNvSpPr>
-          <p:nvPr/>
-        </p:nvSpPr>
-        <p:spPr>
-          <a:xfrm xmlns:a="http://schemas.openxmlformats.org/drawingml/2006/main">
-            <a:off x="11134725" y="6448425"/>
-            <a:ext cx="371475" cy="228600"/>
+          <p:cNvPr id="5" name="">
+            <a:extLst xmlns:a="http://schemas.openxmlformats.org/drawingml/2006/main">
+              <a:ext uri="{FF2B5EF4-FFF2-40B4-BE49-F238E27FC236}">
+                <a16:creationId xmlns:a16="http://schemas.microsoft.com/office/drawing/2014/main" id="{3C235B60-DDBB-4B18-B185-B4F5DAEAB8B0}"/>
+              </a:ext>
+            </a:extLst>
+          </p:cNvPr>
+          <p:cNvSpPr>
+            <a:spLocks xmlns:a="http://schemas.openxmlformats.org/drawingml/2006/main" noGrp="1"/>
+          </p:cNvSpPr>
+          <p:nvPr/>
+        </p:nvSpPr>
+        <p:spPr>
+          <a:xfrm xmlns:a="http://schemas.openxmlformats.org/drawingml/2006/main">
+            <a:off x="11049000" y="6667500"/>
+            <a:ext cx="228600" cy="152400"/>
           </a:xfrm>
           <a:prstGeom xmlns:a="http://schemas.openxmlformats.org/drawingml/2006/main" prst="rect">
             <a:avLst/>
@@ -5114,8 +5054,8 @@
             <a:noAutofit/>
           </a:bodyPr>
           <a:lstStyle xmlns:a="http://schemas.openxmlformats.org/drawingml/2006/main">
-            <a:defPPr>
-              <a:defRPr sz="975" b="0">
+            <a:defPPr algn="l">
+              <a:defRPr sz="825" b="0">
                 <a:solidFill>
                   <a:srgbClr val="858B7E"/>
                 </a:solidFill>
@@ -5126,8 +5066,8 @@
             </a:defPPr>
           </a:lstStyle>
           <a:p xmlns:a="http://schemas.openxmlformats.org/drawingml/2006/main">
-            <a:pPr>
-              <a:defRPr sz="975" b="0">
+            <a:pPr algn="l">
+              <a:defRPr sz="825" b="0">
                 <a:solidFill>
                   <a:srgbClr val="858B7E"/>
                 </a:solidFill>
@@ -5137,7 +5077,7 @@
               </a:defRPr>
             </a:pPr>
             <a:r>
-              <a:rPr sz="975" b="0">
+              <a:rPr sz="825" b="0">
                 <a:solidFill>
                   <a:srgbClr val="858B7E"/>
                 </a:solidFill>
@@ -5153,7 +5093,7 @@
     </p:spTree>
     <p:extLst>
       <p:ext uri="{BB962C8B-B14F-4D97-AF65-F5344CB8AC3E}">
-        <p14:creationId xmlns:p14="http://schemas.microsoft.com/office/powerpoint/2010/main" val="21090931"/>
+        <p14:creationId xmlns:p14="http://schemas.microsoft.com/office/powerpoint/2010/main" val="384130213"/>
       </p:ext>
     </p:extLst>
   </p:cSld>
@@ -5181,22 +5121,22 @@
       </p:grpSpPr>
       <p:sp>
         <p:nvSpPr>
-          <p:cNvPr id="7" name="">
-            <a:extLst xmlns:a="http://schemas.openxmlformats.org/drawingml/2006/main">
-              <a:ext uri="{FF2B5EF4-FFF2-40B4-BE49-F238E27FC236}">
-                <a16:creationId xmlns:a16="http://schemas.microsoft.com/office/drawing/2014/main" id="{46D3BBE8-0691-430C-8DAD-A4EB5A105E29}"/>
-              </a:ext>
-            </a:extLst>
-          </p:cNvPr>
-          <p:cNvSpPr>
-            <a:spLocks xmlns:a="http://schemas.openxmlformats.org/drawingml/2006/main" noGrp="1"/>
-          </p:cNvSpPr>
-          <p:nvPr/>
-        </p:nvSpPr>
-        <p:spPr>
-          <a:xfrm xmlns:a="http://schemas.openxmlformats.org/drawingml/2006/main">
-            <a:off x="685800" y="619125"/>
-            <a:ext cx="10668000" cy="247650"/>
+          <p:cNvPr id="6" name="">
+            <a:extLst xmlns:a="http://schemas.openxmlformats.org/drawingml/2006/main">
+              <a:ext uri="{FF2B5EF4-FFF2-40B4-BE49-F238E27FC236}">
+                <a16:creationId xmlns:a16="http://schemas.microsoft.com/office/drawing/2014/main" id="{DDB168A0-DD97-4756-9201-9A459B89C2F2}"/>
+              </a:ext>
+            </a:extLst>
+          </p:cNvPr>
+          <p:cNvSpPr>
+            <a:spLocks xmlns:a="http://schemas.openxmlformats.org/drawingml/2006/main" noGrp="1"/>
+          </p:cNvSpPr>
+          <p:nvPr/>
+        </p:nvSpPr>
+        <p:spPr>
+          <a:xfrm xmlns:a="http://schemas.openxmlformats.org/drawingml/2006/main">
+            <a:off x="914400" y="133350"/>
+            <a:ext cx="10363200" cy="152400"/>
           </a:xfrm>
           <a:prstGeom xmlns:a="http://schemas.openxmlformats.org/drawingml/2006/main" prst="rect">
             <a:avLst/>
@@ -5211,8 +5151,8 @@
             <a:noAutofit/>
           </a:bodyPr>
           <a:lstStyle xmlns:a="http://schemas.openxmlformats.org/drawingml/2006/main">
-            <a:defPPr>
-              <a:defRPr sz="1050" b="1">
+            <a:defPPr algn="l">
+              <a:defRPr sz="825" b="1">
                 <a:solidFill>
                   <a:srgbClr val="9B7744"/>
                 </a:solidFill>
@@ -5223,8 +5163,8 @@
             </a:defPPr>
           </a:lstStyle>
           <a:p xmlns:a="http://schemas.openxmlformats.org/drawingml/2006/main">
-            <a:pPr>
-              <a:defRPr sz="1050" b="1">
+            <a:pPr algn="l">
+              <a:defRPr sz="825" b="1">
                 <a:solidFill>
                   <a:srgbClr val="9B7744"/>
                 </a:solidFill>
@@ -5234,7 +5174,7 @@
               </a:defRPr>
             </a:pPr>
             <a:r>
-              <a:rPr sz="1050" b="1">
+              <a:rPr sz="825" b="1">
                 <a:solidFill>
                   <a:srgbClr val="9B7744"/>
                 </a:solidFill>
@@ -5252,19 +5192,19 @@
           <p:cNvPr id="2" name="">
             <a:extLst xmlns:a="http://schemas.openxmlformats.org/drawingml/2006/main">
               <a:ext uri="{FF2B5EF4-FFF2-40B4-BE49-F238E27FC236}">
-                <a16:creationId xmlns:a16="http://schemas.microsoft.com/office/drawing/2014/main" id="{5A3B2B39-9BAE-43D7-AAD1-8FF71D5B148A}"/>
-              </a:ext>
-            </a:extLst>
-          </p:cNvPr>
-          <p:cNvSpPr>
-            <a:spLocks xmlns:a="http://schemas.openxmlformats.org/drawingml/2006/main" noGrp="1"/>
-          </p:cNvSpPr>
-          <p:nvPr/>
-        </p:nvSpPr>
-        <p:spPr>
-          <a:xfrm xmlns:a="http://schemas.openxmlformats.org/drawingml/2006/main">
-            <a:off x="685800" y="1047750"/>
-            <a:ext cx="10820400" cy="1085850"/>
+                <a16:creationId xmlns:a16="http://schemas.microsoft.com/office/drawing/2014/main" id="{C7F8D385-9418-4980-B60A-251723390303}"/>
+              </a:ext>
+            </a:extLst>
+          </p:cNvPr>
+          <p:cNvSpPr>
+            <a:spLocks xmlns:a="http://schemas.openxmlformats.org/drawingml/2006/main" noGrp="1"/>
+          </p:cNvSpPr>
+          <p:nvPr/>
+        </p:nvSpPr>
+        <p:spPr>
+          <a:xfrm xmlns:a="http://schemas.openxmlformats.org/drawingml/2006/main">
+            <a:off x="914400" y="304800"/>
+            <a:ext cx="10363200" cy="381000"/>
           </a:xfrm>
           <a:prstGeom xmlns:a="http://schemas.openxmlformats.org/drawingml/2006/main" prst="rect">
             <a:avLst/>
@@ -5279,8 +5219,8 @@
             <a:noAutofit/>
           </a:bodyPr>
           <a:lstStyle xmlns:a="http://schemas.openxmlformats.org/drawingml/2006/main">
-            <a:defPPr>
-              <a:defRPr sz="3450" b="1">
+            <a:defPPr algn="l">
+              <a:defRPr sz="2250" b="1">
                 <a:solidFill>
                   <a:srgbClr val="1B1D19"/>
                 </a:solidFill>
@@ -5291,8 +5231,8 @@
             </a:defPPr>
           </a:lstStyle>
           <a:p xmlns:a="http://schemas.openxmlformats.org/drawingml/2006/main">
-            <a:pPr>
-              <a:defRPr sz="3450" b="1">
+            <a:pPr algn="l">
+              <a:defRPr sz="2250" b="1">
                 <a:solidFill>
                   <a:srgbClr val="1B1D19"/>
                 </a:solidFill>
@@ -5302,7 +5242,7 @@
               </a:defRPr>
             </a:pPr>
             <a:r>
-              <a:rPr sz="3450" b="1">
+              <a:rPr sz="2250" b="1">
                 <a:solidFill>
                   <a:srgbClr val="1B1D19"/>
                 </a:solidFill>
@@ -5320,25 +5260,25 @@
           <p:cNvPr id="3" name="">
             <a:extLst xmlns:a="http://schemas.openxmlformats.org/drawingml/2006/main">
               <a:ext uri="{FF2B5EF4-FFF2-40B4-BE49-F238E27FC236}">
-                <a16:creationId xmlns:a16="http://schemas.microsoft.com/office/drawing/2014/main" id="{79FE073C-10FA-4C5D-B24D-1F2D1F74E221}"/>
-              </a:ext>
-            </a:extLst>
-          </p:cNvPr>
-          <p:cNvSpPr>
-            <a:spLocks xmlns:a="http://schemas.openxmlformats.org/drawingml/2006/main" noGrp="1"/>
-          </p:cNvSpPr>
-          <p:nvPr/>
-        </p:nvSpPr>
-        <p:spPr>
-          <a:xfrm xmlns:a="http://schemas.openxmlformats.org/drawingml/2006/main">
-            <a:off x="685800" y="2476500"/>
-            <a:ext cx="10820400" cy="3524250"/>
+                <a16:creationId xmlns:a16="http://schemas.microsoft.com/office/drawing/2014/main" id="{B204A2F5-FB8D-4536-9078-E12CC311D752}"/>
+              </a:ext>
+            </a:extLst>
+          </p:cNvPr>
+          <p:cNvSpPr>
+            <a:spLocks xmlns:a="http://schemas.openxmlformats.org/drawingml/2006/main" noGrp="1"/>
+          </p:cNvSpPr>
+          <p:nvPr/>
+        </p:nvSpPr>
+        <p:spPr>
+          <a:xfrm xmlns:a="http://schemas.openxmlformats.org/drawingml/2006/main">
+            <a:off x="914400" y="723900"/>
+            <a:ext cx="10363200" cy="5829300"/>
           </a:xfrm>
           <a:prstGeom xmlns:a="http://schemas.openxmlformats.org/drawingml/2006/main" prst="rect">
             <a:avLst/>
           </a:prstGeom>
           <a:solidFill xmlns:a="http://schemas.openxmlformats.org/drawingml/2006/main">
-            <a:srgbClr val="F7F7F3"/>
+            <a:srgbClr val="F4F3EE"/>
           </a:solidFill>
           <a:ln xmlns:a="http://schemas.openxmlformats.org/drawingml/2006/main" w="0">
             <a:noFill/>
@@ -5350,49 +5290,19 @@
           <p:cNvPr id="4" name="">
             <a:extLst xmlns:a="http://schemas.openxmlformats.org/drawingml/2006/main">
               <a:ext uri="{FF2B5EF4-FFF2-40B4-BE49-F238E27FC236}">
-                <a16:creationId xmlns:a16="http://schemas.microsoft.com/office/drawing/2014/main" id="{9B816346-CD9B-4996-95B4-F4EA5AA96839}"/>
-              </a:ext>
-            </a:extLst>
-          </p:cNvPr>
-          <p:cNvSpPr>
-            <a:spLocks xmlns:a="http://schemas.openxmlformats.org/drawingml/2006/main" noGrp="1"/>
-          </p:cNvSpPr>
-          <p:nvPr/>
-        </p:nvSpPr>
-        <p:spPr>
-          <a:xfrm xmlns:a="http://schemas.openxmlformats.org/drawingml/2006/main">
-            <a:off x="685800" y="2476500"/>
-            <a:ext cx="10820400" cy="9525"/>
-          </a:xfrm>
-          <a:prstGeom xmlns:a="http://schemas.openxmlformats.org/drawingml/2006/main" prst="rect">
-            <a:avLst/>
-          </a:prstGeom>
-          <a:solidFill xmlns:a="http://schemas.openxmlformats.org/drawingml/2006/main">
-            <a:srgbClr val="DEDFD6"/>
-          </a:solidFill>
-          <a:ln xmlns:a="http://schemas.openxmlformats.org/drawingml/2006/main" w="0">
-            <a:noFill/>
-          </a:ln>
-        </p:spPr>
-      </p:sp>
-      <p:sp>
-        <p:nvSpPr>
-          <p:cNvPr id="5" name="">
-            <a:extLst xmlns:a="http://schemas.openxmlformats.org/drawingml/2006/main">
-              <a:ext uri="{FF2B5EF4-FFF2-40B4-BE49-F238E27FC236}">
-                <a16:creationId xmlns:a16="http://schemas.microsoft.com/office/drawing/2014/main" id="{76C54E36-AABC-4246-BF3A-9827C766718D}"/>
-              </a:ext>
-            </a:extLst>
-          </p:cNvPr>
-          <p:cNvSpPr>
-            <a:spLocks xmlns:a="http://schemas.openxmlformats.org/drawingml/2006/main" noGrp="1"/>
-          </p:cNvSpPr>
-          <p:nvPr/>
-        </p:nvSpPr>
-        <p:spPr>
-          <a:xfrm xmlns:a="http://schemas.openxmlformats.org/drawingml/2006/main">
-            <a:off x="685800" y="6448425"/>
-            <a:ext cx="10191750" cy="228600"/>
+                <a16:creationId xmlns:a16="http://schemas.microsoft.com/office/drawing/2014/main" id="{62EB008C-B53B-4AD4-B7BE-5E6CB45CFFE4}"/>
+              </a:ext>
+            </a:extLst>
+          </p:cNvPr>
+          <p:cNvSpPr>
+            <a:spLocks xmlns:a="http://schemas.openxmlformats.org/drawingml/2006/main" noGrp="1"/>
+          </p:cNvSpPr>
+          <p:nvPr/>
+        </p:nvSpPr>
+        <p:spPr>
+          <a:xfrm xmlns:a="http://schemas.openxmlformats.org/drawingml/2006/main">
+            <a:off x="914400" y="6667500"/>
+            <a:ext cx="9525000" cy="152400"/>
           </a:xfrm>
           <a:prstGeom xmlns:a="http://schemas.openxmlformats.org/drawingml/2006/main" prst="rect">
             <a:avLst/>
@@ -5407,8 +5317,8 @@
             <a:noAutofit/>
           </a:bodyPr>
           <a:lstStyle xmlns:a="http://schemas.openxmlformats.org/drawingml/2006/main">
-            <a:defPPr>
-              <a:defRPr sz="975" b="0">
+            <a:defPPr algn="l">
+              <a:defRPr sz="825" b="0">
                 <a:solidFill>
                   <a:srgbClr val="858B7E"/>
                 </a:solidFill>
@@ -5419,8 +5329,8 @@
             </a:defPPr>
           </a:lstStyle>
           <a:p xmlns:a="http://schemas.openxmlformats.org/drawingml/2006/main">
-            <a:pPr>
-              <a:defRPr sz="975" b="0">
+            <a:pPr algn="l">
+              <a:defRPr sz="825" b="0">
                 <a:solidFill>
                   <a:srgbClr val="858B7E"/>
                 </a:solidFill>
@@ -5430,7 +5340,7 @@
               </a:defRPr>
             </a:pPr>
             <a:r>
-              <a:rPr sz="975" b="0">
+              <a:rPr sz="825" b="0">
                 <a:solidFill>
                   <a:srgbClr val="858B7E"/>
                 </a:solidFill>
@@ -5445,22 +5355,22 @@
       </p:sp>
       <p:sp>
         <p:nvSpPr>
-          <p:cNvPr id="6" name="">
-            <a:extLst xmlns:a="http://schemas.openxmlformats.org/drawingml/2006/main">
-              <a:ext uri="{FF2B5EF4-FFF2-40B4-BE49-F238E27FC236}">
-                <a16:creationId xmlns:a16="http://schemas.microsoft.com/office/drawing/2014/main" id="{8BEE52B9-8E31-42EE-954A-FD2DDA19A5AB}"/>
-              </a:ext>
-            </a:extLst>
-          </p:cNvPr>
-          <p:cNvSpPr>
-            <a:spLocks xmlns:a="http://schemas.openxmlformats.org/drawingml/2006/main" noGrp="1"/>
-          </p:cNvSpPr>
-          <p:nvPr/>
-        </p:nvSpPr>
-        <p:spPr>
-          <a:xfrm xmlns:a="http://schemas.openxmlformats.org/drawingml/2006/main">
-            <a:off x="11134725" y="6448425"/>
-            <a:ext cx="371475" cy="228600"/>
+          <p:cNvPr id="5" name="">
+            <a:extLst xmlns:a="http://schemas.openxmlformats.org/drawingml/2006/main">
+              <a:ext uri="{FF2B5EF4-FFF2-40B4-BE49-F238E27FC236}">
+                <a16:creationId xmlns:a16="http://schemas.microsoft.com/office/drawing/2014/main" id="{6196C79B-91D5-43E8-B155-1B9D9C3718E7}"/>
+              </a:ext>
+            </a:extLst>
+          </p:cNvPr>
+          <p:cNvSpPr>
+            <a:spLocks xmlns:a="http://schemas.openxmlformats.org/drawingml/2006/main" noGrp="1"/>
+          </p:cNvSpPr>
+          <p:nvPr/>
+        </p:nvSpPr>
+        <p:spPr>
+          <a:xfrm xmlns:a="http://schemas.openxmlformats.org/drawingml/2006/main">
+            <a:off x="11049000" y="6667500"/>
+            <a:ext cx="228600" cy="152400"/>
           </a:xfrm>
           <a:prstGeom xmlns:a="http://schemas.openxmlformats.org/drawingml/2006/main" prst="rect">
             <a:avLst/>
@@ -5475,8 +5385,8 @@
             <a:noAutofit/>
           </a:bodyPr>
           <a:lstStyle xmlns:a="http://schemas.openxmlformats.org/drawingml/2006/main">
-            <a:defPPr>
-              <a:defRPr sz="975" b="0">
+            <a:defPPr algn="l">
+              <a:defRPr sz="825" b="0">
                 <a:solidFill>
                   <a:srgbClr val="858B7E"/>
                 </a:solidFill>
@@ -5487,8 +5397,8 @@
             </a:defPPr>
           </a:lstStyle>
           <a:p xmlns:a="http://schemas.openxmlformats.org/drawingml/2006/main">
-            <a:pPr>
-              <a:defRPr sz="975" b="0">
+            <a:pPr algn="l">
+              <a:defRPr sz="825" b="0">
                 <a:solidFill>
                   <a:srgbClr val="858B7E"/>
                 </a:solidFill>
@@ -5498,7 +5408,7 @@
               </a:defRPr>
             </a:pPr>
             <a:r>
-              <a:rPr sz="975" b="0">
+              <a:rPr sz="825" b="0">
                 <a:solidFill>
                   <a:srgbClr val="858B7E"/>
                 </a:solidFill>
@@ -5514,7 +5424,7 @@
     </p:spTree>
     <p:extLst>
       <p:ext uri="{BB962C8B-B14F-4D97-AF65-F5344CB8AC3E}">
-        <p14:creationId xmlns:p14="http://schemas.microsoft.com/office/powerpoint/2010/main" val="1564626933"/>
+        <p14:creationId xmlns:p14="http://schemas.microsoft.com/office/powerpoint/2010/main" val="247606364"/>
       </p:ext>
     </p:extLst>
   </p:cSld>
@@ -5545,7 +5455,7 @@
           <p:cNvPr id="18" name="">
             <a:extLst xmlns:a="http://schemas.openxmlformats.org/drawingml/2006/main">
               <a:ext uri="{FF2B5EF4-FFF2-40B4-BE49-F238E27FC236}">
-                <a16:creationId xmlns:a16="http://schemas.microsoft.com/office/drawing/2014/main" id="{A5DCA6E4-2AB0-4C7A-A319-EC32C74DC3EA}"/>
+                <a16:creationId xmlns:a16="http://schemas.microsoft.com/office/drawing/2014/main" id="{9F51E3ED-C361-49AD-AF9A-C2B4D40E5DDA}"/>
               </a:ext>
             </a:extLst>
           </p:cNvPr>
@@ -5572,7 +5482,7 @@
             <a:noAutofit/>
           </a:bodyPr>
           <a:lstStyle xmlns:a="http://schemas.openxmlformats.org/drawingml/2006/main">
-            <a:defPPr>
+            <a:defPPr algn="l">
               <a:defRPr sz="1050" b="1">
                 <a:solidFill>
                   <a:srgbClr val="9B7744"/>
@@ -5584,7 +5494,7 @@
             </a:defPPr>
           </a:lstStyle>
           <a:p xmlns:a="http://schemas.openxmlformats.org/drawingml/2006/main">
-            <a:pPr>
+            <a:pPr algn="l">
               <a:defRPr sz="1050" b="1">
                 <a:solidFill>
                   <a:srgbClr val="9B7744"/>
@@ -5613,7 +5523,7 @@
           <p:cNvPr id="2" name="">
             <a:extLst xmlns:a="http://schemas.openxmlformats.org/drawingml/2006/main">
               <a:ext uri="{FF2B5EF4-FFF2-40B4-BE49-F238E27FC236}">
-                <a16:creationId xmlns:a16="http://schemas.microsoft.com/office/drawing/2014/main" id="{BF605903-5514-4286-AA0F-5C11F8450573}"/>
+                <a16:creationId xmlns:a16="http://schemas.microsoft.com/office/drawing/2014/main" id="{50DA7D65-89F1-4DB8-AA5D-73483259F3FF}"/>
               </a:ext>
             </a:extLst>
           </p:cNvPr>
@@ -5640,7 +5550,7 @@
             <a:noAutofit/>
           </a:bodyPr>
           <a:lstStyle xmlns:a="http://schemas.openxmlformats.org/drawingml/2006/main">
-            <a:defPPr>
+            <a:defPPr algn="l">
               <a:defRPr sz="3450" b="1">
                 <a:solidFill>
                   <a:srgbClr val="1B1D19"/>
@@ -5652,7 +5562,7 @@
             </a:defPPr>
           </a:lstStyle>
           <a:p xmlns:a="http://schemas.openxmlformats.org/drawingml/2006/main">
-            <a:pPr>
+            <a:pPr algn="l">
               <a:defRPr sz="3450" b="1">
                 <a:solidFill>
                   <a:srgbClr val="1B1D19"/>
@@ -5681,7 +5591,7 @@
           <p:cNvPr id="3" name="">
             <a:extLst xmlns:a="http://schemas.openxmlformats.org/drawingml/2006/main">
               <a:ext uri="{FF2B5EF4-FFF2-40B4-BE49-F238E27FC236}">
-                <a16:creationId xmlns:a16="http://schemas.microsoft.com/office/drawing/2014/main" id="{92E1628D-96B8-4ED4-8180-B5F9FCDB0C2B}"/>
+                <a16:creationId xmlns:a16="http://schemas.microsoft.com/office/drawing/2014/main" id="{DFAF3D75-F055-453A-B058-A7CC4D3CE0CE}"/>
               </a:ext>
             </a:extLst>
           </p:cNvPr>
@@ -5711,7 +5621,7 @@
           <p:cNvPr id="4" name="">
             <a:extLst xmlns:a="http://schemas.openxmlformats.org/drawingml/2006/main">
               <a:ext uri="{FF2B5EF4-FFF2-40B4-BE49-F238E27FC236}">
-                <a16:creationId xmlns:a16="http://schemas.microsoft.com/office/drawing/2014/main" id="{DB395F9D-2789-44D9-AD31-C8428FA6107D}"/>
+                <a16:creationId xmlns:a16="http://schemas.microsoft.com/office/drawing/2014/main" id="{E51E0B5D-4BDF-4E9A-9B7A-4CF06B5E439B}"/>
               </a:ext>
             </a:extLst>
           </p:cNvPr>
@@ -5738,7 +5648,7 @@
             <a:noAutofit/>
           </a:bodyPr>
           <a:lstStyle xmlns:a="http://schemas.openxmlformats.org/drawingml/2006/main">
-            <a:defPPr>
+            <a:defPPr algn="l">
               <a:defRPr sz="1125" b="0">
                 <a:solidFill>
                   <a:srgbClr val="9B7744"/>
@@ -5750,7 +5660,7 @@
             </a:defPPr>
           </a:lstStyle>
           <a:p xmlns:a="http://schemas.openxmlformats.org/drawingml/2006/main">
-            <a:pPr>
+            <a:pPr algn="l">
               <a:defRPr sz="1125" b="0">
                 <a:solidFill>
                   <a:srgbClr val="9B7744"/>
@@ -5779,7 +5689,7 @@
           <p:cNvPr id="5" name="">
             <a:extLst xmlns:a="http://schemas.openxmlformats.org/drawingml/2006/main">
               <a:ext uri="{FF2B5EF4-FFF2-40B4-BE49-F238E27FC236}">
-                <a16:creationId xmlns:a16="http://schemas.microsoft.com/office/drawing/2014/main" id="{033D9895-CF7B-4E28-B62D-5D27A7F865E2}"/>
+                <a16:creationId xmlns:a16="http://schemas.microsoft.com/office/drawing/2014/main" id="{CEF8BB61-C838-4230-A0D2-3FB76F295B35}"/>
               </a:ext>
             </a:extLst>
           </p:cNvPr>
@@ -5806,7 +5716,7 @@
             <a:noAutofit/>
           </a:bodyPr>
           <a:lstStyle xmlns:a="http://schemas.openxmlformats.org/drawingml/2006/main">
-            <a:defPPr>
+            <a:defPPr algn="l">
               <a:defRPr sz="2175" b="1">
                 <a:solidFill>
                   <a:srgbClr val="1B1D19"/>
@@ -5818,7 +5728,7 @@
             </a:defPPr>
           </a:lstStyle>
           <a:p xmlns:a="http://schemas.openxmlformats.org/drawingml/2006/main">
-            <a:pPr>
+            <a:pPr algn="l">
               <a:defRPr sz="2175" b="1">
                 <a:solidFill>
                   <a:srgbClr val="1B1D19"/>
@@ -5847,7 +5757,7 @@
           <p:cNvPr id="6" name="">
             <a:extLst xmlns:a="http://schemas.openxmlformats.org/drawingml/2006/main">
               <a:ext uri="{FF2B5EF4-FFF2-40B4-BE49-F238E27FC236}">
-                <a16:creationId xmlns:a16="http://schemas.microsoft.com/office/drawing/2014/main" id="{1CFC48B3-28A6-42E1-9D3B-8D3644AC3791}"/>
+                <a16:creationId xmlns:a16="http://schemas.microsoft.com/office/drawing/2014/main" id="{546264C7-82C6-4786-A1DB-4954E4E9C0D8}"/>
               </a:ext>
             </a:extLst>
           </p:cNvPr>
@@ -5874,7 +5784,7 @@
             <a:noAutofit/>
           </a:bodyPr>
           <a:lstStyle xmlns:a="http://schemas.openxmlformats.org/drawingml/2006/main">
-            <a:defPPr>
+            <a:defPPr algn="l">
               <a:defRPr sz="1725" b="0">
                 <a:solidFill>
                   <a:srgbClr val="6B7265"/>
@@ -5886,7 +5796,7 @@
             </a:defPPr>
           </a:lstStyle>
           <a:p xmlns:a="http://schemas.openxmlformats.org/drawingml/2006/main">
-            <a:pPr>
+            <a:pPr algn="l">
               <a:defRPr sz="1725" b="0">
                 <a:solidFill>
                   <a:srgbClr val="6B7265"/>
@@ -5915,7 +5825,7 @@
           <p:cNvPr id="7" name="">
             <a:extLst xmlns:a="http://schemas.openxmlformats.org/drawingml/2006/main">
               <a:ext uri="{FF2B5EF4-FFF2-40B4-BE49-F238E27FC236}">
-                <a16:creationId xmlns:a16="http://schemas.microsoft.com/office/drawing/2014/main" id="{D33755AD-F2E2-4076-982E-367B3666F250}"/>
+                <a16:creationId xmlns:a16="http://schemas.microsoft.com/office/drawing/2014/main" id="{B4DEEF72-8D33-440E-BA15-B91BF8A5F9AC}"/>
               </a:ext>
             </a:extLst>
           </p:cNvPr>
@@ -5945,7 +5855,7 @@
           <p:cNvPr id="8" name="">
             <a:extLst xmlns:a="http://schemas.openxmlformats.org/drawingml/2006/main">
               <a:ext uri="{FF2B5EF4-FFF2-40B4-BE49-F238E27FC236}">
-                <a16:creationId xmlns:a16="http://schemas.microsoft.com/office/drawing/2014/main" id="{5EAA12F6-5B84-4D21-9CBF-0FCBDB83BE05}"/>
+                <a16:creationId xmlns:a16="http://schemas.microsoft.com/office/drawing/2014/main" id="{B528790F-E96E-48F2-B7B7-44B7E1E4059D}"/>
               </a:ext>
             </a:extLst>
           </p:cNvPr>
@@ -5972,7 +5882,7 @@
             <a:noAutofit/>
           </a:bodyPr>
           <a:lstStyle xmlns:a="http://schemas.openxmlformats.org/drawingml/2006/main">
-            <a:defPPr>
+            <a:defPPr algn="l">
               <a:defRPr sz="1125" b="0">
                 <a:solidFill>
                   <a:srgbClr val="9B7744"/>
@@ -5984,7 +5894,7 @@
             </a:defPPr>
           </a:lstStyle>
           <a:p xmlns:a="http://schemas.openxmlformats.org/drawingml/2006/main">
-            <a:pPr>
+            <a:pPr algn="l">
               <a:defRPr sz="1125" b="0">
                 <a:solidFill>
                   <a:srgbClr val="9B7744"/>
@@ -6013,7 +5923,7 @@
           <p:cNvPr id="9" name="">
             <a:extLst xmlns:a="http://schemas.openxmlformats.org/drawingml/2006/main">
               <a:ext uri="{FF2B5EF4-FFF2-40B4-BE49-F238E27FC236}">
-                <a16:creationId xmlns:a16="http://schemas.microsoft.com/office/drawing/2014/main" id="{502C18D5-152B-446B-9D27-B6547693ACC0}"/>
+                <a16:creationId xmlns:a16="http://schemas.microsoft.com/office/drawing/2014/main" id="{2B63B1EE-6768-43E8-B348-BA6A8E6024A7}"/>
               </a:ext>
             </a:extLst>
           </p:cNvPr>
@@ -6040,7 +5950,7 @@
             <a:noAutofit/>
           </a:bodyPr>
           <a:lstStyle xmlns:a="http://schemas.openxmlformats.org/drawingml/2006/main">
-            <a:defPPr>
+            <a:defPPr algn="l">
               <a:defRPr sz="2175" b="1">
                 <a:solidFill>
                   <a:srgbClr val="1B1D19"/>
@@ -6052,7 +5962,7 @@
             </a:defPPr>
           </a:lstStyle>
           <a:p xmlns:a="http://schemas.openxmlformats.org/drawingml/2006/main">
-            <a:pPr>
+            <a:pPr algn="l">
               <a:defRPr sz="2175" b="1">
                 <a:solidFill>
                   <a:srgbClr val="1B1D19"/>
@@ -6081,7 +5991,7 @@
           <p:cNvPr id="10" name="">
             <a:extLst xmlns:a="http://schemas.openxmlformats.org/drawingml/2006/main">
               <a:ext uri="{FF2B5EF4-FFF2-40B4-BE49-F238E27FC236}">
-                <a16:creationId xmlns:a16="http://schemas.microsoft.com/office/drawing/2014/main" id="{6904878B-BAD9-4999-861F-2DA7AE862BA8}"/>
+                <a16:creationId xmlns:a16="http://schemas.microsoft.com/office/drawing/2014/main" id="{32BA2BFD-DD1C-4FAE-A279-1B7369E429E8}"/>
               </a:ext>
             </a:extLst>
           </p:cNvPr>
@@ -6108,7 +6018,7 @@
             <a:noAutofit/>
           </a:bodyPr>
           <a:lstStyle xmlns:a="http://schemas.openxmlformats.org/drawingml/2006/main">
-            <a:defPPr>
+            <a:defPPr algn="l">
               <a:defRPr sz="1725" b="0">
                 <a:solidFill>
                   <a:srgbClr val="6B7265"/>
@@ -6120,7 +6030,7 @@
             </a:defPPr>
           </a:lstStyle>
           <a:p xmlns:a="http://schemas.openxmlformats.org/drawingml/2006/main">
-            <a:pPr>
+            <a:pPr algn="l">
               <a:defRPr sz="1725" b="0">
                 <a:solidFill>
                   <a:srgbClr val="6B7265"/>
@@ -6149,7 +6059,7 @@
           <p:cNvPr id="11" name="">
             <a:extLst xmlns:a="http://schemas.openxmlformats.org/drawingml/2006/main">
               <a:ext uri="{FF2B5EF4-FFF2-40B4-BE49-F238E27FC236}">
-                <a16:creationId xmlns:a16="http://schemas.microsoft.com/office/drawing/2014/main" id="{3F2BFF73-E5EE-47FC-844E-442AEA305DB0}"/>
+                <a16:creationId xmlns:a16="http://schemas.microsoft.com/office/drawing/2014/main" id="{96517E87-A4FF-4A03-B7AB-1316B1481CBA}"/>
               </a:ext>
             </a:extLst>
           </p:cNvPr>
@@ -6179,7 +6089,7 @@
           <p:cNvPr id="12" name="">
             <a:extLst xmlns:a="http://schemas.openxmlformats.org/drawingml/2006/main">
               <a:ext uri="{FF2B5EF4-FFF2-40B4-BE49-F238E27FC236}">
-                <a16:creationId xmlns:a16="http://schemas.microsoft.com/office/drawing/2014/main" id="{2DCAB5F1-CAD5-415F-A4A3-DEFC1E2C17BB}"/>
+                <a16:creationId xmlns:a16="http://schemas.microsoft.com/office/drawing/2014/main" id="{E0DFB6FB-B0FA-4D3B-A474-D79685090E9F}"/>
               </a:ext>
             </a:extLst>
           </p:cNvPr>
@@ -6206,7 +6116,7 @@
             <a:noAutofit/>
           </a:bodyPr>
           <a:lstStyle xmlns:a="http://schemas.openxmlformats.org/drawingml/2006/main">
-            <a:defPPr>
+            <a:defPPr algn="l">
               <a:defRPr sz="1125" b="0">
                 <a:solidFill>
                   <a:srgbClr val="9B7744"/>
@@ -6218,7 +6128,7 @@
             </a:defPPr>
           </a:lstStyle>
           <a:p xmlns:a="http://schemas.openxmlformats.org/drawingml/2006/main">
-            <a:pPr>
+            <a:pPr algn="l">
               <a:defRPr sz="1125" b="0">
                 <a:solidFill>
                   <a:srgbClr val="9B7744"/>
@@ -6247,7 +6157,7 @@
           <p:cNvPr id="13" name="">
             <a:extLst xmlns:a="http://schemas.openxmlformats.org/drawingml/2006/main">
               <a:ext uri="{FF2B5EF4-FFF2-40B4-BE49-F238E27FC236}">
-                <a16:creationId xmlns:a16="http://schemas.microsoft.com/office/drawing/2014/main" id="{F97726D7-C57F-4CBE-AFCE-620A30C08B85}"/>
+                <a16:creationId xmlns:a16="http://schemas.microsoft.com/office/drawing/2014/main" id="{7C7097B9-6682-4C38-8690-DE412DCE9A6A}"/>
               </a:ext>
             </a:extLst>
           </p:cNvPr>
@@ -6274,7 +6184,7 @@
             <a:noAutofit/>
           </a:bodyPr>
           <a:lstStyle xmlns:a="http://schemas.openxmlformats.org/drawingml/2006/main">
-            <a:defPPr>
+            <a:defPPr algn="l">
               <a:defRPr sz="2175" b="1">
                 <a:solidFill>
                   <a:srgbClr val="1B1D19"/>
@@ -6286,7 +6196,7 @@
             </a:defPPr>
           </a:lstStyle>
           <a:p xmlns:a="http://schemas.openxmlformats.org/drawingml/2006/main">
-            <a:pPr>
+            <a:pPr algn="l">
               <a:defRPr sz="2175" b="1">
                 <a:solidFill>
                   <a:srgbClr val="1B1D19"/>
@@ -6315,7 +6225,7 @@
           <p:cNvPr id="14" name="">
             <a:extLst xmlns:a="http://schemas.openxmlformats.org/drawingml/2006/main">
               <a:ext uri="{FF2B5EF4-FFF2-40B4-BE49-F238E27FC236}">
-                <a16:creationId xmlns:a16="http://schemas.microsoft.com/office/drawing/2014/main" id="{BD2AED3E-11A3-4C73-A42B-679179875424}"/>
+                <a16:creationId xmlns:a16="http://schemas.microsoft.com/office/drawing/2014/main" id="{513E2E82-7767-466B-8639-D664F71363CD}"/>
               </a:ext>
             </a:extLst>
           </p:cNvPr>
@@ -6342,7 +6252,7 @@
             <a:noAutofit/>
           </a:bodyPr>
           <a:lstStyle xmlns:a="http://schemas.openxmlformats.org/drawingml/2006/main">
-            <a:defPPr>
+            <a:defPPr algn="l">
               <a:defRPr sz="1725" b="0">
                 <a:solidFill>
                   <a:srgbClr val="6B7265"/>
@@ -6354,7 +6264,7 @@
             </a:defPPr>
           </a:lstStyle>
           <a:p xmlns:a="http://schemas.openxmlformats.org/drawingml/2006/main">
-            <a:pPr>
+            <a:pPr algn="l">
               <a:defRPr sz="1725" b="0">
                 <a:solidFill>
                   <a:srgbClr val="6B7265"/>
@@ -6383,7 +6293,7 @@
           <p:cNvPr id="15" name="">
             <a:extLst xmlns:a="http://schemas.openxmlformats.org/drawingml/2006/main">
               <a:ext uri="{FF2B5EF4-FFF2-40B4-BE49-F238E27FC236}">
-                <a16:creationId xmlns:a16="http://schemas.microsoft.com/office/drawing/2014/main" id="{B185C07A-A5FF-4BEE-82E6-20FD29B7E84F}"/>
+                <a16:creationId xmlns:a16="http://schemas.microsoft.com/office/drawing/2014/main" id="{DB3425C6-2B53-4370-B744-4E38CCD26C9B}"/>
               </a:ext>
             </a:extLst>
           </p:cNvPr>
@@ -6410,7 +6320,7 @@
             <a:noAutofit/>
           </a:bodyPr>
           <a:lstStyle xmlns:a="http://schemas.openxmlformats.org/drawingml/2006/main">
-            <a:defPPr>
+            <a:defPPr algn="l">
               <a:defRPr sz="1050" b="0">
                 <a:solidFill>
                   <a:srgbClr val="6B7265"/>
@@ -6422,7 +6332,7 @@
             </a:defPPr>
           </a:lstStyle>
           <a:p xmlns:a="http://schemas.openxmlformats.org/drawingml/2006/main">
-            <a:pPr>
+            <a:pPr algn="l">
               <a:defRPr sz="1050" b="0">
                 <a:solidFill>
                   <a:srgbClr val="6B7265"/>
@@ -6451,7 +6361,7 @@
           <p:cNvPr id="16" name="">
             <a:extLst xmlns:a="http://schemas.openxmlformats.org/drawingml/2006/main">
               <a:ext uri="{FF2B5EF4-FFF2-40B4-BE49-F238E27FC236}">
-                <a16:creationId xmlns:a16="http://schemas.microsoft.com/office/drawing/2014/main" id="{C9EECA77-8E8E-434B-B51A-EB9463AFE1D7}"/>
+                <a16:creationId xmlns:a16="http://schemas.microsoft.com/office/drawing/2014/main" id="{9D5B83D9-EAFC-4665-9E59-0312427DBB71}"/>
               </a:ext>
             </a:extLst>
           </p:cNvPr>
@@ -6478,7 +6388,7 @@
             <a:noAutofit/>
           </a:bodyPr>
           <a:lstStyle xmlns:a="http://schemas.openxmlformats.org/drawingml/2006/main">
-            <a:defPPr>
+            <a:defPPr algn="l">
               <a:defRPr sz="975" b="0">
                 <a:solidFill>
                   <a:srgbClr val="858B7E"/>
@@ -6490,7 +6400,7 @@
             </a:defPPr>
           </a:lstStyle>
           <a:p xmlns:a="http://schemas.openxmlformats.org/drawingml/2006/main">
-            <a:pPr>
+            <a:pPr algn="l">
               <a:defRPr sz="975" b="0">
                 <a:solidFill>
                   <a:srgbClr val="858B7E"/>
@@ -6519,7 +6429,7 @@
           <p:cNvPr id="17" name="">
             <a:extLst xmlns:a="http://schemas.openxmlformats.org/drawingml/2006/main">
               <a:ext uri="{FF2B5EF4-FFF2-40B4-BE49-F238E27FC236}">
-                <a16:creationId xmlns:a16="http://schemas.microsoft.com/office/drawing/2014/main" id="{B6B2BCDE-283D-4A54-8CCF-B18D1DDB78DE}"/>
+                <a16:creationId xmlns:a16="http://schemas.microsoft.com/office/drawing/2014/main" id="{D6685A5A-49EA-4695-B4FE-28BBA3369A81}"/>
               </a:ext>
             </a:extLst>
           </p:cNvPr>
@@ -6546,7 +6456,7 @@
             <a:noAutofit/>
           </a:bodyPr>
           <a:lstStyle xmlns:a="http://schemas.openxmlformats.org/drawingml/2006/main">
-            <a:defPPr>
+            <a:defPPr algn="l">
               <a:defRPr sz="975" b="0">
                 <a:solidFill>
                   <a:srgbClr val="858B7E"/>
@@ -6558,7 +6468,7 @@
             </a:defPPr>
           </a:lstStyle>
           <a:p xmlns:a="http://schemas.openxmlformats.org/drawingml/2006/main">
-            <a:pPr>
+            <a:pPr algn="l">
               <a:defRPr sz="975" b="0">
                 <a:solidFill>
                   <a:srgbClr val="858B7E"/>
@@ -6585,7 +6495,7 @@
     </p:spTree>
     <p:extLst>
       <p:ext uri="{BB962C8B-B14F-4D97-AF65-F5344CB8AC3E}">
-        <p14:creationId xmlns:p14="http://schemas.microsoft.com/office/powerpoint/2010/main" val="2044230986"/>
+        <p14:creationId xmlns:p14="http://schemas.microsoft.com/office/powerpoint/2010/main" val="1731940605"/>
       </p:ext>
     </p:extLst>
   </p:cSld>
@@ -6616,7 +6526,7 @@
           <p:cNvPr id="11" name="">
             <a:extLst xmlns:a="http://schemas.openxmlformats.org/drawingml/2006/main">
               <a:ext uri="{FF2B5EF4-FFF2-40B4-BE49-F238E27FC236}">
-                <a16:creationId xmlns:a16="http://schemas.microsoft.com/office/drawing/2014/main" id="{3FF51C7C-6406-4559-B95F-016B541D15BC}"/>
+                <a16:creationId xmlns:a16="http://schemas.microsoft.com/office/drawing/2014/main" id="{A1123E88-B70D-4A4B-86F5-B7AC43968DD4}"/>
               </a:ext>
             </a:extLst>
           </p:cNvPr>
@@ -6643,7 +6553,7 @@
             <a:noAutofit/>
           </a:bodyPr>
           <a:lstStyle xmlns:a="http://schemas.openxmlformats.org/drawingml/2006/main">
-            <a:defPPr>
+            <a:defPPr algn="l">
               <a:defRPr sz="1050" b="1">
                 <a:solidFill>
                   <a:srgbClr val="9B7744"/>
@@ -6655,7 +6565,7 @@
             </a:defPPr>
           </a:lstStyle>
           <a:p xmlns:a="http://schemas.openxmlformats.org/drawingml/2006/main">
-            <a:pPr>
+            <a:pPr algn="l">
               <a:defRPr sz="1050" b="1">
                 <a:solidFill>
                   <a:srgbClr val="9B7744"/>
@@ -6684,7 +6594,7 @@
           <p:cNvPr id="2" name="">
             <a:extLst xmlns:a="http://schemas.openxmlformats.org/drawingml/2006/main">
               <a:ext uri="{FF2B5EF4-FFF2-40B4-BE49-F238E27FC236}">
-                <a16:creationId xmlns:a16="http://schemas.microsoft.com/office/drawing/2014/main" id="{ABBAD620-ECCC-4B6C-A7D0-456170308BE5}"/>
+                <a16:creationId xmlns:a16="http://schemas.microsoft.com/office/drawing/2014/main" id="{F1DAB37F-E3BA-4966-AA0E-92EDF6FCED7F}"/>
               </a:ext>
             </a:extLst>
           </p:cNvPr>
@@ -6711,7 +6621,7 @@
             <a:noAutofit/>
           </a:bodyPr>
           <a:lstStyle xmlns:a="http://schemas.openxmlformats.org/drawingml/2006/main">
-            <a:defPPr>
+            <a:defPPr algn="l">
               <a:defRPr sz="3450" b="1">
                 <a:solidFill>
                   <a:srgbClr val="1B1D19"/>
@@ -6723,7 +6633,7 @@
             </a:defPPr>
           </a:lstStyle>
           <a:p xmlns:a="http://schemas.openxmlformats.org/drawingml/2006/main">
-            <a:pPr>
+            <a:pPr algn="l">
               <a:defRPr sz="3450" b="1">
                 <a:solidFill>
                   <a:srgbClr val="1B1D19"/>
@@ -6752,7 +6662,7 @@
           <p:cNvPr id="3" name="">
             <a:extLst xmlns:a="http://schemas.openxmlformats.org/drawingml/2006/main">
               <a:ext uri="{FF2B5EF4-FFF2-40B4-BE49-F238E27FC236}">
-                <a16:creationId xmlns:a16="http://schemas.microsoft.com/office/drawing/2014/main" id="{E1843804-A0DC-432F-BCA4-C16480447B6A}"/>
+                <a16:creationId xmlns:a16="http://schemas.microsoft.com/office/drawing/2014/main" id="{D8ABB487-3AC7-41AA-99BE-D6D296552729}"/>
               </a:ext>
             </a:extLst>
           </p:cNvPr>
@@ -6782,7 +6692,7 @@
           <p:cNvPr id="4" name="">
             <a:extLst xmlns:a="http://schemas.openxmlformats.org/drawingml/2006/main">
               <a:ext uri="{FF2B5EF4-FFF2-40B4-BE49-F238E27FC236}">
-                <a16:creationId xmlns:a16="http://schemas.microsoft.com/office/drawing/2014/main" id="{FA5D9517-56AE-4F43-99F2-9FD5A0B09B33}"/>
+                <a16:creationId xmlns:a16="http://schemas.microsoft.com/office/drawing/2014/main" id="{9D4844CD-6DDF-43B7-A819-E204A13C9D04}"/>
               </a:ext>
             </a:extLst>
           </p:cNvPr>
@@ -6809,7 +6719,7 @@
             <a:noAutofit/>
           </a:bodyPr>
           <a:lstStyle xmlns:a="http://schemas.openxmlformats.org/drawingml/2006/main">
-            <a:defPPr>
+            <a:defPPr algn="l">
               <a:defRPr sz="2325" b="1">
                 <a:solidFill>
                   <a:srgbClr val="1B1D19"/>
@@ -6821,7 +6731,7 @@
             </a:defPPr>
           </a:lstStyle>
           <a:p xmlns:a="http://schemas.openxmlformats.org/drawingml/2006/main">
-            <a:pPr>
+            <a:pPr algn="l">
               <a:defRPr sz="2325" b="1">
                 <a:solidFill>
                   <a:srgbClr val="1B1D19"/>
@@ -6850,7 +6760,7 @@
           <p:cNvPr id="5" name="">
             <a:extLst xmlns:a="http://schemas.openxmlformats.org/drawingml/2006/main">
               <a:ext uri="{FF2B5EF4-FFF2-40B4-BE49-F238E27FC236}">
-                <a16:creationId xmlns:a16="http://schemas.microsoft.com/office/drawing/2014/main" id="{63110DCB-7D14-4213-A564-A1B3880538DD}"/>
+                <a16:creationId xmlns:a16="http://schemas.microsoft.com/office/drawing/2014/main" id="{F0D0F480-55F0-4892-8818-B904556AA0B1}"/>
               </a:ext>
             </a:extLst>
           </p:cNvPr>
@@ -6880,7 +6790,7 @@
           <p:cNvPr id="6" name="">
             <a:extLst xmlns:a="http://schemas.openxmlformats.org/drawingml/2006/main">
               <a:ext uri="{FF2B5EF4-FFF2-40B4-BE49-F238E27FC236}">
-                <a16:creationId xmlns:a16="http://schemas.microsoft.com/office/drawing/2014/main" id="{54CE1670-956B-4E96-9580-93F866411493}"/>
+                <a16:creationId xmlns:a16="http://schemas.microsoft.com/office/drawing/2014/main" id="{456334D7-46A8-4A0F-9697-87A4AC685A05}"/>
               </a:ext>
             </a:extLst>
           </p:cNvPr>
@@ -6910,7 +6820,7 @@
           <p:cNvPr id="7" name="">
             <a:extLst xmlns:a="http://schemas.openxmlformats.org/drawingml/2006/main">
               <a:ext uri="{FF2B5EF4-FFF2-40B4-BE49-F238E27FC236}">
-                <a16:creationId xmlns:a16="http://schemas.microsoft.com/office/drawing/2014/main" id="{001C981B-FF0D-4333-B79A-0AE0C0DAE421}"/>
+                <a16:creationId xmlns:a16="http://schemas.microsoft.com/office/drawing/2014/main" id="{AE75F113-CE2D-48FC-9652-78865A925DF8}"/>
               </a:ext>
             </a:extLst>
           </p:cNvPr>
@@ -6937,7 +6847,7 @@
             <a:noAutofit/>
           </a:bodyPr>
           <a:lstStyle xmlns:a="http://schemas.openxmlformats.org/drawingml/2006/main">
-            <a:defPPr>
+            <a:defPPr algn="l">
               <a:defRPr sz="2325" b="1">
                 <a:solidFill>
                   <a:srgbClr val="1B1D19"/>
@@ -6949,7 +6859,7 @@
             </a:defPPr>
           </a:lstStyle>
           <a:p xmlns:a="http://schemas.openxmlformats.org/drawingml/2006/main">
-            <a:pPr>
+            <a:pPr algn="l">
               <a:defRPr sz="2325" b="1">
                 <a:solidFill>
                   <a:srgbClr val="1B1D19"/>
@@ -6978,7 +6888,7 @@
           <p:cNvPr id="8" name="">
             <a:extLst xmlns:a="http://schemas.openxmlformats.org/drawingml/2006/main">
               <a:ext uri="{FF2B5EF4-FFF2-40B4-BE49-F238E27FC236}">
-                <a16:creationId xmlns:a16="http://schemas.microsoft.com/office/drawing/2014/main" id="{AD648BDA-3AE7-4061-B8B1-96EB13575E94}"/>
+                <a16:creationId xmlns:a16="http://schemas.microsoft.com/office/drawing/2014/main" id="{8F72D158-5B30-4584-B6CA-DDB96FC89495}"/>
               </a:ext>
             </a:extLst>
           </p:cNvPr>
@@ -7008,7 +6918,7 @@
           <p:cNvPr id="9" name="">
             <a:extLst xmlns:a="http://schemas.openxmlformats.org/drawingml/2006/main">
               <a:ext uri="{FF2B5EF4-FFF2-40B4-BE49-F238E27FC236}">
-                <a16:creationId xmlns:a16="http://schemas.microsoft.com/office/drawing/2014/main" id="{51B1AEAD-A70F-4EDB-A71C-719905B60DE5}"/>
+                <a16:creationId xmlns:a16="http://schemas.microsoft.com/office/drawing/2014/main" id="{64995B6F-4E0F-4524-84D9-D20BA40CABB8}"/>
               </a:ext>
             </a:extLst>
           </p:cNvPr>
@@ -7035,7 +6945,7 @@
             <a:noAutofit/>
           </a:bodyPr>
           <a:lstStyle xmlns:a="http://schemas.openxmlformats.org/drawingml/2006/main">
-            <a:defPPr>
+            <a:defPPr algn="l">
               <a:defRPr sz="975" b="0">
                 <a:solidFill>
                   <a:srgbClr val="858B7E"/>
@@ -7047,7 +6957,7 @@
             </a:defPPr>
           </a:lstStyle>
           <a:p xmlns:a="http://schemas.openxmlformats.org/drawingml/2006/main">
-            <a:pPr>
+            <a:pPr algn="l">
               <a:defRPr sz="975" b="0">
                 <a:solidFill>
                   <a:srgbClr val="858B7E"/>
@@ -7076,7 +6986,7 @@
           <p:cNvPr id="10" name="">
             <a:extLst xmlns:a="http://schemas.openxmlformats.org/drawingml/2006/main">
               <a:ext uri="{FF2B5EF4-FFF2-40B4-BE49-F238E27FC236}">
-                <a16:creationId xmlns:a16="http://schemas.microsoft.com/office/drawing/2014/main" id="{2CE470A4-0C84-431B-BA1B-61801899B70F}"/>
+                <a16:creationId xmlns:a16="http://schemas.microsoft.com/office/drawing/2014/main" id="{1EF514B7-4835-4769-9464-F3D4C5368C0E}"/>
               </a:ext>
             </a:extLst>
           </p:cNvPr>
@@ -7103,7 +7013,7 @@
             <a:noAutofit/>
           </a:bodyPr>
           <a:lstStyle xmlns:a="http://schemas.openxmlformats.org/drawingml/2006/main">
-            <a:defPPr>
+            <a:defPPr algn="l">
               <a:defRPr sz="975" b="0">
                 <a:solidFill>
                   <a:srgbClr val="858B7E"/>
@@ -7115,7 +7025,7 @@
             </a:defPPr>
           </a:lstStyle>
           <a:p xmlns:a="http://schemas.openxmlformats.org/drawingml/2006/main">
-            <a:pPr>
+            <a:pPr algn="l">
               <a:defRPr sz="975" b="0">
                 <a:solidFill>
                   <a:srgbClr val="858B7E"/>
@@ -7142,7 +7052,7 @@
     </p:spTree>
     <p:extLst>
       <p:ext uri="{BB962C8B-B14F-4D97-AF65-F5344CB8AC3E}">
-        <p14:creationId xmlns:p14="http://schemas.microsoft.com/office/powerpoint/2010/main" val="113398340"/>
+        <p14:creationId xmlns:p14="http://schemas.microsoft.com/office/powerpoint/2010/main" val="2136088364"/>
       </p:ext>
     </p:extLst>
   </p:cSld>
@@ -7173,7 +7083,7 @@
           <p:cNvPr id="6" name="">
             <a:extLst xmlns:a="http://schemas.openxmlformats.org/drawingml/2006/main">
               <a:ext uri="{FF2B5EF4-FFF2-40B4-BE49-F238E27FC236}">
-                <a16:creationId xmlns:a16="http://schemas.microsoft.com/office/drawing/2014/main" id="{1B440F8E-C75A-41C4-A47C-A54B61A4E405}"/>
+                <a16:creationId xmlns:a16="http://schemas.microsoft.com/office/drawing/2014/main" id="{86D8B6E4-D899-463D-9BEC-1929FCFA89B8}"/>
               </a:ext>
             </a:extLst>
           </p:cNvPr>
@@ -7200,7 +7110,7 @@
             <a:noAutofit/>
           </a:bodyPr>
           <a:lstStyle xmlns:a="http://schemas.openxmlformats.org/drawingml/2006/main">
-            <a:defPPr>
+            <a:defPPr algn="l">
               <a:defRPr sz="1050" b="1">
                 <a:solidFill>
                   <a:srgbClr val="9B7744"/>
@@ -7212,7 +7122,7 @@
             </a:defPPr>
           </a:lstStyle>
           <a:p xmlns:a="http://schemas.openxmlformats.org/drawingml/2006/main">
-            <a:pPr>
+            <a:pPr algn="l">
               <a:defRPr sz="1050" b="1">
                 <a:solidFill>
                   <a:srgbClr val="9B7744"/>
@@ -7241,7 +7151,7 @@
           <p:cNvPr id="2" name="">
             <a:extLst xmlns:a="http://schemas.openxmlformats.org/drawingml/2006/main">
               <a:ext uri="{FF2B5EF4-FFF2-40B4-BE49-F238E27FC236}">
-                <a16:creationId xmlns:a16="http://schemas.microsoft.com/office/drawing/2014/main" id="{2E6249D1-F19E-439F-B358-B9642C1D3209}"/>
+                <a16:creationId xmlns:a16="http://schemas.microsoft.com/office/drawing/2014/main" id="{EDF8CBBD-9CFE-4220-8F6B-1C192CB43CEC}"/>
               </a:ext>
             </a:extLst>
           </p:cNvPr>
@@ -7268,7 +7178,7 @@
             <a:noAutofit/>
           </a:bodyPr>
           <a:lstStyle xmlns:a="http://schemas.openxmlformats.org/drawingml/2006/main">
-            <a:defPPr>
+            <a:defPPr algn="l">
               <a:defRPr sz="3450" b="1">
                 <a:solidFill>
                   <a:srgbClr val="1B1D19"/>
@@ -7280,7 +7190,7 @@
             </a:defPPr>
           </a:lstStyle>
           <a:p xmlns:a="http://schemas.openxmlformats.org/drawingml/2006/main">
-            <a:pPr>
+            <a:pPr algn="l">
               <a:defRPr sz="3450" b="1">
                 <a:solidFill>
                   <a:srgbClr val="1B1D19"/>
@@ -7309,7 +7219,7 @@
           <p:cNvPr id="3" name="">
             <a:extLst xmlns:a="http://schemas.openxmlformats.org/drawingml/2006/main">
               <a:ext uri="{FF2B5EF4-FFF2-40B4-BE49-F238E27FC236}">
-                <a16:creationId xmlns:a16="http://schemas.microsoft.com/office/drawing/2014/main" id="{49DDCC07-55B4-4FF3-ADCD-1FE699A74A67}"/>
+                <a16:creationId xmlns:a16="http://schemas.microsoft.com/office/drawing/2014/main" id="{4A396832-6E4C-45D7-85DA-E4315156AFB2}"/>
               </a:ext>
             </a:extLst>
           </p:cNvPr>
@@ -7336,7 +7246,7 @@
             <a:noAutofit/>
           </a:bodyPr>
           <a:lstStyle xmlns:a="http://schemas.openxmlformats.org/drawingml/2006/main">
-            <a:defPPr>
+            <a:defPPr algn="l">
               <a:defRPr sz="3225" b="0">
                 <a:solidFill>
                   <a:srgbClr val="6B7265"/>
@@ -7348,7 +7258,7 @@
             </a:defPPr>
           </a:lstStyle>
           <a:p xmlns:a="http://schemas.openxmlformats.org/drawingml/2006/main">
-            <a:pPr>
+            <a:pPr algn="l">
               <a:defRPr sz="3225" b="0">
                 <a:solidFill>
                   <a:srgbClr val="6B7265"/>
@@ -7377,7 +7287,7 @@
           <p:cNvPr id="4" name="">
             <a:extLst xmlns:a="http://schemas.openxmlformats.org/drawingml/2006/main">
               <a:ext uri="{FF2B5EF4-FFF2-40B4-BE49-F238E27FC236}">
-                <a16:creationId xmlns:a16="http://schemas.microsoft.com/office/drawing/2014/main" id="{8F4DDEDD-616D-4046-9D44-02B58CB10F01}"/>
+                <a16:creationId xmlns:a16="http://schemas.microsoft.com/office/drawing/2014/main" id="{050D5ACB-4128-4C59-A1F6-EBBCB66F7AD9}"/>
               </a:ext>
             </a:extLst>
           </p:cNvPr>
@@ -7404,7 +7314,7 @@
             <a:noAutofit/>
           </a:bodyPr>
           <a:lstStyle xmlns:a="http://schemas.openxmlformats.org/drawingml/2006/main">
-            <a:defPPr>
+            <a:defPPr algn="l">
               <a:defRPr sz="975" b="0">
                 <a:solidFill>
                   <a:srgbClr val="858B7E"/>
@@ -7416,7 +7326,7 @@
             </a:defPPr>
           </a:lstStyle>
           <a:p xmlns:a="http://schemas.openxmlformats.org/drawingml/2006/main">
-            <a:pPr>
+            <a:pPr algn="l">
               <a:defRPr sz="975" b="0">
                 <a:solidFill>
                   <a:srgbClr val="858B7E"/>
@@ -7445,7 +7355,7 @@
           <p:cNvPr id="5" name="">
             <a:extLst xmlns:a="http://schemas.openxmlformats.org/drawingml/2006/main">
               <a:ext uri="{FF2B5EF4-FFF2-40B4-BE49-F238E27FC236}">
-                <a16:creationId xmlns:a16="http://schemas.microsoft.com/office/drawing/2014/main" id="{FF0733FA-C7AC-49AD-9C49-F0BEAEEEBA4C}"/>
+                <a16:creationId xmlns:a16="http://schemas.microsoft.com/office/drawing/2014/main" id="{EC9C5626-B4DA-452D-A2CC-C536A0B6EEBE}"/>
               </a:ext>
             </a:extLst>
           </p:cNvPr>
@@ -7472,7 +7382,7 @@
             <a:noAutofit/>
           </a:bodyPr>
           <a:lstStyle xmlns:a="http://schemas.openxmlformats.org/drawingml/2006/main">
-            <a:defPPr>
+            <a:defPPr algn="l">
               <a:defRPr sz="975" b="0">
                 <a:solidFill>
                   <a:srgbClr val="858B7E"/>
@@ -7484,7 +7394,7 @@
             </a:defPPr>
           </a:lstStyle>
           <a:p xmlns:a="http://schemas.openxmlformats.org/drawingml/2006/main">
-            <a:pPr>
+            <a:pPr algn="l">
               <a:defRPr sz="975" b="0">
                 <a:solidFill>
                   <a:srgbClr val="858B7E"/>
@@ -7511,7 +7421,7 @@
     </p:spTree>
     <p:extLst>
       <p:ext uri="{BB962C8B-B14F-4D97-AF65-F5344CB8AC3E}">
-        <p14:creationId xmlns:p14="http://schemas.microsoft.com/office/powerpoint/2010/main" val="1409525333"/>
+        <p14:creationId xmlns:p14="http://schemas.microsoft.com/office/powerpoint/2010/main" val="728180069"/>
       </p:ext>
     </p:extLst>
   </p:cSld>
@@ -7542,7 +7452,7 @@
           <p:cNvPr id="7" name="">
             <a:extLst xmlns:a="http://schemas.openxmlformats.org/drawingml/2006/main">
               <a:ext uri="{FF2B5EF4-FFF2-40B4-BE49-F238E27FC236}">
-                <a16:creationId xmlns:a16="http://schemas.microsoft.com/office/drawing/2014/main" id="{2A21CD0C-3CCC-4814-B1D2-483FBAE9E1E4}"/>
+                <a16:creationId xmlns:a16="http://schemas.microsoft.com/office/drawing/2014/main" id="{4BE6C08D-6C82-403E-ACC9-6BC583AE4C76}"/>
               </a:ext>
             </a:extLst>
           </p:cNvPr>
@@ -7569,7 +7479,7 @@
             <a:noAutofit/>
           </a:bodyPr>
           <a:lstStyle xmlns:a="http://schemas.openxmlformats.org/drawingml/2006/main">
-            <a:defPPr>
+            <a:defPPr algn="l">
               <a:defRPr sz="1050" b="1">
                 <a:solidFill>
                   <a:srgbClr val="9B7744"/>
@@ -7581,7 +7491,7 @@
             </a:defPPr>
           </a:lstStyle>
           <a:p xmlns:a="http://schemas.openxmlformats.org/drawingml/2006/main">
-            <a:pPr>
+            <a:pPr algn="l">
               <a:defRPr sz="1050" b="1">
                 <a:solidFill>
                   <a:srgbClr val="9B7744"/>
@@ -7610,7 +7520,7 @@
           <p:cNvPr id="2" name="">
             <a:extLst xmlns:a="http://schemas.openxmlformats.org/drawingml/2006/main">
               <a:ext uri="{FF2B5EF4-FFF2-40B4-BE49-F238E27FC236}">
-                <a16:creationId xmlns:a16="http://schemas.microsoft.com/office/drawing/2014/main" id="{24707496-FD04-40A8-BB45-F195CB0A5AB2}"/>
+                <a16:creationId xmlns:a16="http://schemas.microsoft.com/office/drawing/2014/main" id="{2B099948-80AF-4755-BC9D-66D15834077E}"/>
               </a:ext>
             </a:extLst>
           </p:cNvPr>
@@ -7637,7 +7547,7 @@
             <a:noAutofit/>
           </a:bodyPr>
           <a:lstStyle xmlns:a="http://schemas.openxmlformats.org/drawingml/2006/main">
-            <a:defPPr>
+            <a:defPPr algn="l">
               <a:defRPr sz="3450" b="1">
                 <a:solidFill>
                   <a:srgbClr val="1B1D19"/>
@@ -7649,7 +7559,7 @@
             </a:defPPr>
           </a:lstStyle>
           <a:p xmlns:a="http://schemas.openxmlformats.org/drawingml/2006/main">
-            <a:pPr>
+            <a:pPr algn="l">
               <a:defRPr sz="3450" b="1">
                 <a:solidFill>
                   <a:srgbClr val="1B1D19"/>
@@ -7678,7 +7588,7 @@
           <p:cNvPr id="3" name="">
             <a:extLst xmlns:a="http://schemas.openxmlformats.org/drawingml/2006/main">
               <a:ext uri="{FF2B5EF4-FFF2-40B4-BE49-F238E27FC236}">
-                <a16:creationId xmlns:a16="http://schemas.microsoft.com/office/drawing/2014/main" id="{2F7920E3-5D01-42BD-A53F-4C91B38700EF}"/>
+                <a16:creationId xmlns:a16="http://schemas.microsoft.com/office/drawing/2014/main" id="{6CEFE01A-78CA-410F-8C5F-0481E1475EEC}"/>
               </a:ext>
             </a:extLst>
           </p:cNvPr>
@@ -7705,7 +7615,7 @@
             <a:noAutofit/>
           </a:bodyPr>
           <a:lstStyle xmlns:a="http://schemas.openxmlformats.org/drawingml/2006/main">
-            <a:defPPr>
+            <a:defPPr algn="l">
               <a:defRPr sz="2550" b="0">
                 <a:solidFill>
                   <a:srgbClr val="6B7265"/>
@@ -7717,7 +7627,7 @@
             </a:defPPr>
           </a:lstStyle>
           <a:p xmlns:a="http://schemas.openxmlformats.org/drawingml/2006/main">
-            <a:pPr>
+            <a:pPr algn="l">
               <a:defRPr sz="2550" b="0">
                 <a:solidFill>
                   <a:srgbClr val="6B7265"/>
@@ -7746,7 +7656,7 @@
           <p:cNvPr id="4" name="">
             <a:extLst xmlns:a="http://schemas.openxmlformats.org/drawingml/2006/main">
               <a:ext uri="{FF2B5EF4-FFF2-40B4-BE49-F238E27FC236}">
-                <a16:creationId xmlns:a16="http://schemas.microsoft.com/office/drawing/2014/main" id="{FFA248D5-4D0E-44ED-9AB3-3120CBBB30C1}"/>
+                <a16:creationId xmlns:a16="http://schemas.microsoft.com/office/drawing/2014/main" id="{2259E8F4-6E42-43BC-8118-97B6128680FD}"/>
               </a:ext>
             </a:extLst>
           </p:cNvPr>
@@ -7756,7 +7666,7 @@
           <p:nvPr/>
         </p:nvPicPr>
         <p:blipFill>
-          <a:blip xmlns:r="http://schemas.openxmlformats.org/officeDocument/2006/relationships" xmlns:a="http://schemas.openxmlformats.org/drawingml/2006/main" r:embed="R8653044f626d465b"/>
+          <a:blip xmlns:r="http://schemas.openxmlformats.org/officeDocument/2006/relationships" xmlns:a="http://schemas.openxmlformats.org/drawingml/2006/main" r:embed="R52df518727ce49a0"/>
           <a:stretch xmlns:a="http://schemas.openxmlformats.org/drawingml/2006/main"/>
         </p:blipFill>
         <p:spPr>
@@ -7774,7 +7684,7 @@
           <p:cNvPr id="5" name="">
             <a:extLst xmlns:a="http://schemas.openxmlformats.org/drawingml/2006/main">
               <a:ext uri="{FF2B5EF4-FFF2-40B4-BE49-F238E27FC236}">
-                <a16:creationId xmlns:a16="http://schemas.microsoft.com/office/drawing/2014/main" id="{26648A6C-5704-4F70-A9F7-06A133198D6A}"/>
+                <a16:creationId xmlns:a16="http://schemas.microsoft.com/office/drawing/2014/main" id="{087CD8BF-47F1-438E-9CF4-618BDE953733}"/>
               </a:ext>
             </a:extLst>
           </p:cNvPr>
@@ -7801,7 +7711,7 @@
             <a:noAutofit/>
           </a:bodyPr>
           <a:lstStyle xmlns:a="http://schemas.openxmlformats.org/drawingml/2006/main">
-            <a:defPPr>
+            <a:defPPr algn="l">
               <a:defRPr sz="975" b="0">
                 <a:solidFill>
                   <a:srgbClr val="858B7E"/>
@@ -7813,7 +7723,7 @@
             </a:defPPr>
           </a:lstStyle>
           <a:p xmlns:a="http://schemas.openxmlformats.org/drawingml/2006/main">
-            <a:pPr>
+            <a:pPr algn="l">
               <a:defRPr sz="975" b="0">
                 <a:solidFill>
                   <a:srgbClr val="858B7E"/>
@@ -7842,7 +7752,7 @@
           <p:cNvPr id="6" name="">
             <a:extLst xmlns:a="http://schemas.openxmlformats.org/drawingml/2006/main">
               <a:ext uri="{FF2B5EF4-FFF2-40B4-BE49-F238E27FC236}">
-                <a16:creationId xmlns:a16="http://schemas.microsoft.com/office/drawing/2014/main" id="{632CB211-003D-46BC-922F-AA1723E2056D}"/>
+                <a16:creationId xmlns:a16="http://schemas.microsoft.com/office/drawing/2014/main" id="{C843C27F-B039-4F74-9515-AAC8F080CF78}"/>
               </a:ext>
             </a:extLst>
           </p:cNvPr>
@@ -7869,7 +7779,7 @@
             <a:noAutofit/>
           </a:bodyPr>
           <a:lstStyle xmlns:a="http://schemas.openxmlformats.org/drawingml/2006/main">
-            <a:defPPr>
+            <a:defPPr algn="l">
               <a:defRPr sz="975" b="0">
                 <a:solidFill>
                   <a:srgbClr val="858B7E"/>
@@ -7881,7 +7791,7 @@
             </a:defPPr>
           </a:lstStyle>
           <a:p xmlns:a="http://schemas.openxmlformats.org/drawingml/2006/main">
-            <a:pPr>
+            <a:pPr algn="l">
               <a:defRPr sz="975" b="0">
                 <a:solidFill>
                   <a:srgbClr val="858B7E"/>
@@ -7908,7 +7818,7 @@
     </p:spTree>
     <p:extLst>
       <p:ext uri="{BB962C8B-B14F-4D97-AF65-F5344CB8AC3E}">
-        <p14:creationId xmlns:p14="http://schemas.microsoft.com/office/powerpoint/2010/main" val="329523382"/>
+        <p14:creationId xmlns:p14="http://schemas.microsoft.com/office/powerpoint/2010/main" val="504326415"/>
       </p:ext>
     </p:extLst>
   </p:cSld>
@@ -7939,7 +7849,7 @@
           <p:cNvPr id="14" name="">
             <a:extLst xmlns:a="http://schemas.openxmlformats.org/drawingml/2006/main">
               <a:ext uri="{FF2B5EF4-FFF2-40B4-BE49-F238E27FC236}">
-                <a16:creationId xmlns:a16="http://schemas.microsoft.com/office/drawing/2014/main" id="{7B5BE419-D4C8-4892-8EAC-69CF0B0E6E4F}"/>
+                <a16:creationId xmlns:a16="http://schemas.microsoft.com/office/drawing/2014/main" id="{38E66460-D960-4FD6-AF1A-05FD27E62860}"/>
               </a:ext>
             </a:extLst>
           </p:cNvPr>
@@ -7966,7 +7876,7 @@
             <a:noAutofit/>
           </a:bodyPr>
           <a:lstStyle xmlns:a="http://schemas.openxmlformats.org/drawingml/2006/main">
-            <a:defPPr>
+            <a:defPPr algn="l">
               <a:defRPr sz="1050" b="1">
                 <a:solidFill>
                   <a:srgbClr val="9B7744"/>
@@ -7978,7 +7888,7 @@
             </a:defPPr>
           </a:lstStyle>
           <a:p xmlns:a="http://schemas.openxmlformats.org/drawingml/2006/main">
-            <a:pPr>
+            <a:pPr algn="l">
               <a:defRPr sz="1050" b="1">
                 <a:solidFill>
                   <a:srgbClr val="9B7744"/>
@@ -8007,7 +7917,7 @@
           <p:cNvPr id="2" name="">
             <a:extLst xmlns:a="http://schemas.openxmlformats.org/drawingml/2006/main">
               <a:ext uri="{FF2B5EF4-FFF2-40B4-BE49-F238E27FC236}">
-                <a16:creationId xmlns:a16="http://schemas.microsoft.com/office/drawing/2014/main" id="{5A19D2AA-F309-45C1-8584-EED4502AFFC3}"/>
+                <a16:creationId xmlns:a16="http://schemas.microsoft.com/office/drawing/2014/main" id="{053D07E6-0D77-49D4-8655-A5D66DC726AF}"/>
               </a:ext>
             </a:extLst>
           </p:cNvPr>
@@ -8034,7 +7944,7 @@
             <a:noAutofit/>
           </a:bodyPr>
           <a:lstStyle xmlns:a="http://schemas.openxmlformats.org/drawingml/2006/main">
-            <a:defPPr>
+            <a:defPPr algn="l">
               <a:defRPr sz="3450" b="1">
                 <a:solidFill>
                   <a:srgbClr val="1B1D19"/>
@@ -8046,7 +7956,7 @@
             </a:defPPr>
           </a:lstStyle>
           <a:p xmlns:a="http://schemas.openxmlformats.org/drawingml/2006/main">
-            <a:pPr>
+            <a:pPr algn="l">
               <a:defRPr sz="3450" b="1">
                 <a:solidFill>
                   <a:srgbClr val="1B1D19"/>
@@ -8075,7 +7985,7 @@
           <p:cNvPr id="3" name="">
             <a:extLst xmlns:a="http://schemas.openxmlformats.org/drawingml/2006/main">
               <a:ext uri="{FF2B5EF4-FFF2-40B4-BE49-F238E27FC236}">
-                <a16:creationId xmlns:a16="http://schemas.microsoft.com/office/drawing/2014/main" id="{F2BD37C9-D41A-4CB4-886E-9BDBA28DAED6}"/>
+                <a16:creationId xmlns:a16="http://schemas.microsoft.com/office/drawing/2014/main" id="{D5120603-2723-4CCF-B04D-A738B462EED0}"/>
               </a:ext>
             </a:extLst>
           </p:cNvPr>
@@ -8105,7 +8015,7 @@
           <p:cNvPr id="4" name="">
             <a:extLst xmlns:a="http://schemas.openxmlformats.org/drawingml/2006/main">
               <a:ext uri="{FF2B5EF4-FFF2-40B4-BE49-F238E27FC236}">
-                <a16:creationId xmlns:a16="http://schemas.microsoft.com/office/drawing/2014/main" id="{4448458E-C1A9-4748-A06C-4DE5850D9212}"/>
+                <a16:creationId xmlns:a16="http://schemas.microsoft.com/office/drawing/2014/main" id="{4AF922A0-9D52-4444-AE5B-62F1FF85F75E}"/>
               </a:ext>
             </a:extLst>
           </p:cNvPr>
@@ -8132,7 +8042,7 @@
             <a:noAutofit/>
           </a:bodyPr>
           <a:lstStyle xmlns:a="http://schemas.openxmlformats.org/drawingml/2006/main">
-            <a:defPPr>
+            <a:defPPr algn="l">
               <a:defRPr sz="2475" b="1">
                 <a:solidFill>
                   <a:srgbClr val="1B1D19"/>
@@ -8144,7 +8054,7 @@
             </a:defPPr>
           </a:lstStyle>
           <a:p xmlns:a="http://schemas.openxmlformats.org/drawingml/2006/main">
-            <a:pPr>
+            <a:pPr algn="l">
               <a:defRPr sz="2475" b="1">
                 <a:solidFill>
                   <a:srgbClr val="1B1D19"/>
@@ -8173,7 +8083,7 @@
           <p:cNvPr id="5" name="">
             <a:extLst xmlns:a="http://schemas.openxmlformats.org/drawingml/2006/main">
               <a:ext uri="{FF2B5EF4-FFF2-40B4-BE49-F238E27FC236}">
-                <a16:creationId xmlns:a16="http://schemas.microsoft.com/office/drawing/2014/main" id="{2F10588E-CA5D-4B7C-BECD-CB8EBDA9E02F}"/>
+                <a16:creationId xmlns:a16="http://schemas.microsoft.com/office/drawing/2014/main" id="{B9F66F0B-7F03-4279-97E6-FD6FD5BC5A29}"/>
               </a:ext>
             </a:extLst>
           </p:cNvPr>
@@ -8200,7 +8110,7 @@
             <a:noAutofit/>
           </a:bodyPr>
           <a:lstStyle xmlns:a="http://schemas.openxmlformats.org/drawingml/2006/main">
-            <a:defPPr>
+            <a:defPPr algn="l">
               <a:defRPr sz="1800" b="0">
                 <a:solidFill>
                   <a:srgbClr val="6B7265"/>
@@ -8212,7 +8122,7 @@
             </a:defPPr>
           </a:lstStyle>
           <a:p xmlns:a="http://schemas.openxmlformats.org/drawingml/2006/main">
-            <a:pPr>
+            <a:pPr algn="l">
               <a:defRPr sz="1800" b="0">
                 <a:solidFill>
                   <a:srgbClr val="6B7265"/>
@@ -8235,7 +8145,7 @@
             </a:r>
           </a:p>
           <a:p xmlns:a="http://schemas.openxmlformats.org/drawingml/2006/main">
-            <a:pPr>
+            <a:pPr algn="l">
               <a:defRPr sz="1800" b="0">
                 <a:solidFill>
                   <a:srgbClr val="6B7265"/>
@@ -8264,7 +8174,7 @@
           <p:cNvPr id="6" name="">
             <a:extLst xmlns:a="http://schemas.openxmlformats.org/drawingml/2006/main">
               <a:ext uri="{FF2B5EF4-FFF2-40B4-BE49-F238E27FC236}">
-                <a16:creationId xmlns:a16="http://schemas.microsoft.com/office/drawing/2014/main" id="{A0A2583C-6021-4D84-A077-6DAC2F194B4F}"/>
+                <a16:creationId xmlns:a16="http://schemas.microsoft.com/office/drawing/2014/main" id="{C131F9FB-CB2C-4346-87ED-A2E80064C4C4}"/>
               </a:ext>
             </a:extLst>
           </p:cNvPr>
@@ -8294,7 +8204,7 @@
           <p:cNvPr id="7" name="">
             <a:extLst xmlns:a="http://schemas.openxmlformats.org/drawingml/2006/main">
               <a:ext uri="{FF2B5EF4-FFF2-40B4-BE49-F238E27FC236}">
-                <a16:creationId xmlns:a16="http://schemas.microsoft.com/office/drawing/2014/main" id="{5EDE8503-3D98-4A06-8012-C1FA64AB56DF}"/>
+                <a16:creationId xmlns:a16="http://schemas.microsoft.com/office/drawing/2014/main" id="{518BED8B-31C9-4E32-9DEF-BD91F7171781}"/>
               </a:ext>
             </a:extLst>
           </p:cNvPr>
@@ -8321,7 +8231,7 @@
             <a:noAutofit/>
           </a:bodyPr>
           <a:lstStyle xmlns:a="http://schemas.openxmlformats.org/drawingml/2006/main">
-            <a:defPPr>
+            <a:defPPr algn="l">
               <a:defRPr sz="2475" b="1">
                 <a:solidFill>
                   <a:srgbClr val="1B1D19"/>
@@ -8333,7 +8243,7 @@
             </a:defPPr>
           </a:lstStyle>
           <a:p xmlns:a="http://schemas.openxmlformats.org/drawingml/2006/main">
-            <a:pPr>
+            <a:pPr algn="l">
               <a:defRPr sz="2475" b="1">
                 <a:solidFill>
                   <a:srgbClr val="1B1D19"/>
@@ -8362,7 +8272,7 @@
           <p:cNvPr id="8" name="">
             <a:extLst xmlns:a="http://schemas.openxmlformats.org/drawingml/2006/main">
               <a:ext uri="{FF2B5EF4-FFF2-40B4-BE49-F238E27FC236}">
-                <a16:creationId xmlns:a16="http://schemas.microsoft.com/office/drawing/2014/main" id="{785503D1-CB32-4F1A-AEA1-D641502C045C}"/>
+                <a16:creationId xmlns:a16="http://schemas.microsoft.com/office/drawing/2014/main" id="{592B5856-E657-46D5-9AF8-8700A9968C0E}"/>
               </a:ext>
             </a:extLst>
           </p:cNvPr>
@@ -8389,7 +8299,7 @@
             <a:noAutofit/>
           </a:bodyPr>
           <a:lstStyle xmlns:a="http://schemas.openxmlformats.org/drawingml/2006/main">
-            <a:defPPr>
+            <a:defPPr algn="l">
               <a:defRPr sz="1800" b="0">
                 <a:solidFill>
                   <a:srgbClr val="6B7265"/>
@@ -8401,7 +8311,7 @@
             </a:defPPr>
           </a:lstStyle>
           <a:p xmlns:a="http://schemas.openxmlformats.org/drawingml/2006/main">
-            <a:pPr>
+            <a:pPr algn="l">
               <a:defRPr sz="1800" b="0">
                 <a:solidFill>
                   <a:srgbClr val="6B7265"/>
@@ -8430,7 +8340,7 @@
           <p:cNvPr id="9" name="">
             <a:extLst xmlns:a="http://schemas.openxmlformats.org/drawingml/2006/main">
               <a:ext uri="{FF2B5EF4-FFF2-40B4-BE49-F238E27FC236}">
-                <a16:creationId xmlns:a16="http://schemas.microsoft.com/office/drawing/2014/main" id="{D4BA40E3-F0DE-4448-B9DE-5809182C49E7}"/>
+                <a16:creationId xmlns:a16="http://schemas.microsoft.com/office/drawing/2014/main" id="{D691A902-89BE-4757-900D-DFA32AC03D3F}"/>
               </a:ext>
             </a:extLst>
           </p:cNvPr>
@@ -8460,7 +8370,7 @@
           <p:cNvPr id="10" name="">
             <a:extLst xmlns:a="http://schemas.openxmlformats.org/drawingml/2006/main">
               <a:ext uri="{FF2B5EF4-FFF2-40B4-BE49-F238E27FC236}">
-                <a16:creationId xmlns:a16="http://schemas.microsoft.com/office/drawing/2014/main" id="{8108C06A-191A-4E36-9373-41FE0A14318A}"/>
+                <a16:creationId xmlns:a16="http://schemas.microsoft.com/office/drawing/2014/main" id="{D0B7B565-9841-4E4F-BCFD-57FB11A3C35B}"/>
               </a:ext>
             </a:extLst>
           </p:cNvPr>
@@ -8470,7 +8380,7 @@
           <p:nvPr/>
         </p:nvPicPr>
         <p:blipFill>
-          <a:blip xmlns:r="http://schemas.openxmlformats.org/officeDocument/2006/relationships" xmlns:a="http://schemas.openxmlformats.org/drawingml/2006/main" r:embed="R83ae52e145c84415"/>
+          <a:blip xmlns:r="http://schemas.openxmlformats.org/officeDocument/2006/relationships" xmlns:a="http://schemas.openxmlformats.org/drawingml/2006/main" r:embed="R385b817c7b724199"/>
           <a:stretch xmlns:a="http://schemas.openxmlformats.org/drawingml/2006/main"/>
         </p:blipFill>
         <p:spPr>
@@ -8488,7 +8398,7 @@
           <p:cNvPr id="11" name="">
             <a:extLst xmlns:a="http://schemas.openxmlformats.org/drawingml/2006/main">
               <a:ext uri="{FF2B5EF4-FFF2-40B4-BE49-F238E27FC236}">
-                <a16:creationId xmlns:a16="http://schemas.microsoft.com/office/drawing/2014/main" id="{3474C657-2D64-416C-8D2F-41F002551EDE}"/>
+                <a16:creationId xmlns:a16="http://schemas.microsoft.com/office/drawing/2014/main" id="{E0097F5D-3031-4628-A6FA-45208EDECCF4}"/>
               </a:ext>
             </a:extLst>
           </p:cNvPr>
@@ -8515,7 +8425,7 @@
             <a:noAutofit/>
           </a:bodyPr>
           <a:lstStyle xmlns:a="http://schemas.openxmlformats.org/drawingml/2006/main">
-            <a:defPPr>
+            <a:defPPr algn="l">
               <a:defRPr sz="1050" b="0">
                 <a:solidFill>
                   <a:srgbClr val="6B7265"/>
@@ -8527,7 +8437,7 @@
             </a:defPPr>
           </a:lstStyle>
           <a:p xmlns:a="http://schemas.openxmlformats.org/drawingml/2006/main">
-            <a:pPr>
+            <a:pPr algn="l">
               <a:defRPr sz="1050" b="0">
                 <a:solidFill>
                   <a:srgbClr val="6B7265"/>
@@ -8556,7 +8466,7 @@
           <p:cNvPr id="12" name="">
             <a:extLst xmlns:a="http://schemas.openxmlformats.org/drawingml/2006/main">
               <a:ext uri="{FF2B5EF4-FFF2-40B4-BE49-F238E27FC236}">
-                <a16:creationId xmlns:a16="http://schemas.microsoft.com/office/drawing/2014/main" id="{F928B746-5265-4566-A7F8-F5B97EC7070B}"/>
+                <a16:creationId xmlns:a16="http://schemas.microsoft.com/office/drawing/2014/main" id="{99B51878-C20E-4EFA-A0A7-FDAA7EA65E10}"/>
               </a:ext>
             </a:extLst>
           </p:cNvPr>
@@ -8583,7 +8493,7 @@
             <a:noAutofit/>
           </a:bodyPr>
           <a:lstStyle xmlns:a="http://schemas.openxmlformats.org/drawingml/2006/main">
-            <a:defPPr>
+            <a:defPPr algn="l">
               <a:defRPr sz="975" b="0">
                 <a:solidFill>
                   <a:srgbClr val="858B7E"/>
@@ -8595,7 +8505,7 @@
             </a:defPPr>
           </a:lstStyle>
           <a:p xmlns:a="http://schemas.openxmlformats.org/drawingml/2006/main">
-            <a:pPr>
+            <a:pPr algn="l">
               <a:defRPr sz="975" b="0">
                 <a:solidFill>
                   <a:srgbClr val="858B7E"/>
@@ -8624,7 +8534,7 @@
           <p:cNvPr id="13" name="">
             <a:extLst xmlns:a="http://schemas.openxmlformats.org/drawingml/2006/main">
               <a:ext uri="{FF2B5EF4-FFF2-40B4-BE49-F238E27FC236}">
-                <a16:creationId xmlns:a16="http://schemas.microsoft.com/office/drawing/2014/main" id="{99294542-5840-44B2-A5CC-9A2A65DC892C}"/>
+                <a16:creationId xmlns:a16="http://schemas.microsoft.com/office/drawing/2014/main" id="{98461DB2-7223-4414-8994-D8CFC6F0DD27}"/>
               </a:ext>
             </a:extLst>
           </p:cNvPr>
@@ -8651,7 +8561,7 @@
             <a:noAutofit/>
           </a:bodyPr>
           <a:lstStyle xmlns:a="http://schemas.openxmlformats.org/drawingml/2006/main">
-            <a:defPPr>
+            <a:defPPr algn="l">
               <a:defRPr sz="975" b="0">
                 <a:solidFill>
                   <a:srgbClr val="858B7E"/>
@@ -8663,7 +8573,7 @@
             </a:defPPr>
           </a:lstStyle>
           <a:p xmlns:a="http://schemas.openxmlformats.org/drawingml/2006/main">
-            <a:pPr>
+            <a:pPr algn="l">
               <a:defRPr sz="975" b="0">
                 <a:solidFill>
                   <a:srgbClr val="858B7E"/>
@@ -8690,7 +8600,7 @@
     </p:spTree>
     <p:extLst>
       <p:ext uri="{BB962C8B-B14F-4D97-AF65-F5344CB8AC3E}">
-        <p14:creationId xmlns:p14="http://schemas.microsoft.com/office/powerpoint/2010/main" val="1348005585"/>
+        <p14:creationId xmlns:p14="http://schemas.microsoft.com/office/powerpoint/2010/main" val="1037200205"/>
       </p:ext>
     </p:extLst>
   </p:cSld>
@@ -8721,7 +8631,7 @@
           <p:cNvPr id="11" name="">
             <a:extLst xmlns:a="http://schemas.openxmlformats.org/drawingml/2006/main">
               <a:ext uri="{FF2B5EF4-FFF2-40B4-BE49-F238E27FC236}">
-                <a16:creationId xmlns:a16="http://schemas.microsoft.com/office/drawing/2014/main" id="{45F5C1FA-C9BD-4BEC-BEA6-46D2B26D6FA6}"/>
+                <a16:creationId xmlns:a16="http://schemas.microsoft.com/office/drawing/2014/main" id="{97088DFC-491C-4C1B-B12F-9897868B5D5F}"/>
               </a:ext>
             </a:extLst>
           </p:cNvPr>
@@ -8748,7 +8658,7 @@
             <a:noAutofit/>
           </a:bodyPr>
           <a:lstStyle xmlns:a="http://schemas.openxmlformats.org/drawingml/2006/main">
-            <a:defPPr>
+            <a:defPPr algn="l">
               <a:defRPr sz="1050" b="1">
                 <a:solidFill>
                   <a:srgbClr val="9B7744"/>
@@ -8760,7 +8670,7 @@
             </a:defPPr>
           </a:lstStyle>
           <a:p xmlns:a="http://schemas.openxmlformats.org/drawingml/2006/main">
-            <a:pPr>
+            <a:pPr algn="l">
               <a:defRPr sz="1050" b="1">
                 <a:solidFill>
                   <a:srgbClr val="9B7744"/>
@@ -8789,7 +8699,7 @@
           <p:cNvPr id="2" name="">
             <a:extLst xmlns:a="http://schemas.openxmlformats.org/drawingml/2006/main">
               <a:ext uri="{FF2B5EF4-FFF2-40B4-BE49-F238E27FC236}">
-                <a16:creationId xmlns:a16="http://schemas.microsoft.com/office/drawing/2014/main" id="{04E0CFBE-2B10-4520-B9C1-63DCA71D1F20}"/>
+                <a16:creationId xmlns:a16="http://schemas.microsoft.com/office/drawing/2014/main" id="{8B1E144D-E2E1-4FA7-9C94-DF7F3DB9192A}"/>
               </a:ext>
             </a:extLst>
           </p:cNvPr>
@@ -8816,7 +8726,7 @@
             <a:noAutofit/>
           </a:bodyPr>
           <a:lstStyle xmlns:a="http://schemas.openxmlformats.org/drawingml/2006/main">
-            <a:defPPr>
+            <a:defPPr algn="l">
               <a:defRPr sz="3450" b="1">
                 <a:solidFill>
                   <a:srgbClr val="1B1D19"/>
@@ -8828,7 +8738,7 @@
             </a:defPPr>
           </a:lstStyle>
           <a:p xmlns:a="http://schemas.openxmlformats.org/drawingml/2006/main">
-            <a:pPr>
+            <a:pPr algn="l">
               <a:defRPr sz="3450" b="1">
                 <a:solidFill>
                   <a:srgbClr val="1B1D19"/>
@@ -8857,7 +8767,7 @@
           <p:cNvPr id="3" name="">
             <a:extLst xmlns:a="http://schemas.openxmlformats.org/drawingml/2006/main">
               <a:ext uri="{FF2B5EF4-FFF2-40B4-BE49-F238E27FC236}">
-                <a16:creationId xmlns:a16="http://schemas.microsoft.com/office/drawing/2014/main" id="{5258DF64-27C3-4B5B-BE98-82C4B2FAC97F}"/>
+                <a16:creationId xmlns:a16="http://schemas.microsoft.com/office/drawing/2014/main" id="{13922CD8-6E45-4E8B-A6C6-65A49CE65506}"/>
               </a:ext>
             </a:extLst>
           </p:cNvPr>
@@ -8887,7 +8797,7 @@
           <p:cNvPr id="4" name="">
             <a:extLst xmlns:a="http://schemas.openxmlformats.org/drawingml/2006/main">
               <a:ext uri="{FF2B5EF4-FFF2-40B4-BE49-F238E27FC236}">
-                <a16:creationId xmlns:a16="http://schemas.microsoft.com/office/drawing/2014/main" id="{FBAD99DC-EFF8-4799-86CE-0AFA8FF88EDD}"/>
+                <a16:creationId xmlns:a16="http://schemas.microsoft.com/office/drawing/2014/main" id="{27B2692C-CF11-4478-AF4B-07E94610A8BD}"/>
               </a:ext>
             </a:extLst>
           </p:cNvPr>
@@ -8914,7 +8824,7 @@
             <a:noAutofit/>
           </a:bodyPr>
           <a:lstStyle xmlns:a="http://schemas.openxmlformats.org/drawingml/2006/main">
-            <a:defPPr>
+            <a:defPPr algn="l">
               <a:defRPr sz="2325" b="1">
                 <a:solidFill>
                   <a:srgbClr val="1B1D19"/>
@@ -8926,7 +8836,7 @@
             </a:defPPr>
           </a:lstStyle>
           <a:p xmlns:a="http://schemas.openxmlformats.org/drawingml/2006/main">
-            <a:pPr>
+            <a:pPr algn="l">
               <a:defRPr sz="2325" b="1">
                 <a:solidFill>
                   <a:srgbClr val="1B1D19"/>
@@ -8955,7 +8865,7 @@
           <p:cNvPr id="5" name="">
             <a:extLst xmlns:a="http://schemas.openxmlformats.org/drawingml/2006/main">
               <a:ext uri="{FF2B5EF4-FFF2-40B4-BE49-F238E27FC236}">
-                <a16:creationId xmlns:a16="http://schemas.microsoft.com/office/drawing/2014/main" id="{B2D73DAB-9676-4220-A18F-E7D75FD2455E}"/>
+                <a16:creationId xmlns:a16="http://schemas.microsoft.com/office/drawing/2014/main" id="{3D0A9FC0-BF32-46B2-8E32-C8A284B1D5A4}"/>
               </a:ext>
             </a:extLst>
           </p:cNvPr>
@@ -8982,7 +8892,7 @@
             <a:noAutofit/>
           </a:bodyPr>
           <a:lstStyle xmlns:a="http://schemas.openxmlformats.org/drawingml/2006/main">
-            <a:defPPr>
+            <a:defPPr algn="l">
               <a:defRPr sz="2025" b="0">
                 <a:solidFill>
                   <a:srgbClr val="6B7265"/>
@@ -8994,7 +8904,7 @@
             </a:defPPr>
           </a:lstStyle>
           <a:p xmlns:a="http://schemas.openxmlformats.org/drawingml/2006/main">
-            <a:pPr>
+            <a:pPr algn="l">
               <a:defRPr sz="2025" b="0">
                 <a:solidFill>
                   <a:srgbClr val="6B7265"/>
@@ -9017,7 +8927,7 @@
             </a:r>
           </a:p>
           <a:p xmlns:a="http://schemas.openxmlformats.org/drawingml/2006/main">
-            <a:pPr>
+            <a:pPr algn="l">
               <a:defRPr sz="2025" b="0">
                 <a:solidFill>
                   <a:srgbClr val="6B7265"/>
@@ -9046,7 +8956,7 @@
           <p:cNvPr id="6" name="">
             <a:extLst xmlns:a="http://schemas.openxmlformats.org/drawingml/2006/main">
               <a:ext uri="{FF2B5EF4-FFF2-40B4-BE49-F238E27FC236}">
-                <a16:creationId xmlns:a16="http://schemas.microsoft.com/office/drawing/2014/main" id="{E53EA957-DD2F-4A4A-B16D-4D2229E33E0B}"/>
+                <a16:creationId xmlns:a16="http://schemas.microsoft.com/office/drawing/2014/main" id="{1E185101-9405-4936-94C9-4B5E90C08E1E}"/>
               </a:ext>
             </a:extLst>
           </p:cNvPr>
@@ -9076,7 +8986,7 @@
           <p:cNvPr id="7" name="">
             <a:extLst xmlns:a="http://schemas.openxmlformats.org/drawingml/2006/main">
               <a:ext uri="{FF2B5EF4-FFF2-40B4-BE49-F238E27FC236}">
-                <a16:creationId xmlns:a16="http://schemas.microsoft.com/office/drawing/2014/main" id="{358CCED7-97FA-4997-86D9-1E9E89087E0C}"/>
+                <a16:creationId xmlns:a16="http://schemas.microsoft.com/office/drawing/2014/main" id="{69D63C35-20E5-40F0-A997-AD988FE80E1D}"/>
               </a:ext>
             </a:extLst>
           </p:cNvPr>
@@ -9103,7 +9013,7 @@
             <a:noAutofit/>
           </a:bodyPr>
           <a:lstStyle xmlns:a="http://schemas.openxmlformats.org/drawingml/2006/main">
-            <a:defPPr>
+            <a:defPPr algn="l">
               <a:defRPr sz="2325" b="1">
                 <a:solidFill>
                   <a:srgbClr val="1B1D19"/>
@@ -9115,7 +9025,7 @@
             </a:defPPr>
           </a:lstStyle>
           <a:p xmlns:a="http://schemas.openxmlformats.org/drawingml/2006/main">
-            <a:pPr>
+            <a:pPr algn="l">
               <a:defRPr sz="2325" b="1">
                 <a:solidFill>
                   <a:srgbClr val="1B1D19"/>
@@ -9144,7 +9054,7 @@
           <p:cNvPr id="8" name="">
             <a:extLst xmlns:a="http://schemas.openxmlformats.org/drawingml/2006/main">
               <a:ext uri="{FF2B5EF4-FFF2-40B4-BE49-F238E27FC236}">
-                <a16:creationId xmlns:a16="http://schemas.microsoft.com/office/drawing/2014/main" id="{1CE2ED1A-C06B-473D-B0F2-53C9397C6A4E}"/>
+                <a16:creationId xmlns:a16="http://schemas.microsoft.com/office/drawing/2014/main" id="{FEEDFAC1-6D15-4661-8DEF-C181E89B8F4C}"/>
               </a:ext>
             </a:extLst>
           </p:cNvPr>
@@ -9171,7 +9081,7 @@
             <a:noAutofit/>
           </a:bodyPr>
           <a:lstStyle xmlns:a="http://schemas.openxmlformats.org/drawingml/2006/main">
-            <a:defPPr>
+            <a:defPPr algn="l">
               <a:defRPr sz="2025" b="0">
                 <a:solidFill>
                   <a:srgbClr val="6B7265"/>
@@ -9183,7 +9093,7 @@
             </a:defPPr>
           </a:lstStyle>
           <a:p xmlns:a="http://schemas.openxmlformats.org/drawingml/2006/main">
-            <a:pPr>
+            <a:pPr algn="l">
               <a:defRPr sz="2025" b="0">
                 <a:solidFill>
                   <a:srgbClr val="6B7265"/>
@@ -9206,7 +9116,7 @@
             </a:r>
           </a:p>
           <a:p xmlns:a="http://schemas.openxmlformats.org/drawingml/2006/main">
-            <a:pPr>
+            <a:pPr algn="l">
               <a:defRPr sz="2025" b="0">
                 <a:solidFill>
                   <a:srgbClr val="6B7265"/>
@@ -9235,7 +9145,7 @@
           <p:cNvPr id="9" name="">
             <a:extLst xmlns:a="http://schemas.openxmlformats.org/drawingml/2006/main">
               <a:ext uri="{FF2B5EF4-FFF2-40B4-BE49-F238E27FC236}">
-                <a16:creationId xmlns:a16="http://schemas.microsoft.com/office/drawing/2014/main" id="{658B2F2C-8078-4395-A961-D4641AAF4D9E}"/>
+                <a16:creationId xmlns:a16="http://schemas.microsoft.com/office/drawing/2014/main" id="{453DB956-B5BE-4DA2-9DA0-EB4C25C1097B}"/>
               </a:ext>
             </a:extLst>
           </p:cNvPr>
@@ -9262,7 +9172,7 @@
             <a:noAutofit/>
           </a:bodyPr>
           <a:lstStyle xmlns:a="http://schemas.openxmlformats.org/drawingml/2006/main">
-            <a:defPPr>
+            <a:defPPr algn="l">
               <a:defRPr sz="975" b="0">
                 <a:solidFill>
                   <a:srgbClr val="858B7E"/>
@@ -9274,7 +9184,7 @@
             </a:defPPr>
           </a:lstStyle>
           <a:p xmlns:a="http://schemas.openxmlformats.org/drawingml/2006/main">
-            <a:pPr>
+            <a:pPr algn="l">
               <a:defRPr sz="975" b="0">
                 <a:solidFill>
                   <a:srgbClr val="858B7E"/>
@@ -9303,7 +9213,7 @@
           <p:cNvPr id="10" name="">
             <a:extLst xmlns:a="http://schemas.openxmlformats.org/drawingml/2006/main">
               <a:ext uri="{FF2B5EF4-FFF2-40B4-BE49-F238E27FC236}">
-                <a16:creationId xmlns:a16="http://schemas.microsoft.com/office/drawing/2014/main" id="{93B7FDB5-7333-4128-9FA8-3EEDECE0D3FF}"/>
+                <a16:creationId xmlns:a16="http://schemas.microsoft.com/office/drawing/2014/main" id="{450CA4F0-900B-463A-AD44-E21062968233}"/>
               </a:ext>
             </a:extLst>
           </p:cNvPr>
@@ -9330,7 +9240,7 @@
             <a:noAutofit/>
           </a:bodyPr>
           <a:lstStyle xmlns:a="http://schemas.openxmlformats.org/drawingml/2006/main">
-            <a:defPPr>
+            <a:defPPr algn="l">
               <a:defRPr sz="975" b="0">
                 <a:solidFill>
                   <a:srgbClr val="858B7E"/>
@@ -9342,7 +9252,7 @@
             </a:defPPr>
           </a:lstStyle>
           <a:p xmlns:a="http://schemas.openxmlformats.org/drawingml/2006/main">
-            <a:pPr>
+            <a:pPr algn="l">
               <a:defRPr sz="975" b="0">
                 <a:solidFill>
                   <a:srgbClr val="858B7E"/>
@@ -9369,7 +9279,7 @@
     </p:spTree>
     <p:extLst>
       <p:ext uri="{BB962C8B-B14F-4D97-AF65-F5344CB8AC3E}">
-        <p14:creationId xmlns:p14="http://schemas.microsoft.com/office/powerpoint/2010/main" val="1850138458"/>
+        <p14:creationId xmlns:p14="http://schemas.microsoft.com/office/powerpoint/2010/main" val="1012824638"/>
       </p:ext>
     </p:extLst>
   </p:cSld>
@@ -9400,7 +9310,7 @@
           <p:cNvPr id="11" name="">
             <a:extLst xmlns:a="http://schemas.openxmlformats.org/drawingml/2006/main">
               <a:ext uri="{FF2B5EF4-FFF2-40B4-BE49-F238E27FC236}">
-                <a16:creationId xmlns:a16="http://schemas.microsoft.com/office/drawing/2014/main" id="{C8EBCD9F-2ED8-4215-B12E-397822845202}"/>
+                <a16:creationId xmlns:a16="http://schemas.microsoft.com/office/drawing/2014/main" id="{6D91DBC3-70DD-45FB-BCE9-AC98EB1A4FD2}"/>
               </a:ext>
             </a:extLst>
           </p:cNvPr>
@@ -9427,7 +9337,7 @@
             <a:noAutofit/>
           </a:bodyPr>
           <a:lstStyle xmlns:a="http://schemas.openxmlformats.org/drawingml/2006/main">
-            <a:defPPr>
+            <a:defPPr algn="l">
               <a:defRPr sz="1050" b="1">
                 <a:solidFill>
                   <a:srgbClr val="9B7744"/>
@@ -9439,7 +9349,7 @@
             </a:defPPr>
           </a:lstStyle>
           <a:p xmlns:a="http://schemas.openxmlformats.org/drawingml/2006/main">
-            <a:pPr>
+            <a:pPr algn="l">
               <a:defRPr sz="1050" b="1">
                 <a:solidFill>
                   <a:srgbClr val="9B7744"/>
@@ -9468,7 +9378,7 @@
           <p:cNvPr id="2" name="">
             <a:extLst xmlns:a="http://schemas.openxmlformats.org/drawingml/2006/main">
               <a:ext uri="{FF2B5EF4-FFF2-40B4-BE49-F238E27FC236}">
-                <a16:creationId xmlns:a16="http://schemas.microsoft.com/office/drawing/2014/main" id="{52CDAA3B-7677-45C1-A057-9A5B9DFF40D3}"/>
+                <a16:creationId xmlns:a16="http://schemas.microsoft.com/office/drawing/2014/main" id="{66B622D6-7B65-4B56-846E-BC495CB377CB}"/>
               </a:ext>
             </a:extLst>
           </p:cNvPr>
@@ -9495,7 +9405,7 @@
             <a:noAutofit/>
           </a:bodyPr>
           <a:lstStyle xmlns:a="http://schemas.openxmlformats.org/drawingml/2006/main">
-            <a:defPPr>
+            <a:defPPr algn="l">
               <a:defRPr sz="3450" b="1">
                 <a:solidFill>
                   <a:srgbClr val="1B1D19"/>
@@ -9507,7 +9417,7 @@
             </a:defPPr>
           </a:lstStyle>
           <a:p xmlns:a="http://schemas.openxmlformats.org/drawingml/2006/main">
-            <a:pPr>
+            <a:pPr algn="l">
               <a:defRPr sz="3450" b="1">
                 <a:solidFill>
                   <a:srgbClr val="1B1D19"/>
@@ -9536,7 +9446,7 @@
           <p:cNvPr id="3" name="">
             <a:extLst xmlns:a="http://schemas.openxmlformats.org/drawingml/2006/main">
               <a:ext uri="{FF2B5EF4-FFF2-40B4-BE49-F238E27FC236}">
-                <a16:creationId xmlns:a16="http://schemas.microsoft.com/office/drawing/2014/main" id="{2D616E45-7D06-4057-A9B6-CCC9CBDE9193}"/>
+                <a16:creationId xmlns:a16="http://schemas.microsoft.com/office/drawing/2014/main" id="{F8570920-3805-4AD8-A614-5E1B6C1061E1}"/>
               </a:ext>
             </a:extLst>
           </p:cNvPr>
@@ -9566,7 +9476,7 @@
           <p:cNvPr id="4" name="">
             <a:extLst xmlns:a="http://schemas.openxmlformats.org/drawingml/2006/main">
               <a:ext uri="{FF2B5EF4-FFF2-40B4-BE49-F238E27FC236}">
-                <a16:creationId xmlns:a16="http://schemas.microsoft.com/office/drawing/2014/main" id="{0B285D62-AE7E-4569-95FA-CF896AAD45AA}"/>
+                <a16:creationId xmlns:a16="http://schemas.microsoft.com/office/drawing/2014/main" id="{33ECA283-7AFF-40EB-9ECF-2FE06D45B665}"/>
               </a:ext>
             </a:extLst>
           </p:cNvPr>
@@ -9593,7 +9503,7 @@
             <a:noAutofit/>
           </a:bodyPr>
           <a:lstStyle xmlns:a="http://schemas.openxmlformats.org/drawingml/2006/main">
-            <a:defPPr>
+            <a:defPPr algn="l">
               <a:defRPr sz="2325" b="1">
                 <a:solidFill>
                   <a:srgbClr val="1B1D19"/>
@@ -9605,7 +9515,7 @@
             </a:defPPr>
           </a:lstStyle>
           <a:p xmlns:a="http://schemas.openxmlformats.org/drawingml/2006/main">
-            <a:pPr>
+            <a:pPr algn="l">
               <a:defRPr sz="2325" b="1">
                 <a:solidFill>
                   <a:srgbClr val="1B1D19"/>
@@ -9634,7 +9544,7 @@
           <p:cNvPr id="5" name="">
             <a:extLst xmlns:a="http://schemas.openxmlformats.org/drawingml/2006/main">
               <a:ext uri="{FF2B5EF4-FFF2-40B4-BE49-F238E27FC236}">
-                <a16:creationId xmlns:a16="http://schemas.microsoft.com/office/drawing/2014/main" id="{A29E4B90-374D-449F-A42D-C9BCFCD621E0}"/>
+                <a16:creationId xmlns:a16="http://schemas.microsoft.com/office/drawing/2014/main" id="{A48954D0-F98C-4EAC-826C-272FC162DFC1}"/>
               </a:ext>
             </a:extLst>
           </p:cNvPr>
@@ -9661,7 +9571,7 @@
             <a:noAutofit/>
           </a:bodyPr>
           <a:lstStyle xmlns:a="http://schemas.openxmlformats.org/drawingml/2006/main">
-            <a:defPPr>
+            <a:defPPr algn="l">
               <a:defRPr sz="2025" b="0">
                 <a:solidFill>
                   <a:srgbClr val="6B7265"/>
@@ -9673,7 +9583,7 @@
             </a:defPPr>
           </a:lstStyle>
           <a:p xmlns:a="http://schemas.openxmlformats.org/drawingml/2006/main">
-            <a:pPr>
+            <a:pPr algn="l">
               <a:defRPr sz="2025" b="0">
                 <a:solidFill>
                   <a:srgbClr val="6B7265"/>
@@ -9696,7 +9606,7 @@
             </a:r>
           </a:p>
           <a:p xmlns:a="http://schemas.openxmlformats.org/drawingml/2006/main">
-            <a:pPr>
+            <a:pPr algn="l">
               <a:defRPr sz="2025" b="0">
                 <a:solidFill>
                   <a:srgbClr val="6B7265"/>
@@ -9719,7 +9629,7 @@
             </a:r>
           </a:p>
           <a:p xmlns:a="http://schemas.openxmlformats.org/drawingml/2006/main">
-            <a:pPr>
+            <a:pPr algn="l">
               <a:defRPr sz="2025" b="0">
                 <a:solidFill>
                   <a:srgbClr val="6B7265"/>
@@ -9742,7 +9652,7 @@
             </a:r>
           </a:p>
           <a:p xmlns:a="http://schemas.openxmlformats.org/drawingml/2006/main">
-            <a:pPr>
+            <a:pPr algn="l">
               <a:defRPr sz="2025" b="0">
                 <a:solidFill>
                   <a:srgbClr val="6B7265"/>
@@ -9765,7 +9675,7 @@
             </a:r>
           </a:p>
           <a:p xmlns:a="http://schemas.openxmlformats.org/drawingml/2006/main">
-            <a:pPr>
+            <a:pPr algn="l">
               <a:defRPr sz="2025" b="0">
                 <a:solidFill>
                   <a:srgbClr val="6B7265"/>
@@ -9794,7 +9704,7 @@
           <p:cNvPr id="6" name="">
             <a:extLst xmlns:a="http://schemas.openxmlformats.org/drawingml/2006/main">
               <a:ext uri="{FF2B5EF4-FFF2-40B4-BE49-F238E27FC236}">
-                <a16:creationId xmlns:a16="http://schemas.microsoft.com/office/drawing/2014/main" id="{967778B0-6A49-4F7E-AD2E-E83A2213A4ED}"/>
+                <a16:creationId xmlns:a16="http://schemas.microsoft.com/office/drawing/2014/main" id="{2D922D43-6C29-4B84-A89F-F1ADCDCB7603}"/>
               </a:ext>
             </a:extLst>
           </p:cNvPr>
@@ -9824,7 +9734,7 @@
           <p:cNvPr id="7" name="">
             <a:extLst xmlns:a="http://schemas.openxmlformats.org/drawingml/2006/main">
               <a:ext uri="{FF2B5EF4-FFF2-40B4-BE49-F238E27FC236}">
-                <a16:creationId xmlns:a16="http://schemas.microsoft.com/office/drawing/2014/main" id="{38EA2078-2D58-4F8F-AF1C-EE34DDFF9A24}"/>
+                <a16:creationId xmlns:a16="http://schemas.microsoft.com/office/drawing/2014/main" id="{C0CF020E-7E4D-4792-AEC8-DC9CF0FEA54E}"/>
               </a:ext>
             </a:extLst>
           </p:cNvPr>
@@ -9851,7 +9761,7 @@
             <a:noAutofit/>
           </a:bodyPr>
           <a:lstStyle xmlns:a="http://schemas.openxmlformats.org/drawingml/2006/main">
-            <a:defPPr>
+            <a:defPPr algn="l">
               <a:defRPr sz="2325" b="1">
                 <a:solidFill>
                   <a:srgbClr val="1B1D19"/>
@@ -9863,7 +9773,7 @@
             </a:defPPr>
           </a:lstStyle>
           <a:p xmlns:a="http://schemas.openxmlformats.org/drawingml/2006/main">
-            <a:pPr>
+            <a:pPr algn="l">
               <a:defRPr sz="2325" b="1">
                 <a:solidFill>
                   <a:srgbClr val="1B1D19"/>
@@ -9892,7 +9802,7 @@
           <p:cNvPr id="8" name="">
             <a:extLst xmlns:a="http://schemas.openxmlformats.org/drawingml/2006/main">
               <a:ext uri="{FF2B5EF4-FFF2-40B4-BE49-F238E27FC236}">
-                <a16:creationId xmlns:a16="http://schemas.microsoft.com/office/drawing/2014/main" id="{9E0AC341-9617-42C7-A62B-709B114E118B}"/>
+                <a16:creationId xmlns:a16="http://schemas.microsoft.com/office/drawing/2014/main" id="{DE4C9B48-39E8-4779-9661-1410F751C791}"/>
               </a:ext>
             </a:extLst>
           </p:cNvPr>
@@ -9919,7 +9829,7 @@
             <a:noAutofit/>
           </a:bodyPr>
           <a:lstStyle xmlns:a="http://schemas.openxmlformats.org/drawingml/2006/main">
-            <a:defPPr>
+            <a:defPPr algn="l">
               <a:defRPr sz="2025" b="0">
                 <a:solidFill>
                   <a:srgbClr val="6B7265"/>
@@ -9931,7 +9841,7 @@
             </a:defPPr>
           </a:lstStyle>
           <a:p xmlns:a="http://schemas.openxmlformats.org/drawingml/2006/main">
-            <a:pPr>
+            <a:pPr algn="l">
               <a:defRPr sz="2025" b="0">
                 <a:solidFill>
                   <a:srgbClr val="6B7265"/>
@@ -9954,7 +9864,7 @@
             </a:r>
           </a:p>
           <a:p xmlns:a="http://schemas.openxmlformats.org/drawingml/2006/main">
-            <a:pPr>
+            <a:pPr algn="l">
               <a:defRPr sz="2025" b="0">
                 <a:solidFill>
                   <a:srgbClr val="6B7265"/>
@@ -9977,7 +9887,7 @@
             </a:r>
           </a:p>
           <a:p xmlns:a="http://schemas.openxmlformats.org/drawingml/2006/main">
-            <a:pPr>
+            <a:pPr algn="l">
               <a:defRPr sz="2025" b="0">
                 <a:solidFill>
                   <a:srgbClr val="6B7265"/>
@@ -10000,7 +9910,7 @@
             </a:r>
           </a:p>
           <a:p xmlns:a="http://schemas.openxmlformats.org/drawingml/2006/main">
-            <a:pPr>
+            <a:pPr algn="l">
               <a:defRPr sz="2025" b="0">
                 <a:solidFill>
                   <a:srgbClr val="6B7265"/>
@@ -10023,7 +9933,7 @@
             </a:r>
           </a:p>
           <a:p xmlns:a="http://schemas.openxmlformats.org/drawingml/2006/main">
-            <a:pPr>
+            <a:pPr algn="l">
               <a:defRPr sz="2025" b="0">
                 <a:solidFill>
                   <a:srgbClr val="6B7265"/>
@@ -10052,7 +9962,7 @@
           <p:cNvPr id="9" name="">
             <a:extLst xmlns:a="http://schemas.openxmlformats.org/drawingml/2006/main">
               <a:ext uri="{FF2B5EF4-FFF2-40B4-BE49-F238E27FC236}">
-                <a16:creationId xmlns:a16="http://schemas.microsoft.com/office/drawing/2014/main" id="{E84E5F96-52C6-4ED9-AAFC-06C89511FECD}"/>
+                <a16:creationId xmlns:a16="http://schemas.microsoft.com/office/drawing/2014/main" id="{1E5FD6B3-4CB6-4B2C-8988-3924317E7CAB}"/>
               </a:ext>
             </a:extLst>
           </p:cNvPr>
@@ -10079,7 +9989,7 @@
             <a:noAutofit/>
           </a:bodyPr>
           <a:lstStyle xmlns:a="http://schemas.openxmlformats.org/drawingml/2006/main">
-            <a:defPPr>
+            <a:defPPr algn="l">
               <a:defRPr sz="975" b="0">
                 <a:solidFill>
                   <a:srgbClr val="858B7E"/>
@@ -10091,7 +10001,7 @@
             </a:defPPr>
           </a:lstStyle>
           <a:p xmlns:a="http://schemas.openxmlformats.org/drawingml/2006/main">
-            <a:pPr>
+            <a:pPr algn="l">
               <a:defRPr sz="975" b="0">
                 <a:solidFill>
                   <a:srgbClr val="858B7E"/>
@@ -10120,7 +10030,7 @@
           <p:cNvPr id="10" name="">
             <a:extLst xmlns:a="http://schemas.openxmlformats.org/drawingml/2006/main">
               <a:ext uri="{FF2B5EF4-FFF2-40B4-BE49-F238E27FC236}">
-                <a16:creationId xmlns:a16="http://schemas.microsoft.com/office/drawing/2014/main" id="{5138FC81-1ECC-46E1-A12B-FC02F519110C}"/>
+                <a16:creationId xmlns:a16="http://schemas.microsoft.com/office/drawing/2014/main" id="{CA0DE3B4-DB18-4FAF-BB8A-5BB8894744C0}"/>
               </a:ext>
             </a:extLst>
           </p:cNvPr>
@@ -10147,7 +10057,7 @@
             <a:noAutofit/>
           </a:bodyPr>
           <a:lstStyle xmlns:a="http://schemas.openxmlformats.org/drawingml/2006/main">
-            <a:defPPr>
+            <a:defPPr algn="l">
               <a:defRPr sz="975" b="0">
                 <a:solidFill>
                   <a:srgbClr val="858B7E"/>
@@ -10159,7 +10069,7 @@
             </a:defPPr>
           </a:lstStyle>
           <a:p xmlns:a="http://schemas.openxmlformats.org/drawingml/2006/main">
-            <a:pPr>
+            <a:pPr algn="l">
               <a:defRPr sz="975" b="0">
                 <a:solidFill>
                   <a:srgbClr val="858B7E"/>
@@ -10186,7 +10096,7 @@
     </p:spTree>
     <p:extLst>
       <p:ext uri="{BB962C8B-B14F-4D97-AF65-F5344CB8AC3E}">
-        <p14:creationId xmlns:p14="http://schemas.microsoft.com/office/powerpoint/2010/main" val="1086705405"/>
+        <p14:creationId xmlns:p14="http://schemas.microsoft.com/office/powerpoint/2010/main" val="146394642"/>
       </p:ext>
     </p:extLst>
   </p:cSld>
@@ -10217,7 +10127,7 @@
           <p:cNvPr id="11" name="">
             <a:extLst xmlns:a="http://schemas.openxmlformats.org/drawingml/2006/main">
               <a:ext uri="{FF2B5EF4-FFF2-40B4-BE49-F238E27FC236}">
-                <a16:creationId xmlns:a16="http://schemas.microsoft.com/office/drawing/2014/main" id="{747A4D98-DABD-4C34-8447-840D20477763}"/>
+                <a16:creationId xmlns:a16="http://schemas.microsoft.com/office/drawing/2014/main" id="{480108A2-7549-4524-AFF7-A9A6E7B6655B}"/>
               </a:ext>
             </a:extLst>
           </p:cNvPr>
@@ -10244,7 +10154,7 @@
             <a:noAutofit/>
           </a:bodyPr>
           <a:lstStyle xmlns:a="http://schemas.openxmlformats.org/drawingml/2006/main">
-            <a:defPPr>
+            <a:defPPr algn="l">
               <a:defRPr sz="1050" b="1">
                 <a:solidFill>
                   <a:srgbClr val="9B7744"/>
@@ -10256,7 +10166,7 @@
             </a:defPPr>
           </a:lstStyle>
           <a:p xmlns:a="http://schemas.openxmlformats.org/drawingml/2006/main">
-            <a:pPr>
+            <a:pPr algn="l">
               <a:defRPr sz="1050" b="1">
                 <a:solidFill>
                   <a:srgbClr val="9B7744"/>
@@ -10285,7 +10195,7 @@
           <p:cNvPr id="2" name="">
             <a:extLst xmlns:a="http://schemas.openxmlformats.org/drawingml/2006/main">
               <a:ext uri="{FF2B5EF4-FFF2-40B4-BE49-F238E27FC236}">
-                <a16:creationId xmlns:a16="http://schemas.microsoft.com/office/drawing/2014/main" id="{2885118C-1C0D-49BA-9F77-B07F503FCBE6}"/>
+                <a16:creationId xmlns:a16="http://schemas.microsoft.com/office/drawing/2014/main" id="{698EB9C9-C471-4F33-A1DC-AE9DB1520AE6}"/>
               </a:ext>
             </a:extLst>
           </p:cNvPr>
@@ -10312,7 +10222,7 @@
             <a:noAutofit/>
           </a:bodyPr>
           <a:lstStyle xmlns:a="http://schemas.openxmlformats.org/drawingml/2006/main">
-            <a:defPPr>
+            <a:defPPr algn="l">
               <a:defRPr sz="3450" b="1">
                 <a:solidFill>
                   <a:srgbClr val="1B1D19"/>
@@ -10324,7 +10234,7 @@
             </a:defPPr>
           </a:lstStyle>
           <a:p xmlns:a="http://schemas.openxmlformats.org/drawingml/2006/main">
-            <a:pPr>
+            <a:pPr algn="l">
               <a:defRPr sz="3450" b="1">
                 <a:solidFill>
                   <a:srgbClr val="1B1D19"/>
@@ -10353,7 +10263,7 @@
           <p:cNvPr id="3" name="">
             <a:extLst xmlns:a="http://schemas.openxmlformats.org/drawingml/2006/main">
               <a:ext uri="{FF2B5EF4-FFF2-40B4-BE49-F238E27FC236}">
-                <a16:creationId xmlns:a16="http://schemas.microsoft.com/office/drawing/2014/main" id="{99141F39-792F-4224-AF93-11A48237D807}"/>
+                <a16:creationId xmlns:a16="http://schemas.microsoft.com/office/drawing/2014/main" id="{B8C2AFC0-E7E2-43CF-82C5-BC06D00B4933}"/>
               </a:ext>
             </a:extLst>
           </p:cNvPr>
@@ -10383,7 +10293,7 @@
           <p:cNvPr id="4" name="">
             <a:extLst xmlns:a="http://schemas.openxmlformats.org/drawingml/2006/main">
               <a:ext uri="{FF2B5EF4-FFF2-40B4-BE49-F238E27FC236}">
-                <a16:creationId xmlns:a16="http://schemas.microsoft.com/office/drawing/2014/main" id="{A3041062-A39F-499B-97A9-CB0C267EC7E4}"/>
+                <a16:creationId xmlns:a16="http://schemas.microsoft.com/office/drawing/2014/main" id="{DFC190D2-5FCE-4557-A51C-11399A2DE072}"/>
               </a:ext>
             </a:extLst>
           </p:cNvPr>
@@ -10410,7 +10320,7 @@
             <a:noAutofit/>
           </a:bodyPr>
           <a:lstStyle xmlns:a="http://schemas.openxmlformats.org/drawingml/2006/main">
-            <a:defPPr>
+            <a:defPPr algn="l">
               <a:defRPr sz="2325" b="1">
                 <a:solidFill>
                   <a:srgbClr val="1B1D19"/>
@@ -10422,7 +10332,7 @@
             </a:defPPr>
           </a:lstStyle>
           <a:p xmlns:a="http://schemas.openxmlformats.org/drawingml/2006/main">
-            <a:pPr>
+            <a:pPr algn="l">
               <a:defRPr sz="2325" b="1">
                 <a:solidFill>
                   <a:srgbClr val="1B1D19"/>
@@ -10451,7 +10361,7 @@
           <p:cNvPr id="5" name="">
             <a:extLst xmlns:a="http://schemas.openxmlformats.org/drawingml/2006/main">
               <a:ext uri="{FF2B5EF4-FFF2-40B4-BE49-F238E27FC236}">
-                <a16:creationId xmlns:a16="http://schemas.microsoft.com/office/drawing/2014/main" id="{E96C56F6-A6DE-415A-B921-EF0E68A0111B}"/>
+                <a16:creationId xmlns:a16="http://schemas.microsoft.com/office/drawing/2014/main" id="{5D98D46A-C831-4456-AB42-B7A411BC6F66}"/>
               </a:ext>
             </a:extLst>
           </p:cNvPr>
@@ -10478,7 +10388,7 @@
             <a:noAutofit/>
           </a:bodyPr>
           <a:lstStyle xmlns:a="http://schemas.openxmlformats.org/drawingml/2006/main">
-            <a:defPPr>
+            <a:defPPr algn="l">
               <a:defRPr sz="2025" b="0">
                 <a:solidFill>
                   <a:srgbClr val="6B7265"/>
@@ -10490,7 +10400,7 @@
             </a:defPPr>
           </a:lstStyle>
           <a:p xmlns:a="http://schemas.openxmlformats.org/drawingml/2006/main">
-            <a:pPr>
+            <a:pPr algn="l">
               <a:defRPr sz="2025" b="0">
                 <a:solidFill>
                   <a:srgbClr val="6B7265"/>
@@ -10513,7 +10423,7 @@
             </a:r>
           </a:p>
           <a:p xmlns:a="http://schemas.openxmlformats.org/drawingml/2006/main">
-            <a:pPr>
+            <a:pPr algn="l">
               <a:defRPr sz="2025" b="0">
                 <a:solidFill>
                   <a:srgbClr val="6B7265"/>
@@ -10542,7 +10452,7 @@
           <p:cNvPr id="6" name="">
             <a:extLst xmlns:a="http://schemas.openxmlformats.org/drawingml/2006/main">
               <a:ext uri="{FF2B5EF4-FFF2-40B4-BE49-F238E27FC236}">
-                <a16:creationId xmlns:a16="http://schemas.microsoft.com/office/drawing/2014/main" id="{410B884D-F818-4D1B-90D6-B7D3CAB08AFA}"/>
+                <a16:creationId xmlns:a16="http://schemas.microsoft.com/office/drawing/2014/main" id="{2E98EC5C-4B3B-4F23-9E67-F1CD2BFA7C2A}"/>
               </a:ext>
             </a:extLst>
           </p:cNvPr>
@@ -10572,7 +10482,7 @@
           <p:cNvPr id="7" name="">
             <a:extLst xmlns:a="http://schemas.openxmlformats.org/drawingml/2006/main">
               <a:ext uri="{FF2B5EF4-FFF2-40B4-BE49-F238E27FC236}">
-                <a16:creationId xmlns:a16="http://schemas.microsoft.com/office/drawing/2014/main" id="{A85A6D49-4DBA-4DC9-9FE5-91816415E5F3}"/>
+                <a16:creationId xmlns:a16="http://schemas.microsoft.com/office/drawing/2014/main" id="{7D934AD7-ACBD-4487-8D6E-2F46CCE2DB1A}"/>
               </a:ext>
             </a:extLst>
           </p:cNvPr>
@@ -10599,7 +10509,7 @@
             <a:noAutofit/>
           </a:bodyPr>
           <a:lstStyle xmlns:a="http://schemas.openxmlformats.org/drawingml/2006/main">
-            <a:defPPr>
+            <a:defPPr algn="l">
               <a:defRPr sz="2325" b="1">
                 <a:solidFill>
                   <a:srgbClr val="1B1D19"/>
@@ -10611,7 +10521,7 @@
             </a:defPPr>
           </a:lstStyle>
           <a:p xmlns:a="http://schemas.openxmlformats.org/drawingml/2006/main">
-            <a:pPr>
+            <a:pPr algn="l">
               <a:defRPr sz="2325" b="1">
                 <a:solidFill>
                   <a:srgbClr val="1B1D19"/>
@@ -10640,7 +10550,7 @@
           <p:cNvPr id="8" name="">
             <a:extLst xmlns:a="http://schemas.openxmlformats.org/drawingml/2006/main">
               <a:ext uri="{FF2B5EF4-FFF2-40B4-BE49-F238E27FC236}">
-                <a16:creationId xmlns:a16="http://schemas.microsoft.com/office/drawing/2014/main" id="{3C1C009A-CFDD-4D70-81AB-7399AEFBDB59}"/>
+                <a16:creationId xmlns:a16="http://schemas.microsoft.com/office/drawing/2014/main" id="{B135813E-7B2E-4BB9-84C7-A293A04DE123}"/>
               </a:ext>
             </a:extLst>
           </p:cNvPr>
@@ -10667,7 +10577,7 @@
             <a:noAutofit/>
           </a:bodyPr>
           <a:lstStyle xmlns:a="http://schemas.openxmlformats.org/drawingml/2006/main">
-            <a:defPPr>
+            <a:defPPr algn="l">
               <a:defRPr sz="2025" b="0">
                 <a:solidFill>
                   <a:srgbClr val="6B7265"/>
@@ -10679,7 +10589,7 @@
             </a:defPPr>
           </a:lstStyle>
           <a:p xmlns:a="http://schemas.openxmlformats.org/drawingml/2006/main">
-            <a:pPr>
+            <a:pPr algn="l">
               <a:defRPr sz="2025" b="0">
                 <a:solidFill>
                   <a:srgbClr val="6B7265"/>
@@ -10702,7 +10612,7 @@
             </a:r>
           </a:p>
           <a:p xmlns:a="http://schemas.openxmlformats.org/drawingml/2006/main">
-            <a:pPr>
+            <a:pPr algn="l">
               <a:defRPr sz="2025" b="0">
                 <a:solidFill>
                   <a:srgbClr val="6B7265"/>
@@ -10731,7 +10641,7 @@
           <p:cNvPr id="9" name="">
             <a:extLst xmlns:a="http://schemas.openxmlformats.org/drawingml/2006/main">
               <a:ext uri="{FF2B5EF4-FFF2-40B4-BE49-F238E27FC236}">
-                <a16:creationId xmlns:a16="http://schemas.microsoft.com/office/drawing/2014/main" id="{0431776F-2570-4FBE-8133-1D5DDB06CB81}"/>
+                <a16:creationId xmlns:a16="http://schemas.microsoft.com/office/drawing/2014/main" id="{3817BD7F-11FB-46DF-ABBB-7E2DA8B28941}"/>
               </a:ext>
             </a:extLst>
           </p:cNvPr>
@@ -10758,7 +10668,7 @@
             <a:noAutofit/>
           </a:bodyPr>
           <a:lstStyle xmlns:a="http://schemas.openxmlformats.org/drawingml/2006/main">
-            <a:defPPr>
+            <a:defPPr algn="l">
               <a:defRPr sz="975" b="0">
                 <a:solidFill>
                   <a:srgbClr val="858B7E"/>
@@ -10770,7 +10680,7 @@
             </a:defPPr>
           </a:lstStyle>
           <a:p xmlns:a="http://schemas.openxmlformats.org/drawingml/2006/main">
-            <a:pPr>
+            <a:pPr algn="l">
               <a:defRPr sz="975" b="0">
                 <a:solidFill>
                   <a:srgbClr val="858B7E"/>
@@ -10799,7 +10709,7 @@
           <p:cNvPr id="10" name="">
             <a:extLst xmlns:a="http://schemas.openxmlformats.org/drawingml/2006/main">
               <a:ext uri="{FF2B5EF4-FFF2-40B4-BE49-F238E27FC236}">
-                <a16:creationId xmlns:a16="http://schemas.microsoft.com/office/drawing/2014/main" id="{87916EE4-6C36-42B8-8427-F0CB45660A15}"/>
+                <a16:creationId xmlns:a16="http://schemas.microsoft.com/office/drawing/2014/main" id="{259A88A0-EF09-431F-9748-68D2EA2F8E3A}"/>
               </a:ext>
             </a:extLst>
           </p:cNvPr>
@@ -10826,7 +10736,7 @@
             <a:noAutofit/>
           </a:bodyPr>
           <a:lstStyle xmlns:a="http://schemas.openxmlformats.org/drawingml/2006/main">
-            <a:defPPr>
+            <a:defPPr algn="l">
               <a:defRPr sz="975" b="0">
                 <a:solidFill>
                   <a:srgbClr val="858B7E"/>
@@ -10838,7 +10748,7 @@
             </a:defPPr>
           </a:lstStyle>
           <a:p xmlns:a="http://schemas.openxmlformats.org/drawingml/2006/main">
-            <a:pPr>
+            <a:pPr algn="l">
               <a:defRPr sz="975" b="0">
                 <a:solidFill>
                   <a:srgbClr val="858B7E"/>
@@ -10865,7 +10775,7 @@
     </p:spTree>
     <p:extLst>
       <p:ext uri="{BB962C8B-B14F-4D97-AF65-F5344CB8AC3E}">
-        <p14:creationId xmlns:p14="http://schemas.microsoft.com/office/powerpoint/2010/main" val="236622401"/>
+        <p14:creationId xmlns:p14="http://schemas.microsoft.com/office/powerpoint/2010/main" val="2085656208"/>
       </p:ext>
     </p:extLst>
   </p:cSld>
@@ -10893,22 +10803,22 @@
       </p:grpSpPr>
       <p:sp>
         <p:nvSpPr>
-          <p:cNvPr id="8" name="">
-            <a:extLst xmlns:a="http://schemas.openxmlformats.org/drawingml/2006/main">
-              <a:ext uri="{FF2B5EF4-FFF2-40B4-BE49-F238E27FC236}">
-                <a16:creationId xmlns:a16="http://schemas.microsoft.com/office/drawing/2014/main" id="{8CE9A5A0-C847-494F-BBB8-31AB0FC0D892}"/>
-              </a:ext>
-            </a:extLst>
-          </p:cNvPr>
-          <p:cNvSpPr>
-            <a:spLocks xmlns:a="http://schemas.openxmlformats.org/drawingml/2006/main" noGrp="1"/>
-          </p:cNvSpPr>
-          <p:nvPr/>
-        </p:nvSpPr>
-        <p:spPr>
-          <a:xfrm xmlns:a="http://schemas.openxmlformats.org/drawingml/2006/main">
-            <a:off x="685800" y="619125"/>
-            <a:ext cx="10668000" cy="247650"/>
+          <p:cNvPr id="7" name="">
+            <a:extLst xmlns:a="http://schemas.openxmlformats.org/drawingml/2006/main">
+              <a:ext uri="{FF2B5EF4-FFF2-40B4-BE49-F238E27FC236}">
+                <a16:creationId xmlns:a16="http://schemas.microsoft.com/office/drawing/2014/main" id="{4837E0D5-B8BB-4876-8F42-CE56396E24EE}"/>
+              </a:ext>
+            </a:extLst>
+          </p:cNvPr>
+          <p:cNvSpPr>
+            <a:spLocks xmlns:a="http://schemas.openxmlformats.org/drawingml/2006/main" noGrp="1"/>
+          </p:cNvSpPr>
+          <p:nvPr/>
+        </p:nvSpPr>
+        <p:spPr>
+          <a:xfrm xmlns:a="http://schemas.openxmlformats.org/drawingml/2006/main">
+            <a:off x="914400" y="133350"/>
+            <a:ext cx="10363200" cy="152400"/>
           </a:xfrm>
           <a:prstGeom xmlns:a="http://schemas.openxmlformats.org/drawingml/2006/main" prst="rect">
             <a:avLst/>
@@ -10923,8 +10833,8 @@
             <a:noAutofit/>
           </a:bodyPr>
           <a:lstStyle xmlns:a="http://schemas.openxmlformats.org/drawingml/2006/main">
-            <a:defPPr>
-              <a:defRPr sz="1050" b="1">
+            <a:defPPr algn="l">
+              <a:defRPr sz="825" b="1">
                 <a:solidFill>
                   <a:srgbClr val="9B7744"/>
                 </a:solidFill>
@@ -10935,8 +10845,8 @@
             </a:defPPr>
           </a:lstStyle>
           <a:p xmlns:a="http://schemas.openxmlformats.org/drawingml/2006/main">
-            <a:pPr>
-              <a:defRPr sz="1050" b="1">
+            <a:pPr algn="l">
+              <a:defRPr sz="825" b="1">
                 <a:solidFill>
                   <a:srgbClr val="9B7744"/>
                 </a:solidFill>
@@ -10946,7 +10856,7 @@
               </a:defRPr>
             </a:pPr>
             <a:r>
-              <a:rPr sz="1050" b="1">
+              <a:rPr sz="825" b="1">
                 <a:solidFill>
                   <a:srgbClr val="9B7744"/>
                 </a:solidFill>
@@ -10964,19 +10874,19 @@
           <p:cNvPr id="2" name="">
             <a:extLst xmlns:a="http://schemas.openxmlformats.org/drawingml/2006/main">
               <a:ext uri="{FF2B5EF4-FFF2-40B4-BE49-F238E27FC236}">
-                <a16:creationId xmlns:a16="http://schemas.microsoft.com/office/drawing/2014/main" id="{95D00165-6D68-494A-A980-DF1181E81F5F}"/>
-              </a:ext>
-            </a:extLst>
-          </p:cNvPr>
-          <p:cNvSpPr>
-            <a:spLocks xmlns:a="http://schemas.openxmlformats.org/drawingml/2006/main" noGrp="1"/>
-          </p:cNvSpPr>
-          <p:nvPr/>
-        </p:nvSpPr>
-        <p:spPr>
-          <a:xfrm xmlns:a="http://schemas.openxmlformats.org/drawingml/2006/main">
-            <a:off x="685800" y="1047750"/>
-            <a:ext cx="10820400" cy="1085850"/>
+                <a16:creationId xmlns:a16="http://schemas.microsoft.com/office/drawing/2014/main" id="{ABB2C8B8-8AB4-487D-94D8-B44A3FE793A9}"/>
+              </a:ext>
+            </a:extLst>
+          </p:cNvPr>
+          <p:cNvSpPr>
+            <a:spLocks xmlns:a="http://schemas.openxmlformats.org/drawingml/2006/main" noGrp="1"/>
+          </p:cNvSpPr>
+          <p:nvPr/>
+        </p:nvSpPr>
+        <p:spPr>
+          <a:xfrm xmlns:a="http://schemas.openxmlformats.org/drawingml/2006/main">
+            <a:off x="914400" y="304800"/>
+            <a:ext cx="10363200" cy="381000"/>
           </a:xfrm>
           <a:prstGeom xmlns:a="http://schemas.openxmlformats.org/drawingml/2006/main" prst="rect">
             <a:avLst/>
@@ -10991,8 +10901,8 @@
             <a:noAutofit/>
           </a:bodyPr>
           <a:lstStyle xmlns:a="http://schemas.openxmlformats.org/drawingml/2006/main">
-            <a:defPPr>
-              <a:defRPr sz="3450" b="1">
+            <a:defPPr algn="l">
+              <a:defRPr sz="2250" b="1">
                 <a:solidFill>
                   <a:srgbClr val="1B1D19"/>
                 </a:solidFill>
@@ -11003,8 +10913,8 @@
             </a:defPPr>
           </a:lstStyle>
           <a:p xmlns:a="http://schemas.openxmlformats.org/drawingml/2006/main">
-            <a:pPr>
-              <a:defRPr sz="3450" b="1">
+            <a:pPr algn="l">
+              <a:defRPr sz="2250" b="1">
                 <a:solidFill>
                   <a:srgbClr val="1B1D19"/>
                 </a:solidFill>
@@ -11014,7 +10924,7 @@
               </a:defRPr>
             </a:pPr>
             <a:r>
-              <a:rPr sz="3450" b="1">
+              <a:rPr sz="2250" b="1">
                 <a:solidFill>
                   <a:srgbClr val="1B1D19"/>
                 </a:solidFill>
@@ -11032,19 +10942,19 @@
           <p:cNvPr id="3" name="">
             <a:extLst xmlns:a="http://schemas.openxmlformats.org/drawingml/2006/main">
               <a:ext uri="{FF2B5EF4-FFF2-40B4-BE49-F238E27FC236}">
-                <a16:creationId xmlns:a16="http://schemas.microsoft.com/office/drawing/2014/main" id="{FB106567-E7FB-4BC2-B194-4712F8924CE8}"/>
-              </a:ext>
-            </a:extLst>
-          </p:cNvPr>
-          <p:cNvSpPr>
-            <a:spLocks xmlns:a="http://schemas.openxmlformats.org/drawingml/2006/main" noGrp="1"/>
-          </p:cNvSpPr>
-          <p:nvPr/>
-        </p:nvSpPr>
-        <p:spPr>
-          <a:xfrm xmlns:a="http://schemas.openxmlformats.org/drawingml/2006/main">
-            <a:off x="685800" y="1905000"/>
-            <a:ext cx="10820400" cy="438150"/>
+                <a16:creationId xmlns:a16="http://schemas.microsoft.com/office/drawing/2014/main" id="{55D1910B-8D13-496C-9DF2-6C29A628566D}"/>
+              </a:ext>
+            </a:extLst>
+          </p:cNvPr>
+          <p:cNvSpPr>
+            <a:spLocks xmlns:a="http://schemas.openxmlformats.org/drawingml/2006/main" noGrp="1"/>
+          </p:cNvSpPr>
+          <p:nvPr/>
+        </p:nvSpPr>
+        <p:spPr>
+          <a:xfrm xmlns:a="http://schemas.openxmlformats.org/drawingml/2006/main">
+            <a:off x="8039100" y="371475"/>
+            <a:ext cx="3238500" cy="266700"/>
           </a:xfrm>
           <a:prstGeom xmlns:a="http://schemas.openxmlformats.org/drawingml/2006/main" prst="rect">
             <a:avLst/>
@@ -11059,8 +10969,8 @@
             <a:noAutofit/>
           </a:bodyPr>
           <a:lstStyle xmlns:a="http://schemas.openxmlformats.org/drawingml/2006/main">
-            <a:defPPr>
-              <a:defRPr sz="2025" b="0">
+            <a:defPPr algn="r">
+              <a:defRPr sz="1350" b="0">
                 <a:solidFill>
                   <a:srgbClr val="6B7265"/>
                 </a:solidFill>
@@ -11071,8 +10981,8 @@
             </a:defPPr>
           </a:lstStyle>
           <a:p xmlns:a="http://schemas.openxmlformats.org/drawingml/2006/main">
-            <a:pPr>
-              <a:defRPr sz="2025" b="0">
+            <a:pPr algn="r">
+              <a:defRPr sz="1350" b="0">
                 <a:solidFill>
                   <a:srgbClr val="6B7265"/>
                 </a:solidFill>
@@ -11082,7 +10992,7 @@
               </a:defRPr>
             </a:pPr>
             <a:r>
-              <a:rPr sz="2025" b="0">
+              <a:rPr sz="1350" b="0">
                 <a:solidFill>
                   <a:srgbClr val="6B7265"/>
                 </a:solidFill>
@@ -11100,25 +11010,25 @@
           <p:cNvPr id="4" name="">
             <a:extLst xmlns:a="http://schemas.openxmlformats.org/drawingml/2006/main">
               <a:ext uri="{FF2B5EF4-FFF2-40B4-BE49-F238E27FC236}">
-                <a16:creationId xmlns:a16="http://schemas.microsoft.com/office/drawing/2014/main" id="{D2096399-3272-4D35-B8EC-4E1F47A8A6D7}"/>
-              </a:ext>
-            </a:extLst>
-          </p:cNvPr>
-          <p:cNvSpPr>
-            <a:spLocks xmlns:a="http://schemas.openxmlformats.org/drawingml/2006/main" noGrp="1"/>
-          </p:cNvSpPr>
-          <p:nvPr/>
-        </p:nvSpPr>
-        <p:spPr>
-          <a:xfrm xmlns:a="http://schemas.openxmlformats.org/drawingml/2006/main">
-            <a:off x="685800" y="2476500"/>
-            <a:ext cx="10820400" cy="3524250"/>
+                <a16:creationId xmlns:a16="http://schemas.microsoft.com/office/drawing/2014/main" id="{6FC27F45-32AF-4CE2-AD4B-6124173DBECF}"/>
+              </a:ext>
+            </a:extLst>
+          </p:cNvPr>
+          <p:cNvSpPr>
+            <a:spLocks xmlns:a="http://schemas.openxmlformats.org/drawingml/2006/main" noGrp="1"/>
+          </p:cNvSpPr>
+          <p:nvPr/>
+        </p:nvSpPr>
+        <p:spPr>
+          <a:xfrm xmlns:a="http://schemas.openxmlformats.org/drawingml/2006/main">
+            <a:off x="914400" y="723900"/>
+            <a:ext cx="10363200" cy="5829300"/>
           </a:xfrm>
           <a:prstGeom xmlns:a="http://schemas.openxmlformats.org/drawingml/2006/main" prst="rect">
             <a:avLst/>
           </a:prstGeom>
           <a:solidFill xmlns:a="http://schemas.openxmlformats.org/drawingml/2006/main">
-            <a:srgbClr val="F7F7F3"/>
+            <a:srgbClr val="F4F3EE"/>
           </a:solidFill>
           <a:ln xmlns:a="http://schemas.openxmlformats.org/drawingml/2006/main" w="0">
             <a:noFill/>
@@ -11130,49 +11040,19 @@
           <p:cNvPr id="5" name="">
             <a:extLst xmlns:a="http://schemas.openxmlformats.org/drawingml/2006/main">
               <a:ext uri="{FF2B5EF4-FFF2-40B4-BE49-F238E27FC236}">
-                <a16:creationId xmlns:a16="http://schemas.microsoft.com/office/drawing/2014/main" id="{1292C0A0-3EFC-465A-B81C-2B248048DB48}"/>
-              </a:ext>
-            </a:extLst>
-          </p:cNvPr>
-          <p:cNvSpPr>
-            <a:spLocks xmlns:a="http://schemas.openxmlformats.org/drawingml/2006/main" noGrp="1"/>
-          </p:cNvSpPr>
-          <p:nvPr/>
-        </p:nvSpPr>
-        <p:spPr>
-          <a:xfrm xmlns:a="http://schemas.openxmlformats.org/drawingml/2006/main">
-            <a:off x="685800" y="2476500"/>
-            <a:ext cx="10820400" cy="9525"/>
-          </a:xfrm>
-          <a:prstGeom xmlns:a="http://schemas.openxmlformats.org/drawingml/2006/main" prst="rect">
-            <a:avLst/>
-          </a:prstGeom>
-          <a:solidFill xmlns:a="http://schemas.openxmlformats.org/drawingml/2006/main">
-            <a:srgbClr val="DEDFD6"/>
-          </a:solidFill>
-          <a:ln xmlns:a="http://schemas.openxmlformats.org/drawingml/2006/main" w="0">
-            <a:noFill/>
-          </a:ln>
-        </p:spPr>
-      </p:sp>
-      <p:sp>
-        <p:nvSpPr>
-          <p:cNvPr id="6" name="">
-            <a:extLst xmlns:a="http://schemas.openxmlformats.org/drawingml/2006/main">
-              <a:ext uri="{FF2B5EF4-FFF2-40B4-BE49-F238E27FC236}">
-                <a16:creationId xmlns:a16="http://schemas.microsoft.com/office/drawing/2014/main" id="{516B356D-D8B3-40CC-B0FF-DAB12EF044BC}"/>
-              </a:ext>
-            </a:extLst>
-          </p:cNvPr>
-          <p:cNvSpPr>
-            <a:spLocks xmlns:a="http://schemas.openxmlformats.org/drawingml/2006/main" noGrp="1"/>
-          </p:cNvSpPr>
-          <p:nvPr/>
-        </p:nvSpPr>
-        <p:spPr>
-          <a:xfrm xmlns:a="http://schemas.openxmlformats.org/drawingml/2006/main">
-            <a:off x="685800" y="6448425"/>
-            <a:ext cx="10191750" cy="228600"/>
+                <a16:creationId xmlns:a16="http://schemas.microsoft.com/office/drawing/2014/main" id="{61C14C0D-0191-4F5F-B578-208910C2A4A1}"/>
+              </a:ext>
+            </a:extLst>
+          </p:cNvPr>
+          <p:cNvSpPr>
+            <a:spLocks xmlns:a="http://schemas.openxmlformats.org/drawingml/2006/main" noGrp="1"/>
+          </p:cNvSpPr>
+          <p:nvPr/>
+        </p:nvSpPr>
+        <p:spPr>
+          <a:xfrm xmlns:a="http://schemas.openxmlformats.org/drawingml/2006/main">
+            <a:off x="914400" y="6667500"/>
+            <a:ext cx="9525000" cy="152400"/>
           </a:xfrm>
           <a:prstGeom xmlns:a="http://schemas.openxmlformats.org/drawingml/2006/main" prst="rect">
             <a:avLst/>
@@ -11187,8 +11067,8 @@
             <a:noAutofit/>
           </a:bodyPr>
           <a:lstStyle xmlns:a="http://schemas.openxmlformats.org/drawingml/2006/main">
-            <a:defPPr>
-              <a:defRPr sz="975" b="0">
+            <a:defPPr algn="l">
+              <a:defRPr sz="825" b="0">
                 <a:solidFill>
                   <a:srgbClr val="858B7E"/>
                 </a:solidFill>
@@ -11199,8 +11079,8 @@
             </a:defPPr>
           </a:lstStyle>
           <a:p xmlns:a="http://schemas.openxmlformats.org/drawingml/2006/main">
-            <a:pPr>
-              <a:defRPr sz="975" b="0">
+            <a:pPr algn="l">
+              <a:defRPr sz="825" b="0">
                 <a:solidFill>
                   <a:srgbClr val="858B7E"/>
                 </a:solidFill>
@@ -11210,7 +11090,7 @@
               </a:defRPr>
             </a:pPr>
             <a:r>
-              <a:rPr sz="975" b="0">
+              <a:rPr sz="825" b="0">
                 <a:solidFill>
                   <a:srgbClr val="858B7E"/>
                 </a:solidFill>
@@ -11225,22 +11105,22 @@
       </p:sp>
       <p:sp>
         <p:nvSpPr>
-          <p:cNvPr id="7" name="">
-            <a:extLst xmlns:a="http://schemas.openxmlformats.org/drawingml/2006/main">
-              <a:ext uri="{FF2B5EF4-FFF2-40B4-BE49-F238E27FC236}">
-                <a16:creationId xmlns:a16="http://schemas.microsoft.com/office/drawing/2014/main" id="{A3FE2D87-F399-462E-8053-1B60C9B20371}"/>
-              </a:ext>
-            </a:extLst>
-          </p:cNvPr>
-          <p:cNvSpPr>
-            <a:spLocks xmlns:a="http://schemas.openxmlformats.org/drawingml/2006/main" noGrp="1"/>
-          </p:cNvSpPr>
-          <p:nvPr/>
-        </p:nvSpPr>
-        <p:spPr>
-          <a:xfrm xmlns:a="http://schemas.openxmlformats.org/drawingml/2006/main">
-            <a:off x="11134725" y="6448425"/>
-            <a:ext cx="371475" cy="228600"/>
+          <p:cNvPr id="6" name="">
+            <a:extLst xmlns:a="http://schemas.openxmlformats.org/drawingml/2006/main">
+              <a:ext uri="{FF2B5EF4-FFF2-40B4-BE49-F238E27FC236}">
+                <a16:creationId xmlns:a16="http://schemas.microsoft.com/office/drawing/2014/main" id="{AC33F3E4-8241-4FB4-A2BF-B543F0828B85}"/>
+              </a:ext>
+            </a:extLst>
+          </p:cNvPr>
+          <p:cNvSpPr>
+            <a:spLocks xmlns:a="http://schemas.openxmlformats.org/drawingml/2006/main" noGrp="1"/>
+          </p:cNvSpPr>
+          <p:nvPr/>
+        </p:nvSpPr>
+        <p:spPr>
+          <a:xfrm xmlns:a="http://schemas.openxmlformats.org/drawingml/2006/main">
+            <a:off x="11049000" y="6667500"/>
+            <a:ext cx="228600" cy="152400"/>
           </a:xfrm>
           <a:prstGeom xmlns:a="http://schemas.openxmlformats.org/drawingml/2006/main" prst="rect">
             <a:avLst/>
@@ -11255,8 +11135,8 @@
             <a:noAutofit/>
           </a:bodyPr>
           <a:lstStyle xmlns:a="http://schemas.openxmlformats.org/drawingml/2006/main">
-            <a:defPPr>
-              <a:defRPr sz="975" b="0">
+            <a:defPPr algn="l">
+              <a:defRPr sz="825" b="0">
                 <a:solidFill>
                   <a:srgbClr val="858B7E"/>
                 </a:solidFill>
@@ -11267,8 +11147,8 @@
             </a:defPPr>
           </a:lstStyle>
           <a:p xmlns:a="http://schemas.openxmlformats.org/drawingml/2006/main">
-            <a:pPr>
-              <a:defRPr sz="975" b="0">
+            <a:pPr algn="l">
+              <a:defRPr sz="825" b="0">
                 <a:solidFill>
                   <a:srgbClr val="858B7E"/>
                 </a:solidFill>
@@ -11278,7 +11158,7 @@
               </a:defRPr>
             </a:pPr>
             <a:r>
-              <a:rPr sz="975" b="0">
+              <a:rPr sz="825" b="0">
                 <a:solidFill>
                   <a:srgbClr val="858B7E"/>
                 </a:solidFill>
@@ -11294,7 +11174,7 @@
     </p:spTree>
     <p:extLst>
       <p:ext uri="{BB962C8B-B14F-4D97-AF65-F5344CB8AC3E}">
-        <p14:creationId xmlns:p14="http://schemas.microsoft.com/office/powerpoint/2010/main" val="2143185249"/>
+        <p14:creationId xmlns:p14="http://schemas.microsoft.com/office/powerpoint/2010/main" val="1335954805"/>
       </p:ext>
     </p:extLst>
   </p:cSld>
@@ -11322,22 +11202,22 @@
       </p:grpSpPr>
       <p:sp>
         <p:nvSpPr>
-          <p:cNvPr id="7" name="">
-            <a:extLst xmlns:a="http://schemas.openxmlformats.org/drawingml/2006/main">
-              <a:ext uri="{FF2B5EF4-FFF2-40B4-BE49-F238E27FC236}">
-                <a16:creationId xmlns:a16="http://schemas.microsoft.com/office/drawing/2014/main" id="{7C99248E-09AA-410A-B19C-E79EF6B3C388}"/>
-              </a:ext>
-            </a:extLst>
-          </p:cNvPr>
-          <p:cNvSpPr>
-            <a:spLocks xmlns:a="http://schemas.openxmlformats.org/drawingml/2006/main" noGrp="1"/>
-          </p:cNvSpPr>
-          <p:nvPr/>
-        </p:nvSpPr>
-        <p:spPr>
-          <a:xfrm xmlns:a="http://schemas.openxmlformats.org/drawingml/2006/main">
-            <a:off x="685800" y="619125"/>
-            <a:ext cx="10668000" cy="247650"/>
+          <p:cNvPr id="6" name="">
+            <a:extLst xmlns:a="http://schemas.openxmlformats.org/drawingml/2006/main">
+              <a:ext uri="{FF2B5EF4-FFF2-40B4-BE49-F238E27FC236}">
+                <a16:creationId xmlns:a16="http://schemas.microsoft.com/office/drawing/2014/main" id="{15E5453A-74CD-47C7-A5D9-A570EB39C765}"/>
+              </a:ext>
+            </a:extLst>
+          </p:cNvPr>
+          <p:cNvSpPr>
+            <a:spLocks xmlns:a="http://schemas.openxmlformats.org/drawingml/2006/main" noGrp="1"/>
+          </p:cNvSpPr>
+          <p:nvPr/>
+        </p:nvSpPr>
+        <p:spPr>
+          <a:xfrm xmlns:a="http://schemas.openxmlformats.org/drawingml/2006/main">
+            <a:off x="914400" y="133350"/>
+            <a:ext cx="10363200" cy="152400"/>
           </a:xfrm>
           <a:prstGeom xmlns:a="http://schemas.openxmlformats.org/drawingml/2006/main" prst="rect">
             <a:avLst/>
@@ -11352,8 +11232,8 @@
             <a:noAutofit/>
           </a:bodyPr>
           <a:lstStyle xmlns:a="http://schemas.openxmlformats.org/drawingml/2006/main">
-            <a:defPPr>
-              <a:defRPr sz="1050" b="1">
+            <a:defPPr algn="l">
+              <a:defRPr sz="825" b="1">
                 <a:solidFill>
                   <a:srgbClr val="9B7744"/>
                 </a:solidFill>
@@ -11364,8 +11244,8 @@
             </a:defPPr>
           </a:lstStyle>
           <a:p xmlns:a="http://schemas.openxmlformats.org/drawingml/2006/main">
-            <a:pPr>
-              <a:defRPr sz="1050" b="1">
+            <a:pPr algn="l">
+              <a:defRPr sz="825" b="1">
                 <a:solidFill>
                   <a:srgbClr val="9B7744"/>
                 </a:solidFill>
@@ -11375,7 +11255,7 @@
               </a:defRPr>
             </a:pPr>
             <a:r>
-              <a:rPr sz="1050" b="1">
+              <a:rPr sz="825" b="1">
                 <a:solidFill>
                   <a:srgbClr val="9B7744"/>
                 </a:solidFill>
@@ -11393,19 +11273,19 @@
           <p:cNvPr id="2" name="">
             <a:extLst xmlns:a="http://schemas.openxmlformats.org/drawingml/2006/main">
               <a:ext uri="{FF2B5EF4-FFF2-40B4-BE49-F238E27FC236}">
-                <a16:creationId xmlns:a16="http://schemas.microsoft.com/office/drawing/2014/main" id="{FE6E7A5B-691A-4104-B374-8C0977151C77}"/>
-              </a:ext>
-            </a:extLst>
-          </p:cNvPr>
-          <p:cNvSpPr>
-            <a:spLocks xmlns:a="http://schemas.openxmlformats.org/drawingml/2006/main" noGrp="1"/>
-          </p:cNvSpPr>
-          <p:nvPr/>
-        </p:nvSpPr>
-        <p:spPr>
-          <a:xfrm xmlns:a="http://schemas.openxmlformats.org/drawingml/2006/main">
-            <a:off x="685800" y="1047750"/>
-            <a:ext cx="10820400" cy="1085850"/>
+                <a16:creationId xmlns:a16="http://schemas.microsoft.com/office/drawing/2014/main" id="{0C629D3C-F077-4085-9AF6-CCED921E85B2}"/>
+              </a:ext>
+            </a:extLst>
+          </p:cNvPr>
+          <p:cNvSpPr>
+            <a:spLocks xmlns:a="http://schemas.openxmlformats.org/drawingml/2006/main" noGrp="1"/>
+          </p:cNvSpPr>
+          <p:nvPr/>
+        </p:nvSpPr>
+        <p:spPr>
+          <a:xfrm xmlns:a="http://schemas.openxmlformats.org/drawingml/2006/main">
+            <a:off x="914400" y="304800"/>
+            <a:ext cx="10363200" cy="381000"/>
           </a:xfrm>
           <a:prstGeom xmlns:a="http://schemas.openxmlformats.org/drawingml/2006/main" prst="rect">
             <a:avLst/>
@@ -11420,8 +11300,8 @@
             <a:noAutofit/>
           </a:bodyPr>
           <a:lstStyle xmlns:a="http://schemas.openxmlformats.org/drawingml/2006/main">
-            <a:defPPr>
-              <a:defRPr sz="3450" b="1">
+            <a:defPPr algn="l">
+              <a:defRPr sz="2250" b="1">
                 <a:solidFill>
                   <a:srgbClr val="1B1D19"/>
                 </a:solidFill>
@@ -11432,8 +11312,8 @@
             </a:defPPr>
           </a:lstStyle>
           <a:p xmlns:a="http://schemas.openxmlformats.org/drawingml/2006/main">
-            <a:pPr>
-              <a:defRPr sz="3450" b="1">
+            <a:pPr algn="l">
+              <a:defRPr sz="2250" b="1">
                 <a:solidFill>
                   <a:srgbClr val="1B1D19"/>
                 </a:solidFill>
@@ -11443,7 +11323,7 @@
               </a:defRPr>
             </a:pPr>
             <a:r>
-              <a:rPr sz="3450" b="1">
+              <a:rPr sz="2250" b="1">
                 <a:solidFill>
                   <a:srgbClr val="1B1D19"/>
                 </a:solidFill>
@@ -11461,25 +11341,25 @@
           <p:cNvPr id="3" name="">
             <a:extLst xmlns:a="http://schemas.openxmlformats.org/drawingml/2006/main">
               <a:ext uri="{FF2B5EF4-FFF2-40B4-BE49-F238E27FC236}">
-                <a16:creationId xmlns:a16="http://schemas.microsoft.com/office/drawing/2014/main" id="{FBD50AA4-1686-4523-80E6-AACCAA787376}"/>
-              </a:ext>
-            </a:extLst>
-          </p:cNvPr>
-          <p:cNvSpPr>
-            <a:spLocks xmlns:a="http://schemas.openxmlformats.org/drawingml/2006/main" noGrp="1"/>
-          </p:cNvSpPr>
-          <p:nvPr/>
-        </p:nvSpPr>
-        <p:spPr>
-          <a:xfrm xmlns:a="http://schemas.openxmlformats.org/drawingml/2006/main">
-            <a:off x="685800" y="2476500"/>
-            <a:ext cx="10820400" cy="3524250"/>
+                <a16:creationId xmlns:a16="http://schemas.microsoft.com/office/drawing/2014/main" id="{1C835A2E-7974-4597-8652-AB10E2FD0840}"/>
+              </a:ext>
+            </a:extLst>
+          </p:cNvPr>
+          <p:cNvSpPr>
+            <a:spLocks xmlns:a="http://schemas.openxmlformats.org/drawingml/2006/main" noGrp="1"/>
+          </p:cNvSpPr>
+          <p:nvPr/>
+        </p:nvSpPr>
+        <p:spPr>
+          <a:xfrm xmlns:a="http://schemas.openxmlformats.org/drawingml/2006/main">
+            <a:off x="914400" y="723900"/>
+            <a:ext cx="10363200" cy="5829300"/>
           </a:xfrm>
           <a:prstGeom xmlns:a="http://schemas.openxmlformats.org/drawingml/2006/main" prst="rect">
             <a:avLst/>
           </a:prstGeom>
           <a:solidFill xmlns:a="http://schemas.openxmlformats.org/drawingml/2006/main">
-            <a:srgbClr val="F7F7F3"/>
+            <a:srgbClr val="F4F3EE"/>
           </a:solidFill>
           <a:ln xmlns:a="http://schemas.openxmlformats.org/drawingml/2006/main" w="0">
             <a:noFill/>
@@ -11491,49 +11371,19 @@
           <p:cNvPr id="4" name="">
             <a:extLst xmlns:a="http://schemas.openxmlformats.org/drawingml/2006/main">
               <a:ext uri="{FF2B5EF4-FFF2-40B4-BE49-F238E27FC236}">
-                <a16:creationId xmlns:a16="http://schemas.microsoft.com/office/drawing/2014/main" id="{BC20EA18-3AE7-4C10-BE6B-B15781DAD9C6}"/>
-              </a:ext>
-            </a:extLst>
-          </p:cNvPr>
-          <p:cNvSpPr>
-            <a:spLocks xmlns:a="http://schemas.openxmlformats.org/drawingml/2006/main" noGrp="1"/>
-          </p:cNvSpPr>
-          <p:nvPr/>
-        </p:nvSpPr>
-        <p:spPr>
-          <a:xfrm xmlns:a="http://schemas.openxmlformats.org/drawingml/2006/main">
-            <a:off x="685800" y="2476500"/>
-            <a:ext cx="10820400" cy="9525"/>
-          </a:xfrm>
-          <a:prstGeom xmlns:a="http://schemas.openxmlformats.org/drawingml/2006/main" prst="rect">
-            <a:avLst/>
-          </a:prstGeom>
-          <a:solidFill xmlns:a="http://schemas.openxmlformats.org/drawingml/2006/main">
-            <a:srgbClr val="DEDFD6"/>
-          </a:solidFill>
-          <a:ln xmlns:a="http://schemas.openxmlformats.org/drawingml/2006/main" w="0">
-            <a:noFill/>
-          </a:ln>
-        </p:spPr>
-      </p:sp>
-      <p:sp>
-        <p:nvSpPr>
-          <p:cNvPr id="5" name="">
-            <a:extLst xmlns:a="http://schemas.openxmlformats.org/drawingml/2006/main">
-              <a:ext uri="{FF2B5EF4-FFF2-40B4-BE49-F238E27FC236}">
-                <a16:creationId xmlns:a16="http://schemas.microsoft.com/office/drawing/2014/main" id="{B45BE914-8DEF-4C3A-8475-EF10D7393F60}"/>
-              </a:ext>
-            </a:extLst>
-          </p:cNvPr>
-          <p:cNvSpPr>
-            <a:spLocks xmlns:a="http://schemas.openxmlformats.org/drawingml/2006/main" noGrp="1"/>
-          </p:cNvSpPr>
-          <p:nvPr/>
-        </p:nvSpPr>
-        <p:spPr>
-          <a:xfrm xmlns:a="http://schemas.openxmlformats.org/drawingml/2006/main">
-            <a:off x="685800" y="6448425"/>
-            <a:ext cx="10191750" cy="228600"/>
+                <a16:creationId xmlns:a16="http://schemas.microsoft.com/office/drawing/2014/main" id="{DC36C5BE-7D2A-4FD6-9F59-054D2A039D79}"/>
+              </a:ext>
+            </a:extLst>
+          </p:cNvPr>
+          <p:cNvSpPr>
+            <a:spLocks xmlns:a="http://schemas.openxmlformats.org/drawingml/2006/main" noGrp="1"/>
+          </p:cNvSpPr>
+          <p:nvPr/>
+        </p:nvSpPr>
+        <p:spPr>
+          <a:xfrm xmlns:a="http://schemas.openxmlformats.org/drawingml/2006/main">
+            <a:off x="914400" y="6667500"/>
+            <a:ext cx="9525000" cy="152400"/>
           </a:xfrm>
           <a:prstGeom xmlns:a="http://schemas.openxmlformats.org/drawingml/2006/main" prst="rect">
             <a:avLst/>
@@ -11548,8 +11398,8 @@
             <a:noAutofit/>
           </a:bodyPr>
           <a:lstStyle xmlns:a="http://schemas.openxmlformats.org/drawingml/2006/main">
-            <a:defPPr>
-              <a:defRPr sz="975" b="0">
+            <a:defPPr algn="l">
+              <a:defRPr sz="825" b="0">
                 <a:solidFill>
                   <a:srgbClr val="858B7E"/>
                 </a:solidFill>
@@ -11560,8 +11410,8 @@
             </a:defPPr>
           </a:lstStyle>
           <a:p xmlns:a="http://schemas.openxmlformats.org/drawingml/2006/main">
-            <a:pPr>
-              <a:defRPr sz="975" b="0">
+            <a:pPr algn="l">
+              <a:defRPr sz="825" b="0">
                 <a:solidFill>
                   <a:srgbClr val="858B7E"/>
                 </a:solidFill>
@@ -11571,7 +11421,7 @@
               </a:defRPr>
             </a:pPr>
             <a:r>
-              <a:rPr sz="975" b="0">
+              <a:rPr sz="825" b="0">
                 <a:solidFill>
                   <a:srgbClr val="858B7E"/>
                 </a:solidFill>
@@ -11586,22 +11436,22 @@
       </p:sp>
       <p:sp>
         <p:nvSpPr>
-          <p:cNvPr id="6" name="">
-            <a:extLst xmlns:a="http://schemas.openxmlformats.org/drawingml/2006/main">
-              <a:ext uri="{FF2B5EF4-FFF2-40B4-BE49-F238E27FC236}">
-                <a16:creationId xmlns:a16="http://schemas.microsoft.com/office/drawing/2014/main" id="{27861A6D-A58F-4794-BCCF-A177E16B717B}"/>
-              </a:ext>
-            </a:extLst>
-          </p:cNvPr>
-          <p:cNvSpPr>
-            <a:spLocks xmlns:a="http://schemas.openxmlformats.org/drawingml/2006/main" noGrp="1"/>
-          </p:cNvSpPr>
-          <p:nvPr/>
-        </p:nvSpPr>
-        <p:spPr>
-          <a:xfrm xmlns:a="http://schemas.openxmlformats.org/drawingml/2006/main">
-            <a:off x="11134725" y="6448425"/>
-            <a:ext cx="371475" cy="228600"/>
+          <p:cNvPr id="5" name="">
+            <a:extLst xmlns:a="http://schemas.openxmlformats.org/drawingml/2006/main">
+              <a:ext uri="{FF2B5EF4-FFF2-40B4-BE49-F238E27FC236}">
+                <a16:creationId xmlns:a16="http://schemas.microsoft.com/office/drawing/2014/main" id="{BCFFFD73-AB2E-4DA2-944E-9CE28C1275EE}"/>
+              </a:ext>
+            </a:extLst>
+          </p:cNvPr>
+          <p:cNvSpPr>
+            <a:spLocks xmlns:a="http://schemas.openxmlformats.org/drawingml/2006/main" noGrp="1"/>
+          </p:cNvSpPr>
+          <p:nvPr/>
+        </p:nvSpPr>
+        <p:spPr>
+          <a:xfrm xmlns:a="http://schemas.openxmlformats.org/drawingml/2006/main">
+            <a:off x="11049000" y="6667500"/>
+            <a:ext cx="228600" cy="152400"/>
           </a:xfrm>
           <a:prstGeom xmlns:a="http://schemas.openxmlformats.org/drawingml/2006/main" prst="rect">
             <a:avLst/>
@@ -11616,8 +11466,8 @@
             <a:noAutofit/>
           </a:bodyPr>
           <a:lstStyle xmlns:a="http://schemas.openxmlformats.org/drawingml/2006/main">
-            <a:defPPr>
-              <a:defRPr sz="975" b="0">
+            <a:defPPr algn="l">
+              <a:defRPr sz="825" b="0">
                 <a:solidFill>
                   <a:srgbClr val="858B7E"/>
                 </a:solidFill>
@@ -11628,8 +11478,8 @@
             </a:defPPr>
           </a:lstStyle>
           <a:p xmlns:a="http://schemas.openxmlformats.org/drawingml/2006/main">
-            <a:pPr>
-              <a:defRPr sz="975" b="0">
+            <a:pPr algn="l">
+              <a:defRPr sz="825" b="0">
                 <a:solidFill>
                   <a:srgbClr val="858B7E"/>
                 </a:solidFill>
@@ -11639,7 +11489,7 @@
               </a:defRPr>
             </a:pPr>
             <a:r>
-              <a:rPr sz="975" b="0">
+              <a:rPr sz="825" b="0">
                 <a:solidFill>
                   <a:srgbClr val="858B7E"/>
                 </a:solidFill>
@@ -11655,7 +11505,7 @@
     </p:spTree>
     <p:extLst>
       <p:ext uri="{BB962C8B-B14F-4D97-AF65-F5344CB8AC3E}">
-        <p14:creationId xmlns:p14="http://schemas.microsoft.com/office/powerpoint/2010/main" val="1564799833"/>
+        <p14:creationId xmlns:p14="http://schemas.microsoft.com/office/powerpoint/2010/main" val="1374361539"/>
       </p:ext>
     </p:extLst>
   </p:cSld>
@@ -11683,22 +11533,22 @@
       </p:grpSpPr>
       <p:sp>
         <p:nvSpPr>
-          <p:cNvPr id="7" name="">
-            <a:extLst xmlns:a="http://schemas.openxmlformats.org/drawingml/2006/main">
-              <a:ext uri="{FF2B5EF4-FFF2-40B4-BE49-F238E27FC236}">
-                <a16:creationId xmlns:a16="http://schemas.microsoft.com/office/drawing/2014/main" id="{EDA3E417-F6F1-4190-AC1C-C4F691BA177D}"/>
-              </a:ext>
-            </a:extLst>
-          </p:cNvPr>
-          <p:cNvSpPr>
-            <a:spLocks xmlns:a="http://schemas.openxmlformats.org/drawingml/2006/main" noGrp="1"/>
-          </p:cNvSpPr>
-          <p:nvPr/>
-        </p:nvSpPr>
-        <p:spPr>
-          <a:xfrm xmlns:a="http://schemas.openxmlformats.org/drawingml/2006/main">
-            <a:off x="685800" y="619125"/>
-            <a:ext cx="10668000" cy="247650"/>
+          <p:cNvPr id="6" name="">
+            <a:extLst xmlns:a="http://schemas.openxmlformats.org/drawingml/2006/main">
+              <a:ext uri="{FF2B5EF4-FFF2-40B4-BE49-F238E27FC236}">
+                <a16:creationId xmlns:a16="http://schemas.microsoft.com/office/drawing/2014/main" id="{C8BD1FF4-16E7-47E8-A9F5-3A3A7A711A50}"/>
+              </a:ext>
+            </a:extLst>
+          </p:cNvPr>
+          <p:cNvSpPr>
+            <a:spLocks xmlns:a="http://schemas.openxmlformats.org/drawingml/2006/main" noGrp="1"/>
+          </p:cNvSpPr>
+          <p:nvPr/>
+        </p:nvSpPr>
+        <p:spPr>
+          <a:xfrm xmlns:a="http://schemas.openxmlformats.org/drawingml/2006/main">
+            <a:off x="914400" y="133350"/>
+            <a:ext cx="10363200" cy="152400"/>
           </a:xfrm>
           <a:prstGeom xmlns:a="http://schemas.openxmlformats.org/drawingml/2006/main" prst="rect">
             <a:avLst/>
@@ -11713,8 +11563,8 @@
             <a:noAutofit/>
           </a:bodyPr>
           <a:lstStyle xmlns:a="http://schemas.openxmlformats.org/drawingml/2006/main">
-            <a:defPPr>
-              <a:defRPr sz="1050" b="1">
+            <a:defPPr algn="l">
+              <a:defRPr sz="825" b="1">
                 <a:solidFill>
                   <a:srgbClr val="9B7744"/>
                 </a:solidFill>
@@ -11725,8 +11575,8 @@
             </a:defPPr>
           </a:lstStyle>
           <a:p xmlns:a="http://schemas.openxmlformats.org/drawingml/2006/main">
-            <a:pPr>
-              <a:defRPr sz="1050" b="1">
+            <a:pPr algn="l">
+              <a:defRPr sz="825" b="1">
                 <a:solidFill>
                   <a:srgbClr val="9B7744"/>
                 </a:solidFill>
@@ -11736,7 +11586,7 @@
               </a:defRPr>
             </a:pPr>
             <a:r>
-              <a:rPr sz="1050" b="1">
+              <a:rPr sz="825" b="1">
                 <a:solidFill>
                   <a:srgbClr val="9B7744"/>
                 </a:solidFill>
@@ -11754,19 +11604,19 @@
           <p:cNvPr id="2" name="">
             <a:extLst xmlns:a="http://schemas.openxmlformats.org/drawingml/2006/main">
               <a:ext uri="{FF2B5EF4-FFF2-40B4-BE49-F238E27FC236}">
-                <a16:creationId xmlns:a16="http://schemas.microsoft.com/office/drawing/2014/main" id="{D77CD645-0E07-4C93-B31E-717B65F5E591}"/>
-              </a:ext>
-            </a:extLst>
-          </p:cNvPr>
-          <p:cNvSpPr>
-            <a:spLocks xmlns:a="http://schemas.openxmlformats.org/drawingml/2006/main" noGrp="1"/>
-          </p:cNvSpPr>
-          <p:nvPr/>
-        </p:nvSpPr>
-        <p:spPr>
-          <a:xfrm xmlns:a="http://schemas.openxmlformats.org/drawingml/2006/main">
-            <a:off x="685800" y="1047750"/>
-            <a:ext cx="10820400" cy="1085850"/>
+                <a16:creationId xmlns:a16="http://schemas.microsoft.com/office/drawing/2014/main" id="{B116C21E-C437-46A1-B87D-D52C8C765964}"/>
+              </a:ext>
+            </a:extLst>
+          </p:cNvPr>
+          <p:cNvSpPr>
+            <a:spLocks xmlns:a="http://schemas.openxmlformats.org/drawingml/2006/main" noGrp="1"/>
+          </p:cNvSpPr>
+          <p:nvPr/>
+        </p:nvSpPr>
+        <p:spPr>
+          <a:xfrm xmlns:a="http://schemas.openxmlformats.org/drawingml/2006/main">
+            <a:off x="914400" y="304800"/>
+            <a:ext cx="10363200" cy="381000"/>
           </a:xfrm>
           <a:prstGeom xmlns:a="http://schemas.openxmlformats.org/drawingml/2006/main" prst="rect">
             <a:avLst/>
@@ -11781,8 +11631,8 @@
             <a:noAutofit/>
           </a:bodyPr>
           <a:lstStyle xmlns:a="http://schemas.openxmlformats.org/drawingml/2006/main">
-            <a:defPPr>
-              <a:defRPr sz="3450" b="1">
+            <a:defPPr algn="l">
+              <a:defRPr sz="2250" b="1">
                 <a:solidFill>
                   <a:srgbClr val="1B1D19"/>
                 </a:solidFill>
@@ -11793,8 +11643,8 @@
             </a:defPPr>
           </a:lstStyle>
           <a:p xmlns:a="http://schemas.openxmlformats.org/drawingml/2006/main">
-            <a:pPr>
-              <a:defRPr sz="3450" b="1">
+            <a:pPr algn="l">
+              <a:defRPr sz="2250" b="1">
                 <a:solidFill>
                   <a:srgbClr val="1B1D19"/>
                 </a:solidFill>
@@ -11804,7 +11654,7 @@
               </a:defRPr>
             </a:pPr>
             <a:r>
-              <a:rPr sz="3450" b="1">
+              <a:rPr sz="2250" b="1">
                 <a:solidFill>
                   <a:srgbClr val="1B1D19"/>
                 </a:solidFill>
@@ -11822,25 +11672,25 @@
           <p:cNvPr id="3" name="">
             <a:extLst xmlns:a="http://schemas.openxmlformats.org/drawingml/2006/main">
               <a:ext uri="{FF2B5EF4-FFF2-40B4-BE49-F238E27FC236}">
-                <a16:creationId xmlns:a16="http://schemas.microsoft.com/office/drawing/2014/main" id="{9E326510-E311-4A5E-B0C9-1E786FCCF01A}"/>
-              </a:ext>
-            </a:extLst>
-          </p:cNvPr>
-          <p:cNvSpPr>
-            <a:spLocks xmlns:a="http://schemas.openxmlformats.org/drawingml/2006/main" noGrp="1"/>
-          </p:cNvSpPr>
-          <p:nvPr/>
-        </p:nvSpPr>
-        <p:spPr>
-          <a:xfrm xmlns:a="http://schemas.openxmlformats.org/drawingml/2006/main">
-            <a:off x="685800" y="2476500"/>
-            <a:ext cx="10820400" cy="3524250"/>
+                <a16:creationId xmlns:a16="http://schemas.microsoft.com/office/drawing/2014/main" id="{058CF802-5BD1-40C2-AA19-87DFEBF933CC}"/>
+              </a:ext>
+            </a:extLst>
+          </p:cNvPr>
+          <p:cNvSpPr>
+            <a:spLocks xmlns:a="http://schemas.openxmlformats.org/drawingml/2006/main" noGrp="1"/>
+          </p:cNvSpPr>
+          <p:nvPr/>
+        </p:nvSpPr>
+        <p:spPr>
+          <a:xfrm xmlns:a="http://schemas.openxmlformats.org/drawingml/2006/main">
+            <a:off x="914400" y="723900"/>
+            <a:ext cx="10363200" cy="5829300"/>
           </a:xfrm>
           <a:prstGeom xmlns:a="http://schemas.openxmlformats.org/drawingml/2006/main" prst="rect">
             <a:avLst/>
           </a:prstGeom>
           <a:solidFill xmlns:a="http://schemas.openxmlformats.org/drawingml/2006/main">
-            <a:srgbClr val="F7F7F3"/>
+            <a:srgbClr val="F4F3EE"/>
           </a:solidFill>
           <a:ln xmlns:a="http://schemas.openxmlformats.org/drawingml/2006/main" w="0">
             <a:noFill/>
@@ -11852,49 +11702,19 @@
           <p:cNvPr id="4" name="">
             <a:extLst xmlns:a="http://schemas.openxmlformats.org/drawingml/2006/main">
               <a:ext uri="{FF2B5EF4-FFF2-40B4-BE49-F238E27FC236}">
-                <a16:creationId xmlns:a16="http://schemas.microsoft.com/office/drawing/2014/main" id="{1DFF8C5B-1466-4933-A2A9-ADFDE69401FC}"/>
-              </a:ext>
-            </a:extLst>
-          </p:cNvPr>
-          <p:cNvSpPr>
-            <a:spLocks xmlns:a="http://schemas.openxmlformats.org/drawingml/2006/main" noGrp="1"/>
-          </p:cNvSpPr>
-          <p:nvPr/>
-        </p:nvSpPr>
-        <p:spPr>
-          <a:xfrm xmlns:a="http://schemas.openxmlformats.org/drawingml/2006/main">
-            <a:off x="685800" y="2476500"/>
-            <a:ext cx="10820400" cy="9525"/>
-          </a:xfrm>
-          <a:prstGeom xmlns:a="http://schemas.openxmlformats.org/drawingml/2006/main" prst="rect">
-            <a:avLst/>
-          </a:prstGeom>
-          <a:solidFill xmlns:a="http://schemas.openxmlformats.org/drawingml/2006/main">
-            <a:srgbClr val="DEDFD6"/>
-          </a:solidFill>
-          <a:ln xmlns:a="http://schemas.openxmlformats.org/drawingml/2006/main" w="0">
-            <a:noFill/>
-          </a:ln>
-        </p:spPr>
-      </p:sp>
-      <p:sp>
-        <p:nvSpPr>
-          <p:cNvPr id="5" name="">
-            <a:extLst xmlns:a="http://schemas.openxmlformats.org/drawingml/2006/main">
-              <a:ext uri="{FF2B5EF4-FFF2-40B4-BE49-F238E27FC236}">
-                <a16:creationId xmlns:a16="http://schemas.microsoft.com/office/drawing/2014/main" id="{E725F7F3-79A2-4338-B6A7-5CAEE0200A5C}"/>
-              </a:ext>
-            </a:extLst>
-          </p:cNvPr>
-          <p:cNvSpPr>
-            <a:spLocks xmlns:a="http://schemas.openxmlformats.org/drawingml/2006/main" noGrp="1"/>
-          </p:cNvSpPr>
-          <p:nvPr/>
-        </p:nvSpPr>
-        <p:spPr>
-          <a:xfrm xmlns:a="http://schemas.openxmlformats.org/drawingml/2006/main">
-            <a:off x="685800" y="6448425"/>
-            <a:ext cx="10191750" cy="228600"/>
+                <a16:creationId xmlns:a16="http://schemas.microsoft.com/office/drawing/2014/main" id="{3E623818-FD7C-478E-8CA3-82F2F6D73D9A}"/>
+              </a:ext>
+            </a:extLst>
+          </p:cNvPr>
+          <p:cNvSpPr>
+            <a:spLocks xmlns:a="http://schemas.openxmlformats.org/drawingml/2006/main" noGrp="1"/>
+          </p:cNvSpPr>
+          <p:nvPr/>
+        </p:nvSpPr>
+        <p:spPr>
+          <a:xfrm xmlns:a="http://schemas.openxmlformats.org/drawingml/2006/main">
+            <a:off x="914400" y="6667500"/>
+            <a:ext cx="9525000" cy="152400"/>
           </a:xfrm>
           <a:prstGeom xmlns:a="http://schemas.openxmlformats.org/drawingml/2006/main" prst="rect">
             <a:avLst/>
@@ -11909,8 +11729,8 @@
             <a:noAutofit/>
           </a:bodyPr>
           <a:lstStyle xmlns:a="http://schemas.openxmlformats.org/drawingml/2006/main">
-            <a:defPPr>
-              <a:defRPr sz="975" b="0">
+            <a:defPPr algn="l">
+              <a:defRPr sz="825" b="0">
                 <a:solidFill>
                   <a:srgbClr val="858B7E"/>
                 </a:solidFill>
@@ -11921,8 +11741,8 @@
             </a:defPPr>
           </a:lstStyle>
           <a:p xmlns:a="http://schemas.openxmlformats.org/drawingml/2006/main">
-            <a:pPr>
-              <a:defRPr sz="975" b="0">
+            <a:pPr algn="l">
+              <a:defRPr sz="825" b="0">
                 <a:solidFill>
                   <a:srgbClr val="858B7E"/>
                 </a:solidFill>
@@ -11932,7 +11752,7 @@
               </a:defRPr>
             </a:pPr>
             <a:r>
-              <a:rPr sz="975" b="0">
+              <a:rPr sz="825" b="0">
                 <a:solidFill>
                   <a:srgbClr val="858B7E"/>
                 </a:solidFill>
@@ -11947,22 +11767,22 @@
       </p:sp>
       <p:sp>
         <p:nvSpPr>
-          <p:cNvPr id="6" name="">
-            <a:extLst xmlns:a="http://schemas.openxmlformats.org/drawingml/2006/main">
-              <a:ext uri="{FF2B5EF4-FFF2-40B4-BE49-F238E27FC236}">
-                <a16:creationId xmlns:a16="http://schemas.microsoft.com/office/drawing/2014/main" id="{3622CEBA-BEA1-4D94-9BA4-EE0D6E5F941C}"/>
-              </a:ext>
-            </a:extLst>
-          </p:cNvPr>
-          <p:cNvSpPr>
-            <a:spLocks xmlns:a="http://schemas.openxmlformats.org/drawingml/2006/main" noGrp="1"/>
-          </p:cNvSpPr>
-          <p:nvPr/>
-        </p:nvSpPr>
-        <p:spPr>
-          <a:xfrm xmlns:a="http://schemas.openxmlformats.org/drawingml/2006/main">
-            <a:off x="11134725" y="6448425"/>
-            <a:ext cx="371475" cy="228600"/>
+          <p:cNvPr id="5" name="">
+            <a:extLst xmlns:a="http://schemas.openxmlformats.org/drawingml/2006/main">
+              <a:ext uri="{FF2B5EF4-FFF2-40B4-BE49-F238E27FC236}">
+                <a16:creationId xmlns:a16="http://schemas.microsoft.com/office/drawing/2014/main" id="{41CBFFE8-9C63-4959-BE72-9A9DDEF23BC2}"/>
+              </a:ext>
+            </a:extLst>
+          </p:cNvPr>
+          <p:cNvSpPr>
+            <a:spLocks xmlns:a="http://schemas.openxmlformats.org/drawingml/2006/main" noGrp="1"/>
+          </p:cNvSpPr>
+          <p:nvPr/>
+        </p:nvSpPr>
+        <p:spPr>
+          <a:xfrm xmlns:a="http://schemas.openxmlformats.org/drawingml/2006/main">
+            <a:off x="11049000" y="6667500"/>
+            <a:ext cx="228600" cy="152400"/>
           </a:xfrm>
           <a:prstGeom xmlns:a="http://schemas.openxmlformats.org/drawingml/2006/main" prst="rect">
             <a:avLst/>
@@ -11977,8 +11797,8 @@
             <a:noAutofit/>
           </a:bodyPr>
           <a:lstStyle xmlns:a="http://schemas.openxmlformats.org/drawingml/2006/main">
-            <a:defPPr>
-              <a:defRPr sz="975" b="0">
+            <a:defPPr algn="l">
+              <a:defRPr sz="825" b="0">
                 <a:solidFill>
                   <a:srgbClr val="858B7E"/>
                 </a:solidFill>
@@ -11989,8 +11809,8 @@
             </a:defPPr>
           </a:lstStyle>
           <a:p xmlns:a="http://schemas.openxmlformats.org/drawingml/2006/main">
-            <a:pPr>
-              <a:defRPr sz="975" b="0">
+            <a:pPr algn="l">
+              <a:defRPr sz="825" b="0">
                 <a:solidFill>
                   <a:srgbClr val="858B7E"/>
                 </a:solidFill>
@@ -12000,7 +11820,7 @@
               </a:defRPr>
             </a:pPr>
             <a:r>
-              <a:rPr sz="975" b="0">
+              <a:rPr sz="825" b="0">
                 <a:solidFill>
                   <a:srgbClr val="858B7E"/>
                 </a:solidFill>
@@ -12016,7 +11836,7 @@
     </p:spTree>
     <p:extLst>
       <p:ext uri="{BB962C8B-B14F-4D97-AF65-F5344CB8AC3E}">
-        <p14:creationId xmlns:p14="http://schemas.microsoft.com/office/powerpoint/2010/main" val="534160250"/>
+        <p14:creationId xmlns:p14="http://schemas.microsoft.com/office/powerpoint/2010/main" val="1916071384"/>
       </p:ext>
     </p:extLst>
   </p:cSld>

--- a/downloads/highst-perioperative-webinar.pptx
+++ b/downloads/highst-perioperative-webinar.pptx
@@ -2,27 +2,27 @@
 <file path=ppt/presentation.xml><?xml version="1.0" encoding="utf-8"?>
 <p:presentation xmlns:p="http://schemas.openxmlformats.org/presentationml/2006/main">
   <p:sldMasterIdLst>
-    <p:sldMasterId xmlns:r="http://schemas.openxmlformats.org/officeDocument/2006/relationships" id="2147483648" r:id="Rcc4efa1c288b4ef1"/>
+    <p:sldMasterId xmlns:r="http://schemas.openxmlformats.org/officeDocument/2006/relationships" id="2147483648" r:id="R7adf33d2b9084b6d"/>
   </p:sldMasterIdLst>
   <p:notesMasterIdLst>
-    <p:notesMasterId xmlns:r="http://schemas.openxmlformats.org/officeDocument/2006/relationships" r:id="R5b3e87f3e91845dc"/>
+    <p:notesMasterId xmlns:r="http://schemas.openxmlformats.org/officeDocument/2006/relationships" r:id="R32832b0067714240"/>
   </p:notesMasterIdLst>
   <p:sldIdLst>
-    <p:sldId xmlns:r="http://schemas.openxmlformats.org/officeDocument/2006/relationships" id="256" r:id="R4c25997d9bc44673"/>
-    <p:sldId xmlns:r="http://schemas.openxmlformats.org/officeDocument/2006/relationships" id="257" r:id="Ra34716ee66604145"/>
-    <p:sldId xmlns:r="http://schemas.openxmlformats.org/officeDocument/2006/relationships" id="258" r:id="R1c053f9aed004e46"/>
-    <p:sldId xmlns:r="http://schemas.openxmlformats.org/officeDocument/2006/relationships" id="259" r:id="R5d6be922e3394221"/>
-    <p:sldId xmlns:r="http://schemas.openxmlformats.org/officeDocument/2006/relationships" id="260" r:id="Re071ba049aea43f8"/>
-    <p:sldId xmlns:r="http://schemas.openxmlformats.org/officeDocument/2006/relationships" id="261" r:id="Raff95f084a754c6b"/>
-    <p:sldId xmlns:r="http://schemas.openxmlformats.org/officeDocument/2006/relationships" id="262" r:id="R6e6cfbd7a0c146b1"/>
-    <p:sldId xmlns:r="http://schemas.openxmlformats.org/officeDocument/2006/relationships" id="263" r:id="Rb287d44de0134827"/>
-    <p:sldId xmlns:r="http://schemas.openxmlformats.org/officeDocument/2006/relationships" id="264" r:id="R4372b6e55b2e4f11"/>
-    <p:sldId xmlns:r="http://schemas.openxmlformats.org/officeDocument/2006/relationships" id="265" r:id="R1070a5fd12b24763"/>
-    <p:sldId xmlns:r="http://schemas.openxmlformats.org/officeDocument/2006/relationships" id="266" r:id="Rba9933b85e6141a0"/>
-    <p:sldId xmlns:r="http://schemas.openxmlformats.org/officeDocument/2006/relationships" id="267" r:id="R7f7f84753cc4478c"/>
-    <p:sldId xmlns:r="http://schemas.openxmlformats.org/officeDocument/2006/relationships" id="268" r:id="R938443632cb94a4c"/>
-    <p:sldId xmlns:r="http://schemas.openxmlformats.org/officeDocument/2006/relationships" id="269" r:id="Rfc2ff55228e94e0f"/>
-    <p:sldId xmlns:r="http://schemas.openxmlformats.org/officeDocument/2006/relationships" id="270" r:id="R6be3f0cec11a4ec8"/>
+    <p:sldId xmlns:r="http://schemas.openxmlformats.org/officeDocument/2006/relationships" id="256" r:id="R026351cf90b848db"/>
+    <p:sldId xmlns:r="http://schemas.openxmlformats.org/officeDocument/2006/relationships" id="257" r:id="R2ba4f477345640be"/>
+    <p:sldId xmlns:r="http://schemas.openxmlformats.org/officeDocument/2006/relationships" id="258" r:id="R849c71373cfc4f01"/>
+    <p:sldId xmlns:r="http://schemas.openxmlformats.org/officeDocument/2006/relationships" id="259" r:id="R026ca8a0feb64d5b"/>
+    <p:sldId xmlns:r="http://schemas.openxmlformats.org/officeDocument/2006/relationships" id="260" r:id="R2c24d6288f8646a1"/>
+    <p:sldId xmlns:r="http://schemas.openxmlformats.org/officeDocument/2006/relationships" id="261" r:id="R086e8a57d976493a"/>
+    <p:sldId xmlns:r="http://schemas.openxmlformats.org/officeDocument/2006/relationships" id="262" r:id="Ref8de98a8414493a"/>
+    <p:sldId xmlns:r="http://schemas.openxmlformats.org/officeDocument/2006/relationships" id="263" r:id="Ra831c697b7a14b4b"/>
+    <p:sldId xmlns:r="http://schemas.openxmlformats.org/officeDocument/2006/relationships" id="264" r:id="R59f9326457b94172"/>
+    <p:sldId xmlns:r="http://schemas.openxmlformats.org/officeDocument/2006/relationships" id="265" r:id="R7d93610b44cf47c6"/>
+    <p:sldId xmlns:r="http://schemas.openxmlformats.org/officeDocument/2006/relationships" id="266" r:id="R39f889f1428c4b38"/>
+    <p:sldId xmlns:r="http://schemas.openxmlformats.org/officeDocument/2006/relationships" id="267" r:id="Rbf6a6f596ae54cfb"/>
+    <p:sldId xmlns:r="http://schemas.openxmlformats.org/officeDocument/2006/relationships" id="268" r:id="R22b11c31379c488c"/>
+    <p:sldId xmlns:r="http://schemas.openxmlformats.org/officeDocument/2006/relationships" id="269" r:id="R8d39ac556d3a43ba"/>
+    <p:sldId xmlns:r="http://schemas.openxmlformats.org/officeDocument/2006/relationships" id="270" r:id="R9400b852d2d24d0a"/>
   </p:sldIdLst>
   <p:sldSz cx="12192000" cy="6858000"/>
   <p:notesSz cx="6858000" cy="9144000"/>
@@ -1563,7 +1563,7 @@
           <p:cNvPr id="3" name="Title">
             <a:extLst xmlns:a="http://schemas.openxmlformats.org/drawingml/2006/main">
               <a:ext uri="{FF2B5EF4-FFF2-40B4-BE49-F238E27FC236}">
-                <a16:creationId xmlns:a16="http://schemas.microsoft.com/office/drawing/2014/main" id="{83A30845-1A30-4200-82FE-AAF854C64535}"/>
+                <a16:creationId xmlns:a16="http://schemas.microsoft.com/office/drawing/2014/main" id="{9839395D-D49D-4CD3-97C4-9622F24AEAED}"/>
               </a:ext>
             </a:extLst>
           </p:cNvPr>
@@ -1720,7 +1720,7 @@
           <p:cNvPr id="2" name="Subtitle">
             <a:extLst xmlns:a="http://schemas.openxmlformats.org/drawingml/2006/main">
               <a:ext uri="{FF2B5EF4-FFF2-40B4-BE49-F238E27FC236}">
-                <a16:creationId xmlns:a16="http://schemas.microsoft.com/office/drawing/2014/main" id="{51CF4F87-CDD6-45FC-A767-BA911FA802A6}"/>
+                <a16:creationId xmlns:a16="http://schemas.microsoft.com/office/drawing/2014/main" id="{92E6F663-1D3D-4F6A-BE43-0FC99250FE0D}"/>
               </a:ext>
             </a:extLst>
           </p:cNvPr>
@@ -1894,7 +1894,7 @@
           <p:cNvPr id="2" name="Section title">
             <a:extLst xmlns:a="http://schemas.openxmlformats.org/drawingml/2006/main">
               <a:ext uri="{FF2B5EF4-FFF2-40B4-BE49-F238E27FC236}">
-                <a16:creationId xmlns:a16="http://schemas.microsoft.com/office/drawing/2014/main" id="{3EA20947-52AE-4F37-9C7A-C837300B0EFE}"/>
+                <a16:creationId xmlns:a16="http://schemas.microsoft.com/office/drawing/2014/main" id="{E7954647-92D0-46E4-9EBC-D7F2CCD370CA}"/>
               </a:ext>
             </a:extLst>
           </p:cNvPr>
@@ -2068,7 +2068,7 @@
           <p:cNvPr id="3" name="Title">
             <a:extLst xmlns:a="http://schemas.openxmlformats.org/drawingml/2006/main">
               <a:ext uri="{FF2B5EF4-FFF2-40B4-BE49-F238E27FC236}">
-                <a16:creationId xmlns:a16="http://schemas.microsoft.com/office/drawing/2014/main" id="{1CD33F13-8A6C-43A5-844B-B0637746FEEF}"/>
+                <a16:creationId xmlns:a16="http://schemas.microsoft.com/office/drawing/2014/main" id="{605A7C10-F321-428F-A91A-295881A16DB5}"/>
               </a:ext>
             </a:extLst>
           </p:cNvPr>
@@ -2225,7 +2225,7 @@
           <p:cNvPr id="2" name="Body">
             <a:extLst xmlns:a="http://schemas.openxmlformats.org/drawingml/2006/main">
               <a:ext uri="{FF2B5EF4-FFF2-40B4-BE49-F238E27FC236}">
-                <a16:creationId xmlns:a16="http://schemas.microsoft.com/office/drawing/2014/main" id="{9748D49E-2AC4-484A-B01F-73AC2A95F987}"/>
+                <a16:creationId xmlns:a16="http://schemas.microsoft.com/office/drawing/2014/main" id="{4F2B1A68-0AD3-4772-A201-73BCF1479D42}"/>
               </a:ext>
             </a:extLst>
           </p:cNvPr>
@@ -2399,7 +2399,7 @@
           <p:cNvPr id="4" name="Title">
             <a:extLst xmlns:a="http://schemas.openxmlformats.org/drawingml/2006/main">
               <a:ext uri="{FF2B5EF4-FFF2-40B4-BE49-F238E27FC236}">
-                <a16:creationId xmlns:a16="http://schemas.microsoft.com/office/drawing/2014/main" id="{74F7C5FD-DA8D-4180-B99C-400D5FDF496D}"/>
+                <a16:creationId xmlns:a16="http://schemas.microsoft.com/office/drawing/2014/main" id="{5DD94B3F-52F6-4421-BF32-6C9AB3E5905B}"/>
               </a:ext>
             </a:extLst>
           </p:cNvPr>
@@ -2556,7 +2556,7 @@
           <p:cNvPr id="2" name="Left column">
             <a:extLst xmlns:a="http://schemas.openxmlformats.org/drawingml/2006/main">
               <a:ext uri="{FF2B5EF4-FFF2-40B4-BE49-F238E27FC236}">
-                <a16:creationId xmlns:a16="http://schemas.microsoft.com/office/drawing/2014/main" id="{68978989-A2E0-4EE9-92E1-A678E47ADA54}"/>
+                <a16:creationId xmlns:a16="http://schemas.microsoft.com/office/drawing/2014/main" id="{C17E2B0D-B345-41AC-9918-44B23EC2D290}"/>
               </a:ext>
             </a:extLst>
           </p:cNvPr>
@@ -2713,7 +2713,7 @@
           <p:cNvPr id="3" name="Right column">
             <a:extLst xmlns:a="http://schemas.openxmlformats.org/drawingml/2006/main">
               <a:ext uri="{FF2B5EF4-FFF2-40B4-BE49-F238E27FC236}">
-                <a16:creationId xmlns:a16="http://schemas.microsoft.com/office/drawing/2014/main" id="{A2F1F952-AC79-44F5-B140-E319853E1231}"/>
+                <a16:creationId xmlns:a16="http://schemas.microsoft.com/office/drawing/2014/main" id="{2361EDBA-A20A-421C-9157-908B6887C91F}"/>
               </a:ext>
             </a:extLst>
           </p:cNvPr>
@@ -2887,7 +2887,7 @@
           <p:cNvPr id="3" name="Title">
             <a:extLst xmlns:a="http://schemas.openxmlformats.org/drawingml/2006/main">
               <a:ext uri="{FF2B5EF4-FFF2-40B4-BE49-F238E27FC236}">
-                <a16:creationId xmlns:a16="http://schemas.microsoft.com/office/drawing/2014/main" id="{20245DB9-B556-4BD0-98E1-229C04B3BCEC}"/>
+                <a16:creationId xmlns:a16="http://schemas.microsoft.com/office/drawing/2014/main" id="{73391B42-6979-4628-8A95-69C0A8EF9818}"/>
               </a:ext>
             </a:extLst>
           </p:cNvPr>
@@ -3044,7 +3044,7 @@
           <p:cNvPr id="2" name="Left column">
             <a:extLst xmlns:a="http://schemas.openxmlformats.org/drawingml/2006/main">
               <a:ext uri="{FF2B5EF4-FFF2-40B4-BE49-F238E27FC236}">
-                <a16:creationId xmlns:a16="http://schemas.microsoft.com/office/drawing/2014/main" id="{CD0A0566-3B7E-4505-B0AA-FE1170F845E3}"/>
+                <a16:creationId xmlns:a16="http://schemas.microsoft.com/office/drawing/2014/main" id="{9651E31C-FE02-4C81-BFB2-8EC6DAD34B56}"/>
               </a:ext>
             </a:extLst>
           </p:cNvPr>
@@ -3239,12 +3239,12 @@
   </p:cSld>
   <p:clrMap bg1="lt1" tx1="dk1" bg2="lt2" tx2="dk2" accent1="accent1" accent2="accent2" accent3="accent3" accent4="accent4" accent5="accent5" accent6="accent6" hlink="hlink" folHlink="folHlink"/>
   <p:sldLayoutIdLst>
-    <p:sldLayoutId xmlns:r="http://schemas.openxmlformats.org/officeDocument/2006/relationships" id="2147483649" r:id="R5a2cd24448d54d55"/>
-    <p:sldLayoutId xmlns:r="http://schemas.openxmlformats.org/officeDocument/2006/relationships" id="2147483650" r:id="Rc7da571e9a8f45e1"/>
-    <p:sldLayoutId xmlns:r="http://schemas.openxmlformats.org/officeDocument/2006/relationships" id="2147483651" r:id="R3c870f87f4af4ee0"/>
-    <p:sldLayoutId xmlns:r="http://schemas.openxmlformats.org/officeDocument/2006/relationships" id="2147483652" r:id="Raaa64aea0ac1474c"/>
-    <p:sldLayoutId xmlns:r="http://schemas.openxmlformats.org/officeDocument/2006/relationships" id="2147483653" r:id="Reffff0882e434602"/>
-    <p:sldLayoutId xmlns:r="http://schemas.openxmlformats.org/officeDocument/2006/relationships" id="2147483654" r:id="R4f2d406ee2094f4a"/>
+    <p:sldLayoutId xmlns:r="http://schemas.openxmlformats.org/officeDocument/2006/relationships" id="2147483649" r:id="Ra86812ddddac4343"/>
+    <p:sldLayoutId xmlns:r="http://schemas.openxmlformats.org/officeDocument/2006/relationships" id="2147483650" r:id="R45fe544984204e36"/>
+    <p:sldLayoutId xmlns:r="http://schemas.openxmlformats.org/officeDocument/2006/relationships" id="2147483651" r:id="Rcff55ebd45e14879"/>
+    <p:sldLayoutId xmlns:r="http://schemas.openxmlformats.org/officeDocument/2006/relationships" id="2147483652" r:id="R89f22632ce334507"/>
+    <p:sldLayoutId xmlns:r="http://schemas.openxmlformats.org/officeDocument/2006/relationships" id="2147483653" r:id="R583c59f8679d4173"/>
+    <p:sldLayoutId xmlns:r="http://schemas.openxmlformats.org/officeDocument/2006/relationships" id="2147483654" r:id="R9b7025596a7a4fd8"/>
   </p:sldLayoutIdLst>
   <p:txStyles>
     <p:titleStyle>
@@ -3795,7 +3795,7 @@
           <p:cNvPr id="12" name="">
             <a:extLst xmlns:a="http://schemas.openxmlformats.org/drawingml/2006/main">
               <a:ext uri="{FF2B5EF4-FFF2-40B4-BE49-F238E27FC236}">
-                <a16:creationId xmlns:a16="http://schemas.microsoft.com/office/drawing/2014/main" id="{52FC47BC-909A-4676-B5DA-8C08CA5ED106}"/>
+                <a16:creationId xmlns:a16="http://schemas.microsoft.com/office/drawing/2014/main" id="{05648C0B-73C9-41D7-8E50-9557313C1FA6}"/>
               </a:ext>
             </a:extLst>
           </p:cNvPr>
@@ -3825,7 +3825,7 @@
           <p:cNvPr id="2" name="">
             <a:extLst xmlns:a="http://schemas.openxmlformats.org/drawingml/2006/main">
               <a:ext uri="{FF2B5EF4-FFF2-40B4-BE49-F238E27FC236}">
-                <a16:creationId xmlns:a16="http://schemas.microsoft.com/office/drawing/2014/main" id="{9FFCB69E-8759-404E-8F7D-B5E07788423E}"/>
+                <a16:creationId xmlns:a16="http://schemas.microsoft.com/office/drawing/2014/main" id="{7D8F41BB-F309-43DF-BA41-FEF7B012F2BA}"/>
               </a:ext>
             </a:extLst>
           </p:cNvPr>
@@ -3835,7 +3835,7 @@
           <p:nvPr/>
         </p:nvPicPr>
         <p:blipFill>
-          <a:blip xmlns:r="http://schemas.openxmlformats.org/officeDocument/2006/relationships" xmlns:a="http://schemas.openxmlformats.org/drawingml/2006/main" r:embed="R2896c692362149b9"/>
+          <a:blip xmlns:r="http://schemas.openxmlformats.org/officeDocument/2006/relationships" xmlns:a="http://schemas.openxmlformats.org/drawingml/2006/main" r:embed="R793aad6c0231431e"/>
           <a:stretch xmlns:a="http://schemas.openxmlformats.org/drawingml/2006/main"/>
         </p:blipFill>
         <p:spPr>
@@ -3853,7 +3853,7 @@
           <p:cNvPr id="3" name="">
             <a:extLst xmlns:a="http://schemas.openxmlformats.org/drawingml/2006/main">
               <a:ext uri="{FF2B5EF4-FFF2-40B4-BE49-F238E27FC236}">
-                <a16:creationId xmlns:a16="http://schemas.microsoft.com/office/drawing/2014/main" id="{ECBEBB88-520D-4540-9CEB-6B52F1FF5F20}"/>
+                <a16:creationId xmlns:a16="http://schemas.microsoft.com/office/drawing/2014/main" id="{E74AEEA2-C8D0-4A6D-8ECA-DD8C6ACCF611}"/>
               </a:ext>
             </a:extLst>
           </p:cNvPr>
@@ -3863,7 +3863,7 @@
           <p:nvPr/>
         </p:nvPicPr>
         <p:blipFill>
-          <a:blip xmlns:r="http://schemas.openxmlformats.org/officeDocument/2006/relationships" xmlns:a="http://schemas.openxmlformats.org/drawingml/2006/main" r:embed="R26958d57f78d4f77"/>
+          <a:blip xmlns:r="http://schemas.openxmlformats.org/officeDocument/2006/relationships" xmlns:a="http://schemas.openxmlformats.org/drawingml/2006/main" r:embed="Rf6629f945fff4372"/>
           <a:stretch xmlns:a="http://schemas.openxmlformats.org/drawingml/2006/main"/>
         </p:blipFill>
         <p:spPr>
@@ -3881,7 +3881,7 @@
           <p:cNvPr id="4" name="">
             <a:extLst xmlns:a="http://schemas.openxmlformats.org/drawingml/2006/main">
               <a:ext uri="{FF2B5EF4-FFF2-40B4-BE49-F238E27FC236}">
-                <a16:creationId xmlns:a16="http://schemas.microsoft.com/office/drawing/2014/main" id="{0DE53793-EECC-42B0-8BC8-371032928C4F}"/>
+                <a16:creationId xmlns:a16="http://schemas.microsoft.com/office/drawing/2014/main" id="{41714A62-4565-4D7D-87D1-EE7C95647458}"/>
               </a:ext>
             </a:extLst>
           </p:cNvPr>
@@ -3949,7 +3949,7 @@
           <p:cNvPr id="5" name="">
             <a:extLst xmlns:a="http://schemas.openxmlformats.org/drawingml/2006/main">
               <a:ext uri="{FF2B5EF4-FFF2-40B4-BE49-F238E27FC236}">
-                <a16:creationId xmlns:a16="http://schemas.microsoft.com/office/drawing/2014/main" id="{A656F724-0DFB-46ED-8484-C27E0813AB3E}"/>
+                <a16:creationId xmlns:a16="http://schemas.microsoft.com/office/drawing/2014/main" id="{D6E7EEA2-078F-44A7-B345-7E494E497CF5}"/>
               </a:ext>
             </a:extLst>
           </p:cNvPr>
@@ -4063,7 +4063,7 @@
           <p:cNvPr id="6" name="">
             <a:extLst xmlns:a="http://schemas.openxmlformats.org/drawingml/2006/main">
               <a:ext uri="{FF2B5EF4-FFF2-40B4-BE49-F238E27FC236}">
-                <a16:creationId xmlns:a16="http://schemas.microsoft.com/office/drawing/2014/main" id="{DC1705A2-81B4-4C73-A99F-8B746C38E81D}"/>
+                <a16:creationId xmlns:a16="http://schemas.microsoft.com/office/drawing/2014/main" id="{CB5D89F8-0F42-4160-ACF7-48E1E14A5814}"/>
               </a:ext>
             </a:extLst>
           </p:cNvPr>
@@ -4131,7 +4131,7 @@
           <p:cNvPr id="7" name="">
             <a:extLst xmlns:a="http://schemas.openxmlformats.org/drawingml/2006/main">
               <a:ext uri="{FF2B5EF4-FFF2-40B4-BE49-F238E27FC236}">
-                <a16:creationId xmlns:a16="http://schemas.microsoft.com/office/drawing/2014/main" id="{F51C4B22-FC8A-4DB1-B6A8-A3A9E3C4CB36}"/>
+                <a16:creationId xmlns:a16="http://schemas.microsoft.com/office/drawing/2014/main" id="{F119921F-8C67-40A8-93E4-A04ED39B6A00}"/>
               </a:ext>
             </a:extLst>
           </p:cNvPr>
@@ -4161,7 +4161,7 @@
           <p:cNvPr id="8" name="">
             <a:extLst xmlns:a="http://schemas.openxmlformats.org/drawingml/2006/main">
               <a:ext uri="{FF2B5EF4-FFF2-40B4-BE49-F238E27FC236}">
-                <a16:creationId xmlns:a16="http://schemas.microsoft.com/office/drawing/2014/main" id="{3846B4D2-64EE-43AF-9A2C-20F7EC9F6B6C}"/>
+                <a16:creationId xmlns:a16="http://schemas.microsoft.com/office/drawing/2014/main" id="{415DCA50-1D17-4164-A5D4-AEAF3182BF88}"/>
               </a:ext>
             </a:extLst>
           </p:cNvPr>
@@ -4229,7 +4229,7 @@
           <p:cNvPr id="9" name="">
             <a:extLst xmlns:a="http://schemas.openxmlformats.org/drawingml/2006/main">
               <a:ext uri="{FF2B5EF4-FFF2-40B4-BE49-F238E27FC236}">
-                <a16:creationId xmlns:a16="http://schemas.microsoft.com/office/drawing/2014/main" id="{9FE8D573-79AD-4FAA-8BA9-3F68B2FBBCA3}"/>
+                <a16:creationId xmlns:a16="http://schemas.microsoft.com/office/drawing/2014/main" id="{81581D27-EAA7-4846-9BBD-15D43954981A}"/>
               </a:ext>
             </a:extLst>
           </p:cNvPr>
@@ -4297,7 +4297,7 @@
           <p:cNvPr id="10" name="">
             <a:extLst xmlns:a="http://schemas.openxmlformats.org/drawingml/2006/main">
               <a:ext uri="{FF2B5EF4-FFF2-40B4-BE49-F238E27FC236}">
-                <a16:creationId xmlns:a16="http://schemas.microsoft.com/office/drawing/2014/main" id="{DCCB7398-DC6B-4C10-90EC-75B68A1CFF7D}"/>
+                <a16:creationId xmlns:a16="http://schemas.microsoft.com/office/drawing/2014/main" id="{77DD0E79-2AF2-4795-83B6-9490720B69AE}"/>
               </a:ext>
             </a:extLst>
           </p:cNvPr>
@@ -4365,7 +4365,7 @@
           <p:cNvPr id="11" name="">
             <a:extLst xmlns:a="http://schemas.openxmlformats.org/drawingml/2006/main">
               <a:ext uri="{FF2B5EF4-FFF2-40B4-BE49-F238E27FC236}">
-                <a16:creationId xmlns:a16="http://schemas.microsoft.com/office/drawing/2014/main" id="{E4899F88-F611-4927-8576-DA52F50E6009}"/>
+                <a16:creationId xmlns:a16="http://schemas.microsoft.com/office/drawing/2014/main" id="{85E7A65D-8EE3-461B-B311-A16BDCDEA202}"/>
               </a:ext>
             </a:extLst>
           </p:cNvPr>
@@ -4431,7 +4431,7 @@
     </p:spTree>
     <p:extLst>
       <p:ext uri="{BB962C8B-B14F-4D97-AF65-F5344CB8AC3E}">
-        <p14:creationId xmlns:p14="http://schemas.microsoft.com/office/powerpoint/2010/main" val="84154455"/>
+        <p14:creationId xmlns:p14="http://schemas.microsoft.com/office/powerpoint/2010/main" val="1053574814"/>
       </p:ext>
     </p:extLst>
   </p:cSld>
@@ -4462,19 +4462,19 @@
           <p:cNvPr id="6" name="">
             <a:extLst xmlns:a="http://schemas.openxmlformats.org/drawingml/2006/main">
               <a:ext uri="{FF2B5EF4-FFF2-40B4-BE49-F238E27FC236}">
-                <a16:creationId xmlns:a16="http://schemas.microsoft.com/office/drawing/2014/main" id="{4B3D57BD-51F6-4C5D-A45A-C790EEC67A2C}"/>
-              </a:ext>
-            </a:extLst>
-          </p:cNvPr>
-          <p:cNvSpPr>
-            <a:spLocks xmlns:a="http://schemas.openxmlformats.org/drawingml/2006/main" noGrp="1"/>
-          </p:cNvSpPr>
-          <p:nvPr/>
-        </p:nvSpPr>
-        <p:spPr>
-          <a:xfrm xmlns:a="http://schemas.openxmlformats.org/drawingml/2006/main">
-            <a:off x="914400" y="133350"/>
-            <a:ext cx="10363200" cy="152400"/>
+                <a16:creationId xmlns:a16="http://schemas.microsoft.com/office/drawing/2014/main" id="{4E1FF944-C150-4032-8750-5E3E7B817BB9}"/>
+              </a:ext>
+            </a:extLst>
+          </p:cNvPr>
+          <p:cNvSpPr>
+            <a:spLocks xmlns:a="http://schemas.openxmlformats.org/drawingml/2006/main" noGrp="1"/>
+          </p:cNvSpPr>
+          <p:nvPr/>
+        </p:nvSpPr>
+        <p:spPr>
+          <a:xfrm xmlns:a="http://schemas.openxmlformats.org/drawingml/2006/main">
+            <a:off x="1828800" y="457200"/>
+            <a:ext cx="8534400" cy="171450"/>
           </a:xfrm>
           <a:prstGeom xmlns:a="http://schemas.openxmlformats.org/drawingml/2006/main" prst="rect">
             <a:avLst/>
@@ -4490,7 +4490,7 @@
           </a:bodyPr>
           <a:lstStyle xmlns:a="http://schemas.openxmlformats.org/drawingml/2006/main">
             <a:defPPr algn="l">
-              <a:defRPr sz="825" b="1">
+              <a:defRPr sz="900" b="1">
                 <a:solidFill>
                   <a:srgbClr val="9B7744"/>
                 </a:solidFill>
@@ -4502,7 +4502,7 @@
           </a:lstStyle>
           <a:p xmlns:a="http://schemas.openxmlformats.org/drawingml/2006/main">
             <a:pPr algn="l">
-              <a:defRPr sz="825" b="1">
+              <a:defRPr sz="900" b="1">
                 <a:solidFill>
                   <a:srgbClr val="9B7744"/>
                 </a:solidFill>
@@ -4512,7 +4512,7 @@
               </a:defRPr>
             </a:pPr>
             <a:r>
-              <a:rPr sz="825" b="1">
+              <a:rPr sz="900" b="1">
                 <a:solidFill>
                   <a:srgbClr val="9B7744"/>
                 </a:solidFill>
@@ -4530,19 +4530,19 @@
           <p:cNvPr id="2" name="">
             <a:extLst xmlns:a="http://schemas.openxmlformats.org/drawingml/2006/main">
               <a:ext uri="{FF2B5EF4-FFF2-40B4-BE49-F238E27FC236}">
-                <a16:creationId xmlns:a16="http://schemas.microsoft.com/office/drawing/2014/main" id="{F82464B3-5E6E-4D7D-82C1-4E265536E151}"/>
-              </a:ext>
-            </a:extLst>
-          </p:cNvPr>
-          <p:cNvSpPr>
-            <a:spLocks xmlns:a="http://schemas.openxmlformats.org/drawingml/2006/main" noGrp="1"/>
-          </p:cNvSpPr>
-          <p:nvPr/>
-        </p:nvSpPr>
-        <p:spPr>
-          <a:xfrm xmlns:a="http://schemas.openxmlformats.org/drawingml/2006/main">
-            <a:off x="914400" y="304800"/>
-            <a:ext cx="10363200" cy="381000"/>
+                <a16:creationId xmlns:a16="http://schemas.microsoft.com/office/drawing/2014/main" id="{F9830F39-BB8F-4AD4-8CF1-E2911FD39A04}"/>
+              </a:ext>
+            </a:extLst>
+          </p:cNvPr>
+          <p:cNvSpPr>
+            <a:spLocks xmlns:a="http://schemas.openxmlformats.org/drawingml/2006/main" noGrp="1"/>
+          </p:cNvSpPr>
+          <p:nvPr/>
+        </p:nvSpPr>
+        <p:spPr>
+          <a:xfrm xmlns:a="http://schemas.openxmlformats.org/drawingml/2006/main">
+            <a:off x="1828800" y="723900"/>
+            <a:ext cx="8534400" cy="419100"/>
           </a:xfrm>
           <a:prstGeom xmlns:a="http://schemas.openxmlformats.org/drawingml/2006/main" prst="rect">
             <a:avLst/>
@@ -4558,7 +4558,7 @@
           </a:bodyPr>
           <a:lstStyle xmlns:a="http://schemas.openxmlformats.org/drawingml/2006/main">
             <a:defPPr algn="l">
-              <a:defRPr sz="2250" b="1">
+              <a:defRPr sz="2550" b="1">
                 <a:solidFill>
                   <a:srgbClr val="1B1D19"/>
                 </a:solidFill>
@@ -4570,7 +4570,7 @@
           </a:lstStyle>
           <a:p xmlns:a="http://schemas.openxmlformats.org/drawingml/2006/main">
             <a:pPr algn="l">
-              <a:defRPr sz="2250" b="1">
+              <a:defRPr sz="2550" b="1">
                 <a:solidFill>
                   <a:srgbClr val="1B1D19"/>
                 </a:solidFill>
@@ -4580,7 +4580,7 @@
               </a:defRPr>
             </a:pPr>
             <a:r>
-              <a:rPr sz="2250" b="1">
+              <a:rPr sz="2550" b="1">
                 <a:solidFill>
                   <a:srgbClr val="1B1D19"/>
                 </a:solidFill>
@@ -4598,19 +4598,19 @@
           <p:cNvPr id="3" name="">
             <a:extLst xmlns:a="http://schemas.openxmlformats.org/drawingml/2006/main">
               <a:ext uri="{FF2B5EF4-FFF2-40B4-BE49-F238E27FC236}">
-                <a16:creationId xmlns:a16="http://schemas.microsoft.com/office/drawing/2014/main" id="{D4F6AB68-7854-4E4F-97B8-F030DA168BDB}"/>
-              </a:ext>
-            </a:extLst>
-          </p:cNvPr>
-          <p:cNvSpPr>
-            <a:spLocks xmlns:a="http://schemas.openxmlformats.org/drawingml/2006/main" noGrp="1"/>
-          </p:cNvSpPr>
-          <p:nvPr/>
-        </p:nvSpPr>
-        <p:spPr>
-          <a:xfrm xmlns:a="http://schemas.openxmlformats.org/drawingml/2006/main">
-            <a:off x="914400" y="723900"/>
-            <a:ext cx="10363200" cy="5829300"/>
+                <a16:creationId xmlns:a16="http://schemas.microsoft.com/office/drawing/2014/main" id="{DA0D1F8E-9251-4DD2-A93F-41685FCE51DA}"/>
+              </a:ext>
+            </a:extLst>
+          </p:cNvPr>
+          <p:cNvSpPr>
+            <a:spLocks xmlns:a="http://schemas.openxmlformats.org/drawingml/2006/main" noGrp="1"/>
+          </p:cNvSpPr>
+          <p:nvPr/>
+        </p:nvSpPr>
+        <p:spPr>
+          <a:xfrm xmlns:a="http://schemas.openxmlformats.org/drawingml/2006/main">
+            <a:off x="1828800" y="1333500"/>
+            <a:ext cx="8534400" cy="4800600"/>
           </a:xfrm>
           <a:prstGeom xmlns:a="http://schemas.openxmlformats.org/drawingml/2006/main" prst="rect">
             <a:avLst/>
@@ -4628,19 +4628,19 @@
           <p:cNvPr id="4" name="">
             <a:extLst xmlns:a="http://schemas.openxmlformats.org/drawingml/2006/main">
               <a:ext uri="{FF2B5EF4-FFF2-40B4-BE49-F238E27FC236}">
-                <a16:creationId xmlns:a16="http://schemas.microsoft.com/office/drawing/2014/main" id="{E629B1D3-DE24-4EC4-9B99-9EED144C6D93}"/>
-              </a:ext>
-            </a:extLst>
-          </p:cNvPr>
-          <p:cNvSpPr>
-            <a:spLocks xmlns:a="http://schemas.openxmlformats.org/drawingml/2006/main" noGrp="1"/>
-          </p:cNvSpPr>
-          <p:nvPr/>
-        </p:nvSpPr>
-        <p:spPr>
-          <a:xfrm xmlns:a="http://schemas.openxmlformats.org/drawingml/2006/main">
-            <a:off x="914400" y="6667500"/>
-            <a:ext cx="9525000" cy="152400"/>
+                <a16:creationId xmlns:a16="http://schemas.microsoft.com/office/drawing/2014/main" id="{4E35F0B8-7E56-4545-A9F0-1597A635C8F4}"/>
+              </a:ext>
+            </a:extLst>
+          </p:cNvPr>
+          <p:cNvSpPr>
+            <a:spLocks xmlns:a="http://schemas.openxmlformats.org/drawingml/2006/main" noGrp="1"/>
+          </p:cNvSpPr>
+          <p:nvPr/>
+        </p:nvSpPr>
+        <p:spPr>
+          <a:xfrm xmlns:a="http://schemas.openxmlformats.org/drawingml/2006/main">
+            <a:off x="1828800" y="6429375"/>
+            <a:ext cx="7620000" cy="190500"/>
           </a:xfrm>
           <a:prstGeom xmlns:a="http://schemas.openxmlformats.org/drawingml/2006/main" prst="rect">
             <a:avLst/>
@@ -4656,7 +4656,7 @@
           </a:bodyPr>
           <a:lstStyle xmlns:a="http://schemas.openxmlformats.org/drawingml/2006/main">
             <a:defPPr algn="l">
-              <a:defRPr sz="825" b="0">
+              <a:defRPr sz="900" b="0">
                 <a:solidFill>
                   <a:srgbClr val="858B7E"/>
                 </a:solidFill>
@@ -4668,7 +4668,7 @@
           </a:lstStyle>
           <a:p xmlns:a="http://schemas.openxmlformats.org/drawingml/2006/main">
             <a:pPr algn="l">
-              <a:defRPr sz="825" b="0">
+              <a:defRPr sz="900" b="0">
                 <a:solidFill>
                   <a:srgbClr val="858B7E"/>
                 </a:solidFill>
@@ -4678,7 +4678,7 @@
               </a:defRPr>
             </a:pPr>
             <a:r>
-              <a:rPr sz="825" b="0">
+              <a:rPr sz="900" b="0">
                 <a:solidFill>
                   <a:srgbClr val="858B7E"/>
                 </a:solidFill>
@@ -4696,19 +4696,19 @@
           <p:cNvPr id="5" name="">
             <a:extLst xmlns:a="http://schemas.openxmlformats.org/drawingml/2006/main">
               <a:ext uri="{FF2B5EF4-FFF2-40B4-BE49-F238E27FC236}">
-                <a16:creationId xmlns:a16="http://schemas.microsoft.com/office/drawing/2014/main" id="{09CC2E0A-5DD9-47E6-9500-E3DA3DE4227C}"/>
-              </a:ext>
-            </a:extLst>
-          </p:cNvPr>
-          <p:cNvSpPr>
-            <a:spLocks xmlns:a="http://schemas.openxmlformats.org/drawingml/2006/main" noGrp="1"/>
-          </p:cNvSpPr>
-          <p:nvPr/>
-        </p:nvSpPr>
-        <p:spPr>
-          <a:xfrm xmlns:a="http://schemas.openxmlformats.org/drawingml/2006/main">
-            <a:off x="11049000" y="6667500"/>
-            <a:ext cx="228600" cy="152400"/>
+                <a16:creationId xmlns:a16="http://schemas.microsoft.com/office/drawing/2014/main" id="{3FC86206-42D1-46C3-894D-E261C5F7BF09}"/>
+              </a:ext>
+            </a:extLst>
+          </p:cNvPr>
+          <p:cNvSpPr>
+            <a:spLocks xmlns:a="http://schemas.openxmlformats.org/drawingml/2006/main" noGrp="1"/>
+          </p:cNvSpPr>
+          <p:nvPr/>
+        </p:nvSpPr>
+        <p:spPr>
+          <a:xfrm xmlns:a="http://schemas.openxmlformats.org/drawingml/2006/main">
+            <a:off x="10134600" y="6429375"/>
+            <a:ext cx="228600" cy="190500"/>
           </a:xfrm>
           <a:prstGeom xmlns:a="http://schemas.openxmlformats.org/drawingml/2006/main" prst="rect">
             <a:avLst/>
@@ -4724,7 +4724,7 @@
           </a:bodyPr>
           <a:lstStyle xmlns:a="http://schemas.openxmlformats.org/drawingml/2006/main">
             <a:defPPr algn="l">
-              <a:defRPr sz="825" b="0">
+              <a:defRPr sz="900" b="0">
                 <a:solidFill>
                   <a:srgbClr val="858B7E"/>
                 </a:solidFill>
@@ -4736,7 +4736,7 @@
           </a:lstStyle>
           <a:p xmlns:a="http://schemas.openxmlformats.org/drawingml/2006/main">
             <a:pPr algn="l">
-              <a:defRPr sz="825" b="0">
+              <a:defRPr sz="900" b="0">
                 <a:solidFill>
                   <a:srgbClr val="858B7E"/>
                 </a:solidFill>
@@ -4746,7 +4746,7 @@
               </a:defRPr>
             </a:pPr>
             <a:r>
-              <a:rPr sz="825" b="0">
+              <a:rPr sz="900" b="0">
                 <a:solidFill>
                   <a:srgbClr val="858B7E"/>
                 </a:solidFill>
@@ -4762,7 +4762,7 @@
     </p:spTree>
     <p:extLst>
       <p:ext uri="{BB962C8B-B14F-4D97-AF65-F5344CB8AC3E}">
-        <p14:creationId xmlns:p14="http://schemas.microsoft.com/office/powerpoint/2010/main" val="913285162"/>
+        <p14:creationId xmlns:p14="http://schemas.microsoft.com/office/powerpoint/2010/main" val="636751631"/>
       </p:ext>
     </p:extLst>
   </p:cSld>
@@ -4793,19 +4793,19 @@
           <p:cNvPr id="6" name="">
             <a:extLst xmlns:a="http://schemas.openxmlformats.org/drawingml/2006/main">
               <a:ext uri="{FF2B5EF4-FFF2-40B4-BE49-F238E27FC236}">
-                <a16:creationId xmlns:a16="http://schemas.microsoft.com/office/drawing/2014/main" id="{B948F76B-13AF-4998-A6EB-DE7EF5FC1BF5}"/>
-              </a:ext>
-            </a:extLst>
-          </p:cNvPr>
-          <p:cNvSpPr>
-            <a:spLocks xmlns:a="http://schemas.openxmlformats.org/drawingml/2006/main" noGrp="1"/>
-          </p:cNvSpPr>
-          <p:nvPr/>
-        </p:nvSpPr>
-        <p:spPr>
-          <a:xfrm xmlns:a="http://schemas.openxmlformats.org/drawingml/2006/main">
-            <a:off x="914400" y="133350"/>
-            <a:ext cx="10363200" cy="152400"/>
+                <a16:creationId xmlns:a16="http://schemas.microsoft.com/office/drawing/2014/main" id="{6EBB6511-BCB9-4EDB-902C-D14E5D0A9D3E}"/>
+              </a:ext>
+            </a:extLst>
+          </p:cNvPr>
+          <p:cNvSpPr>
+            <a:spLocks xmlns:a="http://schemas.openxmlformats.org/drawingml/2006/main" noGrp="1"/>
+          </p:cNvSpPr>
+          <p:nvPr/>
+        </p:nvSpPr>
+        <p:spPr>
+          <a:xfrm xmlns:a="http://schemas.openxmlformats.org/drawingml/2006/main">
+            <a:off x="1828800" y="457200"/>
+            <a:ext cx="8534400" cy="171450"/>
           </a:xfrm>
           <a:prstGeom xmlns:a="http://schemas.openxmlformats.org/drawingml/2006/main" prst="rect">
             <a:avLst/>
@@ -4821,7 +4821,7 @@
           </a:bodyPr>
           <a:lstStyle xmlns:a="http://schemas.openxmlformats.org/drawingml/2006/main">
             <a:defPPr algn="l">
-              <a:defRPr sz="825" b="1">
+              <a:defRPr sz="900" b="1">
                 <a:solidFill>
                   <a:srgbClr val="9B7744"/>
                 </a:solidFill>
@@ -4833,7 +4833,7 @@
           </a:lstStyle>
           <a:p xmlns:a="http://schemas.openxmlformats.org/drawingml/2006/main">
             <a:pPr algn="l">
-              <a:defRPr sz="825" b="1">
+              <a:defRPr sz="900" b="1">
                 <a:solidFill>
                   <a:srgbClr val="9B7744"/>
                 </a:solidFill>
@@ -4843,7 +4843,7 @@
               </a:defRPr>
             </a:pPr>
             <a:r>
-              <a:rPr sz="825" b="1">
+              <a:rPr sz="900" b="1">
                 <a:solidFill>
                   <a:srgbClr val="9B7744"/>
                 </a:solidFill>
@@ -4861,19 +4861,19 @@
           <p:cNvPr id="2" name="">
             <a:extLst xmlns:a="http://schemas.openxmlformats.org/drawingml/2006/main">
               <a:ext uri="{FF2B5EF4-FFF2-40B4-BE49-F238E27FC236}">
-                <a16:creationId xmlns:a16="http://schemas.microsoft.com/office/drawing/2014/main" id="{617B11E6-112E-4B64-8EA0-59E36EAF4231}"/>
-              </a:ext>
-            </a:extLst>
-          </p:cNvPr>
-          <p:cNvSpPr>
-            <a:spLocks xmlns:a="http://schemas.openxmlformats.org/drawingml/2006/main" noGrp="1"/>
-          </p:cNvSpPr>
-          <p:nvPr/>
-        </p:nvSpPr>
-        <p:spPr>
-          <a:xfrm xmlns:a="http://schemas.openxmlformats.org/drawingml/2006/main">
-            <a:off x="914400" y="304800"/>
-            <a:ext cx="10363200" cy="381000"/>
+                <a16:creationId xmlns:a16="http://schemas.microsoft.com/office/drawing/2014/main" id="{25EB2940-CDF5-4C77-BB07-D8CF9F00A207}"/>
+              </a:ext>
+            </a:extLst>
+          </p:cNvPr>
+          <p:cNvSpPr>
+            <a:spLocks xmlns:a="http://schemas.openxmlformats.org/drawingml/2006/main" noGrp="1"/>
+          </p:cNvSpPr>
+          <p:nvPr/>
+        </p:nvSpPr>
+        <p:spPr>
+          <a:xfrm xmlns:a="http://schemas.openxmlformats.org/drawingml/2006/main">
+            <a:off x="1828800" y="723900"/>
+            <a:ext cx="8534400" cy="419100"/>
           </a:xfrm>
           <a:prstGeom xmlns:a="http://schemas.openxmlformats.org/drawingml/2006/main" prst="rect">
             <a:avLst/>
@@ -4889,7 +4889,7 @@
           </a:bodyPr>
           <a:lstStyle xmlns:a="http://schemas.openxmlformats.org/drawingml/2006/main">
             <a:defPPr algn="l">
-              <a:defRPr sz="2250" b="1">
+              <a:defRPr sz="2550" b="1">
                 <a:solidFill>
                   <a:srgbClr val="1B1D19"/>
                 </a:solidFill>
@@ -4901,7 +4901,7 @@
           </a:lstStyle>
           <a:p xmlns:a="http://schemas.openxmlformats.org/drawingml/2006/main">
             <a:pPr algn="l">
-              <a:defRPr sz="2250" b="1">
+              <a:defRPr sz="2550" b="1">
                 <a:solidFill>
                   <a:srgbClr val="1B1D19"/>
                 </a:solidFill>
@@ -4911,7 +4911,7 @@
               </a:defRPr>
             </a:pPr>
             <a:r>
-              <a:rPr sz="2250" b="1">
+              <a:rPr sz="2550" b="1">
                 <a:solidFill>
                   <a:srgbClr val="1B1D19"/>
                 </a:solidFill>
@@ -4929,19 +4929,19 @@
           <p:cNvPr id="3" name="">
             <a:extLst xmlns:a="http://schemas.openxmlformats.org/drawingml/2006/main">
               <a:ext uri="{FF2B5EF4-FFF2-40B4-BE49-F238E27FC236}">
-                <a16:creationId xmlns:a16="http://schemas.microsoft.com/office/drawing/2014/main" id="{C011A6B2-BEF1-47E5-8362-4588107CA265}"/>
-              </a:ext>
-            </a:extLst>
-          </p:cNvPr>
-          <p:cNvSpPr>
-            <a:spLocks xmlns:a="http://schemas.openxmlformats.org/drawingml/2006/main" noGrp="1"/>
-          </p:cNvSpPr>
-          <p:nvPr/>
-        </p:nvSpPr>
-        <p:spPr>
-          <a:xfrm xmlns:a="http://schemas.openxmlformats.org/drawingml/2006/main">
-            <a:off x="914400" y="723900"/>
-            <a:ext cx="10363200" cy="5829300"/>
+                <a16:creationId xmlns:a16="http://schemas.microsoft.com/office/drawing/2014/main" id="{CD5FD943-5ECD-4EB3-8138-DD53114645D2}"/>
+              </a:ext>
+            </a:extLst>
+          </p:cNvPr>
+          <p:cNvSpPr>
+            <a:spLocks xmlns:a="http://schemas.openxmlformats.org/drawingml/2006/main" noGrp="1"/>
+          </p:cNvSpPr>
+          <p:nvPr/>
+        </p:nvSpPr>
+        <p:spPr>
+          <a:xfrm xmlns:a="http://schemas.openxmlformats.org/drawingml/2006/main">
+            <a:off x="1828800" y="1333500"/>
+            <a:ext cx="8534400" cy="4800600"/>
           </a:xfrm>
           <a:prstGeom xmlns:a="http://schemas.openxmlformats.org/drawingml/2006/main" prst="rect">
             <a:avLst/>
@@ -4959,19 +4959,19 @@
           <p:cNvPr id="4" name="">
             <a:extLst xmlns:a="http://schemas.openxmlformats.org/drawingml/2006/main">
               <a:ext uri="{FF2B5EF4-FFF2-40B4-BE49-F238E27FC236}">
-                <a16:creationId xmlns:a16="http://schemas.microsoft.com/office/drawing/2014/main" id="{CD4B71A4-92B3-47EF-810F-4E7A62655147}"/>
-              </a:ext>
-            </a:extLst>
-          </p:cNvPr>
-          <p:cNvSpPr>
-            <a:spLocks xmlns:a="http://schemas.openxmlformats.org/drawingml/2006/main" noGrp="1"/>
-          </p:cNvSpPr>
-          <p:nvPr/>
-        </p:nvSpPr>
-        <p:spPr>
-          <a:xfrm xmlns:a="http://schemas.openxmlformats.org/drawingml/2006/main">
-            <a:off x="914400" y="6667500"/>
-            <a:ext cx="9525000" cy="152400"/>
+                <a16:creationId xmlns:a16="http://schemas.microsoft.com/office/drawing/2014/main" id="{1AFA3163-787F-4F12-B0EC-CAB2F610479B}"/>
+              </a:ext>
+            </a:extLst>
+          </p:cNvPr>
+          <p:cNvSpPr>
+            <a:spLocks xmlns:a="http://schemas.openxmlformats.org/drawingml/2006/main" noGrp="1"/>
+          </p:cNvSpPr>
+          <p:nvPr/>
+        </p:nvSpPr>
+        <p:spPr>
+          <a:xfrm xmlns:a="http://schemas.openxmlformats.org/drawingml/2006/main">
+            <a:off x="1828800" y="6429375"/>
+            <a:ext cx="7620000" cy="190500"/>
           </a:xfrm>
           <a:prstGeom xmlns:a="http://schemas.openxmlformats.org/drawingml/2006/main" prst="rect">
             <a:avLst/>
@@ -4987,7 +4987,7 @@
           </a:bodyPr>
           <a:lstStyle xmlns:a="http://schemas.openxmlformats.org/drawingml/2006/main">
             <a:defPPr algn="l">
-              <a:defRPr sz="825" b="0">
+              <a:defRPr sz="900" b="0">
                 <a:solidFill>
                   <a:srgbClr val="858B7E"/>
                 </a:solidFill>
@@ -4999,7 +4999,7 @@
           </a:lstStyle>
           <a:p xmlns:a="http://schemas.openxmlformats.org/drawingml/2006/main">
             <a:pPr algn="l">
-              <a:defRPr sz="825" b="0">
+              <a:defRPr sz="900" b="0">
                 <a:solidFill>
                   <a:srgbClr val="858B7E"/>
                 </a:solidFill>
@@ -5009,7 +5009,7 @@
               </a:defRPr>
             </a:pPr>
             <a:r>
-              <a:rPr sz="825" b="0">
+              <a:rPr sz="900" b="0">
                 <a:solidFill>
                   <a:srgbClr val="858B7E"/>
                 </a:solidFill>
@@ -5027,19 +5027,19 @@
           <p:cNvPr id="5" name="">
             <a:extLst xmlns:a="http://schemas.openxmlformats.org/drawingml/2006/main">
               <a:ext uri="{FF2B5EF4-FFF2-40B4-BE49-F238E27FC236}">
-                <a16:creationId xmlns:a16="http://schemas.microsoft.com/office/drawing/2014/main" id="{3C235B60-DDBB-4B18-B185-B4F5DAEAB8B0}"/>
-              </a:ext>
-            </a:extLst>
-          </p:cNvPr>
-          <p:cNvSpPr>
-            <a:spLocks xmlns:a="http://schemas.openxmlformats.org/drawingml/2006/main" noGrp="1"/>
-          </p:cNvSpPr>
-          <p:nvPr/>
-        </p:nvSpPr>
-        <p:spPr>
-          <a:xfrm xmlns:a="http://schemas.openxmlformats.org/drawingml/2006/main">
-            <a:off x="11049000" y="6667500"/>
-            <a:ext cx="228600" cy="152400"/>
+                <a16:creationId xmlns:a16="http://schemas.microsoft.com/office/drawing/2014/main" id="{59091480-189B-412B-BF8C-967625C344E7}"/>
+              </a:ext>
+            </a:extLst>
+          </p:cNvPr>
+          <p:cNvSpPr>
+            <a:spLocks xmlns:a="http://schemas.openxmlformats.org/drawingml/2006/main" noGrp="1"/>
+          </p:cNvSpPr>
+          <p:nvPr/>
+        </p:nvSpPr>
+        <p:spPr>
+          <a:xfrm xmlns:a="http://schemas.openxmlformats.org/drawingml/2006/main">
+            <a:off x="10134600" y="6429375"/>
+            <a:ext cx="228600" cy="190500"/>
           </a:xfrm>
           <a:prstGeom xmlns:a="http://schemas.openxmlformats.org/drawingml/2006/main" prst="rect">
             <a:avLst/>
@@ -5055,7 +5055,7 @@
           </a:bodyPr>
           <a:lstStyle xmlns:a="http://schemas.openxmlformats.org/drawingml/2006/main">
             <a:defPPr algn="l">
-              <a:defRPr sz="825" b="0">
+              <a:defRPr sz="900" b="0">
                 <a:solidFill>
                   <a:srgbClr val="858B7E"/>
                 </a:solidFill>
@@ -5067,7 +5067,7 @@
           </a:lstStyle>
           <a:p xmlns:a="http://schemas.openxmlformats.org/drawingml/2006/main">
             <a:pPr algn="l">
-              <a:defRPr sz="825" b="0">
+              <a:defRPr sz="900" b="0">
                 <a:solidFill>
                   <a:srgbClr val="858B7E"/>
                 </a:solidFill>
@@ -5077,7 +5077,7 @@
               </a:defRPr>
             </a:pPr>
             <a:r>
-              <a:rPr sz="825" b="0">
+              <a:rPr sz="900" b="0">
                 <a:solidFill>
                   <a:srgbClr val="858B7E"/>
                 </a:solidFill>
@@ -5093,7 +5093,7 @@
     </p:spTree>
     <p:extLst>
       <p:ext uri="{BB962C8B-B14F-4D97-AF65-F5344CB8AC3E}">
-        <p14:creationId xmlns:p14="http://schemas.microsoft.com/office/powerpoint/2010/main" val="384130213"/>
+        <p14:creationId xmlns:p14="http://schemas.microsoft.com/office/powerpoint/2010/main" val="95319808"/>
       </p:ext>
     </p:extLst>
   </p:cSld>
@@ -5124,19 +5124,19 @@
           <p:cNvPr id="6" name="">
             <a:extLst xmlns:a="http://schemas.openxmlformats.org/drawingml/2006/main">
               <a:ext uri="{FF2B5EF4-FFF2-40B4-BE49-F238E27FC236}">
-                <a16:creationId xmlns:a16="http://schemas.microsoft.com/office/drawing/2014/main" id="{DDB168A0-DD97-4756-9201-9A459B89C2F2}"/>
-              </a:ext>
-            </a:extLst>
-          </p:cNvPr>
-          <p:cNvSpPr>
-            <a:spLocks xmlns:a="http://schemas.openxmlformats.org/drawingml/2006/main" noGrp="1"/>
-          </p:cNvSpPr>
-          <p:nvPr/>
-        </p:nvSpPr>
-        <p:spPr>
-          <a:xfrm xmlns:a="http://schemas.openxmlformats.org/drawingml/2006/main">
-            <a:off x="914400" y="133350"/>
-            <a:ext cx="10363200" cy="152400"/>
+                <a16:creationId xmlns:a16="http://schemas.microsoft.com/office/drawing/2014/main" id="{74B2A987-EE4F-45DB-8C6E-90EB2C79B4E5}"/>
+              </a:ext>
+            </a:extLst>
+          </p:cNvPr>
+          <p:cNvSpPr>
+            <a:spLocks xmlns:a="http://schemas.openxmlformats.org/drawingml/2006/main" noGrp="1"/>
+          </p:cNvSpPr>
+          <p:nvPr/>
+        </p:nvSpPr>
+        <p:spPr>
+          <a:xfrm xmlns:a="http://schemas.openxmlformats.org/drawingml/2006/main">
+            <a:off x="1828800" y="457200"/>
+            <a:ext cx="8534400" cy="171450"/>
           </a:xfrm>
           <a:prstGeom xmlns:a="http://schemas.openxmlformats.org/drawingml/2006/main" prst="rect">
             <a:avLst/>
@@ -5152,7 +5152,7 @@
           </a:bodyPr>
           <a:lstStyle xmlns:a="http://schemas.openxmlformats.org/drawingml/2006/main">
             <a:defPPr algn="l">
-              <a:defRPr sz="825" b="1">
+              <a:defRPr sz="900" b="1">
                 <a:solidFill>
                   <a:srgbClr val="9B7744"/>
                 </a:solidFill>
@@ -5164,7 +5164,7 @@
           </a:lstStyle>
           <a:p xmlns:a="http://schemas.openxmlformats.org/drawingml/2006/main">
             <a:pPr algn="l">
-              <a:defRPr sz="825" b="1">
+              <a:defRPr sz="900" b="1">
                 <a:solidFill>
                   <a:srgbClr val="9B7744"/>
                 </a:solidFill>
@@ -5174,7 +5174,7 @@
               </a:defRPr>
             </a:pPr>
             <a:r>
-              <a:rPr sz="825" b="1">
+              <a:rPr sz="900" b="1">
                 <a:solidFill>
                   <a:srgbClr val="9B7744"/>
                 </a:solidFill>
@@ -5192,19 +5192,19 @@
           <p:cNvPr id="2" name="">
             <a:extLst xmlns:a="http://schemas.openxmlformats.org/drawingml/2006/main">
               <a:ext uri="{FF2B5EF4-FFF2-40B4-BE49-F238E27FC236}">
-                <a16:creationId xmlns:a16="http://schemas.microsoft.com/office/drawing/2014/main" id="{C7F8D385-9418-4980-B60A-251723390303}"/>
-              </a:ext>
-            </a:extLst>
-          </p:cNvPr>
-          <p:cNvSpPr>
-            <a:spLocks xmlns:a="http://schemas.openxmlformats.org/drawingml/2006/main" noGrp="1"/>
-          </p:cNvSpPr>
-          <p:nvPr/>
-        </p:nvSpPr>
-        <p:spPr>
-          <a:xfrm xmlns:a="http://schemas.openxmlformats.org/drawingml/2006/main">
-            <a:off x="914400" y="304800"/>
-            <a:ext cx="10363200" cy="381000"/>
+                <a16:creationId xmlns:a16="http://schemas.microsoft.com/office/drawing/2014/main" id="{DB0AA016-F50C-4944-97EA-00E5CCDD7467}"/>
+              </a:ext>
+            </a:extLst>
+          </p:cNvPr>
+          <p:cNvSpPr>
+            <a:spLocks xmlns:a="http://schemas.openxmlformats.org/drawingml/2006/main" noGrp="1"/>
+          </p:cNvSpPr>
+          <p:nvPr/>
+        </p:nvSpPr>
+        <p:spPr>
+          <a:xfrm xmlns:a="http://schemas.openxmlformats.org/drawingml/2006/main">
+            <a:off x="1828800" y="723900"/>
+            <a:ext cx="8534400" cy="419100"/>
           </a:xfrm>
           <a:prstGeom xmlns:a="http://schemas.openxmlformats.org/drawingml/2006/main" prst="rect">
             <a:avLst/>
@@ -5220,7 +5220,7 @@
           </a:bodyPr>
           <a:lstStyle xmlns:a="http://schemas.openxmlformats.org/drawingml/2006/main">
             <a:defPPr algn="l">
-              <a:defRPr sz="2250" b="1">
+              <a:defRPr sz="2550" b="1">
                 <a:solidFill>
                   <a:srgbClr val="1B1D19"/>
                 </a:solidFill>
@@ -5232,7 +5232,7 @@
           </a:lstStyle>
           <a:p xmlns:a="http://schemas.openxmlformats.org/drawingml/2006/main">
             <a:pPr algn="l">
-              <a:defRPr sz="2250" b="1">
+              <a:defRPr sz="2550" b="1">
                 <a:solidFill>
                   <a:srgbClr val="1B1D19"/>
                 </a:solidFill>
@@ -5242,7 +5242,7 @@
               </a:defRPr>
             </a:pPr>
             <a:r>
-              <a:rPr sz="2250" b="1">
+              <a:rPr sz="2550" b="1">
                 <a:solidFill>
                   <a:srgbClr val="1B1D19"/>
                 </a:solidFill>
@@ -5260,19 +5260,19 @@
           <p:cNvPr id="3" name="">
             <a:extLst xmlns:a="http://schemas.openxmlformats.org/drawingml/2006/main">
               <a:ext uri="{FF2B5EF4-FFF2-40B4-BE49-F238E27FC236}">
-                <a16:creationId xmlns:a16="http://schemas.microsoft.com/office/drawing/2014/main" id="{B204A2F5-FB8D-4536-9078-E12CC311D752}"/>
-              </a:ext>
-            </a:extLst>
-          </p:cNvPr>
-          <p:cNvSpPr>
-            <a:spLocks xmlns:a="http://schemas.openxmlformats.org/drawingml/2006/main" noGrp="1"/>
-          </p:cNvSpPr>
-          <p:nvPr/>
-        </p:nvSpPr>
-        <p:spPr>
-          <a:xfrm xmlns:a="http://schemas.openxmlformats.org/drawingml/2006/main">
-            <a:off x="914400" y="723900"/>
-            <a:ext cx="10363200" cy="5829300"/>
+                <a16:creationId xmlns:a16="http://schemas.microsoft.com/office/drawing/2014/main" id="{24073A16-2AD2-46E9-B8AA-D33D14D48564}"/>
+              </a:ext>
+            </a:extLst>
+          </p:cNvPr>
+          <p:cNvSpPr>
+            <a:spLocks xmlns:a="http://schemas.openxmlformats.org/drawingml/2006/main" noGrp="1"/>
+          </p:cNvSpPr>
+          <p:nvPr/>
+        </p:nvSpPr>
+        <p:spPr>
+          <a:xfrm xmlns:a="http://schemas.openxmlformats.org/drawingml/2006/main">
+            <a:off x="1828800" y="1333500"/>
+            <a:ext cx="8534400" cy="4800600"/>
           </a:xfrm>
           <a:prstGeom xmlns:a="http://schemas.openxmlformats.org/drawingml/2006/main" prst="rect">
             <a:avLst/>
@@ -5290,19 +5290,19 @@
           <p:cNvPr id="4" name="">
             <a:extLst xmlns:a="http://schemas.openxmlformats.org/drawingml/2006/main">
               <a:ext uri="{FF2B5EF4-FFF2-40B4-BE49-F238E27FC236}">
-                <a16:creationId xmlns:a16="http://schemas.microsoft.com/office/drawing/2014/main" id="{62EB008C-B53B-4AD4-B7BE-5E6CB45CFFE4}"/>
-              </a:ext>
-            </a:extLst>
-          </p:cNvPr>
-          <p:cNvSpPr>
-            <a:spLocks xmlns:a="http://schemas.openxmlformats.org/drawingml/2006/main" noGrp="1"/>
-          </p:cNvSpPr>
-          <p:nvPr/>
-        </p:nvSpPr>
-        <p:spPr>
-          <a:xfrm xmlns:a="http://schemas.openxmlformats.org/drawingml/2006/main">
-            <a:off x="914400" y="6667500"/>
-            <a:ext cx="9525000" cy="152400"/>
+                <a16:creationId xmlns:a16="http://schemas.microsoft.com/office/drawing/2014/main" id="{FE38BE1E-6866-4976-8DC4-E79F2EB56B93}"/>
+              </a:ext>
+            </a:extLst>
+          </p:cNvPr>
+          <p:cNvSpPr>
+            <a:spLocks xmlns:a="http://schemas.openxmlformats.org/drawingml/2006/main" noGrp="1"/>
+          </p:cNvSpPr>
+          <p:nvPr/>
+        </p:nvSpPr>
+        <p:spPr>
+          <a:xfrm xmlns:a="http://schemas.openxmlformats.org/drawingml/2006/main">
+            <a:off x="1828800" y="6429375"/>
+            <a:ext cx="7620000" cy="190500"/>
           </a:xfrm>
           <a:prstGeom xmlns:a="http://schemas.openxmlformats.org/drawingml/2006/main" prst="rect">
             <a:avLst/>
@@ -5318,7 +5318,7 @@
           </a:bodyPr>
           <a:lstStyle xmlns:a="http://schemas.openxmlformats.org/drawingml/2006/main">
             <a:defPPr algn="l">
-              <a:defRPr sz="825" b="0">
+              <a:defRPr sz="900" b="0">
                 <a:solidFill>
                   <a:srgbClr val="858B7E"/>
                 </a:solidFill>
@@ -5330,7 +5330,7 @@
           </a:lstStyle>
           <a:p xmlns:a="http://schemas.openxmlformats.org/drawingml/2006/main">
             <a:pPr algn="l">
-              <a:defRPr sz="825" b="0">
+              <a:defRPr sz="900" b="0">
                 <a:solidFill>
                   <a:srgbClr val="858B7E"/>
                 </a:solidFill>
@@ -5340,7 +5340,7 @@
               </a:defRPr>
             </a:pPr>
             <a:r>
-              <a:rPr sz="825" b="0">
+              <a:rPr sz="900" b="0">
                 <a:solidFill>
                   <a:srgbClr val="858B7E"/>
                 </a:solidFill>
@@ -5358,19 +5358,19 @@
           <p:cNvPr id="5" name="">
             <a:extLst xmlns:a="http://schemas.openxmlformats.org/drawingml/2006/main">
               <a:ext uri="{FF2B5EF4-FFF2-40B4-BE49-F238E27FC236}">
-                <a16:creationId xmlns:a16="http://schemas.microsoft.com/office/drawing/2014/main" id="{6196C79B-91D5-43E8-B155-1B9D9C3718E7}"/>
-              </a:ext>
-            </a:extLst>
-          </p:cNvPr>
-          <p:cNvSpPr>
-            <a:spLocks xmlns:a="http://schemas.openxmlformats.org/drawingml/2006/main" noGrp="1"/>
-          </p:cNvSpPr>
-          <p:nvPr/>
-        </p:nvSpPr>
-        <p:spPr>
-          <a:xfrm xmlns:a="http://schemas.openxmlformats.org/drawingml/2006/main">
-            <a:off x="11049000" y="6667500"/>
-            <a:ext cx="228600" cy="152400"/>
+                <a16:creationId xmlns:a16="http://schemas.microsoft.com/office/drawing/2014/main" id="{F31726C8-ACF6-408C-8D3C-9C1F74766A6C}"/>
+              </a:ext>
+            </a:extLst>
+          </p:cNvPr>
+          <p:cNvSpPr>
+            <a:spLocks xmlns:a="http://schemas.openxmlformats.org/drawingml/2006/main" noGrp="1"/>
+          </p:cNvSpPr>
+          <p:nvPr/>
+        </p:nvSpPr>
+        <p:spPr>
+          <a:xfrm xmlns:a="http://schemas.openxmlformats.org/drawingml/2006/main">
+            <a:off x="10134600" y="6429375"/>
+            <a:ext cx="228600" cy="190500"/>
           </a:xfrm>
           <a:prstGeom xmlns:a="http://schemas.openxmlformats.org/drawingml/2006/main" prst="rect">
             <a:avLst/>
@@ -5386,7 +5386,7 @@
           </a:bodyPr>
           <a:lstStyle xmlns:a="http://schemas.openxmlformats.org/drawingml/2006/main">
             <a:defPPr algn="l">
-              <a:defRPr sz="825" b="0">
+              <a:defRPr sz="900" b="0">
                 <a:solidFill>
                   <a:srgbClr val="858B7E"/>
                 </a:solidFill>
@@ -5398,7 +5398,7 @@
           </a:lstStyle>
           <a:p xmlns:a="http://schemas.openxmlformats.org/drawingml/2006/main">
             <a:pPr algn="l">
-              <a:defRPr sz="825" b="0">
+              <a:defRPr sz="900" b="0">
                 <a:solidFill>
                   <a:srgbClr val="858B7E"/>
                 </a:solidFill>
@@ -5408,7 +5408,7 @@
               </a:defRPr>
             </a:pPr>
             <a:r>
-              <a:rPr sz="825" b="0">
+              <a:rPr sz="900" b="0">
                 <a:solidFill>
                   <a:srgbClr val="858B7E"/>
                 </a:solidFill>
@@ -5424,7 +5424,7 @@
     </p:spTree>
     <p:extLst>
       <p:ext uri="{BB962C8B-B14F-4D97-AF65-F5344CB8AC3E}">
-        <p14:creationId xmlns:p14="http://schemas.microsoft.com/office/powerpoint/2010/main" val="247606364"/>
+        <p14:creationId xmlns:p14="http://schemas.microsoft.com/office/powerpoint/2010/main" val="804000031"/>
       </p:ext>
     </p:extLst>
   </p:cSld>
@@ -5455,7 +5455,7 @@
           <p:cNvPr id="18" name="">
             <a:extLst xmlns:a="http://schemas.openxmlformats.org/drawingml/2006/main">
               <a:ext uri="{FF2B5EF4-FFF2-40B4-BE49-F238E27FC236}">
-                <a16:creationId xmlns:a16="http://schemas.microsoft.com/office/drawing/2014/main" id="{9F51E3ED-C361-49AD-AF9A-C2B4D40E5DDA}"/>
+                <a16:creationId xmlns:a16="http://schemas.microsoft.com/office/drawing/2014/main" id="{8E2E191D-7336-4DB9-B268-B7216A0A02AC}"/>
               </a:ext>
             </a:extLst>
           </p:cNvPr>
@@ -5523,7 +5523,7 @@
           <p:cNvPr id="2" name="">
             <a:extLst xmlns:a="http://schemas.openxmlformats.org/drawingml/2006/main">
               <a:ext uri="{FF2B5EF4-FFF2-40B4-BE49-F238E27FC236}">
-                <a16:creationId xmlns:a16="http://schemas.microsoft.com/office/drawing/2014/main" id="{50DA7D65-89F1-4DB8-AA5D-73483259F3FF}"/>
+                <a16:creationId xmlns:a16="http://schemas.microsoft.com/office/drawing/2014/main" id="{00F0782A-E1B0-4BF8-855C-18CF3C04CBF4}"/>
               </a:ext>
             </a:extLst>
           </p:cNvPr>
@@ -5591,7 +5591,7 @@
           <p:cNvPr id="3" name="">
             <a:extLst xmlns:a="http://schemas.openxmlformats.org/drawingml/2006/main">
               <a:ext uri="{FF2B5EF4-FFF2-40B4-BE49-F238E27FC236}">
-                <a16:creationId xmlns:a16="http://schemas.microsoft.com/office/drawing/2014/main" id="{DFAF3D75-F055-453A-B058-A7CC4D3CE0CE}"/>
+                <a16:creationId xmlns:a16="http://schemas.microsoft.com/office/drawing/2014/main" id="{7A44F1F8-80BE-4563-B110-6098E2C7FEC9}"/>
               </a:ext>
             </a:extLst>
           </p:cNvPr>
@@ -5621,7 +5621,7 @@
           <p:cNvPr id="4" name="">
             <a:extLst xmlns:a="http://schemas.openxmlformats.org/drawingml/2006/main">
               <a:ext uri="{FF2B5EF4-FFF2-40B4-BE49-F238E27FC236}">
-                <a16:creationId xmlns:a16="http://schemas.microsoft.com/office/drawing/2014/main" id="{E51E0B5D-4BDF-4E9A-9B7A-4CF06B5E439B}"/>
+                <a16:creationId xmlns:a16="http://schemas.microsoft.com/office/drawing/2014/main" id="{52A107B3-7E94-4B2E-8028-FEA1C35375C2}"/>
               </a:ext>
             </a:extLst>
           </p:cNvPr>
@@ -5689,7 +5689,7 @@
           <p:cNvPr id="5" name="">
             <a:extLst xmlns:a="http://schemas.openxmlformats.org/drawingml/2006/main">
               <a:ext uri="{FF2B5EF4-FFF2-40B4-BE49-F238E27FC236}">
-                <a16:creationId xmlns:a16="http://schemas.microsoft.com/office/drawing/2014/main" id="{CEF8BB61-C838-4230-A0D2-3FB76F295B35}"/>
+                <a16:creationId xmlns:a16="http://schemas.microsoft.com/office/drawing/2014/main" id="{F2DD27E2-F500-4ED8-9505-D276EBED520F}"/>
               </a:ext>
             </a:extLst>
           </p:cNvPr>
@@ -5757,7 +5757,7 @@
           <p:cNvPr id="6" name="">
             <a:extLst xmlns:a="http://schemas.openxmlformats.org/drawingml/2006/main">
               <a:ext uri="{FF2B5EF4-FFF2-40B4-BE49-F238E27FC236}">
-                <a16:creationId xmlns:a16="http://schemas.microsoft.com/office/drawing/2014/main" id="{546264C7-82C6-4786-A1DB-4954E4E9C0D8}"/>
+                <a16:creationId xmlns:a16="http://schemas.microsoft.com/office/drawing/2014/main" id="{CAD8330C-0DD1-4ABE-B4EE-6E3337FD0532}"/>
               </a:ext>
             </a:extLst>
           </p:cNvPr>
@@ -5825,7 +5825,7 @@
           <p:cNvPr id="7" name="">
             <a:extLst xmlns:a="http://schemas.openxmlformats.org/drawingml/2006/main">
               <a:ext uri="{FF2B5EF4-FFF2-40B4-BE49-F238E27FC236}">
-                <a16:creationId xmlns:a16="http://schemas.microsoft.com/office/drawing/2014/main" id="{B4DEEF72-8D33-440E-BA15-B91BF8A5F9AC}"/>
+                <a16:creationId xmlns:a16="http://schemas.microsoft.com/office/drawing/2014/main" id="{95508963-195E-4724-88B5-109A29C127E8}"/>
               </a:ext>
             </a:extLst>
           </p:cNvPr>
@@ -5855,7 +5855,7 @@
           <p:cNvPr id="8" name="">
             <a:extLst xmlns:a="http://schemas.openxmlformats.org/drawingml/2006/main">
               <a:ext uri="{FF2B5EF4-FFF2-40B4-BE49-F238E27FC236}">
-                <a16:creationId xmlns:a16="http://schemas.microsoft.com/office/drawing/2014/main" id="{B528790F-E96E-48F2-B7B7-44B7E1E4059D}"/>
+                <a16:creationId xmlns:a16="http://schemas.microsoft.com/office/drawing/2014/main" id="{4CD120B8-024B-4F3F-8E96-0D14CD03A244}"/>
               </a:ext>
             </a:extLst>
           </p:cNvPr>
@@ -5923,7 +5923,7 @@
           <p:cNvPr id="9" name="">
             <a:extLst xmlns:a="http://schemas.openxmlformats.org/drawingml/2006/main">
               <a:ext uri="{FF2B5EF4-FFF2-40B4-BE49-F238E27FC236}">
-                <a16:creationId xmlns:a16="http://schemas.microsoft.com/office/drawing/2014/main" id="{2B63B1EE-6768-43E8-B348-BA6A8E6024A7}"/>
+                <a16:creationId xmlns:a16="http://schemas.microsoft.com/office/drawing/2014/main" id="{07C33146-4816-4067-9EF7-E7AB53EB7A82}"/>
               </a:ext>
             </a:extLst>
           </p:cNvPr>
@@ -5991,7 +5991,7 @@
           <p:cNvPr id="10" name="">
             <a:extLst xmlns:a="http://schemas.openxmlformats.org/drawingml/2006/main">
               <a:ext uri="{FF2B5EF4-FFF2-40B4-BE49-F238E27FC236}">
-                <a16:creationId xmlns:a16="http://schemas.microsoft.com/office/drawing/2014/main" id="{32BA2BFD-DD1C-4FAE-A279-1B7369E429E8}"/>
+                <a16:creationId xmlns:a16="http://schemas.microsoft.com/office/drawing/2014/main" id="{CB461150-9CC1-499B-AA2A-B28EFF322DC0}"/>
               </a:ext>
             </a:extLst>
           </p:cNvPr>
@@ -6059,7 +6059,7 @@
           <p:cNvPr id="11" name="">
             <a:extLst xmlns:a="http://schemas.openxmlformats.org/drawingml/2006/main">
               <a:ext uri="{FF2B5EF4-FFF2-40B4-BE49-F238E27FC236}">
-                <a16:creationId xmlns:a16="http://schemas.microsoft.com/office/drawing/2014/main" id="{96517E87-A4FF-4A03-B7AB-1316B1481CBA}"/>
+                <a16:creationId xmlns:a16="http://schemas.microsoft.com/office/drawing/2014/main" id="{690649BD-392F-463F-86E3-5773883AFD94}"/>
               </a:ext>
             </a:extLst>
           </p:cNvPr>
@@ -6089,7 +6089,7 @@
           <p:cNvPr id="12" name="">
             <a:extLst xmlns:a="http://schemas.openxmlformats.org/drawingml/2006/main">
               <a:ext uri="{FF2B5EF4-FFF2-40B4-BE49-F238E27FC236}">
-                <a16:creationId xmlns:a16="http://schemas.microsoft.com/office/drawing/2014/main" id="{E0DFB6FB-B0FA-4D3B-A474-D79685090E9F}"/>
+                <a16:creationId xmlns:a16="http://schemas.microsoft.com/office/drawing/2014/main" id="{259E8520-E7B6-4D97-A2DE-19756FA42662}"/>
               </a:ext>
             </a:extLst>
           </p:cNvPr>
@@ -6157,7 +6157,7 @@
           <p:cNvPr id="13" name="">
             <a:extLst xmlns:a="http://schemas.openxmlformats.org/drawingml/2006/main">
               <a:ext uri="{FF2B5EF4-FFF2-40B4-BE49-F238E27FC236}">
-                <a16:creationId xmlns:a16="http://schemas.microsoft.com/office/drawing/2014/main" id="{7C7097B9-6682-4C38-8690-DE412DCE9A6A}"/>
+                <a16:creationId xmlns:a16="http://schemas.microsoft.com/office/drawing/2014/main" id="{BB9DE631-044A-4A6C-9B29-9A078C9408B2}"/>
               </a:ext>
             </a:extLst>
           </p:cNvPr>
@@ -6225,7 +6225,7 @@
           <p:cNvPr id="14" name="">
             <a:extLst xmlns:a="http://schemas.openxmlformats.org/drawingml/2006/main">
               <a:ext uri="{FF2B5EF4-FFF2-40B4-BE49-F238E27FC236}">
-                <a16:creationId xmlns:a16="http://schemas.microsoft.com/office/drawing/2014/main" id="{513E2E82-7767-466B-8639-D664F71363CD}"/>
+                <a16:creationId xmlns:a16="http://schemas.microsoft.com/office/drawing/2014/main" id="{F44986BF-289E-4DE8-BA6B-CDD65566356D}"/>
               </a:ext>
             </a:extLst>
           </p:cNvPr>
@@ -6293,7 +6293,7 @@
           <p:cNvPr id="15" name="">
             <a:extLst xmlns:a="http://schemas.openxmlformats.org/drawingml/2006/main">
               <a:ext uri="{FF2B5EF4-FFF2-40B4-BE49-F238E27FC236}">
-                <a16:creationId xmlns:a16="http://schemas.microsoft.com/office/drawing/2014/main" id="{DB3425C6-2B53-4370-B744-4E38CCD26C9B}"/>
+                <a16:creationId xmlns:a16="http://schemas.microsoft.com/office/drawing/2014/main" id="{25F9D265-65A1-4CCF-90D3-64773DF0D9D8}"/>
               </a:ext>
             </a:extLst>
           </p:cNvPr>
@@ -6361,7 +6361,7 @@
           <p:cNvPr id="16" name="">
             <a:extLst xmlns:a="http://schemas.openxmlformats.org/drawingml/2006/main">
               <a:ext uri="{FF2B5EF4-FFF2-40B4-BE49-F238E27FC236}">
-                <a16:creationId xmlns:a16="http://schemas.microsoft.com/office/drawing/2014/main" id="{9D5B83D9-EAFC-4665-9E59-0312427DBB71}"/>
+                <a16:creationId xmlns:a16="http://schemas.microsoft.com/office/drawing/2014/main" id="{790F12B0-1BC2-4F42-AB62-0C81B88BB10F}"/>
               </a:ext>
             </a:extLst>
           </p:cNvPr>
@@ -6429,7 +6429,7 @@
           <p:cNvPr id="17" name="">
             <a:extLst xmlns:a="http://schemas.openxmlformats.org/drawingml/2006/main">
               <a:ext uri="{FF2B5EF4-FFF2-40B4-BE49-F238E27FC236}">
-                <a16:creationId xmlns:a16="http://schemas.microsoft.com/office/drawing/2014/main" id="{D6685A5A-49EA-4695-B4FE-28BBA3369A81}"/>
+                <a16:creationId xmlns:a16="http://schemas.microsoft.com/office/drawing/2014/main" id="{FF516406-1151-4153-9673-566EF769D978}"/>
               </a:ext>
             </a:extLst>
           </p:cNvPr>
@@ -6495,7 +6495,7 @@
     </p:spTree>
     <p:extLst>
       <p:ext uri="{BB962C8B-B14F-4D97-AF65-F5344CB8AC3E}">
-        <p14:creationId xmlns:p14="http://schemas.microsoft.com/office/powerpoint/2010/main" val="1731940605"/>
+        <p14:creationId xmlns:p14="http://schemas.microsoft.com/office/powerpoint/2010/main" val="15129173"/>
       </p:ext>
     </p:extLst>
   </p:cSld>
@@ -6526,7 +6526,7 @@
           <p:cNvPr id="11" name="">
             <a:extLst xmlns:a="http://schemas.openxmlformats.org/drawingml/2006/main">
               <a:ext uri="{FF2B5EF4-FFF2-40B4-BE49-F238E27FC236}">
-                <a16:creationId xmlns:a16="http://schemas.microsoft.com/office/drawing/2014/main" id="{A1123E88-B70D-4A4B-86F5-B7AC43968DD4}"/>
+                <a16:creationId xmlns:a16="http://schemas.microsoft.com/office/drawing/2014/main" id="{CC0A59E1-F940-4EF4-B1B0-03BFF727151F}"/>
               </a:ext>
             </a:extLst>
           </p:cNvPr>
@@ -6594,7 +6594,7 @@
           <p:cNvPr id="2" name="">
             <a:extLst xmlns:a="http://schemas.openxmlformats.org/drawingml/2006/main">
               <a:ext uri="{FF2B5EF4-FFF2-40B4-BE49-F238E27FC236}">
-                <a16:creationId xmlns:a16="http://schemas.microsoft.com/office/drawing/2014/main" id="{F1DAB37F-E3BA-4966-AA0E-92EDF6FCED7F}"/>
+                <a16:creationId xmlns:a16="http://schemas.microsoft.com/office/drawing/2014/main" id="{2E059704-BF9D-4476-A53F-9068E39A331F}"/>
               </a:ext>
             </a:extLst>
           </p:cNvPr>
@@ -6662,7 +6662,7 @@
           <p:cNvPr id="3" name="">
             <a:extLst xmlns:a="http://schemas.openxmlformats.org/drawingml/2006/main">
               <a:ext uri="{FF2B5EF4-FFF2-40B4-BE49-F238E27FC236}">
-                <a16:creationId xmlns:a16="http://schemas.microsoft.com/office/drawing/2014/main" id="{D8ABB487-3AC7-41AA-99BE-D6D296552729}"/>
+                <a16:creationId xmlns:a16="http://schemas.microsoft.com/office/drawing/2014/main" id="{A07F6238-F637-4181-9312-29F29E7756BB}"/>
               </a:ext>
             </a:extLst>
           </p:cNvPr>
@@ -6692,7 +6692,7 @@
           <p:cNvPr id="4" name="">
             <a:extLst xmlns:a="http://schemas.openxmlformats.org/drawingml/2006/main">
               <a:ext uri="{FF2B5EF4-FFF2-40B4-BE49-F238E27FC236}">
-                <a16:creationId xmlns:a16="http://schemas.microsoft.com/office/drawing/2014/main" id="{9D4844CD-6DDF-43B7-A819-E204A13C9D04}"/>
+                <a16:creationId xmlns:a16="http://schemas.microsoft.com/office/drawing/2014/main" id="{8B820A87-935E-46E2-969E-27889E520E15}"/>
               </a:ext>
             </a:extLst>
           </p:cNvPr>
@@ -6760,7 +6760,7 @@
           <p:cNvPr id="5" name="">
             <a:extLst xmlns:a="http://schemas.openxmlformats.org/drawingml/2006/main">
               <a:ext uri="{FF2B5EF4-FFF2-40B4-BE49-F238E27FC236}">
-                <a16:creationId xmlns:a16="http://schemas.microsoft.com/office/drawing/2014/main" id="{F0D0F480-55F0-4892-8818-B904556AA0B1}"/>
+                <a16:creationId xmlns:a16="http://schemas.microsoft.com/office/drawing/2014/main" id="{ECE39A4D-51E8-429F-AA98-4496C97E4BD6}"/>
               </a:ext>
             </a:extLst>
           </p:cNvPr>
@@ -6790,7 +6790,7 @@
           <p:cNvPr id="6" name="">
             <a:extLst xmlns:a="http://schemas.openxmlformats.org/drawingml/2006/main">
               <a:ext uri="{FF2B5EF4-FFF2-40B4-BE49-F238E27FC236}">
-                <a16:creationId xmlns:a16="http://schemas.microsoft.com/office/drawing/2014/main" id="{456334D7-46A8-4A0F-9697-87A4AC685A05}"/>
+                <a16:creationId xmlns:a16="http://schemas.microsoft.com/office/drawing/2014/main" id="{BBFCC4A0-9F04-4C02-A2EB-5560743EFDD0}"/>
               </a:ext>
             </a:extLst>
           </p:cNvPr>
@@ -6820,7 +6820,7 @@
           <p:cNvPr id="7" name="">
             <a:extLst xmlns:a="http://schemas.openxmlformats.org/drawingml/2006/main">
               <a:ext uri="{FF2B5EF4-FFF2-40B4-BE49-F238E27FC236}">
-                <a16:creationId xmlns:a16="http://schemas.microsoft.com/office/drawing/2014/main" id="{AE75F113-CE2D-48FC-9652-78865A925DF8}"/>
+                <a16:creationId xmlns:a16="http://schemas.microsoft.com/office/drawing/2014/main" id="{EAA19D5C-5856-4765-B56B-6AF065352750}"/>
               </a:ext>
             </a:extLst>
           </p:cNvPr>
@@ -6888,7 +6888,7 @@
           <p:cNvPr id="8" name="">
             <a:extLst xmlns:a="http://schemas.openxmlformats.org/drawingml/2006/main">
               <a:ext uri="{FF2B5EF4-FFF2-40B4-BE49-F238E27FC236}">
-                <a16:creationId xmlns:a16="http://schemas.microsoft.com/office/drawing/2014/main" id="{8F72D158-5B30-4584-B6CA-DDB96FC89495}"/>
+                <a16:creationId xmlns:a16="http://schemas.microsoft.com/office/drawing/2014/main" id="{C4ED762A-B297-481B-B723-4E6C8DEC40E6}"/>
               </a:ext>
             </a:extLst>
           </p:cNvPr>
@@ -6918,7 +6918,7 @@
           <p:cNvPr id="9" name="">
             <a:extLst xmlns:a="http://schemas.openxmlformats.org/drawingml/2006/main">
               <a:ext uri="{FF2B5EF4-FFF2-40B4-BE49-F238E27FC236}">
-                <a16:creationId xmlns:a16="http://schemas.microsoft.com/office/drawing/2014/main" id="{64995B6F-4E0F-4524-84D9-D20BA40CABB8}"/>
+                <a16:creationId xmlns:a16="http://schemas.microsoft.com/office/drawing/2014/main" id="{32299D4A-09D9-4ABE-9BB8-CF80FC91F088}"/>
               </a:ext>
             </a:extLst>
           </p:cNvPr>
@@ -6986,7 +6986,7 @@
           <p:cNvPr id="10" name="">
             <a:extLst xmlns:a="http://schemas.openxmlformats.org/drawingml/2006/main">
               <a:ext uri="{FF2B5EF4-FFF2-40B4-BE49-F238E27FC236}">
-                <a16:creationId xmlns:a16="http://schemas.microsoft.com/office/drawing/2014/main" id="{1EF514B7-4835-4769-9464-F3D4C5368C0E}"/>
+                <a16:creationId xmlns:a16="http://schemas.microsoft.com/office/drawing/2014/main" id="{A0DDCECE-C53C-47E9-8360-E925B12D2A8C}"/>
               </a:ext>
             </a:extLst>
           </p:cNvPr>
@@ -7052,7 +7052,7 @@
     </p:spTree>
     <p:extLst>
       <p:ext uri="{BB962C8B-B14F-4D97-AF65-F5344CB8AC3E}">
-        <p14:creationId xmlns:p14="http://schemas.microsoft.com/office/powerpoint/2010/main" val="2136088364"/>
+        <p14:creationId xmlns:p14="http://schemas.microsoft.com/office/powerpoint/2010/main" val="764470276"/>
       </p:ext>
     </p:extLst>
   </p:cSld>
@@ -7083,7 +7083,7 @@
           <p:cNvPr id="6" name="">
             <a:extLst xmlns:a="http://schemas.openxmlformats.org/drawingml/2006/main">
               <a:ext uri="{FF2B5EF4-FFF2-40B4-BE49-F238E27FC236}">
-                <a16:creationId xmlns:a16="http://schemas.microsoft.com/office/drawing/2014/main" id="{86D8B6E4-D899-463D-9BEC-1929FCFA89B8}"/>
+                <a16:creationId xmlns:a16="http://schemas.microsoft.com/office/drawing/2014/main" id="{EE0B2F49-F468-4FEA-B20B-856325D8C74D}"/>
               </a:ext>
             </a:extLst>
           </p:cNvPr>
@@ -7151,7 +7151,7 @@
           <p:cNvPr id="2" name="">
             <a:extLst xmlns:a="http://schemas.openxmlformats.org/drawingml/2006/main">
               <a:ext uri="{FF2B5EF4-FFF2-40B4-BE49-F238E27FC236}">
-                <a16:creationId xmlns:a16="http://schemas.microsoft.com/office/drawing/2014/main" id="{EDF8CBBD-9CFE-4220-8F6B-1C192CB43CEC}"/>
+                <a16:creationId xmlns:a16="http://schemas.microsoft.com/office/drawing/2014/main" id="{E75D2108-A3E5-40EE-892B-58730E6B8201}"/>
               </a:ext>
             </a:extLst>
           </p:cNvPr>
@@ -7219,7 +7219,7 @@
           <p:cNvPr id="3" name="">
             <a:extLst xmlns:a="http://schemas.openxmlformats.org/drawingml/2006/main">
               <a:ext uri="{FF2B5EF4-FFF2-40B4-BE49-F238E27FC236}">
-                <a16:creationId xmlns:a16="http://schemas.microsoft.com/office/drawing/2014/main" id="{4A396832-6E4C-45D7-85DA-E4315156AFB2}"/>
+                <a16:creationId xmlns:a16="http://schemas.microsoft.com/office/drawing/2014/main" id="{5FABFAE3-A340-40E6-A2D7-CA9D22E98F82}"/>
               </a:ext>
             </a:extLst>
           </p:cNvPr>
@@ -7287,7 +7287,7 @@
           <p:cNvPr id="4" name="">
             <a:extLst xmlns:a="http://schemas.openxmlformats.org/drawingml/2006/main">
               <a:ext uri="{FF2B5EF4-FFF2-40B4-BE49-F238E27FC236}">
-                <a16:creationId xmlns:a16="http://schemas.microsoft.com/office/drawing/2014/main" id="{050D5ACB-4128-4C59-A1F6-EBBCB66F7AD9}"/>
+                <a16:creationId xmlns:a16="http://schemas.microsoft.com/office/drawing/2014/main" id="{B6398BBC-1C37-438D-82DD-A6E7525B826A}"/>
               </a:ext>
             </a:extLst>
           </p:cNvPr>
@@ -7355,7 +7355,7 @@
           <p:cNvPr id="5" name="">
             <a:extLst xmlns:a="http://schemas.openxmlformats.org/drawingml/2006/main">
               <a:ext uri="{FF2B5EF4-FFF2-40B4-BE49-F238E27FC236}">
-                <a16:creationId xmlns:a16="http://schemas.microsoft.com/office/drawing/2014/main" id="{EC9C5626-B4DA-452D-A2CC-C536A0B6EEBE}"/>
+                <a16:creationId xmlns:a16="http://schemas.microsoft.com/office/drawing/2014/main" id="{F0CE5B8A-78B8-4DD4-8797-23EF34B40A02}"/>
               </a:ext>
             </a:extLst>
           </p:cNvPr>
@@ -7421,7 +7421,7 @@
     </p:spTree>
     <p:extLst>
       <p:ext uri="{BB962C8B-B14F-4D97-AF65-F5344CB8AC3E}">
-        <p14:creationId xmlns:p14="http://schemas.microsoft.com/office/powerpoint/2010/main" val="728180069"/>
+        <p14:creationId xmlns:p14="http://schemas.microsoft.com/office/powerpoint/2010/main" val="1241210312"/>
       </p:ext>
     </p:extLst>
   </p:cSld>
@@ -7452,7 +7452,7 @@
           <p:cNvPr id="7" name="">
             <a:extLst xmlns:a="http://schemas.openxmlformats.org/drawingml/2006/main">
               <a:ext uri="{FF2B5EF4-FFF2-40B4-BE49-F238E27FC236}">
-                <a16:creationId xmlns:a16="http://schemas.microsoft.com/office/drawing/2014/main" id="{4BE6C08D-6C82-403E-ACC9-6BC583AE4C76}"/>
+                <a16:creationId xmlns:a16="http://schemas.microsoft.com/office/drawing/2014/main" id="{58A07987-FA31-46EE-AD2B-86C93DDADC35}"/>
               </a:ext>
             </a:extLst>
           </p:cNvPr>
@@ -7520,7 +7520,7 @@
           <p:cNvPr id="2" name="">
             <a:extLst xmlns:a="http://schemas.openxmlformats.org/drawingml/2006/main">
               <a:ext uri="{FF2B5EF4-FFF2-40B4-BE49-F238E27FC236}">
-                <a16:creationId xmlns:a16="http://schemas.microsoft.com/office/drawing/2014/main" id="{2B099948-80AF-4755-BC9D-66D15834077E}"/>
+                <a16:creationId xmlns:a16="http://schemas.microsoft.com/office/drawing/2014/main" id="{3E7FFA0C-7B92-4CBB-8374-850A4E26E027}"/>
               </a:ext>
             </a:extLst>
           </p:cNvPr>
@@ -7588,7 +7588,7 @@
           <p:cNvPr id="3" name="">
             <a:extLst xmlns:a="http://schemas.openxmlformats.org/drawingml/2006/main">
               <a:ext uri="{FF2B5EF4-FFF2-40B4-BE49-F238E27FC236}">
-                <a16:creationId xmlns:a16="http://schemas.microsoft.com/office/drawing/2014/main" id="{6CEFE01A-78CA-410F-8C5F-0481E1475EEC}"/>
+                <a16:creationId xmlns:a16="http://schemas.microsoft.com/office/drawing/2014/main" id="{F8C1B830-670A-444A-88E5-8F0585E25BE8}"/>
               </a:ext>
             </a:extLst>
           </p:cNvPr>
@@ -7656,7 +7656,7 @@
           <p:cNvPr id="4" name="">
             <a:extLst xmlns:a="http://schemas.openxmlformats.org/drawingml/2006/main">
               <a:ext uri="{FF2B5EF4-FFF2-40B4-BE49-F238E27FC236}">
-                <a16:creationId xmlns:a16="http://schemas.microsoft.com/office/drawing/2014/main" id="{2259E8F4-6E42-43BC-8118-97B6128680FD}"/>
+                <a16:creationId xmlns:a16="http://schemas.microsoft.com/office/drawing/2014/main" id="{7F388E5D-873A-4070-8E11-BDDDBCFD3F30}"/>
               </a:ext>
             </a:extLst>
           </p:cNvPr>
@@ -7666,7 +7666,7 @@
           <p:nvPr/>
         </p:nvPicPr>
         <p:blipFill>
-          <a:blip xmlns:r="http://schemas.openxmlformats.org/officeDocument/2006/relationships" xmlns:a="http://schemas.openxmlformats.org/drawingml/2006/main" r:embed="R52df518727ce49a0"/>
+          <a:blip xmlns:r="http://schemas.openxmlformats.org/officeDocument/2006/relationships" xmlns:a="http://schemas.openxmlformats.org/drawingml/2006/main" r:embed="Reca161ab0c244313"/>
           <a:stretch xmlns:a="http://schemas.openxmlformats.org/drawingml/2006/main"/>
         </p:blipFill>
         <p:spPr>
@@ -7684,7 +7684,7 @@
           <p:cNvPr id="5" name="">
             <a:extLst xmlns:a="http://schemas.openxmlformats.org/drawingml/2006/main">
               <a:ext uri="{FF2B5EF4-FFF2-40B4-BE49-F238E27FC236}">
-                <a16:creationId xmlns:a16="http://schemas.microsoft.com/office/drawing/2014/main" id="{087CD8BF-47F1-438E-9CF4-618BDE953733}"/>
+                <a16:creationId xmlns:a16="http://schemas.microsoft.com/office/drawing/2014/main" id="{20D580E6-13FD-4339-BDCD-FB06996B0111}"/>
               </a:ext>
             </a:extLst>
           </p:cNvPr>
@@ -7752,7 +7752,7 @@
           <p:cNvPr id="6" name="">
             <a:extLst xmlns:a="http://schemas.openxmlformats.org/drawingml/2006/main">
               <a:ext uri="{FF2B5EF4-FFF2-40B4-BE49-F238E27FC236}">
-                <a16:creationId xmlns:a16="http://schemas.microsoft.com/office/drawing/2014/main" id="{C843C27F-B039-4F74-9515-AAC8F080CF78}"/>
+                <a16:creationId xmlns:a16="http://schemas.microsoft.com/office/drawing/2014/main" id="{1C9B47D2-32A3-4A13-A423-FC0EAF9B3D48}"/>
               </a:ext>
             </a:extLst>
           </p:cNvPr>
@@ -7818,7 +7818,7 @@
     </p:spTree>
     <p:extLst>
       <p:ext uri="{BB962C8B-B14F-4D97-AF65-F5344CB8AC3E}">
-        <p14:creationId xmlns:p14="http://schemas.microsoft.com/office/powerpoint/2010/main" val="504326415"/>
+        <p14:creationId xmlns:p14="http://schemas.microsoft.com/office/powerpoint/2010/main" val="331939671"/>
       </p:ext>
     </p:extLst>
   </p:cSld>
@@ -7849,7 +7849,7 @@
           <p:cNvPr id="14" name="">
             <a:extLst xmlns:a="http://schemas.openxmlformats.org/drawingml/2006/main">
               <a:ext uri="{FF2B5EF4-FFF2-40B4-BE49-F238E27FC236}">
-                <a16:creationId xmlns:a16="http://schemas.microsoft.com/office/drawing/2014/main" id="{38E66460-D960-4FD6-AF1A-05FD27E62860}"/>
+                <a16:creationId xmlns:a16="http://schemas.microsoft.com/office/drawing/2014/main" id="{157FCB24-9ECE-4CC6-B77F-61DA80B0C9C0}"/>
               </a:ext>
             </a:extLst>
           </p:cNvPr>
@@ -7917,7 +7917,7 @@
           <p:cNvPr id="2" name="">
             <a:extLst xmlns:a="http://schemas.openxmlformats.org/drawingml/2006/main">
               <a:ext uri="{FF2B5EF4-FFF2-40B4-BE49-F238E27FC236}">
-                <a16:creationId xmlns:a16="http://schemas.microsoft.com/office/drawing/2014/main" id="{053D07E6-0D77-49D4-8655-A5D66DC726AF}"/>
+                <a16:creationId xmlns:a16="http://schemas.microsoft.com/office/drawing/2014/main" id="{2CB66BA6-D414-491D-B8BD-C2E8155C467D}"/>
               </a:ext>
             </a:extLst>
           </p:cNvPr>
@@ -7985,7 +7985,7 @@
           <p:cNvPr id="3" name="">
             <a:extLst xmlns:a="http://schemas.openxmlformats.org/drawingml/2006/main">
               <a:ext uri="{FF2B5EF4-FFF2-40B4-BE49-F238E27FC236}">
-                <a16:creationId xmlns:a16="http://schemas.microsoft.com/office/drawing/2014/main" id="{D5120603-2723-4CCF-B04D-A738B462EED0}"/>
+                <a16:creationId xmlns:a16="http://schemas.microsoft.com/office/drawing/2014/main" id="{1487B246-56A2-4756-A1E9-D00536DAEEF9}"/>
               </a:ext>
             </a:extLst>
           </p:cNvPr>
@@ -8015,7 +8015,7 @@
           <p:cNvPr id="4" name="">
             <a:extLst xmlns:a="http://schemas.openxmlformats.org/drawingml/2006/main">
               <a:ext uri="{FF2B5EF4-FFF2-40B4-BE49-F238E27FC236}">
-                <a16:creationId xmlns:a16="http://schemas.microsoft.com/office/drawing/2014/main" id="{4AF922A0-9D52-4444-AE5B-62F1FF85F75E}"/>
+                <a16:creationId xmlns:a16="http://schemas.microsoft.com/office/drawing/2014/main" id="{0D9FF49B-A0E3-4832-8C84-B63B4826829E}"/>
               </a:ext>
             </a:extLst>
           </p:cNvPr>
@@ -8083,7 +8083,7 @@
           <p:cNvPr id="5" name="">
             <a:extLst xmlns:a="http://schemas.openxmlformats.org/drawingml/2006/main">
               <a:ext uri="{FF2B5EF4-FFF2-40B4-BE49-F238E27FC236}">
-                <a16:creationId xmlns:a16="http://schemas.microsoft.com/office/drawing/2014/main" id="{B9F66F0B-7F03-4279-97E6-FD6FD5BC5A29}"/>
+                <a16:creationId xmlns:a16="http://schemas.microsoft.com/office/drawing/2014/main" id="{667CD566-C71A-468D-B735-C5A253C28EF0}"/>
               </a:ext>
             </a:extLst>
           </p:cNvPr>
@@ -8174,7 +8174,7 @@
           <p:cNvPr id="6" name="">
             <a:extLst xmlns:a="http://schemas.openxmlformats.org/drawingml/2006/main">
               <a:ext uri="{FF2B5EF4-FFF2-40B4-BE49-F238E27FC236}">
-                <a16:creationId xmlns:a16="http://schemas.microsoft.com/office/drawing/2014/main" id="{C131F9FB-CB2C-4346-87ED-A2E80064C4C4}"/>
+                <a16:creationId xmlns:a16="http://schemas.microsoft.com/office/drawing/2014/main" id="{0396D9CF-F823-451E-A23F-A9B279FB8B03}"/>
               </a:ext>
             </a:extLst>
           </p:cNvPr>
@@ -8204,7 +8204,7 @@
           <p:cNvPr id="7" name="">
             <a:extLst xmlns:a="http://schemas.openxmlformats.org/drawingml/2006/main">
               <a:ext uri="{FF2B5EF4-FFF2-40B4-BE49-F238E27FC236}">
-                <a16:creationId xmlns:a16="http://schemas.microsoft.com/office/drawing/2014/main" id="{518BED8B-31C9-4E32-9DEF-BD91F7171781}"/>
+                <a16:creationId xmlns:a16="http://schemas.microsoft.com/office/drawing/2014/main" id="{5EEE11E7-CE6E-42D6-967B-5185AAA69249}"/>
               </a:ext>
             </a:extLst>
           </p:cNvPr>
@@ -8272,7 +8272,7 @@
           <p:cNvPr id="8" name="">
             <a:extLst xmlns:a="http://schemas.openxmlformats.org/drawingml/2006/main">
               <a:ext uri="{FF2B5EF4-FFF2-40B4-BE49-F238E27FC236}">
-                <a16:creationId xmlns:a16="http://schemas.microsoft.com/office/drawing/2014/main" id="{592B5856-E657-46D5-9AF8-8700A9968C0E}"/>
+                <a16:creationId xmlns:a16="http://schemas.microsoft.com/office/drawing/2014/main" id="{B5AA8221-C154-4224-B78F-AD42264C28F9}"/>
               </a:ext>
             </a:extLst>
           </p:cNvPr>
@@ -8340,7 +8340,7 @@
           <p:cNvPr id="9" name="">
             <a:extLst xmlns:a="http://schemas.openxmlformats.org/drawingml/2006/main">
               <a:ext uri="{FF2B5EF4-FFF2-40B4-BE49-F238E27FC236}">
-                <a16:creationId xmlns:a16="http://schemas.microsoft.com/office/drawing/2014/main" id="{D691A902-89BE-4757-900D-DFA32AC03D3F}"/>
+                <a16:creationId xmlns:a16="http://schemas.microsoft.com/office/drawing/2014/main" id="{FCF8B8B8-3DAC-4347-886F-66B7C4D66FCE}"/>
               </a:ext>
             </a:extLst>
           </p:cNvPr>
@@ -8370,7 +8370,7 @@
           <p:cNvPr id="10" name="">
             <a:extLst xmlns:a="http://schemas.openxmlformats.org/drawingml/2006/main">
               <a:ext uri="{FF2B5EF4-FFF2-40B4-BE49-F238E27FC236}">
-                <a16:creationId xmlns:a16="http://schemas.microsoft.com/office/drawing/2014/main" id="{D0B7B565-9841-4E4F-BCFD-57FB11A3C35B}"/>
+                <a16:creationId xmlns:a16="http://schemas.microsoft.com/office/drawing/2014/main" id="{83484EB4-504E-4742-99BC-9C5932E05F14}"/>
               </a:ext>
             </a:extLst>
           </p:cNvPr>
@@ -8380,7 +8380,7 @@
           <p:nvPr/>
         </p:nvPicPr>
         <p:blipFill>
-          <a:blip xmlns:r="http://schemas.openxmlformats.org/officeDocument/2006/relationships" xmlns:a="http://schemas.openxmlformats.org/drawingml/2006/main" r:embed="R385b817c7b724199"/>
+          <a:blip xmlns:r="http://schemas.openxmlformats.org/officeDocument/2006/relationships" xmlns:a="http://schemas.openxmlformats.org/drawingml/2006/main" r:embed="R27af8b4708104aed"/>
           <a:stretch xmlns:a="http://schemas.openxmlformats.org/drawingml/2006/main"/>
         </p:blipFill>
         <p:spPr>
@@ -8398,7 +8398,7 @@
           <p:cNvPr id="11" name="">
             <a:extLst xmlns:a="http://schemas.openxmlformats.org/drawingml/2006/main">
               <a:ext uri="{FF2B5EF4-FFF2-40B4-BE49-F238E27FC236}">
-                <a16:creationId xmlns:a16="http://schemas.microsoft.com/office/drawing/2014/main" id="{E0097F5D-3031-4628-A6FA-45208EDECCF4}"/>
+                <a16:creationId xmlns:a16="http://schemas.microsoft.com/office/drawing/2014/main" id="{6AF5FE8A-9DB5-400B-A150-5D92D850EF15}"/>
               </a:ext>
             </a:extLst>
           </p:cNvPr>
@@ -8466,7 +8466,7 @@
           <p:cNvPr id="12" name="">
             <a:extLst xmlns:a="http://schemas.openxmlformats.org/drawingml/2006/main">
               <a:ext uri="{FF2B5EF4-FFF2-40B4-BE49-F238E27FC236}">
-                <a16:creationId xmlns:a16="http://schemas.microsoft.com/office/drawing/2014/main" id="{99B51878-C20E-4EFA-A0A7-FDAA7EA65E10}"/>
+                <a16:creationId xmlns:a16="http://schemas.microsoft.com/office/drawing/2014/main" id="{AE2DAF32-A15C-455D-A1F9-AC6F44E5F558}"/>
               </a:ext>
             </a:extLst>
           </p:cNvPr>
@@ -8534,7 +8534,7 @@
           <p:cNvPr id="13" name="">
             <a:extLst xmlns:a="http://schemas.openxmlformats.org/drawingml/2006/main">
               <a:ext uri="{FF2B5EF4-FFF2-40B4-BE49-F238E27FC236}">
-                <a16:creationId xmlns:a16="http://schemas.microsoft.com/office/drawing/2014/main" id="{98461DB2-7223-4414-8994-D8CFC6F0DD27}"/>
+                <a16:creationId xmlns:a16="http://schemas.microsoft.com/office/drawing/2014/main" id="{52EE0DA4-2D05-4988-B71D-1CEA10F0981C}"/>
               </a:ext>
             </a:extLst>
           </p:cNvPr>
@@ -8600,7 +8600,7 @@
     </p:spTree>
     <p:extLst>
       <p:ext uri="{BB962C8B-B14F-4D97-AF65-F5344CB8AC3E}">
-        <p14:creationId xmlns:p14="http://schemas.microsoft.com/office/powerpoint/2010/main" val="1037200205"/>
+        <p14:creationId xmlns:p14="http://schemas.microsoft.com/office/powerpoint/2010/main" val="605529617"/>
       </p:ext>
     </p:extLst>
   </p:cSld>
@@ -8631,7 +8631,7 @@
           <p:cNvPr id="11" name="">
             <a:extLst xmlns:a="http://schemas.openxmlformats.org/drawingml/2006/main">
               <a:ext uri="{FF2B5EF4-FFF2-40B4-BE49-F238E27FC236}">
-                <a16:creationId xmlns:a16="http://schemas.microsoft.com/office/drawing/2014/main" id="{97088DFC-491C-4C1B-B12F-9897868B5D5F}"/>
+                <a16:creationId xmlns:a16="http://schemas.microsoft.com/office/drawing/2014/main" id="{6DAA0022-DD13-45D0-BC2F-A3449491DDB6}"/>
               </a:ext>
             </a:extLst>
           </p:cNvPr>
@@ -8699,7 +8699,7 @@
           <p:cNvPr id="2" name="">
             <a:extLst xmlns:a="http://schemas.openxmlformats.org/drawingml/2006/main">
               <a:ext uri="{FF2B5EF4-FFF2-40B4-BE49-F238E27FC236}">
-                <a16:creationId xmlns:a16="http://schemas.microsoft.com/office/drawing/2014/main" id="{8B1E144D-E2E1-4FA7-9C94-DF7F3DB9192A}"/>
+                <a16:creationId xmlns:a16="http://schemas.microsoft.com/office/drawing/2014/main" id="{FD65A820-9910-45C7-91CD-9E67BF6A7249}"/>
               </a:ext>
             </a:extLst>
           </p:cNvPr>
@@ -8767,7 +8767,7 @@
           <p:cNvPr id="3" name="">
             <a:extLst xmlns:a="http://schemas.openxmlformats.org/drawingml/2006/main">
               <a:ext uri="{FF2B5EF4-FFF2-40B4-BE49-F238E27FC236}">
-                <a16:creationId xmlns:a16="http://schemas.microsoft.com/office/drawing/2014/main" id="{13922CD8-6E45-4E8B-A6C6-65A49CE65506}"/>
+                <a16:creationId xmlns:a16="http://schemas.microsoft.com/office/drawing/2014/main" id="{EB4D8CB1-3846-4499-B8BE-42F6145757E6}"/>
               </a:ext>
             </a:extLst>
           </p:cNvPr>
@@ -8797,7 +8797,7 @@
           <p:cNvPr id="4" name="">
             <a:extLst xmlns:a="http://schemas.openxmlformats.org/drawingml/2006/main">
               <a:ext uri="{FF2B5EF4-FFF2-40B4-BE49-F238E27FC236}">
-                <a16:creationId xmlns:a16="http://schemas.microsoft.com/office/drawing/2014/main" id="{27B2692C-CF11-4478-AF4B-07E94610A8BD}"/>
+                <a16:creationId xmlns:a16="http://schemas.microsoft.com/office/drawing/2014/main" id="{0AAE86BB-D594-4513-A38A-5D650C72A329}"/>
               </a:ext>
             </a:extLst>
           </p:cNvPr>
@@ -8865,7 +8865,7 @@
           <p:cNvPr id="5" name="">
             <a:extLst xmlns:a="http://schemas.openxmlformats.org/drawingml/2006/main">
               <a:ext uri="{FF2B5EF4-FFF2-40B4-BE49-F238E27FC236}">
-                <a16:creationId xmlns:a16="http://schemas.microsoft.com/office/drawing/2014/main" id="{3D0A9FC0-BF32-46B2-8E32-C8A284B1D5A4}"/>
+                <a16:creationId xmlns:a16="http://schemas.microsoft.com/office/drawing/2014/main" id="{6B4A4FA4-56BF-4714-96BB-BB0B53819710}"/>
               </a:ext>
             </a:extLst>
           </p:cNvPr>
@@ -8956,7 +8956,7 @@
           <p:cNvPr id="6" name="">
             <a:extLst xmlns:a="http://schemas.openxmlformats.org/drawingml/2006/main">
               <a:ext uri="{FF2B5EF4-FFF2-40B4-BE49-F238E27FC236}">
-                <a16:creationId xmlns:a16="http://schemas.microsoft.com/office/drawing/2014/main" id="{1E185101-9405-4936-94C9-4B5E90C08E1E}"/>
+                <a16:creationId xmlns:a16="http://schemas.microsoft.com/office/drawing/2014/main" id="{C0F4BE7C-FD7B-482A-A32C-70636D43123A}"/>
               </a:ext>
             </a:extLst>
           </p:cNvPr>
@@ -8986,7 +8986,7 @@
           <p:cNvPr id="7" name="">
             <a:extLst xmlns:a="http://schemas.openxmlformats.org/drawingml/2006/main">
               <a:ext uri="{FF2B5EF4-FFF2-40B4-BE49-F238E27FC236}">
-                <a16:creationId xmlns:a16="http://schemas.microsoft.com/office/drawing/2014/main" id="{69D63C35-20E5-40F0-A997-AD988FE80E1D}"/>
+                <a16:creationId xmlns:a16="http://schemas.microsoft.com/office/drawing/2014/main" id="{248C4670-C6BD-4D18-A188-139076D79CD6}"/>
               </a:ext>
             </a:extLst>
           </p:cNvPr>
@@ -9054,7 +9054,7 @@
           <p:cNvPr id="8" name="">
             <a:extLst xmlns:a="http://schemas.openxmlformats.org/drawingml/2006/main">
               <a:ext uri="{FF2B5EF4-FFF2-40B4-BE49-F238E27FC236}">
-                <a16:creationId xmlns:a16="http://schemas.microsoft.com/office/drawing/2014/main" id="{FEEDFAC1-6D15-4661-8DEF-C181E89B8F4C}"/>
+                <a16:creationId xmlns:a16="http://schemas.microsoft.com/office/drawing/2014/main" id="{83D00A63-7BB0-4615-AB0E-F051FD514B3A}"/>
               </a:ext>
             </a:extLst>
           </p:cNvPr>
@@ -9145,7 +9145,7 @@
           <p:cNvPr id="9" name="">
             <a:extLst xmlns:a="http://schemas.openxmlformats.org/drawingml/2006/main">
               <a:ext uri="{FF2B5EF4-FFF2-40B4-BE49-F238E27FC236}">
-                <a16:creationId xmlns:a16="http://schemas.microsoft.com/office/drawing/2014/main" id="{453DB956-B5BE-4DA2-9DA0-EB4C25C1097B}"/>
+                <a16:creationId xmlns:a16="http://schemas.microsoft.com/office/drawing/2014/main" id="{8347B59C-6213-4935-B87C-3EE828B0E6BD}"/>
               </a:ext>
             </a:extLst>
           </p:cNvPr>
@@ -9213,7 +9213,7 @@
           <p:cNvPr id="10" name="">
             <a:extLst xmlns:a="http://schemas.openxmlformats.org/drawingml/2006/main">
               <a:ext uri="{FF2B5EF4-FFF2-40B4-BE49-F238E27FC236}">
-                <a16:creationId xmlns:a16="http://schemas.microsoft.com/office/drawing/2014/main" id="{450CA4F0-900B-463A-AD44-E21062968233}"/>
+                <a16:creationId xmlns:a16="http://schemas.microsoft.com/office/drawing/2014/main" id="{892E39E0-9977-44A7-844D-49B907D47EA3}"/>
               </a:ext>
             </a:extLst>
           </p:cNvPr>
@@ -9279,7 +9279,7 @@
     </p:spTree>
     <p:extLst>
       <p:ext uri="{BB962C8B-B14F-4D97-AF65-F5344CB8AC3E}">
-        <p14:creationId xmlns:p14="http://schemas.microsoft.com/office/powerpoint/2010/main" val="1012824638"/>
+        <p14:creationId xmlns:p14="http://schemas.microsoft.com/office/powerpoint/2010/main" val="275728463"/>
       </p:ext>
     </p:extLst>
   </p:cSld>
@@ -9310,7 +9310,7 @@
           <p:cNvPr id="11" name="">
             <a:extLst xmlns:a="http://schemas.openxmlformats.org/drawingml/2006/main">
               <a:ext uri="{FF2B5EF4-FFF2-40B4-BE49-F238E27FC236}">
-                <a16:creationId xmlns:a16="http://schemas.microsoft.com/office/drawing/2014/main" id="{6D91DBC3-70DD-45FB-BCE9-AC98EB1A4FD2}"/>
+                <a16:creationId xmlns:a16="http://schemas.microsoft.com/office/drawing/2014/main" id="{14E004C7-C6E1-4BD6-9BCA-F55709412F03}"/>
               </a:ext>
             </a:extLst>
           </p:cNvPr>
@@ -9378,7 +9378,7 @@
           <p:cNvPr id="2" name="">
             <a:extLst xmlns:a="http://schemas.openxmlformats.org/drawingml/2006/main">
               <a:ext uri="{FF2B5EF4-FFF2-40B4-BE49-F238E27FC236}">
-                <a16:creationId xmlns:a16="http://schemas.microsoft.com/office/drawing/2014/main" id="{66B622D6-7B65-4B56-846E-BC495CB377CB}"/>
+                <a16:creationId xmlns:a16="http://schemas.microsoft.com/office/drawing/2014/main" id="{E9BEA06B-D55C-4A00-BB7A-B5213116A4F8}"/>
               </a:ext>
             </a:extLst>
           </p:cNvPr>
@@ -9446,7 +9446,7 @@
           <p:cNvPr id="3" name="">
             <a:extLst xmlns:a="http://schemas.openxmlformats.org/drawingml/2006/main">
               <a:ext uri="{FF2B5EF4-FFF2-40B4-BE49-F238E27FC236}">
-                <a16:creationId xmlns:a16="http://schemas.microsoft.com/office/drawing/2014/main" id="{F8570920-3805-4AD8-A614-5E1B6C1061E1}"/>
+                <a16:creationId xmlns:a16="http://schemas.microsoft.com/office/drawing/2014/main" id="{5DAA0EDF-1A5E-4F0C-A552-E1200001E84B}"/>
               </a:ext>
             </a:extLst>
           </p:cNvPr>
@@ -9476,7 +9476,7 @@
           <p:cNvPr id="4" name="">
             <a:extLst xmlns:a="http://schemas.openxmlformats.org/drawingml/2006/main">
               <a:ext uri="{FF2B5EF4-FFF2-40B4-BE49-F238E27FC236}">
-                <a16:creationId xmlns:a16="http://schemas.microsoft.com/office/drawing/2014/main" id="{33ECA283-7AFF-40EB-9ECF-2FE06D45B665}"/>
+                <a16:creationId xmlns:a16="http://schemas.microsoft.com/office/drawing/2014/main" id="{7A6E07AB-4AFB-4263-8AFD-97D080608AF9}"/>
               </a:ext>
             </a:extLst>
           </p:cNvPr>
@@ -9544,7 +9544,7 @@
           <p:cNvPr id="5" name="">
             <a:extLst xmlns:a="http://schemas.openxmlformats.org/drawingml/2006/main">
               <a:ext uri="{FF2B5EF4-FFF2-40B4-BE49-F238E27FC236}">
-                <a16:creationId xmlns:a16="http://schemas.microsoft.com/office/drawing/2014/main" id="{A48954D0-F98C-4EAC-826C-272FC162DFC1}"/>
+                <a16:creationId xmlns:a16="http://schemas.microsoft.com/office/drawing/2014/main" id="{1A1A0C1A-19EE-4EE3-BD0A-0CB0C9173709}"/>
               </a:ext>
             </a:extLst>
           </p:cNvPr>
@@ -9704,7 +9704,7 @@
           <p:cNvPr id="6" name="">
             <a:extLst xmlns:a="http://schemas.openxmlformats.org/drawingml/2006/main">
               <a:ext uri="{FF2B5EF4-FFF2-40B4-BE49-F238E27FC236}">
-                <a16:creationId xmlns:a16="http://schemas.microsoft.com/office/drawing/2014/main" id="{2D922D43-6C29-4B84-A89F-F1ADCDCB7603}"/>
+                <a16:creationId xmlns:a16="http://schemas.microsoft.com/office/drawing/2014/main" id="{37E2BE41-1A97-407D-8BCE-8FF27289E5D5}"/>
               </a:ext>
             </a:extLst>
           </p:cNvPr>
@@ -9734,7 +9734,7 @@
           <p:cNvPr id="7" name="">
             <a:extLst xmlns:a="http://schemas.openxmlformats.org/drawingml/2006/main">
               <a:ext uri="{FF2B5EF4-FFF2-40B4-BE49-F238E27FC236}">
-                <a16:creationId xmlns:a16="http://schemas.microsoft.com/office/drawing/2014/main" id="{C0CF020E-7E4D-4792-AEC8-DC9CF0FEA54E}"/>
+                <a16:creationId xmlns:a16="http://schemas.microsoft.com/office/drawing/2014/main" id="{E68D699B-FFBF-4B98-8A63-F69952398C89}"/>
               </a:ext>
             </a:extLst>
           </p:cNvPr>
@@ -9802,7 +9802,7 @@
           <p:cNvPr id="8" name="">
             <a:extLst xmlns:a="http://schemas.openxmlformats.org/drawingml/2006/main">
               <a:ext uri="{FF2B5EF4-FFF2-40B4-BE49-F238E27FC236}">
-                <a16:creationId xmlns:a16="http://schemas.microsoft.com/office/drawing/2014/main" id="{DE4C9B48-39E8-4779-9661-1410F751C791}"/>
+                <a16:creationId xmlns:a16="http://schemas.microsoft.com/office/drawing/2014/main" id="{E0FBA711-1AB7-4525-8C13-CAE2FD7090A0}"/>
               </a:ext>
             </a:extLst>
           </p:cNvPr>
@@ -9962,7 +9962,7 @@
           <p:cNvPr id="9" name="">
             <a:extLst xmlns:a="http://schemas.openxmlformats.org/drawingml/2006/main">
               <a:ext uri="{FF2B5EF4-FFF2-40B4-BE49-F238E27FC236}">
-                <a16:creationId xmlns:a16="http://schemas.microsoft.com/office/drawing/2014/main" id="{1E5FD6B3-4CB6-4B2C-8988-3924317E7CAB}"/>
+                <a16:creationId xmlns:a16="http://schemas.microsoft.com/office/drawing/2014/main" id="{E5627766-1237-443B-8B59-6C1FCBD5AD28}"/>
               </a:ext>
             </a:extLst>
           </p:cNvPr>
@@ -10030,7 +10030,7 @@
           <p:cNvPr id="10" name="">
             <a:extLst xmlns:a="http://schemas.openxmlformats.org/drawingml/2006/main">
               <a:ext uri="{FF2B5EF4-FFF2-40B4-BE49-F238E27FC236}">
-                <a16:creationId xmlns:a16="http://schemas.microsoft.com/office/drawing/2014/main" id="{CA0DE3B4-DB18-4FAF-BB8A-5BB8894744C0}"/>
+                <a16:creationId xmlns:a16="http://schemas.microsoft.com/office/drawing/2014/main" id="{6CCFD999-051C-4A10-9EB2-D55006D3C819}"/>
               </a:ext>
             </a:extLst>
           </p:cNvPr>
@@ -10096,7 +10096,7 @@
     </p:spTree>
     <p:extLst>
       <p:ext uri="{BB962C8B-B14F-4D97-AF65-F5344CB8AC3E}">
-        <p14:creationId xmlns:p14="http://schemas.microsoft.com/office/powerpoint/2010/main" val="146394642"/>
+        <p14:creationId xmlns:p14="http://schemas.microsoft.com/office/powerpoint/2010/main" val="2115651475"/>
       </p:ext>
     </p:extLst>
   </p:cSld>
@@ -10127,7 +10127,7 @@
           <p:cNvPr id="11" name="">
             <a:extLst xmlns:a="http://schemas.openxmlformats.org/drawingml/2006/main">
               <a:ext uri="{FF2B5EF4-FFF2-40B4-BE49-F238E27FC236}">
-                <a16:creationId xmlns:a16="http://schemas.microsoft.com/office/drawing/2014/main" id="{480108A2-7549-4524-AFF7-A9A6E7B6655B}"/>
+                <a16:creationId xmlns:a16="http://schemas.microsoft.com/office/drawing/2014/main" id="{F62434EC-19DE-4D6A-AB3A-B19B1BD2DC0F}"/>
               </a:ext>
             </a:extLst>
           </p:cNvPr>
@@ -10195,7 +10195,7 @@
           <p:cNvPr id="2" name="">
             <a:extLst xmlns:a="http://schemas.openxmlformats.org/drawingml/2006/main">
               <a:ext uri="{FF2B5EF4-FFF2-40B4-BE49-F238E27FC236}">
-                <a16:creationId xmlns:a16="http://schemas.microsoft.com/office/drawing/2014/main" id="{698EB9C9-C471-4F33-A1DC-AE9DB1520AE6}"/>
+                <a16:creationId xmlns:a16="http://schemas.microsoft.com/office/drawing/2014/main" id="{C7CD4669-F803-4046-B6EB-814E74DE17B4}"/>
               </a:ext>
             </a:extLst>
           </p:cNvPr>
@@ -10263,7 +10263,7 @@
           <p:cNvPr id="3" name="">
             <a:extLst xmlns:a="http://schemas.openxmlformats.org/drawingml/2006/main">
               <a:ext uri="{FF2B5EF4-FFF2-40B4-BE49-F238E27FC236}">
-                <a16:creationId xmlns:a16="http://schemas.microsoft.com/office/drawing/2014/main" id="{B8C2AFC0-E7E2-43CF-82C5-BC06D00B4933}"/>
+                <a16:creationId xmlns:a16="http://schemas.microsoft.com/office/drawing/2014/main" id="{4B56667A-9038-4A0B-AD7F-2B1DB9C44175}"/>
               </a:ext>
             </a:extLst>
           </p:cNvPr>
@@ -10293,7 +10293,7 @@
           <p:cNvPr id="4" name="">
             <a:extLst xmlns:a="http://schemas.openxmlformats.org/drawingml/2006/main">
               <a:ext uri="{FF2B5EF4-FFF2-40B4-BE49-F238E27FC236}">
-                <a16:creationId xmlns:a16="http://schemas.microsoft.com/office/drawing/2014/main" id="{DFC190D2-5FCE-4557-A51C-11399A2DE072}"/>
+                <a16:creationId xmlns:a16="http://schemas.microsoft.com/office/drawing/2014/main" id="{88890DB3-F300-404C-8BDE-0835AB951771}"/>
               </a:ext>
             </a:extLst>
           </p:cNvPr>
@@ -10361,7 +10361,7 @@
           <p:cNvPr id="5" name="">
             <a:extLst xmlns:a="http://schemas.openxmlformats.org/drawingml/2006/main">
               <a:ext uri="{FF2B5EF4-FFF2-40B4-BE49-F238E27FC236}">
-                <a16:creationId xmlns:a16="http://schemas.microsoft.com/office/drawing/2014/main" id="{5D98D46A-C831-4456-AB42-B7A411BC6F66}"/>
+                <a16:creationId xmlns:a16="http://schemas.microsoft.com/office/drawing/2014/main" id="{E8008967-A486-4A1E-B234-964AF1E1EC2D}"/>
               </a:ext>
             </a:extLst>
           </p:cNvPr>
@@ -10452,7 +10452,7 @@
           <p:cNvPr id="6" name="">
             <a:extLst xmlns:a="http://schemas.openxmlformats.org/drawingml/2006/main">
               <a:ext uri="{FF2B5EF4-FFF2-40B4-BE49-F238E27FC236}">
-                <a16:creationId xmlns:a16="http://schemas.microsoft.com/office/drawing/2014/main" id="{2E98EC5C-4B3B-4F23-9E67-F1CD2BFA7C2A}"/>
+                <a16:creationId xmlns:a16="http://schemas.microsoft.com/office/drawing/2014/main" id="{DE1FE98F-6ED5-4843-ADC5-684446B07350}"/>
               </a:ext>
             </a:extLst>
           </p:cNvPr>
@@ -10482,7 +10482,7 @@
           <p:cNvPr id="7" name="">
             <a:extLst xmlns:a="http://schemas.openxmlformats.org/drawingml/2006/main">
               <a:ext uri="{FF2B5EF4-FFF2-40B4-BE49-F238E27FC236}">
-                <a16:creationId xmlns:a16="http://schemas.microsoft.com/office/drawing/2014/main" id="{7D934AD7-ACBD-4487-8D6E-2F46CCE2DB1A}"/>
+                <a16:creationId xmlns:a16="http://schemas.microsoft.com/office/drawing/2014/main" id="{4FBA10C6-9C2B-4E6E-B5DE-3A4FA01F2722}"/>
               </a:ext>
             </a:extLst>
           </p:cNvPr>
@@ -10550,7 +10550,7 @@
           <p:cNvPr id="8" name="">
             <a:extLst xmlns:a="http://schemas.openxmlformats.org/drawingml/2006/main">
               <a:ext uri="{FF2B5EF4-FFF2-40B4-BE49-F238E27FC236}">
-                <a16:creationId xmlns:a16="http://schemas.microsoft.com/office/drawing/2014/main" id="{B135813E-7B2E-4BB9-84C7-A293A04DE123}"/>
+                <a16:creationId xmlns:a16="http://schemas.microsoft.com/office/drawing/2014/main" id="{0354203E-E280-47F4-A7D1-41930245048A}"/>
               </a:ext>
             </a:extLst>
           </p:cNvPr>
@@ -10641,7 +10641,7 @@
           <p:cNvPr id="9" name="">
             <a:extLst xmlns:a="http://schemas.openxmlformats.org/drawingml/2006/main">
               <a:ext uri="{FF2B5EF4-FFF2-40B4-BE49-F238E27FC236}">
-                <a16:creationId xmlns:a16="http://schemas.microsoft.com/office/drawing/2014/main" id="{3817BD7F-11FB-46DF-ABBB-7E2DA8B28941}"/>
+                <a16:creationId xmlns:a16="http://schemas.microsoft.com/office/drawing/2014/main" id="{A0E806AB-2164-429B-9F32-4057998F2C72}"/>
               </a:ext>
             </a:extLst>
           </p:cNvPr>
@@ -10709,7 +10709,7 @@
           <p:cNvPr id="10" name="">
             <a:extLst xmlns:a="http://schemas.openxmlformats.org/drawingml/2006/main">
               <a:ext uri="{FF2B5EF4-FFF2-40B4-BE49-F238E27FC236}">
-                <a16:creationId xmlns:a16="http://schemas.microsoft.com/office/drawing/2014/main" id="{259A88A0-EF09-431F-9748-68D2EA2F8E3A}"/>
+                <a16:creationId xmlns:a16="http://schemas.microsoft.com/office/drawing/2014/main" id="{C62B9849-6BBE-4B2E-8AF3-FB699D0260AF}"/>
               </a:ext>
             </a:extLst>
           </p:cNvPr>
@@ -10775,7 +10775,7 @@
     </p:spTree>
     <p:extLst>
       <p:ext uri="{BB962C8B-B14F-4D97-AF65-F5344CB8AC3E}">
-        <p14:creationId xmlns:p14="http://schemas.microsoft.com/office/powerpoint/2010/main" val="2085656208"/>
+        <p14:creationId xmlns:p14="http://schemas.microsoft.com/office/powerpoint/2010/main" val="825767614"/>
       </p:ext>
     </p:extLst>
   </p:cSld>
@@ -10806,19 +10806,19 @@
           <p:cNvPr id="7" name="">
             <a:extLst xmlns:a="http://schemas.openxmlformats.org/drawingml/2006/main">
               <a:ext uri="{FF2B5EF4-FFF2-40B4-BE49-F238E27FC236}">
-                <a16:creationId xmlns:a16="http://schemas.microsoft.com/office/drawing/2014/main" id="{4837E0D5-B8BB-4876-8F42-CE56396E24EE}"/>
-              </a:ext>
-            </a:extLst>
-          </p:cNvPr>
-          <p:cNvSpPr>
-            <a:spLocks xmlns:a="http://schemas.openxmlformats.org/drawingml/2006/main" noGrp="1"/>
-          </p:cNvSpPr>
-          <p:nvPr/>
-        </p:nvSpPr>
-        <p:spPr>
-          <a:xfrm xmlns:a="http://schemas.openxmlformats.org/drawingml/2006/main">
-            <a:off x="914400" y="133350"/>
-            <a:ext cx="10363200" cy="152400"/>
+                <a16:creationId xmlns:a16="http://schemas.microsoft.com/office/drawing/2014/main" id="{2F2DDA7C-34D0-48F5-BD0E-5A0C67E967CF}"/>
+              </a:ext>
+            </a:extLst>
+          </p:cNvPr>
+          <p:cNvSpPr>
+            <a:spLocks xmlns:a="http://schemas.openxmlformats.org/drawingml/2006/main" noGrp="1"/>
+          </p:cNvSpPr>
+          <p:nvPr/>
+        </p:nvSpPr>
+        <p:spPr>
+          <a:xfrm xmlns:a="http://schemas.openxmlformats.org/drawingml/2006/main">
+            <a:off x="1828800" y="457200"/>
+            <a:ext cx="8534400" cy="171450"/>
           </a:xfrm>
           <a:prstGeom xmlns:a="http://schemas.openxmlformats.org/drawingml/2006/main" prst="rect">
             <a:avLst/>
@@ -10834,7 +10834,7 @@
           </a:bodyPr>
           <a:lstStyle xmlns:a="http://schemas.openxmlformats.org/drawingml/2006/main">
             <a:defPPr algn="l">
-              <a:defRPr sz="825" b="1">
+              <a:defRPr sz="900" b="1">
                 <a:solidFill>
                   <a:srgbClr val="9B7744"/>
                 </a:solidFill>
@@ -10846,7 +10846,7 @@
           </a:lstStyle>
           <a:p xmlns:a="http://schemas.openxmlformats.org/drawingml/2006/main">
             <a:pPr algn="l">
-              <a:defRPr sz="825" b="1">
+              <a:defRPr sz="900" b="1">
                 <a:solidFill>
                   <a:srgbClr val="9B7744"/>
                 </a:solidFill>
@@ -10856,7 +10856,7 @@
               </a:defRPr>
             </a:pPr>
             <a:r>
-              <a:rPr sz="825" b="1">
+              <a:rPr sz="900" b="1">
                 <a:solidFill>
                   <a:srgbClr val="9B7744"/>
                 </a:solidFill>
@@ -10874,19 +10874,19 @@
           <p:cNvPr id="2" name="">
             <a:extLst xmlns:a="http://schemas.openxmlformats.org/drawingml/2006/main">
               <a:ext uri="{FF2B5EF4-FFF2-40B4-BE49-F238E27FC236}">
-                <a16:creationId xmlns:a16="http://schemas.microsoft.com/office/drawing/2014/main" id="{ABB2C8B8-8AB4-487D-94D8-B44A3FE793A9}"/>
-              </a:ext>
-            </a:extLst>
-          </p:cNvPr>
-          <p:cNvSpPr>
-            <a:spLocks xmlns:a="http://schemas.openxmlformats.org/drawingml/2006/main" noGrp="1"/>
-          </p:cNvSpPr>
-          <p:nvPr/>
-        </p:nvSpPr>
-        <p:spPr>
-          <a:xfrm xmlns:a="http://schemas.openxmlformats.org/drawingml/2006/main">
-            <a:off x="914400" y="304800"/>
-            <a:ext cx="10363200" cy="381000"/>
+                <a16:creationId xmlns:a16="http://schemas.microsoft.com/office/drawing/2014/main" id="{D05EFA1F-34D2-44CB-B1BF-388071CB60E9}"/>
+              </a:ext>
+            </a:extLst>
+          </p:cNvPr>
+          <p:cNvSpPr>
+            <a:spLocks xmlns:a="http://schemas.openxmlformats.org/drawingml/2006/main" noGrp="1"/>
+          </p:cNvSpPr>
+          <p:nvPr/>
+        </p:nvSpPr>
+        <p:spPr>
+          <a:xfrm xmlns:a="http://schemas.openxmlformats.org/drawingml/2006/main">
+            <a:off x="1828800" y="723900"/>
+            <a:ext cx="8534400" cy="419100"/>
           </a:xfrm>
           <a:prstGeom xmlns:a="http://schemas.openxmlformats.org/drawingml/2006/main" prst="rect">
             <a:avLst/>
@@ -10902,7 +10902,7 @@
           </a:bodyPr>
           <a:lstStyle xmlns:a="http://schemas.openxmlformats.org/drawingml/2006/main">
             <a:defPPr algn="l">
-              <a:defRPr sz="2250" b="1">
+              <a:defRPr sz="2550" b="1">
                 <a:solidFill>
                   <a:srgbClr val="1B1D19"/>
                 </a:solidFill>
@@ -10914,7 +10914,7 @@
           </a:lstStyle>
           <a:p xmlns:a="http://schemas.openxmlformats.org/drawingml/2006/main">
             <a:pPr algn="l">
-              <a:defRPr sz="2250" b="1">
+              <a:defRPr sz="2550" b="1">
                 <a:solidFill>
                   <a:srgbClr val="1B1D19"/>
                 </a:solidFill>
@@ -10924,7 +10924,7 @@
               </a:defRPr>
             </a:pPr>
             <a:r>
-              <a:rPr sz="2250" b="1">
+              <a:rPr sz="2550" b="1">
                 <a:solidFill>
                   <a:srgbClr val="1B1D19"/>
                 </a:solidFill>
@@ -10942,19 +10942,19 @@
           <p:cNvPr id="3" name="">
             <a:extLst xmlns:a="http://schemas.openxmlformats.org/drawingml/2006/main">
               <a:ext uri="{FF2B5EF4-FFF2-40B4-BE49-F238E27FC236}">
-                <a16:creationId xmlns:a16="http://schemas.microsoft.com/office/drawing/2014/main" id="{55D1910B-8D13-496C-9DF2-6C29A628566D}"/>
-              </a:ext>
-            </a:extLst>
-          </p:cNvPr>
-          <p:cNvSpPr>
-            <a:spLocks xmlns:a="http://schemas.openxmlformats.org/drawingml/2006/main" noGrp="1"/>
-          </p:cNvSpPr>
-          <p:nvPr/>
-        </p:nvSpPr>
-        <p:spPr>
-          <a:xfrm xmlns:a="http://schemas.openxmlformats.org/drawingml/2006/main">
-            <a:off x="8039100" y="371475"/>
-            <a:ext cx="3238500" cy="266700"/>
+                <a16:creationId xmlns:a16="http://schemas.microsoft.com/office/drawing/2014/main" id="{C770D052-440D-4B96-AA54-5D56998571B8}"/>
+              </a:ext>
+            </a:extLst>
+          </p:cNvPr>
+          <p:cNvSpPr>
+            <a:spLocks xmlns:a="http://schemas.openxmlformats.org/drawingml/2006/main" noGrp="1"/>
+          </p:cNvSpPr>
+          <p:nvPr/>
+        </p:nvSpPr>
+        <p:spPr>
+          <a:xfrm xmlns:a="http://schemas.openxmlformats.org/drawingml/2006/main">
+            <a:off x="7410450" y="800100"/>
+            <a:ext cx="2952750" cy="266700"/>
           </a:xfrm>
           <a:prstGeom xmlns:a="http://schemas.openxmlformats.org/drawingml/2006/main" prst="rect">
             <a:avLst/>
@@ -11010,19 +11010,19 @@
           <p:cNvPr id="4" name="">
             <a:extLst xmlns:a="http://schemas.openxmlformats.org/drawingml/2006/main">
               <a:ext uri="{FF2B5EF4-FFF2-40B4-BE49-F238E27FC236}">
-                <a16:creationId xmlns:a16="http://schemas.microsoft.com/office/drawing/2014/main" id="{6FC27F45-32AF-4CE2-AD4B-6124173DBECF}"/>
-              </a:ext>
-            </a:extLst>
-          </p:cNvPr>
-          <p:cNvSpPr>
-            <a:spLocks xmlns:a="http://schemas.openxmlformats.org/drawingml/2006/main" noGrp="1"/>
-          </p:cNvSpPr>
-          <p:nvPr/>
-        </p:nvSpPr>
-        <p:spPr>
-          <a:xfrm xmlns:a="http://schemas.openxmlformats.org/drawingml/2006/main">
-            <a:off x="914400" y="723900"/>
-            <a:ext cx="10363200" cy="5829300"/>
+                <a16:creationId xmlns:a16="http://schemas.microsoft.com/office/drawing/2014/main" id="{B6407DEF-901D-45B7-B7A6-327DD30E3BED}"/>
+              </a:ext>
+            </a:extLst>
+          </p:cNvPr>
+          <p:cNvSpPr>
+            <a:spLocks xmlns:a="http://schemas.openxmlformats.org/drawingml/2006/main" noGrp="1"/>
+          </p:cNvSpPr>
+          <p:nvPr/>
+        </p:nvSpPr>
+        <p:spPr>
+          <a:xfrm xmlns:a="http://schemas.openxmlformats.org/drawingml/2006/main">
+            <a:off x="1828800" y="1333500"/>
+            <a:ext cx="8534400" cy="4800600"/>
           </a:xfrm>
           <a:prstGeom xmlns:a="http://schemas.openxmlformats.org/drawingml/2006/main" prst="rect">
             <a:avLst/>
@@ -11040,19 +11040,19 @@
           <p:cNvPr id="5" name="">
             <a:extLst xmlns:a="http://schemas.openxmlformats.org/drawingml/2006/main">
               <a:ext uri="{FF2B5EF4-FFF2-40B4-BE49-F238E27FC236}">
-                <a16:creationId xmlns:a16="http://schemas.microsoft.com/office/drawing/2014/main" id="{61C14C0D-0191-4F5F-B578-208910C2A4A1}"/>
-              </a:ext>
-            </a:extLst>
-          </p:cNvPr>
-          <p:cNvSpPr>
-            <a:spLocks xmlns:a="http://schemas.openxmlformats.org/drawingml/2006/main" noGrp="1"/>
-          </p:cNvSpPr>
-          <p:nvPr/>
-        </p:nvSpPr>
-        <p:spPr>
-          <a:xfrm xmlns:a="http://schemas.openxmlformats.org/drawingml/2006/main">
-            <a:off x="914400" y="6667500"/>
-            <a:ext cx="9525000" cy="152400"/>
+                <a16:creationId xmlns:a16="http://schemas.microsoft.com/office/drawing/2014/main" id="{DD19741D-EE05-4313-85B3-023F0B087C98}"/>
+              </a:ext>
+            </a:extLst>
+          </p:cNvPr>
+          <p:cNvSpPr>
+            <a:spLocks xmlns:a="http://schemas.openxmlformats.org/drawingml/2006/main" noGrp="1"/>
+          </p:cNvSpPr>
+          <p:nvPr/>
+        </p:nvSpPr>
+        <p:spPr>
+          <a:xfrm xmlns:a="http://schemas.openxmlformats.org/drawingml/2006/main">
+            <a:off x="1828800" y="6429375"/>
+            <a:ext cx="7620000" cy="190500"/>
           </a:xfrm>
           <a:prstGeom xmlns:a="http://schemas.openxmlformats.org/drawingml/2006/main" prst="rect">
             <a:avLst/>
@@ -11068,7 +11068,7 @@
           </a:bodyPr>
           <a:lstStyle xmlns:a="http://schemas.openxmlformats.org/drawingml/2006/main">
             <a:defPPr algn="l">
-              <a:defRPr sz="825" b="0">
+              <a:defRPr sz="900" b="0">
                 <a:solidFill>
                   <a:srgbClr val="858B7E"/>
                 </a:solidFill>
@@ -11080,7 +11080,7 @@
           </a:lstStyle>
           <a:p xmlns:a="http://schemas.openxmlformats.org/drawingml/2006/main">
             <a:pPr algn="l">
-              <a:defRPr sz="825" b="0">
+              <a:defRPr sz="900" b="0">
                 <a:solidFill>
                   <a:srgbClr val="858B7E"/>
                 </a:solidFill>
@@ -11090,7 +11090,7 @@
               </a:defRPr>
             </a:pPr>
             <a:r>
-              <a:rPr sz="825" b="0">
+              <a:rPr sz="900" b="0">
                 <a:solidFill>
                   <a:srgbClr val="858B7E"/>
                 </a:solidFill>
@@ -11108,19 +11108,19 @@
           <p:cNvPr id="6" name="">
             <a:extLst xmlns:a="http://schemas.openxmlformats.org/drawingml/2006/main">
               <a:ext uri="{FF2B5EF4-FFF2-40B4-BE49-F238E27FC236}">
-                <a16:creationId xmlns:a16="http://schemas.microsoft.com/office/drawing/2014/main" id="{AC33F3E4-8241-4FB4-A2BF-B543F0828B85}"/>
-              </a:ext>
-            </a:extLst>
-          </p:cNvPr>
-          <p:cNvSpPr>
-            <a:spLocks xmlns:a="http://schemas.openxmlformats.org/drawingml/2006/main" noGrp="1"/>
-          </p:cNvSpPr>
-          <p:nvPr/>
-        </p:nvSpPr>
-        <p:spPr>
-          <a:xfrm xmlns:a="http://schemas.openxmlformats.org/drawingml/2006/main">
-            <a:off x="11049000" y="6667500"/>
-            <a:ext cx="228600" cy="152400"/>
+                <a16:creationId xmlns:a16="http://schemas.microsoft.com/office/drawing/2014/main" id="{B6872958-A1BA-4EEB-B131-A94068731C2F}"/>
+              </a:ext>
+            </a:extLst>
+          </p:cNvPr>
+          <p:cNvSpPr>
+            <a:spLocks xmlns:a="http://schemas.openxmlformats.org/drawingml/2006/main" noGrp="1"/>
+          </p:cNvSpPr>
+          <p:nvPr/>
+        </p:nvSpPr>
+        <p:spPr>
+          <a:xfrm xmlns:a="http://schemas.openxmlformats.org/drawingml/2006/main">
+            <a:off x="10134600" y="6429375"/>
+            <a:ext cx="228600" cy="190500"/>
           </a:xfrm>
           <a:prstGeom xmlns:a="http://schemas.openxmlformats.org/drawingml/2006/main" prst="rect">
             <a:avLst/>
@@ -11136,7 +11136,7 @@
           </a:bodyPr>
           <a:lstStyle xmlns:a="http://schemas.openxmlformats.org/drawingml/2006/main">
             <a:defPPr algn="l">
-              <a:defRPr sz="825" b="0">
+              <a:defRPr sz="900" b="0">
                 <a:solidFill>
                   <a:srgbClr val="858B7E"/>
                 </a:solidFill>
@@ -11148,7 +11148,7 @@
           </a:lstStyle>
           <a:p xmlns:a="http://schemas.openxmlformats.org/drawingml/2006/main">
             <a:pPr algn="l">
-              <a:defRPr sz="825" b="0">
+              <a:defRPr sz="900" b="0">
                 <a:solidFill>
                   <a:srgbClr val="858B7E"/>
                 </a:solidFill>
@@ -11158,7 +11158,7 @@
               </a:defRPr>
             </a:pPr>
             <a:r>
-              <a:rPr sz="825" b="0">
+              <a:rPr sz="900" b="0">
                 <a:solidFill>
                   <a:srgbClr val="858B7E"/>
                 </a:solidFill>
@@ -11174,7 +11174,7 @@
     </p:spTree>
     <p:extLst>
       <p:ext uri="{BB962C8B-B14F-4D97-AF65-F5344CB8AC3E}">
-        <p14:creationId xmlns:p14="http://schemas.microsoft.com/office/powerpoint/2010/main" val="1335954805"/>
+        <p14:creationId xmlns:p14="http://schemas.microsoft.com/office/powerpoint/2010/main" val="1089519647"/>
       </p:ext>
     </p:extLst>
   </p:cSld>
@@ -11205,19 +11205,19 @@
           <p:cNvPr id="6" name="">
             <a:extLst xmlns:a="http://schemas.openxmlformats.org/drawingml/2006/main">
               <a:ext uri="{FF2B5EF4-FFF2-40B4-BE49-F238E27FC236}">
-                <a16:creationId xmlns:a16="http://schemas.microsoft.com/office/drawing/2014/main" id="{15E5453A-74CD-47C7-A5D9-A570EB39C765}"/>
-              </a:ext>
-            </a:extLst>
-          </p:cNvPr>
-          <p:cNvSpPr>
-            <a:spLocks xmlns:a="http://schemas.openxmlformats.org/drawingml/2006/main" noGrp="1"/>
-          </p:cNvSpPr>
-          <p:nvPr/>
-        </p:nvSpPr>
-        <p:spPr>
-          <a:xfrm xmlns:a="http://schemas.openxmlformats.org/drawingml/2006/main">
-            <a:off x="914400" y="133350"/>
-            <a:ext cx="10363200" cy="152400"/>
+                <a16:creationId xmlns:a16="http://schemas.microsoft.com/office/drawing/2014/main" id="{D2C2E6DC-5C34-4B41-BBF9-9A7526D22151}"/>
+              </a:ext>
+            </a:extLst>
+          </p:cNvPr>
+          <p:cNvSpPr>
+            <a:spLocks xmlns:a="http://schemas.openxmlformats.org/drawingml/2006/main" noGrp="1"/>
+          </p:cNvSpPr>
+          <p:nvPr/>
+        </p:nvSpPr>
+        <p:spPr>
+          <a:xfrm xmlns:a="http://schemas.openxmlformats.org/drawingml/2006/main">
+            <a:off x="1828800" y="457200"/>
+            <a:ext cx="8534400" cy="171450"/>
           </a:xfrm>
           <a:prstGeom xmlns:a="http://schemas.openxmlformats.org/drawingml/2006/main" prst="rect">
             <a:avLst/>
@@ -11233,7 +11233,7 @@
           </a:bodyPr>
           <a:lstStyle xmlns:a="http://schemas.openxmlformats.org/drawingml/2006/main">
             <a:defPPr algn="l">
-              <a:defRPr sz="825" b="1">
+              <a:defRPr sz="900" b="1">
                 <a:solidFill>
                   <a:srgbClr val="9B7744"/>
                 </a:solidFill>
@@ -11245,7 +11245,7 @@
           </a:lstStyle>
           <a:p xmlns:a="http://schemas.openxmlformats.org/drawingml/2006/main">
             <a:pPr algn="l">
-              <a:defRPr sz="825" b="1">
+              <a:defRPr sz="900" b="1">
                 <a:solidFill>
                   <a:srgbClr val="9B7744"/>
                 </a:solidFill>
@@ -11255,7 +11255,7 @@
               </a:defRPr>
             </a:pPr>
             <a:r>
-              <a:rPr sz="825" b="1">
+              <a:rPr sz="900" b="1">
                 <a:solidFill>
                   <a:srgbClr val="9B7744"/>
                 </a:solidFill>
@@ -11273,19 +11273,19 @@
           <p:cNvPr id="2" name="">
             <a:extLst xmlns:a="http://schemas.openxmlformats.org/drawingml/2006/main">
               <a:ext uri="{FF2B5EF4-FFF2-40B4-BE49-F238E27FC236}">
-                <a16:creationId xmlns:a16="http://schemas.microsoft.com/office/drawing/2014/main" id="{0C629D3C-F077-4085-9AF6-CCED921E85B2}"/>
-              </a:ext>
-            </a:extLst>
-          </p:cNvPr>
-          <p:cNvSpPr>
-            <a:spLocks xmlns:a="http://schemas.openxmlformats.org/drawingml/2006/main" noGrp="1"/>
-          </p:cNvSpPr>
-          <p:nvPr/>
-        </p:nvSpPr>
-        <p:spPr>
-          <a:xfrm xmlns:a="http://schemas.openxmlformats.org/drawingml/2006/main">
-            <a:off x="914400" y="304800"/>
-            <a:ext cx="10363200" cy="381000"/>
+                <a16:creationId xmlns:a16="http://schemas.microsoft.com/office/drawing/2014/main" id="{E0645EF8-1C29-4CE0-929E-B1BEECA0CB89}"/>
+              </a:ext>
+            </a:extLst>
+          </p:cNvPr>
+          <p:cNvSpPr>
+            <a:spLocks xmlns:a="http://schemas.openxmlformats.org/drawingml/2006/main" noGrp="1"/>
+          </p:cNvSpPr>
+          <p:nvPr/>
+        </p:nvSpPr>
+        <p:spPr>
+          <a:xfrm xmlns:a="http://schemas.openxmlformats.org/drawingml/2006/main">
+            <a:off x="1828800" y="723900"/>
+            <a:ext cx="8534400" cy="419100"/>
           </a:xfrm>
           <a:prstGeom xmlns:a="http://schemas.openxmlformats.org/drawingml/2006/main" prst="rect">
             <a:avLst/>
@@ -11301,7 +11301,7 @@
           </a:bodyPr>
           <a:lstStyle xmlns:a="http://schemas.openxmlformats.org/drawingml/2006/main">
             <a:defPPr algn="l">
-              <a:defRPr sz="2250" b="1">
+              <a:defRPr sz="2550" b="1">
                 <a:solidFill>
                   <a:srgbClr val="1B1D19"/>
                 </a:solidFill>
@@ -11313,7 +11313,7 @@
           </a:lstStyle>
           <a:p xmlns:a="http://schemas.openxmlformats.org/drawingml/2006/main">
             <a:pPr algn="l">
-              <a:defRPr sz="2250" b="1">
+              <a:defRPr sz="2550" b="1">
                 <a:solidFill>
                   <a:srgbClr val="1B1D19"/>
                 </a:solidFill>
@@ -11323,7 +11323,7 @@
               </a:defRPr>
             </a:pPr>
             <a:r>
-              <a:rPr sz="2250" b="1">
+              <a:rPr sz="2550" b="1">
                 <a:solidFill>
                   <a:srgbClr val="1B1D19"/>
                 </a:solidFill>
@@ -11341,19 +11341,19 @@
           <p:cNvPr id="3" name="">
             <a:extLst xmlns:a="http://schemas.openxmlformats.org/drawingml/2006/main">
               <a:ext uri="{FF2B5EF4-FFF2-40B4-BE49-F238E27FC236}">
-                <a16:creationId xmlns:a16="http://schemas.microsoft.com/office/drawing/2014/main" id="{1C835A2E-7974-4597-8652-AB10E2FD0840}"/>
-              </a:ext>
-            </a:extLst>
-          </p:cNvPr>
-          <p:cNvSpPr>
-            <a:spLocks xmlns:a="http://schemas.openxmlformats.org/drawingml/2006/main" noGrp="1"/>
-          </p:cNvSpPr>
-          <p:nvPr/>
-        </p:nvSpPr>
-        <p:spPr>
-          <a:xfrm xmlns:a="http://schemas.openxmlformats.org/drawingml/2006/main">
-            <a:off x="914400" y="723900"/>
-            <a:ext cx="10363200" cy="5829300"/>
+                <a16:creationId xmlns:a16="http://schemas.microsoft.com/office/drawing/2014/main" id="{C9C61C12-295B-45E6-8BA7-545739BCF4AB}"/>
+              </a:ext>
+            </a:extLst>
+          </p:cNvPr>
+          <p:cNvSpPr>
+            <a:spLocks xmlns:a="http://schemas.openxmlformats.org/drawingml/2006/main" noGrp="1"/>
+          </p:cNvSpPr>
+          <p:nvPr/>
+        </p:nvSpPr>
+        <p:spPr>
+          <a:xfrm xmlns:a="http://schemas.openxmlformats.org/drawingml/2006/main">
+            <a:off x="1828800" y="1333500"/>
+            <a:ext cx="8534400" cy="4800600"/>
           </a:xfrm>
           <a:prstGeom xmlns:a="http://schemas.openxmlformats.org/drawingml/2006/main" prst="rect">
             <a:avLst/>
@@ -11371,19 +11371,19 @@
           <p:cNvPr id="4" name="">
             <a:extLst xmlns:a="http://schemas.openxmlformats.org/drawingml/2006/main">
               <a:ext uri="{FF2B5EF4-FFF2-40B4-BE49-F238E27FC236}">
-                <a16:creationId xmlns:a16="http://schemas.microsoft.com/office/drawing/2014/main" id="{DC36C5BE-7D2A-4FD6-9F59-054D2A039D79}"/>
-              </a:ext>
-            </a:extLst>
-          </p:cNvPr>
-          <p:cNvSpPr>
-            <a:spLocks xmlns:a="http://schemas.openxmlformats.org/drawingml/2006/main" noGrp="1"/>
-          </p:cNvSpPr>
-          <p:nvPr/>
-        </p:nvSpPr>
-        <p:spPr>
-          <a:xfrm xmlns:a="http://schemas.openxmlformats.org/drawingml/2006/main">
-            <a:off x="914400" y="6667500"/>
-            <a:ext cx="9525000" cy="152400"/>
+                <a16:creationId xmlns:a16="http://schemas.microsoft.com/office/drawing/2014/main" id="{1DB46B4E-1899-4CE3-A433-0DD55D8B1082}"/>
+              </a:ext>
+            </a:extLst>
+          </p:cNvPr>
+          <p:cNvSpPr>
+            <a:spLocks xmlns:a="http://schemas.openxmlformats.org/drawingml/2006/main" noGrp="1"/>
+          </p:cNvSpPr>
+          <p:nvPr/>
+        </p:nvSpPr>
+        <p:spPr>
+          <a:xfrm xmlns:a="http://schemas.openxmlformats.org/drawingml/2006/main">
+            <a:off x="1828800" y="6429375"/>
+            <a:ext cx="7620000" cy="190500"/>
           </a:xfrm>
           <a:prstGeom xmlns:a="http://schemas.openxmlformats.org/drawingml/2006/main" prst="rect">
             <a:avLst/>
@@ -11399,7 +11399,7 @@
           </a:bodyPr>
           <a:lstStyle xmlns:a="http://schemas.openxmlformats.org/drawingml/2006/main">
             <a:defPPr algn="l">
-              <a:defRPr sz="825" b="0">
+              <a:defRPr sz="900" b="0">
                 <a:solidFill>
                   <a:srgbClr val="858B7E"/>
                 </a:solidFill>
@@ -11411,7 +11411,7 @@
           </a:lstStyle>
           <a:p xmlns:a="http://schemas.openxmlformats.org/drawingml/2006/main">
             <a:pPr algn="l">
-              <a:defRPr sz="825" b="0">
+              <a:defRPr sz="900" b="0">
                 <a:solidFill>
                   <a:srgbClr val="858B7E"/>
                 </a:solidFill>
@@ -11421,7 +11421,7 @@
               </a:defRPr>
             </a:pPr>
             <a:r>
-              <a:rPr sz="825" b="0">
+              <a:rPr sz="900" b="0">
                 <a:solidFill>
                   <a:srgbClr val="858B7E"/>
                 </a:solidFill>
@@ -11439,19 +11439,19 @@
           <p:cNvPr id="5" name="">
             <a:extLst xmlns:a="http://schemas.openxmlformats.org/drawingml/2006/main">
               <a:ext uri="{FF2B5EF4-FFF2-40B4-BE49-F238E27FC236}">
-                <a16:creationId xmlns:a16="http://schemas.microsoft.com/office/drawing/2014/main" id="{BCFFFD73-AB2E-4DA2-944E-9CE28C1275EE}"/>
-              </a:ext>
-            </a:extLst>
-          </p:cNvPr>
-          <p:cNvSpPr>
-            <a:spLocks xmlns:a="http://schemas.openxmlformats.org/drawingml/2006/main" noGrp="1"/>
-          </p:cNvSpPr>
-          <p:nvPr/>
-        </p:nvSpPr>
-        <p:spPr>
-          <a:xfrm xmlns:a="http://schemas.openxmlformats.org/drawingml/2006/main">
-            <a:off x="11049000" y="6667500"/>
-            <a:ext cx="228600" cy="152400"/>
+                <a16:creationId xmlns:a16="http://schemas.microsoft.com/office/drawing/2014/main" id="{F4EC7BEE-0AFC-4E0E-A4C2-97D5B6B49DD3}"/>
+              </a:ext>
+            </a:extLst>
+          </p:cNvPr>
+          <p:cNvSpPr>
+            <a:spLocks xmlns:a="http://schemas.openxmlformats.org/drawingml/2006/main" noGrp="1"/>
+          </p:cNvSpPr>
+          <p:nvPr/>
+        </p:nvSpPr>
+        <p:spPr>
+          <a:xfrm xmlns:a="http://schemas.openxmlformats.org/drawingml/2006/main">
+            <a:off x="10134600" y="6429375"/>
+            <a:ext cx="228600" cy="190500"/>
           </a:xfrm>
           <a:prstGeom xmlns:a="http://schemas.openxmlformats.org/drawingml/2006/main" prst="rect">
             <a:avLst/>
@@ -11467,7 +11467,7 @@
           </a:bodyPr>
           <a:lstStyle xmlns:a="http://schemas.openxmlformats.org/drawingml/2006/main">
             <a:defPPr algn="l">
-              <a:defRPr sz="825" b="0">
+              <a:defRPr sz="900" b="0">
                 <a:solidFill>
                   <a:srgbClr val="858B7E"/>
                 </a:solidFill>
@@ -11479,7 +11479,7 @@
           </a:lstStyle>
           <a:p xmlns:a="http://schemas.openxmlformats.org/drawingml/2006/main">
             <a:pPr algn="l">
-              <a:defRPr sz="825" b="0">
+              <a:defRPr sz="900" b="0">
                 <a:solidFill>
                   <a:srgbClr val="858B7E"/>
                 </a:solidFill>
@@ -11489,7 +11489,7 @@
               </a:defRPr>
             </a:pPr>
             <a:r>
-              <a:rPr sz="825" b="0">
+              <a:rPr sz="900" b="0">
                 <a:solidFill>
                   <a:srgbClr val="858B7E"/>
                 </a:solidFill>
@@ -11505,7 +11505,7 @@
     </p:spTree>
     <p:extLst>
       <p:ext uri="{BB962C8B-B14F-4D97-AF65-F5344CB8AC3E}">
-        <p14:creationId xmlns:p14="http://schemas.microsoft.com/office/powerpoint/2010/main" val="1374361539"/>
+        <p14:creationId xmlns:p14="http://schemas.microsoft.com/office/powerpoint/2010/main" val="39369703"/>
       </p:ext>
     </p:extLst>
   </p:cSld>
@@ -11536,19 +11536,19 @@
           <p:cNvPr id="6" name="">
             <a:extLst xmlns:a="http://schemas.openxmlformats.org/drawingml/2006/main">
               <a:ext uri="{FF2B5EF4-FFF2-40B4-BE49-F238E27FC236}">
-                <a16:creationId xmlns:a16="http://schemas.microsoft.com/office/drawing/2014/main" id="{C8BD1FF4-16E7-47E8-A9F5-3A3A7A711A50}"/>
-              </a:ext>
-            </a:extLst>
-          </p:cNvPr>
-          <p:cNvSpPr>
-            <a:spLocks xmlns:a="http://schemas.openxmlformats.org/drawingml/2006/main" noGrp="1"/>
-          </p:cNvSpPr>
-          <p:nvPr/>
-        </p:nvSpPr>
-        <p:spPr>
-          <a:xfrm xmlns:a="http://schemas.openxmlformats.org/drawingml/2006/main">
-            <a:off x="914400" y="133350"/>
-            <a:ext cx="10363200" cy="152400"/>
+                <a16:creationId xmlns:a16="http://schemas.microsoft.com/office/drawing/2014/main" id="{64BAE02E-3ABD-452E-B0C7-CB24C147240F}"/>
+              </a:ext>
+            </a:extLst>
+          </p:cNvPr>
+          <p:cNvSpPr>
+            <a:spLocks xmlns:a="http://schemas.openxmlformats.org/drawingml/2006/main" noGrp="1"/>
+          </p:cNvSpPr>
+          <p:nvPr/>
+        </p:nvSpPr>
+        <p:spPr>
+          <a:xfrm xmlns:a="http://schemas.openxmlformats.org/drawingml/2006/main">
+            <a:off x="1828800" y="457200"/>
+            <a:ext cx="8534400" cy="171450"/>
           </a:xfrm>
           <a:prstGeom xmlns:a="http://schemas.openxmlformats.org/drawingml/2006/main" prst="rect">
             <a:avLst/>
@@ -11564,7 +11564,7 @@
           </a:bodyPr>
           <a:lstStyle xmlns:a="http://schemas.openxmlformats.org/drawingml/2006/main">
             <a:defPPr algn="l">
-              <a:defRPr sz="825" b="1">
+              <a:defRPr sz="900" b="1">
                 <a:solidFill>
                   <a:srgbClr val="9B7744"/>
                 </a:solidFill>
@@ -11576,7 +11576,7 @@
           </a:lstStyle>
           <a:p xmlns:a="http://schemas.openxmlformats.org/drawingml/2006/main">
             <a:pPr algn="l">
-              <a:defRPr sz="825" b="1">
+              <a:defRPr sz="900" b="1">
                 <a:solidFill>
                   <a:srgbClr val="9B7744"/>
                 </a:solidFill>
@@ -11586,7 +11586,7 @@
               </a:defRPr>
             </a:pPr>
             <a:r>
-              <a:rPr sz="825" b="1">
+              <a:rPr sz="900" b="1">
                 <a:solidFill>
                   <a:srgbClr val="9B7744"/>
                 </a:solidFill>
@@ -11604,19 +11604,19 @@
           <p:cNvPr id="2" name="">
             <a:extLst xmlns:a="http://schemas.openxmlformats.org/drawingml/2006/main">
               <a:ext uri="{FF2B5EF4-FFF2-40B4-BE49-F238E27FC236}">
-                <a16:creationId xmlns:a16="http://schemas.microsoft.com/office/drawing/2014/main" id="{B116C21E-C437-46A1-B87D-D52C8C765964}"/>
-              </a:ext>
-            </a:extLst>
-          </p:cNvPr>
-          <p:cNvSpPr>
-            <a:spLocks xmlns:a="http://schemas.openxmlformats.org/drawingml/2006/main" noGrp="1"/>
-          </p:cNvSpPr>
-          <p:nvPr/>
-        </p:nvSpPr>
-        <p:spPr>
-          <a:xfrm xmlns:a="http://schemas.openxmlformats.org/drawingml/2006/main">
-            <a:off x="914400" y="304800"/>
-            <a:ext cx="10363200" cy="381000"/>
+                <a16:creationId xmlns:a16="http://schemas.microsoft.com/office/drawing/2014/main" id="{C3C70D2A-95EE-4839-B015-8CE59F1FBAEC}"/>
+              </a:ext>
+            </a:extLst>
+          </p:cNvPr>
+          <p:cNvSpPr>
+            <a:spLocks xmlns:a="http://schemas.openxmlformats.org/drawingml/2006/main" noGrp="1"/>
+          </p:cNvSpPr>
+          <p:nvPr/>
+        </p:nvSpPr>
+        <p:spPr>
+          <a:xfrm xmlns:a="http://schemas.openxmlformats.org/drawingml/2006/main">
+            <a:off x="1828800" y="723900"/>
+            <a:ext cx="8534400" cy="419100"/>
           </a:xfrm>
           <a:prstGeom xmlns:a="http://schemas.openxmlformats.org/drawingml/2006/main" prst="rect">
             <a:avLst/>
@@ -11632,7 +11632,7 @@
           </a:bodyPr>
           <a:lstStyle xmlns:a="http://schemas.openxmlformats.org/drawingml/2006/main">
             <a:defPPr algn="l">
-              <a:defRPr sz="2250" b="1">
+              <a:defRPr sz="2550" b="1">
                 <a:solidFill>
                   <a:srgbClr val="1B1D19"/>
                 </a:solidFill>
@@ -11644,7 +11644,7 @@
           </a:lstStyle>
           <a:p xmlns:a="http://schemas.openxmlformats.org/drawingml/2006/main">
             <a:pPr algn="l">
-              <a:defRPr sz="2250" b="1">
+              <a:defRPr sz="2550" b="1">
                 <a:solidFill>
                   <a:srgbClr val="1B1D19"/>
                 </a:solidFill>
@@ -11654,7 +11654,7 @@
               </a:defRPr>
             </a:pPr>
             <a:r>
-              <a:rPr sz="2250" b="1">
+              <a:rPr sz="2550" b="1">
                 <a:solidFill>
                   <a:srgbClr val="1B1D19"/>
                 </a:solidFill>
@@ -11672,19 +11672,19 @@
           <p:cNvPr id="3" name="">
             <a:extLst xmlns:a="http://schemas.openxmlformats.org/drawingml/2006/main">
               <a:ext uri="{FF2B5EF4-FFF2-40B4-BE49-F238E27FC236}">
-                <a16:creationId xmlns:a16="http://schemas.microsoft.com/office/drawing/2014/main" id="{058CF802-5BD1-40C2-AA19-87DFEBF933CC}"/>
-              </a:ext>
-            </a:extLst>
-          </p:cNvPr>
-          <p:cNvSpPr>
-            <a:spLocks xmlns:a="http://schemas.openxmlformats.org/drawingml/2006/main" noGrp="1"/>
-          </p:cNvSpPr>
-          <p:nvPr/>
-        </p:nvSpPr>
-        <p:spPr>
-          <a:xfrm xmlns:a="http://schemas.openxmlformats.org/drawingml/2006/main">
-            <a:off x="914400" y="723900"/>
-            <a:ext cx="10363200" cy="5829300"/>
+                <a16:creationId xmlns:a16="http://schemas.microsoft.com/office/drawing/2014/main" id="{29DE4336-45AD-4BC9-9BC3-F8B2F4924F3D}"/>
+              </a:ext>
+            </a:extLst>
+          </p:cNvPr>
+          <p:cNvSpPr>
+            <a:spLocks xmlns:a="http://schemas.openxmlformats.org/drawingml/2006/main" noGrp="1"/>
+          </p:cNvSpPr>
+          <p:nvPr/>
+        </p:nvSpPr>
+        <p:spPr>
+          <a:xfrm xmlns:a="http://schemas.openxmlformats.org/drawingml/2006/main">
+            <a:off x="1828800" y="1333500"/>
+            <a:ext cx="8534400" cy="4800600"/>
           </a:xfrm>
           <a:prstGeom xmlns:a="http://schemas.openxmlformats.org/drawingml/2006/main" prst="rect">
             <a:avLst/>
@@ -11702,19 +11702,19 @@
           <p:cNvPr id="4" name="">
             <a:extLst xmlns:a="http://schemas.openxmlformats.org/drawingml/2006/main">
               <a:ext uri="{FF2B5EF4-FFF2-40B4-BE49-F238E27FC236}">
-                <a16:creationId xmlns:a16="http://schemas.microsoft.com/office/drawing/2014/main" id="{3E623818-FD7C-478E-8CA3-82F2F6D73D9A}"/>
-              </a:ext>
-            </a:extLst>
-          </p:cNvPr>
-          <p:cNvSpPr>
-            <a:spLocks xmlns:a="http://schemas.openxmlformats.org/drawingml/2006/main" noGrp="1"/>
-          </p:cNvSpPr>
-          <p:nvPr/>
-        </p:nvSpPr>
-        <p:spPr>
-          <a:xfrm xmlns:a="http://schemas.openxmlformats.org/drawingml/2006/main">
-            <a:off x="914400" y="6667500"/>
-            <a:ext cx="9525000" cy="152400"/>
+                <a16:creationId xmlns:a16="http://schemas.microsoft.com/office/drawing/2014/main" id="{25B8FA47-E236-4D10-B2EA-D9E8C70B09DC}"/>
+              </a:ext>
+            </a:extLst>
+          </p:cNvPr>
+          <p:cNvSpPr>
+            <a:spLocks xmlns:a="http://schemas.openxmlformats.org/drawingml/2006/main" noGrp="1"/>
+          </p:cNvSpPr>
+          <p:nvPr/>
+        </p:nvSpPr>
+        <p:spPr>
+          <a:xfrm xmlns:a="http://schemas.openxmlformats.org/drawingml/2006/main">
+            <a:off x="1828800" y="6429375"/>
+            <a:ext cx="7620000" cy="190500"/>
           </a:xfrm>
           <a:prstGeom xmlns:a="http://schemas.openxmlformats.org/drawingml/2006/main" prst="rect">
             <a:avLst/>
@@ -11730,7 +11730,7 @@
           </a:bodyPr>
           <a:lstStyle xmlns:a="http://schemas.openxmlformats.org/drawingml/2006/main">
             <a:defPPr algn="l">
-              <a:defRPr sz="825" b="0">
+              <a:defRPr sz="900" b="0">
                 <a:solidFill>
                   <a:srgbClr val="858B7E"/>
                 </a:solidFill>
@@ -11742,7 +11742,7 @@
           </a:lstStyle>
           <a:p xmlns:a="http://schemas.openxmlformats.org/drawingml/2006/main">
             <a:pPr algn="l">
-              <a:defRPr sz="825" b="0">
+              <a:defRPr sz="900" b="0">
                 <a:solidFill>
                   <a:srgbClr val="858B7E"/>
                 </a:solidFill>
@@ -11752,7 +11752,7 @@
               </a:defRPr>
             </a:pPr>
             <a:r>
-              <a:rPr sz="825" b="0">
+              <a:rPr sz="900" b="0">
                 <a:solidFill>
                   <a:srgbClr val="858B7E"/>
                 </a:solidFill>
@@ -11770,19 +11770,19 @@
           <p:cNvPr id="5" name="">
             <a:extLst xmlns:a="http://schemas.openxmlformats.org/drawingml/2006/main">
               <a:ext uri="{FF2B5EF4-FFF2-40B4-BE49-F238E27FC236}">
-                <a16:creationId xmlns:a16="http://schemas.microsoft.com/office/drawing/2014/main" id="{41CBFFE8-9C63-4959-BE72-9A9DDEF23BC2}"/>
-              </a:ext>
-            </a:extLst>
-          </p:cNvPr>
-          <p:cNvSpPr>
-            <a:spLocks xmlns:a="http://schemas.openxmlformats.org/drawingml/2006/main" noGrp="1"/>
-          </p:cNvSpPr>
-          <p:nvPr/>
-        </p:nvSpPr>
-        <p:spPr>
-          <a:xfrm xmlns:a="http://schemas.openxmlformats.org/drawingml/2006/main">
-            <a:off x="11049000" y="6667500"/>
-            <a:ext cx="228600" cy="152400"/>
+                <a16:creationId xmlns:a16="http://schemas.microsoft.com/office/drawing/2014/main" id="{B2F8A071-05BC-4181-A71E-736D0B585E2F}"/>
+              </a:ext>
+            </a:extLst>
+          </p:cNvPr>
+          <p:cNvSpPr>
+            <a:spLocks xmlns:a="http://schemas.openxmlformats.org/drawingml/2006/main" noGrp="1"/>
+          </p:cNvSpPr>
+          <p:nvPr/>
+        </p:nvSpPr>
+        <p:spPr>
+          <a:xfrm xmlns:a="http://schemas.openxmlformats.org/drawingml/2006/main">
+            <a:off x="10134600" y="6429375"/>
+            <a:ext cx="228600" cy="190500"/>
           </a:xfrm>
           <a:prstGeom xmlns:a="http://schemas.openxmlformats.org/drawingml/2006/main" prst="rect">
             <a:avLst/>
@@ -11798,7 +11798,7 @@
           </a:bodyPr>
           <a:lstStyle xmlns:a="http://schemas.openxmlformats.org/drawingml/2006/main">
             <a:defPPr algn="l">
-              <a:defRPr sz="825" b="0">
+              <a:defRPr sz="900" b="0">
                 <a:solidFill>
                   <a:srgbClr val="858B7E"/>
                 </a:solidFill>
@@ -11810,7 +11810,7 @@
           </a:lstStyle>
           <a:p xmlns:a="http://schemas.openxmlformats.org/drawingml/2006/main">
             <a:pPr algn="l">
-              <a:defRPr sz="825" b="0">
+              <a:defRPr sz="900" b="0">
                 <a:solidFill>
                   <a:srgbClr val="858B7E"/>
                 </a:solidFill>
@@ -11820,7 +11820,7 @@
               </a:defRPr>
             </a:pPr>
             <a:r>
-              <a:rPr sz="825" b="0">
+              <a:rPr sz="900" b="0">
                 <a:solidFill>
                   <a:srgbClr val="858B7E"/>
                 </a:solidFill>
@@ -11836,7 +11836,7 @@
     </p:spTree>
     <p:extLst>
       <p:ext uri="{BB962C8B-B14F-4D97-AF65-F5344CB8AC3E}">
-        <p14:creationId xmlns:p14="http://schemas.microsoft.com/office/powerpoint/2010/main" val="1916071384"/>
+        <p14:creationId xmlns:p14="http://schemas.microsoft.com/office/powerpoint/2010/main" val="545203653"/>
       </p:ext>
     </p:extLst>
   </p:cSld>

--- a/downloads/highst-perioperative-webinar.pptx
+++ b/downloads/highst-perioperative-webinar.pptx
@@ -2,25 +2,25 @@
 <file path=ppt/presentation.xml><?xml version="1.0" encoding="utf-8"?>
 <p:presentation xmlns:p="http://schemas.openxmlformats.org/presentationml/2006/main">
   <p:sldMasterIdLst>
-    <p:sldMasterId xmlns:r="http://schemas.openxmlformats.org/officeDocument/2006/relationships" id="2147483648" r:id="R1e4b86797d624a58"/>
+    <p:sldMasterId xmlns:r="http://schemas.openxmlformats.org/officeDocument/2006/relationships" id="2147483648" r:id="Rf174e4b225cf4283"/>
   </p:sldMasterIdLst>
   <p:notesMasterIdLst>
-    <p:notesMasterId xmlns:r="http://schemas.openxmlformats.org/officeDocument/2006/relationships" r:id="Ra2ab7c1ce639433c"/>
+    <p:notesMasterId xmlns:r="http://schemas.openxmlformats.org/officeDocument/2006/relationships" r:id="R70bdac0a05a54c6c"/>
   </p:notesMasterIdLst>
   <p:sldIdLst>
-    <p:sldId xmlns:r="http://schemas.openxmlformats.org/officeDocument/2006/relationships" id="256" r:id="Rf5779f12b4bf4dd1"/>
-    <p:sldId xmlns:r="http://schemas.openxmlformats.org/officeDocument/2006/relationships" id="257" r:id="Rc8e44ee479844dff"/>
-    <p:sldId xmlns:r="http://schemas.openxmlformats.org/officeDocument/2006/relationships" id="258" r:id="Re05371eaadb245f4"/>
-    <p:sldId xmlns:r="http://schemas.openxmlformats.org/officeDocument/2006/relationships" id="259" r:id="R354e1223462e42c5"/>
-    <p:sldId xmlns:r="http://schemas.openxmlformats.org/officeDocument/2006/relationships" id="260" r:id="Rcb6e510a8f7e42e0"/>
-    <p:sldId xmlns:r="http://schemas.openxmlformats.org/officeDocument/2006/relationships" id="261" r:id="R18d9c8f53bb94cdd"/>
-    <p:sldId xmlns:r="http://schemas.openxmlformats.org/officeDocument/2006/relationships" id="262" r:id="R16881e609b6144b9"/>
-    <p:sldId xmlns:r="http://schemas.openxmlformats.org/officeDocument/2006/relationships" id="263" r:id="R1bd36b85784741f5"/>
-    <p:sldId xmlns:r="http://schemas.openxmlformats.org/officeDocument/2006/relationships" id="264" r:id="R2a3eaae7ab8b4d78"/>
-    <p:sldId xmlns:r="http://schemas.openxmlformats.org/officeDocument/2006/relationships" id="265" r:id="Rcffa18540e0e4d81"/>
-    <p:sldId xmlns:r="http://schemas.openxmlformats.org/officeDocument/2006/relationships" id="266" r:id="R87daa993a2704043"/>
-    <p:sldId xmlns:r="http://schemas.openxmlformats.org/officeDocument/2006/relationships" id="267" r:id="Rd84b121b5a704b7a"/>
-    <p:sldId xmlns:r="http://schemas.openxmlformats.org/officeDocument/2006/relationships" id="268" r:id="R669cbb7d9d814bb9"/>
+    <p:sldId xmlns:r="http://schemas.openxmlformats.org/officeDocument/2006/relationships" id="256" r:id="Rbe58da2b5b2d4067"/>
+    <p:sldId xmlns:r="http://schemas.openxmlformats.org/officeDocument/2006/relationships" id="257" r:id="Rafd89f7b87474059"/>
+    <p:sldId xmlns:r="http://schemas.openxmlformats.org/officeDocument/2006/relationships" id="258" r:id="R195a4354cd494fa9"/>
+    <p:sldId xmlns:r="http://schemas.openxmlformats.org/officeDocument/2006/relationships" id="259" r:id="Rcf15e413812e4434"/>
+    <p:sldId xmlns:r="http://schemas.openxmlformats.org/officeDocument/2006/relationships" id="260" r:id="Rd7289ae521a54173"/>
+    <p:sldId xmlns:r="http://schemas.openxmlformats.org/officeDocument/2006/relationships" id="261" r:id="Rf1dc2c0a987d4bcc"/>
+    <p:sldId xmlns:r="http://schemas.openxmlformats.org/officeDocument/2006/relationships" id="262" r:id="Ra0b5ffc5ab06461e"/>
+    <p:sldId xmlns:r="http://schemas.openxmlformats.org/officeDocument/2006/relationships" id="263" r:id="Raf84e70c01f34baf"/>
+    <p:sldId xmlns:r="http://schemas.openxmlformats.org/officeDocument/2006/relationships" id="264" r:id="R18dfae837995417d"/>
+    <p:sldId xmlns:r="http://schemas.openxmlformats.org/officeDocument/2006/relationships" id="265" r:id="R34bd665d9de04d03"/>
+    <p:sldId xmlns:r="http://schemas.openxmlformats.org/officeDocument/2006/relationships" id="266" r:id="R73d659385c174b99"/>
+    <p:sldId xmlns:r="http://schemas.openxmlformats.org/officeDocument/2006/relationships" id="267" r:id="R978007f9dc064b17"/>
+    <p:sldId xmlns:r="http://schemas.openxmlformats.org/officeDocument/2006/relationships" id="268" r:id="R3c096cac75f140a3"/>
   </p:sldIdLst>
   <p:sldSz cx="12192000" cy="6858000"/>
   <p:notesSz cx="6858000" cy="9144000"/>
@@ -454,6 +454,51 @@
           <a:lstStyle xmlns:a="http://schemas.openxmlformats.org/drawingml/2006/main"/>
           <a:p xmlns:a="http://schemas.openxmlformats.org/drawingml/2006/main">
             <a:r>
+              <a:t>English speaker cues</a:t>
+            </a:r>
+          </a:p>
+          <a:p xmlns:a="http://schemas.openxmlformats.org/drawingml/2006/main">
+            <a:r>
+              <a:t>1. Welcome: Thank you for joining us today.</a:t>
+            </a:r>
+          </a:p>
+          <a:p xmlns:a="http://schemas.openxmlformats.org/drawingml/2006/main">
+            <a:r>
+              <a:t>2. Introduction: Jinmo Koo / HIGHST Urology, Korea</a:t>
+            </a:r>
+          </a:p>
+          <a:p xmlns:a="http://schemas.openxmlformats.org/drawingml/2006/main">
+            <a:r>
+              <a:t>3. Topic: MegaDerm penile augmentation</a:t>
+            </a:r>
+          </a:p>
+          <a:p xmlns:a="http://schemas.openxmlformats.org/drawingml/2006/main">
+            <a:r>
+              <a:t>4. Today’s focus: Preoperative evaluation / surgical videos / complications / postoperative care</a:t>
+            </a:r>
+          </a:p>
+          <a:p xmlns:a="http://schemas.openxmlformats.org/drawingml/2006/main">
+            <a:r>
+              <a:t/>
+            </a:r>
+          </a:p>
+          <a:p xmlns:a="http://schemas.openxmlformats.org/drawingml/2006/main">
+            <a:r>
+              <a:t>Next: First, let me briefly introduce myself.</a:t>
+            </a:r>
+          </a:p>
+          <a:p xmlns:a="http://schemas.openxmlformats.org/drawingml/2006/main">
+            <a:r>
+              <a:t/>
+            </a:r>
+          </a:p>
+          <a:p xmlns:a="http://schemas.openxmlformats.org/drawingml/2006/main">
+            <a:r>
+              <a:t>Reference notes</a:t>
+            </a:r>
+          </a:p>
+          <a:p xmlns:a="http://schemas.openxmlformats.org/drawingml/2006/main">
+            <a:r>
               <a:t>Jinmo Koo, HIGHST Urology. Vietnam MegaDerm Webinar, 21 October 2026. Portrait supplied by HIGHST. Brand reference: https://www.highsturology.co.kr/v2/proud/doctor.php</a:t>
             </a:r>
           </a:p>
@@ -524,6 +569,51 @@
           <a:lstStyle xmlns:a="http://schemas.openxmlformats.org/drawingml/2006/main"/>
           <a:p xmlns:a="http://schemas.openxmlformats.org/drawingml/2006/main">
             <a:r>
+              <a:t>English speaker cues</a:t>
+            </a:r>
+          </a:p>
+          <a:p xmlns:a="http://schemas.openxmlformats.org/drawingml/2006/main">
+            <a:r>
+              <a:t>1. Case 5: Contour step-off correction</a:t>
+            </a:r>
+          </a:p>
+          <a:p xmlns:a="http://schemas.openxmlformats.org/drawingml/2006/main">
+            <a:r>
+              <a:t>2. Case introduction: Location of the contour concern</a:t>
+            </a:r>
+          </a:p>
+          <a:p xmlns:a="http://schemas.openxmlformats.org/drawingml/2006/main">
+            <a:r>
+              <a:t>3. Video walkthrough: Correction shown in the video</a:t>
+            </a:r>
+          </a:p>
+          <a:p xmlns:a="http://schemas.openxmlformats.org/drawingml/2006/main">
+            <a:r>
+              <a:t>4. Discussion: Main points from this case</a:t>
+            </a:r>
+          </a:p>
+          <a:p xmlns:a="http://schemas.openxmlformats.org/drawingml/2006/main">
+            <a:r>
+              <a:t/>
+            </a:r>
+          </a:p>
+          <a:p xmlns:a="http://schemas.openxmlformats.org/drawingml/2006/main">
+            <a:r>
+              <a:t>Next: After these cases, let’s review potential complications.</a:t>
+            </a:r>
+          </a:p>
+          <a:p xmlns:a="http://schemas.openxmlformats.org/drawingml/2006/main">
+            <a:r>
+              <a:t/>
+            </a:r>
+          </a:p>
+          <a:p xmlns:a="http://schemas.openxmlformats.org/drawingml/2006/main">
+            <a:r>
+              <a:t>Reference notes</a:t>
+            </a:r>
+          </a:p>
+          <a:p xmlns:a="http://schemas.openxmlformats.org/drawingml/2006/main">
+            <a:r>
               <a:t>Case 5: Contour Step-off Correction.</a:t>
             </a:r>
           </a:p>
@@ -594,6 +684,51 @@
           <a:lstStyle xmlns:a="http://schemas.openxmlformats.org/drawingml/2006/main"/>
           <a:p xmlns:a="http://schemas.openxmlformats.org/drawingml/2006/main">
             <a:r>
+              <a:t>English speaker cues</a:t>
+            </a:r>
+          </a:p>
+          <a:p xmlns:a="http://schemas.openxmlformats.org/drawingml/2006/main">
+            <a:r>
+              <a:t>1. Context: Published ADM literature / not HIGHST- or MegaDerm-specific outcome data</a:t>
+            </a:r>
+          </a:p>
+          <a:p xmlns:a="http://schemas.openxmlformats.org/drawingml/2006/main">
+            <a:r>
+              <a:t>2. Bleeding and swelling: Hematoma / foreskin edema</a:t>
+            </a:r>
+          </a:p>
+          <a:p xmlns:a="http://schemas.openxmlformats.org/drawingml/2006/main">
+            <a:r>
+              <a:t>3. Wound complications: Delayed healing / infection / skin necrosis</a:t>
+            </a:r>
+          </a:p>
+          <a:p xmlns:a="http://schemas.openxmlformats.org/drawingml/2006/main">
+            <a:r>
+              <a:t>4. Contour and discomfort: Graft contour irregularity / discomfort during erection</a:t>
+            </a:r>
+          </a:p>
+          <a:p xmlns:a="http://schemas.openxmlformats.org/drawingml/2006/main">
+            <a:r>
+              <a:t/>
+            </a:r>
+          </a:p>
+          <a:p xmlns:a="http://schemas.openxmlformats.org/drawingml/2006/main">
+            <a:r>
+              <a:t>Next: Finally, I’ll discuss postoperative care and dressing.</a:t>
+            </a:r>
+          </a:p>
+          <a:p xmlns:a="http://schemas.openxmlformats.org/drawingml/2006/main">
+            <a:r>
+              <a:t/>
+            </a:r>
+          </a:p>
+          <a:p xmlns:a="http://schemas.openxmlformats.org/drawingml/2006/main">
+            <a:r>
+              <a:t>Reference notes</a:t>
+            </a:r>
+          </a:p>
+          <a:p xmlns:a="http://schemas.openxmlformats.org/drawingml/2006/main">
+            <a:r>
               <a:t>These categories are reported in published ADM augmentation literature. They do not represent HIGHST or MegaDerm-specific outcome data. No incidence rates are extrapolated to HIGHST.</a:t>
             </a:r>
           </a:p>
@@ -679,6 +814,46 @@
           <a:lstStyle xmlns:a="http://schemas.openxmlformats.org/drawingml/2006/main"/>
           <a:p xmlns:a="http://schemas.openxmlformats.org/drawingml/2006/main">
             <a:r>
+              <a:t>English speaker cues</a:t>
+            </a:r>
+          </a:p>
+          <a:p xmlns:a="http://schemas.openxmlformats.org/drawingml/2006/main">
+            <a:r>
+              <a:t>1. Postoperative care: Main instructions to explain</a:t>
+            </a:r>
+          </a:p>
+          <a:p xmlns:a="http://schemas.openxmlformats.org/drawingml/2006/main">
+            <a:r>
+              <a:t>2. Dressing: Sequence shown in the video</a:t>
+            </a:r>
+          </a:p>
+          <a:p xmlns:a="http://schemas.openxmlformats.org/drawingml/2006/main">
+            <a:r>
+              <a:t>3. Follow-up: Points to discuss with the patient</a:t>
+            </a:r>
+          </a:p>
+          <a:p xmlns:a="http://schemas.openxmlformats.org/drawingml/2006/main">
+            <a:r>
+              <a:t/>
+            </a:r>
+          </a:p>
+          <a:p xmlns:a="http://schemas.openxmlformats.org/drawingml/2006/main">
+            <a:r>
+              <a:t>Next: Thank you for your attention. I’m happy to take your questions.</a:t>
+            </a:r>
+          </a:p>
+          <a:p xmlns:a="http://schemas.openxmlformats.org/drawingml/2006/main">
+            <a:r>
+              <a:t/>
+            </a:r>
+          </a:p>
+          <a:p xmlns:a="http://schemas.openxmlformats.org/drawingml/2006/main">
+            <a:r>
+              <a:t>Reference notes</a:t>
+            </a:r>
+          </a:p>
+          <a:p xmlns:a="http://schemas.openxmlformats.org/drawingml/2006/main">
+            <a:r>
               <a:t>Postoperative care and dressing technique.</a:t>
             </a:r>
           </a:p>
@@ -749,6 +924,41 @@
           <a:lstStyle xmlns:a="http://schemas.openxmlformats.org/drawingml/2006/main"/>
           <a:p xmlns:a="http://schemas.openxmlformats.org/drawingml/2006/main">
             <a:r>
+              <a:t>English speaker cues</a:t>
+            </a:r>
+          </a:p>
+          <a:p xmlns:a="http://schemas.openxmlformats.org/drawingml/2006/main">
+            <a:r>
+              <a:t>1. Thank you: Thank you for your time and attention.</a:t>
+            </a:r>
+          </a:p>
+          <a:p xmlns:a="http://schemas.openxmlformats.org/drawingml/2006/main">
+            <a:r>
+              <a:t>2. Questions: I’d be happy to discuss your questions.</a:t>
+            </a:r>
+          </a:p>
+          <a:p xmlns:a="http://schemas.openxmlformats.org/drawingml/2006/main">
+            <a:r>
+              <a:t>3. Clarify: Could you please repeat or clarify the question?</a:t>
+            </a:r>
+          </a:p>
+          <a:p xmlns:a="http://schemas.openxmlformats.org/drawingml/2006/main">
+            <a:r>
+              <a:t>4. Close: Thank you for the discussion.</a:t>
+            </a:r>
+          </a:p>
+          <a:p xmlns:a="http://schemas.openxmlformats.org/drawingml/2006/main">
+            <a:r>
+              <a:t/>
+            </a:r>
+          </a:p>
+          <a:p xmlns:a="http://schemas.openxmlformats.org/drawingml/2006/main">
+            <a:r>
+              <a:t>Reference notes</a:t>
+            </a:r>
+          </a:p>
+          <a:p xmlns:a="http://schemas.openxmlformats.org/drawingml/2006/main">
+            <a:r>
               <a:t>Thank you.</a:t>
             </a:r>
           </a:p>
@@ -819,6 +1029,61 @@
           <a:lstStyle xmlns:a="http://schemas.openxmlformats.org/drawingml/2006/main"/>
           <a:p xmlns:a="http://schemas.openxmlformats.org/drawingml/2006/main">
             <a:r>
+              <a:t>English speaker cues</a:t>
+            </a:r>
+          </a:p>
+          <a:p xmlns:a="http://schemas.openxmlformats.org/drawingml/2006/main">
+            <a:r>
+              <a:t>1. Education: Korea University College of Medicine</a:t>
+            </a:r>
+          </a:p>
+          <a:p xmlns:a="http://schemas.openxmlformats.org/drawingml/2006/main">
+            <a:r>
+              <a:t>2. Current role: Chief Director, HIGHST Urology</a:t>
+            </a:r>
+          </a:p>
+          <a:p xmlns:a="http://schemas.openxmlformats.org/drawingml/2006/main">
+            <a:r>
+              <a:t>3. Clinical background: Former Chief Director, PROUD Urology / adjunct professor, Ewha Mokdong Hospital</a:t>
+            </a:r>
+          </a:p>
+          <a:p xmlns:a="http://schemas.openxmlformats.org/drawingml/2006/main">
+            <a:r>
+              <a:t>4. Training: Erectile dysfunction training at UCI / international training and designated physician roles</a:t>
+            </a:r>
+          </a:p>
+          <a:p xmlns:a="http://schemas.openxmlformats.org/drawingml/2006/main">
+            <a:r>
+              <a:t>5. Recognition: 2024 Outstanding Presentation Award, Taiwan Andrology Association</a:t>
+            </a:r>
+          </a:p>
+          <a:p xmlns:a="http://schemas.openxmlformats.org/drawingml/2006/main">
+            <a:r>
+              <a:t>6. Professional societies: Korean Urological Association / ISSM / APSSM</a:t>
+            </a:r>
+          </a:p>
+          <a:p xmlns:a="http://schemas.openxmlformats.org/drawingml/2006/main">
+            <a:r>
+              <a:t/>
+            </a:r>
+          </a:p>
+          <a:p xmlns:a="http://schemas.openxmlformats.org/drawingml/2006/main">
+            <a:r>
+              <a:t>Next: Let’s begin with the materials: MegaDerm and MegaFill.</a:t>
+            </a:r>
+          </a:p>
+          <a:p xmlns:a="http://schemas.openxmlformats.org/drawingml/2006/main">
+            <a:r>
+              <a:t/>
+            </a:r>
+          </a:p>
+          <a:p xmlns:a="http://schemas.openxmlformats.org/drawingml/2006/main">
+            <a:r>
+              <a:t>Reference notes</a:t>
+            </a:r>
+          </a:p>
+          <a:p xmlns:a="http://schemas.openxmlformats.org/drawingml/2006/main">
+            <a:r>
               <a:t>Jinmo Koo, HIGHST Urology.</a:t>
             </a:r>
           </a:p>
@@ -1029,6 +1294,51 @@
           <a:lstStyle xmlns:a="http://schemas.openxmlformats.org/drawingml/2006/main"/>
           <a:p xmlns:a="http://schemas.openxmlformats.org/drawingml/2006/main">
             <a:r>
+              <a:t>English speaker cues</a:t>
+            </a:r>
+          </a:p>
+          <a:p xmlns:a="http://schemas.openxmlformats.org/drawingml/2006/main">
+            <a:r>
+              <a:t>1. MegaDerm: Sheet acellular dermal matrix</a:t>
+            </a:r>
+          </a:p>
+          <a:p xmlns:a="http://schemas.openxmlformats.org/drawingml/2006/main">
+            <a:r>
+              <a:t>2. Two types: Hydrated / freeze-dried</a:t>
+            </a:r>
+          </a:p>
+          <a:p xmlns:a="http://schemas.openxmlformats.org/drawingml/2006/main">
+            <a:r>
+              <a:t>3. Our stock: 3–5 mm thick / 5 × 6, 5 × 8, 5 × 10, 6 × 12 cm</a:t>
+            </a:r>
+          </a:p>
+          <a:p xmlns:a="http://schemas.openxmlformats.org/drawingml/2006/main">
+            <a:r>
+              <a:t>4. MegaFill: Micronized acellular dermal matrix</a:t>
+            </a:r>
+          </a:p>
+          <a:p xmlns:a="http://schemas.openxmlformats.org/drawingml/2006/main">
+            <a:r>
+              <a:t/>
+            </a:r>
+          </a:p>
+          <a:p xmlns:a="http://schemas.openxmlformats.org/drawingml/2006/main">
+            <a:r>
+              <a:t>Next: Next, I’ll go through our preoperative evaluation.</a:t>
+            </a:r>
+          </a:p>
+          <a:p xmlns:a="http://schemas.openxmlformats.org/drawingml/2006/main">
+            <a:r>
+              <a:t/>
+            </a:r>
+          </a:p>
+          <a:p xmlns:a="http://schemas.openxmlformats.org/drawingml/2006/main">
+            <a:r>
+              <a:t>Reference notes</a:t>
+            </a:r>
+          </a:p>
+          <a:p xmlns:a="http://schemas.openxmlformats.org/drawingml/2006/main">
+            <a:r>
               <a:t>MegaDerm is a sheet acellular dermal matrix. HIGHST stocks hydrated and freeze-dried types. The stated thickness and sizes describe HIGHST's inventory. MegaFill is a micronized form of acellular dermal matrix. The photograph is supplied by HIGHST. Individual packages are not assigned type labels.</a:t>
             </a:r>
           </a:p>
@@ -1114,7 +1424,132 @@
           <a:lstStyle xmlns:a="http://schemas.openxmlformats.org/drawingml/2006/main"/>
           <a:p xmlns:a="http://schemas.openxmlformats.org/drawingml/2006/main">
             <a:r>
-              <a:t>Preoperative assessment at HIGHST includes IIEF and PEDT questionnaires, the listed laboratory and infection tests, flaccid and stretched penile length measurement, and penile biothesiometry. HbA1c denotes glycated hemoglobin. Sources: https://pubmed.ncbi.nlm.nih.gov/9187685/ ; https://pubmed.ncbi.nlm.nih.gov/17568761/ ; https://www.niddk.nih.gov/health-information/diagnostic-tests/a1c-test/ ; https://pubmed.ncbi.nlm.nih.gov/28874780/</a:t>
+              <a:t>English speaker cues</a:t>
+            </a:r>
+          </a:p>
+          <a:p xmlns:a="http://schemas.openxmlformats.org/drawingml/2006/main">
+            <a:r>
+              <a:t>1. Questionnaires: IIEF: erectile function / PEDT: premature ejaculation</a:t>
+            </a:r>
+          </a:p>
+          <a:p xmlns:a="http://schemas.openxmlformats.org/drawingml/2006/main">
+            <a:r>
+              <a:t>2. Blood tests: Coagulation: PT/PTT / TTT: testosterone / CBC / PSA / blood glucose: BST/HbA1c</a:t>
+            </a:r>
+          </a:p>
+          <a:p xmlns:a="http://schemas.openxmlformats.org/drawingml/2006/main">
+            <a:r>
+              <a:t>3. Screening: HIV / syphilis / urine testing / liver enzymes: GOT/GPT/GGT / inflammatory markers</a:t>
+            </a:r>
+          </a:p>
+          <a:p xmlns:a="http://schemas.openxmlformats.org/drawingml/2006/main">
+            <a:r>
+              <a:t>4. Physical examination: Penile length: flaccid and stretched</a:t>
+            </a:r>
+          </a:p>
+          <a:p xmlns:a="http://schemas.openxmlformats.org/drawingml/2006/main">
+            <a:r>
+              <a:t>5. Sensitivity: Penile biothesiometry / vibration perception threshold</a:t>
+            </a:r>
+          </a:p>
+          <a:p xmlns:a="http://schemas.openxmlformats.org/drawingml/2006/main">
+            <a:r>
+              <a:t/>
+            </a:r>
+          </a:p>
+          <a:p xmlns:a="http://schemas.openxmlformats.org/drawingml/2006/main">
+            <a:r>
+              <a:t>Next: With the evaluation complete, let’s move on to surgical preparation.</a:t>
+            </a:r>
+          </a:p>
+          <a:p xmlns:a="http://schemas.openxmlformats.org/drawingml/2006/main">
+            <a:r>
+              <a:t/>
+            </a:r>
+          </a:p>
+          <a:p xmlns:a="http://schemas.openxmlformats.org/drawingml/2006/main">
+            <a:r>
+              <a:t>Reference notes</a:t>
+            </a:r>
+          </a:p>
+          <a:p xmlns:a="http://schemas.openxmlformats.org/drawingml/2006/main">
+            <a:r>
+              <a:t>Preoperative assessment at HIGHST includes IIEF and PEDT questionnaires, flaccid and stretched penile length measurement, and penile biothesiometry.</a:t>
+            </a:r>
+          </a:p>
+          <a:p xmlns:a="http://schemas.openxmlformats.org/drawingml/2006/main">
+            <a:r>
+              <a:t/>
+            </a:r>
+          </a:p>
+          <a:p xmlns:a="http://schemas.openxmlformats.org/drawingml/2006/main">
+            <a:r>
+              <a:t>Laboratory tests</a:t>
+            </a:r>
+          </a:p>
+          <a:p xmlns:a="http://schemas.openxmlformats.org/drawingml/2006/main">
+            <a:r>
+              <a:t>Blood coagulation tests (PT/PTT)</a:t>
+            </a:r>
+          </a:p>
+          <a:p xmlns:a="http://schemas.openxmlformats.org/drawingml/2006/main">
+            <a:r>
+              <a:t>TTT (testosterone)</a:t>
+            </a:r>
+          </a:p>
+          <a:p xmlns:a="http://schemas.openxmlformats.org/drawingml/2006/main">
+            <a:r>
+              <a:t>Complete blood count (CBC)</a:t>
+            </a:r>
+          </a:p>
+          <a:p xmlns:a="http://schemas.openxmlformats.org/drawingml/2006/main">
+            <a:r>
+              <a:t>Prostate-specific antigen (PSA)</a:t>
+            </a:r>
+          </a:p>
+          <a:p xmlns:a="http://schemas.openxmlformats.org/drawingml/2006/main">
+            <a:r>
+              <a:t>Blood glucose (BST/HbA1c)</a:t>
+            </a:r>
+          </a:p>
+          <a:p xmlns:a="http://schemas.openxmlformats.org/drawingml/2006/main">
+            <a:r>
+              <a:t>HIV testing</a:t>
+            </a:r>
+          </a:p>
+          <a:p xmlns:a="http://schemas.openxmlformats.org/drawingml/2006/main">
+            <a:r>
+              <a:t>Syphilis testing</a:t>
+            </a:r>
+          </a:p>
+          <a:p xmlns:a="http://schemas.openxmlformats.org/drawingml/2006/main">
+            <a:r>
+              <a:t>Urine testing</a:t>
+            </a:r>
+          </a:p>
+          <a:p xmlns:a="http://schemas.openxmlformats.org/drawingml/2006/main">
+            <a:r>
+              <a:t>Liver enzymes (GOT/GPT/GGT)</a:t>
+            </a:r>
+          </a:p>
+          <a:p xmlns:a="http://schemas.openxmlformats.org/drawingml/2006/main">
+            <a:r>
+              <a:t>Inflammatory markers</a:t>
+            </a:r>
+          </a:p>
+          <a:p xmlns:a="http://schemas.openxmlformats.org/drawingml/2006/main">
+            <a:r>
+              <a:t/>
+            </a:r>
+          </a:p>
+          <a:p xmlns:a="http://schemas.openxmlformats.org/drawingml/2006/main">
+            <a:r>
+              <a:t>HbA1c denotes glycated hemoglobin and appears under the blood glucose heading.</a:t>
+            </a:r>
+          </a:p>
+          <a:p xmlns:a="http://schemas.openxmlformats.org/drawingml/2006/main">
+            <a:r>
+              <a:t>Sources: https://pubmed.ncbi.nlm.nih.gov/9187685/ ; https://pubmed.ncbi.nlm.nih.gov/17568761/ ; https://www.niddk.nih.gov/health-information/diagnostic-tests/a1c-test/ ; https://pubmed.ncbi.nlm.nih.gov/28874780/</a:t>
             </a:r>
           </a:p>
         </p:txBody>
@@ -1184,6 +1619,46 @@
           <a:lstStyle xmlns:a="http://schemas.openxmlformats.org/drawingml/2006/main"/>
           <a:p xmlns:a="http://schemas.openxmlformats.org/drawingml/2006/main">
             <a:r>
+              <a:t>English speaker cues</a:t>
+            </a:r>
+          </a:p>
+          <a:p xmlns:a="http://schemas.openxmlformats.org/drawingml/2006/main">
+            <a:r>
+              <a:t>1. Preparation: Shaving and draping</a:t>
+            </a:r>
+          </a:p>
+          <a:p xmlns:a="http://schemas.openxmlformats.org/drawingml/2006/main">
+            <a:r>
+              <a:t>2. Shaving: Preparation area shown in the video</a:t>
+            </a:r>
+          </a:p>
+          <a:p xmlns:a="http://schemas.openxmlformats.org/drawingml/2006/main">
+            <a:r>
+              <a:t>3. Draping: Sequence shown in the video</a:t>
+            </a:r>
+          </a:p>
+          <a:p xmlns:a="http://schemas.openxmlformats.org/drawingml/2006/main">
+            <a:r>
+              <a:t/>
+            </a:r>
+          </a:p>
+          <a:p xmlns:a="http://schemas.openxmlformats.org/drawingml/2006/main">
+            <a:r>
+              <a:t>Next: Now, let’s look at the first case: a pubic incision.</a:t>
+            </a:r>
+          </a:p>
+          <a:p xmlns:a="http://schemas.openxmlformats.org/drawingml/2006/main">
+            <a:r>
+              <a:t/>
+            </a:r>
+          </a:p>
+          <a:p xmlns:a="http://schemas.openxmlformats.org/drawingml/2006/main">
+            <a:r>
+              <a:t>Reference notes</a:t>
+            </a:r>
+          </a:p>
+          <a:p xmlns:a="http://schemas.openxmlformats.org/drawingml/2006/main">
+            <a:r>
               <a:t>Shaving and draping.</a:t>
             </a:r>
           </a:p>
@@ -1254,6 +1729,51 @@
           <a:lstStyle xmlns:a="http://schemas.openxmlformats.org/drawingml/2006/main"/>
           <a:p xmlns:a="http://schemas.openxmlformats.org/drawingml/2006/main">
             <a:r>
+              <a:t>English speaker cues</a:t>
+            </a:r>
+          </a:p>
+          <a:p xmlns:a="http://schemas.openxmlformats.org/drawingml/2006/main">
+            <a:r>
+              <a:t>1. Case 1: Pubic incision</a:t>
+            </a:r>
+          </a:p>
+          <a:p xmlns:a="http://schemas.openxmlformats.org/drawingml/2006/main">
+            <a:r>
+              <a:t>2. Case introduction: Clinical background / choice of incision</a:t>
+            </a:r>
+          </a:p>
+          <a:p xmlns:a="http://schemas.openxmlformats.org/drawingml/2006/main">
+            <a:r>
+              <a:t>3. Video walkthrough: Incision / key operative stages</a:t>
+            </a:r>
+          </a:p>
+          <a:p xmlns:a="http://schemas.openxmlformats.org/drawingml/2006/main">
+            <a:r>
+              <a:t>4. Discussion: Main points from this case</a:t>
+            </a:r>
+          </a:p>
+          <a:p xmlns:a="http://schemas.openxmlformats.org/drawingml/2006/main">
+            <a:r>
+              <a:t/>
+            </a:r>
+          </a:p>
+          <a:p xmlns:a="http://schemas.openxmlformats.org/drawingml/2006/main">
+            <a:r>
+              <a:t>Next: The next case uses a circumcision-line incision.</a:t>
+            </a:r>
+          </a:p>
+          <a:p xmlns:a="http://schemas.openxmlformats.org/drawingml/2006/main">
+            <a:r>
+              <a:t/>
+            </a:r>
+          </a:p>
+          <a:p xmlns:a="http://schemas.openxmlformats.org/drawingml/2006/main">
+            <a:r>
+              <a:t>Reference notes</a:t>
+            </a:r>
+          </a:p>
+          <a:p xmlns:a="http://schemas.openxmlformats.org/drawingml/2006/main">
+            <a:r>
               <a:t>Case 1: Pubic Incision.</a:t>
             </a:r>
           </a:p>
@@ -1324,6 +1844,51 @@
           <a:lstStyle xmlns:a="http://schemas.openxmlformats.org/drawingml/2006/main"/>
           <a:p xmlns:a="http://schemas.openxmlformats.org/drawingml/2006/main">
             <a:r>
+              <a:t>English speaker cues</a:t>
+            </a:r>
+          </a:p>
+          <a:p xmlns:a="http://schemas.openxmlformats.org/drawingml/2006/main">
+            <a:r>
+              <a:t>1. Case 2: Circumcision-line incision</a:t>
+            </a:r>
+          </a:p>
+          <a:p xmlns:a="http://schemas.openxmlformats.org/drawingml/2006/main">
+            <a:r>
+              <a:t>2. Case introduction: Clinical background / choice of incision</a:t>
+            </a:r>
+          </a:p>
+          <a:p xmlns:a="http://schemas.openxmlformats.org/drawingml/2006/main">
+            <a:r>
+              <a:t>3. Video walkthrough: Incision / key operative stages</a:t>
+            </a:r>
+          </a:p>
+          <a:p xmlns:a="http://schemas.openxmlformats.org/drawingml/2006/main">
+            <a:r>
+              <a:t>4. Comparison: Points to compare with the pubic approach</a:t>
+            </a:r>
+          </a:p>
+          <a:p xmlns:a="http://schemas.openxmlformats.org/drawingml/2006/main">
+            <a:r>
+              <a:t/>
+            </a:r>
+          </a:p>
+          <a:p xmlns:a="http://schemas.openxmlformats.org/drawingml/2006/main">
+            <a:r>
+              <a:t>Next: Next, we’ll look at secondary dermal grafting.</a:t>
+            </a:r>
+          </a:p>
+          <a:p xmlns:a="http://schemas.openxmlformats.org/drawingml/2006/main">
+            <a:r>
+              <a:t/>
+            </a:r>
+          </a:p>
+          <a:p xmlns:a="http://schemas.openxmlformats.org/drawingml/2006/main">
+            <a:r>
+              <a:t>Reference notes</a:t>
+            </a:r>
+          </a:p>
+          <a:p xmlns:a="http://schemas.openxmlformats.org/drawingml/2006/main">
+            <a:r>
               <a:t>Case 2: Circumcision-line Incision.</a:t>
             </a:r>
           </a:p>
@@ -1394,6 +1959,51 @@
           <a:lstStyle xmlns:a="http://schemas.openxmlformats.org/drawingml/2006/main"/>
           <a:p xmlns:a="http://schemas.openxmlformats.org/drawingml/2006/main">
             <a:r>
+              <a:t>English speaker cues</a:t>
+            </a:r>
+          </a:p>
+          <a:p xmlns:a="http://schemas.openxmlformats.org/drawingml/2006/main">
+            <a:r>
+              <a:t>1. Case 3: Secondary dermal grafting</a:t>
+            </a:r>
+          </a:p>
+          <a:p xmlns:a="http://schemas.openxmlformats.org/drawingml/2006/main">
+            <a:r>
+              <a:t>2. Background: Previous procedure / reason for a second graft</a:t>
+            </a:r>
+          </a:p>
+          <a:p xmlns:a="http://schemas.openxmlformats.org/drawingml/2006/main">
+            <a:r>
+              <a:t>3. Video walkthrough: Key operative stages</a:t>
+            </a:r>
+          </a:p>
+          <a:p xmlns:a="http://schemas.openxmlformats.org/drawingml/2006/main">
+            <a:r>
+              <a:t>4. Discussion: Main considerations in this case</a:t>
+            </a:r>
+          </a:p>
+          <a:p xmlns:a="http://schemas.openxmlformats.org/drawingml/2006/main">
+            <a:r>
+              <a:t/>
+            </a:r>
+          </a:p>
+          <a:p xmlns:a="http://schemas.openxmlformats.org/drawingml/2006/main">
+            <a:r>
+              <a:t>Next: Let’s move on to the revision surgery case.</a:t>
+            </a:r>
+          </a:p>
+          <a:p xmlns:a="http://schemas.openxmlformats.org/drawingml/2006/main">
+            <a:r>
+              <a:t/>
+            </a:r>
+          </a:p>
+          <a:p xmlns:a="http://schemas.openxmlformats.org/drawingml/2006/main">
+            <a:r>
+              <a:t>Reference notes</a:t>
+            </a:r>
+          </a:p>
+          <a:p xmlns:a="http://schemas.openxmlformats.org/drawingml/2006/main">
+            <a:r>
               <a:t>Case 3: Secondary Dermal Grafting.</a:t>
             </a:r>
           </a:p>
@@ -1464,6 +2074,51 @@
           <a:lstStyle xmlns:a="http://schemas.openxmlformats.org/drawingml/2006/main"/>
           <a:p xmlns:a="http://schemas.openxmlformats.org/drawingml/2006/main">
             <a:r>
+              <a:t>English speaker cues</a:t>
+            </a:r>
+          </a:p>
+          <a:p xmlns:a="http://schemas.openxmlformats.org/drawingml/2006/main">
+            <a:r>
+              <a:t>1. Case 4: Revision surgery</a:t>
+            </a:r>
+          </a:p>
+          <a:p xmlns:a="http://schemas.openxmlformats.org/drawingml/2006/main">
+            <a:r>
+              <a:t>2. Background: Previous procedure / reason for revision</a:t>
+            </a:r>
+          </a:p>
+          <a:p xmlns:a="http://schemas.openxmlformats.org/drawingml/2006/main">
+            <a:r>
+              <a:t>3. Video walkthrough: Operative findings / key stages</a:t>
+            </a:r>
+          </a:p>
+          <a:p xmlns:a="http://schemas.openxmlformats.org/drawingml/2006/main">
+            <a:r>
+              <a:t>4. Discussion: Points to highlight in revision surgery</a:t>
+            </a:r>
+          </a:p>
+          <a:p xmlns:a="http://schemas.openxmlformats.org/drawingml/2006/main">
+            <a:r>
+              <a:t/>
+            </a:r>
+          </a:p>
+          <a:p xmlns:a="http://schemas.openxmlformats.org/drawingml/2006/main">
+            <a:r>
+              <a:t>Next: The final case focuses on contour step-off correction.</a:t>
+            </a:r>
+          </a:p>
+          <a:p xmlns:a="http://schemas.openxmlformats.org/drawingml/2006/main">
+            <a:r>
+              <a:t/>
+            </a:r>
+          </a:p>
+          <a:p xmlns:a="http://schemas.openxmlformats.org/drawingml/2006/main">
+            <a:r>
+              <a:t>Reference notes</a:t>
+            </a:r>
+          </a:p>
+          <a:p xmlns:a="http://schemas.openxmlformats.org/drawingml/2006/main">
+            <a:r>
               <a:t>Case 4: Revision Surgery.</a:t>
             </a:r>
           </a:p>
@@ -1511,7 +2166,7 @@
           <p:cNvPr id="3" name="Title">
             <a:extLst xmlns:a="http://schemas.openxmlformats.org/drawingml/2006/main">
               <a:ext uri="{FF2B5EF4-FFF2-40B4-BE49-F238E27FC236}">
-                <a16:creationId xmlns:a16="http://schemas.microsoft.com/office/drawing/2014/main" id="{BA6E44E8-36A2-48F6-92E2-2C97D5563E81}"/>
+                <a16:creationId xmlns:a16="http://schemas.microsoft.com/office/drawing/2014/main" id="{27C6096E-E675-4380-B15A-048DD894C14E}"/>
               </a:ext>
             </a:extLst>
           </p:cNvPr>
@@ -1668,7 +2323,7 @@
           <p:cNvPr id="2" name="Subtitle">
             <a:extLst xmlns:a="http://schemas.openxmlformats.org/drawingml/2006/main">
               <a:ext uri="{FF2B5EF4-FFF2-40B4-BE49-F238E27FC236}">
-                <a16:creationId xmlns:a16="http://schemas.microsoft.com/office/drawing/2014/main" id="{8377F09F-61C5-4117-B6FF-CAF930E61879}"/>
+                <a16:creationId xmlns:a16="http://schemas.microsoft.com/office/drawing/2014/main" id="{17D2D398-B998-4049-B67B-A1C56877972D}"/>
               </a:ext>
             </a:extLst>
           </p:cNvPr>
@@ -1842,7 +2497,7 @@
           <p:cNvPr id="2" name="Section title">
             <a:extLst xmlns:a="http://schemas.openxmlformats.org/drawingml/2006/main">
               <a:ext uri="{FF2B5EF4-FFF2-40B4-BE49-F238E27FC236}">
-                <a16:creationId xmlns:a16="http://schemas.microsoft.com/office/drawing/2014/main" id="{1B3A2E59-D483-4F2F-B85D-769B5E3D00DB}"/>
+                <a16:creationId xmlns:a16="http://schemas.microsoft.com/office/drawing/2014/main" id="{994B1434-F3C9-4B68-BFB4-FD8F4C17A42E}"/>
               </a:ext>
             </a:extLst>
           </p:cNvPr>
@@ -2016,7 +2671,7 @@
           <p:cNvPr id="3" name="Title">
             <a:extLst xmlns:a="http://schemas.openxmlformats.org/drawingml/2006/main">
               <a:ext uri="{FF2B5EF4-FFF2-40B4-BE49-F238E27FC236}">
-                <a16:creationId xmlns:a16="http://schemas.microsoft.com/office/drawing/2014/main" id="{97EC275D-06C9-430E-A7B4-06E8C22A702A}"/>
+                <a16:creationId xmlns:a16="http://schemas.microsoft.com/office/drawing/2014/main" id="{260B1DB4-5880-4901-AEB5-A0D182AE3E4B}"/>
               </a:ext>
             </a:extLst>
           </p:cNvPr>
@@ -2173,7 +2828,7 @@
           <p:cNvPr id="2" name="Body">
             <a:extLst xmlns:a="http://schemas.openxmlformats.org/drawingml/2006/main">
               <a:ext uri="{FF2B5EF4-FFF2-40B4-BE49-F238E27FC236}">
-                <a16:creationId xmlns:a16="http://schemas.microsoft.com/office/drawing/2014/main" id="{6A8556CA-28A7-4FBC-9532-D7C5527857B2}"/>
+                <a16:creationId xmlns:a16="http://schemas.microsoft.com/office/drawing/2014/main" id="{A700FADC-1DA2-4DC4-A14A-D41D2ECAAA08}"/>
               </a:ext>
             </a:extLst>
           </p:cNvPr>
@@ -2347,7 +3002,7 @@
           <p:cNvPr id="4" name="Title">
             <a:extLst xmlns:a="http://schemas.openxmlformats.org/drawingml/2006/main">
               <a:ext uri="{FF2B5EF4-FFF2-40B4-BE49-F238E27FC236}">
-                <a16:creationId xmlns:a16="http://schemas.microsoft.com/office/drawing/2014/main" id="{BF69A508-08B1-41F4-942C-B4784B007BA4}"/>
+                <a16:creationId xmlns:a16="http://schemas.microsoft.com/office/drawing/2014/main" id="{1D072A85-2F9A-46FB-8E94-C805E047E7FA}"/>
               </a:ext>
             </a:extLst>
           </p:cNvPr>
@@ -2504,7 +3159,7 @@
           <p:cNvPr id="2" name="Left column">
             <a:extLst xmlns:a="http://schemas.openxmlformats.org/drawingml/2006/main">
               <a:ext uri="{FF2B5EF4-FFF2-40B4-BE49-F238E27FC236}">
-                <a16:creationId xmlns:a16="http://schemas.microsoft.com/office/drawing/2014/main" id="{E85EF9FD-27EB-422A-8667-50F2D0DDF09C}"/>
+                <a16:creationId xmlns:a16="http://schemas.microsoft.com/office/drawing/2014/main" id="{86B9D404-A29F-4355-935F-DAD68C0FF903}"/>
               </a:ext>
             </a:extLst>
           </p:cNvPr>
@@ -2661,7 +3316,7 @@
           <p:cNvPr id="3" name="Right column">
             <a:extLst xmlns:a="http://schemas.openxmlformats.org/drawingml/2006/main">
               <a:ext uri="{FF2B5EF4-FFF2-40B4-BE49-F238E27FC236}">
-                <a16:creationId xmlns:a16="http://schemas.microsoft.com/office/drawing/2014/main" id="{C568216B-8AC9-410A-9ADA-52996E576049}"/>
+                <a16:creationId xmlns:a16="http://schemas.microsoft.com/office/drawing/2014/main" id="{416575E4-2548-43E1-BC38-C5B844EEA2A7}"/>
               </a:ext>
             </a:extLst>
           </p:cNvPr>
@@ -2835,7 +3490,7 @@
           <p:cNvPr id="3" name="Title">
             <a:extLst xmlns:a="http://schemas.openxmlformats.org/drawingml/2006/main">
               <a:ext uri="{FF2B5EF4-FFF2-40B4-BE49-F238E27FC236}">
-                <a16:creationId xmlns:a16="http://schemas.microsoft.com/office/drawing/2014/main" id="{8FBB7E8F-CB9C-4629-9493-7F46CC3C682A}"/>
+                <a16:creationId xmlns:a16="http://schemas.microsoft.com/office/drawing/2014/main" id="{DC5FC2AC-46E1-47D9-BBB5-4D0FB235D22C}"/>
               </a:ext>
             </a:extLst>
           </p:cNvPr>
@@ -2992,7 +3647,7 @@
           <p:cNvPr id="2" name="Left column">
             <a:extLst xmlns:a="http://schemas.openxmlformats.org/drawingml/2006/main">
               <a:ext uri="{FF2B5EF4-FFF2-40B4-BE49-F238E27FC236}">
-                <a16:creationId xmlns:a16="http://schemas.microsoft.com/office/drawing/2014/main" id="{C3A317F4-05E1-4441-9077-6D8960B0D364}"/>
+                <a16:creationId xmlns:a16="http://schemas.microsoft.com/office/drawing/2014/main" id="{F6D3A1C0-EA1A-4D31-8D61-D46F6D32F187}"/>
               </a:ext>
             </a:extLst>
           </p:cNvPr>
@@ -3187,12 +3842,12 @@
   </p:cSld>
   <p:clrMap bg1="lt1" tx1="dk1" bg2="lt2" tx2="dk2" accent1="accent1" accent2="accent2" accent3="accent3" accent4="accent4" accent5="accent5" accent6="accent6" hlink="hlink" folHlink="folHlink"/>
   <p:sldLayoutIdLst>
-    <p:sldLayoutId xmlns:r="http://schemas.openxmlformats.org/officeDocument/2006/relationships" id="2147483649" r:id="Rc4724ac84be746b1"/>
-    <p:sldLayoutId xmlns:r="http://schemas.openxmlformats.org/officeDocument/2006/relationships" id="2147483650" r:id="Rb1eb53b8fd6f4483"/>
-    <p:sldLayoutId xmlns:r="http://schemas.openxmlformats.org/officeDocument/2006/relationships" id="2147483651" r:id="Re94d184f823f4d91"/>
-    <p:sldLayoutId xmlns:r="http://schemas.openxmlformats.org/officeDocument/2006/relationships" id="2147483652" r:id="Rfc070b71b8854a19"/>
-    <p:sldLayoutId xmlns:r="http://schemas.openxmlformats.org/officeDocument/2006/relationships" id="2147483653" r:id="Rc1c8252ac377411c"/>
-    <p:sldLayoutId xmlns:r="http://schemas.openxmlformats.org/officeDocument/2006/relationships" id="2147483654" r:id="Re0385a36e136425f"/>
+    <p:sldLayoutId xmlns:r="http://schemas.openxmlformats.org/officeDocument/2006/relationships" id="2147483649" r:id="Rd19d98a4e9574cd8"/>
+    <p:sldLayoutId xmlns:r="http://schemas.openxmlformats.org/officeDocument/2006/relationships" id="2147483650" r:id="Rd89c8810b2a84e08"/>
+    <p:sldLayoutId xmlns:r="http://schemas.openxmlformats.org/officeDocument/2006/relationships" id="2147483651" r:id="Re3a7eb4a41ae4188"/>
+    <p:sldLayoutId xmlns:r="http://schemas.openxmlformats.org/officeDocument/2006/relationships" id="2147483652" r:id="R6d7986affa2b4985"/>
+    <p:sldLayoutId xmlns:r="http://schemas.openxmlformats.org/officeDocument/2006/relationships" id="2147483653" r:id="Rcbab3b194cf04a45"/>
+    <p:sldLayoutId xmlns:r="http://schemas.openxmlformats.org/officeDocument/2006/relationships" id="2147483654" r:id="R1bb94d15d9b047cd"/>
   </p:sldLayoutIdLst>
   <p:txStyles>
     <p:titleStyle>
@@ -3743,7 +4398,7 @@
           <p:cNvPr id="10" name="">
             <a:extLst xmlns:a="http://schemas.openxmlformats.org/drawingml/2006/main">
               <a:ext uri="{FF2B5EF4-FFF2-40B4-BE49-F238E27FC236}">
-                <a16:creationId xmlns:a16="http://schemas.microsoft.com/office/drawing/2014/main" id="{A591CCF0-2539-48EC-B549-390411116881}"/>
+                <a16:creationId xmlns:a16="http://schemas.microsoft.com/office/drawing/2014/main" id="{9E47E1F0-1CD4-4D5D-9CBC-BB90E5818A61}"/>
               </a:ext>
             </a:extLst>
           </p:cNvPr>
@@ -3753,7 +4408,7 @@
           <p:nvPr/>
         </p:nvPicPr>
         <p:blipFill>
-          <a:blip xmlns:r="http://schemas.openxmlformats.org/officeDocument/2006/relationships" xmlns:a="http://schemas.openxmlformats.org/drawingml/2006/main" r:embed="R2a47e04123a042c6"/>
+          <a:blip xmlns:r="http://schemas.openxmlformats.org/officeDocument/2006/relationships" xmlns:a="http://schemas.openxmlformats.org/drawingml/2006/main" r:embed="Rcb30f71bcb7d405e"/>
           <a:stretch xmlns:a="http://schemas.openxmlformats.org/drawingml/2006/main"/>
         </p:blipFill>
         <p:spPr>
@@ -3771,7 +4426,7 @@
           <p:cNvPr id="2" name="">
             <a:extLst xmlns:a="http://schemas.openxmlformats.org/drawingml/2006/main">
               <a:ext uri="{FF2B5EF4-FFF2-40B4-BE49-F238E27FC236}">
-                <a16:creationId xmlns:a16="http://schemas.microsoft.com/office/drawing/2014/main" id="{41D26FB7-B807-4589-BB9A-3C89F554B5BE}"/>
+                <a16:creationId xmlns:a16="http://schemas.microsoft.com/office/drawing/2014/main" id="{11EB56E4-2F35-441F-A096-F3F3F30F9F36}"/>
               </a:ext>
             </a:extLst>
           </p:cNvPr>
@@ -3781,7 +4436,7 @@
           <p:nvPr/>
         </p:nvPicPr>
         <p:blipFill>
-          <a:blip xmlns:r="http://schemas.openxmlformats.org/officeDocument/2006/relationships" xmlns:a="http://schemas.openxmlformats.org/drawingml/2006/main" r:embed="R7d596187d54343c3"/>
+          <a:blip xmlns:r="http://schemas.openxmlformats.org/officeDocument/2006/relationships" xmlns:a="http://schemas.openxmlformats.org/drawingml/2006/main" r:embed="Rc6123dde08094660"/>
           <a:srcRect xmlns:a="http://schemas.openxmlformats.org/drawingml/2006/main" l="33753" t="0" r="33753" b="0"/>
           <a:stretch xmlns:a="http://schemas.openxmlformats.org/drawingml/2006/main">
             <a:fillRect l="0" t="0" r="0" b="0"/>
@@ -3802,7 +4457,7 @@
           <p:cNvPr id="3" name="">
             <a:extLst xmlns:a="http://schemas.openxmlformats.org/drawingml/2006/main">
               <a:ext uri="{FF2B5EF4-FFF2-40B4-BE49-F238E27FC236}">
-                <a16:creationId xmlns:a16="http://schemas.microsoft.com/office/drawing/2014/main" id="{FD499451-1EBE-44EE-A063-F19D15B18BF7}"/>
+                <a16:creationId xmlns:a16="http://schemas.microsoft.com/office/drawing/2014/main" id="{8EE0AC53-D362-4FEC-A254-0DB0D6897805}"/>
               </a:ext>
             </a:extLst>
           </p:cNvPr>
@@ -3870,7 +4525,7 @@
           <p:cNvPr id="4" name="">
             <a:extLst xmlns:a="http://schemas.openxmlformats.org/drawingml/2006/main">
               <a:ext uri="{FF2B5EF4-FFF2-40B4-BE49-F238E27FC236}">
-                <a16:creationId xmlns:a16="http://schemas.microsoft.com/office/drawing/2014/main" id="{E48F6B55-A3CE-46A1-9338-5D6766B51F48}"/>
+                <a16:creationId xmlns:a16="http://schemas.microsoft.com/office/drawing/2014/main" id="{28EBEFA5-8A15-4B5C-9D6B-9D9213F9C948}"/>
               </a:ext>
             </a:extLst>
           </p:cNvPr>
@@ -3938,7 +4593,7 @@
           <p:cNvPr id="5" name="">
             <a:extLst xmlns:a="http://schemas.openxmlformats.org/drawingml/2006/main">
               <a:ext uri="{FF2B5EF4-FFF2-40B4-BE49-F238E27FC236}">
-                <a16:creationId xmlns:a16="http://schemas.microsoft.com/office/drawing/2014/main" id="{11AEA38E-BE10-4125-9DDF-FB18401763AC}"/>
+                <a16:creationId xmlns:a16="http://schemas.microsoft.com/office/drawing/2014/main" id="{7D3D55EA-F3A9-4D9A-880C-F4102DBD5DC7}"/>
               </a:ext>
             </a:extLst>
           </p:cNvPr>
@@ -4006,7 +4661,7 @@
           <p:cNvPr id="6" name="">
             <a:extLst xmlns:a="http://schemas.openxmlformats.org/drawingml/2006/main">
               <a:ext uri="{FF2B5EF4-FFF2-40B4-BE49-F238E27FC236}">
-                <a16:creationId xmlns:a16="http://schemas.microsoft.com/office/drawing/2014/main" id="{8671C907-7001-4257-A167-1069279BA2E0}"/>
+                <a16:creationId xmlns:a16="http://schemas.microsoft.com/office/drawing/2014/main" id="{7B44CA6E-364A-4D94-8D09-04E7E04520A1}"/>
               </a:ext>
             </a:extLst>
           </p:cNvPr>
@@ -4074,7 +4729,7 @@
           <p:cNvPr id="7" name="">
             <a:extLst xmlns:a="http://schemas.openxmlformats.org/drawingml/2006/main">
               <a:ext uri="{FF2B5EF4-FFF2-40B4-BE49-F238E27FC236}">
-                <a16:creationId xmlns:a16="http://schemas.microsoft.com/office/drawing/2014/main" id="{2EB36733-837F-4304-85ED-D87D871A94C8}"/>
+                <a16:creationId xmlns:a16="http://schemas.microsoft.com/office/drawing/2014/main" id="{BF18D874-585A-4AF1-A337-0386EEA9B5FA}"/>
               </a:ext>
             </a:extLst>
           </p:cNvPr>
@@ -4142,7 +4797,7 @@
           <p:cNvPr id="8" name="">
             <a:extLst xmlns:a="http://schemas.openxmlformats.org/drawingml/2006/main">
               <a:ext uri="{FF2B5EF4-FFF2-40B4-BE49-F238E27FC236}">
-                <a16:creationId xmlns:a16="http://schemas.microsoft.com/office/drawing/2014/main" id="{767ED2A9-F42B-47A0-84E7-C52E6DC90345}"/>
+                <a16:creationId xmlns:a16="http://schemas.microsoft.com/office/drawing/2014/main" id="{2B93DB93-CD5C-4ED8-80BE-65DCD50DC6F2}"/>
               </a:ext>
             </a:extLst>
           </p:cNvPr>
@@ -4210,7 +4865,7 @@
           <p:cNvPr id="9" name="">
             <a:extLst xmlns:a="http://schemas.openxmlformats.org/drawingml/2006/main">
               <a:ext uri="{FF2B5EF4-FFF2-40B4-BE49-F238E27FC236}">
-                <a16:creationId xmlns:a16="http://schemas.microsoft.com/office/drawing/2014/main" id="{84F06D45-54D4-4D05-940C-D4540FF05B9C}"/>
+                <a16:creationId xmlns:a16="http://schemas.microsoft.com/office/drawing/2014/main" id="{C05F4DDB-91D3-4CA8-9903-C11AA20E1EAC}"/>
               </a:ext>
             </a:extLst>
           </p:cNvPr>
@@ -4276,7 +4931,7 @@
     </p:spTree>
     <p:extLst>
       <p:ext uri="{BB962C8B-B14F-4D97-AF65-F5344CB8AC3E}">
-        <p14:creationId xmlns:p14="http://schemas.microsoft.com/office/powerpoint/2010/main" val="194976157"/>
+        <p14:creationId xmlns:p14="http://schemas.microsoft.com/office/powerpoint/2010/main" val="1772130009"/>
       </p:ext>
     </p:extLst>
   </p:cSld>
@@ -4307,7 +4962,7 @@
           <p:cNvPr id="7" name="">
             <a:extLst xmlns:a="http://schemas.openxmlformats.org/drawingml/2006/main">
               <a:ext uri="{FF2B5EF4-FFF2-40B4-BE49-F238E27FC236}">
-                <a16:creationId xmlns:a16="http://schemas.microsoft.com/office/drawing/2014/main" id="{26CC8578-BE60-47F4-AEA0-46737A50AF15}"/>
+                <a16:creationId xmlns:a16="http://schemas.microsoft.com/office/drawing/2014/main" id="{CEB84374-0108-4269-BC3B-7146CF9A3259}"/>
               </a:ext>
             </a:extLst>
           </p:cNvPr>
@@ -4375,7 +5030,7 @@
           <p:cNvPr id="2" name="">
             <a:extLst xmlns:a="http://schemas.openxmlformats.org/drawingml/2006/main">
               <a:ext uri="{FF2B5EF4-FFF2-40B4-BE49-F238E27FC236}">
-                <a16:creationId xmlns:a16="http://schemas.microsoft.com/office/drawing/2014/main" id="{FDF9F4FA-198F-4D36-99AA-C7F859ECECC0}"/>
+                <a16:creationId xmlns:a16="http://schemas.microsoft.com/office/drawing/2014/main" id="{27A65675-A167-4367-85D7-AC6864AEBE73}"/>
               </a:ext>
             </a:extLst>
           </p:cNvPr>
@@ -4443,7 +5098,7 @@
           <p:cNvPr id="3" name="">
             <a:extLst xmlns:a="http://schemas.openxmlformats.org/drawingml/2006/main">
               <a:ext uri="{FF2B5EF4-FFF2-40B4-BE49-F238E27FC236}">
-                <a16:creationId xmlns:a16="http://schemas.microsoft.com/office/drawing/2014/main" id="{E3722FED-58C5-4CF9-9D75-C0E52A159F55}"/>
+                <a16:creationId xmlns:a16="http://schemas.microsoft.com/office/drawing/2014/main" id="{4CEA7D54-F4B9-4CA7-805D-B3EDAECF94D7}"/>
               </a:ext>
             </a:extLst>
           </p:cNvPr>
@@ -4453,7 +5108,7 @@
           <p:nvPr/>
         </p:nvPicPr>
         <p:blipFill>
-          <a:blip xmlns:r="http://schemas.openxmlformats.org/officeDocument/2006/relationships" xmlns:a="http://schemas.openxmlformats.org/drawingml/2006/main" r:embed="Rcdb83d08ba654c5f"/>
+          <a:blip xmlns:r="http://schemas.openxmlformats.org/officeDocument/2006/relationships" xmlns:a="http://schemas.openxmlformats.org/drawingml/2006/main" r:embed="Ra08f033cecff44b9"/>
           <a:stretch xmlns:a="http://schemas.openxmlformats.org/drawingml/2006/main"/>
         </p:blipFill>
         <p:spPr>
@@ -4471,7 +5126,7 @@
           <p:cNvPr id="4" name="">
             <a:extLst xmlns:a="http://schemas.openxmlformats.org/drawingml/2006/main">
               <a:ext uri="{FF2B5EF4-FFF2-40B4-BE49-F238E27FC236}">
-                <a16:creationId xmlns:a16="http://schemas.microsoft.com/office/drawing/2014/main" id="{7B75758C-78CE-4C36-A0A3-D8BBF900E3F2}"/>
+                <a16:creationId xmlns:a16="http://schemas.microsoft.com/office/drawing/2014/main" id="{1DB844E3-8995-447A-BB2E-78ABAE1A80F4}"/>
               </a:ext>
             </a:extLst>
           </p:cNvPr>
@@ -4501,7 +5156,7 @@
           <p:cNvPr id="5" name="">
             <a:extLst xmlns:a="http://schemas.openxmlformats.org/drawingml/2006/main">
               <a:ext uri="{FF2B5EF4-FFF2-40B4-BE49-F238E27FC236}">
-                <a16:creationId xmlns:a16="http://schemas.microsoft.com/office/drawing/2014/main" id="{7A062B07-BC86-4147-BA28-D47C5FAB428A}"/>
+                <a16:creationId xmlns:a16="http://schemas.microsoft.com/office/drawing/2014/main" id="{62D8CFD7-62F8-4E9F-BE50-C44F0EE619A5}"/>
               </a:ext>
             </a:extLst>
           </p:cNvPr>
@@ -4569,7 +5224,7 @@
           <p:cNvPr id="6" name="">
             <a:extLst xmlns:a="http://schemas.openxmlformats.org/drawingml/2006/main">
               <a:ext uri="{FF2B5EF4-FFF2-40B4-BE49-F238E27FC236}">
-                <a16:creationId xmlns:a16="http://schemas.microsoft.com/office/drawing/2014/main" id="{31D684FD-AEC7-4EE4-B93D-3C2BADE10F69}"/>
+                <a16:creationId xmlns:a16="http://schemas.microsoft.com/office/drawing/2014/main" id="{5AA004F3-9460-4B27-9664-CB39D1A5117D}"/>
               </a:ext>
             </a:extLst>
           </p:cNvPr>
@@ -4635,7 +5290,7 @@
     </p:spTree>
     <p:extLst>
       <p:ext uri="{BB962C8B-B14F-4D97-AF65-F5344CB8AC3E}">
-        <p14:creationId xmlns:p14="http://schemas.microsoft.com/office/powerpoint/2010/main" val="539547310"/>
+        <p14:creationId xmlns:p14="http://schemas.microsoft.com/office/powerpoint/2010/main" val="1983049174"/>
       </p:ext>
     </p:extLst>
   </p:cSld>
@@ -4666,7 +5321,7 @@
           <p:cNvPr id="15" name="">
             <a:extLst xmlns:a="http://schemas.openxmlformats.org/drawingml/2006/main">
               <a:ext uri="{FF2B5EF4-FFF2-40B4-BE49-F238E27FC236}">
-                <a16:creationId xmlns:a16="http://schemas.microsoft.com/office/drawing/2014/main" id="{E938EF6B-FE62-445D-AE07-6BBD213B7ED7}"/>
+                <a16:creationId xmlns:a16="http://schemas.microsoft.com/office/drawing/2014/main" id="{83825552-2A7F-4A93-9708-20354F35901C}"/>
               </a:ext>
             </a:extLst>
           </p:cNvPr>
@@ -4734,7 +5389,7 @@
           <p:cNvPr id="2" name="">
             <a:extLst xmlns:a="http://schemas.openxmlformats.org/drawingml/2006/main">
               <a:ext uri="{FF2B5EF4-FFF2-40B4-BE49-F238E27FC236}">
-                <a16:creationId xmlns:a16="http://schemas.microsoft.com/office/drawing/2014/main" id="{D599F160-A985-41CF-9F75-7E709AF682BB}"/>
+                <a16:creationId xmlns:a16="http://schemas.microsoft.com/office/drawing/2014/main" id="{F87BFEE2-2E36-47A9-A6DC-5AC77C56A7DC}"/>
               </a:ext>
             </a:extLst>
           </p:cNvPr>
@@ -4744,7 +5399,7 @@
           <p:nvPr/>
         </p:nvPicPr>
         <p:blipFill>
-          <a:blip xmlns:r="http://schemas.openxmlformats.org/officeDocument/2006/relationships" xmlns:a="http://schemas.openxmlformats.org/drawingml/2006/main" r:embed="R8624a900c7574ce9"/>
+          <a:blip xmlns:r="http://schemas.openxmlformats.org/officeDocument/2006/relationships" xmlns:a="http://schemas.openxmlformats.org/drawingml/2006/main" r:embed="Rfc687dbf8e9b4b20"/>
           <a:stretch xmlns:a="http://schemas.openxmlformats.org/drawingml/2006/main"/>
         </p:blipFill>
         <p:spPr>
@@ -4762,7 +5417,7 @@
           <p:cNvPr id="3" name="">
             <a:extLst xmlns:a="http://schemas.openxmlformats.org/drawingml/2006/main">
               <a:ext uri="{FF2B5EF4-FFF2-40B4-BE49-F238E27FC236}">
-                <a16:creationId xmlns:a16="http://schemas.microsoft.com/office/drawing/2014/main" id="{1D9F9C19-7850-4A53-94E9-9DF147D1BE60}"/>
+                <a16:creationId xmlns:a16="http://schemas.microsoft.com/office/drawing/2014/main" id="{BC1904BA-09CF-4EFC-80AE-E6084129F06B}"/>
               </a:ext>
             </a:extLst>
           </p:cNvPr>
@@ -4792,7 +5447,7 @@
           <p:cNvPr id="4" name="">
             <a:extLst xmlns:a="http://schemas.openxmlformats.org/drawingml/2006/main">
               <a:ext uri="{FF2B5EF4-FFF2-40B4-BE49-F238E27FC236}">
-                <a16:creationId xmlns:a16="http://schemas.microsoft.com/office/drawing/2014/main" id="{DCBE49D6-D68B-43C6-831D-6AFF98455B49}"/>
+                <a16:creationId xmlns:a16="http://schemas.microsoft.com/office/drawing/2014/main" id="{259ECCB0-1AB6-4A99-B400-8F0E96CAC20F}"/>
               </a:ext>
             </a:extLst>
           </p:cNvPr>
@@ -4860,7 +5515,7 @@
           <p:cNvPr id="5" name="">
             <a:extLst xmlns:a="http://schemas.openxmlformats.org/drawingml/2006/main">
               <a:ext uri="{FF2B5EF4-FFF2-40B4-BE49-F238E27FC236}">
-                <a16:creationId xmlns:a16="http://schemas.microsoft.com/office/drawing/2014/main" id="{C38A8C58-EEFD-4BEB-B5C0-2764DDDD405B}"/>
+                <a16:creationId xmlns:a16="http://schemas.microsoft.com/office/drawing/2014/main" id="{A0A979B5-68AA-4C8A-9180-D871AF608CD6}"/>
               </a:ext>
             </a:extLst>
           </p:cNvPr>
@@ -4928,7 +5583,7 @@
           <p:cNvPr id="6" name="">
             <a:extLst xmlns:a="http://schemas.openxmlformats.org/drawingml/2006/main">
               <a:ext uri="{FF2B5EF4-FFF2-40B4-BE49-F238E27FC236}">
-                <a16:creationId xmlns:a16="http://schemas.microsoft.com/office/drawing/2014/main" id="{4893B469-E634-4F73-B3FC-7BED0291DE8D}"/>
+                <a16:creationId xmlns:a16="http://schemas.microsoft.com/office/drawing/2014/main" id="{26A1F5DC-FBB7-43E5-A757-4834B85C08CE}"/>
               </a:ext>
             </a:extLst>
           </p:cNvPr>
@@ -4958,7 +5613,7 @@
           <p:cNvPr id="7" name="">
             <a:extLst xmlns:a="http://schemas.openxmlformats.org/drawingml/2006/main">
               <a:ext uri="{FF2B5EF4-FFF2-40B4-BE49-F238E27FC236}">
-                <a16:creationId xmlns:a16="http://schemas.microsoft.com/office/drawing/2014/main" id="{43E72C7B-002D-4A2B-856F-51634CFF38E4}"/>
+                <a16:creationId xmlns:a16="http://schemas.microsoft.com/office/drawing/2014/main" id="{B53A1577-AC64-4BD4-9F52-BFBF31855AA1}"/>
               </a:ext>
             </a:extLst>
           </p:cNvPr>
@@ -5026,7 +5681,7 @@
           <p:cNvPr id="8" name="">
             <a:extLst xmlns:a="http://schemas.openxmlformats.org/drawingml/2006/main">
               <a:ext uri="{FF2B5EF4-FFF2-40B4-BE49-F238E27FC236}">
-                <a16:creationId xmlns:a16="http://schemas.microsoft.com/office/drawing/2014/main" id="{20F6FE1E-F795-4E2E-BBBE-40D373556423}"/>
+                <a16:creationId xmlns:a16="http://schemas.microsoft.com/office/drawing/2014/main" id="{3506AE67-4482-4AD8-921C-08CBE1E9674E}"/>
               </a:ext>
             </a:extLst>
           </p:cNvPr>
@@ -5094,7 +5749,7 @@
           <p:cNvPr id="9" name="">
             <a:extLst xmlns:a="http://schemas.openxmlformats.org/drawingml/2006/main">
               <a:ext uri="{FF2B5EF4-FFF2-40B4-BE49-F238E27FC236}">
-                <a16:creationId xmlns:a16="http://schemas.microsoft.com/office/drawing/2014/main" id="{8B73CDEA-F920-4B8C-82FF-53BA65709298}"/>
+                <a16:creationId xmlns:a16="http://schemas.microsoft.com/office/drawing/2014/main" id="{0181C33D-853D-4494-BF92-E378DEF1AA90}"/>
               </a:ext>
             </a:extLst>
           </p:cNvPr>
@@ -5124,7 +5779,7 @@
           <p:cNvPr id="10" name="">
             <a:extLst xmlns:a="http://schemas.openxmlformats.org/drawingml/2006/main">
               <a:ext uri="{FF2B5EF4-FFF2-40B4-BE49-F238E27FC236}">
-                <a16:creationId xmlns:a16="http://schemas.microsoft.com/office/drawing/2014/main" id="{8C81E8F1-16E2-45B9-ABA3-4124514375FE}"/>
+                <a16:creationId xmlns:a16="http://schemas.microsoft.com/office/drawing/2014/main" id="{6C66D1F9-B2F2-4EC9-8246-1072FF26A5EF}"/>
               </a:ext>
             </a:extLst>
           </p:cNvPr>
@@ -5192,7 +5847,7 @@
           <p:cNvPr id="11" name="">
             <a:extLst xmlns:a="http://schemas.openxmlformats.org/drawingml/2006/main">
               <a:ext uri="{FF2B5EF4-FFF2-40B4-BE49-F238E27FC236}">
-                <a16:creationId xmlns:a16="http://schemas.microsoft.com/office/drawing/2014/main" id="{BF74F988-AEA3-4763-AE33-2D3ABE030505}"/>
+                <a16:creationId xmlns:a16="http://schemas.microsoft.com/office/drawing/2014/main" id="{062746EE-D539-41FE-AF04-7CF075BA6E1B}"/>
               </a:ext>
             </a:extLst>
           </p:cNvPr>
@@ -5260,7 +5915,7 @@
           <p:cNvPr id="12" name="">
             <a:extLst xmlns:a="http://schemas.openxmlformats.org/drawingml/2006/main">
               <a:ext uri="{FF2B5EF4-FFF2-40B4-BE49-F238E27FC236}">
-                <a16:creationId xmlns:a16="http://schemas.microsoft.com/office/drawing/2014/main" id="{D7B7C36E-2529-459A-8F50-C60309B01DE3}"/>
+                <a16:creationId xmlns:a16="http://schemas.microsoft.com/office/drawing/2014/main" id="{520EF028-D0BB-43A8-A843-741A3B3101D8}"/>
               </a:ext>
             </a:extLst>
           </p:cNvPr>
@@ -5328,7 +5983,7 @@
           <p:cNvPr id="13" name="">
             <a:extLst xmlns:a="http://schemas.openxmlformats.org/drawingml/2006/main">
               <a:ext uri="{FF2B5EF4-FFF2-40B4-BE49-F238E27FC236}">
-                <a16:creationId xmlns:a16="http://schemas.microsoft.com/office/drawing/2014/main" id="{5B4DDC7C-E4ED-4F5E-BEB7-DB7EE346B2DE}"/>
+                <a16:creationId xmlns:a16="http://schemas.microsoft.com/office/drawing/2014/main" id="{358A7FB0-60D6-459A-9F5D-86B1ED255E82}"/>
               </a:ext>
             </a:extLst>
           </p:cNvPr>
@@ -5396,7 +6051,7 @@
           <p:cNvPr id="14" name="">
             <a:extLst xmlns:a="http://schemas.openxmlformats.org/drawingml/2006/main">
               <a:ext uri="{FF2B5EF4-FFF2-40B4-BE49-F238E27FC236}">
-                <a16:creationId xmlns:a16="http://schemas.microsoft.com/office/drawing/2014/main" id="{7ED8E5D1-35EA-4557-8E95-E08D1D2804B9}"/>
+                <a16:creationId xmlns:a16="http://schemas.microsoft.com/office/drawing/2014/main" id="{E59AC33E-5F60-4998-B48B-8E46E0515A6C}"/>
               </a:ext>
             </a:extLst>
           </p:cNvPr>
@@ -5462,7 +6117,7 @@
     </p:spTree>
     <p:extLst>
       <p:ext uri="{BB962C8B-B14F-4D97-AF65-F5344CB8AC3E}">
-        <p14:creationId xmlns:p14="http://schemas.microsoft.com/office/powerpoint/2010/main" val="2024460941"/>
+        <p14:creationId xmlns:p14="http://schemas.microsoft.com/office/powerpoint/2010/main" val="1836885466"/>
       </p:ext>
     </p:extLst>
   </p:cSld>
@@ -5493,7 +6148,7 @@
           <p:cNvPr id="7" name="">
             <a:extLst xmlns:a="http://schemas.openxmlformats.org/drawingml/2006/main">
               <a:ext uri="{FF2B5EF4-FFF2-40B4-BE49-F238E27FC236}">
-                <a16:creationId xmlns:a16="http://schemas.microsoft.com/office/drawing/2014/main" id="{C8C1743D-69D1-4881-B3C6-7DA851C2460D}"/>
+                <a16:creationId xmlns:a16="http://schemas.microsoft.com/office/drawing/2014/main" id="{56366853-6D60-4E32-8F64-FE48E0427472}"/>
               </a:ext>
             </a:extLst>
           </p:cNvPr>
@@ -5561,7 +6216,7 @@
           <p:cNvPr id="2" name="">
             <a:extLst xmlns:a="http://schemas.openxmlformats.org/drawingml/2006/main">
               <a:ext uri="{FF2B5EF4-FFF2-40B4-BE49-F238E27FC236}">
-                <a16:creationId xmlns:a16="http://schemas.microsoft.com/office/drawing/2014/main" id="{77D78B7C-92A0-4C4C-8BF4-B974E3A8E7B0}"/>
+                <a16:creationId xmlns:a16="http://schemas.microsoft.com/office/drawing/2014/main" id="{7B1EB06E-1860-4523-B45A-7A51BEA35341}"/>
               </a:ext>
             </a:extLst>
           </p:cNvPr>
@@ -5629,7 +6284,7 @@
           <p:cNvPr id="3" name="">
             <a:extLst xmlns:a="http://schemas.openxmlformats.org/drawingml/2006/main">
               <a:ext uri="{FF2B5EF4-FFF2-40B4-BE49-F238E27FC236}">
-                <a16:creationId xmlns:a16="http://schemas.microsoft.com/office/drawing/2014/main" id="{B0191C6E-690D-4906-9BBC-6527E8B10607}"/>
+                <a16:creationId xmlns:a16="http://schemas.microsoft.com/office/drawing/2014/main" id="{7F45A8FC-B90A-4424-863F-602DF6FBDEC4}"/>
               </a:ext>
             </a:extLst>
           </p:cNvPr>
@@ -5639,7 +6294,7 @@
           <p:nvPr/>
         </p:nvPicPr>
         <p:blipFill>
-          <a:blip xmlns:r="http://schemas.openxmlformats.org/officeDocument/2006/relationships" xmlns:a="http://schemas.openxmlformats.org/drawingml/2006/main" r:embed="R5baffcb496f841ed"/>
+          <a:blip xmlns:r="http://schemas.openxmlformats.org/officeDocument/2006/relationships" xmlns:a="http://schemas.openxmlformats.org/drawingml/2006/main" r:embed="Rfdad506937c64a19"/>
           <a:stretch xmlns:a="http://schemas.openxmlformats.org/drawingml/2006/main"/>
         </p:blipFill>
         <p:spPr>
@@ -5657,7 +6312,7 @@
           <p:cNvPr id="4" name="">
             <a:extLst xmlns:a="http://schemas.openxmlformats.org/drawingml/2006/main">
               <a:ext uri="{FF2B5EF4-FFF2-40B4-BE49-F238E27FC236}">
-                <a16:creationId xmlns:a16="http://schemas.microsoft.com/office/drawing/2014/main" id="{0B6D85C5-E428-4F2F-8FDA-4C091A765892}"/>
+                <a16:creationId xmlns:a16="http://schemas.microsoft.com/office/drawing/2014/main" id="{2FCA793D-9449-4B3E-BAB3-1E266F50B3F3}"/>
               </a:ext>
             </a:extLst>
           </p:cNvPr>
@@ -5687,7 +6342,7 @@
           <p:cNvPr id="5" name="">
             <a:extLst xmlns:a="http://schemas.openxmlformats.org/drawingml/2006/main">
               <a:ext uri="{FF2B5EF4-FFF2-40B4-BE49-F238E27FC236}">
-                <a16:creationId xmlns:a16="http://schemas.microsoft.com/office/drawing/2014/main" id="{69A56D27-7C4B-42A8-A1F5-898EC9A28AFA}"/>
+                <a16:creationId xmlns:a16="http://schemas.microsoft.com/office/drawing/2014/main" id="{01E0AD2D-BD20-4267-835A-3F3E09FEF9A7}"/>
               </a:ext>
             </a:extLst>
           </p:cNvPr>
@@ -5755,7 +6410,7 @@
           <p:cNvPr id="6" name="">
             <a:extLst xmlns:a="http://schemas.openxmlformats.org/drawingml/2006/main">
               <a:ext uri="{FF2B5EF4-FFF2-40B4-BE49-F238E27FC236}">
-                <a16:creationId xmlns:a16="http://schemas.microsoft.com/office/drawing/2014/main" id="{2603BE37-0DB2-4C71-95FE-A14424081114}"/>
+                <a16:creationId xmlns:a16="http://schemas.microsoft.com/office/drawing/2014/main" id="{7F3CCD03-6A3A-4D11-8304-A824E6B58BF3}"/>
               </a:ext>
             </a:extLst>
           </p:cNvPr>
@@ -5821,7 +6476,7 @@
     </p:spTree>
     <p:extLst>
       <p:ext uri="{BB962C8B-B14F-4D97-AF65-F5344CB8AC3E}">
-        <p14:creationId xmlns:p14="http://schemas.microsoft.com/office/powerpoint/2010/main" val="1968743258"/>
+        <p14:creationId xmlns:p14="http://schemas.microsoft.com/office/powerpoint/2010/main" val="750610031"/>
       </p:ext>
     </p:extLst>
   </p:cSld>
@@ -5852,7 +6507,7 @@
           <p:cNvPr id="6" name="">
             <a:extLst xmlns:a="http://schemas.openxmlformats.org/drawingml/2006/main">
               <a:ext uri="{FF2B5EF4-FFF2-40B4-BE49-F238E27FC236}">
-                <a16:creationId xmlns:a16="http://schemas.microsoft.com/office/drawing/2014/main" id="{AE66AAD5-68CC-4FB3-95D9-B593DAB5EC3A}"/>
+                <a16:creationId xmlns:a16="http://schemas.microsoft.com/office/drawing/2014/main" id="{0F9A734B-4EF1-4212-BFC3-6534B097DF9E}"/>
               </a:ext>
             </a:extLst>
           </p:cNvPr>
@@ -5862,7 +6517,7 @@
           <p:nvPr/>
         </p:nvPicPr>
         <p:blipFill>
-          <a:blip xmlns:r="http://schemas.openxmlformats.org/officeDocument/2006/relationships" xmlns:a="http://schemas.openxmlformats.org/drawingml/2006/main" r:embed="R41c5cbb4bb394230"/>
+          <a:blip xmlns:r="http://schemas.openxmlformats.org/officeDocument/2006/relationships" xmlns:a="http://schemas.openxmlformats.org/drawingml/2006/main" r:embed="R65837f39e4014c10"/>
           <a:stretch xmlns:a="http://schemas.openxmlformats.org/drawingml/2006/main"/>
         </p:blipFill>
         <p:spPr>
@@ -5880,7 +6535,7 @@
           <p:cNvPr id="2" name="">
             <a:extLst xmlns:a="http://schemas.openxmlformats.org/drawingml/2006/main">
               <a:ext uri="{FF2B5EF4-FFF2-40B4-BE49-F238E27FC236}">
-                <a16:creationId xmlns:a16="http://schemas.microsoft.com/office/drawing/2014/main" id="{5CB83C39-3F9E-4216-AD9E-4C226AAC3DBF}"/>
+                <a16:creationId xmlns:a16="http://schemas.microsoft.com/office/drawing/2014/main" id="{262D81E0-1EE7-46BD-B93B-43BCD74C43C2}"/>
               </a:ext>
             </a:extLst>
           </p:cNvPr>
@@ -5948,7 +6603,7 @@
           <p:cNvPr id="3" name="">
             <a:extLst xmlns:a="http://schemas.openxmlformats.org/drawingml/2006/main">
               <a:ext uri="{FF2B5EF4-FFF2-40B4-BE49-F238E27FC236}">
-                <a16:creationId xmlns:a16="http://schemas.microsoft.com/office/drawing/2014/main" id="{AF8E8CE9-B339-41DB-AFE0-27085541D46F}"/>
+                <a16:creationId xmlns:a16="http://schemas.microsoft.com/office/drawing/2014/main" id="{7AE98739-72A2-492C-B6C4-E64E7547E85F}"/>
               </a:ext>
             </a:extLst>
           </p:cNvPr>
@@ -6016,7 +6671,7 @@
           <p:cNvPr id="4" name="">
             <a:extLst xmlns:a="http://schemas.openxmlformats.org/drawingml/2006/main">
               <a:ext uri="{FF2B5EF4-FFF2-40B4-BE49-F238E27FC236}">
-                <a16:creationId xmlns:a16="http://schemas.microsoft.com/office/drawing/2014/main" id="{3F9E155C-1E16-4155-BAC2-4E204A7A7283}"/>
+                <a16:creationId xmlns:a16="http://schemas.microsoft.com/office/drawing/2014/main" id="{85302E21-F78F-43FE-A5B0-1A1E8DE748EB}"/>
               </a:ext>
             </a:extLst>
           </p:cNvPr>
@@ -6084,7 +6739,7 @@
           <p:cNvPr id="5" name="">
             <a:extLst xmlns:a="http://schemas.openxmlformats.org/drawingml/2006/main">
               <a:ext uri="{FF2B5EF4-FFF2-40B4-BE49-F238E27FC236}">
-                <a16:creationId xmlns:a16="http://schemas.microsoft.com/office/drawing/2014/main" id="{A67C0277-E035-45C2-A494-9B0A35FCEDA3}"/>
+                <a16:creationId xmlns:a16="http://schemas.microsoft.com/office/drawing/2014/main" id="{717E1972-224C-433B-869E-0267B84D8165}"/>
               </a:ext>
             </a:extLst>
           </p:cNvPr>
@@ -6150,7 +6805,7 @@
     </p:spTree>
     <p:extLst>
       <p:ext uri="{BB962C8B-B14F-4D97-AF65-F5344CB8AC3E}">
-        <p14:creationId xmlns:p14="http://schemas.microsoft.com/office/powerpoint/2010/main" val="49594142"/>
+        <p14:creationId xmlns:p14="http://schemas.microsoft.com/office/powerpoint/2010/main" val="1662911044"/>
       </p:ext>
     </p:extLst>
   </p:cSld>
@@ -6181,7 +6836,7 @@
           <p:cNvPr id="28" name="">
             <a:extLst xmlns:a="http://schemas.openxmlformats.org/drawingml/2006/main">
               <a:ext uri="{FF2B5EF4-FFF2-40B4-BE49-F238E27FC236}">
-                <a16:creationId xmlns:a16="http://schemas.microsoft.com/office/drawing/2014/main" id="{A40CBA8B-655B-407B-8CBE-F6293A1F6FD4}"/>
+                <a16:creationId xmlns:a16="http://schemas.microsoft.com/office/drawing/2014/main" id="{28342B41-EBE2-4773-B2BE-6403EA46757C}"/>
               </a:ext>
             </a:extLst>
           </p:cNvPr>
@@ -6191,7 +6846,7 @@
           <p:nvPr/>
         </p:nvPicPr>
         <p:blipFill>
-          <a:blip xmlns:r="http://schemas.openxmlformats.org/officeDocument/2006/relationships" xmlns:a="http://schemas.openxmlformats.org/drawingml/2006/main" r:embed="R272bb7b107eb4819"/>
+          <a:blip xmlns:r="http://schemas.openxmlformats.org/officeDocument/2006/relationships" xmlns:a="http://schemas.openxmlformats.org/drawingml/2006/main" r:embed="R02e8748aff6a41f3"/>
           <a:srcRect xmlns:a="http://schemas.openxmlformats.org/drawingml/2006/main" l="0" t="0" r="0" b="0"/>
           <a:stretch xmlns:a="http://schemas.openxmlformats.org/drawingml/2006/main">
             <a:fillRect l="0" t="0" r="0" b="0"/>
@@ -6212,7 +6867,7 @@
           <p:cNvPr id="2" name="">
             <a:extLst xmlns:a="http://schemas.openxmlformats.org/drawingml/2006/main">
               <a:ext uri="{FF2B5EF4-FFF2-40B4-BE49-F238E27FC236}">
-                <a16:creationId xmlns:a16="http://schemas.microsoft.com/office/drawing/2014/main" id="{209DC17B-A94A-4454-88A7-581CC0376E4B}"/>
+                <a16:creationId xmlns:a16="http://schemas.microsoft.com/office/drawing/2014/main" id="{A56A2F6C-0D2A-41F7-B8A9-2F58A52D4E8A}"/>
               </a:ext>
             </a:extLst>
           </p:cNvPr>
@@ -6280,7 +6935,7 @@
           <p:cNvPr id="3" name="">
             <a:extLst xmlns:a="http://schemas.openxmlformats.org/drawingml/2006/main">
               <a:ext uri="{FF2B5EF4-FFF2-40B4-BE49-F238E27FC236}">
-                <a16:creationId xmlns:a16="http://schemas.microsoft.com/office/drawing/2014/main" id="{B41781DF-1921-4842-BE82-B5B8F87224D6}"/>
+                <a16:creationId xmlns:a16="http://schemas.microsoft.com/office/drawing/2014/main" id="{629DFB93-5309-4A24-8241-EAB75EBE517E}"/>
               </a:ext>
             </a:extLst>
           </p:cNvPr>
@@ -6348,7 +7003,7 @@
           <p:cNvPr id="4" name="">
             <a:extLst xmlns:a="http://schemas.openxmlformats.org/drawingml/2006/main">
               <a:ext uri="{FF2B5EF4-FFF2-40B4-BE49-F238E27FC236}">
-                <a16:creationId xmlns:a16="http://schemas.microsoft.com/office/drawing/2014/main" id="{2A3C6D4A-EE18-4F45-85B3-B8B379A8C70A}"/>
+                <a16:creationId xmlns:a16="http://schemas.microsoft.com/office/drawing/2014/main" id="{B5E62C32-F4A2-4162-B8E4-3A1E957E194B}"/>
               </a:ext>
             </a:extLst>
           </p:cNvPr>
@@ -6416,7 +7071,7 @@
           <p:cNvPr id="5" name="">
             <a:extLst xmlns:a="http://schemas.openxmlformats.org/drawingml/2006/main">
               <a:ext uri="{FF2B5EF4-FFF2-40B4-BE49-F238E27FC236}">
-                <a16:creationId xmlns:a16="http://schemas.microsoft.com/office/drawing/2014/main" id="{FC7E7185-5A2A-451E-870B-312B9DAE79B8}"/>
+                <a16:creationId xmlns:a16="http://schemas.microsoft.com/office/drawing/2014/main" id="{0978F407-959B-4438-ADBC-0BCF390A0CA3}"/>
               </a:ext>
             </a:extLst>
           </p:cNvPr>
@@ -6426,7 +7081,7 @@
           <p:nvPr/>
         </p:nvPicPr>
         <p:blipFill>
-          <a:blip xmlns:r="http://schemas.openxmlformats.org/officeDocument/2006/relationships" xmlns:a="http://schemas.openxmlformats.org/drawingml/2006/main" r:embed="Rd11d0aa752834341"/>
+          <a:blip xmlns:r="http://schemas.openxmlformats.org/officeDocument/2006/relationships" xmlns:a="http://schemas.openxmlformats.org/drawingml/2006/main" r:embed="R7dfe56bdcf744814"/>
           <a:stretch xmlns:a="http://schemas.openxmlformats.org/drawingml/2006/main"/>
         </p:blipFill>
         <p:spPr>
@@ -6444,7 +7099,7 @@
           <p:cNvPr id="6" name="">
             <a:extLst xmlns:a="http://schemas.openxmlformats.org/drawingml/2006/main">
               <a:ext uri="{FF2B5EF4-FFF2-40B4-BE49-F238E27FC236}">
-                <a16:creationId xmlns:a16="http://schemas.microsoft.com/office/drawing/2014/main" id="{7D00A424-EE8F-4C57-AA10-6792B542B80F}"/>
+                <a16:creationId xmlns:a16="http://schemas.microsoft.com/office/drawing/2014/main" id="{AF76D479-6B72-4118-B145-F4AC6F6D3695}"/>
               </a:ext>
             </a:extLst>
           </p:cNvPr>
@@ -6474,7 +7129,7 @@
           <p:cNvPr id="7" name="">
             <a:extLst xmlns:a="http://schemas.openxmlformats.org/drawingml/2006/main">
               <a:ext uri="{FF2B5EF4-FFF2-40B4-BE49-F238E27FC236}">
-                <a16:creationId xmlns:a16="http://schemas.microsoft.com/office/drawing/2014/main" id="{F65E8D31-867F-44D1-B19E-272E4A921799}"/>
+                <a16:creationId xmlns:a16="http://schemas.microsoft.com/office/drawing/2014/main" id="{DD838CE9-DE1D-48C8-8E2E-22F8F4B14760}"/>
               </a:ext>
             </a:extLst>
           </p:cNvPr>
@@ -6542,7 +7197,7 @@
           <p:cNvPr id="8" name="">
             <a:extLst xmlns:a="http://schemas.openxmlformats.org/drawingml/2006/main">
               <a:ext uri="{FF2B5EF4-FFF2-40B4-BE49-F238E27FC236}">
-                <a16:creationId xmlns:a16="http://schemas.microsoft.com/office/drawing/2014/main" id="{AB22ACAA-9141-41C1-9298-8340FEE8CBA6}"/>
+                <a16:creationId xmlns:a16="http://schemas.microsoft.com/office/drawing/2014/main" id="{7653C0F5-8783-4E51-90AB-8FDA80A37F8C}"/>
               </a:ext>
             </a:extLst>
           </p:cNvPr>
@@ -6610,7 +7265,7 @@
           <p:cNvPr id="9" name="">
             <a:extLst xmlns:a="http://schemas.openxmlformats.org/drawingml/2006/main">
               <a:ext uri="{FF2B5EF4-FFF2-40B4-BE49-F238E27FC236}">
-                <a16:creationId xmlns:a16="http://schemas.microsoft.com/office/drawing/2014/main" id="{A321041A-9BDC-4F00-BC87-A794ED6DB276}"/>
+                <a16:creationId xmlns:a16="http://schemas.microsoft.com/office/drawing/2014/main" id="{CB64823E-6519-416F-A38B-44AE05668A9B}"/>
               </a:ext>
             </a:extLst>
           </p:cNvPr>
@@ -6678,7 +7333,7 @@
           <p:cNvPr id="10" name="">
             <a:extLst xmlns:a="http://schemas.openxmlformats.org/drawingml/2006/main">
               <a:ext uri="{FF2B5EF4-FFF2-40B4-BE49-F238E27FC236}">
-                <a16:creationId xmlns:a16="http://schemas.microsoft.com/office/drawing/2014/main" id="{B8B6A706-10D3-436D-9BF7-6D14F0418E61}"/>
+                <a16:creationId xmlns:a16="http://schemas.microsoft.com/office/drawing/2014/main" id="{39722C97-D291-4291-A178-8AF13229E0C5}"/>
               </a:ext>
             </a:extLst>
           </p:cNvPr>
@@ -6746,7 +7401,7 @@
           <p:cNvPr id="11" name="">
             <a:extLst xmlns:a="http://schemas.openxmlformats.org/drawingml/2006/main">
               <a:ext uri="{FF2B5EF4-FFF2-40B4-BE49-F238E27FC236}">
-                <a16:creationId xmlns:a16="http://schemas.microsoft.com/office/drawing/2014/main" id="{ED18DE71-B3E3-4365-B61E-639E8ADA6134}"/>
+                <a16:creationId xmlns:a16="http://schemas.microsoft.com/office/drawing/2014/main" id="{DA01BEE3-0649-4CD7-8509-A0ECA4476593}"/>
               </a:ext>
             </a:extLst>
           </p:cNvPr>
@@ -6814,7 +7469,7 @@
           <p:cNvPr id="12" name="">
             <a:extLst xmlns:a="http://schemas.openxmlformats.org/drawingml/2006/main">
               <a:ext uri="{FF2B5EF4-FFF2-40B4-BE49-F238E27FC236}">
-                <a16:creationId xmlns:a16="http://schemas.microsoft.com/office/drawing/2014/main" id="{CF1ECD39-A434-4085-9CDE-22653AF5CF41}"/>
+                <a16:creationId xmlns:a16="http://schemas.microsoft.com/office/drawing/2014/main" id="{8425F3D8-BED8-4031-AE87-A5377D8F093F}"/>
               </a:ext>
             </a:extLst>
           </p:cNvPr>
@@ -6882,7 +7537,7 @@
           <p:cNvPr id="13" name="">
             <a:extLst xmlns:a="http://schemas.openxmlformats.org/drawingml/2006/main">
               <a:ext uri="{FF2B5EF4-FFF2-40B4-BE49-F238E27FC236}">
-                <a16:creationId xmlns:a16="http://schemas.microsoft.com/office/drawing/2014/main" id="{B127DDB7-C062-43A6-B816-7D2FE93CB10C}"/>
+                <a16:creationId xmlns:a16="http://schemas.microsoft.com/office/drawing/2014/main" id="{B9AC4E39-A5AF-4274-BD95-0B42AD0BEDD6}"/>
               </a:ext>
             </a:extLst>
           </p:cNvPr>
@@ -6950,7 +7605,7 @@
           <p:cNvPr id="14" name="">
             <a:extLst xmlns:a="http://schemas.openxmlformats.org/drawingml/2006/main">
               <a:ext uri="{FF2B5EF4-FFF2-40B4-BE49-F238E27FC236}">
-                <a16:creationId xmlns:a16="http://schemas.microsoft.com/office/drawing/2014/main" id="{5A34CC5E-E8B9-41C7-B38A-F6D30A19A49D}"/>
+                <a16:creationId xmlns:a16="http://schemas.microsoft.com/office/drawing/2014/main" id="{61201C22-FF19-4046-A1CC-52A2E45F1F54}"/>
               </a:ext>
             </a:extLst>
           </p:cNvPr>
@@ -7018,7 +7673,7 @@
           <p:cNvPr id="15" name="">
             <a:extLst xmlns:a="http://schemas.openxmlformats.org/drawingml/2006/main">
               <a:ext uri="{FF2B5EF4-FFF2-40B4-BE49-F238E27FC236}">
-                <a16:creationId xmlns:a16="http://schemas.microsoft.com/office/drawing/2014/main" id="{B74DF2CA-161E-445B-8072-95D2B62D8753}"/>
+                <a16:creationId xmlns:a16="http://schemas.microsoft.com/office/drawing/2014/main" id="{2DE25EAB-976D-4629-8A8A-7C3C2BD0F976}"/>
               </a:ext>
             </a:extLst>
           </p:cNvPr>
@@ -7086,7 +7741,7 @@
           <p:cNvPr id="16" name="">
             <a:extLst xmlns:a="http://schemas.openxmlformats.org/drawingml/2006/main">
               <a:ext uri="{FF2B5EF4-FFF2-40B4-BE49-F238E27FC236}">
-                <a16:creationId xmlns:a16="http://schemas.microsoft.com/office/drawing/2014/main" id="{29E40D3E-AF98-4C33-8C81-02DA5129E1A6}"/>
+                <a16:creationId xmlns:a16="http://schemas.microsoft.com/office/drawing/2014/main" id="{79FEBADD-7DD2-43D7-9875-DF118EB27E53}"/>
               </a:ext>
             </a:extLst>
           </p:cNvPr>
@@ -7154,7 +7809,7 @@
           <p:cNvPr id="17" name="">
             <a:extLst xmlns:a="http://schemas.openxmlformats.org/drawingml/2006/main">
               <a:ext uri="{FF2B5EF4-FFF2-40B4-BE49-F238E27FC236}">
-                <a16:creationId xmlns:a16="http://schemas.microsoft.com/office/drawing/2014/main" id="{4201E918-8579-40AD-B5F3-5552F70E54E5}"/>
+                <a16:creationId xmlns:a16="http://schemas.microsoft.com/office/drawing/2014/main" id="{CD131FA3-B7FE-4378-BB22-BCA7A4AF4B9F}"/>
               </a:ext>
             </a:extLst>
           </p:cNvPr>
@@ -7222,7 +7877,7 @@
           <p:cNvPr id="18" name="">
             <a:extLst xmlns:a="http://schemas.openxmlformats.org/drawingml/2006/main">
               <a:ext uri="{FF2B5EF4-FFF2-40B4-BE49-F238E27FC236}">
-                <a16:creationId xmlns:a16="http://schemas.microsoft.com/office/drawing/2014/main" id="{C2BE6877-0B40-434F-8443-D229A946B613}"/>
+                <a16:creationId xmlns:a16="http://schemas.microsoft.com/office/drawing/2014/main" id="{0E3526C3-7CCC-48EA-8B72-9646B567C76F}"/>
               </a:ext>
             </a:extLst>
           </p:cNvPr>
@@ -7290,7 +7945,7 @@
           <p:cNvPr id="19" name="">
             <a:extLst xmlns:a="http://schemas.openxmlformats.org/drawingml/2006/main">
               <a:ext uri="{FF2B5EF4-FFF2-40B4-BE49-F238E27FC236}">
-                <a16:creationId xmlns:a16="http://schemas.microsoft.com/office/drawing/2014/main" id="{58F010C1-F6C7-45F2-8067-0ACF17255956}"/>
+                <a16:creationId xmlns:a16="http://schemas.microsoft.com/office/drawing/2014/main" id="{D7D46E8E-283B-4C12-AEF8-B7B7B796D5CC}"/>
               </a:ext>
             </a:extLst>
           </p:cNvPr>
@@ -7358,7 +8013,7 @@
           <p:cNvPr id="20" name="">
             <a:extLst xmlns:a="http://schemas.openxmlformats.org/drawingml/2006/main">
               <a:ext uri="{FF2B5EF4-FFF2-40B4-BE49-F238E27FC236}">
-                <a16:creationId xmlns:a16="http://schemas.microsoft.com/office/drawing/2014/main" id="{85D867B4-2BAB-4F74-9E8C-68A3856B9034}"/>
+                <a16:creationId xmlns:a16="http://schemas.microsoft.com/office/drawing/2014/main" id="{9AC2A519-7A3A-4E77-A9FB-9D553398E797}"/>
               </a:ext>
             </a:extLst>
           </p:cNvPr>
@@ -7426,7 +8081,7 @@
           <p:cNvPr id="21" name="">
             <a:extLst xmlns:a="http://schemas.openxmlformats.org/drawingml/2006/main">
               <a:ext uri="{FF2B5EF4-FFF2-40B4-BE49-F238E27FC236}">
-                <a16:creationId xmlns:a16="http://schemas.microsoft.com/office/drawing/2014/main" id="{B4FAF73B-17C8-4F95-BCC6-ECC5D70B36AA}"/>
+                <a16:creationId xmlns:a16="http://schemas.microsoft.com/office/drawing/2014/main" id="{9EAB77B3-B1B2-4FAF-99B3-C0050E8D7565}"/>
               </a:ext>
             </a:extLst>
           </p:cNvPr>
@@ -7494,7 +8149,7 @@
           <p:cNvPr id="22" name="">
             <a:extLst xmlns:a="http://schemas.openxmlformats.org/drawingml/2006/main">
               <a:ext uri="{FF2B5EF4-FFF2-40B4-BE49-F238E27FC236}">
-                <a16:creationId xmlns:a16="http://schemas.microsoft.com/office/drawing/2014/main" id="{6DD9F533-98A2-4ED1-9A48-1F747BEED1B9}"/>
+                <a16:creationId xmlns:a16="http://schemas.microsoft.com/office/drawing/2014/main" id="{B4FECC2C-FEA9-4248-AF48-C14A091F8E01}"/>
               </a:ext>
             </a:extLst>
           </p:cNvPr>
@@ -7562,7 +8217,7 @@
           <p:cNvPr id="23" name="">
             <a:extLst xmlns:a="http://schemas.openxmlformats.org/drawingml/2006/main">
               <a:ext uri="{FF2B5EF4-FFF2-40B4-BE49-F238E27FC236}">
-                <a16:creationId xmlns:a16="http://schemas.microsoft.com/office/drawing/2014/main" id="{3E8AE860-92CA-4F32-A324-9781E7250EF0}"/>
+                <a16:creationId xmlns:a16="http://schemas.microsoft.com/office/drawing/2014/main" id="{94D014AE-29AF-460F-B326-A86EEB281CC0}"/>
               </a:ext>
             </a:extLst>
           </p:cNvPr>
@@ -7630,7 +8285,7 @@
           <p:cNvPr id="24" name="">
             <a:extLst xmlns:a="http://schemas.openxmlformats.org/drawingml/2006/main">
               <a:ext uri="{FF2B5EF4-FFF2-40B4-BE49-F238E27FC236}">
-                <a16:creationId xmlns:a16="http://schemas.microsoft.com/office/drawing/2014/main" id="{19660224-0471-4FBC-B962-ECD0B154F29D}"/>
+                <a16:creationId xmlns:a16="http://schemas.microsoft.com/office/drawing/2014/main" id="{8ED7B6D7-FD9B-421E-A15E-A9408C10B494}"/>
               </a:ext>
             </a:extLst>
           </p:cNvPr>
@@ -7698,7 +8353,7 @@
           <p:cNvPr id="25" name="">
             <a:extLst xmlns:a="http://schemas.openxmlformats.org/drawingml/2006/main">
               <a:ext uri="{FF2B5EF4-FFF2-40B4-BE49-F238E27FC236}">
-                <a16:creationId xmlns:a16="http://schemas.microsoft.com/office/drawing/2014/main" id="{4E4EA976-545E-47A3-84A5-899F450CFB50}"/>
+                <a16:creationId xmlns:a16="http://schemas.microsoft.com/office/drawing/2014/main" id="{A9F3F7E7-399A-4877-905C-89E01E948911}"/>
               </a:ext>
             </a:extLst>
           </p:cNvPr>
@@ -7766,7 +8421,7 @@
           <p:cNvPr id="26" name="">
             <a:extLst xmlns:a="http://schemas.openxmlformats.org/drawingml/2006/main">
               <a:ext uri="{FF2B5EF4-FFF2-40B4-BE49-F238E27FC236}">
-                <a16:creationId xmlns:a16="http://schemas.microsoft.com/office/drawing/2014/main" id="{C90B9035-C482-49D9-8E43-DAE830C3E087}"/>
+                <a16:creationId xmlns:a16="http://schemas.microsoft.com/office/drawing/2014/main" id="{D03352B4-A759-408A-B466-A24BAE948B0A}"/>
               </a:ext>
             </a:extLst>
           </p:cNvPr>
@@ -7834,7 +8489,7 @@
           <p:cNvPr id="27" name="">
             <a:extLst xmlns:a="http://schemas.openxmlformats.org/drawingml/2006/main">
               <a:ext uri="{FF2B5EF4-FFF2-40B4-BE49-F238E27FC236}">
-                <a16:creationId xmlns:a16="http://schemas.microsoft.com/office/drawing/2014/main" id="{63382D8C-1899-48A2-A947-2A8C2A8C0E6B}"/>
+                <a16:creationId xmlns:a16="http://schemas.microsoft.com/office/drawing/2014/main" id="{E39BA2D2-EE6F-4C9C-8B60-CCF3BB8E6FD2}"/>
               </a:ext>
             </a:extLst>
           </p:cNvPr>
@@ -7900,7 +8555,7 @@
     </p:spTree>
     <p:extLst>
       <p:ext uri="{BB962C8B-B14F-4D97-AF65-F5344CB8AC3E}">
-        <p14:creationId xmlns:p14="http://schemas.microsoft.com/office/powerpoint/2010/main" val="1807343917"/>
+        <p14:creationId xmlns:p14="http://schemas.microsoft.com/office/powerpoint/2010/main" val="1730114855"/>
       </p:ext>
     </p:extLst>
   </p:cSld>
@@ -7931,7 +8586,7 @@
           <p:cNvPr id="14" name="">
             <a:extLst xmlns:a="http://schemas.openxmlformats.org/drawingml/2006/main">
               <a:ext uri="{FF2B5EF4-FFF2-40B4-BE49-F238E27FC236}">
-                <a16:creationId xmlns:a16="http://schemas.microsoft.com/office/drawing/2014/main" id="{151A0334-C97C-46B2-B54A-81B9D919D2D7}"/>
+                <a16:creationId xmlns:a16="http://schemas.microsoft.com/office/drawing/2014/main" id="{9EDB460E-23BA-443B-B96C-78BAF57945A8}"/>
               </a:ext>
             </a:extLst>
           </p:cNvPr>
@@ -7999,7 +8654,7 @@
           <p:cNvPr id="2" name="">
             <a:extLst xmlns:a="http://schemas.openxmlformats.org/drawingml/2006/main">
               <a:ext uri="{FF2B5EF4-FFF2-40B4-BE49-F238E27FC236}">
-                <a16:creationId xmlns:a16="http://schemas.microsoft.com/office/drawing/2014/main" id="{528E3710-EE2C-4015-9C91-BB0331C37728}"/>
+                <a16:creationId xmlns:a16="http://schemas.microsoft.com/office/drawing/2014/main" id="{2EA0FEBC-5F59-4461-A09C-1F475AA5CBC0}"/>
               </a:ext>
             </a:extLst>
           </p:cNvPr>
@@ -8009,7 +8664,7 @@
           <p:nvPr/>
         </p:nvPicPr>
         <p:blipFill>
-          <a:blip xmlns:r="http://schemas.openxmlformats.org/officeDocument/2006/relationships" xmlns:a="http://schemas.openxmlformats.org/drawingml/2006/main" r:embed="R738ba423897c4d0a"/>
+          <a:blip xmlns:r="http://schemas.openxmlformats.org/officeDocument/2006/relationships" xmlns:a="http://schemas.openxmlformats.org/drawingml/2006/main" r:embed="Rea2ca80944844ecd"/>
           <a:stretch xmlns:a="http://schemas.openxmlformats.org/drawingml/2006/main"/>
         </p:blipFill>
         <p:spPr>
@@ -8027,7 +8682,7 @@
           <p:cNvPr id="3" name="">
             <a:extLst xmlns:a="http://schemas.openxmlformats.org/drawingml/2006/main">
               <a:ext uri="{FF2B5EF4-FFF2-40B4-BE49-F238E27FC236}">
-                <a16:creationId xmlns:a16="http://schemas.microsoft.com/office/drawing/2014/main" id="{DA40F29F-FFD1-46E8-870A-23C1D9DDF83A}"/>
+                <a16:creationId xmlns:a16="http://schemas.microsoft.com/office/drawing/2014/main" id="{738F9CDD-8B66-421F-A6CF-529744B0ED86}"/>
               </a:ext>
             </a:extLst>
           </p:cNvPr>
@@ -8057,7 +8712,7 @@
           <p:cNvPr id="4" name="">
             <a:extLst xmlns:a="http://schemas.openxmlformats.org/drawingml/2006/main">
               <a:ext uri="{FF2B5EF4-FFF2-40B4-BE49-F238E27FC236}">
-                <a16:creationId xmlns:a16="http://schemas.microsoft.com/office/drawing/2014/main" id="{AD33F486-66A1-4934-B370-C9B46D5D8F1A}"/>
+                <a16:creationId xmlns:a16="http://schemas.microsoft.com/office/drawing/2014/main" id="{F51DB3B7-2788-469D-B235-9C8C55FF02AB}"/>
               </a:ext>
             </a:extLst>
           </p:cNvPr>
@@ -8125,7 +8780,7 @@
           <p:cNvPr id="5" name="">
             <a:extLst xmlns:a="http://schemas.openxmlformats.org/drawingml/2006/main">
               <a:ext uri="{FF2B5EF4-FFF2-40B4-BE49-F238E27FC236}">
-                <a16:creationId xmlns:a16="http://schemas.microsoft.com/office/drawing/2014/main" id="{E9B72789-2BF5-44A5-9A1E-334490779E16}"/>
+                <a16:creationId xmlns:a16="http://schemas.microsoft.com/office/drawing/2014/main" id="{E58A7C24-F914-4A26-817F-A0B26063C682}"/>
               </a:ext>
             </a:extLst>
           </p:cNvPr>
@@ -8193,7 +8848,7 @@
           <p:cNvPr id="6" name="">
             <a:extLst xmlns:a="http://schemas.openxmlformats.org/drawingml/2006/main">
               <a:ext uri="{FF2B5EF4-FFF2-40B4-BE49-F238E27FC236}">
-                <a16:creationId xmlns:a16="http://schemas.microsoft.com/office/drawing/2014/main" id="{3B53C90F-8D84-43D7-A469-E780CC08EFCF}"/>
+                <a16:creationId xmlns:a16="http://schemas.microsoft.com/office/drawing/2014/main" id="{1D45C206-34D5-4D8E-A77D-32C41D4F9B3B}"/>
               </a:ext>
             </a:extLst>
           </p:cNvPr>
@@ -8261,7 +8916,7 @@
           <p:cNvPr id="7" name="">
             <a:extLst xmlns:a="http://schemas.openxmlformats.org/drawingml/2006/main">
               <a:ext uri="{FF2B5EF4-FFF2-40B4-BE49-F238E27FC236}">
-                <a16:creationId xmlns:a16="http://schemas.microsoft.com/office/drawing/2014/main" id="{5395F2CF-4132-46FF-AD8A-669AEB89E706}"/>
+                <a16:creationId xmlns:a16="http://schemas.microsoft.com/office/drawing/2014/main" id="{EE35CD8F-25F0-44CA-9809-FC81679AA4F5}"/>
               </a:ext>
             </a:extLst>
           </p:cNvPr>
@@ -8329,7 +8984,7 @@
           <p:cNvPr id="8" name="">
             <a:extLst xmlns:a="http://schemas.openxmlformats.org/drawingml/2006/main">
               <a:ext uri="{FF2B5EF4-FFF2-40B4-BE49-F238E27FC236}">
-                <a16:creationId xmlns:a16="http://schemas.microsoft.com/office/drawing/2014/main" id="{2C69283B-DFF7-4382-8F5C-71C37B4B2000}"/>
+                <a16:creationId xmlns:a16="http://schemas.microsoft.com/office/drawing/2014/main" id="{C0D3C98A-F440-4EEB-B3A5-7B82D1CC1E74}"/>
               </a:ext>
             </a:extLst>
           </p:cNvPr>
@@ -8397,7 +9052,7 @@
           <p:cNvPr id="9" name="">
             <a:extLst xmlns:a="http://schemas.openxmlformats.org/drawingml/2006/main">
               <a:ext uri="{FF2B5EF4-FFF2-40B4-BE49-F238E27FC236}">
-                <a16:creationId xmlns:a16="http://schemas.microsoft.com/office/drawing/2014/main" id="{BE9B3DAC-C75D-4412-8713-EB09B37CC3A6}"/>
+                <a16:creationId xmlns:a16="http://schemas.microsoft.com/office/drawing/2014/main" id="{FBBD4AA2-CFC6-4241-9C37-E2247D01A59F}"/>
               </a:ext>
             </a:extLst>
           </p:cNvPr>
@@ -8407,7 +9062,7 @@
           <p:nvPr/>
         </p:nvPicPr>
         <p:blipFill>
-          <a:blip xmlns:r="http://schemas.openxmlformats.org/officeDocument/2006/relationships" xmlns:a="http://schemas.openxmlformats.org/drawingml/2006/main" r:embed="R59154e3b60e943af"/>
+          <a:blip xmlns:r="http://schemas.openxmlformats.org/officeDocument/2006/relationships" xmlns:a="http://schemas.openxmlformats.org/drawingml/2006/main" r:embed="R78d509a739164644"/>
           <a:stretch xmlns:a="http://schemas.openxmlformats.org/drawingml/2006/main"/>
         </p:blipFill>
         <p:spPr>
@@ -8425,7 +9080,7 @@
           <p:cNvPr id="10" name="">
             <a:extLst xmlns:a="http://schemas.openxmlformats.org/drawingml/2006/main">
               <a:ext uri="{FF2B5EF4-FFF2-40B4-BE49-F238E27FC236}">
-                <a16:creationId xmlns:a16="http://schemas.microsoft.com/office/drawing/2014/main" id="{E3D24736-92BE-4B27-A440-F3AD01C5B62D}"/>
+                <a16:creationId xmlns:a16="http://schemas.microsoft.com/office/drawing/2014/main" id="{B96A5C54-A0CF-447F-99B7-F43F1D7B69D3}"/>
               </a:ext>
             </a:extLst>
           </p:cNvPr>
@@ -8493,7 +9148,7 @@
           <p:cNvPr id="11" name="">
             <a:extLst xmlns:a="http://schemas.openxmlformats.org/drawingml/2006/main">
               <a:ext uri="{FF2B5EF4-FFF2-40B4-BE49-F238E27FC236}">
-                <a16:creationId xmlns:a16="http://schemas.microsoft.com/office/drawing/2014/main" id="{FF36D451-9D73-4ADA-8D04-C201D7111769}"/>
+                <a16:creationId xmlns:a16="http://schemas.microsoft.com/office/drawing/2014/main" id="{3ADC01FD-BEA4-4537-97D0-598307F4CB90}"/>
               </a:ext>
             </a:extLst>
           </p:cNvPr>
@@ -8561,7 +9216,7 @@
           <p:cNvPr id="12" name="">
             <a:extLst xmlns:a="http://schemas.openxmlformats.org/drawingml/2006/main">
               <a:ext uri="{FF2B5EF4-FFF2-40B4-BE49-F238E27FC236}">
-                <a16:creationId xmlns:a16="http://schemas.microsoft.com/office/drawing/2014/main" id="{4085BA29-D50C-4629-BFA2-88DA0BC33F57}"/>
+                <a16:creationId xmlns:a16="http://schemas.microsoft.com/office/drawing/2014/main" id="{74B6B796-B7E7-4C71-AB03-8F6145B0FCD1}"/>
               </a:ext>
             </a:extLst>
           </p:cNvPr>
@@ -8629,7 +9284,7 @@
           <p:cNvPr id="13" name="">
             <a:extLst xmlns:a="http://schemas.openxmlformats.org/drawingml/2006/main">
               <a:ext uri="{FF2B5EF4-FFF2-40B4-BE49-F238E27FC236}">
-                <a16:creationId xmlns:a16="http://schemas.microsoft.com/office/drawing/2014/main" id="{80954C12-A78C-47E2-A933-AB9250D1F36A}"/>
+                <a16:creationId xmlns:a16="http://schemas.microsoft.com/office/drawing/2014/main" id="{81040C28-C012-4F6F-BA63-E70D4A98BD15}"/>
               </a:ext>
             </a:extLst>
           </p:cNvPr>
@@ -8695,7 +9350,7 @@
     </p:spTree>
     <p:extLst>
       <p:ext uri="{BB962C8B-B14F-4D97-AF65-F5344CB8AC3E}">
-        <p14:creationId xmlns:p14="http://schemas.microsoft.com/office/powerpoint/2010/main" val="1289620313"/>
+        <p14:creationId xmlns:p14="http://schemas.microsoft.com/office/powerpoint/2010/main" val="419368492"/>
       </p:ext>
     </p:extLst>
   </p:cSld>
@@ -8726,7 +9381,7 @@
           <p:cNvPr id="27" name="">
             <a:extLst xmlns:a="http://schemas.openxmlformats.org/drawingml/2006/main">
               <a:ext uri="{FF2B5EF4-FFF2-40B4-BE49-F238E27FC236}">
-                <a16:creationId xmlns:a16="http://schemas.microsoft.com/office/drawing/2014/main" id="{DF58A240-2066-4E5A-AD99-7D50F2CA51B0}"/>
+                <a16:creationId xmlns:a16="http://schemas.microsoft.com/office/drawing/2014/main" id="{A9F3087A-EBF5-42E9-9E42-0A55CD71A0BC}"/>
               </a:ext>
             </a:extLst>
           </p:cNvPr>
@@ -8794,7 +9449,7 @@
           <p:cNvPr id="2" name="">
             <a:extLst xmlns:a="http://schemas.openxmlformats.org/drawingml/2006/main">
               <a:ext uri="{FF2B5EF4-FFF2-40B4-BE49-F238E27FC236}">
-                <a16:creationId xmlns:a16="http://schemas.microsoft.com/office/drawing/2014/main" id="{BB90022F-24E1-40D5-BF8D-2D46B2C9C671}"/>
+                <a16:creationId xmlns:a16="http://schemas.microsoft.com/office/drawing/2014/main" id="{46301F1F-963C-4CE6-A2AB-C4A62814BED0}"/>
               </a:ext>
             </a:extLst>
           </p:cNvPr>
@@ -8804,7 +9459,7 @@
           <p:nvPr/>
         </p:nvPicPr>
         <p:blipFill>
-          <a:blip xmlns:r="http://schemas.openxmlformats.org/officeDocument/2006/relationships" xmlns:a="http://schemas.openxmlformats.org/drawingml/2006/main" r:embed="Rb0caf6ee2325477c"/>
+          <a:blip xmlns:r="http://schemas.openxmlformats.org/officeDocument/2006/relationships" xmlns:a="http://schemas.openxmlformats.org/drawingml/2006/main" r:embed="Rbba9081c54554a87"/>
           <a:stretch xmlns:a="http://schemas.openxmlformats.org/drawingml/2006/main"/>
         </p:blipFill>
         <p:spPr>
@@ -8822,7 +9477,7 @@
           <p:cNvPr id="3" name="">
             <a:extLst xmlns:a="http://schemas.openxmlformats.org/drawingml/2006/main">
               <a:ext uri="{FF2B5EF4-FFF2-40B4-BE49-F238E27FC236}">
-                <a16:creationId xmlns:a16="http://schemas.microsoft.com/office/drawing/2014/main" id="{6C43C7AF-62FC-4932-9AA3-6921C7B4C833}"/>
+                <a16:creationId xmlns:a16="http://schemas.microsoft.com/office/drawing/2014/main" id="{045A961E-F221-4535-BC45-41002EA1E1CB}"/>
               </a:ext>
             </a:extLst>
           </p:cNvPr>
@@ -8852,7 +9507,7 @@
           <p:cNvPr id="4" name="">
             <a:extLst xmlns:a="http://schemas.openxmlformats.org/drawingml/2006/main">
               <a:ext uri="{FF2B5EF4-FFF2-40B4-BE49-F238E27FC236}">
-                <a16:creationId xmlns:a16="http://schemas.microsoft.com/office/drawing/2014/main" id="{934A56C0-55AE-4DC1-BE43-DD5C7ACEBD9A}"/>
+                <a16:creationId xmlns:a16="http://schemas.microsoft.com/office/drawing/2014/main" id="{C41B0539-B458-4A20-AFF0-8D10422DA087}"/>
               </a:ext>
             </a:extLst>
           </p:cNvPr>
@@ -8920,7 +9575,7 @@
           <p:cNvPr id="5" name="">
             <a:extLst xmlns:a="http://schemas.openxmlformats.org/drawingml/2006/main">
               <a:ext uri="{FF2B5EF4-FFF2-40B4-BE49-F238E27FC236}">
-                <a16:creationId xmlns:a16="http://schemas.microsoft.com/office/drawing/2014/main" id="{A23B8F1B-3570-449D-99DE-0F30916F2C1F}"/>
+                <a16:creationId xmlns:a16="http://schemas.microsoft.com/office/drawing/2014/main" id="{7E3A240D-085A-4C5F-AA84-D67CAC23A35C}"/>
               </a:ext>
             </a:extLst>
           </p:cNvPr>
@@ -8988,7 +9643,7 @@
           <p:cNvPr id="6" name="">
             <a:extLst xmlns:a="http://schemas.openxmlformats.org/drawingml/2006/main">
               <a:ext uri="{FF2B5EF4-FFF2-40B4-BE49-F238E27FC236}">
-                <a16:creationId xmlns:a16="http://schemas.microsoft.com/office/drawing/2014/main" id="{7CD2E4E9-8924-4ADE-B1AF-1034FD8E7531}"/>
+                <a16:creationId xmlns:a16="http://schemas.microsoft.com/office/drawing/2014/main" id="{E0C2E65A-7BA5-4576-8DC9-BA372DA66CE6}"/>
               </a:ext>
             </a:extLst>
           </p:cNvPr>
@@ -9056,7 +9711,7 @@
           <p:cNvPr id="7" name="">
             <a:extLst xmlns:a="http://schemas.openxmlformats.org/drawingml/2006/main">
               <a:ext uri="{FF2B5EF4-FFF2-40B4-BE49-F238E27FC236}">
-                <a16:creationId xmlns:a16="http://schemas.microsoft.com/office/drawing/2014/main" id="{C9F44EEA-69A8-4AAA-95B7-70A6425CCD73}"/>
+                <a16:creationId xmlns:a16="http://schemas.microsoft.com/office/drawing/2014/main" id="{E644C3B5-1827-464D-993D-30EED6A96D34}"/>
               </a:ext>
             </a:extLst>
           </p:cNvPr>
@@ -9124,7 +9779,7 @@
           <p:cNvPr id="8" name="">
             <a:extLst xmlns:a="http://schemas.openxmlformats.org/drawingml/2006/main">
               <a:ext uri="{FF2B5EF4-FFF2-40B4-BE49-F238E27FC236}">
-                <a16:creationId xmlns:a16="http://schemas.microsoft.com/office/drawing/2014/main" id="{7496F1EF-98DD-488A-822D-1AE5195D495C}"/>
+                <a16:creationId xmlns:a16="http://schemas.microsoft.com/office/drawing/2014/main" id="{7CF20F5C-40B4-4F99-963C-2F1C36FDF99A}"/>
               </a:ext>
             </a:extLst>
           </p:cNvPr>
@@ -9192,7 +9847,7 @@
           <p:cNvPr id="9" name="">
             <a:extLst xmlns:a="http://schemas.openxmlformats.org/drawingml/2006/main">
               <a:ext uri="{FF2B5EF4-FFF2-40B4-BE49-F238E27FC236}">
-                <a16:creationId xmlns:a16="http://schemas.microsoft.com/office/drawing/2014/main" id="{4CDEB3B5-94F2-4B39-8C05-980B812E5C01}"/>
+                <a16:creationId xmlns:a16="http://schemas.microsoft.com/office/drawing/2014/main" id="{9910DA49-BC08-4C81-AC67-486706D2FB35}"/>
               </a:ext>
             </a:extLst>
           </p:cNvPr>
@@ -9260,7 +9915,7 @@
           <p:cNvPr id="10" name="">
             <a:extLst xmlns:a="http://schemas.openxmlformats.org/drawingml/2006/main">
               <a:ext uri="{FF2B5EF4-FFF2-40B4-BE49-F238E27FC236}">
-                <a16:creationId xmlns:a16="http://schemas.microsoft.com/office/drawing/2014/main" id="{D7811411-1721-4A2E-B25C-ECFCC686E505}"/>
+                <a16:creationId xmlns:a16="http://schemas.microsoft.com/office/drawing/2014/main" id="{E96DD434-C599-4ECC-A6F0-EF89A7B6494D}"/>
               </a:ext>
             </a:extLst>
           </p:cNvPr>
@@ -9328,7 +9983,7 @@
           <p:cNvPr id="11" name="">
             <a:extLst xmlns:a="http://schemas.openxmlformats.org/drawingml/2006/main">
               <a:ext uri="{FF2B5EF4-FFF2-40B4-BE49-F238E27FC236}">
-                <a16:creationId xmlns:a16="http://schemas.microsoft.com/office/drawing/2014/main" id="{4B601EE9-EE19-4FB0-9314-8B7FC96ACCAC}"/>
+                <a16:creationId xmlns:a16="http://schemas.microsoft.com/office/drawing/2014/main" id="{52E34FC9-6886-43E5-A29F-389FFAA0EDAD}"/>
               </a:ext>
             </a:extLst>
           </p:cNvPr>
@@ -9396,7 +10051,7 @@
           <p:cNvPr id="12" name="">
             <a:extLst xmlns:a="http://schemas.openxmlformats.org/drawingml/2006/main">
               <a:ext uri="{FF2B5EF4-FFF2-40B4-BE49-F238E27FC236}">
-                <a16:creationId xmlns:a16="http://schemas.microsoft.com/office/drawing/2014/main" id="{51B68B89-0734-4E97-9E38-B790152BA702}"/>
+                <a16:creationId xmlns:a16="http://schemas.microsoft.com/office/drawing/2014/main" id="{62FDFA93-057A-4347-849F-4D0600AFDD23}"/>
               </a:ext>
             </a:extLst>
           </p:cNvPr>
@@ -9464,7 +10119,7 @@
           <p:cNvPr id="13" name="">
             <a:extLst xmlns:a="http://schemas.openxmlformats.org/drawingml/2006/main">
               <a:ext uri="{FF2B5EF4-FFF2-40B4-BE49-F238E27FC236}">
-                <a16:creationId xmlns:a16="http://schemas.microsoft.com/office/drawing/2014/main" id="{8F4A765D-7056-4494-BE41-F3BB9653C7B9}"/>
+                <a16:creationId xmlns:a16="http://schemas.microsoft.com/office/drawing/2014/main" id="{A7AC09BC-04B9-4559-8F5A-1ADDEE7BD031}"/>
               </a:ext>
             </a:extLst>
           </p:cNvPr>
@@ -9494,7 +10149,7 @@
           <p:cNvPr id="14" name="">
             <a:extLst xmlns:a="http://schemas.openxmlformats.org/drawingml/2006/main">
               <a:ext uri="{FF2B5EF4-FFF2-40B4-BE49-F238E27FC236}">
-                <a16:creationId xmlns:a16="http://schemas.microsoft.com/office/drawing/2014/main" id="{F35672D1-EB36-4032-9092-E24A0CB28D4A}"/>
+                <a16:creationId xmlns:a16="http://schemas.microsoft.com/office/drawing/2014/main" id="{0274EF11-E764-4DBC-A248-59782E0A5DFA}"/>
               </a:ext>
             </a:extLst>
           </p:cNvPr>
@@ -9562,7 +10217,7 @@
           <p:cNvPr id="15" name="">
             <a:extLst xmlns:a="http://schemas.openxmlformats.org/drawingml/2006/main">
               <a:ext uri="{FF2B5EF4-FFF2-40B4-BE49-F238E27FC236}">
-                <a16:creationId xmlns:a16="http://schemas.microsoft.com/office/drawing/2014/main" id="{E7D46F99-0CFC-4E8F-BC68-53C9E50EF572}"/>
+                <a16:creationId xmlns:a16="http://schemas.microsoft.com/office/drawing/2014/main" id="{D646AFB0-748F-4818-A5DA-0AC1C64A9B02}"/>
               </a:ext>
             </a:extLst>
           </p:cNvPr>
@@ -9620,7 +10275,7 @@
                 <a:ea typeface="Pretendard"/>
                 <a:cs typeface="Pretendard"/>
               </a:rPr>
-              <a:t>Blood coagulation tests</a:t>
+              <a:t>Blood coagulation tests (PT/PTT)</a:t>
             </a:r>
           </a:p>
         </p:txBody>
@@ -9630,7 +10285,7 @@
           <p:cNvPr id="16" name="">
             <a:extLst xmlns:a="http://schemas.openxmlformats.org/drawingml/2006/main">
               <a:ext uri="{FF2B5EF4-FFF2-40B4-BE49-F238E27FC236}">
-                <a16:creationId xmlns:a16="http://schemas.microsoft.com/office/drawing/2014/main" id="{DAD3E60B-1A62-4446-8680-70E361EB42E6}"/>
+                <a16:creationId xmlns:a16="http://schemas.microsoft.com/office/drawing/2014/main" id="{4572127D-5224-4988-81EC-F464098C6B48}"/>
               </a:ext>
             </a:extLst>
           </p:cNvPr>
@@ -9688,7 +10343,7 @@
                 <a:ea typeface="Pretendard"/>
                 <a:cs typeface="Pretendard"/>
               </a:rPr>
-              <a:t>Complete blood count (CBC)</a:t>
+              <a:t>TTT (testosterone)</a:t>
             </a:r>
           </a:p>
         </p:txBody>
@@ -9698,7 +10353,7 @@
           <p:cNvPr id="17" name="">
             <a:extLst xmlns:a="http://schemas.openxmlformats.org/drawingml/2006/main">
               <a:ext uri="{FF2B5EF4-FFF2-40B4-BE49-F238E27FC236}">
-                <a16:creationId xmlns:a16="http://schemas.microsoft.com/office/drawing/2014/main" id="{411D0599-3FA7-4655-8D2C-EE663B790610}"/>
+                <a16:creationId xmlns:a16="http://schemas.microsoft.com/office/drawing/2014/main" id="{D8885DF0-7083-4683-8DDB-36E4D7831D42}"/>
               </a:ext>
             </a:extLst>
           </p:cNvPr>
@@ -9756,7 +10411,7 @@
                 <a:ea typeface="Pretendard"/>
                 <a:cs typeface="Pretendard"/>
               </a:rPr>
-              <a:t>Prostate-specific antigen (PSA)</a:t>
+              <a:t>Complete blood count (CBC)</a:t>
             </a:r>
           </a:p>
         </p:txBody>
@@ -9766,7 +10421,7 @@
           <p:cNvPr id="18" name="">
             <a:extLst xmlns:a="http://schemas.openxmlformats.org/drawingml/2006/main">
               <a:ext uri="{FF2B5EF4-FFF2-40B4-BE49-F238E27FC236}">
-                <a16:creationId xmlns:a16="http://schemas.microsoft.com/office/drawing/2014/main" id="{7CD23F2F-C37E-4183-B6B7-C63FCB5D0235}"/>
+                <a16:creationId xmlns:a16="http://schemas.microsoft.com/office/drawing/2014/main" id="{8E70D519-64A3-4420-8763-EC075D8C8742}"/>
               </a:ext>
             </a:extLst>
           </p:cNvPr>
@@ -9824,7 +10479,7 @@
                 <a:ea typeface="Pretendard"/>
                 <a:cs typeface="Pretendard"/>
               </a:rPr>
-              <a:t>Blood glucose</a:t>
+              <a:t>Prostate-specific antigen (PSA)</a:t>
             </a:r>
           </a:p>
         </p:txBody>
@@ -9834,7 +10489,7 @@
           <p:cNvPr id="19" name="">
             <a:extLst xmlns:a="http://schemas.openxmlformats.org/drawingml/2006/main">
               <a:ext uri="{FF2B5EF4-FFF2-40B4-BE49-F238E27FC236}">
-                <a16:creationId xmlns:a16="http://schemas.microsoft.com/office/drawing/2014/main" id="{6B8ED8E9-25ED-4CAB-9A42-8395AC36B760}"/>
+                <a16:creationId xmlns:a16="http://schemas.microsoft.com/office/drawing/2014/main" id="{8348EAC8-A711-45FA-8D95-F16FEA685E1E}"/>
               </a:ext>
             </a:extLst>
           </p:cNvPr>
@@ -9892,7 +10547,7 @@
                 <a:ea typeface="Pretendard"/>
                 <a:cs typeface="Pretendard"/>
               </a:rPr>
-              <a:t>HbA1c (glycated hemoglobin)</a:t>
+              <a:t>Blood glucose (BST/HbA1c)</a:t>
             </a:r>
           </a:p>
         </p:txBody>
@@ -9902,7 +10557,7 @@
           <p:cNvPr id="20" name="">
             <a:extLst xmlns:a="http://schemas.openxmlformats.org/drawingml/2006/main">
               <a:ext uri="{FF2B5EF4-FFF2-40B4-BE49-F238E27FC236}">
-                <a16:creationId xmlns:a16="http://schemas.microsoft.com/office/drawing/2014/main" id="{F9C5AF21-A132-4FE2-AA38-17670C57A6DE}"/>
+                <a16:creationId xmlns:a16="http://schemas.microsoft.com/office/drawing/2014/main" id="{6F8C8ECC-E7D2-4AE6-BA76-773FDD53EC75}"/>
               </a:ext>
             </a:extLst>
           </p:cNvPr>
@@ -9960,7 +10615,7 @@
                 <a:ea typeface="Pretendard"/>
                 <a:cs typeface="Pretendard"/>
               </a:rPr>
-              <a:t>HPV testing</a:t>
+              <a:t>HIV testing</a:t>
             </a:r>
           </a:p>
         </p:txBody>
@@ -9970,7 +10625,7 @@
           <p:cNvPr id="21" name="">
             <a:extLst xmlns:a="http://schemas.openxmlformats.org/drawingml/2006/main">
               <a:ext uri="{FF2B5EF4-FFF2-40B4-BE49-F238E27FC236}">
-                <a16:creationId xmlns:a16="http://schemas.microsoft.com/office/drawing/2014/main" id="{6645BEA7-DBD0-421E-94CE-8AEA969D7345}"/>
+                <a16:creationId xmlns:a16="http://schemas.microsoft.com/office/drawing/2014/main" id="{9DFE3FAA-6786-46D1-A152-6DB09E894A80}"/>
               </a:ext>
             </a:extLst>
           </p:cNvPr>
@@ -10038,7 +10693,7 @@
           <p:cNvPr id="22" name="">
             <a:extLst xmlns:a="http://schemas.openxmlformats.org/drawingml/2006/main">
               <a:ext uri="{FF2B5EF4-FFF2-40B4-BE49-F238E27FC236}">
-                <a16:creationId xmlns:a16="http://schemas.microsoft.com/office/drawing/2014/main" id="{F1F9584A-E4AF-4476-B712-462BEAA7A0F1}"/>
+                <a16:creationId xmlns:a16="http://schemas.microsoft.com/office/drawing/2014/main" id="{4EE96B60-A34A-4F28-9930-59938805EA7B}"/>
               </a:ext>
             </a:extLst>
           </p:cNvPr>
@@ -10106,7 +10761,7 @@
           <p:cNvPr id="23" name="">
             <a:extLst xmlns:a="http://schemas.openxmlformats.org/drawingml/2006/main">
               <a:ext uri="{FF2B5EF4-FFF2-40B4-BE49-F238E27FC236}">
-                <a16:creationId xmlns:a16="http://schemas.microsoft.com/office/drawing/2014/main" id="{0B7AFEDF-8484-4566-B882-42D9249DD9FB}"/>
+                <a16:creationId xmlns:a16="http://schemas.microsoft.com/office/drawing/2014/main" id="{C3C3EDF9-26AF-437C-99EF-CEDC79F07F8B}"/>
               </a:ext>
             </a:extLst>
           </p:cNvPr>
@@ -10164,7 +10819,7 @@
                 <a:ea typeface="Pretendard"/>
                 <a:cs typeface="Pretendard"/>
               </a:rPr>
-              <a:t>Liver function</a:t>
+              <a:t>Liver enzymes (GOT/GPT/GGT)</a:t>
             </a:r>
           </a:p>
         </p:txBody>
@@ -10174,7 +10829,7 @@
           <p:cNvPr id="24" name="">
             <a:extLst xmlns:a="http://schemas.openxmlformats.org/drawingml/2006/main">
               <a:ext uri="{FF2B5EF4-FFF2-40B4-BE49-F238E27FC236}">
-                <a16:creationId xmlns:a16="http://schemas.microsoft.com/office/drawing/2014/main" id="{7E3443A2-5A73-401F-AE23-E064823F62BF}"/>
+                <a16:creationId xmlns:a16="http://schemas.microsoft.com/office/drawing/2014/main" id="{B2892F91-C133-4502-9E75-EF0A6426979F}"/>
               </a:ext>
             </a:extLst>
           </p:cNvPr>
@@ -10242,7 +10897,7 @@
           <p:cNvPr id="25" name="">
             <a:extLst xmlns:a="http://schemas.openxmlformats.org/drawingml/2006/main">
               <a:ext uri="{FF2B5EF4-FFF2-40B4-BE49-F238E27FC236}">
-                <a16:creationId xmlns:a16="http://schemas.microsoft.com/office/drawing/2014/main" id="{AF42D713-6D6B-4A28-86DC-9B9618B68593}"/>
+                <a16:creationId xmlns:a16="http://schemas.microsoft.com/office/drawing/2014/main" id="{033DF740-109A-4633-887E-C589301DC08E}"/>
               </a:ext>
             </a:extLst>
           </p:cNvPr>
@@ -10310,7 +10965,7 @@
           <p:cNvPr id="26" name="">
             <a:extLst xmlns:a="http://schemas.openxmlformats.org/drawingml/2006/main">
               <a:ext uri="{FF2B5EF4-FFF2-40B4-BE49-F238E27FC236}">
-                <a16:creationId xmlns:a16="http://schemas.microsoft.com/office/drawing/2014/main" id="{1FA6672E-A783-4D16-9A27-035C12082961}"/>
+                <a16:creationId xmlns:a16="http://schemas.microsoft.com/office/drawing/2014/main" id="{7B7FEAD0-9BB7-4087-9437-BC1B1BEEA4EE}"/>
               </a:ext>
             </a:extLst>
           </p:cNvPr>
@@ -10376,7 +11031,7 @@
     </p:spTree>
     <p:extLst>
       <p:ext uri="{BB962C8B-B14F-4D97-AF65-F5344CB8AC3E}">
-        <p14:creationId xmlns:p14="http://schemas.microsoft.com/office/powerpoint/2010/main" val="489602420"/>
+        <p14:creationId xmlns:p14="http://schemas.microsoft.com/office/powerpoint/2010/main" val="161805036"/>
       </p:ext>
     </p:extLst>
   </p:cSld>
@@ -10407,7 +11062,7 @@
           <p:cNvPr id="7" name="">
             <a:extLst xmlns:a="http://schemas.openxmlformats.org/drawingml/2006/main">
               <a:ext uri="{FF2B5EF4-FFF2-40B4-BE49-F238E27FC236}">
-                <a16:creationId xmlns:a16="http://schemas.microsoft.com/office/drawing/2014/main" id="{827D09AD-F5D8-42BF-94EF-CFB2EE192036}"/>
+                <a16:creationId xmlns:a16="http://schemas.microsoft.com/office/drawing/2014/main" id="{871F1DC7-0711-4FD8-8222-E755C521248E}"/>
               </a:ext>
             </a:extLst>
           </p:cNvPr>
@@ -10475,7 +11130,7 @@
           <p:cNvPr id="2" name="">
             <a:extLst xmlns:a="http://schemas.openxmlformats.org/drawingml/2006/main">
               <a:ext uri="{FF2B5EF4-FFF2-40B4-BE49-F238E27FC236}">
-                <a16:creationId xmlns:a16="http://schemas.microsoft.com/office/drawing/2014/main" id="{A93B6540-F3DD-4C63-91E3-3D81E79AB990}"/>
+                <a16:creationId xmlns:a16="http://schemas.microsoft.com/office/drawing/2014/main" id="{83E559EE-89AD-4476-8EE1-B2180305B0FA}"/>
               </a:ext>
             </a:extLst>
           </p:cNvPr>
@@ -10543,7 +11198,7 @@
           <p:cNvPr id="3" name="">
             <a:extLst xmlns:a="http://schemas.openxmlformats.org/drawingml/2006/main">
               <a:ext uri="{FF2B5EF4-FFF2-40B4-BE49-F238E27FC236}">
-                <a16:creationId xmlns:a16="http://schemas.microsoft.com/office/drawing/2014/main" id="{B89DA20D-4428-4C4B-A4F4-698245AB596C}"/>
+                <a16:creationId xmlns:a16="http://schemas.microsoft.com/office/drawing/2014/main" id="{92E8407A-0E67-44DC-8298-5ABD475938D9}"/>
               </a:ext>
             </a:extLst>
           </p:cNvPr>
@@ -10553,7 +11208,7 @@
           <p:nvPr/>
         </p:nvPicPr>
         <p:blipFill>
-          <a:blip xmlns:r="http://schemas.openxmlformats.org/officeDocument/2006/relationships" xmlns:a="http://schemas.openxmlformats.org/drawingml/2006/main" r:embed="Rc52bb6764c05416d"/>
+          <a:blip xmlns:r="http://schemas.openxmlformats.org/officeDocument/2006/relationships" xmlns:a="http://schemas.openxmlformats.org/drawingml/2006/main" r:embed="R82245ccac42848b4"/>
           <a:stretch xmlns:a="http://schemas.openxmlformats.org/drawingml/2006/main"/>
         </p:blipFill>
         <p:spPr>
@@ -10571,7 +11226,7 @@
           <p:cNvPr id="4" name="">
             <a:extLst xmlns:a="http://schemas.openxmlformats.org/drawingml/2006/main">
               <a:ext uri="{FF2B5EF4-FFF2-40B4-BE49-F238E27FC236}">
-                <a16:creationId xmlns:a16="http://schemas.microsoft.com/office/drawing/2014/main" id="{13F70C19-F192-4A49-9598-9354B62E14E7}"/>
+                <a16:creationId xmlns:a16="http://schemas.microsoft.com/office/drawing/2014/main" id="{442BCE9A-4E69-4BA2-98A7-705C5956A18A}"/>
               </a:ext>
             </a:extLst>
           </p:cNvPr>
@@ -10601,7 +11256,7 @@
           <p:cNvPr id="5" name="">
             <a:extLst xmlns:a="http://schemas.openxmlformats.org/drawingml/2006/main">
               <a:ext uri="{FF2B5EF4-FFF2-40B4-BE49-F238E27FC236}">
-                <a16:creationId xmlns:a16="http://schemas.microsoft.com/office/drawing/2014/main" id="{FE470C87-4D92-4116-B9A1-BDC52F79B882}"/>
+                <a16:creationId xmlns:a16="http://schemas.microsoft.com/office/drawing/2014/main" id="{118997D5-4AB6-4172-8A7B-1F37BCF98B64}"/>
               </a:ext>
             </a:extLst>
           </p:cNvPr>
@@ -10669,7 +11324,7 @@
           <p:cNvPr id="6" name="">
             <a:extLst xmlns:a="http://schemas.openxmlformats.org/drawingml/2006/main">
               <a:ext uri="{FF2B5EF4-FFF2-40B4-BE49-F238E27FC236}">
-                <a16:creationId xmlns:a16="http://schemas.microsoft.com/office/drawing/2014/main" id="{3144870D-0D3E-4278-9EF2-5A82126E9620}"/>
+                <a16:creationId xmlns:a16="http://schemas.microsoft.com/office/drawing/2014/main" id="{C9D78242-349D-45E8-BDF6-E930311E9A50}"/>
               </a:ext>
             </a:extLst>
           </p:cNvPr>
@@ -10735,7 +11390,7 @@
     </p:spTree>
     <p:extLst>
       <p:ext uri="{BB962C8B-B14F-4D97-AF65-F5344CB8AC3E}">
-        <p14:creationId xmlns:p14="http://schemas.microsoft.com/office/powerpoint/2010/main" val="43236006"/>
+        <p14:creationId xmlns:p14="http://schemas.microsoft.com/office/powerpoint/2010/main" val="964826449"/>
       </p:ext>
     </p:extLst>
   </p:cSld>
@@ -10766,7 +11421,7 @@
           <p:cNvPr id="7" name="">
             <a:extLst xmlns:a="http://schemas.openxmlformats.org/drawingml/2006/main">
               <a:ext uri="{FF2B5EF4-FFF2-40B4-BE49-F238E27FC236}">
-                <a16:creationId xmlns:a16="http://schemas.microsoft.com/office/drawing/2014/main" id="{5C77C5B1-328B-4EE5-A4ED-674805CDB200}"/>
+                <a16:creationId xmlns:a16="http://schemas.microsoft.com/office/drawing/2014/main" id="{2C8D0742-AD12-4E59-A4AC-F5DCE09CCABD}"/>
               </a:ext>
             </a:extLst>
           </p:cNvPr>
@@ -10834,7 +11489,7 @@
           <p:cNvPr id="2" name="">
             <a:extLst xmlns:a="http://schemas.openxmlformats.org/drawingml/2006/main">
               <a:ext uri="{FF2B5EF4-FFF2-40B4-BE49-F238E27FC236}">
-                <a16:creationId xmlns:a16="http://schemas.microsoft.com/office/drawing/2014/main" id="{BCA8FCE8-F615-42CE-A51D-86F9D065BDE0}"/>
+                <a16:creationId xmlns:a16="http://schemas.microsoft.com/office/drawing/2014/main" id="{341A5E4A-0A7B-406A-B212-4994C49CAD29}"/>
               </a:ext>
             </a:extLst>
           </p:cNvPr>
@@ -10902,7 +11557,7 @@
           <p:cNvPr id="3" name="">
             <a:extLst xmlns:a="http://schemas.openxmlformats.org/drawingml/2006/main">
               <a:ext uri="{FF2B5EF4-FFF2-40B4-BE49-F238E27FC236}">
-                <a16:creationId xmlns:a16="http://schemas.microsoft.com/office/drawing/2014/main" id="{B2DBF23C-4743-49AC-9A19-BFDDE55E49CE}"/>
+                <a16:creationId xmlns:a16="http://schemas.microsoft.com/office/drawing/2014/main" id="{637E1D12-415C-49EA-8564-DE54F21B58FC}"/>
               </a:ext>
             </a:extLst>
           </p:cNvPr>
@@ -10912,7 +11567,7 @@
           <p:nvPr/>
         </p:nvPicPr>
         <p:blipFill>
-          <a:blip xmlns:r="http://schemas.openxmlformats.org/officeDocument/2006/relationships" xmlns:a="http://schemas.openxmlformats.org/drawingml/2006/main" r:embed="Re50b36ccc947498f"/>
+          <a:blip xmlns:r="http://schemas.openxmlformats.org/officeDocument/2006/relationships" xmlns:a="http://schemas.openxmlformats.org/drawingml/2006/main" r:embed="R7361408f9a654f87"/>
           <a:stretch xmlns:a="http://schemas.openxmlformats.org/drawingml/2006/main"/>
         </p:blipFill>
         <p:spPr>
@@ -10930,7 +11585,7 @@
           <p:cNvPr id="4" name="">
             <a:extLst xmlns:a="http://schemas.openxmlformats.org/drawingml/2006/main">
               <a:ext uri="{FF2B5EF4-FFF2-40B4-BE49-F238E27FC236}">
-                <a16:creationId xmlns:a16="http://schemas.microsoft.com/office/drawing/2014/main" id="{AC90B3C0-6AD1-4A36-8E71-574A91F42A1A}"/>
+                <a16:creationId xmlns:a16="http://schemas.microsoft.com/office/drawing/2014/main" id="{9C10178B-BE7E-49E8-A596-21D046CEBBFC}"/>
               </a:ext>
             </a:extLst>
           </p:cNvPr>
@@ -10960,7 +11615,7 @@
           <p:cNvPr id="5" name="">
             <a:extLst xmlns:a="http://schemas.openxmlformats.org/drawingml/2006/main">
               <a:ext uri="{FF2B5EF4-FFF2-40B4-BE49-F238E27FC236}">
-                <a16:creationId xmlns:a16="http://schemas.microsoft.com/office/drawing/2014/main" id="{0F4E9914-8503-4B4D-ABA2-690F6E1F8785}"/>
+                <a16:creationId xmlns:a16="http://schemas.microsoft.com/office/drawing/2014/main" id="{417CB957-964D-40E8-9861-358265BEE2CB}"/>
               </a:ext>
             </a:extLst>
           </p:cNvPr>
@@ -11028,7 +11683,7 @@
           <p:cNvPr id="6" name="">
             <a:extLst xmlns:a="http://schemas.openxmlformats.org/drawingml/2006/main">
               <a:ext uri="{FF2B5EF4-FFF2-40B4-BE49-F238E27FC236}">
-                <a16:creationId xmlns:a16="http://schemas.microsoft.com/office/drawing/2014/main" id="{0B83710F-FCE4-454C-BCC8-678F7619E550}"/>
+                <a16:creationId xmlns:a16="http://schemas.microsoft.com/office/drawing/2014/main" id="{D6E9E2F8-813D-463B-971B-74CBBD6E0B5B}"/>
               </a:ext>
             </a:extLst>
           </p:cNvPr>
@@ -11094,7 +11749,7 @@
     </p:spTree>
     <p:extLst>
       <p:ext uri="{BB962C8B-B14F-4D97-AF65-F5344CB8AC3E}">
-        <p14:creationId xmlns:p14="http://schemas.microsoft.com/office/powerpoint/2010/main" val="1460051088"/>
+        <p14:creationId xmlns:p14="http://schemas.microsoft.com/office/powerpoint/2010/main" val="562962979"/>
       </p:ext>
     </p:extLst>
   </p:cSld>
@@ -11125,7 +11780,7 @@
           <p:cNvPr id="7" name="">
             <a:extLst xmlns:a="http://schemas.openxmlformats.org/drawingml/2006/main">
               <a:ext uri="{FF2B5EF4-FFF2-40B4-BE49-F238E27FC236}">
-                <a16:creationId xmlns:a16="http://schemas.microsoft.com/office/drawing/2014/main" id="{66E65A33-1478-45DE-A55B-860E66174ED4}"/>
+                <a16:creationId xmlns:a16="http://schemas.microsoft.com/office/drawing/2014/main" id="{BDCB4C41-E973-4B04-82A8-7E787910F437}"/>
               </a:ext>
             </a:extLst>
           </p:cNvPr>
@@ -11193,7 +11848,7 @@
           <p:cNvPr id="2" name="">
             <a:extLst xmlns:a="http://schemas.openxmlformats.org/drawingml/2006/main">
               <a:ext uri="{FF2B5EF4-FFF2-40B4-BE49-F238E27FC236}">
-                <a16:creationId xmlns:a16="http://schemas.microsoft.com/office/drawing/2014/main" id="{52F71B2E-90D2-4701-BC43-5F211436DE7B}"/>
+                <a16:creationId xmlns:a16="http://schemas.microsoft.com/office/drawing/2014/main" id="{D6483EEA-D620-4C0E-973B-714571A4DAD8}"/>
               </a:ext>
             </a:extLst>
           </p:cNvPr>
@@ -11261,7 +11916,7 @@
           <p:cNvPr id="3" name="">
             <a:extLst xmlns:a="http://schemas.openxmlformats.org/drawingml/2006/main">
               <a:ext uri="{FF2B5EF4-FFF2-40B4-BE49-F238E27FC236}">
-                <a16:creationId xmlns:a16="http://schemas.microsoft.com/office/drawing/2014/main" id="{14E4716D-5330-4F48-BEA9-25F31212A679}"/>
+                <a16:creationId xmlns:a16="http://schemas.microsoft.com/office/drawing/2014/main" id="{8C621C21-92D0-4AF3-AEFE-32A680B94CFC}"/>
               </a:ext>
             </a:extLst>
           </p:cNvPr>
@@ -11271,7 +11926,7 @@
           <p:nvPr/>
         </p:nvPicPr>
         <p:blipFill>
-          <a:blip xmlns:r="http://schemas.openxmlformats.org/officeDocument/2006/relationships" xmlns:a="http://schemas.openxmlformats.org/drawingml/2006/main" r:embed="Ra69d2eebf0f8423c"/>
+          <a:blip xmlns:r="http://schemas.openxmlformats.org/officeDocument/2006/relationships" xmlns:a="http://schemas.openxmlformats.org/drawingml/2006/main" r:embed="Rf84f5926fd584d12"/>
           <a:stretch xmlns:a="http://schemas.openxmlformats.org/drawingml/2006/main"/>
         </p:blipFill>
         <p:spPr>
@@ -11289,7 +11944,7 @@
           <p:cNvPr id="4" name="">
             <a:extLst xmlns:a="http://schemas.openxmlformats.org/drawingml/2006/main">
               <a:ext uri="{FF2B5EF4-FFF2-40B4-BE49-F238E27FC236}">
-                <a16:creationId xmlns:a16="http://schemas.microsoft.com/office/drawing/2014/main" id="{1D5A63D8-D951-41FF-B99C-023FDC51B58B}"/>
+                <a16:creationId xmlns:a16="http://schemas.microsoft.com/office/drawing/2014/main" id="{1C51E2C9-1B2F-4EEE-A561-4CB0B476F295}"/>
               </a:ext>
             </a:extLst>
           </p:cNvPr>
@@ -11319,7 +11974,7 @@
           <p:cNvPr id="5" name="">
             <a:extLst xmlns:a="http://schemas.openxmlformats.org/drawingml/2006/main">
               <a:ext uri="{FF2B5EF4-FFF2-40B4-BE49-F238E27FC236}">
-                <a16:creationId xmlns:a16="http://schemas.microsoft.com/office/drawing/2014/main" id="{81CD9DCF-87AA-4557-89CA-41CCBFA8D115}"/>
+                <a16:creationId xmlns:a16="http://schemas.microsoft.com/office/drawing/2014/main" id="{BB2D8F1C-3430-4124-9CC1-A373707B3FAC}"/>
               </a:ext>
             </a:extLst>
           </p:cNvPr>
@@ -11387,7 +12042,7 @@
           <p:cNvPr id="6" name="">
             <a:extLst xmlns:a="http://schemas.openxmlformats.org/drawingml/2006/main">
               <a:ext uri="{FF2B5EF4-FFF2-40B4-BE49-F238E27FC236}">
-                <a16:creationId xmlns:a16="http://schemas.microsoft.com/office/drawing/2014/main" id="{65A0508E-7F63-44EC-8DEE-34C68ED8E72A}"/>
+                <a16:creationId xmlns:a16="http://schemas.microsoft.com/office/drawing/2014/main" id="{3419E3DB-FD25-4058-AA93-D83D152C2615}"/>
               </a:ext>
             </a:extLst>
           </p:cNvPr>
@@ -11453,7 +12108,7 @@
     </p:spTree>
     <p:extLst>
       <p:ext uri="{BB962C8B-B14F-4D97-AF65-F5344CB8AC3E}">
-        <p14:creationId xmlns:p14="http://schemas.microsoft.com/office/powerpoint/2010/main" val="50214318"/>
+        <p14:creationId xmlns:p14="http://schemas.microsoft.com/office/powerpoint/2010/main" val="1230044322"/>
       </p:ext>
     </p:extLst>
   </p:cSld>
@@ -11484,7 +12139,7 @@
           <p:cNvPr id="7" name="">
             <a:extLst xmlns:a="http://schemas.openxmlformats.org/drawingml/2006/main">
               <a:ext uri="{FF2B5EF4-FFF2-40B4-BE49-F238E27FC236}">
-                <a16:creationId xmlns:a16="http://schemas.microsoft.com/office/drawing/2014/main" id="{FDFE57C6-71EB-4AAD-A1C6-534667093B2B}"/>
+                <a16:creationId xmlns:a16="http://schemas.microsoft.com/office/drawing/2014/main" id="{013B8CFE-AFAC-4F29-BAE2-22E42E93959B}"/>
               </a:ext>
             </a:extLst>
           </p:cNvPr>
@@ -11552,7 +12207,7 @@
           <p:cNvPr id="2" name="">
             <a:extLst xmlns:a="http://schemas.openxmlformats.org/drawingml/2006/main">
               <a:ext uri="{FF2B5EF4-FFF2-40B4-BE49-F238E27FC236}">
-                <a16:creationId xmlns:a16="http://schemas.microsoft.com/office/drawing/2014/main" id="{EEE9FE4B-75D8-4C3B-9CD0-1D8CA7B45A23}"/>
+                <a16:creationId xmlns:a16="http://schemas.microsoft.com/office/drawing/2014/main" id="{34B3691A-77AB-415A-AC36-367285055C12}"/>
               </a:ext>
             </a:extLst>
           </p:cNvPr>
@@ -11620,7 +12275,7 @@
           <p:cNvPr id="3" name="">
             <a:extLst xmlns:a="http://schemas.openxmlformats.org/drawingml/2006/main">
               <a:ext uri="{FF2B5EF4-FFF2-40B4-BE49-F238E27FC236}">
-                <a16:creationId xmlns:a16="http://schemas.microsoft.com/office/drawing/2014/main" id="{E5722E21-3F88-4521-82CA-3B3BB0947D94}"/>
+                <a16:creationId xmlns:a16="http://schemas.microsoft.com/office/drawing/2014/main" id="{0F80B87A-A315-446F-80F9-1AB3A3EC42C6}"/>
               </a:ext>
             </a:extLst>
           </p:cNvPr>
@@ -11630,7 +12285,7 @@
           <p:nvPr/>
         </p:nvPicPr>
         <p:blipFill>
-          <a:blip xmlns:r="http://schemas.openxmlformats.org/officeDocument/2006/relationships" xmlns:a="http://schemas.openxmlformats.org/drawingml/2006/main" r:embed="R9356ea0803d2489b"/>
+          <a:blip xmlns:r="http://schemas.openxmlformats.org/officeDocument/2006/relationships" xmlns:a="http://schemas.openxmlformats.org/drawingml/2006/main" r:embed="Rf8b0d752d97c42c2"/>
           <a:stretch xmlns:a="http://schemas.openxmlformats.org/drawingml/2006/main"/>
         </p:blipFill>
         <p:spPr>
@@ -11648,7 +12303,7 @@
           <p:cNvPr id="4" name="">
             <a:extLst xmlns:a="http://schemas.openxmlformats.org/drawingml/2006/main">
               <a:ext uri="{FF2B5EF4-FFF2-40B4-BE49-F238E27FC236}">
-                <a16:creationId xmlns:a16="http://schemas.microsoft.com/office/drawing/2014/main" id="{C7AE2A5A-3136-4E1B-8D3A-6379304D3F07}"/>
+                <a16:creationId xmlns:a16="http://schemas.microsoft.com/office/drawing/2014/main" id="{F9E7166F-FAE2-491B-B7C1-9DB1CE2BE20E}"/>
               </a:ext>
             </a:extLst>
           </p:cNvPr>
@@ -11678,7 +12333,7 @@
           <p:cNvPr id="5" name="">
             <a:extLst xmlns:a="http://schemas.openxmlformats.org/drawingml/2006/main">
               <a:ext uri="{FF2B5EF4-FFF2-40B4-BE49-F238E27FC236}">
-                <a16:creationId xmlns:a16="http://schemas.microsoft.com/office/drawing/2014/main" id="{AAE17AEB-65FA-4218-A45F-FF350D3BEA98}"/>
+                <a16:creationId xmlns:a16="http://schemas.microsoft.com/office/drawing/2014/main" id="{11736035-198A-4DD5-956C-AA1AA059B4C8}"/>
               </a:ext>
             </a:extLst>
           </p:cNvPr>
@@ -11746,7 +12401,7 @@
           <p:cNvPr id="6" name="">
             <a:extLst xmlns:a="http://schemas.openxmlformats.org/drawingml/2006/main">
               <a:ext uri="{FF2B5EF4-FFF2-40B4-BE49-F238E27FC236}">
-                <a16:creationId xmlns:a16="http://schemas.microsoft.com/office/drawing/2014/main" id="{DB584A84-242D-42FE-B60B-AAC075009550}"/>
+                <a16:creationId xmlns:a16="http://schemas.microsoft.com/office/drawing/2014/main" id="{52D42E1C-28E5-4F7B-83B9-9C67936654A5}"/>
               </a:ext>
             </a:extLst>
           </p:cNvPr>
@@ -11812,7 +12467,7 @@
     </p:spTree>
     <p:extLst>
       <p:ext uri="{BB962C8B-B14F-4D97-AF65-F5344CB8AC3E}">
-        <p14:creationId xmlns:p14="http://schemas.microsoft.com/office/powerpoint/2010/main" val="1758296185"/>
+        <p14:creationId xmlns:p14="http://schemas.microsoft.com/office/powerpoint/2010/main" val="1796714502"/>
       </p:ext>
     </p:extLst>
   </p:cSld>
@@ -11843,7 +12498,7 @@
           <p:cNvPr id="7" name="">
             <a:extLst xmlns:a="http://schemas.openxmlformats.org/drawingml/2006/main">
               <a:ext uri="{FF2B5EF4-FFF2-40B4-BE49-F238E27FC236}">
-                <a16:creationId xmlns:a16="http://schemas.microsoft.com/office/drawing/2014/main" id="{2BEFFF0C-5F1A-430F-8F68-794ADC1F1643}"/>
+                <a16:creationId xmlns:a16="http://schemas.microsoft.com/office/drawing/2014/main" id="{30B38F70-727C-4F05-AA52-804227A197EA}"/>
               </a:ext>
             </a:extLst>
           </p:cNvPr>
@@ -11911,7 +12566,7 @@
           <p:cNvPr id="2" name="">
             <a:extLst xmlns:a="http://schemas.openxmlformats.org/drawingml/2006/main">
               <a:ext uri="{FF2B5EF4-FFF2-40B4-BE49-F238E27FC236}">
-                <a16:creationId xmlns:a16="http://schemas.microsoft.com/office/drawing/2014/main" id="{AA37BA3E-90F8-4BE9-9A09-4798F6E16573}"/>
+                <a16:creationId xmlns:a16="http://schemas.microsoft.com/office/drawing/2014/main" id="{D14034BC-B393-42B6-BBC2-6CCF0240FBD9}"/>
               </a:ext>
             </a:extLst>
           </p:cNvPr>
@@ -11979,7 +12634,7 @@
           <p:cNvPr id="3" name="">
             <a:extLst xmlns:a="http://schemas.openxmlformats.org/drawingml/2006/main">
               <a:ext uri="{FF2B5EF4-FFF2-40B4-BE49-F238E27FC236}">
-                <a16:creationId xmlns:a16="http://schemas.microsoft.com/office/drawing/2014/main" id="{E921F0D3-F3F2-4EB6-A693-4FCAE4BCE6FA}"/>
+                <a16:creationId xmlns:a16="http://schemas.microsoft.com/office/drawing/2014/main" id="{8F244830-DA4D-4636-83B9-149D9F68E373}"/>
               </a:ext>
             </a:extLst>
           </p:cNvPr>
@@ -11989,7 +12644,7 @@
           <p:nvPr/>
         </p:nvPicPr>
         <p:blipFill>
-          <a:blip xmlns:r="http://schemas.openxmlformats.org/officeDocument/2006/relationships" xmlns:a="http://schemas.openxmlformats.org/drawingml/2006/main" r:embed="Rf976ad09c42345e5"/>
+          <a:blip xmlns:r="http://schemas.openxmlformats.org/officeDocument/2006/relationships" xmlns:a="http://schemas.openxmlformats.org/drawingml/2006/main" r:embed="R8e8f5a2ce3b44bf3"/>
           <a:stretch xmlns:a="http://schemas.openxmlformats.org/drawingml/2006/main"/>
         </p:blipFill>
         <p:spPr>
@@ -12007,7 +12662,7 @@
           <p:cNvPr id="4" name="">
             <a:extLst xmlns:a="http://schemas.openxmlformats.org/drawingml/2006/main">
               <a:ext uri="{FF2B5EF4-FFF2-40B4-BE49-F238E27FC236}">
-                <a16:creationId xmlns:a16="http://schemas.microsoft.com/office/drawing/2014/main" id="{229ABFE0-A0C8-49ED-99B1-BD252FC6DAAE}"/>
+                <a16:creationId xmlns:a16="http://schemas.microsoft.com/office/drawing/2014/main" id="{A8992244-DA3A-4CF9-8EBD-BA2FDA08E421}"/>
               </a:ext>
             </a:extLst>
           </p:cNvPr>
@@ -12037,7 +12692,7 @@
           <p:cNvPr id="5" name="">
             <a:extLst xmlns:a="http://schemas.openxmlformats.org/drawingml/2006/main">
               <a:ext uri="{FF2B5EF4-FFF2-40B4-BE49-F238E27FC236}">
-                <a16:creationId xmlns:a16="http://schemas.microsoft.com/office/drawing/2014/main" id="{9CE3A00B-9BFB-46BA-8F40-36EA2F76030D}"/>
+                <a16:creationId xmlns:a16="http://schemas.microsoft.com/office/drawing/2014/main" id="{AD26CD87-9580-4ABB-AAB2-8688D99C3A45}"/>
               </a:ext>
             </a:extLst>
           </p:cNvPr>
@@ -12105,7 +12760,7 @@
           <p:cNvPr id="6" name="">
             <a:extLst xmlns:a="http://schemas.openxmlformats.org/drawingml/2006/main">
               <a:ext uri="{FF2B5EF4-FFF2-40B4-BE49-F238E27FC236}">
-                <a16:creationId xmlns:a16="http://schemas.microsoft.com/office/drawing/2014/main" id="{37B75E12-02D1-4A19-ABA2-7A225ACA85A0}"/>
+                <a16:creationId xmlns:a16="http://schemas.microsoft.com/office/drawing/2014/main" id="{5CAB2392-F8FE-46B6-BF4C-00BE773AC863}"/>
               </a:ext>
             </a:extLst>
           </p:cNvPr>
@@ -12171,7 +12826,7 @@
     </p:spTree>
     <p:extLst>
       <p:ext uri="{BB962C8B-B14F-4D97-AF65-F5344CB8AC3E}">
-        <p14:creationId xmlns:p14="http://schemas.microsoft.com/office/powerpoint/2010/main" val="533758187"/>
+        <p14:creationId xmlns:p14="http://schemas.microsoft.com/office/powerpoint/2010/main" val="1990357416"/>
       </p:ext>
     </p:extLst>
   </p:cSld>

--- a/downloads/highst-perioperative-webinar.pptx
+++ b/downloads/highst-perioperative-webinar.pptx
@@ -2,25 +2,25 @@
 <file path=ppt/presentation.xml><?xml version="1.0" encoding="utf-8"?>
 <p:presentation xmlns:p="http://schemas.openxmlformats.org/presentationml/2006/main">
   <p:sldMasterIdLst>
-    <p:sldMasterId xmlns:r="http://schemas.openxmlformats.org/officeDocument/2006/relationships" id="2147483648" r:id="Rf174e4b225cf4283"/>
+    <p:sldMasterId xmlns:r="http://schemas.openxmlformats.org/officeDocument/2006/relationships" id="2147483648" r:id="R77cca2339b0745d5"/>
   </p:sldMasterIdLst>
   <p:notesMasterIdLst>
-    <p:notesMasterId xmlns:r="http://schemas.openxmlformats.org/officeDocument/2006/relationships" r:id="R70bdac0a05a54c6c"/>
+    <p:notesMasterId xmlns:r="http://schemas.openxmlformats.org/officeDocument/2006/relationships" r:id="Rb73c3fa6615b4094"/>
   </p:notesMasterIdLst>
   <p:sldIdLst>
-    <p:sldId xmlns:r="http://schemas.openxmlformats.org/officeDocument/2006/relationships" id="256" r:id="Rbe58da2b5b2d4067"/>
-    <p:sldId xmlns:r="http://schemas.openxmlformats.org/officeDocument/2006/relationships" id="257" r:id="Rafd89f7b87474059"/>
-    <p:sldId xmlns:r="http://schemas.openxmlformats.org/officeDocument/2006/relationships" id="258" r:id="R195a4354cd494fa9"/>
-    <p:sldId xmlns:r="http://schemas.openxmlformats.org/officeDocument/2006/relationships" id="259" r:id="Rcf15e413812e4434"/>
-    <p:sldId xmlns:r="http://schemas.openxmlformats.org/officeDocument/2006/relationships" id="260" r:id="Rd7289ae521a54173"/>
-    <p:sldId xmlns:r="http://schemas.openxmlformats.org/officeDocument/2006/relationships" id="261" r:id="Rf1dc2c0a987d4bcc"/>
-    <p:sldId xmlns:r="http://schemas.openxmlformats.org/officeDocument/2006/relationships" id="262" r:id="Ra0b5ffc5ab06461e"/>
-    <p:sldId xmlns:r="http://schemas.openxmlformats.org/officeDocument/2006/relationships" id="263" r:id="Raf84e70c01f34baf"/>
-    <p:sldId xmlns:r="http://schemas.openxmlformats.org/officeDocument/2006/relationships" id="264" r:id="R18dfae837995417d"/>
-    <p:sldId xmlns:r="http://schemas.openxmlformats.org/officeDocument/2006/relationships" id="265" r:id="R34bd665d9de04d03"/>
-    <p:sldId xmlns:r="http://schemas.openxmlformats.org/officeDocument/2006/relationships" id="266" r:id="R73d659385c174b99"/>
-    <p:sldId xmlns:r="http://schemas.openxmlformats.org/officeDocument/2006/relationships" id="267" r:id="R978007f9dc064b17"/>
-    <p:sldId xmlns:r="http://schemas.openxmlformats.org/officeDocument/2006/relationships" id="268" r:id="R3c096cac75f140a3"/>
+    <p:sldId xmlns:r="http://schemas.openxmlformats.org/officeDocument/2006/relationships" id="256" r:id="Rc6675f97d6ab4d92"/>
+    <p:sldId xmlns:r="http://schemas.openxmlformats.org/officeDocument/2006/relationships" id="257" r:id="R6ca85a7fdef54dc8"/>
+    <p:sldId xmlns:r="http://schemas.openxmlformats.org/officeDocument/2006/relationships" id="258" r:id="Rc26acf5f1c564da5"/>
+    <p:sldId xmlns:r="http://schemas.openxmlformats.org/officeDocument/2006/relationships" id="259" r:id="R74405e35741c4b0e"/>
+    <p:sldId xmlns:r="http://schemas.openxmlformats.org/officeDocument/2006/relationships" id="260" r:id="R133da9dfdc8243e7"/>
+    <p:sldId xmlns:r="http://schemas.openxmlformats.org/officeDocument/2006/relationships" id="261" r:id="R0778751e8bcd40dd"/>
+    <p:sldId xmlns:r="http://schemas.openxmlformats.org/officeDocument/2006/relationships" id="262" r:id="R7f87b04a50f2468e"/>
+    <p:sldId xmlns:r="http://schemas.openxmlformats.org/officeDocument/2006/relationships" id="263" r:id="R7a568f22282544be"/>
+    <p:sldId xmlns:r="http://schemas.openxmlformats.org/officeDocument/2006/relationships" id="264" r:id="R1970b293a238427f"/>
+    <p:sldId xmlns:r="http://schemas.openxmlformats.org/officeDocument/2006/relationships" id="265" r:id="R0b4f76b2b5c74266"/>
+    <p:sldId xmlns:r="http://schemas.openxmlformats.org/officeDocument/2006/relationships" id="266" r:id="R6356119bf56a423e"/>
+    <p:sldId xmlns:r="http://schemas.openxmlformats.org/officeDocument/2006/relationships" id="267" r:id="Ra74d322a2cd8447e"/>
+    <p:sldId xmlns:r="http://schemas.openxmlformats.org/officeDocument/2006/relationships" id="268" r:id="R40ff92a41776400e"/>
   </p:sldIdLst>
   <p:sldSz cx="12192000" cy="6858000"/>
   <p:notesSz cx="6858000" cy="9144000"/>
@@ -454,52 +454,7 @@
           <a:lstStyle xmlns:a="http://schemas.openxmlformats.org/drawingml/2006/main"/>
           <a:p xmlns:a="http://schemas.openxmlformats.org/drawingml/2006/main">
             <a:r>
-              <a:t>English speaker cues</a:t>
-            </a:r>
-          </a:p>
-          <a:p xmlns:a="http://schemas.openxmlformats.org/drawingml/2006/main">
-            <a:r>
-              <a:t>1. Welcome: Thank you for joining us today.</a:t>
-            </a:r>
-          </a:p>
-          <a:p xmlns:a="http://schemas.openxmlformats.org/drawingml/2006/main">
-            <a:r>
-              <a:t>2. Introduction: Jinmo Koo / HIGHST Urology, Korea</a:t>
-            </a:r>
-          </a:p>
-          <a:p xmlns:a="http://schemas.openxmlformats.org/drawingml/2006/main">
-            <a:r>
-              <a:t>3. Topic: MegaDerm penile augmentation</a:t>
-            </a:r>
-          </a:p>
-          <a:p xmlns:a="http://schemas.openxmlformats.org/drawingml/2006/main">
-            <a:r>
-              <a:t>4. Today’s focus: Preoperative evaluation / surgical videos / complications / postoperative care</a:t>
-            </a:r>
-          </a:p>
-          <a:p xmlns:a="http://schemas.openxmlformats.org/drawingml/2006/main">
-            <a:r>
-              <a:t/>
-            </a:r>
-          </a:p>
-          <a:p xmlns:a="http://schemas.openxmlformats.org/drawingml/2006/main">
-            <a:r>
-              <a:t>Next: First, let me briefly introduce myself.</a:t>
-            </a:r>
-          </a:p>
-          <a:p xmlns:a="http://schemas.openxmlformats.org/drawingml/2006/main">
-            <a:r>
-              <a:t/>
-            </a:r>
-          </a:p>
-          <a:p xmlns:a="http://schemas.openxmlformats.org/drawingml/2006/main">
-            <a:r>
-              <a:t>Reference notes</a:t>
-            </a:r>
-          </a:p>
-          <a:p xmlns:a="http://schemas.openxmlformats.org/drawingml/2006/main">
-            <a:r>
-              <a:t>Jinmo Koo, HIGHST Urology. Vietnam MegaDerm Webinar, 21 October 2026. Portrait supplied by HIGHST. Brand reference: https://www.highsturology.co.kr/v2/proud/doctor.php</a:t>
+              <a:t>Welcome / Jinmo Koo / HIGHST / MegaDerm / Clinical cases</a:t>
             </a:r>
           </a:p>
         </p:txBody>
@@ -569,52 +524,7 @@
           <a:lstStyle xmlns:a="http://schemas.openxmlformats.org/drawingml/2006/main"/>
           <a:p xmlns:a="http://schemas.openxmlformats.org/drawingml/2006/main">
             <a:r>
-              <a:t>English speaker cues</a:t>
-            </a:r>
-          </a:p>
-          <a:p xmlns:a="http://schemas.openxmlformats.org/drawingml/2006/main">
-            <a:r>
-              <a:t>1. Case 5: Contour step-off correction</a:t>
-            </a:r>
-          </a:p>
-          <a:p xmlns:a="http://schemas.openxmlformats.org/drawingml/2006/main">
-            <a:r>
-              <a:t>2. Case introduction: Location of the contour concern</a:t>
-            </a:r>
-          </a:p>
-          <a:p xmlns:a="http://schemas.openxmlformats.org/drawingml/2006/main">
-            <a:r>
-              <a:t>3. Video walkthrough: Correction shown in the video</a:t>
-            </a:r>
-          </a:p>
-          <a:p xmlns:a="http://schemas.openxmlformats.org/drawingml/2006/main">
-            <a:r>
-              <a:t>4. Discussion: Main points from this case</a:t>
-            </a:r>
-          </a:p>
-          <a:p xmlns:a="http://schemas.openxmlformats.org/drawingml/2006/main">
-            <a:r>
-              <a:t/>
-            </a:r>
-          </a:p>
-          <a:p xmlns:a="http://schemas.openxmlformats.org/drawingml/2006/main">
-            <a:r>
-              <a:t>Next: After these cases, let’s review potential complications.</a:t>
-            </a:r>
-          </a:p>
-          <a:p xmlns:a="http://schemas.openxmlformats.org/drawingml/2006/main">
-            <a:r>
-              <a:t/>
-            </a:r>
-          </a:p>
-          <a:p xmlns:a="http://schemas.openxmlformats.org/drawingml/2006/main">
-            <a:r>
-              <a:t>Reference notes</a:t>
-            </a:r>
-          </a:p>
-          <a:p xmlns:a="http://schemas.openxmlformats.org/drawingml/2006/main">
-            <a:r>
-              <a:t>Case 5: Contour Step-off Correction.</a:t>
+              <a:t>Contour step-off / Location / Correction / Video / Key points</a:t>
             </a:r>
           </a:p>
         </p:txBody>
@@ -684,67 +594,7 @@
           <a:lstStyle xmlns:a="http://schemas.openxmlformats.org/drawingml/2006/main"/>
           <a:p xmlns:a="http://schemas.openxmlformats.org/drawingml/2006/main">
             <a:r>
-              <a:t>English speaker cues</a:t>
-            </a:r>
-          </a:p>
-          <a:p xmlns:a="http://schemas.openxmlformats.org/drawingml/2006/main">
-            <a:r>
-              <a:t>1. Context: Published ADM literature / not HIGHST- or MegaDerm-specific outcome data</a:t>
-            </a:r>
-          </a:p>
-          <a:p xmlns:a="http://schemas.openxmlformats.org/drawingml/2006/main">
-            <a:r>
-              <a:t>2. Bleeding and swelling: Hematoma / foreskin edema</a:t>
-            </a:r>
-          </a:p>
-          <a:p xmlns:a="http://schemas.openxmlformats.org/drawingml/2006/main">
-            <a:r>
-              <a:t>3. Wound complications: Delayed healing / infection / skin necrosis</a:t>
-            </a:r>
-          </a:p>
-          <a:p xmlns:a="http://schemas.openxmlformats.org/drawingml/2006/main">
-            <a:r>
-              <a:t>4. Contour and discomfort: Graft contour irregularity / discomfort during erection</a:t>
-            </a:r>
-          </a:p>
-          <a:p xmlns:a="http://schemas.openxmlformats.org/drawingml/2006/main">
-            <a:r>
-              <a:t/>
-            </a:r>
-          </a:p>
-          <a:p xmlns:a="http://schemas.openxmlformats.org/drawingml/2006/main">
-            <a:r>
-              <a:t>Next: Finally, I’ll discuss postoperative care and dressing.</a:t>
-            </a:r>
-          </a:p>
-          <a:p xmlns:a="http://schemas.openxmlformats.org/drawingml/2006/main">
-            <a:r>
-              <a:t/>
-            </a:r>
-          </a:p>
-          <a:p xmlns:a="http://schemas.openxmlformats.org/drawingml/2006/main">
-            <a:r>
-              <a:t>Reference notes</a:t>
-            </a:r>
-          </a:p>
-          <a:p xmlns:a="http://schemas.openxmlformats.org/drawingml/2006/main">
-            <a:r>
-              <a:t>These categories are reported in published ADM augmentation literature. They do not represent HIGHST or MegaDerm-specific outcome data. No incidence rates are extrapolated to HIGHST.</a:t>
-            </a:r>
-          </a:p>
-          <a:p xmlns:a="http://schemas.openxmlformats.org/drawingml/2006/main">
-            <a:r>
-              <a:t/>
-            </a:r>
-          </a:p>
-          <a:p xmlns:a="http://schemas.openxmlformats.org/drawingml/2006/main">
-            <a:r>
-              <a:t>Sources</a:t>
-            </a:r>
-          </a:p>
-          <a:p xmlns:a="http://schemas.openxmlformats.org/drawingml/2006/main">
-            <a:r>
-              <a:t>https://pubmed.ncbi.nlm.nih.gov/31420614/</a:t>
+              <a:t>Published ADM reports / Hematoma, edema / Wound / Contour, discomfort</a:t>
             </a:r>
           </a:p>
         </p:txBody>
@@ -814,47 +664,7 @@
           <a:lstStyle xmlns:a="http://schemas.openxmlformats.org/drawingml/2006/main"/>
           <a:p xmlns:a="http://schemas.openxmlformats.org/drawingml/2006/main">
             <a:r>
-              <a:t>English speaker cues</a:t>
-            </a:r>
-          </a:p>
-          <a:p xmlns:a="http://schemas.openxmlformats.org/drawingml/2006/main">
-            <a:r>
-              <a:t>1. Postoperative care: Main instructions to explain</a:t>
-            </a:r>
-          </a:p>
-          <a:p xmlns:a="http://schemas.openxmlformats.org/drawingml/2006/main">
-            <a:r>
-              <a:t>2. Dressing: Sequence shown in the video</a:t>
-            </a:r>
-          </a:p>
-          <a:p xmlns:a="http://schemas.openxmlformats.org/drawingml/2006/main">
-            <a:r>
-              <a:t>3. Follow-up: Points to discuss with the patient</a:t>
-            </a:r>
-          </a:p>
-          <a:p xmlns:a="http://schemas.openxmlformats.org/drawingml/2006/main">
-            <a:r>
-              <a:t/>
-            </a:r>
-          </a:p>
-          <a:p xmlns:a="http://schemas.openxmlformats.org/drawingml/2006/main">
-            <a:r>
-              <a:t>Next: Thank you for your attention. I’m happy to take your questions.</a:t>
-            </a:r>
-          </a:p>
-          <a:p xmlns:a="http://schemas.openxmlformats.org/drawingml/2006/main">
-            <a:r>
-              <a:t/>
-            </a:r>
-          </a:p>
-          <a:p xmlns:a="http://schemas.openxmlformats.org/drawingml/2006/main">
-            <a:r>
-              <a:t>Reference notes</a:t>
-            </a:r>
-          </a:p>
-          <a:p xmlns:a="http://schemas.openxmlformats.org/drawingml/2006/main">
-            <a:r>
-              <a:t>Postoperative care and dressing technique.</a:t>
+              <a:t>Care instructions / Dressing video / Follow-up / Questions</a:t>
             </a:r>
           </a:p>
         </p:txBody>
@@ -924,42 +734,7 @@
           <a:lstStyle xmlns:a="http://schemas.openxmlformats.org/drawingml/2006/main"/>
           <a:p xmlns:a="http://schemas.openxmlformats.org/drawingml/2006/main">
             <a:r>
-              <a:t>English speaker cues</a:t>
-            </a:r>
-          </a:p>
-          <a:p xmlns:a="http://schemas.openxmlformats.org/drawingml/2006/main">
-            <a:r>
-              <a:t>1. Thank you: Thank you for your time and attention.</a:t>
-            </a:r>
-          </a:p>
-          <a:p xmlns:a="http://schemas.openxmlformats.org/drawingml/2006/main">
-            <a:r>
-              <a:t>2. Questions: I’d be happy to discuss your questions.</a:t>
-            </a:r>
-          </a:p>
-          <a:p xmlns:a="http://schemas.openxmlformats.org/drawingml/2006/main">
-            <a:r>
-              <a:t>3. Clarify: Could you please repeat or clarify the question?</a:t>
-            </a:r>
-          </a:p>
-          <a:p xmlns:a="http://schemas.openxmlformats.org/drawingml/2006/main">
-            <a:r>
-              <a:t>4. Close: Thank you for the discussion.</a:t>
-            </a:r>
-          </a:p>
-          <a:p xmlns:a="http://schemas.openxmlformats.org/drawingml/2006/main">
-            <a:r>
-              <a:t/>
-            </a:r>
-          </a:p>
-          <a:p xmlns:a="http://schemas.openxmlformats.org/drawingml/2006/main">
-            <a:r>
-              <a:t>Reference notes</a:t>
-            </a:r>
-          </a:p>
-          <a:p xmlns:a="http://schemas.openxmlformats.org/drawingml/2006/main">
-            <a:r>
-              <a:t>Thank you.</a:t>
+              <a:t>Thank you / Questions / Clarify / Discussion / Closing</a:t>
             </a:r>
           </a:p>
         </p:txBody>
@@ -1029,202 +804,7 @@
           <a:lstStyle xmlns:a="http://schemas.openxmlformats.org/drawingml/2006/main"/>
           <a:p xmlns:a="http://schemas.openxmlformats.org/drawingml/2006/main">
             <a:r>
-              <a:t>English speaker cues</a:t>
-            </a:r>
-          </a:p>
-          <a:p xmlns:a="http://schemas.openxmlformats.org/drawingml/2006/main">
-            <a:r>
-              <a:t>1. Education: Korea University College of Medicine</a:t>
-            </a:r>
-          </a:p>
-          <a:p xmlns:a="http://schemas.openxmlformats.org/drawingml/2006/main">
-            <a:r>
-              <a:t>2. Current role: Chief Director, HIGHST Urology</a:t>
-            </a:r>
-          </a:p>
-          <a:p xmlns:a="http://schemas.openxmlformats.org/drawingml/2006/main">
-            <a:r>
-              <a:t>3. Clinical background: Former Chief Director, PROUD Urology / adjunct professor, Ewha Mokdong Hospital</a:t>
-            </a:r>
-          </a:p>
-          <a:p xmlns:a="http://schemas.openxmlformats.org/drawingml/2006/main">
-            <a:r>
-              <a:t>4. Training: Erectile dysfunction training at UCI / international training and designated physician roles</a:t>
-            </a:r>
-          </a:p>
-          <a:p xmlns:a="http://schemas.openxmlformats.org/drawingml/2006/main">
-            <a:r>
-              <a:t>5. Recognition: 2024 Outstanding Presentation Award, Taiwan Andrology Association</a:t>
-            </a:r>
-          </a:p>
-          <a:p xmlns:a="http://schemas.openxmlformats.org/drawingml/2006/main">
-            <a:r>
-              <a:t>6. Professional societies: Korean Urological Association / ISSM / APSSM</a:t>
-            </a:r>
-          </a:p>
-          <a:p xmlns:a="http://schemas.openxmlformats.org/drawingml/2006/main">
-            <a:r>
-              <a:t/>
-            </a:r>
-          </a:p>
-          <a:p xmlns:a="http://schemas.openxmlformats.org/drawingml/2006/main">
-            <a:r>
-              <a:t>Next: Let’s begin with the materials: MegaDerm and MegaFill.</a:t>
-            </a:r>
-          </a:p>
-          <a:p xmlns:a="http://schemas.openxmlformats.org/drawingml/2006/main">
-            <a:r>
-              <a:t/>
-            </a:r>
-          </a:p>
-          <a:p xmlns:a="http://schemas.openxmlformats.org/drawingml/2006/main">
-            <a:r>
-              <a:t>Reference notes</a:t>
-            </a:r>
-          </a:p>
-          <a:p xmlns:a="http://schemas.openxmlformats.org/drawingml/2006/main">
-            <a:r>
-              <a:t>Jinmo Koo, HIGHST Urology.</a:t>
-            </a:r>
-          </a:p>
-          <a:p xmlns:a="http://schemas.openxmlformats.org/drawingml/2006/main">
-            <a:r>
-              <a:t/>
-            </a:r>
-          </a:p>
-          <a:p xmlns:a="http://schemas.openxmlformats.org/drawingml/2006/main">
-            <a:r>
-              <a:t>Education</a:t>
-            </a:r>
-          </a:p>
-          <a:p xmlns:a="http://schemas.openxmlformats.org/drawingml/2006/main">
-            <a:r>
-              <a:t>Graduated from Korea University College of Medicine.</a:t>
-            </a:r>
-          </a:p>
-          <a:p xmlns:a="http://schemas.openxmlformats.org/drawingml/2006/main">
-            <a:r>
-              <a:t/>
-            </a:r>
-          </a:p>
-          <a:p xmlns:a="http://schemas.openxmlformats.org/drawingml/2006/main">
-            <a:r>
-              <a:t>Clinical and academic appointments</a:t>
-            </a:r>
-          </a:p>
-          <a:p xmlns:a="http://schemas.openxmlformats.org/drawingml/2006/main">
-            <a:r>
-              <a:t>Current Chief Director, HIGHST Urology.</a:t>
-            </a:r>
-          </a:p>
-          <a:p xmlns:a="http://schemas.openxmlformats.org/drawingml/2006/main">
-            <a:r>
-              <a:t>Former Chief Director, PROUD Urology.</a:t>
-            </a:r>
-          </a:p>
-          <a:p xmlns:a="http://schemas.openxmlformats.org/drawingml/2006/main">
-            <a:r>
-              <a:t>Adjunct Professor of Urology, Ewha Womans University Mokdong Hospital.</a:t>
-            </a:r>
-          </a:p>
-          <a:p xmlns:a="http://schemas.openxmlformats.org/drawingml/2006/main">
-            <a:r>
-              <a:t/>
-            </a:r>
-          </a:p>
-          <a:p xmlns:a="http://schemas.openxmlformats.org/drawingml/2006/main">
-            <a:r>
-              <a:t>Training, appointments and recognition</a:t>
-            </a:r>
-          </a:p>
-          <a:p xmlns:a="http://schemas.openxmlformats.org/drawingml/2006/main">
-            <a:r>
-              <a:t>Completed erectile dysfunction training at UCI, USA.</a:t>
-            </a:r>
-          </a:p>
-          <a:p xmlns:a="http://schemas.openxmlformats.org/drawingml/2006/main">
-            <a:r>
-              <a:t>Coloplast Reference Doctor.</a:t>
-            </a:r>
-          </a:p>
-          <a:p xmlns:a="http://schemas.openxmlformats.org/drawingml/2006/main">
-            <a:r>
-              <a:t>Designated physician, Boston Scientific Center of Education.</a:t>
-            </a:r>
-          </a:p>
-          <a:p xmlns:a="http://schemas.openxmlformats.org/drawingml/2006/main">
-            <a:r>
-              <a:t>Designated physician, Boston Scientific Center of Excellence.</a:t>
-            </a:r>
-          </a:p>
-          <a:p xmlns:a="http://schemas.openxmlformats.org/drawingml/2006/main">
-            <a:r>
-              <a:t>Rigicon Certificate of Recognition.</a:t>
-            </a:r>
-          </a:p>
-          <a:p xmlns:a="http://schemas.openxmlformats.org/drawingml/2006/main">
-            <a:r>
-              <a:t>Designated physician, Litemed Training Center.</a:t>
-            </a:r>
-          </a:p>
-          <a:p xmlns:a="http://schemas.openxmlformats.org/drawingml/2006/main">
-            <a:r>
-              <a:t>Designated physician, Hsing-Chi Training Center.</a:t>
-            </a:r>
-          </a:p>
-          <a:p xmlns:a="http://schemas.openxmlformats.org/drawingml/2006/main">
-            <a:r>
-              <a:t>Officially appointed consultant for international training, L&amp;C Bio.</a:t>
-            </a:r>
-          </a:p>
-          <a:p xmlns:a="http://schemas.openxmlformats.org/drawingml/2006/main">
-            <a:r>
-              <a:t>Outstanding Presentation Award, Taiwan Andrology Association (TAA), 2024.</a:t>
-            </a:r>
-          </a:p>
-          <a:p xmlns:a="http://schemas.openxmlformats.org/drawingml/2006/main">
-            <a:r>
-              <a:t/>
-            </a:r>
-          </a:p>
-          <a:p xmlns:a="http://schemas.openxmlformats.org/drawingml/2006/main">
-            <a:r>
-              <a:t>Full member of the Korean Urological Association, International Society for Sexual Medicine and Asia Pacific Society for Sexual Medicine.</a:t>
-            </a:r>
-          </a:p>
-          <a:p xmlns:a="http://schemas.openxmlformats.org/drawingml/2006/main">
-            <a:r>
-              <a:t>Portrait supplied by HIGHST.</a:t>
-            </a:r>
-          </a:p>
-          <a:p xmlns:a="http://schemas.openxmlformats.org/drawingml/2006/main">
-            <a:r>
-              <a:t/>
-            </a:r>
-          </a:p>
-          <a:p xmlns:a="http://schemas.openxmlformats.org/drawingml/2006/main">
-            <a:r>
-              <a:t>Sources</a:t>
-            </a:r>
-          </a:p>
-          <a:p xmlns:a="http://schemas.openxmlformats.org/drawingml/2006/main">
-            <a:r>
-              <a:t>https://www.highsturology.co.kr/v2/proud/doctor.php</a:t>
-            </a:r>
-          </a:p>
-          <a:p xmlns:a="http://schemas.openxmlformats.org/drawingml/2006/main">
-            <a:r>
-              <a:t>https://www.issm.info/public/about/vision-and-mission</a:t>
-            </a:r>
-          </a:p>
-          <a:p xmlns:a="http://schemas.openxmlformats.org/drawingml/2006/main">
-            <a:r>
-              <a:t>https://apssm.asia/</a:t>
-            </a:r>
-          </a:p>
-          <a:p xmlns:a="http://schemas.openxmlformats.org/drawingml/2006/main">
-            <a:r>
-              <a:t>https://uroweb.org/education-events/78th-annual-meeting-of-the-korean-urological-association-kua-2026</a:t>
+              <a:t>Korea University / HIGHST / Ewha Mokdong / Training / TAA award</a:t>
             </a:r>
           </a:p>
         </p:txBody>
@@ -1294,67 +874,7 @@
           <a:lstStyle xmlns:a="http://schemas.openxmlformats.org/drawingml/2006/main"/>
           <a:p xmlns:a="http://schemas.openxmlformats.org/drawingml/2006/main">
             <a:r>
-              <a:t>English speaker cues</a:t>
-            </a:r>
-          </a:p>
-          <a:p xmlns:a="http://schemas.openxmlformats.org/drawingml/2006/main">
-            <a:r>
-              <a:t>1. MegaDerm: Sheet acellular dermal matrix</a:t>
-            </a:r>
-          </a:p>
-          <a:p xmlns:a="http://schemas.openxmlformats.org/drawingml/2006/main">
-            <a:r>
-              <a:t>2. Two types: Hydrated / freeze-dried</a:t>
-            </a:r>
-          </a:p>
-          <a:p xmlns:a="http://schemas.openxmlformats.org/drawingml/2006/main">
-            <a:r>
-              <a:t>3. Our stock: 3–5 mm thick / 5 × 6, 5 × 8, 5 × 10, 6 × 12 cm</a:t>
-            </a:r>
-          </a:p>
-          <a:p xmlns:a="http://schemas.openxmlformats.org/drawingml/2006/main">
-            <a:r>
-              <a:t>4. MegaFill: Micronized acellular dermal matrix</a:t>
-            </a:r>
-          </a:p>
-          <a:p xmlns:a="http://schemas.openxmlformats.org/drawingml/2006/main">
-            <a:r>
-              <a:t/>
-            </a:r>
-          </a:p>
-          <a:p xmlns:a="http://schemas.openxmlformats.org/drawingml/2006/main">
-            <a:r>
-              <a:t>Next: Next, I’ll go through our preoperative evaluation.</a:t>
-            </a:r>
-          </a:p>
-          <a:p xmlns:a="http://schemas.openxmlformats.org/drawingml/2006/main">
-            <a:r>
-              <a:t/>
-            </a:r>
-          </a:p>
-          <a:p xmlns:a="http://schemas.openxmlformats.org/drawingml/2006/main">
-            <a:r>
-              <a:t>Reference notes</a:t>
-            </a:r>
-          </a:p>
-          <a:p xmlns:a="http://schemas.openxmlformats.org/drawingml/2006/main">
-            <a:r>
-              <a:t>MegaDerm is a sheet acellular dermal matrix. HIGHST stocks hydrated and freeze-dried types. The stated thickness and sizes describe HIGHST's inventory. MegaFill is a micronized form of acellular dermal matrix. The photograph is supplied by HIGHST. Individual packages are not assigned type labels.</a:t>
-            </a:r>
-          </a:p>
-          <a:p xmlns:a="http://schemas.openxmlformats.org/drawingml/2006/main">
-            <a:r>
-              <a:t/>
-            </a:r>
-          </a:p>
-          <a:p xmlns:a="http://schemas.openxmlformats.org/drawingml/2006/main">
-            <a:r>
-              <a:t>Sources</a:t>
-            </a:r>
-          </a:p>
-          <a:p xmlns:a="http://schemas.openxmlformats.org/drawingml/2006/main">
-            <a:r>
-              <a:t>https://lncbio.co.kr/theme/basic/images/L%26CBIO_catalog.pdf</a:t>
+              <a:t>MegaDerm sheet / Hydrated or dry / 3–5 mm / Sizes / MegaFill</a:t>
             </a:r>
           </a:p>
         </p:txBody>
@@ -1424,132 +944,7 @@
           <a:lstStyle xmlns:a="http://schemas.openxmlformats.org/drawingml/2006/main"/>
           <a:p xmlns:a="http://schemas.openxmlformats.org/drawingml/2006/main">
             <a:r>
-              <a:t>English speaker cues</a:t>
-            </a:r>
-          </a:p>
-          <a:p xmlns:a="http://schemas.openxmlformats.org/drawingml/2006/main">
-            <a:r>
-              <a:t>1. Questionnaires: IIEF: erectile function / PEDT: premature ejaculation</a:t>
-            </a:r>
-          </a:p>
-          <a:p xmlns:a="http://schemas.openxmlformats.org/drawingml/2006/main">
-            <a:r>
-              <a:t>2. Blood tests: Coagulation: PT/PTT / TTT: testosterone / CBC / PSA / blood glucose: BST/HbA1c</a:t>
-            </a:r>
-          </a:p>
-          <a:p xmlns:a="http://schemas.openxmlformats.org/drawingml/2006/main">
-            <a:r>
-              <a:t>3. Screening: HIV / syphilis / urine testing / liver enzymes: GOT/GPT/GGT / inflammatory markers</a:t>
-            </a:r>
-          </a:p>
-          <a:p xmlns:a="http://schemas.openxmlformats.org/drawingml/2006/main">
-            <a:r>
-              <a:t>4. Physical examination: Penile length: flaccid and stretched</a:t>
-            </a:r>
-          </a:p>
-          <a:p xmlns:a="http://schemas.openxmlformats.org/drawingml/2006/main">
-            <a:r>
-              <a:t>5. Sensitivity: Penile biothesiometry / vibration perception threshold</a:t>
-            </a:r>
-          </a:p>
-          <a:p xmlns:a="http://schemas.openxmlformats.org/drawingml/2006/main">
-            <a:r>
-              <a:t/>
-            </a:r>
-          </a:p>
-          <a:p xmlns:a="http://schemas.openxmlformats.org/drawingml/2006/main">
-            <a:r>
-              <a:t>Next: With the evaluation complete, let’s move on to surgical preparation.</a:t>
-            </a:r>
-          </a:p>
-          <a:p xmlns:a="http://schemas.openxmlformats.org/drawingml/2006/main">
-            <a:r>
-              <a:t/>
-            </a:r>
-          </a:p>
-          <a:p xmlns:a="http://schemas.openxmlformats.org/drawingml/2006/main">
-            <a:r>
-              <a:t>Reference notes</a:t>
-            </a:r>
-          </a:p>
-          <a:p xmlns:a="http://schemas.openxmlformats.org/drawingml/2006/main">
-            <a:r>
-              <a:t>Preoperative assessment at HIGHST includes IIEF and PEDT questionnaires, flaccid and stretched penile length measurement, and penile biothesiometry.</a:t>
-            </a:r>
-          </a:p>
-          <a:p xmlns:a="http://schemas.openxmlformats.org/drawingml/2006/main">
-            <a:r>
-              <a:t/>
-            </a:r>
-          </a:p>
-          <a:p xmlns:a="http://schemas.openxmlformats.org/drawingml/2006/main">
-            <a:r>
-              <a:t>Laboratory tests</a:t>
-            </a:r>
-          </a:p>
-          <a:p xmlns:a="http://schemas.openxmlformats.org/drawingml/2006/main">
-            <a:r>
-              <a:t>Blood coagulation tests (PT/PTT)</a:t>
-            </a:r>
-          </a:p>
-          <a:p xmlns:a="http://schemas.openxmlformats.org/drawingml/2006/main">
-            <a:r>
-              <a:t>TTT (testosterone)</a:t>
-            </a:r>
-          </a:p>
-          <a:p xmlns:a="http://schemas.openxmlformats.org/drawingml/2006/main">
-            <a:r>
-              <a:t>Complete blood count (CBC)</a:t>
-            </a:r>
-          </a:p>
-          <a:p xmlns:a="http://schemas.openxmlformats.org/drawingml/2006/main">
-            <a:r>
-              <a:t>Prostate-specific antigen (PSA)</a:t>
-            </a:r>
-          </a:p>
-          <a:p xmlns:a="http://schemas.openxmlformats.org/drawingml/2006/main">
-            <a:r>
-              <a:t>Blood glucose (BST/HbA1c)</a:t>
-            </a:r>
-          </a:p>
-          <a:p xmlns:a="http://schemas.openxmlformats.org/drawingml/2006/main">
-            <a:r>
-              <a:t>HIV testing</a:t>
-            </a:r>
-          </a:p>
-          <a:p xmlns:a="http://schemas.openxmlformats.org/drawingml/2006/main">
-            <a:r>
-              <a:t>Syphilis testing</a:t>
-            </a:r>
-          </a:p>
-          <a:p xmlns:a="http://schemas.openxmlformats.org/drawingml/2006/main">
-            <a:r>
-              <a:t>Urine testing</a:t>
-            </a:r>
-          </a:p>
-          <a:p xmlns:a="http://schemas.openxmlformats.org/drawingml/2006/main">
-            <a:r>
-              <a:t>Liver enzymes (GOT/GPT/GGT)</a:t>
-            </a:r>
-          </a:p>
-          <a:p xmlns:a="http://schemas.openxmlformats.org/drawingml/2006/main">
-            <a:r>
-              <a:t>Inflammatory markers</a:t>
-            </a:r>
-          </a:p>
-          <a:p xmlns:a="http://schemas.openxmlformats.org/drawingml/2006/main">
-            <a:r>
-              <a:t/>
-            </a:r>
-          </a:p>
-          <a:p xmlns:a="http://schemas.openxmlformats.org/drawingml/2006/main">
-            <a:r>
-              <a:t>HbA1c denotes glycated hemoglobin and appears under the blood glucose heading.</a:t>
-            </a:r>
-          </a:p>
-          <a:p xmlns:a="http://schemas.openxmlformats.org/drawingml/2006/main">
-            <a:r>
-              <a:t>Sources: https://pubmed.ncbi.nlm.nih.gov/9187685/ ; https://pubmed.ncbi.nlm.nih.gov/17568761/ ; https://www.niddk.nih.gov/health-information/diagnostic-tests/a1c-test/ ; https://pubmed.ncbi.nlm.nih.gov/28874780/</a:t>
+              <a:t>IIEF/PEDT / PT/PTT, TTT, CBC, PSA / BST/HbA1c / HIV, syphilis / Urine, liver / Length, sensitivity</a:t>
             </a:r>
           </a:p>
         </p:txBody>
@@ -1619,47 +1014,7 @@
           <a:lstStyle xmlns:a="http://schemas.openxmlformats.org/drawingml/2006/main"/>
           <a:p xmlns:a="http://schemas.openxmlformats.org/drawingml/2006/main">
             <a:r>
-              <a:t>English speaker cues</a:t>
-            </a:r>
-          </a:p>
-          <a:p xmlns:a="http://schemas.openxmlformats.org/drawingml/2006/main">
-            <a:r>
-              <a:t>1. Preparation: Shaving and draping</a:t>
-            </a:r>
-          </a:p>
-          <a:p xmlns:a="http://schemas.openxmlformats.org/drawingml/2006/main">
-            <a:r>
-              <a:t>2. Shaving: Preparation area shown in the video</a:t>
-            </a:r>
-          </a:p>
-          <a:p xmlns:a="http://schemas.openxmlformats.org/drawingml/2006/main">
-            <a:r>
-              <a:t>3. Draping: Sequence shown in the video</a:t>
-            </a:r>
-          </a:p>
-          <a:p xmlns:a="http://schemas.openxmlformats.org/drawingml/2006/main">
-            <a:r>
-              <a:t/>
-            </a:r>
-          </a:p>
-          <a:p xmlns:a="http://schemas.openxmlformats.org/drawingml/2006/main">
-            <a:r>
-              <a:t>Next: Now, let’s look at the first case: a pubic incision.</a:t>
-            </a:r>
-          </a:p>
-          <a:p xmlns:a="http://schemas.openxmlformats.org/drawingml/2006/main">
-            <a:r>
-              <a:t/>
-            </a:r>
-          </a:p>
-          <a:p xmlns:a="http://schemas.openxmlformats.org/drawingml/2006/main">
-            <a:r>
-              <a:t>Reference notes</a:t>
-            </a:r>
-          </a:p>
-          <a:p xmlns:a="http://schemas.openxmlformats.org/drawingml/2006/main">
-            <a:r>
-              <a:t>Shaving and draping.</a:t>
+              <a:t>Shaving / Draping / First case</a:t>
             </a:r>
           </a:p>
         </p:txBody>
@@ -1729,52 +1084,7 @@
           <a:lstStyle xmlns:a="http://schemas.openxmlformats.org/drawingml/2006/main"/>
           <a:p xmlns:a="http://schemas.openxmlformats.org/drawingml/2006/main">
             <a:r>
-              <a:t>English speaker cues</a:t>
-            </a:r>
-          </a:p>
-          <a:p xmlns:a="http://schemas.openxmlformats.org/drawingml/2006/main">
-            <a:r>
-              <a:t>1. Case 1: Pubic incision</a:t>
-            </a:r>
-          </a:p>
-          <a:p xmlns:a="http://schemas.openxmlformats.org/drawingml/2006/main">
-            <a:r>
-              <a:t>2. Case introduction: Clinical background / choice of incision</a:t>
-            </a:r>
-          </a:p>
-          <a:p xmlns:a="http://schemas.openxmlformats.org/drawingml/2006/main">
-            <a:r>
-              <a:t>3. Video walkthrough: Incision / key operative stages</a:t>
-            </a:r>
-          </a:p>
-          <a:p xmlns:a="http://schemas.openxmlformats.org/drawingml/2006/main">
-            <a:r>
-              <a:t>4. Discussion: Main points from this case</a:t>
-            </a:r>
-          </a:p>
-          <a:p xmlns:a="http://schemas.openxmlformats.org/drawingml/2006/main">
-            <a:r>
-              <a:t/>
-            </a:r>
-          </a:p>
-          <a:p xmlns:a="http://schemas.openxmlformats.org/drawingml/2006/main">
-            <a:r>
-              <a:t>Next: The next case uses a circumcision-line incision.</a:t>
-            </a:r>
-          </a:p>
-          <a:p xmlns:a="http://schemas.openxmlformats.org/drawingml/2006/main">
-            <a:r>
-              <a:t/>
-            </a:r>
-          </a:p>
-          <a:p xmlns:a="http://schemas.openxmlformats.org/drawingml/2006/main">
-            <a:r>
-              <a:t>Reference notes</a:t>
-            </a:r>
-          </a:p>
-          <a:p xmlns:a="http://schemas.openxmlformats.org/drawingml/2006/main">
-            <a:r>
-              <a:t>Case 1: Pubic Incision.</a:t>
+              <a:t>Pubic incision / Background / Incision choice / Video / Key points</a:t>
             </a:r>
           </a:p>
         </p:txBody>
@@ -1844,52 +1154,7 @@
           <a:lstStyle xmlns:a="http://schemas.openxmlformats.org/drawingml/2006/main"/>
           <a:p xmlns:a="http://schemas.openxmlformats.org/drawingml/2006/main">
             <a:r>
-              <a:t>English speaker cues</a:t>
-            </a:r>
-          </a:p>
-          <a:p xmlns:a="http://schemas.openxmlformats.org/drawingml/2006/main">
-            <a:r>
-              <a:t>1. Case 2: Circumcision-line incision</a:t>
-            </a:r>
-          </a:p>
-          <a:p xmlns:a="http://schemas.openxmlformats.org/drawingml/2006/main">
-            <a:r>
-              <a:t>2. Case introduction: Clinical background / choice of incision</a:t>
-            </a:r>
-          </a:p>
-          <a:p xmlns:a="http://schemas.openxmlformats.org/drawingml/2006/main">
-            <a:r>
-              <a:t>3. Video walkthrough: Incision / key operative stages</a:t>
-            </a:r>
-          </a:p>
-          <a:p xmlns:a="http://schemas.openxmlformats.org/drawingml/2006/main">
-            <a:r>
-              <a:t>4. Comparison: Points to compare with the pubic approach</a:t>
-            </a:r>
-          </a:p>
-          <a:p xmlns:a="http://schemas.openxmlformats.org/drawingml/2006/main">
-            <a:r>
-              <a:t/>
-            </a:r>
-          </a:p>
-          <a:p xmlns:a="http://schemas.openxmlformats.org/drawingml/2006/main">
-            <a:r>
-              <a:t>Next: Next, we’ll look at secondary dermal grafting.</a:t>
-            </a:r>
-          </a:p>
-          <a:p xmlns:a="http://schemas.openxmlformats.org/drawingml/2006/main">
-            <a:r>
-              <a:t/>
-            </a:r>
-          </a:p>
-          <a:p xmlns:a="http://schemas.openxmlformats.org/drawingml/2006/main">
-            <a:r>
-              <a:t>Reference notes</a:t>
-            </a:r>
-          </a:p>
-          <a:p xmlns:a="http://schemas.openxmlformats.org/drawingml/2006/main">
-            <a:r>
-              <a:t>Case 2: Circumcision-line Incision.</a:t>
+              <a:t>Circumcision line / Background / Video / Compare approaches</a:t>
             </a:r>
           </a:p>
         </p:txBody>
@@ -1959,52 +1224,7 @@
           <a:lstStyle xmlns:a="http://schemas.openxmlformats.org/drawingml/2006/main"/>
           <a:p xmlns:a="http://schemas.openxmlformats.org/drawingml/2006/main">
             <a:r>
-              <a:t>English speaker cues</a:t>
-            </a:r>
-          </a:p>
-          <a:p xmlns:a="http://schemas.openxmlformats.org/drawingml/2006/main">
-            <a:r>
-              <a:t>1. Case 3: Secondary dermal grafting</a:t>
-            </a:r>
-          </a:p>
-          <a:p xmlns:a="http://schemas.openxmlformats.org/drawingml/2006/main">
-            <a:r>
-              <a:t>2. Background: Previous procedure / reason for a second graft</a:t>
-            </a:r>
-          </a:p>
-          <a:p xmlns:a="http://schemas.openxmlformats.org/drawingml/2006/main">
-            <a:r>
-              <a:t>3. Video walkthrough: Key operative stages</a:t>
-            </a:r>
-          </a:p>
-          <a:p xmlns:a="http://schemas.openxmlformats.org/drawingml/2006/main">
-            <a:r>
-              <a:t>4. Discussion: Main considerations in this case</a:t>
-            </a:r>
-          </a:p>
-          <a:p xmlns:a="http://schemas.openxmlformats.org/drawingml/2006/main">
-            <a:r>
-              <a:t/>
-            </a:r>
-          </a:p>
-          <a:p xmlns:a="http://schemas.openxmlformats.org/drawingml/2006/main">
-            <a:r>
-              <a:t>Next: Let’s move on to the revision surgery case.</a:t>
-            </a:r>
-          </a:p>
-          <a:p xmlns:a="http://schemas.openxmlformats.org/drawingml/2006/main">
-            <a:r>
-              <a:t/>
-            </a:r>
-          </a:p>
-          <a:p xmlns:a="http://schemas.openxmlformats.org/drawingml/2006/main">
-            <a:r>
-              <a:t>Reference notes</a:t>
-            </a:r>
-          </a:p>
-          <a:p xmlns:a="http://schemas.openxmlformats.org/drawingml/2006/main">
-            <a:r>
-              <a:t>Case 3: Secondary Dermal Grafting.</a:t>
+              <a:t>Previous procedure / Reason for second graft / Video / Key points</a:t>
             </a:r>
           </a:p>
         </p:txBody>
@@ -2074,52 +1294,7 @@
           <a:lstStyle xmlns:a="http://schemas.openxmlformats.org/drawingml/2006/main"/>
           <a:p xmlns:a="http://schemas.openxmlformats.org/drawingml/2006/main">
             <a:r>
-              <a:t>English speaker cues</a:t>
-            </a:r>
-          </a:p>
-          <a:p xmlns:a="http://schemas.openxmlformats.org/drawingml/2006/main">
-            <a:r>
-              <a:t>1. Case 4: Revision surgery</a:t>
-            </a:r>
-          </a:p>
-          <a:p xmlns:a="http://schemas.openxmlformats.org/drawingml/2006/main">
-            <a:r>
-              <a:t>2. Background: Previous procedure / reason for revision</a:t>
-            </a:r>
-          </a:p>
-          <a:p xmlns:a="http://schemas.openxmlformats.org/drawingml/2006/main">
-            <a:r>
-              <a:t>3. Video walkthrough: Operative findings / key stages</a:t>
-            </a:r>
-          </a:p>
-          <a:p xmlns:a="http://schemas.openxmlformats.org/drawingml/2006/main">
-            <a:r>
-              <a:t>4. Discussion: Points to highlight in revision surgery</a:t>
-            </a:r>
-          </a:p>
-          <a:p xmlns:a="http://schemas.openxmlformats.org/drawingml/2006/main">
-            <a:r>
-              <a:t/>
-            </a:r>
-          </a:p>
-          <a:p xmlns:a="http://schemas.openxmlformats.org/drawingml/2006/main">
-            <a:r>
-              <a:t>Next: The final case focuses on contour step-off correction.</a:t>
-            </a:r>
-          </a:p>
-          <a:p xmlns:a="http://schemas.openxmlformats.org/drawingml/2006/main">
-            <a:r>
-              <a:t/>
-            </a:r>
-          </a:p>
-          <a:p xmlns:a="http://schemas.openxmlformats.org/drawingml/2006/main">
-            <a:r>
-              <a:t>Reference notes</a:t>
-            </a:r>
-          </a:p>
-          <a:p xmlns:a="http://schemas.openxmlformats.org/drawingml/2006/main">
-            <a:r>
-              <a:t>Case 4: Revision Surgery.</a:t>
+              <a:t>Previous surgery / Reason for revision / Findings / Video</a:t>
             </a:r>
           </a:p>
         </p:txBody>
@@ -2166,7 +1341,7 @@
           <p:cNvPr id="3" name="Title">
             <a:extLst xmlns:a="http://schemas.openxmlformats.org/drawingml/2006/main">
               <a:ext uri="{FF2B5EF4-FFF2-40B4-BE49-F238E27FC236}">
-                <a16:creationId xmlns:a16="http://schemas.microsoft.com/office/drawing/2014/main" id="{27C6096E-E675-4380-B15A-048DD894C14E}"/>
+                <a16:creationId xmlns:a16="http://schemas.microsoft.com/office/drawing/2014/main" id="{DDE9E892-EF78-4E24-A30F-5E61FEB5DA44}"/>
               </a:ext>
             </a:extLst>
           </p:cNvPr>
@@ -2323,7 +1498,7 @@
           <p:cNvPr id="2" name="Subtitle">
             <a:extLst xmlns:a="http://schemas.openxmlformats.org/drawingml/2006/main">
               <a:ext uri="{FF2B5EF4-FFF2-40B4-BE49-F238E27FC236}">
-                <a16:creationId xmlns:a16="http://schemas.microsoft.com/office/drawing/2014/main" id="{17D2D398-B998-4049-B67B-A1C56877972D}"/>
+                <a16:creationId xmlns:a16="http://schemas.microsoft.com/office/drawing/2014/main" id="{1D5B5325-8445-470E-9E66-9642E15EBE91}"/>
               </a:ext>
             </a:extLst>
           </p:cNvPr>
@@ -2497,7 +1672,7 @@
           <p:cNvPr id="2" name="Section title">
             <a:extLst xmlns:a="http://schemas.openxmlformats.org/drawingml/2006/main">
               <a:ext uri="{FF2B5EF4-FFF2-40B4-BE49-F238E27FC236}">
-                <a16:creationId xmlns:a16="http://schemas.microsoft.com/office/drawing/2014/main" id="{994B1434-F3C9-4B68-BFB4-FD8F4C17A42E}"/>
+                <a16:creationId xmlns:a16="http://schemas.microsoft.com/office/drawing/2014/main" id="{7B862DED-DA8D-43D6-8F51-4E770C35726A}"/>
               </a:ext>
             </a:extLst>
           </p:cNvPr>
@@ -2671,7 +1846,7 @@
           <p:cNvPr id="3" name="Title">
             <a:extLst xmlns:a="http://schemas.openxmlformats.org/drawingml/2006/main">
               <a:ext uri="{FF2B5EF4-FFF2-40B4-BE49-F238E27FC236}">
-                <a16:creationId xmlns:a16="http://schemas.microsoft.com/office/drawing/2014/main" id="{260B1DB4-5880-4901-AEB5-A0D182AE3E4B}"/>
+                <a16:creationId xmlns:a16="http://schemas.microsoft.com/office/drawing/2014/main" id="{3E700B97-132B-444E-8C2F-9D6926BAAB61}"/>
               </a:ext>
             </a:extLst>
           </p:cNvPr>
@@ -2828,7 +2003,7 @@
           <p:cNvPr id="2" name="Body">
             <a:extLst xmlns:a="http://schemas.openxmlformats.org/drawingml/2006/main">
               <a:ext uri="{FF2B5EF4-FFF2-40B4-BE49-F238E27FC236}">
-                <a16:creationId xmlns:a16="http://schemas.microsoft.com/office/drawing/2014/main" id="{A700FADC-1DA2-4DC4-A14A-D41D2ECAAA08}"/>
+                <a16:creationId xmlns:a16="http://schemas.microsoft.com/office/drawing/2014/main" id="{65B83C84-1341-4E1C-882D-2B52067017BF}"/>
               </a:ext>
             </a:extLst>
           </p:cNvPr>
@@ -3002,7 +2177,7 @@
           <p:cNvPr id="4" name="Title">
             <a:extLst xmlns:a="http://schemas.openxmlformats.org/drawingml/2006/main">
               <a:ext uri="{FF2B5EF4-FFF2-40B4-BE49-F238E27FC236}">
-                <a16:creationId xmlns:a16="http://schemas.microsoft.com/office/drawing/2014/main" id="{1D072A85-2F9A-46FB-8E94-C805E047E7FA}"/>
+                <a16:creationId xmlns:a16="http://schemas.microsoft.com/office/drawing/2014/main" id="{B7F1E8E9-CC67-4828-B875-2C7BB7A5FD4E}"/>
               </a:ext>
             </a:extLst>
           </p:cNvPr>
@@ -3159,7 +2334,7 @@
           <p:cNvPr id="2" name="Left column">
             <a:extLst xmlns:a="http://schemas.openxmlformats.org/drawingml/2006/main">
               <a:ext uri="{FF2B5EF4-FFF2-40B4-BE49-F238E27FC236}">
-                <a16:creationId xmlns:a16="http://schemas.microsoft.com/office/drawing/2014/main" id="{86B9D404-A29F-4355-935F-DAD68C0FF903}"/>
+                <a16:creationId xmlns:a16="http://schemas.microsoft.com/office/drawing/2014/main" id="{0C2F0D8A-F036-412B-86AB-65CE72D965CD}"/>
               </a:ext>
             </a:extLst>
           </p:cNvPr>
@@ -3316,7 +2491,7 @@
           <p:cNvPr id="3" name="Right column">
             <a:extLst xmlns:a="http://schemas.openxmlformats.org/drawingml/2006/main">
               <a:ext uri="{FF2B5EF4-FFF2-40B4-BE49-F238E27FC236}">
-                <a16:creationId xmlns:a16="http://schemas.microsoft.com/office/drawing/2014/main" id="{416575E4-2548-43E1-BC38-C5B844EEA2A7}"/>
+                <a16:creationId xmlns:a16="http://schemas.microsoft.com/office/drawing/2014/main" id="{4F3E2F59-4D85-4BF1-8AA5-02FF893C98BA}"/>
               </a:ext>
             </a:extLst>
           </p:cNvPr>
@@ -3490,7 +2665,7 @@
           <p:cNvPr id="3" name="Title">
             <a:extLst xmlns:a="http://schemas.openxmlformats.org/drawingml/2006/main">
               <a:ext uri="{FF2B5EF4-FFF2-40B4-BE49-F238E27FC236}">
-                <a16:creationId xmlns:a16="http://schemas.microsoft.com/office/drawing/2014/main" id="{DC5FC2AC-46E1-47D9-BBB5-4D0FB235D22C}"/>
+                <a16:creationId xmlns:a16="http://schemas.microsoft.com/office/drawing/2014/main" id="{44610F45-6699-4CAF-AFB4-73CB103DA9C8}"/>
               </a:ext>
             </a:extLst>
           </p:cNvPr>
@@ -3647,7 +2822,7 @@
           <p:cNvPr id="2" name="Left column">
             <a:extLst xmlns:a="http://schemas.openxmlformats.org/drawingml/2006/main">
               <a:ext uri="{FF2B5EF4-FFF2-40B4-BE49-F238E27FC236}">
-                <a16:creationId xmlns:a16="http://schemas.microsoft.com/office/drawing/2014/main" id="{F6D3A1C0-EA1A-4D31-8D61-D46F6D32F187}"/>
+                <a16:creationId xmlns:a16="http://schemas.microsoft.com/office/drawing/2014/main" id="{FE675CDB-0795-49A7-8A09-1E68A44355A8}"/>
               </a:ext>
             </a:extLst>
           </p:cNvPr>
@@ -3842,12 +3017,12 @@
   </p:cSld>
   <p:clrMap bg1="lt1" tx1="dk1" bg2="lt2" tx2="dk2" accent1="accent1" accent2="accent2" accent3="accent3" accent4="accent4" accent5="accent5" accent6="accent6" hlink="hlink" folHlink="folHlink"/>
   <p:sldLayoutIdLst>
-    <p:sldLayoutId xmlns:r="http://schemas.openxmlformats.org/officeDocument/2006/relationships" id="2147483649" r:id="Rd19d98a4e9574cd8"/>
-    <p:sldLayoutId xmlns:r="http://schemas.openxmlformats.org/officeDocument/2006/relationships" id="2147483650" r:id="Rd89c8810b2a84e08"/>
-    <p:sldLayoutId xmlns:r="http://schemas.openxmlformats.org/officeDocument/2006/relationships" id="2147483651" r:id="Re3a7eb4a41ae4188"/>
-    <p:sldLayoutId xmlns:r="http://schemas.openxmlformats.org/officeDocument/2006/relationships" id="2147483652" r:id="R6d7986affa2b4985"/>
-    <p:sldLayoutId xmlns:r="http://schemas.openxmlformats.org/officeDocument/2006/relationships" id="2147483653" r:id="Rcbab3b194cf04a45"/>
-    <p:sldLayoutId xmlns:r="http://schemas.openxmlformats.org/officeDocument/2006/relationships" id="2147483654" r:id="R1bb94d15d9b047cd"/>
+    <p:sldLayoutId xmlns:r="http://schemas.openxmlformats.org/officeDocument/2006/relationships" id="2147483649" r:id="R79ae4f223bc04e31"/>
+    <p:sldLayoutId xmlns:r="http://schemas.openxmlformats.org/officeDocument/2006/relationships" id="2147483650" r:id="Reca0c13d1b5b47f3"/>
+    <p:sldLayoutId xmlns:r="http://schemas.openxmlformats.org/officeDocument/2006/relationships" id="2147483651" r:id="R0569b75d796f4fb5"/>
+    <p:sldLayoutId xmlns:r="http://schemas.openxmlformats.org/officeDocument/2006/relationships" id="2147483652" r:id="Rd9c288ec90d043e0"/>
+    <p:sldLayoutId xmlns:r="http://schemas.openxmlformats.org/officeDocument/2006/relationships" id="2147483653" r:id="Rab9d62db7eb341b5"/>
+    <p:sldLayoutId xmlns:r="http://schemas.openxmlformats.org/officeDocument/2006/relationships" id="2147483654" r:id="Ra53d9d37a23e4e7c"/>
   </p:sldLayoutIdLst>
   <p:txStyles>
     <p:titleStyle>
@@ -4398,7 +3573,7 @@
           <p:cNvPr id="10" name="">
             <a:extLst xmlns:a="http://schemas.openxmlformats.org/drawingml/2006/main">
               <a:ext uri="{FF2B5EF4-FFF2-40B4-BE49-F238E27FC236}">
-                <a16:creationId xmlns:a16="http://schemas.microsoft.com/office/drawing/2014/main" id="{9E47E1F0-1CD4-4D5D-9CBC-BB90E5818A61}"/>
+                <a16:creationId xmlns:a16="http://schemas.microsoft.com/office/drawing/2014/main" id="{5805C272-F2EF-40A1-A40C-4A368CD89356}"/>
               </a:ext>
             </a:extLst>
           </p:cNvPr>
@@ -4408,7 +3583,7 @@
           <p:nvPr/>
         </p:nvPicPr>
         <p:blipFill>
-          <a:blip xmlns:r="http://schemas.openxmlformats.org/officeDocument/2006/relationships" xmlns:a="http://schemas.openxmlformats.org/drawingml/2006/main" r:embed="Rcb30f71bcb7d405e"/>
+          <a:blip xmlns:r="http://schemas.openxmlformats.org/officeDocument/2006/relationships" xmlns:a="http://schemas.openxmlformats.org/drawingml/2006/main" r:embed="R47781616cb744a36"/>
           <a:stretch xmlns:a="http://schemas.openxmlformats.org/drawingml/2006/main"/>
         </p:blipFill>
         <p:spPr>
@@ -4426,7 +3601,7 @@
           <p:cNvPr id="2" name="">
             <a:extLst xmlns:a="http://schemas.openxmlformats.org/drawingml/2006/main">
               <a:ext uri="{FF2B5EF4-FFF2-40B4-BE49-F238E27FC236}">
-                <a16:creationId xmlns:a16="http://schemas.microsoft.com/office/drawing/2014/main" id="{11EB56E4-2F35-441F-A096-F3F3F30F9F36}"/>
+                <a16:creationId xmlns:a16="http://schemas.microsoft.com/office/drawing/2014/main" id="{7B533956-48E5-46DF-83C1-BF88F05D99E3}"/>
               </a:ext>
             </a:extLst>
           </p:cNvPr>
@@ -4436,7 +3611,7 @@
           <p:nvPr/>
         </p:nvPicPr>
         <p:blipFill>
-          <a:blip xmlns:r="http://schemas.openxmlformats.org/officeDocument/2006/relationships" xmlns:a="http://schemas.openxmlformats.org/drawingml/2006/main" r:embed="Rc6123dde08094660"/>
+          <a:blip xmlns:r="http://schemas.openxmlformats.org/officeDocument/2006/relationships" xmlns:a="http://schemas.openxmlformats.org/drawingml/2006/main" r:embed="Re82db9e8d7ed4b2d"/>
           <a:srcRect xmlns:a="http://schemas.openxmlformats.org/drawingml/2006/main" l="33753" t="0" r="33753" b="0"/>
           <a:stretch xmlns:a="http://schemas.openxmlformats.org/drawingml/2006/main">
             <a:fillRect l="0" t="0" r="0" b="0"/>
@@ -4457,7 +3632,7 @@
           <p:cNvPr id="3" name="">
             <a:extLst xmlns:a="http://schemas.openxmlformats.org/drawingml/2006/main">
               <a:ext uri="{FF2B5EF4-FFF2-40B4-BE49-F238E27FC236}">
-                <a16:creationId xmlns:a16="http://schemas.microsoft.com/office/drawing/2014/main" id="{8EE0AC53-D362-4FEC-A254-0DB0D6897805}"/>
+                <a16:creationId xmlns:a16="http://schemas.microsoft.com/office/drawing/2014/main" id="{4915C424-B320-4323-AB3E-686C20D926E0}"/>
               </a:ext>
             </a:extLst>
           </p:cNvPr>
@@ -4525,7 +3700,7 @@
           <p:cNvPr id="4" name="">
             <a:extLst xmlns:a="http://schemas.openxmlformats.org/drawingml/2006/main">
               <a:ext uri="{FF2B5EF4-FFF2-40B4-BE49-F238E27FC236}">
-                <a16:creationId xmlns:a16="http://schemas.microsoft.com/office/drawing/2014/main" id="{28EBEFA5-8A15-4B5C-9D6B-9D9213F9C948}"/>
+                <a16:creationId xmlns:a16="http://schemas.microsoft.com/office/drawing/2014/main" id="{043AC662-D6C9-426D-A7F2-75165A88969B}"/>
               </a:ext>
             </a:extLst>
           </p:cNvPr>
@@ -4593,7 +3768,7 @@
           <p:cNvPr id="5" name="">
             <a:extLst xmlns:a="http://schemas.openxmlformats.org/drawingml/2006/main">
               <a:ext uri="{FF2B5EF4-FFF2-40B4-BE49-F238E27FC236}">
-                <a16:creationId xmlns:a16="http://schemas.microsoft.com/office/drawing/2014/main" id="{7D3D55EA-F3A9-4D9A-880C-F4102DBD5DC7}"/>
+                <a16:creationId xmlns:a16="http://schemas.microsoft.com/office/drawing/2014/main" id="{5F37809F-8F94-4618-B927-73603A277313}"/>
               </a:ext>
             </a:extLst>
           </p:cNvPr>
@@ -4661,7 +3836,7 @@
           <p:cNvPr id="6" name="">
             <a:extLst xmlns:a="http://schemas.openxmlformats.org/drawingml/2006/main">
               <a:ext uri="{FF2B5EF4-FFF2-40B4-BE49-F238E27FC236}">
-                <a16:creationId xmlns:a16="http://schemas.microsoft.com/office/drawing/2014/main" id="{7B44CA6E-364A-4D94-8D09-04E7E04520A1}"/>
+                <a16:creationId xmlns:a16="http://schemas.microsoft.com/office/drawing/2014/main" id="{72ADAA83-6BE3-4991-B3B6-A608878DA868}"/>
               </a:ext>
             </a:extLst>
           </p:cNvPr>
@@ -4729,7 +3904,7 @@
           <p:cNvPr id="7" name="">
             <a:extLst xmlns:a="http://schemas.openxmlformats.org/drawingml/2006/main">
               <a:ext uri="{FF2B5EF4-FFF2-40B4-BE49-F238E27FC236}">
-                <a16:creationId xmlns:a16="http://schemas.microsoft.com/office/drawing/2014/main" id="{BF18D874-585A-4AF1-A337-0386EEA9B5FA}"/>
+                <a16:creationId xmlns:a16="http://schemas.microsoft.com/office/drawing/2014/main" id="{C47ED0DB-0859-4B19-A417-DD7116292CAE}"/>
               </a:ext>
             </a:extLst>
           </p:cNvPr>
@@ -4797,7 +3972,7 @@
           <p:cNvPr id="8" name="">
             <a:extLst xmlns:a="http://schemas.openxmlformats.org/drawingml/2006/main">
               <a:ext uri="{FF2B5EF4-FFF2-40B4-BE49-F238E27FC236}">
-                <a16:creationId xmlns:a16="http://schemas.microsoft.com/office/drawing/2014/main" id="{2B93DB93-CD5C-4ED8-80BE-65DCD50DC6F2}"/>
+                <a16:creationId xmlns:a16="http://schemas.microsoft.com/office/drawing/2014/main" id="{933D3B92-79B3-498C-9949-3304472E6A67}"/>
               </a:ext>
             </a:extLst>
           </p:cNvPr>
@@ -4865,7 +4040,7 @@
           <p:cNvPr id="9" name="">
             <a:extLst xmlns:a="http://schemas.openxmlformats.org/drawingml/2006/main">
               <a:ext uri="{FF2B5EF4-FFF2-40B4-BE49-F238E27FC236}">
-                <a16:creationId xmlns:a16="http://schemas.microsoft.com/office/drawing/2014/main" id="{C05F4DDB-91D3-4CA8-9903-C11AA20E1EAC}"/>
+                <a16:creationId xmlns:a16="http://schemas.microsoft.com/office/drawing/2014/main" id="{CBC0FEE1-0E66-4269-A8FA-CC7D7B03ED55}"/>
               </a:ext>
             </a:extLst>
           </p:cNvPr>
@@ -4931,7 +4106,7 @@
     </p:spTree>
     <p:extLst>
       <p:ext uri="{BB962C8B-B14F-4D97-AF65-F5344CB8AC3E}">
-        <p14:creationId xmlns:p14="http://schemas.microsoft.com/office/powerpoint/2010/main" val="1772130009"/>
+        <p14:creationId xmlns:p14="http://schemas.microsoft.com/office/powerpoint/2010/main" val="969126132"/>
       </p:ext>
     </p:extLst>
   </p:cSld>
@@ -4962,7 +4137,7 @@
           <p:cNvPr id="7" name="">
             <a:extLst xmlns:a="http://schemas.openxmlformats.org/drawingml/2006/main">
               <a:ext uri="{FF2B5EF4-FFF2-40B4-BE49-F238E27FC236}">
-                <a16:creationId xmlns:a16="http://schemas.microsoft.com/office/drawing/2014/main" id="{CEB84374-0108-4269-BC3B-7146CF9A3259}"/>
+                <a16:creationId xmlns:a16="http://schemas.microsoft.com/office/drawing/2014/main" id="{12A3F1B4-3958-4920-A759-47DB275EA0F3}"/>
               </a:ext>
             </a:extLst>
           </p:cNvPr>
@@ -5030,7 +4205,7 @@
           <p:cNvPr id="2" name="">
             <a:extLst xmlns:a="http://schemas.openxmlformats.org/drawingml/2006/main">
               <a:ext uri="{FF2B5EF4-FFF2-40B4-BE49-F238E27FC236}">
-                <a16:creationId xmlns:a16="http://schemas.microsoft.com/office/drawing/2014/main" id="{27A65675-A167-4367-85D7-AC6864AEBE73}"/>
+                <a16:creationId xmlns:a16="http://schemas.microsoft.com/office/drawing/2014/main" id="{3DA524FD-9DAD-4909-9A44-886473ECF206}"/>
               </a:ext>
             </a:extLst>
           </p:cNvPr>
@@ -5098,7 +4273,7 @@
           <p:cNvPr id="3" name="">
             <a:extLst xmlns:a="http://schemas.openxmlformats.org/drawingml/2006/main">
               <a:ext uri="{FF2B5EF4-FFF2-40B4-BE49-F238E27FC236}">
-                <a16:creationId xmlns:a16="http://schemas.microsoft.com/office/drawing/2014/main" id="{4CEA7D54-F4B9-4CA7-805D-B3EDAECF94D7}"/>
+                <a16:creationId xmlns:a16="http://schemas.microsoft.com/office/drawing/2014/main" id="{38276699-051E-4984-BE9C-4160310B5C0D}"/>
               </a:ext>
             </a:extLst>
           </p:cNvPr>
@@ -5108,7 +4283,7 @@
           <p:nvPr/>
         </p:nvPicPr>
         <p:blipFill>
-          <a:blip xmlns:r="http://schemas.openxmlformats.org/officeDocument/2006/relationships" xmlns:a="http://schemas.openxmlformats.org/drawingml/2006/main" r:embed="Ra08f033cecff44b9"/>
+          <a:blip xmlns:r="http://schemas.openxmlformats.org/officeDocument/2006/relationships" xmlns:a="http://schemas.openxmlformats.org/drawingml/2006/main" r:embed="R8a983fa4336b4d30"/>
           <a:stretch xmlns:a="http://schemas.openxmlformats.org/drawingml/2006/main"/>
         </p:blipFill>
         <p:spPr>
@@ -5126,7 +4301,7 @@
           <p:cNvPr id="4" name="">
             <a:extLst xmlns:a="http://schemas.openxmlformats.org/drawingml/2006/main">
               <a:ext uri="{FF2B5EF4-FFF2-40B4-BE49-F238E27FC236}">
-                <a16:creationId xmlns:a16="http://schemas.microsoft.com/office/drawing/2014/main" id="{1DB844E3-8995-447A-BB2E-78ABAE1A80F4}"/>
+                <a16:creationId xmlns:a16="http://schemas.microsoft.com/office/drawing/2014/main" id="{5E125B03-1899-403E-B375-E3708DA0E84D}"/>
               </a:ext>
             </a:extLst>
           </p:cNvPr>
@@ -5156,7 +4331,7 @@
           <p:cNvPr id="5" name="">
             <a:extLst xmlns:a="http://schemas.openxmlformats.org/drawingml/2006/main">
               <a:ext uri="{FF2B5EF4-FFF2-40B4-BE49-F238E27FC236}">
-                <a16:creationId xmlns:a16="http://schemas.microsoft.com/office/drawing/2014/main" id="{62D8CFD7-62F8-4E9F-BE50-C44F0EE619A5}"/>
+                <a16:creationId xmlns:a16="http://schemas.microsoft.com/office/drawing/2014/main" id="{68EF5AF1-F717-4A82-931C-6B69FB0BC3FC}"/>
               </a:ext>
             </a:extLst>
           </p:cNvPr>
@@ -5224,7 +4399,7 @@
           <p:cNvPr id="6" name="">
             <a:extLst xmlns:a="http://schemas.openxmlformats.org/drawingml/2006/main">
               <a:ext uri="{FF2B5EF4-FFF2-40B4-BE49-F238E27FC236}">
-                <a16:creationId xmlns:a16="http://schemas.microsoft.com/office/drawing/2014/main" id="{5AA004F3-9460-4B27-9664-CB39D1A5117D}"/>
+                <a16:creationId xmlns:a16="http://schemas.microsoft.com/office/drawing/2014/main" id="{F70980B0-C2AC-42D7-B175-FED4AC977989}"/>
               </a:ext>
             </a:extLst>
           </p:cNvPr>
@@ -5290,7 +4465,7 @@
     </p:spTree>
     <p:extLst>
       <p:ext uri="{BB962C8B-B14F-4D97-AF65-F5344CB8AC3E}">
-        <p14:creationId xmlns:p14="http://schemas.microsoft.com/office/powerpoint/2010/main" val="1983049174"/>
+        <p14:creationId xmlns:p14="http://schemas.microsoft.com/office/powerpoint/2010/main" val="837687268"/>
       </p:ext>
     </p:extLst>
   </p:cSld>
@@ -5321,7 +4496,7 @@
           <p:cNvPr id="15" name="">
             <a:extLst xmlns:a="http://schemas.openxmlformats.org/drawingml/2006/main">
               <a:ext uri="{FF2B5EF4-FFF2-40B4-BE49-F238E27FC236}">
-                <a16:creationId xmlns:a16="http://schemas.microsoft.com/office/drawing/2014/main" id="{83825552-2A7F-4A93-9708-20354F35901C}"/>
+                <a16:creationId xmlns:a16="http://schemas.microsoft.com/office/drawing/2014/main" id="{52FBA7F1-87B4-4EF4-AD54-39EE4E77F172}"/>
               </a:ext>
             </a:extLst>
           </p:cNvPr>
@@ -5389,7 +4564,7 @@
           <p:cNvPr id="2" name="">
             <a:extLst xmlns:a="http://schemas.openxmlformats.org/drawingml/2006/main">
               <a:ext uri="{FF2B5EF4-FFF2-40B4-BE49-F238E27FC236}">
-                <a16:creationId xmlns:a16="http://schemas.microsoft.com/office/drawing/2014/main" id="{F87BFEE2-2E36-47A9-A6DC-5AC77C56A7DC}"/>
+                <a16:creationId xmlns:a16="http://schemas.microsoft.com/office/drawing/2014/main" id="{E6CBB3AF-A3FB-4454-B55E-AD6A3FB6C330}"/>
               </a:ext>
             </a:extLst>
           </p:cNvPr>
@@ -5399,7 +4574,7 @@
           <p:nvPr/>
         </p:nvPicPr>
         <p:blipFill>
-          <a:blip xmlns:r="http://schemas.openxmlformats.org/officeDocument/2006/relationships" xmlns:a="http://schemas.openxmlformats.org/drawingml/2006/main" r:embed="Rfc687dbf8e9b4b20"/>
+          <a:blip xmlns:r="http://schemas.openxmlformats.org/officeDocument/2006/relationships" xmlns:a="http://schemas.openxmlformats.org/drawingml/2006/main" r:embed="R5267abb327f64f46"/>
           <a:stretch xmlns:a="http://schemas.openxmlformats.org/drawingml/2006/main"/>
         </p:blipFill>
         <p:spPr>
@@ -5417,7 +4592,7 @@
           <p:cNvPr id="3" name="">
             <a:extLst xmlns:a="http://schemas.openxmlformats.org/drawingml/2006/main">
               <a:ext uri="{FF2B5EF4-FFF2-40B4-BE49-F238E27FC236}">
-                <a16:creationId xmlns:a16="http://schemas.microsoft.com/office/drawing/2014/main" id="{BC1904BA-09CF-4EFC-80AE-E6084129F06B}"/>
+                <a16:creationId xmlns:a16="http://schemas.microsoft.com/office/drawing/2014/main" id="{18FC7DE4-DDF7-4518-883C-4B671A1AF2B8}"/>
               </a:ext>
             </a:extLst>
           </p:cNvPr>
@@ -5447,7 +4622,7 @@
           <p:cNvPr id="4" name="">
             <a:extLst xmlns:a="http://schemas.openxmlformats.org/drawingml/2006/main">
               <a:ext uri="{FF2B5EF4-FFF2-40B4-BE49-F238E27FC236}">
-                <a16:creationId xmlns:a16="http://schemas.microsoft.com/office/drawing/2014/main" id="{259ECCB0-1AB6-4A99-B400-8F0E96CAC20F}"/>
+                <a16:creationId xmlns:a16="http://schemas.microsoft.com/office/drawing/2014/main" id="{73BC4F5D-AAC0-4E81-97A1-E30E3382E95E}"/>
               </a:ext>
             </a:extLst>
           </p:cNvPr>
@@ -5515,7 +4690,7 @@
           <p:cNvPr id="5" name="">
             <a:extLst xmlns:a="http://schemas.openxmlformats.org/drawingml/2006/main">
               <a:ext uri="{FF2B5EF4-FFF2-40B4-BE49-F238E27FC236}">
-                <a16:creationId xmlns:a16="http://schemas.microsoft.com/office/drawing/2014/main" id="{A0A979B5-68AA-4C8A-9180-D871AF608CD6}"/>
+                <a16:creationId xmlns:a16="http://schemas.microsoft.com/office/drawing/2014/main" id="{7D25776B-9CEB-444E-BD85-B4B353F4C4C5}"/>
               </a:ext>
             </a:extLst>
           </p:cNvPr>
@@ -5583,7 +4758,7 @@
           <p:cNvPr id="6" name="">
             <a:extLst xmlns:a="http://schemas.openxmlformats.org/drawingml/2006/main">
               <a:ext uri="{FF2B5EF4-FFF2-40B4-BE49-F238E27FC236}">
-                <a16:creationId xmlns:a16="http://schemas.microsoft.com/office/drawing/2014/main" id="{26A1F5DC-FBB7-43E5-A757-4834B85C08CE}"/>
+                <a16:creationId xmlns:a16="http://schemas.microsoft.com/office/drawing/2014/main" id="{DC6A23FB-1D4B-45F7-99D9-9BFE9AF168B1}"/>
               </a:ext>
             </a:extLst>
           </p:cNvPr>
@@ -5613,7 +4788,7 @@
           <p:cNvPr id="7" name="">
             <a:extLst xmlns:a="http://schemas.openxmlformats.org/drawingml/2006/main">
               <a:ext uri="{FF2B5EF4-FFF2-40B4-BE49-F238E27FC236}">
-                <a16:creationId xmlns:a16="http://schemas.microsoft.com/office/drawing/2014/main" id="{B53A1577-AC64-4BD4-9F52-BFBF31855AA1}"/>
+                <a16:creationId xmlns:a16="http://schemas.microsoft.com/office/drawing/2014/main" id="{DE7C5624-D968-4CF1-9C68-CB6133372482}"/>
               </a:ext>
             </a:extLst>
           </p:cNvPr>
@@ -5681,7 +4856,7 @@
           <p:cNvPr id="8" name="">
             <a:extLst xmlns:a="http://schemas.openxmlformats.org/drawingml/2006/main">
               <a:ext uri="{FF2B5EF4-FFF2-40B4-BE49-F238E27FC236}">
-                <a16:creationId xmlns:a16="http://schemas.microsoft.com/office/drawing/2014/main" id="{3506AE67-4482-4AD8-921C-08CBE1E9674E}"/>
+                <a16:creationId xmlns:a16="http://schemas.microsoft.com/office/drawing/2014/main" id="{B2281128-1F96-43B9-9498-567D8531A85F}"/>
               </a:ext>
             </a:extLst>
           </p:cNvPr>
@@ -5749,7 +4924,7 @@
           <p:cNvPr id="9" name="">
             <a:extLst xmlns:a="http://schemas.openxmlformats.org/drawingml/2006/main">
               <a:ext uri="{FF2B5EF4-FFF2-40B4-BE49-F238E27FC236}">
-                <a16:creationId xmlns:a16="http://schemas.microsoft.com/office/drawing/2014/main" id="{0181C33D-853D-4494-BF92-E378DEF1AA90}"/>
+                <a16:creationId xmlns:a16="http://schemas.microsoft.com/office/drawing/2014/main" id="{CBCA837E-6961-4DE6-921A-98CDA321D722}"/>
               </a:ext>
             </a:extLst>
           </p:cNvPr>
@@ -5779,7 +4954,7 @@
           <p:cNvPr id="10" name="">
             <a:extLst xmlns:a="http://schemas.openxmlformats.org/drawingml/2006/main">
               <a:ext uri="{FF2B5EF4-FFF2-40B4-BE49-F238E27FC236}">
-                <a16:creationId xmlns:a16="http://schemas.microsoft.com/office/drawing/2014/main" id="{6C66D1F9-B2F2-4EC9-8246-1072FF26A5EF}"/>
+                <a16:creationId xmlns:a16="http://schemas.microsoft.com/office/drawing/2014/main" id="{94CF228B-EB3A-4299-A4D0-92DFA3194D0A}"/>
               </a:ext>
             </a:extLst>
           </p:cNvPr>
@@ -5847,7 +5022,7 @@
           <p:cNvPr id="11" name="">
             <a:extLst xmlns:a="http://schemas.openxmlformats.org/drawingml/2006/main">
               <a:ext uri="{FF2B5EF4-FFF2-40B4-BE49-F238E27FC236}">
-                <a16:creationId xmlns:a16="http://schemas.microsoft.com/office/drawing/2014/main" id="{062746EE-D539-41FE-AF04-7CF075BA6E1B}"/>
+                <a16:creationId xmlns:a16="http://schemas.microsoft.com/office/drawing/2014/main" id="{D240F7A4-16B7-42A9-97ED-74C39A926D7B}"/>
               </a:ext>
             </a:extLst>
           </p:cNvPr>
@@ -5915,7 +5090,7 @@
           <p:cNvPr id="12" name="">
             <a:extLst xmlns:a="http://schemas.openxmlformats.org/drawingml/2006/main">
               <a:ext uri="{FF2B5EF4-FFF2-40B4-BE49-F238E27FC236}">
-                <a16:creationId xmlns:a16="http://schemas.microsoft.com/office/drawing/2014/main" id="{520EF028-D0BB-43A8-A843-741A3B3101D8}"/>
+                <a16:creationId xmlns:a16="http://schemas.microsoft.com/office/drawing/2014/main" id="{FECBEFD0-96BD-4E67-806C-D29C9853BF5B}"/>
               </a:ext>
             </a:extLst>
           </p:cNvPr>
@@ -5983,7 +5158,7 @@
           <p:cNvPr id="13" name="">
             <a:extLst xmlns:a="http://schemas.openxmlformats.org/drawingml/2006/main">
               <a:ext uri="{FF2B5EF4-FFF2-40B4-BE49-F238E27FC236}">
-                <a16:creationId xmlns:a16="http://schemas.microsoft.com/office/drawing/2014/main" id="{358A7FB0-60D6-459A-9F5D-86B1ED255E82}"/>
+                <a16:creationId xmlns:a16="http://schemas.microsoft.com/office/drawing/2014/main" id="{4CAD71B4-54B5-4316-A3AD-708B5A9A60C8}"/>
               </a:ext>
             </a:extLst>
           </p:cNvPr>
@@ -6051,7 +5226,7 @@
           <p:cNvPr id="14" name="">
             <a:extLst xmlns:a="http://schemas.openxmlformats.org/drawingml/2006/main">
               <a:ext uri="{FF2B5EF4-FFF2-40B4-BE49-F238E27FC236}">
-                <a16:creationId xmlns:a16="http://schemas.microsoft.com/office/drawing/2014/main" id="{E59AC33E-5F60-4998-B48B-8E46E0515A6C}"/>
+                <a16:creationId xmlns:a16="http://schemas.microsoft.com/office/drawing/2014/main" id="{936B5328-1B0B-45E3-99AA-B7BB02DAD3C1}"/>
               </a:ext>
             </a:extLst>
           </p:cNvPr>
@@ -6117,7 +5292,7 @@
     </p:spTree>
     <p:extLst>
       <p:ext uri="{BB962C8B-B14F-4D97-AF65-F5344CB8AC3E}">
-        <p14:creationId xmlns:p14="http://schemas.microsoft.com/office/powerpoint/2010/main" val="1836885466"/>
+        <p14:creationId xmlns:p14="http://schemas.microsoft.com/office/powerpoint/2010/main" val="109899234"/>
       </p:ext>
     </p:extLst>
   </p:cSld>
@@ -6148,7 +5323,7 @@
           <p:cNvPr id="7" name="">
             <a:extLst xmlns:a="http://schemas.openxmlformats.org/drawingml/2006/main">
               <a:ext uri="{FF2B5EF4-FFF2-40B4-BE49-F238E27FC236}">
-                <a16:creationId xmlns:a16="http://schemas.microsoft.com/office/drawing/2014/main" id="{56366853-6D60-4E32-8F64-FE48E0427472}"/>
+                <a16:creationId xmlns:a16="http://schemas.microsoft.com/office/drawing/2014/main" id="{9AE87080-0C9C-46E5-BC32-5964C6A8D0AE}"/>
               </a:ext>
             </a:extLst>
           </p:cNvPr>
@@ -6216,7 +5391,7 @@
           <p:cNvPr id="2" name="">
             <a:extLst xmlns:a="http://schemas.openxmlformats.org/drawingml/2006/main">
               <a:ext uri="{FF2B5EF4-FFF2-40B4-BE49-F238E27FC236}">
-                <a16:creationId xmlns:a16="http://schemas.microsoft.com/office/drawing/2014/main" id="{7B1EB06E-1860-4523-B45A-7A51BEA35341}"/>
+                <a16:creationId xmlns:a16="http://schemas.microsoft.com/office/drawing/2014/main" id="{E3F21D67-615F-494D-AF90-5B449FB170B0}"/>
               </a:ext>
             </a:extLst>
           </p:cNvPr>
@@ -6284,7 +5459,7 @@
           <p:cNvPr id="3" name="">
             <a:extLst xmlns:a="http://schemas.openxmlformats.org/drawingml/2006/main">
               <a:ext uri="{FF2B5EF4-FFF2-40B4-BE49-F238E27FC236}">
-                <a16:creationId xmlns:a16="http://schemas.microsoft.com/office/drawing/2014/main" id="{7F45A8FC-B90A-4424-863F-602DF6FBDEC4}"/>
+                <a16:creationId xmlns:a16="http://schemas.microsoft.com/office/drawing/2014/main" id="{14F4D59C-0818-498E-ADF8-334285246ECE}"/>
               </a:ext>
             </a:extLst>
           </p:cNvPr>
@@ -6294,7 +5469,7 @@
           <p:nvPr/>
         </p:nvPicPr>
         <p:blipFill>
-          <a:blip xmlns:r="http://schemas.openxmlformats.org/officeDocument/2006/relationships" xmlns:a="http://schemas.openxmlformats.org/drawingml/2006/main" r:embed="Rfdad506937c64a19"/>
+          <a:blip xmlns:r="http://schemas.openxmlformats.org/officeDocument/2006/relationships" xmlns:a="http://schemas.openxmlformats.org/drawingml/2006/main" r:embed="R582701f7941648f7"/>
           <a:stretch xmlns:a="http://schemas.openxmlformats.org/drawingml/2006/main"/>
         </p:blipFill>
         <p:spPr>
@@ -6312,7 +5487,7 @@
           <p:cNvPr id="4" name="">
             <a:extLst xmlns:a="http://schemas.openxmlformats.org/drawingml/2006/main">
               <a:ext uri="{FF2B5EF4-FFF2-40B4-BE49-F238E27FC236}">
-                <a16:creationId xmlns:a16="http://schemas.microsoft.com/office/drawing/2014/main" id="{2FCA793D-9449-4B3E-BAB3-1E266F50B3F3}"/>
+                <a16:creationId xmlns:a16="http://schemas.microsoft.com/office/drawing/2014/main" id="{43905F52-65A7-4CF6-86B7-BF239676944C}"/>
               </a:ext>
             </a:extLst>
           </p:cNvPr>
@@ -6342,7 +5517,7 @@
           <p:cNvPr id="5" name="">
             <a:extLst xmlns:a="http://schemas.openxmlformats.org/drawingml/2006/main">
               <a:ext uri="{FF2B5EF4-FFF2-40B4-BE49-F238E27FC236}">
-                <a16:creationId xmlns:a16="http://schemas.microsoft.com/office/drawing/2014/main" id="{01E0AD2D-BD20-4267-835A-3F3E09FEF9A7}"/>
+                <a16:creationId xmlns:a16="http://schemas.microsoft.com/office/drawing/2014/main" id="{FC7543C7-F3B6-4BE9-AC91-ADA48252EC55}"/>
               </a:ext>
             </a:extLst>
           </p:cNvPr>
@@ -6410,7 +5585,7 @@
           <p:cNvPr id="6" name="">
             <a:extLst xmlns:a="http://schemas.openxmlformats.org/drawingml/2006/main">
               <a:ext uri="{FF2B5EF4-FFF2-40B4-BE49-F238E27FC236}">
-                <a16:creationId xmlns:a16="http://schemas.microsoft.com/office/drawing/2014/main" id="{7F3CCD03-6A3A-4D11-8304-A824E6B58BF3}"/>
+                <a16:creationId xmlns:a16="http://schemas.microsoft.com/office/drawing/2014/main" id="{7681E578-1031-4B91-B9E8-5E0FED0A14E2}"/>
               </a:ext>
             </a:extLst>
           </p:cNvPr>
@@ -6476,7 +5651,7 @@
     </p:spTree>
     <p:extLst>
       <p:ext uri="{BB962C8B-B14F-4D97-AF65-F5344CB8AC3E}">
-        <p14:creationId xmlns:p14="http://schemas.microsoft.com/office/powerpoint/2010/main" val="750610031"/>
+        <p14:creationId xmlns:p14="http://schemas.microsoft.com/office/powerpoint/2010/main" val="1554024406"/>
       </p:ext>
     </p:extLst>
   </p:cSld>
@@ -6507,7 +5682,7 @@
           <p:cNvPr id="6" name="">
             <a:extLst xmlns:a="http://schemas.openxmlformats.org/drawingml/2006/main">
               <a:ext uri="{FF2B5EF4-FFF2-40B4-BE49-F238E27FC236}">
-                <a16:creationId xmlns:a16="http://schemas.microsoft.com/office/drawing/2014/main" id="{0F9A734B-4EF1-4212-BFC3-6534B097DF9E}"/>
+                <a16:creationId xmlns:a16="http://schemas.microsoft.com/office/drawing/2014/main" id="{61FE0A04-EE09-4CA0-BCA0-4B07C538B6DB}"/>
               </a:ext>
             </a:extLst>
           </p:cNvPr>
@@ -6517,7 +5692,7 @@
           <p:nvPr/>
         </p:nvPicPr>
         <p:blipFill>
-          <a:blip xmlns:r="http://schemas.openxmlformats.org/officeDocument/2006/relationships" xmlns:a="http://schemas.openxmlformats.org/drawingml/2006/main" r:embed="R65837f39e4014c10"/>
+          <a:blip xmlns:r="http://schemas.openxmlformats.org/officeDocument/2006/relationships" xmlns:a="http://schemas.openxmlformats.org/drawingml/2006/main" r:embed="R8ae438da2db74641"/>
           <a:stretch xmlns:a="http://schemas.openxmlformats.org/drawingml/2006/main"/>
         </p:blipFill>
         <p:spPr>
@@ -6535,7 +5710,7 @@
           <p:cNvPr id="2" name="">
             <a:extLst xmlns:a="http://schemas.openxmlformats.org/drawingml/2006/main">
               <a:ext uri="{FF2B5EF4-FFF2-40B4-BE49-F238E27FC236}">
-                <a16:creationId xmlns:a16="http://schemas.microsoft.com/office/drawing/2014/main" id="{262D81E0-1EE7-46BD-B93B-43BCD74C43C2}"/>
+                <a16:creationId xmlns:a16="http://schemas.microsoft.com/office/drawing/2014/main" id="{D2280318-4813-4BCE-BB2A-5503C63CCCB7}"/>
               </a:ext>
             </a:extLst>
           </p:cNvPr>
@@ -6603,7 +5778,7 @@
           <p:cNvPr id="3" name="">
             <a:extLst xmlns:a="http://schemas.openxmlformats.org/drawingml/2006/main">
               <a:ext uri="{FF2B5EF4-FFF2-40B4-BE49-F238E27FC236}">
-                <a16:creationId xmlns:a16="http://schemas.microsoft.com/office/drawing/2014/main" id="{7AE98739-72A2-492C-B6C4-E64E7547E85F}"/>
+                <a16:creationId xmlns:a16="http://schemas.microsoft.com/office/drawing/2014/main" id="{778D60CB-36BD-40E9-BFE5-E1ABF8A889D3}"/>
               </a:ext>
             </a:extLst>
           </p:cNvPr>
@@ -6671,7 +5846,7 @@
           <p:cNvPr id="4" name="">
             <a:extLst xmlns:a="http://schemas.openxmlformats.org/drawingml/2006/main">
               <a:ext uri="{FF2B5EF4-FFF2-40B4-BE49-F238E27FC236}">
-                <a16:creationId xmlns:a16="http://schemas.microsoft.com/office/drawing/2014/main" id="{85302E21-F78F-43FE-A5B0-1A1E8DE748EB}"/>
+                <a16:creationId xmlns:a16="http://schemas.microsoft.com/office/drawing/2014/main" id="{BFC4EA1D-685D-479D-A01C-16A0B9ADEE52}"/>
               </a:ext>
             </a:extLst>
           </p:cNvPr>
@@ -6739,7 +5914,7 @@
           <p:cNvPr id="5" name="">
             <a:extLst xmlns:a="http://schemas.openxmlformats.org/drawingml/2006/main">
               <a:ext uri="{FF2B5EF4-FFF2-40B4-BE49-F238E27FC236}">
-                <a16:creationId xmlns:a16="http://schemas.microsoft.com/office/drawing/2014/main" id="{717E1972-224C-433B-869E-0267B84D8165}"/>
+                <a16:creationId xmlns:a16="http://schemas.microsoft.com/office/drawing/2014/main" id="{C8C35B83-0514-4FEA-9AC2-54B8023B337D}"/>
               </a:ext>
             </a:extLst>
           </p:cNvPr>
@@ -6805,7 +5980,7 @@
     </p:spTree>
     <p:extLst>
       <p:ext uri="{BB962C8B-B14F-4D97-AF65-F5344CB8AC3E}">
-        <p14:creationId xmlns:p14="http://schemas.microsoft.com/office/powerpoint/2010/main" val="1662911044"/>
+        <p14:creationId xmlns:p14="http://schemas.microsoft.com/office/powerpoint/2010/main" val="308384400"/>
       </p:ext>
     </p:extLst>
   </p:cSld>
@@ -6836,7 +6011,7 @@
           <p:cNvPr id="28" name="">
             <a:extLst xmlns:a="http://schemas.openxmlformats.org/drawingml/2006/main">
               <a:ext uri="{FF2B5EF4-FFF2-40B4-BE49-F238E27FC236}">
-                <a16:creationId xmlns:a16="http://schemas.microsoft.com/office/drawing/2014/main" id="{28342B41-EBE2-4773-B2BE-6403EA46757C}"/>
+                <a16:creationId xmlns:a16="http://schemas.microsoft.com/office/drawing/2014/main" id="{497CB6F6-9186-4C74-BBFB-CCA5F9211B40}"/>
               </a:ext>
             </a:extLst>
           </p:cNvPr>
@@ -6846,7 +6021,7 @@
           <p:nvPr/>
         </p:nvPicPr>
         <p:blipFill>
-          <a:blip xmlns:r="http://schemas.openxmlformats.org/officeDocument/2006/relationships" xmlns:a="http://schemas.openxmlformats.org/drawingml/2006/main" r:embed="R02e8748aff6a41f3"/>
+          <a:blip xmlns:r="http://schemas.openxmlformats.org/officeDocument/2006/relationships" xmlns:a="http://schemas.openxmlformats.org/drawingml/2006/main" r:embed="R1734c51700394497"/>
           <a:srcRect xmlns:a="http://schemas.openxmlformats.org/drawingml/2006/main" l="0" t="0" r="0" b="0"/>
           <a:stretch xmlns:a="http://schemas.openxmlformats.org/drawingml/2006/main">
             <a:fillRect l="0" t="0" r="0" b="0"/>
@@ -6867,7 +6042,7 @@
           <p:cNvPr id="2" name="">
             <a:extLst xmlns:a="http://schemas.openxmlformats.org/drawingml/2006/main">
               <a:ext uri="{FF2B5EF4-FFF2-40B4-BE49-F238E27FC236}">
-                <a16:creationId xmlns:a16="http://schemas.microsoft.com/office/drawing/2014/main" id="{A56A2F6C-0D2A-41F7-B8A9-2F58A52D4E8A}"/>
+                <a16:creationId xmlns:a16="http://schemas.microsoft.com/office/drawing/2014/main" id="{CE5A4705-EBF3-48BE-9945-AA88EE0D68B3}"/>
               </a:ext>
             </a:extLst>
           </p:cNvPr>
@@ -6935,7 +6110,7 @@
           <p:cNvPr id="3" name="">
             <a:extLst xmlns:a="http://schemas.openxmlformats.org/drawingml/2006/main">
               <a:ext uri="{FF2B5EF4-FFF2-40B4-BE49-F238E27FC236}">
-                <a16:creationId xmlns:a16="http://schemas.microsoft.com/office/drawing/2014/main" id="{629DFB93-5309-4A24-8241-EAB75EBE517E}"/>
+                <a16:creationId xmlns:a16="http://schemas.microsoft.com/office/drawing/2014/main" id="{78775FB3-712F-4A74-A60B-A48825A9A96F}"/>
               </a:ext>
             </a:extLst>
           </p:cNvPr>
@@ -7003,7 +6178,7 @@
           <p:cNvPr id="4" name="">
             <a:extLst xmlns:a="http://schemas.openxmlformats.org/drawingml/2006/main">
               <a:ext uri="{FF2B5EF4-FFF2-40B4-BE49-F238E27FC236}">
-                <a16:creationId xmlns:a16="http://schemas.microsoft.com/office/drawing/2014/main" id="{B5E62C32-F4A2-4162-B8E4-3A1E957E194B}"/>
+                <a16:creationId xmlns:a16="http://schemas.microsoft.com/office/drawing/2014/main" id="{2CC38E57-71E9-4A19-B213-38D7FB3B54A5}"/>
               </a:ext>
             </a:extLst>
           </p:cNvPr>
@@ -7071,7 +6246,7 @@
           <p:cNvPr id="5" name="">
             <a:extLst xmlns:a="http://schemas.openxmlformats.org/drawingml/2006/main">
               <a:ext uri="{FF2B5EF4-FFF2-40B4-BE49-F238E27FC236}">
-                <a16:creationId xmlns:a16="http://schemas.microsoft.com/office/drawing/2014/main" id="{0978F407-959B-4438-ADBC-0BCF390A0CA3}"/>
+                <a16:creationId xmlns:a16="http://schemas.microsoft.com/office/drawing/2014/main" id="{4078B16B-D63D-40F1-A19C-4DEA56A1FBDB}"/>
               </a:ext>
             </a:extLst>
           </p:cNvPr>
@@ -7081,7 +6256,7 @@
           <p:nvPr/>
         </p:nvPicPr>
         <p:blipFill>
-          <a:blip xmlns:r="http://schemas.openxmlformats.org/officeDocument/2006/relationships" xmlns:a="http://schemas.openxmlformats.org/drawingml/2006/main" r:embed="R7dfe56bdcf744814"/>
+          <a:blip xmlns:r="http://schemas.openxmlformats.org/officeDocument/2006/relationships" xmlns:a="http://schemas.openxmlformats.org/drawingml/2006/main" r:embed="R4bd00ef6fc044248"/>
           <a:stretch xmlns:a="http://schemas.openxmlformats.org/drawingml/2006/main"/>
         </p:blipFill>
         <p:spPr>
@@ -7099,7 +6274,7 @@
           <p:cNvPr id="6" name="">
             <a:extLst xmlns:a="http://schemas.openxmlformats.org/drawingml/2006/main">
               <a:ext uri="{FF2B5EF4-FFF2-40B4-BE49-F238E27FC236}">
-                <a16:creationId xmlns:a16="http://schemas.microsoft.com/office/drawing/2014/main" id="{AF76D479-6B72-4118-B145-F4AC6F6D3695}"/>
+                <a16:creationId xmlns:a16="http://schemas.microsoft.com/office/drawing/2014/main" id="{66823170-2805-4EC7-AC5D-BB5A6676F51E}"/>
               </a:ext>
             </a:extLst>
           </p:cNvPr>
@@ -7129,7 +6304,7 @@
           <p:cNvPr id="7" name="">
             <a:extLst xmlns:a="http://schemas.openxmlformats.org/drawingml/2006/main">
               <a:ext uri="{FF2B5EF4-FFF2-40B4-BE49-F238E27FC236}">
-                <a16:creationId xmlns:a16="http://schemas.microsoft.com/office/drawing/2014/main" id="{DD838CE9-DE1D-48C8-8E2E-22F8F4B14760}"/>
+                <a16:creationId xmlns:a16="http://schemas.microsoft.com/office/drawing/2014/main" id="{1A28C138-953F-4E34-BC50-5292F05FBA26}"/>
               </a:ext>
             </a:extLst>
           </p:cNvPr>
@@ -7197,7 +6372,7 @@
           <p:cNvPr id="8" name="">
             <a:extLst xmlns:a="http://schemas.openxmlformats.org/drawingml/2006/main">
               <a:ext uri="{FF2B5EF4-FFF2-40B4-BE49-F238E27FC236}">
-                <a16:creationId xmlns:a16="http://schemas.microsoft.com/office/drawing/2014/main" id="{7653C0F5-8783-4E51-90AB-8FDA80A37F8C}"/>
+                <a16:creationId xmlns:a16="http://schemas.microsoft.com/office/drawing/2014/main" id="{0194A16F-78E8-40D4-8580-B54E4FD3AA13}"/>
               </a:ext>
             </a:extLst>
           </p:cNvPr>
@@ -7265,7 +6440,7 @@
           <p:cNvPr id="9" name="">
             <a:extLst xmlns:a="http://schemas.openxmlformats.org/drawingml/2006/main">
               <a:ext uri="{FF2B5EF4-FFF2-40B4-BE49-F238E27FC236}">
-                <a16:creationId xmlns:a16="http://schemas.microsoft.com/office/drawing/2014/main" id="{CB64823E-6519-416F-A38B-44AE05668A9B}"/>
+                <a16:creationId xmlns:a16="http://schemas.microsoft.com/office/drawing/2014/main" id="{10CA95E4-6439-48E4-B5D6-D8CD684351AF}"/>
               </a:ext>
             </a:extLst>
           </p:cNvPr>
@@ -7333,7 +6508,7 @@
           <p:cNvPr id="10" name="">
             <a:extLst xmlns:a="http://schemas.openxmlformats.org/drawingml/2006/main">
               <a:ext uri="{FF2B5EF4-FFF2-40B4-BE49-F238E27FC236}">
-                <a16:creationId xmlns:a16="http://schemas.microsoft.com/office/drawing/2014/main" id="{39722C97-D291-4291-A178-8AF13229E0C5}"/>
+                <a16:creationId xmlns:a16="http://schemas.microsoft.com/office/drawing/2014/main" id="{74003981-F337-45CD-82FA-727D8D51A18B}"/>
               </a:ext>
             </a:extLst>
           </p:cNvPr>
@@ -7401,7 +6576,7 @@
           <p:cNvPr id="11" name="">
             <a:extLst xmlns:a="http://schemas.openxmlformats.org/drawingml/2006/main">
               <a:ext uri="{FF2B5EF4-FFF2-40B4-BE49-F238E27FC236}">
-                <a16:creationId xmlns:a16="http://schemas.microsoft.com/office/drawing/2014/main" id="{DA01BEE3-0649-4CD7-8509-A0ECA4476593}"/>
+                <a16:creationId xmlns:a16="http://schemas.microsoft.com/office/drawing/2014/main" id="{253CF544-C2D2-461F-BEF6-6B90EE217144}"/>
               </a:ext>
             </a:extLst>
           </p:cNvPr>
@@ -7469,7 +6644,7 @@
           <p:cNvPr id="12" name="">
             <a:extLst xmlns:a="http://schemas.openxmlformats.org/drawingml/2006/main">
               <a:ext uri="{FF2B5EF4-FFF2-40B4-BE49-F238E27FC236}">
-                <a16:creationId xmlns:a16="http://schemas.microsoft.com/office/drawing/2014/main" id="{8425F3D8-BED8-4031-AE87-A5377D8F093F}"/>
+                <a16:creationId xmlns:a16="http://schemas.microsoft.com/office/drawing/2014/main" id="{7F1660CB-E159-47AE-8871-41604EF20E15}"/>
               </a:ext>
             </a:extLst>
           </p:cNvPr>
@@ -7537,7 +6712,7 @@
           <p:cNvPr id="13" name="">
             <a:extLst xmlns:a="http://schemas.openxmlformats.org/drawingml/2006/main">
               <a:ext uri="{FF2B5EF4-FFF2-40B4-BE49-F238E27FC236}">
-                <a16:creationId xmlns:a16="http://schemas.microsoft.com/office/drawing/2014/main" id="{B9AC4E39-A5AF-4274-BD95-0B42AD0BEDD6}"/>
+                <a16:creationId xmlns:a16="http://schemas.microsoft.com/office/drawing/2014/main" id="{A32BBCD7-92A9-44FB-8D4E-664900D056C9}"/>
               </a:ext>
             </a:extLst>
           </p:cNvPr>
@@ -7605,7 +6780,7 @@
           <p:cNvPr id="14" name="">
             <a:extLst xmlns:a="http://schemas.openxmlformats.org/drawingml/2006/main">
               <a:ext uri="{FF2B5EF4-FFF2-40B4-BE49-F238E27FC236}">
-                <a16:creationId xmlns:a16="http://schemas.microsoft.com/office/drawing/2014/main" id="{61201C22-FF19-4046-A1CC-52A2E45F1F54}"/>
+                <a16:creationId xmlns:a16="http://schemas.microsoft.com/office/drawing/2014/main" id="{52EA2AAA-F1E4-4F7C-BD57-D5B6C6A70AC3}"/>
               </a:ext>
             </a:extLst>
           </p:cNvPr>
@@ -7673,7 +6848,7 @@
           <p:cNvPr id="15" name="">
             <a:extLst xmlns:a="http://schemas.openxmlformats.org/drawingml/2006/main">
               <a:ext uri="{FF2B5EF4-FFF2-40B4-BE49-F238E27FC236}">
-                <a16:creationId xmlns:a16="http://schemas.microsoft.com/office/drawing/2014/main" id="{2DE25EAB-976D-4629-8A8A-7C3C2BD0F976}"/>
+                <a16:creationId xmlns:a16="http://schemas.microsoft.com/office/drawing/2014/main" id="{06E3D25C-1F59-416E-9A41-818A01A4DB4B}"/>
               </a:ext>
             </a:extLst>
           </p:cNvPr>
@@ -7741,7 +6916,7 @@
           <p:cNvPr id="16" name="">
             <a:extLst xmlns:a="http://schemas.openxmlformats.org/drawingml/2006/main">
               <a:ext uri="{FF2B5EF4-FFF2-40B4-BE49-F238E27FC236}">
-                <a16:creationId xmlns:a16="http://schemas.microsoft.com/office/drawing/2014/main" id="{79FEBADD-7DD2-43D7-9875-DF118EB27E53}"/>
+                <a16:creationId xmlns:a16="http://schemas.microsoft.com/office/drawing/2014/main" id="{9C3D33AE-C429-439A-A464-350A022DCF6A}"/>
               </a:ext>
             </a:extLst>
           </p:cNvPr>
@@ -7809,7 +6984,7 @@
           <p:cNvPr id="17" name="">
             <a:extLst xmlns:a="http://schemas.openxmlformats.org/drawingml/2006/main">
               <a:ext uri="{FF2B5EF4-FFF2-40B4-BE49-F238E27FC236}">
-                <a16:creationId xmlns:a16="http://schemas.microsoft.com/office/drawing/2014/main" id="{CD131FA3-B7FE-4378-BB22-BCA7A4AF4B9F}"/>
+                <a16:creationId xmlns:a16="http://schemas.microsoft.com/office/drawing/2014/main" id="{6433CD06-84BE-4882-9340-0804FDBFF60A}"/>
               </a:ext>
             </a:extLst>
           </p:cNvPr>
@@ -7877,7 +7052,7 @@
           <p:cNvPr id="18" name="">
             <a:extLst xmlns:a="http://schemas.openxmlformats.org/drawingml/2006/main">
               <a:ext uri="{FF2B5EF4-FFF2-40B4-BE49-F238E27FC236}">
-                <a16:creationId xmlns:a16="http://schemas.microsoft.com/office/drawing/2014/main" id="{0E3526C3-7CCC-48EA-8B72-9646B567C76F}"/>
+                <a16:creationId xmlns:a16="http://schemas.microsoft.com/office/drawing/2014/main" id="{64448834-0592-456D-8800-00CAC21010D3}"/>
               </a:ext>
             </a:extLst>
           </p:cNvPr>
@@ -7945,7 +7120,7 @@
           <p:cNvPr id="19" name="">
             <a:extLst xmlns:a="http://schemas.openxmlformats.org/drawingml/2006/main">
               <a:ext uri="{FF2B5EF4-FFF2-40B4-BE49-F238E27FC236}">
-                <a16:creationId xmlns:a16="http://schemas.microsoft.com/office/drawing/2014/main" id="{D7D46E8E-283B-4C12-AEF8-B7B7B796D5CC}"/>
+                <a16:creationId xmlns:a16="http://schemas.microsoft.com/office/drawing/2014/main" id="{79C543EF-CF3E-4BC5-ACD7-CAA859FF3632}"/>
               </a:ext>
             </a:extLst>
           </p:cNvPr>
@@ -8013,7 +7188,7 @@
           <p:cNvPr id="20" name="">
             <a:extLst xmlns:a="http://schemas.openxmlformats.org/drawingml/2006/main">
               <a:ext uri="{FF2B5EF4-FFF2-40B4-BE49-F238E27FC236}">
-                <a16:creationId xmlns:a16="http://schemas.microsoft.com/office/drawing/2014/main" id="{9AC2A519-7A3A-4E77-A9FB-9D553398E797}"/>
+                <a16:creationId xmlns:a16="http://schemas.microsoft.com/office/drawing/2014/main" id="{C34D10FD-8383-4A98-996D-6193C626DC06}"/>
               </a:ext>
             </a:extLst>
           </p:cNvPr>
@@ -8081,7 +7256,7 @@
           <p:cNvPr id="21" name="">
             <a:extLst xmlns:a="http://schemas.openxmlformats.org/drawingml/2006/main">
               <a:ext uri="{FF2B5EF4-FFF2-40B4-BE49-F238E27FC236}">
-                <a16:creationId xmlns:a16="http://schemas.microsoft.com/office/drawing/2014/main" id="{9EAB77B3-B1B2-4FAF-99B3-C0050E8D7565}"/>
+                <a16:creationId xmlns:a16="http://schemas.microsoft.com/office/drawing/2014/main" id="{17154E91-31A1-467C-9854-816A7D04458E}"/>
               </a:ext>
             </a:extLst>
           </p:cNvPr>
@@ -8149,7 +7324,7 @@
           <p:cNvPr id="22" name="">
             <a:extLst xmlns:a="http://schemas.openxmlformats.org/drawingml/2006/main">
               <a:ext uri="{FF2B5EF4-FFF2-40B4-BE49-F238E27FC236}">
-                <a16:creationId xmlns:a16="http://schemas.microsoft.com/office/drawing/2014/main" id="{B4FECC2C-FEA9-4248-AF48-C14A091F8E01}"/>
+                <a16:creationId xmlns:a16="http://schemas.microsoft.com/office/drawing/2014/main" id="{B96BAAF9-0BE8-4BE5-B5E4-6579C2BAD340}"/>
               </a:ext>
             </a:extLst>
           </p:cNvPr>
@@ -8217,7 +7392,7 @@
           <p:cNvPr id="23" name="">
             <a:extLst xmlns:a="http://schemas.openxmlformats.org/drawingml/2006/main">
               <a:ext uri="{FF2B5EF4-FFF2-40B4-BE49-F238E27FC236}">
-                <a16:creationId xmlns:a16="http://schemas.microsoft.com/office/drawing/2014/main" id="{94D014AE-29AF-460F-B326-A86EEB281CC0}"/>
+                <a16:creationId xmlns:a16="http://schemas.microsoft.com/office/drawing/2014/main" id="{FE2FD9D9-0FE9-4963-BC1B-0E32D648BEA3}"/>
               </a:ext>
             </a:extLst>
           </p:cNvPr>
@@ -8285,7 +7460,7 @@
           <p:cNvPr id="24" name="">
             <a:extLst xmlns:a="http://schemas.openxmlformats.org/drawingml/2006/main">
               <a:ext uri="{FF2B5EF4-FFF2-40B4-BE49-F238E27FC236}">
-                <a16:creationId xmlns:a16="http://schemas.microsoft.com/office/drawing/2014/main" id="{8ED7B6D7-FD9B-421E-A15E-A9408C10B494}"/>
+                <a16:creationId xmlns:a16="http://schemas.microsoft.com/office/drawing/2014/main" id="{E3A0E869-8F91-4E5B-A377-0DA6410C6854}"/>
               </a:ext>
             </a:extLst>
           </p:cNvPr>
@@ -8353,7 +7528,7 @@
           <p:cNvPr id="25" name="">
             <a:extLst xmlns:a="http://schemas.openxmlformats.org/drawingml/2006/main">
               <a:ext uri="{FF2B5EF4-FFF2-40B4-BE49-F238E27FC236}">
-                <a16:creationId xmlns:a16="http://schemas.microsoft.com/office/drawing/2014/main" id="{A9F3F7E7-399A-4877-905C-89E01E948911}"/>
+                <a16:creationId xmlns:a16="http://schemas.microsoft.com/office/drawing/2014/main" id="{02FCDEE1-F359-482F-AEEC-B87EA9892C38}"/>
               </a:ext>
             </a:extLst>
           </p:cNvPr>
@@ -8421,7 +7596,7 @@
           <p:cNvPr id="26" name="">
             <a:extLst xmlns:a="http://schemas.openxmlformats.org/drawingml/2006/main">
               <a:ext uri="{FF2B5EF4-FFF2-40B4-BE49-F238E27FC236}">
-                <a16:creationId xmlns:a16="http://schemas.microsoft.com/office/drawing/2014/main" id="{D03352B4-A759-408A-B466-A24BAE948B0A}"/>
+                <a16:creationId xmlns:a16="http://schemas.microsoft.com/office/drawing/2014/main" id="{F695E841-C616-4144-95CE-ECAEB2E4A27D}"/>
               </a:ext>
             </a:extLst>
           </p:cNvPr>
@@ -8489,7 +7664,7 @@
           <p:cNvPr id="27" name="">
             <a:extLst xmlns:a="http://schemas.openxmlformats.org/drawingml/2006/main">
               <a:ext uri="{FF2B5EF4-FFF2-40B4-BE49-F238E27FC236}">
-                <a16:creationId xmlns:a16="http://schemas.microsoft.com/office/drawing/2014/main" id="{E39BA2D2-EE6F-4C9C-8B60-CCF3BB8E6FD2}"/>
+                <a16:creationId xmlns:a16="http://schemas.microsoft.com/office/drawing/2014/main" id="{7D5BCE21-B111-4371-91CE-45E03D8AC578}"/>
               </a:ext>
             </a:extLst>
           </p:cNvPr>
@@ -8555,7 +7730,7 @@
     </p:spTree>
     <p:extLst>
       <p:ext uri="{BB962C8B-B14F-4D97-AF65-F5344CB8AC3E}">
-        <p14:creationId xmlns:p14="http://schemas.microsoft.com/office/powerpoint/2010/main" val="1730114855"/>
+        <p14:creationId xmlns:p14="http://schemas.microsoft.com/office/powerpoint/2010/main" val="1966129995"/>
       </p:ext>
     </p:extLst>
   </p:cSld>
@@ -8586,7 +7761,7 @@
           <p:cNvPr id="14" name="">
             <a:extLst xmlns:a="http://schemas.openxmlformats.org/drawingml/2006/main">
               <a:ext uri="{FF2B5EF4-FFF2-40B4-BE49-F238E27FC236}">
-                <a16:creationId xmlns:a16="http://schemas.microsoft.com/office/drawing/2014/main" id="{9EDB460E-23BA-443B-B96C-78BAF57945A8}"/>
+                <a16:creationId xmlns:a16="http://schemas.microsoft.com/office/drawing/2014/main" id="{AE0A146D-503A-4F31-AE68-70C5C1126918}"/>
               </a:ext>
             </a:extLst>
           </p:cNvPr>
@@ -8654,7 +7829,7 @@
           <p:cNvPr id="2" name="">
             <a:extLst xmlns:a="http://schemas.openxmlformats.org/drawingml/2006/main">
               <a:ext uri="{FF2B5EF4-FFF2-40B4-BE49-F238E27FC236}">
-                <a16:creationId xmlns:a16="http://schemas.microsoft.com/office/drawing/2014/main" id="{2EA0FEBC-5F59-4461-A09C-1F475AA5CBC0}"/>
+                <a16:creationId xmlns:a16="http://schemas.microsoft.com/office/drawing/2014/main" id="{484739DC-00A7-487B-A6C0-3AEA5E1ED155}"/>
               </a:ext>
             </a:extLst>
           </p:cNvPr>
@@ -8664,7 +7839,7 @@
           <p:nvPr/>
         </p:nvPicPr>
         <p:blipFill>
-          <a:blip xmlns:r="http://schemas.openxmlformats.org/officeDocument/2006/relationships" xmlns:a="http://schemas.openxmlformats.org/drawingml/2006/main" r:embed="Rea2ca80944844ecd"/>
+          <a:blip xmlns:r="http://schemas.openxmlformats.org/officeDocument/2006/relationships" xmlns:a="http://schemas.openxmlformats.org/drawingml/2006/main" r:embed="R96e20ec8a92e4add"/>
           <a:stretch xmlns:a="http://schemas.openxmlformats.org/drawingml/2006/main"/>
         </p:blipFill>
         <p:spPr>
@@ -8682,7 +7857,7 @@
           <p:cNvPr id="3" name="">
             <a:extLst xmlns:a="http://schemas.openxmlformats.org/drawingml/2006/main">
               <a:ext uri="{FF2B5EF4-FFF2-40B4-BE49-F238E27FC236}">
-                <a16:creationId xmlns:a16="http://schemas.microsoft.com/office/drawing/2014/main" id="{738F9CDD-8B66-421F-A6CF-529744B0ED86}"/>
+                <a16:creationId xmlns:a16="http://schemas.microsoft.com/office/drawing/2014/main" id="{7E47CA90-ED40-4950-8277-78751164B326}"/>
               </a:ext>
             </a:extLst>
           </p:cNvPr>
@@ -8712,7 +7887,7 @@
           <p:cNvPr id="4" name="">
             <a:extLst xmlns:a="http://schemas.openxmlformats.org/drawingml/2006/main">
               <a:ext uri="{FF2B5EF4-FFF2-40B4-BE49-F238E27FC236}">
-                <a16:creationId xmlns:a16="http://schemas.microsoft.com/office/drawing/2014/main" id="{F51DB3B7-2788-469D-B235-9C8C55FF02AB}"/>
+                <a16:creationId xmlns:a16="http://schemas.microsoft.com/office/drawing/2014/main" id="{55BCAE30-5693-452A-A416-A88EB2BBC684}"/>
               </a:ext>
             </a:extLst>
           </p:cNvPr>
@@ -8780,7 +7955,7 @@
           <p:cNvPr id="5" name="">
             <a:extLst xmlns:a="http://schemas.openxmlformats.org/drawingml/2006/main">
               <a:ext uri="{FF2B5EF4-FFF2-40B4-BE49-F238E27FC236}">
-                <a16:creationId xmlns:a16="http://schemas.microsoft.com/office/drawing/2014/main" id="{E58A7C24-F914-4A26-817F-A0B26063C682}"/>
+                <a16:creationId xmlns:a16="http://schemas.microsoft.com/office/drawing/2014/main" id="{D6E1EE50-9784-4471-9B7D-21214CCCA662}"/>
               </a:ext>
             </a:extLst>
           </p:cNvPr>
@@ -8848,7 +8023,7 @@
           <p:cNvPr id="6" name="">
             <a:extLst xmlns:a="http://schemas.openxmlformats.org/drawingml/2006/main">
               <a:ext uri="{FF2B5EF4-FFF2-40B4-BE49-F238E27FC236}">
-                <a16:creationId xmlns:a16="http://schemas.microsoft.com/office/drawing/2014/main" id="{1D45C206-34D5-4D8E-A77D-32C41D4F9B3B}"/>
+                <a16:creationId xmlns:a16="http://schemas.microsoft.com/office/drawing/2014/main" id="{23B7C2C0-12E0-4906-98A5-D2755DBF7350}"/>
               </a:ext>
             </a:extLst>
           </p:cNvPr>
@@ -8916,7 +8091,7 @@
           <p:cNvPr id="7" name="">
             <a:extLst xmlns:a="http://schemas.openxmlformats.org/drawingml/2006/main">
               <a:ext uri="{FF2B5EF4-FFF2-40B4-BE49-F238E27FC236}">
-                <a16:creationId xmlns:a16="http://schemas.microsoft.com/office/drawing/2014/main" id="{EE35CD8F-25F0-44CA-9809-FC81679AA4F5}"/>
+                <a16:creationId xmlns:a16="http://schemas.microsoft.com/office/drawing/2014/main" id="{EE6F0B2E-0FA6-4F4D-8066-DB149A441CBA}"/>
               </a:ext>
             </a:extLst>
           </p:cNvPr>
@@ -8984,7 +8159,7 @@
           <p:cNvPr id="8" name="">
             <a:extLst xmlns:a="http://schemas.openxmlformats.org/drawingml/2006/main">
               <a:ext uri="{FF2B5EF4-FFF2-40B4-BE49-F238E27FC236}">
-                <a16:creationId xmlns:a16="http://schemas.microsoft.com/office/drawing/2014/main" id="{C0D3C98A-F440-4EEB-B3A5-7B82D1CC1E74}"/>
+                <a16:creationId xmlns:a16="http://schemas.microsoft.com/office/drawing/2014/main" id="{E93AC9BE-292C-4EE7-8D63-A38891BBCA76}"/>
               </a:ext>
             </a:extLst>
           </p:cNvPr>
@@ -9052,7 +8227,7 @@
           <p:cNvPr id="9" name="">
             <a:extLst xmlns:a="http://schemas.openxmlformats.org/drawingml/2006/main">
               <a:ext uri="{FF2B5EF4-FFF2-40B4-BE49-F238E27FC236}">
-                <a16:creationId xmlns:a16="http://schemas.microsoft.com/office/drawing/2014/main" id="{FBBD4AA2-CFC6-4241-9C37-E2247D01A59F}"/>
+                <a16:creationId xmlns:a16="http://schemas.microsoft.com/office/drawing/2014/main" id="{082DC61D-3EE4-41F1-A7B6-B966AC9970B6}"/>
               </a:ext>
             </a:extLst>
           </p:cNvPr>
@@ -9062,7 +8237,7 @@
           <p:nvPr/>
         </p:nvPicPr>
         <p:blipFill>
-          <a:blip xmlns:r="http://schemas.openxmlformats.org/officeDocument/2006/relationships" xmlns:a="http://schemas.openxmlformats.org/drawingml/2006/main" r:embed="R78d509a739164644"/>
+          <a:blip xmlns:r="http://schemas.openxmlformats.org/officeDocument/2006/relationships" xmlns:a="http://schemas.openxmlformats.org/drawingml/2006/main" r:embed="R5d4a048dc97f4179"/>
           <a:stretch xmlns:a="http://schemas.openxmlformats.org/drawingml/2006/main"/>
         </p:blipFill>
         <p:spPr>
@@ -9080,7 +8255,7 @@
           <p:cNvPr id="10" name="">
             <a:extLst xmlns:a="http://schemas.openxmlformats.org/drawingml/2006/main">
               <a:ext uri="{FF2B5EF4-FFF2-40B4-BE49-F238E27FC236}">
-                <a16:creationId xmlns:a16="http://schemas.microsoft.com/office/drawing/2014/main" id="{B96A5C54-A0CF-447F-99B7-F43F1D7B69D3}"/>
+                <a16:creationId xmlns:a16="http://schemas.microsoft.com/office/drawing/2014/main" id="{F8B9E43D-46D2-426E-BCE3-BF73563573BC}"/>
               </a:ext>
             </a:extLst>
           </p:cNvPr>
@@ -9148,7 +8323,7 @@
           <p:cNvPr id="11" name="">
             <a:extLst xmlns:a="http://schemas.openxmlformats.org/drawingml/2006/main">
               <a:ext uri="{FF2B5EF4-FFF2-40B4-BE49-F238E27FC236}">
-                <a16:creationId xmlns:a16="http://schemas.microsoft.com/office/drawing/2014/main" id="{3ADC01FD-BEA4-4537-97D0-598307F4CB90}"/>
+                <a16:creationId xmlns:a16="http://schemas.microsoft.com/office/drawing/2014/main" id="{2B023758-E83C-490B-B751-A77724DE7D3E}"/>
               </a:ext>
             </a:extLst>
           </p:cNvPr>
@@ -9216,7 +8391,7 @@
           <p:cNvPr id="12" name="">
             <a:extLst xmlns:a="http://schemas.openxmlformats.org/drawingml/2006/main">
               <a:ext uri="{FF2B5EF4-FFF2-40B4-BE49-F238E27FC236}">
-                <a16:creationId xmlns:a16="http://schemas.microsoft.com/office/drawing/2014/main" id="{74B6B796-B7E7-4C71-AB03-8F6145B0FCD1}"/>
+                <a16:creationId xmlns:a16="http://schemas.microsoft.com/office/drawing/2014/main" id="{0837B190-E5B9-4799-BBE9-8A3C338EEFE3}"/>
               </a:ext>
             </a:extLst>
           </p:cNvPr>
@@ -9284,7 +8459,7 @@
           <p:cNvPr id="13" name="">
             <a:extLst xmlns:a="http://schemas.openxmlformats.org/drawingml/2006/main">
               <a:ext uri="{FF2B5EF4-FFF2-40B4-BE49-F238E27FC236}">
-                <a16:creationId xmlns:a16="http://schemas.microsoft.com/office/drawing/2014/main" id="{81040C28-C012-4F6F-BA63-E70D4A98BD15}"/>
+                <a16:creationId xmlns:a16="http://schemas.microsoft.com/office/drawing/2014/main" id="{E7E0A851-AE81-4B5B-AF67-8F1C85E64439}"/>
               </a:ext>
             </a:extLst>
           </p:cNvPr>
@@ -9350,7 +8525,7 @@
     </p:spTree>
     <p:extLst>
       <p:ext uri="{BB962C8B-B14F-4D97-AF65-F5344CB8AC3E}">
-        <p14:creationId xmlns:p14="http://schemas.microsoft.com/office/powerpoint/2010/main" val="419368492"/>
+        <p14:creationId xmlns:p14="http://schemas.microsoft.com/office/powerpoint/2010/main" val="2072865134"/>
       </p:ext>
     </p:extLst>
   </p:cSld>
@@ -9381,7 +8556,7 @@
           <p:cNvPr id="27" name="">
             <a:extLst xmlns:a="http://schemas.openxmlformats.org/drawingml/2006/main">
               <a:ext uri="{FF2B5EF4-FFF2-40B4-BE49-F238E27FC236}">
-                <a16:creationId xmlns:a16="http://schemas.microsoft.com/office/drawing/2014/main" id="{A9F3087A-EBF5-42E9-9E42-0A55CD71A0BC}"/>
+                <a16:creationId xmlns:a16="http://schemas.microsoft.com/office/drawing/2014/main" id="{20DABB0F-1054-45FE-A386-ABC8943C0834}"/>
               </a:ext>
             </a:extLst>
           </p:cNvPr>
@@ -9449,7 +8624,7 @@
           <p:cNvPr id="2" name="">
             <a:extLst xmlns:a="http://schemas.openxmlformats.org/drawingml/2006/main">
               <a:ext uri="{FF2B5EF4-FFF2-40B4-BE49-F238E27FC236}">
-                <a16:creationId xmlns:a16="http://schemas.microsoft.com/office/drawing/2014/main" id="{46301F1F-963C-4CE6-A2AB-C4A62814BED0}"/>
+                <a16:creationId xmlns:a16="http://schemas.microsoft.com/office/drawing/2014/main" id="{E7807610-0E65-42A7-9E81-20B4FF953D40}"/>
               </a:ext>
             </a:extLst>
           </p:cNvPr>
@@ -9459,7 +8634,7 @@
           <p:nvPr/>
         </p:nvPicPr>
         <p:blipFill>
-          <a:blip xmlns:r="http://schemas.openxmlformats.org/officeDocument/2006/relationships" xmlns:a="http://schemas.openxmlformats.org/drawingml/2006/main" r:embed="Rbba9081c54554a87"/>
+          <a:blip xmlns:r="http://schemas.openxmlformats.org/officeDocument/2006/relationships" xmlns:a="http://schemas.openxmlformats.org/drawingml/2006/main" r:embed="R201f43f578034ad9"/>
           <a:stretch xmlns:a="http://schemas.openxmlformats.org/drawingml/2006/main"/>
         </p:blipFill>
         <p:spPr>
@@ -9477,7 +8652,7 @@
           <p:cNvPr id="3" name="">
             <a:extLst xmlns:a="http://schemas.openxmlformats.org/drawingml/2006/main">
               <a:ext uri="{FF2B5EF4-FFF2-40B4-BE49-F238E27FC236}">
-                <a16:creationId xmlns:a16="http://schemas.microsoft.com/office/drawing/2014/main" id="{045A961E-F221-4535-BC45-41002EA1E1CB}"/>
+                <a16:creationId xmlns:a16="http://schemas.microsoft.com/office/drawing/2014/main" id="{7B677DDC-589B-4034-A322-3B5E3B85C018}"/>
               </a:ext>
             </a:extLst>
           </p:cNvPr>
@@ -9507,7 +8682,7 @@
           <p:cNvPr id="4" name="">
             <a:extLst xmlns:a="http://schemas.openxmlformats.org/drawingml/2006/main">
               <a:ext uri="{FF2B5EF4-FFF2-40B4-BE49-F238E27FC236}">
-                <a16:creationId xmlns:a16="http://schemas.microsoft.com/office/drawing/2014/main" id="{C41B0539-B458-4A20-AFF0-8D10422DA087}"/>
+                <a16:creationId xmlns:a16="http://schemas.microsoft.com/office/drawing/2014/main" id="{D8A320B2-90C1-4B84-9C35-F4E391B70126}"/>
               </a:ext>
             </a:extLst>
           </p:cNvPr>
@@ -9575,7 +8750,7 @@
           <p:cNvPr id="5" name="">
             <a:extLst xmlns:a="http://schemas.openxmlformats.org/drawingml/2006/main">
               <a:ext uri="{FF2B5EF4-FFF2-40B4-BE49-F238E27FC236}">
-                <a16:creationId xmlns:a16="http://schemas.microsoft.com/office/drawing/2014/main" id="{7E3A240D-085A-4C5F-AA84-D67CAC23A35C}"/>
+                <a16:creationId xmlns:a16="http://schemas.microsoft.com/office/drawing/2014/main" id="{4640AA00-E6CB-47E0-BD77-14062B03B7C7}"/>
               </a:ext>
             </a:extLst>
           </p:cNvPr>
@@ -9643,7 +8818,7 @@
           <p:cNvPr id="6" name="">
             <a:extLst xmlns:a="http://schemas.openxmlformats.org/drawingml/2006/main">
               <a:ext uri="{FF2B5EF4-FFF2-40B4-BE49-F238E27FC236}">
-                <a16:creationId xmlns:a16="http://schemas.microsoft.com/office/drawing/2014/main" id="{E0C2E65A-7BA5-4576-8DC9-BA372DA66CE6}"/>
+                <a16:creationId xmlns:a16="http://schemas.microsoft.com/office/drawing/2014/main" id="{86CF7857-3E02-4FCB-89C0-FCF5E0F2F730}"/>
               </a:ext>
             </a:extLst>
           </p:cNvPr>
@@ -9711,7 +8886,7 @@
           <p:cNvPr id="7" name="">
             <a:extLst xmlns:a="http://schemas.openxmlformats.org/drawingml/2006/main">
               <a:ext uri="{FF2B5EF4-FFF2-40B4-BE49-F238E27FC236}">
-                <a16:creationId xmlns:a16="http://schemas.microsoft.com/office/drawing/2014/main" id="{E644C3B5-1827-464D-993D-30EED6A96D34}"/>
+                <a16:creationId xmlns:a16="http://schemas.microsoft.com/office/drawing/2014/main" id="{5604620F-CFE5-478D-8C6F-B3CD506D6805}"/>
               </a:ext>
             </a:extLst>
           </p:cNvPr>
@@ -9779,7 +8954,7 @@
           <p:cNvPr id="8" name="">
             <a:extLst xmlns:a="http://schemas.openxmlformats.org/drawingml/2006/main">
               <a:ext uri="{FF2B5EF4-FFF2-40B4-BE49-F238E27FC236}">
-                <a16:creationId xmlns:a16="http://schemas.microsoft.com/office/drawing/2014/main" id="{7CF20F5C-40B4-4F99-963C-2F1C36FDF99A}"/>
+                <a16:creationId xmlns:a16="http://schemas.microsoft.com/office/drawing/2014/main" id="{64F5D4A1-E721-416F-AD2E-2362F1783F71}"/>
               </a:ext>
             </a:extLst>
           </p:cNvPr>
@@ -9847,7 +9022,7 @@
           <p:cNvPr id="9" name="">
             <a:extLst xmlns:a="http://schemas.openxmlformats.org/drawingml/2006/main">
               <a:ext uri="{FF2B5EF4-FFF2-40B4-BE49-F238E27FC236}">
-                <a16:creationId xmlns:a16="http://schemas.microsoft.com/office/drawing/2014/main" id="{9910DA49-BC08-4C81-AC67-486706D2FB35}"/>
+                <a16:creationId xmlns:a16="http://schemas.microsoft.com/office/drawing/2014/main" id="{51B2AD54-830B-44D0-BD3E-21A1ED60F75D}"/>
               </a:ext>
             </a:extLst>
           </p:cNvPr>
@@ -9915,7 +9090,7 @@
           <p:cNvPr id="10" name="">
             <a:extLst xmlns:a="http://schemas.openxmlformats.org/drawingml/2006/main">
               <a:ext uri="{FF2B5EF4-FFF2-40B4-BE49-F238E27FC236}">
-                <a16:creationId xmlns:a16="http://schemas.microsoft.com/office/drawing/2014/main" id="{E96DD434-C599-4ECC-A6F0-EF89A7B6494D}"/>
+                <a16:creationId xmlns:a16="http://schemas.microsoft.com/office/drawing/2014/main" id="{00226C23-A2A2-4D43-BB1F-30B0EB799570}"/>
               </a:ext>
             </a:extLst>
           </p:cNvPr>
@@ -9983,7 +9158,7 @@
           <p:cNvPr id="11" name="">
             <a:extLst xmlns:a="http://schemas.openxmlformats.org/drawingml/2006/main">
               <a:ext uri="{FF2B5EF4-FFF2-40B4-BE49-F238E27FC236}">
-                <a16:creationId xmlns:a16="http://schemas.microsoft.com/office/drawing/2014/main" id="{52E34FC9-6886-43E5-A29F-389FFAA0EDAD}"/>
+                <a16:creationId xmlns:a16="http://schemas.microsoft.com/office/drawing/2014/main" id="{FA98C101-7FC2-427F-95D6-02B35DDEC59D}"/>
               </a:ext>
             </a:extLst>
           </p:cNvPr>
@@ -10051,7 +9226,7 @@
           <p:cNvPr id="12" name="">
             <a:extLst xmlns:a="http://schemas.openxmlformats.org/drawingml/2006/main">
               <a:ext uri="{FF2B5EF4-FFF2-40B4-BE49-F238E27FC236}">
-                <a16:creationId xmlns:a16="http://schemas.microsoft.com/office/drawing/2014/main" id="{62FDFA93-057A-4347-849F-4D0600AFDD23}"/>
+                <a16:creationId xmlns:a16="http://schemas.microsoft.com/office/drawing/2014/main" id="{276927AC-694D-4CBA-973C-F2A7CEF5B39E}"/>
               </a:ext>
             </a:extLst>
           </p:cNvPr>
@@ -10119,7 +9294,7 @@
           <p:cNvPr id="13" name="">
             <a:extLst xmlns:a="http://schemas.openxmlformats.org/drawingml/2006/main">
               <a:ext uri="{FF2B5EF4-FFF2-40B4-BE49-F238E27FC236}">
-                <a16:creationId xmlns:a16="http://schemas.microsoft.com/office/drawing/2014/main" id="{A7AC09BC-04B9-4559-8F5A-1ADDEE7BD031}"/>
+                <a16:creationId xmlns:a16="http://schemas.microsoft.com/office/drawing/2014/main" id="{07568F18-9FB0-48DE-A8C0-19DCF7E641EE}"/>
               </a:ext>
             </a:extLst>
           </p:cNvPr>
@@ -10149,7 +9324,7 @@
           <p:cNvPr id="14" name="">
             <a:extLst xmlns:a="http://schemas.openxmlformats.org/drawingml/2006/main">
               <a:ext uri="{FF2B5EF4-FFF2-40B4-BE49-F238E27FC236}">
-                <a16:creationId xmlns:a16="http://schemas.microsoft.com/office/drawing/2014/main" id="{0274EF11-E764-4DBC-A248-59782E0A5DFA}"/>
+                <a16:creationId xmlns:a16="http://schemas.microsoft.com/office/drawing/2014/main" id="{6CE17CEB-463E-4964-B13D-567D08F4B1D5}"/>
               </a:ext>
             </a:extLst>
           </p:cNvPr>
@@ -10217,7 +9392,7 @@
           <p:cNvPr id="15" name="">
             <a:extLst xmlns:a="http://schemas.openxmlformats.org/drawingml/2006/main">
               <a:ext uri="{FF2B5EF4-FFF2-40B4-BE49-F238E27FC236}">
-                <a16:creationId xmlns:a16="http://schemas.microsoft.com/office/drawing/2014/main" id="{D646AFB0-748F-4818-A5DA-0AC1C64A9B02}"/>
+                <a16:creationId xmlns:a16="http://schemas.microsoft.com/office/drawing/2014/main" id="{DB766E4B-FBC9-4F8E-A34C-6BF34CEE59F4}"/>
               </a:ext>
             </a:extLst>
           </p:cNvPr>
@@ -10285,7 +9460,7 @@
           <p:cNvPr id="16" name="">
             <a:extLst xmlns:a="http://schemas.openxmlformats.org/drawingml/2006/main">
               <a:ext uri="{FF2B5EF4-FFF2-40B4-BE49-F238E27FC236}">
-                <a16:creationId xmlns:a16="http://schemas.microsoft.com/office/drawing/2014/main" id="{4572127D-5224-4988-81EC-F464098C6B48}"/>
+                <a16:creationId xmlns:a16="http://schemas.microsoft.com/office/drawing/2014/main" id="{9D4572E4-C0D4-47B0-88BD-D6965D830833}"/>
               </a:ext>
             </a:extLst>
           </p:cNvPr>
@@ -10353,7 +9528,7 @@
           <p:cNvPr id="17" name="">
             <a:extLst xmlns:a="http://schemas.openxmlformats.org/drawingml/2006/main">
               <a:ext uri="{FF2B5EF4-FFF2-40B4-BE49-F238E27FC236}">
-                <a16:creationId xmlns:a16="http://schemas.microsoft.com/office/drawing/2014/main" id="{D8885DF0-7083-4683-8DDB-36E4D7831D42}"/>
+                <a16:creationId xmlns:a16="http://schemas.microsoft.com/office/drawing/2014/main" id="{B4D0E842-F06A-4300-96E9-999D4A3CD75F}"/>
               </a:ext>
             </a:extLst>
           </p:cNvPr>
@@ -10421,7 +9596,7 @@
           <p:cNvPr id="18" name="">
             <a:extLst xmlns:a="http://schemas.openxmlformats.org/drawingml/2006/main">
               <a:ext uri="{FF2B5EF4-FFF2-40B4-BE49-F238E27FC236}">
-                <a16:creationId xmlns:a16="http://schemas.microsoft.com/office/drawing/2014/main" id="{8E70D519-64A3-4420-8763-EC075D8C8742}"/>
+                <a16:creationId xmlns:a16="http://schemas.microsoft.com/office/drawing/2014/main" id="{78DBC677-5B2C-4C23-AEB1-64EEADB4C896}"/>
               </a:ext>
             </a:extLst>
           </p:cNvPr>
@@ -10489,7 +9664,7 @@
           <p:cNvPr id="19" name="">
             <a:extLst xmlns:a="http://schemas.openxmlformats.org/drawingml/2006/main">
               <a:ext uri="{FF2B5EF4-FFF2-40B4-BE49-F238E27FC236}">
-                <a16:creationId xmlns:a16="http://schemas.microsoft.com/office/drawing/2014/main" id="{8348EAC8-A711-45FA-8D95-F16FEA685E1E}"/>
+                <a16:creationId xmlns:a16="http://schemas.microsoft.com/office/drawing/2014/main" id="{DF7AA688-6CDE-481A-990A-3393D19B2F7C}"/>
               </a:ext>
             </a:extLst>
           </p:cNvPr>
@@ -10557,7 +9732,7 @@
           <p:cNvPr id="20" name="">
             <a:extLst xmlns:a="http://schemas.openxmlformats.org/drawingml/2006/main">
               <a:ext uri="{FF2B5EF4-FFF2-40B4-BE49-F238E27FC236}">
-                <a16:creationId xmlns:a16="http://schemas.microsoft.com/office/drawing/2014/main" id="{6F8C8ECC-E7D2-4AE6-BA76-773FDD53EC75}"/>
+                <a16:creationId xmlns:a16="http://schemas.microsoft.com/office/drawing/2014/main" id="{A2792210-B62C-4F9B-B391-3BD025C6AF3B}"/>
               </a:ext>
             </a:extLst>
           </p:cNvPr>
@@ -10625,7 +9800,7 @@
           <p:cNvPr id="21" name="">
             <a:extLst xmlns:a="http://schemas.openxmlformats.org/drawingml/2006/main">
               <a:ext uri="{FF2B5EF4-FFF2-40B4-BE49-F238E27FC236}">
-                <a16:creationId xmlns:a16="http://schemas.microsoft.com/office/drawing/2014/main" id="{9DFE3FAA-6786-46D1-A152-6DB09E894A80}"/>
+                <a16:creationId xmlns:a16="http://schemas.microsoft.com/office/drawing/2014/main" id="{955F5D27-90E1-4C2C-B669-77650748EEEE}"/>
               </a:ext>
             </a:extLst>
           </p:cNvPr>
@@ -10693,7 +9868,7 @@
           <p:cNvPr id="22" name="">
             <a:extLst xmlns:a="http://schemas.openxmlformats.org/drawingml/2006/main">
               <a:ext uri="{FF2B5EF4-FFF2-40B4-BE49-F238E27FC236}">
-                <a16:creationId xmlns:a16="http://schemas.microsoft.com/office/drawing/2014/main" id="{4EE96B60-A34A-4F28-9930-59938805EA7B}"/>
+                <a16:creationId xmlns:a16="http://schemas.microsoft.com/office/drawing/2014/main" id="{FF3286E7-AC0F-4E3E-9B5B-901E9D16E122}"/>
               </a:ext>
             </a:extLst>
           </p:cNvPr>
@@ -10761,7 +9936,7 @@
           <p:cNvPr id="23" name="">
             <a:extLst xmlns:a="http://schemas.openxmlformats.org/drawingml/2006/main">
               <a:ext uri="{FF2B5EF4-FFF2-40B4-BE49-F238E27FC236}">
-                <a16:creationId xmlns:a16="http://schemas.microsoft.com/office/drawing/2014/main" id="{C3C3EDF9-26AF-437C-99EF-CEDC79F07F8B}"/>
+                <a16:creationId xmlns:a16="http://schemas.microsoft.com/office/drawing/2014/main" id="{367D45AB-E605-4CF6-97AC-CFD785154BF7}"/>
               </a:ext>
             </a:extLst>
           </p:cNvPr>
@@ -10829,7 +10004,7 @@
           <p:cNvPr id="24" name="">
             <a:extLst xmlns:a="http://schemas.openxmlformats.org/drawingml/2006/main">
               <a:ext uri="{FF2B5EF4-FFF2-40B4-BE49-F238E27FC236}">
-                <a16:creationId xmlns:a16="http://schemas.microsoft.com/office/drawing/2014/main" id="{B2892F91-C133-4502-9E75-EF0A6426979F}"/>
+                <a16:creationId xmlns:a16="http://schemas.microsoft.com/office/drawing/2014/main" id="{13A55BF0-3D99-4B32-A17F-932300492597}"/>
               </a:ext>
             </a:extLst>
           </p:cNvPr>
@@ -10897,7 +10072,7 @@
           <p:cNvPr id="25" name="">
             <a:extLst xmlns:a="http://schemas.openxmlformats.org/drawingml/2006/main">
               <a:ext uri="{FF2B5EF4-FFF2-40B4-BE49-F238E27FC236}">
-                <a16:creationId xmlns:a16="http://schemas.microsoft.com/office/drawing/2014/main" id="{033DF740-109A-4633-887E-C589301DC08E}"/>
+                <a16:creationId xmlns:a16="http://schemas.microsoft.com/office/drawing/2014/main" id="{F8F2EACC-ABF7-405F-884A-2B6DEDBD83ED}"/>
               </a:ext>
             </a:extLst>
           </p:cNvPr>
@@ -10965,7 +10140,7 @@
           <p:cNvPr id="26" name="">
             <a:extLst xmlns:a="http://schemas.openxmlformats.org/drawingml/2006/main">
               <a:ext uri="{FF2B5EF4-FFF2-40B4-BE49-F238E27FC236}">
-                <a16:creationId xmlns:a16="http://schemas.microsoft.com/office/drawing/2014/main" id="{7B7FEAD0-9BB7-4087-9437-BC1B1BEEA4EE}"/>
+                <a16:creationId xmlns:a16="http://schemas.microsoft.com/office/drawing/2014/main" id="{38EA73F5-AD5F-44F7-968F-88A7FBB26ABA}"/>
               </a:ext>
             </a:extLst>
           </p:cNvPr>
@@ -11031,7 +10206,7 @@
     </p:spTree>
     <p:extLst>
       <p:ext uri="{BB962C8B-B14F-4D97-AF65-F5344CB8AC3E}">
-        <p14:creationId xmlns:p14="http://schemas.microsoft.com/office/powerpoint/2010/main" val="161805036"/>
+        <p14:creationId xmlns:p14="http://schemas.microsoft.com/office/powerpoint/2010/main" val="1286080387"/>
       </p:ext>
     </p:extLst>
   </p:cSld>
@@ -11062,7 +10237,7 @@
           <p:cNvPr id="7" name="">
             <a:extLst xmlns:a="http://schemas.openxmlformats.org/drawingml/2006/main">
               <a:ext uri="{FF2B5EF4-FFF2-40B4-BE49-F238E27FC236}">
-                <a16:creationId xmlns:a16="http://schemas.microsoft.com/office/drawing/2014/main" id="{871F1DC7-0711-4FD8-8222-E755C521248E}"/>
+                <a16:creationId xmlns:a16="http://schemas.microsoft.com/office/drawing/2014/main" id="{A2A7FABA-BADA-4509-B3DC-C94031DEDA99}"/>
               </a:ext>
             </a:extLst>
           </p:cNvPr>
@@ -11130,7 +10305,7 @@
           <p:cNvPr id="2" name="">
             <a:extLst xmlns:a="http://schemas.openxmlformats.org/drawingml/2006/main">
               <a:ext uri="{FF2B5EF4-FFF2-40B4-BE49-F238E27FC236}">
-                <a16:creationId xmlns:a16="http://schemas.microsoft.com/office/drawing/2014/main" id="{83E559EE-89AD-4476-8EE1-B2180305B0FA}"/>
+                <a16:creationId xmlns:a16="http://schemas.microsoft.com/office/drawing/2014/main" id="{2D62A64F-C44C-4E0B-B772-0A923CF86E94}"/>
               </a:ext>
             </a:extLst>
           </p:cNvPr>
@@ -11198,7 +10373,7 @@
           <p:cNvPr id="3" name="">
             <a:extLst xmlns:a="http://schemas.openxmlformats.org/drawingml/2006/main">
               <a:ext uri="{FF2B5EF4-FFF2-40B4-BE49-F238E27FC236}">
-                <a16:creationId xmlns:a16="http://schemas.microsoft.com/office/drawing/2014/main" id="{92E8407A-0E67-44DC-8298-5ABD475938D9}"/>
+                <a16:creationId xmlns:a16="http://schemas.microsoft.com/office/drawing/2014/main" id="{D2304E05-3E13-470B-A72B-F1A8C208A58E}"/>
               </a:ext>
             </a:extLst>
           </p:cNvPr>
@@ -11208,7 +10383,7 @@
           <p:nvPr/>
         </p:nvPicPr>
         <p:blipFill>
-          <a:blip xmlns:r="http://schemas.openxmlformats.org/officeDocument/2006/relationships" xmlns:a="http://schemas.openxmlformats.org/drawingml/2006/main" r:embed="R82245ccac42848b4"/>
+          <a:blip xmlns:r="http://schemas.openxmlformats.org/officeDocument/2006/relationships" xmlns:a="http://schemas.openxmlformats.org/drawingml/2006/main" r:embed="R4eb85cda61de4076"/>
           <a:stretch xmlns:a="http://schemas.openxmlformats.org/drawingml/2006/main"/>
         </p:blipFill>
         <p:spPr>
@@ -11226,7 +10401,7 @@
           <p:cNvPr id="4" name="">
             <a:extLst xmlns:a="http://schemas.openxmlformats.org/drawingml/2006/main">
               <a:ext uri="{FF2B5EF4-FFF2-40B4-BE49-F238E27FC236}">
-                <a16:creationId xmlns:a16="http://schemas.microsoft.com/office/drawing/2014/main" id="{442BCE9A-4E69-4BA2-98A7-705C5956A18A}"/>
+                <a16:creationId xmlns:a16="http://schemas.microsoft.com/office/drawing/2014/main" id="{6A52B39B-6D6F-4A8F-A449-E80F80D0D9FF}"/>
               </a:ext>
             </a:extLst>
           </p:cNvPr>
@@ -11256,7 +10431,7 @@
           <p:cNvPr id="5" name="">
             <a:extLst xmlns:a="http://schemas.openxmlformats.org/drawingml/2006/main">
               <a:ext uri="{FF2B5EF4-FFF2-40B4-BE49-F238E27FC236}">
-                <a16:creationId xmlns:a16="http://schemas.microsoft.com/office/drawing/2014/main" id="{118997D5-4AB6-4172-8A7B-1F37BCF98B64}"/>
+                <a16:creationId xmlns:a16="http://schemas.microsoft.com/office/drawing/2014/main" id="{5B52C28A-87EB-4A6F-A3B7-9F2263FDEAF2}"/>
               </a:ext>
             </a:extLst>
           </p:cNvPr>
@@ -11324,7 +10499,7 @@
           <p:cNvPr id="6" name="">
             <a:extLst xmlns:a="http://schemas.openxmlformats.org/drawingml/2006/main">
               <a:ext uri="{FF2B5EF4-FFF2-40B4-BE49-F238E27FC236}">
-                <a16:creationId xmlns:a16="http://schemas.microsoft.com/office/drawing/2014/main" id="{C9D78242-349D-45E8-BDF6-E930311E9A50}"/>
+                <a16:creationId xmlns:a16="http://schemas.microsoft.com/office/drawing/2014/main" id="{11F62AE3-8968-4D56-B397-3034DAA8FF39}"/>
               </a:ext>
             </a:extLst>
           </p:cNvPr>
@@ -11390,7 +10565,7 @@
     </p:spTree>
     <p:extLst>
       <p:ext uri="{BB962C8B-B14F-4D97-AF65-F5344CB8AC3E}">
-        <p14:creationId xmlns:p14="http://schemas.microsoft.com/office/powerpoint/2010/main" val="964826449"/>
+        <p14:creationId xmlns:p14="http://schemas.microsoft.com/office/powerpoint/2010/main" val="942930205"/>
       </p:ext>
     </p:extLst>
   </p:cSld>
@@ -11421,7 +10596,7 @@
           <p:cNvPr id="7" name="">
             <a:extLst xmlns:a="http://schemas.openxmlformats.org/drawingml/2006/main">
               <a:ext uri="{FF2B5EF4-FFF2-40B4-BE49-F238E27FC236}">
-                <a16:creationId xmlns:a16="http://schemas.microsoft.com/office/drawing/2014/main" id="{2C8D0742-AD12-4E59-A4AC-F5DCE09CCABD}"/>
+                <a16:creationId xmlns:a16="http://schemas.microsoft.com/office/drawing/2014/main" id="{D75C4A1C-9E17-46C3-90F0-FD14B2AD733B}"/>
               </a:ext>
             </a:extLst>
           </p:cNvPr>
@@ -11489,7 +10664,7 @@
           <p:cNvPr id="2" name="">
             <a:extLst xmlns:a="http://schemas.openxmlformats.org/drawingml/2006/main">
               <a:ext uri="{FF2B5EF4-FFF2-40B4-BE49-F238E27FC236}">
-                <a16:creationId xmlns:a16="http://schemas.microsoft.com/office/drawing/2014/main" id="{341A5E4A-0A7B-406A-B212-4994C49CAD29}"/>
+                <a16:creationId xmlns:a16="http://schemas.microsoft.com/office/drawing/2014/main" id="{A53AA946-BBC0-4830-931C-7B052E4784CD}"/>
               </a:ext>
             </a:extLst>
           </p:cNvPr>
@@ -11557,7 +10732,7 @@
           <p:cNvPr id="3" name="">
             <a:extLst xmlns:a="http://schemas.openxmlformats.org/drawingml/2006/main">
               <a:ext uri="{FF2B5EF4-FFF2-40B4-BE49-F238E27FC236}">
-                <a16:creationId xmlns:a16="http://schemas.microsoft.com/office/drawing/2014/main" id="{637E1D12-415C-49EA-8564-DE54F21B58FC}"/>
+                <a16:creationId xmlns:a16="http://schemas.microsoft.com/office/drawing/2014/main" id="{E78FA552-0D12-4D73-B734-F204F76DB6C3}"/>
               </a:ext>
             </a:extLst>
           </p:cNvPr>
@@ -11567,7 +10742,7 @@
           <p:nvPr/>
         </p:nvPicPr>
         <p:blipFill>
-          <a:blip xmlns:r="http://schemas.openxmlformats.org/officeDocument/2006/relationships" xmlns:a="http://schemas.openxmlformats.org/drawingml/2006/main" r:embed="R7361408f9a654f87"/>
+          <a:blip xmlns:r="http://schemas.openxmlformats.org/officeDocument/2006/relationships" xmlns:a="http://schemas.openxmlformats.org/drawingml/2006/main" r:embed="R681c88229aad4e76"/>
           <a:stretch xmlns:a="http://schemas.openxmlformats.org/drawingml/2006/main"/>
         </p:blipFill>
         <p:spPr>
@@ -11585,7 +10760,7 @@
           <p:cNvPr id="4" name="">
             <a:extLst xmlns:a="http://schemas.openxmlformats.org/drawingml/2006/main">
               <a:ext uri="{FF2B5EF4-FFF2-40B4-BE49-F238E27FC236}">
-                <a16:creationId xmlns:a16="http://schemas.microsoft.com/office/drawing/2014/main" id="{9C10178B-BE7E-49E8-A596-21D046CEBBFC}"/>
+                <a16:creationId xmlns:a16="http://schemas.microsoft.com/office/drawing/2014/main" id="{167E2704-524A-4519-86EA-B0AF2F4581B5}"/>
               </a:ext>
             </a:extLst>
           </p:cNvPr>
@@ -11615,7 +10790,7 @@
           <p:cNvPr id="5" name="">
             <a:extLst xmlns:a="http://schemas.openxmlformats.org/drawingml/2006/main">
               <a:ext uri="{FF2B5EF4-FFF2-40B4-BE49-F238E27FC236}">
-                <a16:creationId xmlns:a16="http://schemas.microsoft.com/office/drawing/2014/main" id="{417CB957-964D-40E8-9861-358265BEE2CB}"/>
+                <a16:creationId xmlns:a16="http://schemas.microsoft.com/office/drawing/2014/main" id="{139E30B7-0B8D-4E94-A8A8-C386EB70A4AF}"/>
               </a:ext>
             </a:extLst>
           </p:cNvPr>
@@ -11683,7 +10858,7 @@
           <p:cNvPr id="6" name="">
             <a:extLst xmlns:a="http://schemas.openxmlformats.org/drawingml/2006/main">
               <a:ext uri="{FF2B5EF4-FFF2-40B4-BE49-F238E27FC236}">
-                <a16:creationId xmlns:a16="http://schemas.microsoft.com/office/drawing/2014/main" id="{D6E9E2F8-813D-463B-971B-74CBBD6E0B5B}"/>
+                <a16:creationId xmlns:a16="http://schemas.microsoft.com/office/drawing/2014/main" id="{2957890D-AD50-4574-BE39-6F86CC98F092}"/>
               </a:ext>
             </a:extLst>
           </p:cNvPr>
@@ -11749,7 +10924,7 @@
     </p:spTree>
     <p:extLst>
       <p:ext uri="{BB962C8B-B14F-4D97-AF65-F5344CB8AC3E}">
-        <p14:creationId xmlns:p14="http://schemas.microsoft.com/office/powerpoint/2010/main" val="562962979"/>
+        <p14:creationId xmlns:p14="http://schemas.microsoft.com/office/powerpoint/2010/main" val="2103642898"/>
       </p:ext>
     </p:extLst>
   </p:cSld>
@@ -11780,7 +10955,7 @@
           <p:cNvPr id="7" name="">
             <a:extLst xmlns:a="http://schemas.openxmlformats.org/drawingml/2006/main">
               <a:ext uri="{FF2B5EF4-FFF2-40B4-BE49-F238E27FC236}">
-                <a16:creationId xmlns:a16="http://schemas.microsoft.com/office/drawing/2014/main" id="{BDCB4C41-E973-4B04-82A8-7E787910F437}"/>
+                <a16:creationId xmlns:a16="http://schemas.microsoft.com/office/drawing/2014/main" id="{611730C1-D488-419D-BB89-9C3D8A1E686E}"/>
               </a:ext>
             </a:extLst>
           </p:cNvPr>
@@ -11848,7 +11023,7 @@
           <p:cNvPr id="2" name="">
             <a:extLst xmlns:a="http://schemas.openxmlformats.org/drawingml/2006/main">
               <a:ext uri="{FF2B5EF4-FFF2-40B4-BE49-F238E27FC236}">
-                <a16:creationId xmlns:a16="http://schemas.microsoft.com/office/drawing/2014/main" id="{D6483EEA-D620-4C0E-973B-714571A4DAD8}"/>
+                <a16:creationId xmlns:a16="http://schemas.microsoft.com/office/drawing/2014/main" id="{55D586EF-8F22-46B6-AD28-CD61D1AF4F02}"/>
               </a:ext>
             </a:extLst>
           </p:cNvPr>
@@ -11916,7 +11091,7 @@
           <p:cNvPr id="3" name="">
             <a:extLst xmlns:a="http://schemas.openxmlformats.org/drawingml/2006/main">
               <a:ext uri="{FF2B5EF4-FFF2-40B4-BE49-F238E27FC236}">
-                <a16:creationId xmlns:a16="http://schemas.microsoft.com/office/drawing/2014/main" id="{8C621C21-92D0-4AF3-AEFE-32A680B94CFC}"/>
+                <a16:creationId xmlns:a16="http://schemas.microsoft.com/office/drawing/2014/main" id="{F4E5B5F0-DECA-4810-996D-7B8355020243}"/>
               </a:ext>
             </a:extLst>
           </p:cNvPr>
@@ -11926,7 +11101,7 @@
           <p:nvPr/>
         </p:nvPicPr>
         <p:blipFill>
-          <a:blip xmlns:r="http://schemas.openxmlformats.org/officeDocument/2006/relationships" xmlns:a="http://schemas.openxmlformats.org/drawingml/2006/main" r:embed="Rf84f5926fd584d12"/>
+          <a:blip xmlns:r="http://schemas.openxmlformats.org/officeDocument/2006/relationships" xmlns:a="http://schemas.openxmlformats.org/drawingml/2006/main" r:embed="Rc2441ce8996540fe"/>
           <a:stretch xmlns:a="http://schemas.openxmlformats.org/drawingml/2006/main"/>
         </p:blipFill>
         <p:spPr>
@@ -11944,7 +11119,7 @@
           <p:cNvPr id="4" name="">
             <a:extLst xmlns:a="http://schemas.openxmlformats.org/drawingml/2006/main">
               <a:ext uri="{FF2B5EF4-FFF2-40B4-BE49-F238E27FC236}">
-                <a16:creationId xmlns:a16="http://schemas.microsoft.com/office/drawing/2014/main" id="{1C51E2C9-1B2F-4EEE-A561-4CB0B476F295}"/>
+                <a16:creationId xmlns:a16="http://schemas.microsoft.com/office/drawing/2014/main" id="{CC8B25A8-2838-406F-9D0F-CB4CDE4DBDC0}"/>
               </a:ext>
             </a:extLst>
           </p:cNvPr>
@@ -11974,7 +11149,7 @@
           <p:cNvPr id="5" name="">
             <a:extLst xmlns:a="http://schemas.openxmlformats.org/drawingml/2006/main">
               <a:ext uri="{FF2B5EF4-FFF2-40B4-BE49-F238E27FC236}">
-                <a16:creationId xmlns:a16="http://schemas.microsoft.com/office/drawing/2014/main" id="{BB2D8F1C-3430-4124-9CC1-A373707B3FAC}"/>
+                <a16:creationId xmlns:a16="http://schemas.microsoft.com/office/drawing/2014/main" id="{40FC0994-0A2E-4271-9166-DB2150C232BD}"/>
               </a:ext>
             </a:extLst>
           </p:cNvPr>
@@ -12042,7 +11217,7 @@
           <p:cNvPr id="6" name="">
             <a:extLst xmlns:a="http://schemas.openxmlformats.org/drawingml/2006/main">
               <a:ext uri="{FF2B5EF4-FFF2-40B4-BE49-F238E27FC236}">
-                <a16:creationId xmlns:a16="http://schemas.microsoft.com/office/drawing/2014/main" id="{3419E3DB-FD25-4058-AA93-D83D152C2615}"/>
+                <a16:creationId xmlns:a16="http://schemas.microsoft.com/office/drawing/2014/main" id="{FAE08A5B-9A7E-47AE-B106-D7418383A6A5}"/>
               </a:ext>
             </a:extLst>
           </p:cNvPr>
@@ -12108,7 +11283,7 @@
     </p:spTree>
     <p:extLst>
       <p:ext uri="{BB962C8B-B14F-4D97-AF65-F5344CB8AC3E}">
-        <p14:creationId xmlns:p14="http://schemas.microsoft.com/office/powerpoint/2010/main" val="1230044322"/>
+        <p14:creationId xmlns:p14="http://schemas.microsoft.com/office/powerpoint/2010/main" val="723729628"/>
       </p:ext>
     </p:extLst>
   </p:cSld>
@@ -12139,7 +11314,7 @@
           <p:cNvPr id="7" name="">
             <a:extLst xmlns:a="http://schemas.openxmlformats.org/drawingml/2006/main">
               <a:ext uri="{FF2B5EF4-FFF2-40B4-BE49-F238E27FC236}">
-                <a16:creationId xmlns:a16="http://schemas.microsoft.com/office/drawing/2014/main" id="{013B8CFE-AFAC-4F29-BAE2-22E42E93959B}"/>
+                <a16:creationId xmlns:a16="http://schemas.microsoft.com/office/drawing/2014/main" id="{83F56CB7-4330-4A77-BBAD-DFDF8D43C7F1}"/>
               </a:ext>
             </a:extLst>
           </p:cNvPr>
@@ -12207,7 +11382,7 @@
           <p:cNvPr id="2" name="">
             <a:extLst xmlns:a="http://schemas.openxmlformats.org/drawingml/2006/main">
               <a:ext uri="{FF2B5EF4-FFF2-40B4-BE49-F238E27FC236}">
-                <a16:creationId xmlns:a16="http://schemas.microsoft.com/office/drawing/2014/main" id="{34B3691A-77AB-415A-AC36-367285055C12}"/>
+                <a16:creationId xmlns:a16="http://schemas.microsoft.com/office/drawing/2014/main" id="{313A6450-A489-4E8C-AE52-DEFB0648E46E}"/>
               </a:ext>
             </a:extLst>
           </p:cNvPr>
@@ -12275,7 +11450,7 @@
           <p:cNvPr id="3" name="">
             <a:extLst xmlns:a="http://schemas.openxmlformats.org/drawingml/2006/main">
               <a:ext uri="{FF2B5EF4-FFF2-40B4-BE49-F238E27FC236}">
-                <a16:creationId xmlns:a16="http://schemas.microsoft.com/office/drawing/2014/main" id="{0F80B87A-A315-446F-80F9-1AB3A3EC42C6}"/>
+                <a16:creationId xmlns:a16="http://schemas.microsoft.com/office/drawing/2014/main" id="{87723898-3173-4631-AFD6-50D50DCCB37A}"/>
               </a:ext>
             </a:extLst>
           </p:cNvPr>
@@ -12285,7 +11460,7 @@
           <p:nvPr/>
         </p:nvPicPr>
         <p:blipFill>
-          <a:blip xmlns:r="http://schemas.openxmlformats.org/officeDocument/2006/relationships" xmlns:a="http://schemas.openxmlformats.org/drawingml/2006/main" r:embed="Rf8b0d752d97c42c2"/>
+          <a:blip xmlns:r="http://schemas.openxmlformats.org/officeDocument/2006/relationships" xmlns:a="http://schemas.openxmlformats.org/drawingml/2006/main" r:embed="R6f09ccd82f074301"/>
           <a:stretch xmlns:a="http://schemas.openxmlformats.org/drawingml/2006/main"/>
         </p:blipFill>
         <p:spPr>
@@ -12303,7 +11478,7 @@
           <p:cNvPr id="4" name="">
             <a:extLst xmlns:a="http://schemas.openxmlformats.org/drawingml/2006/main">
               <a:ext uri="{FF2B5EF4-FFF2-40B4-BE49-F238E27FC236}">
-                <a16:creationId xmlns:a16="http://schemas.microsoft.com/office/drawing/2014/main" id="{F9E7166F-FAE2-491B-B7C1-9DB1CE2BE20E}"/>
+                <a16:creationId xmlns:a16="http://schemas.microsoft.com/office/drawing/2014/main" id="{18C57B05-4616-4758-A817-F62EE60FA349}"/>
               </a:ext>
             </a:extLst>
           </p:cNvPr>
@@ -12333,7 +11508,7 @@
           <p:cNvPr id="5" name="">
             <a:extLst xmlns:a="http://schemas.openxmlformats.org/drawingml/2006/main">
               <a:ext uri="{FF2B5EF4-FFF2-40B4-BE49-F238E27FC236}">
-                <a16:creationId xmlns:a16="http://schemas.microsoft.com/office/drawing/2014/main" id="{11736035-198A-4DD5-956C-AA1AA059B4C8}"/>
+                <a16:creationId xmlns:a16="http://schemas.microsoft.com/office/drawing/2014/main" id="{D22A738D-06A6-4BEB-A06E-2339628C525A}"/>
               </a:ext>
             </a:extLst>
           </p:cNvPr>
@@ -12401,7 +11576,7 @@
           <p:cNvPr id="6" name="">
             <a:extLst xmlns:a="http://schemas.openxmlformats.org/drawingml/2006/main">
               <a:ext uri="{FF2B5EF4-FFF2-40B4-BE49-F238E27FC236}">
-                <a16:creationId xmlns:a16="http://schemas.microsoft.com/office/drawing/2014/main" id="{52D42E1C-28E5-4F7B-83B9-9C67936654A5}"/>
+                <a16:creationId xmlns:a16="http://schemas.microsoft.com/office/drawing/2014/main" id="{3F77A491-E667-4B07-925D-87189FA0DA8F}"/>
               </a:ext>
             </a:extLst>
           </p:cNvPr>
@@ -12467,7 +11642,7 @@
     </p:spTree>
     <p:extLst>
       <p:ext uri="{BB962C8B-B14F-4D97-AF65-F5344CB8AC3E}">
-        <p14:creationId xmlns:p14="http://schemas.microsoft.com/office/powerpoint/2010/main" val="1796714502"/>
+        <p14:creationId xmlns:p14="http://schemas.microsoft.com/office/powerpoint/2010/main" val="91226534"/>
       </p:ext>
     </p:extLst>
   </p:cSld>
@@ -12498,7 +11673,7 @@
           <p:cNvPr id="7" name="">
             <a:extLst xmlns:a="http://schemas.openxmlformats.org/drawingml/2006/main">
               <a:ext uri="{FF2B5EF4-FFF2-40B4-BE49-F238E27FC236}">
-                <a16:creationId xmlns:a16="http://schemas.microsoft.com/office/drawing/2014/main" id="{30B38F70-727C-4F05-AA52-804227A197EA}"/>
+                <a16:creationId xmlns:a16="http://schemas.microsoft.com/office/drawing/2014/main" id="{1E2E4CFB-0326-4725-BA3D-582EAA1AADE6}"/>
               </a:ext>
             </a:extLst>
           </p:cNvPr>
@@ -12566,7 +11741,7 @@
           <p:cNvPr id="2" name="">
             <a:extLst xmlns:a="http://schemas.openxmlformats.org/drawingml/2006/main">
               <a:ext uri="{FF2B5EF4-FFF2-40B4-BE49-F238E27FC236}">
-                <a16:creationId xmlns:a16="http://schemas.microsoft.com/office/drawing/2014/main" id="{D14034BC-B393-42B6-BBC2-6CCF0240FBD9}"/>
+                <a16:creationId xmlns:a16="http://schemas.microsoft.com/office/drawing/2014/main" id="{C33039DC-7525-497D-B6D9-32439C1D764B}"/>
               </a:ext>
             </a:extLst>
           </p:cNvPr>
@@ -12634,7 +11809,7 @@
           <p:cNvPr id="3" name="">
             <a:extLst xmlns:a="http://schemas.openxmlformats.org/drawingml/2006/main">
               <a:ext uri="{FF2B5EF4-FFF2-40B4-BE49-F238E27FC236}">
-                <a16:creationId xmlns:a16="http://schemas.microsoft.com/office/drawing/2014/main" id="{8F244830-DA4D-4636-83B9-149D9F68E373}"/>
+                <a16:creationId xmlns:a16="http://schemas.microsoft.com/office/drawing/2014/main" id="{97D43DF2-FEAF-4348-83CF-4E7B5EEE23FE}"/>
               </a:ext>
             </a:extLst>
           </p:cNvPr>
@@ -12644,7 +11819,7 @@
           <p:nvPr/>
         </p:nvPicPr>
         <p:blipFill>
-          <a:blip xmlns:r="http://schemas.openxmlformats.org/officeDocument/2006/relationships" xmlns:a="http://schemas.openxmlformats.org/drawingml/2006/main" r:embed="R8e8f5a2ce3b44bf3"/>
+          <a:blip xmlns:r="http://schemas.openxmlformats.org/officeDocument/2006/relationships" xmlns:a="http://schemas.openxmlformats.org/drawingml/2006/main" r:embed="Rf608218fa8ea46d5"/>
           <a:stretch xmlns:a="http://schemas.openxmlformats.org/drawingml/2006/main"/>
         </p:blipFill>
         <p:spPr>
@@ -12662,7 +11837,7 @@
           <p:cNvPr id="4" name="">
             <a:extLst xmlns:a="http://schemas.openxmlformats.org/drawingml/2006/main">
               <a:ext uri="{FF2B5EF4-FFF2-40B4-BE49-F238E27FC236}">
-                <a16:creationId xmlns:a16="http://schemas.microsoft.com/office/drawing/2014/main" id="{A8992244-DA3A-4CF9-8EBD-BA2FDA08E421}"/>
+                <a16:creationId xmlns:a16="http://schemas.microsoft.com/office/drawing/2014/main" id="{C7728A1D-AB78-44A1-B5E2-397CD62F6A18}"/>
               </a:ext>
             </a:extLst>
           </p:cNvPr>
@@ -12692,7 +11867,7 @@
           <p:cNvPr id="5" name="">
             <a:extLst xmlns:a="http://schemas.openxmlformats.org/drawingml/2006/main">
               <a:ext uri="{FF2B5EF4-FFF2-40B4-BE49-F238E27FC236}">
-                <a16:creationId xmlns:a16="http://schemas.microsoft.com/office/drawing/2014/main" id="{AD26CD87-9580-4ABB-AAB2-8688D99C3A45}"/>
+                <a16:creationId xmlns:a16="http://schemas.microsoft.com/office/drawing/2014/main" id="{57855402-7162-457B-AB16-588A1758FA7D}"/>
               </a:ext>
             </a:extLst>
           </p:cNvPr>
@@ -12760,7 +11935,7 @@
           <p:cNvPr id="6" name="">
             <a:extLst xmlns:a="http://schemas.openxmlformats.org/drawingml/2006/main">
               <a:ext uri="{FF2B5EF4-FFF2-40B4-BE49-F238E27FC236}">
-                <a16:creationId xmlns:a16="http://schemas.microsoft.com/office/drawing/2014/main" id="{5CAB2392-F8FE-46B6-BF4C-00BE773AC863}"/>
+                <a16:creationId xmlns:a16="http://schemas.microsoft.com/office/drawing/2014/main" id="{4E78FFD5-22D6-453B-A108-3460DF919499}"/>
               </a:ext>
             </a:extLst>
           </p:cNvPr>
@@ -12826,7 +12001,7 @@
     </p:spTree>
     <p:extLst>
       <p:ext uri="{BB962C8B-B14F-4D97-AF65-F5344CB8AC3E}">
-        <p14:creationId xmlns:p14="http://schemas.microsoft.com/office/powerpoint/2010/main" val="1990357416"/>
+        <p14:creationId xmlns:p14="http://schemas.microsoft.com/office/powerpoint/2010/main" val="1175891919"/>
       </p:ext>
     </p:extLst>
   </p:cSld>
